--- a/outputs/final_project/NHTS_Travel_Behavior_Template_Presentation.pptx
+++ b/outputs/final_project/NHTS_Travel_Behavior_Template_Presentation.pptx
@@ -6287,7 +6287,7 @@
                 </a:solidFill>
                 <a:latin typeface="Microsoft YaHei"/>
               </a:rPr>
-              <a:t>分析图2：从平均误差走向 household-level 可解释准确率</a:t>
+              <a:t>误差分布看系统性高估，容忍曲线看 household-level 可用性</a:t>
             </a:r>
           </a:p>
         </p:txBody>
@@ -6503,7 +6503,7 @@
         <p:spPr>
           <a:xfrm>
             <a:off x="594360" y="1097280"/>
-            <a:ext cx="5349240" cy="3305411"/>
+            <a:ext cx="5349240" cy="3420345"/>
           </a:xfrm>
           <a:prstGeom prst="rect">
             <a:avLst/>
@@ -6527,7 +6527,7 @@
         <p:spPr>
           <a:xfrm>
             <a:off x="6263640" y="1097280"/>
-            <a:ext cx="5166360" cy="3331296"/>
+            <a:ext cx="5166360" cy="3366270"/>
           </a:xfrm>
           <a:prstGeom prst="rect">
             <a:avLst/>
@@ -6659,7 +6659,7 @@
                 </a:solidFill>
                 <a:latin typeface="Microsoft YaHei"/>
               </a:rPr>
-              <a:t>左图说明历史模型的误差分布明显向正方向偏移；右图说明 hybrid 方法在不同容忍阈值下都有更高的家庭覆盖率。</a:t>
+              <a:t>历史模型误差分布整体偏正，说明它系统性高估 2022 出行；事件修正后误差更集中，容忍阈值内覆盖率更高。</a:t>
             </a:r>
           </a:p>
         </p:txBody>
@@ -6701,7 +6701,7 @@
                 </a:solidFill>
                 <a:latin typeface="Microsoft YaHei"/>
               </a:rPr>
-              <a:t>The distributional view explains why weighted MAE improves, while the tolerance curve translates the result into household-level prediction usability.</a:t>
+              <a:t>The historical model overpredicts many households; event correction shifts errors closer to zero and improves tolerance-level coverage.</a:t>
             </a:r>
           </a:p>
         </p:txBody>
@@ -6938,7 +6938,7 @@
                 </a:solidFill>
                 <a:latin typeface="Microsoft YaHei"/>
               </a:rPr>
-              <a:t>分析图3：LLM 先验是否和疫情机制一致</a:t>
+              <a:t>pressure 分层和先验相关性检验事件机制是否合理</a:t>
             </a:r>
           </a:p>
         </p:txBody>
@@ -7178,7 +7178,7 @@
         <p:spPr>
           <a:xfrm>
             <a:off x="6400800" y="1033271"/>
-            <a:ext cx="4526280" cy="3992775"/>
+            <a:ext cx="4526280" cy="4012902"/>
           </a:xfrm>
           <a:prstGeom prst="rect">
             <a:avLst/>
@@ -7310,7 +7310,7 @@
                 </a:solidFill>
                 <a:latin typeface="Microsoft YaHei"/>
               </a:rPr>
-              <a:t>这页要说明：LLM event pressure 不是装饰变量。分层结果和相关结构说明，它和远程办公、公共交通规避等疫情机制有一致关系。</a:t>
+              <a:t>LLM pressure 与疫情机制相符：高 pressure 组需要更强出行折减，remote work、transit avoidance 等先验之间也呈现可解释相关。</a:t>
             </a:r>
           </a:p>
         </p:txBody>
@@ -7352,7 +7352,7 @@
                 </a:solidFill>
                 <a:latin typeface="Microsoft YaHei"/>
               </a:rPr>
-              <a:t>Pressure-stratified gains and prior correlations show that the LLM-derived variables follow interpretable COVID-related mobility mechanisms.</a:t>
+              <a:t>The LLM priors behave like event variables, with pressure strata and prior correlations matching COVID-era mobility mechanisms.</a:t>
             </a:r>
           </a:p>
         </p:txBody>
@@ -7589,7 +7589,7 @@
                 </a:solidFill>
                 <a:latin typeface="Microsoft YaHei"/>
               </a:rPr>
-              <a:t>主动说明结果经不经得起对照实验</a:t>
+              <a:t>随机置换检验 LLM pressure 是否包含真实排序信息</a:t>
             </a:r>
           </a:p>
         </p:txBody>
@@ -7937,7 +7937,7 @@
                 </a:solidFill>
                 <a:latin typeface="Microsoft YaHei"/>
               </a:rPr>
-              <a:t>检验结论：真实 LLM pressure 优于 500 次随机置换；但 global pressure 也很强，所以贡献应讲成疫情事件修正。</a:t>
+              <a:t>真实 LLM pressure 的误差低于 500 次随机分配；同时 global pressure 也很强，说明主贡献是疫情事件层面的修正，cohort 排序是增量信息。</a:t>
             </a:r>
           </a:p>
         </p:txBody>
@@ -7979,7 +7979,7 @@
                 </a:solidFill>
                 <a:latin typeface="Microsoft YaHei"/>
               </a:rPr>
-              <a:t>The real cohort pressure beats permutation controls, but global downscaling explains much of the gain; the method is event-aware correction.</a:t>
+              <a:t>Real LLM pressure beats random assignment, while the strong global baseline shows that the main signal is event-level correction.</a:t>
             </a:r>
           </a:p>
         </p:txBody>
@@ -9082,7 +9082,7 @@
                 </a:solidFill>
                 <a:latin typeface="Microsoft YaHei"/>
               </a:rPr>
-              <a:t>分析图4：哪些家庭群体从事件修正中获益更多</a:t>
+              <a:t>比较不同家庭群体中的 MAE 改善</a:t>
             </a:r>
           </a:p>
         </p:txBody>
@@ -9430,7 +9430,7 @@
                 </a:solidFill>
                 <a:latin typeface="Microsoft YaHei"/>
               </a:rPr>
-              <a:t>这张图回答一个实际问题：提升是不是只来自总体均值？分组结果显示，不同家庭群体中也能看到改进。</a:t>
+              <a:t>分组结果显示，改进不只来自总体均值；多个家庭群体的 MAE 都低于历史 XGBoost，但这里仍是诊断证据，不作因果解释。</a:t>
             </a:r>
           </a:p>
         </p:txBody>
@@ -9472,7 +9472,7 @@
                 </a:solidFill>
                 <a:latin typeface="Microsoft YaHei"/>
               </a:rPr>
-              <a:t>The subgroup check tests whether the improvement only comes from the aggregate mean or also appears across household segments.</a:t>
+              <a:t>Subgroup results show that gains are not only an aggregate artifact; they remain diagnostic rather than causal evidence.</a:t>
             </a:r>
           </a:p>
         </p:txBody>
@@ -13142,7 +13142,7 @@
                 </a:solidFill>
                 <a:latin typeface="Microsoft YaHei"/>
               </a:rPr>
-              <a:t>事件方向有用，但需要和 household baseline 结合</a:t>
+              <a:t>LLM 提供事件压力，XGBoost 提供家庭基线</a:t>
             </a:r>
           </a:p>
         </p:txBody>
@@ -13509,7 +13509,7 @@
                 </a:solidFill>
                 <a:latin typeface="Microsoft YaHei"/>
               </a:rPr>
-              <a:t>low event semantics</a:t>
+              <a:t>事件信息弱</a:t>
             </a:r>
           </a:p>
         </p:txBody>
@@ -13551,7 +13551,7 @@
                 </a:solidFill>
                 <a:latin typeface="Microsoft YaHei"/>
               </a:rPr>
-              <a:t>high event semantics</a:t>
+              <a:t>事件信息强</a:t>
             </a:r>
           </a:p>
         </p:txBody>
@@ -13593,7 +13593,7 @@
                 </a:solidFill>
                 <a:latin typeface="Microsoft YaHei"/>
               </a:rPr>
-              <a:t>weak household grounding</a:t>
+              <a:t>家庭基线弱</a:t>
             </a:r>
           </a:p>
         </p:txBody>
@@ -13635,7 +13635,7 @@
                 </a:solidFill>
                 <a:latin typeface="Microsoft YaHei"/>
               </a:rPr>
-              <a:t>strong household grounding</a:t>
+              <a:t>家庭基线强</a:t>
             </a:r>
           </a:p>
         </p:txBody>
@@ -14320,7 +14320,7 @@
                 </a:solidFill>
                 <a:latin typeface="Microsoft YaHei"/>
               </a:rPr>
-              <a:t>LLM 不直接预测出行次数，而是把 2022 疫情冲击转成可用于修正模型的事件先验。</a:t>
+              <a:t>LLM 输出的是 s_event，不是 y；最终预测 = 历史 household baseline × 事件折减系数。</a:t>
             </a:r>
           </a:p>
         </p:txBody>
@@ -16709,7 +16709,7 @@
         <p:spPr>
           <a:xfrm>
             <a:off x="6629400" y="1225296"/>
-            <a:ext cx="4389120" cy="2722296"/>
+            <a:ext cx="4389120" cy="2792054"/>
           </a:xfrm>
           <a:prstGeom prst="rect">
             <a:avLst/>
@@ -16841,7 +16841,7 @@
                 </a:solidFill>
                 <a:latin typeface="Microsoft YaHei"/>
               </a:rPr>
-              <a:t>方式结构的总体提升不如出行次数大，但 transit component 明显改善，正好对应疫情期间公共交通规避这个机制。</a:t>
+              <a:t>方式结构不是主要增益来源，但 transit share 明显改善；这与疫情期间公共交通规避机制一致。</a:t>
             </a:r>
           </a:p>
         </p:txBody>
@@ -16883,7 +16883,7 @@
                 </a:solidFill>
                 <a:latin typeface="Microsoft YaHei"/>
               </a:rPr>
-              <a:t>Mode composition is a weaker but useful extension: transit-share improvement supports the semantic validity of the COVID event prior.</a:t>
+              <a:t>Mode composition gains are modest overall, but transit-share error improves in the direction suggested by pandemic transit avoidance.</a:t>
             </a:r>
           </a:p>
         </p:txBody>
@@ -18689,7 +18689,7 @@
                 </a:solidFill>
                 <a:latin typeface="Microsoft YaHei"/>
               </a:rPr>
-              <a:t>Re-runnable</a:t>
+              <a:t>Rule</a:t>
             </a:r>
           </a:p>
         </p:txBody>
@@ -18731,7 +18731,7 @@
                 </a:solidFill>
                 <a:latin typeface="Microsoft YaHei"/>
               </a:rPr>
-              <a:t>Yes</a:t>
+              <a:t>fixed</a:t>
             </a:r>
           </a:p>
         </p:txBody>
@@ -18773,7 +18773,7 @@
                 </a:solidFill>
                 <a:latin typeface="Microsoft YaHei"/>
               </a:rPr>
-              <a:t>fixed adapter rule</a:t>
+              <a:t>re-runnable adapter</a:t>
             </a:r>
           </a:p>
         </p:txBody>
@@ -19834,7 +19834,7 @@
                 </a:solidFill>
                 <a:latin typeface="Microsoft YaHei"/>
               </a:rPr>
-              <a:t>汇报主线 / Storyline</a:t>
+              <a:t>研究逻辑链 / Research Logic</a:t>
             </a:r>
           </a:p>
         </p:txBody>
@@ -19876,7 +19876,7 @@
                 </a:solidFill>
                 <a:latin typeface="Microsoft YaHei"/>
               </a:rPr>
-              <a:t>把大作业讲成一个完整的研究设计</a:t>
+              <a:t>从问题定义到方法优势的完整闭环</a:t>
             </a:r>
           </a:p>
         </p:txBody>
@@ -20084,7 +20084,7 @@
         <p:spPr>
           <a:xfrm>
             <a:off x="658368" y="1078992"/>
-            <a:ext cx="3017520" cy="393192"/>
+            <a:ext cx="1508760" cy="429768"/>
           </a:xfrm>
           <a:prstGeom prst="rect">
             <a:avLst/>
@@ -20127,7 +20127,7 @@
         <p:spPr>
           <a:xfrm>
             <a:off x="694944" y="1115568"/>
-            <a:ext cx="2944368" cy="320040"/>
+            <a:ext cx="1435607" cy="356615"/>
           </a:xfrm>
           <a:prstGeom prst="rect">
             <a:avLst/>
@@ -20141,7 +20141,7 @@
           <a:lstStyle/>
           <a:p>
             <a:pPr algn="ctr">
-              <a:defRPr sz="819" b="1">
+              <a:defRPr sz="775" b="1">
                 <a:solidFill>
                   <a:srgbClr val="FFFFFF"/>
                 </a:solidFill>
@@ -20149,13 +20149,13 @@
               </a:defRPr>
             </a:pPr>
             <a:r>
-              <a:rPr sz="819" b="1">
+              <a:rPr sz="775" b="1">
                 <a:solidFill>
                   <a:srgbClr val="FFFFFF"/>
                 </a:solidFill>
                 <a:latin typeface="Microsoft YaHei"/>
               </a:rPr>
-              <a:t>我们做了什么</a:t>
+              <a:t>环节</a:t>
             </a:r>
           </a:p>
         </p:txBody>
@@ -20168,8 +20168,8 @@
         </p:nvSpPr>
         <p:spPr>
           <a:xfrm>
-            <a:off x="3675887" y="1078992"/>
-            <a:ext cx="6858000" cy="393192"/>
+            <a:off x="2167128" y="1078992"/>
+            <a:ext cx="4800600" cy="429768"/>
           </a:xfrm>
           <a:prstGeom prst="rect">
             <a:avLst/>
@@ -20211,8 +20211,8 @@
         </p:nvSpPr>
         <p:spPr>
           <a:xfrm>
-            <a:off x="3712463" y="1115568"/>
-            <a:ext cx="6784848" cy="320040"/>
+            <a:off x="2203704" y="1115568"/>
+            <a:ext cx="4727448" cy="356615"/>
           </a:xfrm>
           <a:prstGeom prst="rect">
             <a:avLst/>
@@ -20226,7 +20226,7 @@
           <a:lstStyle/>
           <a:p>
             <a:pPr algn="ctr">
-              <a:defRPr sz="819" b="1">
+              <a:defRPr sz="775" b="1">
                 <a:solidFill>
                   <a:srgbClr val="FFFFFF"/>
                 </a:solidFill>
@@ -20234,13 +20234,13 @@
               </a:defRPr>
             </a:pPr>
             <a:r>
-              <a:rPr sz="819" b="1">
+              <a:rPr sz="775" b="1">
                 <a:solidFill>
                   <a:srgbClr val="FFFFFF"/>
                 </a:solidFill>
                 <a:latin typeface="Microsoft YaHei"/>
               </a:rPr>
-              <a:t>为什么有意义</a:t>
+              <a:t>怎么做</a:t>
             </a:r>
           </a:p>
         </p:txBody>
@@ -20253,8 +20253,93 @@
         </p:nvSpPr>
         <p:spPr>
           <a:xfrm>
-            <a:off x="658368" y="1472184"/>
-            <a:ext cx="3017520" cy="393192"/>
+            <a:off x="6967728" y="1078992"/>
+            <a:ext cx="3657600" cy="429768"/>
+          </a:xfrm>
+          <a:prstGeom prst="rect">
+            <a:avLst/>
+          </a:prstGeom>
+          <a:solidFill>
+            <a:srgbClr val="00796B"/>
+          </a:solidFill>
+          <a:ln>
+            <a:noFill/>
+          </a:ln>
+        </p:spPr>
+        <p:style>
+          <a:lnRef idx="1">
+            <a:schemeClr val="accent1"/>
+          </a:lnRef>
+          <a:fillRef idx="3">
+            <a:schemeClr val="accent1"/>
+          </a:fillRef>
+          <a:effectRef idx="2">
+            <a:schemeClr val="accent1"/>
+          </a:effectRef>
+          <a:fontRef idx="minor">
+            <a:schemeClr val="lt1"/>
+          </a:fontRef>
+        </p:style>
+        <p:txBody>
+          <a:bodyPr rtlCol="0" anchor="ctr"/>
+          <a:lstStyle/>
+          <a:p>
+            <a:pPr algn="ctr"/>
+          </a:p>
+        </p:txBody>
+      </p:sp>
+      <p:sp>
+        <p:nvSpPr>
+          <p:cNvPr id="17" name="TextBox 16"/>
+          <p:cNvSpPr txBox="1"/>
+          <p:nvPr/>
+        </p:nvSpPr>
+        <p:spPr>
+          <a:xfrm>
+            <a:off x="7004304" y="1115568"/>
+            <a:ext cx="3584448" cy="356615"/>
+          </a:xfrm>
+          <a:prstGeom prst="rect">
+            <a:avLst/>
+          </a:prstGeom>
+          <a:noFill/>
+        </p:spPr>
+        <p:txBody>
+          <a:bodyPr wrap="square" lIns="27432" rIns="27432" tIns="9144" bIns="9144" anchor="ctr">
+            <a:spAutoFit/>
+          </a:bodyPr>
+          <a:lstStyle/>
+          <a:p>
+            <a:pPr algn="ctr">
+              <a:defRPr sz="775" b="1">
+                <a:solidFill>
+                  <a:srgbClr val="FFFFFF"/>
+                </a:solidFill>
+                <a:latin typeface="Microsoft YaHei"/>
+              </a:defRPr>
+            </a:pPr>
+            <a:r>
+              <a:rPr sz="775" b="1">
+                <a:solidFill>
+                  <a:srgbClr val="FFFFFF"/>
+                </a:solidFill>
+                <a:latin typeface="Microsoft YaHei"/>
+              </a:rPr>
+              <a:t>证据 / 结果</a:t>
+            </a:r>
+          </a:p>
+        </p:txBody>
+      </p:sp>
+      <p:sp>
+        <p:nvSpPr>
+          <p:cNvPr id="18" name="Rectangle 17"/>
+          <p:cNvSpPr/>
+          <p:nvPr/>
+        </p:nvSpPr>
+        <p:spPr>
+          <a:xfrm>
+            <a:off x="658368" y="1508760"/>
+            <a:ext cx="1508760" cy="429768"/>
           </a:xfrm>
           <a:prstGeom prst="rect">
             <a:avLst/>
@@ -20292,14 +20377,14 @@
       </p:sp>
       <p:sp>
         <p:nvSpPr>
-          <p:cNvPr id="17" name="TextBox 16"/>
-          <p:cNvSpPr txBox="1"/>
-          <p:nvPr/>
-        </p:nvSpPr>
-        <p:spPr>
-          <a:xfrm>
-            <a:off x="704088" y="1504187"/>
-            <a:ext cx="2926079" cy="329184"/>
+          <p:cNvPr id="19" name="TextBox 18"/>
+          <p:cNvSpPr txBox="1"/>
+          <p:nvPr/>
+        </p:nvSpPr>
+        <p:spPr>
+          <a:xfrm>
+            <a:off x="704088" y="1540763"/>
+            <a:ext cx="1417319" cy="365759"/>
           </a:xfrm>
           <a:prstGeom prst="rect">
             <a:avLst/>
@@ -20313,7 +20398,7 @@
           <a:lstStyle/>
           <a:p>
             <a:pPr algn="l">
-              <a:defRPr sz="819" b="1">
+              <a:defRPr sz="775" b="1">
                 <a:solidFill>
                   <a:srgbClr val="0F172A"/>
                 </a:solidFill>
@@ -20321,27 +20406,27 @@
               </a:defRPr>
             </a:pPr>
             <a:r>
-              <a:rPr sz="819" b="1">
+              <a:rPr sz="775" b="1">
                 <a:solidFill>
                   <a:srgbClr val="0F172A"/>
                 </a:solidFill>
                 <a:latin typeface="Microsoft YaHei"/>
               </a:rPr>
-              <a:t>把 2022 定义成疫情后预测问题</a:t>
-            </a:r>
-          </a:p>
-        </p:txBody>
-      </p:sp>
-      <p:sp>
-        <p:nvSpPr>
-          <p:cNvPr id="18" name="Rectangle 17"/>
+              <a:t>问题定义</a:t>
+            </a:r>
+          </a:p>
+        </p:txBody>
+      </p:sp>
+      <p:sp>
+        <p:nvSpPr>
+          <p:cNvPr id="20" name="Rectangle 19"/>
           <p:cNvSpPr/>
           <p:nvPr/>
         </p:nvSpPr>
         <p:spPr>
           <a:xfrm>
-            <a:off x="3675887" y="1472184"/>
-            <a:ext cx="6858000" cy="393192"/>
+            <a:off x="2167128" y="1508760"/>
+            <a:ext cx="4800600" cy="429768"/>
           </a:xfrm>
           <a:prstGeom prst="rect">
             <a:avLst/>
@@ -20379,14 +20464,14 @@
       </p:sp>
       <p:sp>
         <p:nvSpPr>
-          <p:cNvPr id="19" name="TextBox 18"/>
-          <p:cNvSpPr txBox="1"/>
-          <p:nvPr/>
-        </p:nvSpPr>
-        <p:spPr>
-          <a:xfrm>
-            <a:off x="3721607" y="1504187"/>
-            <a:ext cx="6766560" cy="329184"/>
+          <p:cNvPr id="21" name="TextBox 20"/>
+          <p:cNvSpPr txBox="1"/>
+          <p:nvPr/>
+        </p:nvSpPr>
+        <p:spPr>
+          <a:xfrm>
+            <a:off x="2212848" y="1540763"/>
+            <a:ext cx="4709160" cy="365759"/>
           </a:xfrm>
           <a:prstGeom prst="rect">
             <a:avLst/>
@@ -20400,7 +20485,7 @@
           <a:lstStyle/>
           <a:p>
             <a:pPr algn="l">
-              <a:defRPr sz="819" b="0">
+              <a:defRPr sz="775" b="0">
                 <a:solidFill>
                   <a:srgbClr val="0F172A"/>
                 </a:solidFill>
@@ -20408,27 +20493,114 @@
               </a:defRPr>
             </a:pPr>
             <a:r>
-              <a:rPr sz="819" b="0">
+              <a:rPr sz="775" b="0">
                 <a:solidFill>
                   <a:srgbClr val="0F172A"/>
                 </a:solidFill>
                 <a:latin typeface="Microsoft YaHei"/>
               </a:rPr>
-              <a:t>不是普通跨年预测，而是事件冲击下的出行恢复</a:t>
-            </a:r>
-          </a:p>
-        </p:txBody>
-      </p:sp>
-      <p:sp>
-        <p:nvSpPr>
-          <p:cNvPr id="20" name="Rectangle 19"/>
+              <a:t>2022 是疫情后恢复期，不是平滑跨年预测</a:t>
+            </a:r>
+          </a:p>
+        </p:txBody>
+      </p:sp>
+      <p:sp>
+        <p:nvSpPr>
+          <p:cNvPr id="22" name="Rectangle 21"/>
           <p:cNvSpPr/>
           <p:nvPr/>
         </p:nvSpPr>
         <p:spPr>
           <a:xfrm>
-            <a:off x="658368" y="1865376"/>
-            <a:ext cx="3017520" cy="393192"/>
+            <a:off x="6967728" y="1508760"/>
+            <a:ext cx="3657600" cy="429768"/>
+          </a:xfrm>
+          <a:prstGeom prst="rect">
+            <a:avLst/>
+          </a:prstGeom>
+          <a:solidFill>
+            <a:srgbClr val="F8FAFC"/>
+          </a:solidFill>
+          <a:ln w="9525">
+            <a:solidFill>
+              <a:srgbClr val="CBD5E1"/>
+            </a:solidFill>
+          </a:ln>
+        </p:spPr>
+        <p:style>
+          <a:lnRef idx="1">
+            <a:schemeClr val="accent1"/>
+          </a:lnRef>
+          <a:fillRef idx="3">
+            <a:schemeClr val="accent1"/>
+          </a:fillRef>
+          <a:effectRef idx="2">
+            <a:schemeClr val="accent1"/>
+          </a:effectRef>
+          <a:fontRef idx="minor">
+            <a:schemeClr val="lt1"/>
+          </a:fontRef>
+        </p:style>
+        <p:txBody>
+          <a:bodyPr rtlCol="0" anchor="ctr"/>
+          <a:lstStyle/>
+          <a:p>
+            <a:pPr algn="ctr"/>
+          </a:p>
+        </p:txBody>
+      </p:sp>
+      <p:sp>
+        <p:nvSpPr>
+          <p:cNvPr id="23" name="TextBox 22"/>
+          <p:cNvSpPr txBox="1"/>
+          <p:nvPr/>
+        </p:nvSpPr>
+        <p:spPr>
+          <a:xfrm>
+            <a:off x="7013448" y="1540763"/>
+            <a:ext cx="3566160" cy="365759"/>
+          </a:xfrm>
+          <a:prstGeom prst="rect">
+            <a:avLst/>
+          </a:prstGeom>
+          <a:noFill/>
+        </p:spPr>
+        <p:txBody>
+          <a:bodyPr wrap="square" lIns="27432" rIns="27432" tIns="9144" bIns="9144" anchor="ctr">
+            <a:spAutoFit/>
+          </a:bodyPr>
+          <a:lstStyle/>
+          <a:p>
+            <a:pPr algn="l">
+              <a:defRPr sz="775" b="0">
+                <a:solidFill>
+                  <a:srgbClr val="0F172A"/>
+                </a:solidFill>
+                <a:latin typeface="Microsoft YaHei"/>
+              </a:defRPr>
+            </a:pPr>
+            <a:r>
+              <a:rPr sz="775" b="0">
+                <a:solidFill>
+                  <a:srgbClr val="0F172A"/>
+                </a:solidFill>
+                <a:latin typeface="Microsoft YaHei"/>
+              </a:rPr>
+              <a:t>普通 XGBoost bias +3.61 trips</a:t>
+            </a:r>
+          </a:p>
+        </p:txBody>
+      </p:sp>
+      <p:sp>
+        <p:nvSpPr>
+          <p:cNvPr id="24" name="Rectangle 23"/>
+          <p:cNvSpPr/>
+          <p:nvPr/>
+        </p:nvSpPr>
+        <p:spPr>
+          <a:xfrm>
+            <a:off x="658368" y="1938528"/>
+            <a:ext cx="1508760" cy="429768"/>
           </a:xfrm>
           <a:prstGeom prst="rect">
             <a:avLst/>
@@ -20466,14 +20638,14 @@
       </p:sp>
       <p:sp>
         <p:nvSpPr>
-          <p:cNvPr id="21" name="TextBox 20"/>
-          <p:cNvSpPr txBox="1"/>
-          <p:nvPr/>
-        </p:nvSpPr>
-        <p:spPr>
-          <a:xfrm>
-            <a:off x="704088" y="1897380"/>
-            <a:ext cx="2926079" cy="329184"/>
+          <p:cNvPr id="25" name="TextBox 24"/>
+          <p:cNvSpPr txBox="1"/>
+          <p:nvPr/>
+        </p:nvSpPr>
+        <p:spPr>
+          <a:xfrm>
+            <a:off x="704088" y="1970532"/>
+            <a:ext cx="1417319" cy="365759"/>
           </a:xfrm>
           <a:prstGeom prst="rect">
             <a:avLst/>
@@ -20487,7 +20659,7 @@
           <a:lstStyle/>
           <a:p>
             <a:pPr algn="l">
-              <a:defRPr sz="819" b="1">
+              <a:defRPr sz="775" b="1">
                 <a:solidFill>
                   <a:srgbClr val="0F172A"/>
                 </a:solidFill>
@@ -20495,27 +20667,27 @@
               </a:defRPr>
             </a:pPr>
             <a:r>
-              <a:rPr sz="819" b="1">
+              <a:rPr sz="775" b="1">
                 <a:solidFill>
                   <a:srgbClr val="0F172A"/>
                 </a:solidFill>
                 <a:latin typeface="Microsoft YaHei"/>
               </a:rPr>
-              <a:t>让 LLM 生成事件先验</a:t>
-            </a:r>
-          </a:p>
-        </p:txBody>
-      </p:sp>
-      <p:sp>
-        <p:nvSpPr>
-          <p:cNvPr id="22" name="Rectangle 21"/>
+              <a:t>传统基线</a:t>
+            </a:r>
+          </a:p>
+        </p:txBody>
+      </p:sp>
+      <p:sp>
+        <p:nvSpPr>
+          <p:cNvPr id="26" name="Rectangle 25"/>
           <p:cNvSpPr/>
           <p:nvPr/>
         </p:nvSpPr>
         <p:spPr>
           <a:xfrm>
-            <a:off x="3675887" y="1865376"/>
-            <a:ext cx="6858000" cy="393192"/>
+            <a:off x="2167128" y="1938528"/>
+            <a:ext cx="4800600" cy="429768"/>
           </a:xfrm>
           <a:prstGeom prst="rect">
             <a:avLst/>
@@ -20553,14 +20725,14 @@
       </p:sp>
       <p:sp>
         <p:nvSpPr>
-          <p:cNvPr id="23" name="TextBox 22"/>
-          <p:cNvSpPr txBox="1"/>
-          <p:nvPr/>
-        </p:nvSpPr>
-        <p:spPr>
-          <a:xfrm>
-            <a:off x="3721607" y="1897380"/>
-            <a:ext cx="6766560" cy="329184"/>
+          <p:cNvPr id="27" name="TextBox 26"/>
+          <p:cNvSpPr txBox="1"/>
+          <p:nvPr/>
+        </p:nvSpPr>
+        <p:spPr>
+          <a:xfrm>
+            <a:off x="2212848" y="1970532"/>
+            <a:ext cx="4709160" cy="365759"/>
           </a:xfrm>
           <a:prstGeom prst="rect">
             <a:avLst/>
@@ -20574,7 +20746,7 @@
           <a:lstStyle/>
           <a:p>
             <a:pPr algn="l">
-              <a:defRPr sz="819" b="0">
+              <a:defRPr sz="775" b="0">
                 <a:solidFill>
                   <a:srgbClr val="0F172A"/>
                 </a:solidFill>
@@ -20582,27 +20754,114 @@
               </a:defRPr>
             </a:pPr>
             <a:r>
-              <a:rPr sz="819" b="0">
+              <a:rPr sz="775" b="0">
                 <a:solidFill>
                   <a:srgbClr val="0F172A"/>
                 </a:solidFill>
                 <a:latin typeface="Microsoft YaHei"/>
               </a:rPr>
-              <a:t>不让 LLM 直接猜出行次数，降低胡编风险</a:t>
-            </a:r>
-          </a:p>
-        </p:txBody>
-      </p:sp>
-      <p:sp>
-        <p:nvSpPr>
-          <p:cNvPr id="24" name="Rectangle 23"/>
+              <a:t>用历史 NHTS 学 f_hist(X)，保留家庭属性差异</a:t>
+            </a:r>
+          </a:p>
+        </p:txBody>
+      </p:sp>
+      <p:sp>
+        <p:nvSpPr>
+          <p:cNvPr id="28" name="Rectangle 27"/>
           <p:cNvSpPr/>
           <p:nvPr/>
         </p:nvSpPr>
         <p:spPr>
           <a:xfrm>
-            <a:off x="658368" y="2258568"/>
-            <a:ext cx="3017520" cy="393192"/>
+            <a:off x="6967728" y="1938528"/>
+            <a:ext cx="3657600" cy="429768"/>
+          </a:xfrm>
+          <a:prstGeom prst="rect">
+            <a:avLst/>
+          </a:prstGeom>
+          <a:solidFill>
+            <a:srgbClr val="F1F5F9"/>
+          </a:solidFill>
+          <a:ln w="9525">
+            <a:solidFill>
+              <a:srgbClr val="CBD5E1"/>
+            </a:solidFill>
+          </a:ln>
+        </p:spPr>
+        <p:style>
+          <a:lnRef idx="1">
+            <a:schemeClr val="accent1"/>
+          </a:lnRef>
+          <a:fillRef idx="3">
+            <a:schemeClr val="accent1"/>
+          </a:fillRef>
+          <a:effectRef idx="2">
+            <a:schemeClr val="accent1"/>
+          </a:effectRef>
+          <a:fontRef idx="minor">
+            <a:schemeClr val="lt1"/>
+          </a:fontRef>
+        </p:style>
+        <p:txBody>
+          <a:bodyPr rtlCol="0" anchor="ctr"/>
+          <a:lstStyle/>
+          <a:p>
+            <a:pPr algn="ctr"/>
+          </a:p>
+        </p:txBody>
+      </p:sp>
+      <p:sp>
+        <p:nvSpPr>
+          <p:cNvPr id="29" name="TextBox 28"/>
+          <p:cNvSpPr txBox="1"/>
+          <p:nvPr/>
+        </p:nvSpPr>
+        <p:spPr>
+          <a:xfrm>
+            <a:off x="7013448" y="1970532"/>
+            <a:ext cx="3566160" cy="365759"/>
+          </a:xfrm>
+          <a:prstGeom prst="rect">
+            <a:avLst/>
+          </a:prstGeom>
+          <a:noFill/>
+        </p:spPr>
+        <p:txBody>
+          <a:bodyPr wrap="square" lIns="27432" rIns="27432" tIns="9144" bIns="9144" anchor="ctr">
+            <a:spAutoFit/>
+          </a:bodyPr>
+          <a:lstStyle/>
+          <a:p>
+            <a:pPr algn="l">
+              <a:defRPr sz="775" b="0">
+                <a:solidFill>
+                  <a:srgbClr val="0F172A"/>
+                </a:solidFill>
+                <a:latin typeface="Microsoft YaHei"/>
+              </a:defRPr>
+            </a:pPr>
+            <a:r>
+              <a:rPr sz="775" b="0">
+                <a:solidFill>
+                  <a:srgbClr val="0F172A"/>
+                </a:solidFill>
+                <a:latin typeface="Microsoft YaHei"/>
+              </a:rPr>
+              <a:t>wMAE 4.34，说明 household signal 有用</a:t>
+            </a:r>
+          </a:p>
+        </p:txBody>
+      </p:sp>
+      <p:sp>
+        <p:nvSpPr>
+          <p:cNvPr id="30" name="Rectangle 29"/>
+          <p:cNvSpPr/>
+          <p:nvPr/>
+        </p:nvSpPr>
+        <p:spPr>
+          <a:xfrm>
+            <a:off x="658368" y="2368296"/>
+            <a:ext cx="1508760" cy="429768"/>
           </a:xfrm>
           <a:prstGeom prst="rect">
             <a:avLst/>
@@ -20640,14 +20899,14 @@
       </p:sp>
       <p:sp>
         <p:nvSpPr>
-          <p:cNvPr id="25" name="TextBox 24"/>
-          <p:cNvSpPr txBox="1"/>
-          <p:nvPr/>
-        </p:nvSpPr>
-        <p:spPr>
-          <a:xfrm>
-            <a:off x="704088" y="2290572"/>
-            <a:ext cx="2926079" cy="329184"/>
+          <p:cNvPr id="31" name="TextBox 30"/>
+          <p:cNvSpPr txBox="1"/>
+          <p:nvPr/>
+        </p:nvSpPr>
+        <p:spPr>
+          <a:xfrm>
+            <a:off x="704088" y="2400300"/>
+            <a:ext cx="1417319" cy="365759"/>
           </a:xfrm>
           <a:prstGeom prst="rect">
             <a:avLst/>
@@ -20661,7 +20920,7 @@
           <a:lstStyle/>
           <a:p>
             <a:pPr algn="l">
-              <a:defRPr sz="819" b="1">
+              <a:defRPr sz="775" b="1">
                 <a:solidFill>
                   <a:srgbClr val="0F172A"/>
                 </a:solidFill>
@@ -20669,27 +20928,27 @@
               </a:defRPr>
             </a:pPr>
             <a:r>
-              <a:rPr sz="819" b="1">
+              <a:rPr sz="775" b="1">
                 <a:solidFill>
                   <a:srgbClr val="0F172A"/>
                 </a:solidFill>
                 <a:latin typeface="Microsoft YaHei"/>
               </a:rPr>
-              <a:t>历史模型 + 事件修正</a:t>
-            </a:r>
-          </a:p>
-        </p:txBody>
-      </p:sp>
-      <p:sp>
-        <p:nvSpPr>
-          <p:cNvPr id="26" name="Rectangle 25"/>
+              <a:t>LLM 进入点</a:t>
+            </a:r>
+          </a:p>
+        </p:txBody>
+      </p:sp>
+      <p:sp>
+        <p:nvSpPr>
+          <p:cNvPr id="32" name="Rectangle 31"/>
           <p:cNvSpPr/>
           <p:nvPr/>
         </p:nvSpPr>
         <p:spPr>
           <a:xfrm>
-            <a:off x="3675887" y="2258568"/>
-            <a:ext cx="6858000" cy="393192"/>
+            <a:off x="2167128" y="2368296"/>
+            <a:ext cx="4800600" cy="429768"/>
           </a:xfrm>
           <a:prstGeom prst="rect">
             <a:avLst/>
@@ -20727,14 +20986,14 @@
       </p:sp>
       <p:sp>
         <p:nvSpPr>
-          <p:cNvPr id="27" name="TextBox 26"/>
-          <p:cNvSpPr txBox="1"/>
-          <p:nvPr/>
-        </p:nvSpPr>
-        <p:spPr>
-          <a:xfrm>
-            <a:off x="3721607" y="2290572"/>
-            <a:ext cx="6766560" cy="329184"/>
+          <p:cNvPr id="33" name="TextBox 32"/>
+          <p:cNvSpPr txBox="1"/>
+          <p:nvPr/>
+        </p:nvSpPr>
+        <p:spPr>
+          <a:xfrm>
+            <a:off x="2212848" y="2400300"/>
+            <a:ext cx="4709160" cy="365759"/>
           </a:xfrm>
           <a:prstGeom prst="rect">
             <a:avLst/>
@@ -20748,7 +21007,7 @@
           <a:lstStyle/>
           <a:p>
             <a:pPr algn="l">
-              <a:defRPr sz="819" b="0">
+              <a:defRPr sz="775" b="0">
                 <a:solidFill>
                   <a:srgbClr val="0F172A"/>
                 </a:solidFill>
@@ -20756,27 +21015,114 @@
               </a:defRPr>
             </a:pPr>
             <a:r>
-              <a:rPr sz="819" b="0">
+              <a:rPr sz="775" b="0">
                 <a:solidFill>
                   <a:srgbClr val="0F172A"/>
                 </a:solidFill>
                 <a:latin typeface="Microsoft YaHei"/>
               </a:rPr>
-              <a:t>把正常出行规律和疫情影响分开处理</a:t>
-            </a:r>
-          </a:p>
-        </p:txBody>
-      </p:sp>
-      <p:sp>
-        <p:nvSpPr>
-          <p:cNvPr id="28" name="Rectangle 27"/>
+              <a:t>cohort profile -&gt; s_event，表达 remote work / transit avoidance</a:t>
+            </a:r>
+          </a:p>
+        </p:txBody>
+      </p:sp>
+      <p:sp>
+        <p:nvSpPr>
+          <p:cNvPr id="34" name="Rectangle 33"/>
           <p:cNvSpPr/>
           <p:nvPr/>
         </p:nvSpPr>
         <p:spPr>
           <a:xfrm>
-            <a:off x="658368" y="2651760"/>
-            <a:ext cx="3017520" cy="393192"/>
+            <a:off x="6967728" y="2368296"/>
+            <a:ext cx="3657600" cy="429768"/>
+          </a:xfrm>
+          <a:prstGeom prst="rect">
+            <a:avLst/>
+          </a:prstGeom>
+          <a:solidFill>
+            <a:srgbClr val="F8FAFC"/>
+          </a:solidFill>
+          <a:ln w="9525">
+            <a:solidFill>
+              <a:srgbClr val="CBD5E1"/>
+            </a:solidFill>
+          </a:ln>
+        </p:spPr>
+        <p:style>
+          <a:lnRef idx="1">
+            <a:schemeClr val="accent1"/>
+          </a:lnRef>
+          <a:fillRef idx="3">
+            <a:schemeClr val="accent1"/>
+          </a:fillRef>
+          <a:effectRef idx="2">
+            <a:schemeClr val="accent1"/>
+          </a:effectRef>
+          <a:fontRef idx="minor">
+            <a:schemeClr val="lt1"/>
+          </a:fontRef>
+        </p:style>
+        <p:txBody>
+          <a:bodyPr rtlCol="0" anchor="ctr"/>
+          <a:lstStyle/>
+          <a:p>
+            <a:pPr algn="ctr"/>
+          </a:p>
+        </p:txBody>
+      </p:sp>
+      <p:sp>
+        <p:nvSpPr>
+          <p:cNvPr id="35" name="TextBox 34"/>
+          <p:cNvSpPr txBox="1"/>
+          <p:nvPr/>
+        </p:nvSpPr>
+        <p:spPr>
+          <a:xfrm>
+            <a:off x="7013448" y="2400300"/>
+            <a:ext cx="3566160" cy="365759"/>
+          </a:xfrm>
+          <a:prstGeom prst="rect">
+            <a:avLst/>
+          </a:prstGeom>
+          <a:noFill/>
+        </p:spPr>
+        <p:txBody>
+          <a:bodyPr wrap="square" lIns="27432" rIns="27432" tIns="9144" bIns="9144" anchor="ctr">
+            <a:spAutoFit/>
+          </a:bodyPr>
+          <a:lstStyle/>
+          <a:p>
+            <a:pPr algn="l">
+              <a:defRPr sz="775" b="0">
+                <a:solidFill>
+                  <a:srgbClr val="0F172A"/>
+                </a:solidFill>
+                <a:latin typeface="Microsoft YaHei"/>
+              </a:defRPr>
+            </a:pPr>
+            <a:r>
+              <a:rPr sz="775" b="0">
+                <a:solidFill>
+                  <a:srgbClr val="0F172A"/>
+                </a:solidFill>
+                <a:latin typeface="Microsoft YaHei"/>
+              </a:rPr>
+              <a:t>不输入 CNTTDHH、权重和 household ID</a:t>
+            </a:r>
+          </a:p>
+        </p:txBody>
+      </p:sp>
+      <p:sp>
+        <p:nvSpPr>
+          <p:cNvPr id="36" name="Rectangle 35"/>
+          <p:cNvSpPr/>
+          <p:nvPr/>
+        </p:nvSpPr>
+        <p:spPr>
+          <a:xfrm>
+            <a:off x="658368" y="2798063"/>
+            <a:ext cx="1508760" cy="429768"/>
           </a:xfrm>
           <a:prstGeom prst="rect">
             <a:avLst/>
@@ -20814,14 +21160,14 @@
       </p:sp>
       <p:sp>
         <p:nvSpPr>
-          <p:cNvPr id="29" name="TextBox 28"/>
-          <p:cNvSpPr txBox="1"/>
-          <p:nvPr/>
-        </p:nvSpPr>
-        <p:spPr>
-          <a:xfrm>
-            <a:off x="704088" y="2683764"/>
-            <a:ext cx="2926079" cy="329184"/>
+          <p:cNvPr id="37" name="TextBox 36"/>
+          <p:cNvSpPr txBox="1"/>
+          <p:nvPr/>
+        </p:nvSpPr>
+        <p:spPr>
+          <a:xfrm>
+            <a:off x="704088" y="2830068"/>
+            <a:ext cx="1417319" cy="365759"/>
           </a:xfrm>
           <a:prstGeom prst="rect">
             <a:avLst/>
@@ -20835,7 +21181,7 @@
           <a:lstStyle/>
           <a:p>
             <a:pPr algn="l">
-              <a:defRPr sz="819" b="1">
+              <a:defRPr sz="775" b="1">
                 <a:solidFill>
                   <a:srgbClr val="0F172A"/>
                 </a:solidFill>
@@ -20843,27 +21189,27 @@
               </a:defRPr>
             </a:pPr>
             <a:r>
-              <a:rPr sz="819" b="1">
+              <a:rPr sz="775" b="1">
                 <a:solidFill>
                   <a:srgbClr val="0F172A"/>
                 </a:solidFill>
                 <a:latin typeface="Microsoft YaHei"/>
               </a:rPr>
-              <a:t>同时看出行次数和方式结构</a:t>
-            </a:r>
-          </a:p>
-        </p:txBody>
-      </p:sp>
-      <p:sp>
-        <p:nvSpPr>
-          <p:cNvPr id="30" name="Rectangle 29"/>
+              <a:t>融合规则</a:t>
+            </a:r>
+          </a:p>
+        </p:txBody>
+      </p:sp>
+      <p:sp>
+        <p:nvSpPr>
+          <p:cNvPr id="38" name="Rectangle 37"/>
           <p:cNvSpPr/>
           <p:nvPr/>
         </p:nvSpPr>
         <p:spPr>
           <a:xfrm>
-            <a:off x="3675887" y="2651760"/>
-            <a:ext cx="6858000" cy="393192"/>
+            <a:off x="2167128" y="2798063"/>
+            <a:ext cx="4800600" cy="429768"/>
           </a:xfrm>
           <a:prstGeom prst="rect">
             <a:avLst/>
@@ -20901,14 +21247,14 @@
       </p:sp>
       <p:sp>
         <p:nvSpPr>
-          <p:cNvPr id="31" name="TextBox 30"/>
-          <p:cNvSpPr txBox="1"/>
-          <p:nvPr/>
-        </p:nvSpPr>
-        <p:spPr>
-          <a:xfrm>
-            <a:off x="3721607" y="2683764"/>
-            <a:ext cx="6766560" cy="329184"/>
+          <p:cNvPr id="39" name="TextBox 38"/>
+          <p:cNvSpPr txBox="1"/>
+          <p:nvPr/>
+        </p:nvSpPr>
+        <p:spPr>
+          <a:xfrm>
+            <a:off x="2212848" y="2830068"/>
+            <a:ext cx="4709160" cy="365759"/>
           </a:xfrm>
           <a:prstGeom prst="rect">
             <a:avLst/>
@@ -20922,7 +21268,7 @@
           <a:lstStyle/>
           <a:p>
             <a:pPr algn="l">
-              <a:defRPr sz="819" b="0">
+              <a:defRPr sz="775" b="0">
                 <a:solidFill>
                   <a:srgbClr val="0F172A"/>
                 </a:solidFill>
@@ -20930,36 +21276,38 @@
               </a:defRPr>
             </a:pPr>
             <a:r>
-              <a:rPr sz="819" b="0">
+              <a:rPr sz="775" b="0">
                 <a:solidFill>
                   <a:srgbClr val="0F172A"/>
                 </a:solidFill>
                 <a:latin typeface="Microsoft YaHei"/>
               </a:rPr>
-              <a:t>回答“出行多少”和“怎么出行”两个问题</a:t>
-            </a:r>
-          </a:p>
-        </p:txBody>
-      </p:sp>
-      <p:sp>
-        <p:nvSpPr>
-          <p:cNvPr id="32" name="Rectangle 31"/>
+              <a:t>ŷ = f_hist(X) × correction(s_event)，参数固定</a:t>
+            </a:r>
+          </a:p>
+        </p:txBody>
+      </p:sp>
+      <p:sp>
+        <p:nvSpPr>
+          <p:cNvPr id="40" name="Rectangle 39"/>
           <p:cNvSpPr/>
           <p:nvPr/>
         </p:nvSpPr>
         <p:spPr>
           <a:xfrm>
-            <a:off x="658368" y="4005072"/>
-            <a:ext cx="3017520" cy="393192"/>
+            <a:off x="6967728" y="2798063"/>
+            <a:ext cx="3657600" cy="429768"/>
           </a:xfrm>
           <a:prstGeom prst="rect">
             <a:avLst/>
           </a:prstGeom>
           <a:solidFill>
-            <a:srgbClr val="EA580C"/>
+            <a:srgbClr val="F1F5F9"/>
           </a:solidFill>
-          <a:ln>
-            <a:noFill/>
+          <a:ln w="9525">
+            <a:solidFill>
+              <a:srgbClr val="CBD5E1"/>
+            </a:solidFill>
           </a:ln>
         </p:spPr>
         <p:style>
@@ -20986,141 +21334,56 @@
       </p:sp>
       <p:sp>
         <p:nvSpPr>
-          <p:cNvPr id="33" name="TextBox 32"/>
-          <p:cNvSpPr txBox="1"/>
-          <p:nvPr/>
-        </p:nvSpPr>
-        <p:spPr>
-          <a:xfrm>
-            <a:off x="694944" y="4041648"/>
-            <a:ext cx="2944368" cy="320040"/>
-          </a:xfrm>
-          <a:prstGeom prst="rect">
-            <a:avLst/>
-          </a:prstGeom>
-          <a:noFill/>
-        </p:spPr>
-        <p:txBody>
-          <a:bodyPr wrap="square" lIns="27432" rIns="27432" tIns="9144" bIns="9144" anchor="ctr">
-            <a:spAutoFit/>
-          </a:bodyPr>
-          <a:lstStyle/>
-          <a:p>
-            <a:pPr algn="ctr">
-              <a:defRPr sz="810" b="1">
-                <a:solidFill>
-                  <a:srgbClr val="FFFFFF"/>
-                </a:solidFill>
-                <a:latin typeface="Microsoft YaHei"/>
-              </a:defRPr>
-            </a:pPr>
-            <a:r>
-              <a:rPr sz="810" b="1">
-                <a:solidFill>
-                  <a:srgbClr val="FFFFFF"/>
-                </a:solidFill>
-                <a:latin typeface="Microsoft YaHei"/>
-              </a:rPr>
-              <a:t>目前的边界</a:t>
-            </a:r>
-          </a:p>
-        </p:txBody>
-      </p:sp>
-      <p:sp>
-        <p:nvSpPr>
-          <p:cNvPr id="34" name="Rectangle 33"/>
+          <p:cNvPr id="41" name="TextBox 40"/>
+          <p:cNvSpPr txBox="1"/>
+          <p:nvPr/>
+        </p:nvSpPr>
+        <p:spPr>
+          <a:xfrm>
+            <a:off x="7013448" y="2830068"/>
+            <a:ext cx="3566160" cy="365759"/>
+          </a:xfrm>
+          <a:prstGeom prst="rect">
+            <a:avLst/>
+          </a:prstGeom>
+          <a:noFill/>
+        </p:spPr>
+        <p:txBody>
+          <a:bodyPr wrap="square" lIns="27432" rIns="27432" tIns="9144" bIns="9144" anchor="ctr">
+            <a:spAutoFit/>
+          </a:bodyPr>
+          <a:lstStyle/>
+          <a:p>
+            <a:pPr algn="l">
+              <a:defRPr sz="775" b="0">
+                <a:solidFill>
+                  <a:srgbClr val="0F172A"/>
+                </a:solidFill>
+                <a:latin typeface="Microsoft YaHei"/>
+              </a:defRPr>
+            </a:pPr>
+            <a:r>
+              <a:rPr sz="775" b="0">
+                <a:solidFill>
+                  <a:srgbClr val="0F172A"/>
+                </a:solidFill>
+                <a:latin typeface="Microsoft YaHei"/>
+              </a:rPr>
+              <a:t>wMAE 2.50，bias -0.023</a:t>
+            </a:r>
+          </a:p>
+        </p:txBody>
+      </p:sp>
+      <p:sp>
+        <p:nvSpPr>
+          <p:cNvPr id="42" name="Rectangle 41"/>
           <p:cNvSpPr/>
           <p:nvPr/>
         </p:nvSpPr>
         <p:spPr>
           <a:xfrm>
-            <a:off x="3675887" y="4005072"/>
-            <a:ext cx="6858000" cy="393192"/>
-          </a:xfrm>
-          <a:prstGeom prst="rect">
-            <a:avLst/>
-          </a:prstGeom>
-          <a:solidFill>
-            <a:srgbClr val="EA580C"/>
-          </a:solidFill>
-          <a:ln>
-            <a:noFill/>
-          </a:ln>
-        </p:spPr>
-        <p:style>
-          <a:lnRef idx="1">
-            <a:schemeClr val="accent1"/>
-          </a:lnRef>
-          <a:fillRef idx="3">
-            <a:schemeClr val="accent1"/>
-          </a:fillRef>
-          <a:effectRef idx="2">
-            <a:schemeClr val="accent1"/>
-          </a:effectRef>
-          <a:fontRef idx="minor">
-            <a:schemeClr val="lt1"/>
-          </a:fontRef>
-        </p:style>
-        <p:txBody>
-          <a:bodyPr rtlCol="0" anchor="ctr"/>
-          <a:lstStyle/>
-          <a:p>
-            <a:pPr algn="ctr"/>
-          </a:p>
-        </p:txBody>
-      </p:sp>
-      <p:sp>
-        <p:nvSpPr>
-          <p:cNvPr id="35" name="TextBox 34"/>
-          <p:cNvSpPr txBox="1"/>
-          <p:nvPr/>
-        </p:nvSpPr>
-        <p:spPr>
-          <a:xfrm>
-            <a:off x="3712463" y="4041648"/>
-            <a:ext cx="6784848" cy="320040"/>
-          </a:xfrm>
-          <a:prstGeom prst="rect">
-            <a:avLst/>
-          </a:prstGeom>
-          <a:noFill/>
-        </p:spPr>
-        <p:txBody>
-          <a:bodyPr wrap="square" lIns="27432" rIns="27432" tIns="9144" bIns="9144" anchor="ctr">
-            <a:spAutoFit/>
-          </a:bodyPr>
-          <a:lstStyle/>
-          <a:p>
-            <a:pPr algn="ctr">
-              <a:defRPr sz="810" b="1">
-                <a:solidFill>
-                  <a:srgbClr val="FFFFFF"/>
-                </a:solidFill>
-                <a:latin typeface="Microsoft YaHei"/>
-              </a:defRPr>
-            </a:pPr>
-            <a:r>
-              <a:rPr sz="810" b="1">
-                <a:solidFill>
-                  <a:srgbClr val="FFFFFF"/>
-                </a:solidFill>
-                <a:latin typeface="Microsoft YaHei"/>
-              </a:rPr>
-              <a:t>汇报时怎么说</a:t>
-            </a:r>
-          </a:p>
-        </p:txBody>
-      </p:sp>
-      <p:sp>
-        <p:nvSpPr>
-          <p:cNvPr id="36" name="Rectangle 35"/>
-          <p:cNvSpPr/>
-          <p:nvPr/>
-        </p:nvSpPr>
-        <p:spPr>
-          <a:xfrm>
-            <a:off x="658368" y="4398264"/>
-            <a:ext cx="3017520" cy="393192"/>
+            <a:off x="658368" y="3227831"/>
+            <a:ext cx="1508760" cy="429768"/>
           </a:xfrm>
           <a:prstGeom prst="rect">
             <a:avLst/>
@@ -21158,14 +21421,14 @@
       </p:sp>
       <p:sp>
         <p:nvSpPr>
-          <p:cNvPr id="37" name="TextBox 36"/>
-          <p:cNvSpPr txBox="1"/>
-          <p:nvPr/>
-        </p:nvSpPr>
-        <p:spPr>
-          <a:xfrm>
-            <a:off x="704088" y="4430268"/>
-            <a:ext cx="2926079" cy="329184"/>
+          <p:cNvPr id="43" name="TextBox 42"/>
+          <p:cNvSpPr txBox="1"/>
+          <p:nvPr/>
+        </p:nvSpPr>
+        <p:spPr>
+          <a:xfrm>
+            <a:off x="704088" y="3259835"/>
+            <a:ext cx="1417319" cy="365759"/>
           </a:xfrm>
           <a:prstGeom prst="rect">
             <a:avLst/>
@@ -21179,7 +21442,7 @@
           <a:lstStyle/>
           <a:p>
             <a:pPr algn="l">
-              <a:defRPr sz="810" b="1">
+              <a:defRPr sz="775" b="1">
                 <a:solidFill>
                   <a:srgbClr val="0F172A"/>
                 </a:solidFill>
@@ -21187,27 +21450,27 @@
               </a:defRPr>
             </a:pPr>
             <a:r>
-              <a:rPr sz="810" b="1">
+              <a:rPr sz="775" b="1">
                 <a:solidFill>
                   <a:srgbClr val="0F172A"/>
                 </a:solidFill>
                 <a:latin typeface="Microsoft YaHei"/>
               </a:rPr>
-              <a:t>cohort 差异增益小于 global 修正</a:t>
-            </a:r>
-          </a:p>
-        </p:txBody>
-      </p:sp>
-      <p:sp>
-        <p:nvSpPr>
-          <p:cNvPr id="38" name="Rectangle 37"/>
+              <a:t>结果边界</a:t>
+            </a:r>
+          </a:p>
+        </p:txBody>
+      </p:sp>
+      <p:sp>
+        <p:nvSpPr>
+          <p:cNvPr id="44" name="Rectangle 43"/>
           <p:cNvSpPr/>
           <p:nvPr/>
         </p:nvSpPr>
         <p:spPr>
           <a:xfrm>
-            <a:off x="3675887" y="4398264"/>
-            <a:ext cx="6858000" cy="393192"/>
+            <a:off x="2167128" y="3227831"/>
+            <a:ext cx="4800600" cy="429768"/>
           </a:xfrm>
           <a:prstGeom prst="rect">
             <a:avLst/>
@@ -21245,14 +21508,14 @@
       </p:sp>
       <p:sp>
         <p:nvSpPr>
-          <p:cNvPr id="39" name="TextBox 38"/>
-          <p:cNvSpPr txBox="1"/>
-          <p:nvPr/>
-        </p:nvSpPr>
-        <p:spPr>
-          <a:xfrm>
-            <a:off x="3721607" y="4430268"/>
-            <a:ext cx="6766560" cy="329184"/>
+          <p:cNvPr id="45" name="TextBox 44"/>
+          <p:cNvSpPr txBox="1"/>
+          <p:nvPr/>
+        </p:nvSpPr>
+        <p:spPr>
+          <a:xfrm>
+            <a:off x="2212848" y="3259835"/>
+            <a:ext cx="4709160" cy="365759"/>
           </a:xfrm>
           <a:prstGeom prst="rect">
             <a:avLst/>
@@ -21266,7 +21529,7 @@
           <a:lstStyle/>
           <a:p>
             <a:pPr algn="l">
-              <a:defRPr sz="810" b="0">
+              <a:defRPr sz="775" b="0">
                 <a:solidFill>
                   <a:srgbClr val="0F172A"/>
                 </a:solidFill>
@@ -21274,29 +21537,116 @@
               </a:defRPr>
             </a:pPr>
             <a:r>
-              <a:rPr sz="810" b="0">
+              <a:rPr sz="775" b="0">
                 <a:solidFill>
                   <a:srgbClr val="0F172A"/>
                 </a:solidFill>
                 <a:latin typeface="Microsoft YaHei"/>
               </a:rPr>
-              <a:t>主要贡献是疫情事件层面的修正</a:t>
-            </a:r>
-          </a:p>
-        </p:txBody>
-      </p:sp>
-      <p:sp>
-        <p:nvSpPr>
-          <p:cNvPr id="40" name="Rectangle 39"/>
+              <a:t>主增益来自事件层面修正，mode 改善集中在 transit</a:t>
+            </a:r>
+          </a:p>
+        </p:txBody>
+      </p:sp>
+      <p:sp>
+        <p:nvSpPr>
+          <p:cNvPr id="46" name="Rectangle 45"/>
           <p:cNvSpPr/>
           <p:nvPr/>
         </p:nvSpPr>
         <p:spPr>
           <a:xfrm>
-            <a:off x="658368" y="4791456"/>
-            <a:ext cx="3017520" cy="393192"/>
-          </a:xfrm>
-          <a:prstGeom prst="rect">
+            <a:off x="6967728" y="3227831"/>
+            <a:ext cx="3657600" cy="429768"/>
+          </a:xfrm>
+          <a:prstGeom prst="rect">
+            <a:avLst/>
+          </a:prstGeom>
+          <a:solidFill>
+            <a:srgbClr val="F8FAFC"/>
+          </a:solidFill>
+          <a:ln w="9525">
+            <a:solidFill>
+              <a:srgbClr val="CBD5E1"/>
+            </a:solidFill>
+          </a:ln>
+        </p:spPr>
+        <p:style>
+          <a:lnRef idx="1">
+            <a:schemeClr val="accent1"/>
+          </a:lnRef>
+          <a:fillRef idx="3">
+            <a:schemeClr val="accent1"/>
+          </a:fillRef>
+          <a:effectRef idx="2">
+            <a:schemeClr val="accent1"/>
+          </a:effectRef>
+          <a:fontRef idx="minor">
+            <a:schemeClr val="lt1"/>
+          </a:fontRef>
+        </p:style>
+        <p:txBody>
+          <a:bodyPr rtlCol="0" anchor="ctr"/>
+          <a:lstStyle/>
+          <a:p>
+            <a:pPr algn="ctr"/>
+          </a:p>
+        </p:txBody>
+      </p:sp>
+      <p:sp>
+        <p:nvSpPr>
+          <p:cNvPr id="47" name="TextBox 46"/>
+          <p:cNvSpPr txBox="1"/>
+          <p:nvPr/>
+        </p:nvSpPr>
+        <p:spPr>
+          <a:xfrm>
+            <a:off x="7013448" y="3259835"/>
+            <a:ext cx="3566160" cy="365759"/>
+          </a:xfrm>
+          <a:prstGeom prst="rect">
+            <a:avLst/>
+          </a:prstGeom>
+          <a:noFill/>
+        </p:spPr>
+        <p:txBody>
+          <a:bodyPr wrap="square" lIns="27432" rIns="27432" tIns="9144" bIns="9144" anchor="ctr">
+            <a:spAutoFit/>
+          </a:bodyPr>
+          <a:lstStyle/>
+          <a:p>
+            <a:pPr algn="l">
+              <a:defRPr sz="775" b="0">
+                <a:solidFill>
+                  <a:srgbClr val="0F172A"/>
+                </a:solidFill>
+                <a:latin typeface="Microsoft YaHei"/>
+              </a:defRPr>
+            </a:pPr>
+            <a:r>
+              <a:rPr sz="775" b="0">
+                <a:solidFill>
+                  <a:srgbClr val="0F172A"/>
+                </a:solidFill>
+                <a:latin typeface="Microsoft YaHei"/>
+              </a:rPr>
+              <a:t>不夸大成纯 LLM 或完整 mode-choice model</a:t>
+            </a:r>
+          </a:p>
+        </p:txBody>
+      </p:sp>
+      <p:sp>
+        <p:nvSpPr>
+          <p:cNvPr id="48" name="Rounded Rectangle 47"/>
+          <p:cNvSpPr/>
+          <p:nvPr/>
+        </p:nvSpPr>
+        <p:spPr>
+          <a:xfrm>
+            <a:off x="822960" y="4754880"/>
+            <a:ext cx="9784080" cy="685800"/>
+          </a:xfrm>
+          <a:prstGeom prst="roundRect">
             <a:avLst/>
           </a:prstGeom>
           <a:solidFill>
@@ -21332,14 +21682,14 @@
       </p:sp>
       <p:sp>
         <p:nvSpPr>
-          <p:cNvPr id="41" name="TextBox 40"/>
-          <p:cNvSpPr txBox="1"/>
-          <p:nvPr/>
-        </p:nvSpPr>
-        <p:spPr>
-          <a:xfrm>
-            <a:off x="704088" y="4823460"/>
-            <a:ext cx="2926079" cy="329184"/>
+          <p:cNvPr id="49" name="TextBox 48"/>
+          <p:cNvSpPr txBox="1"/>
+          <p:nvPr/>
+        </p:nvSpPr>
+        <p:spPr>
+          <a:xfrm>
+            <a:off x="1024128" y="4965192"/>
+            <a:ext cx="1143000" cy="219456"/>
           </a:xfrm>
           <a:prstGeom prst="rect">
             <a:avLst/>
@@ -21353,7 +21703,49 @@
           <a:lstStyle/>
           <a:p>
             <a:pPr algn="l">
-              <a:defRPr sz="810" b="1">
+              <a:defRPr sz="950" b="1">
+                <a:solidFill>
+                  <a:srgbClr val="EA580C"/>
+                </a:solidFill>
+                <a:latin typeface="Microsoft YaHei"/>
+              </a:defRPr>
+            </a:pPr>
+            <a:r>
+              <a:rPr sz="950" b="1">
+                <a:solidFill>
+                  <a:srgbClr val="EA580C"/>
+                </a:solidFill>
+                <a:latin typeface="Microsoft YaHei"/>
+              </a:rPr>
+              <a:t>一句话故事</a:t>
+            </a:r>
+          </a:p>
+        </p:txBody>
+      </p:sp>
+      <p:sp>
+        <p:nvSpPr>
+          <p:cNvPr id="50" name="TextBox 49"/>
+          <p:cNvSpPr txBox="1"/>
+          <p:nvPr/>
+        </p:nvSpPr>
+        <p:spPr>
+          <a:xfrm>
+            <a:off x="2212848" y="4882896"/>
+            <a:ext cx="8046720" cy="310896"/>
+          </a:xfrm>
+          <a:prstGeom prst="rect">
+            <a:avLst/>
+          </a:prstGeom>
+          <a:noFill/>
+        </p:spPr>
+        <p:txBody>
+          <a:bodyPr wrap="square" lIns="27432" rIns="27432" tIns="9144" bIns="9144" anchor="ctr">
+            <a:spAutoFit/>
+          </a:bodyPr>
+          <a:lstStyle/>
+          <a:p>
+            <a:pPr algn="l">
+              <a:defRPr sz="1200" b="1">
                 <a:solidFill>
                   <a:srgbClr val="0F172A"/>
                 </a:solidFill>
@@ -21361,274 +21753,13 @@
               </a:defRPr>
             </a:pPr>
             <a:r>
-              <a:rPr sz="810" b="1">
+              <a:rPr sz="1200" b="1">
                 <a:solidFill>
                   <a:srgbClr val="0F172A"/>
                 </a:solidFill>
                 <a:latin typeface="Microsoft YaHei"/>
               </a:rPr>
-              <a:t>方式结构提升集中在 transit</a:t>
-            </a:r>
-          </a:p>
-        </p:txBody>
-      </p:sp>
-      <p:sp>
-        <p:nvSpPr>
-          <p:cNvPr id="42" name="Rectangle 41"/>
-          <p:cNvSpPr/>
-          <p:nvPr/>
-        </p:nvSpPr>
-        <p:spPr>
-          <a:xfrm>
-            <a:off x="3675887" y="4791456"/>
-            <a:ext cx="6858000" cy="393192"/>
-          </a:xfrm>
-          <a:prstGeom prst="rect">
-            <a:avLst/>
-          </a:prstGeom>
-          <a:solidFill>
-            <a:srgbClr val="F1F5F9"/>
-          </a:solidFill>
-          <a:ln w="9525">
-            <a:solidFill>
-              <a:srgbClr val="CBD5E1"/>
-            </a:solidFill>
-          </a:ln>
-        </p:spPr>
-        <p:style>
-          <a:lnRef idx="1">
-            <a:schemeClr val="accent1"/>
-          </a:lnRef>
-          <a:fillRef idx="3">
-            <a:schemeClr val="accent1"/>
-          </a:fillRef>
-          <a:effectRef idx="2">
-            <a:schemeClr val="accent1"/>
-          </a:effectRef>
-          <a:fontRef idx="minor">
-            <a:schemeClr val="lt1"/>
-          </a:fontRef>
-        </p:style>
-        <p:txBody>
-          <a:bodyPr rtlCol="0" anchor="ctr"/>
-          <a:lstStyle/>
-          <a:p>
-            <a:pPr algn="ctr"/>
-          </a:p>
-        </p:txBody>
-      </p:sp>
-      <p:sp>
-        <p:nvSpPr>
-          <p:cNvPr id="43" name="TextBox 42"/>
-          <p:cNvSpPr txBox="1"/>
-          <p:nvPr/>
-        </p:nvSpPr>
-        <p:spPr>
-          <a:xfrm>
-            <a:off x="3721607" y="4823460"/>
-            <a:ext cx="6766560" cy="329184"/>
-          </a:xfrm>
-          <a:prstGeom prst="rect">
-            <a:avLst/>
-          </a:prstGeom>
-          <a:noFill/>
-        </p:spPr>
-        <p:txBody>
-          <a:bodyPr wrap="square" lIns="27432" rIns="27432" tIns="9144" bIns="9144" anchor="ctr">
-            <a:spAutoFit/>
-          </a:bodyPr>
-          <a:lstStyle/>
-          <a:p>
-            <a:pPr algn="l">
-              <a:defRPr sz="810" b="0">
-                <a:solidFill>
-                  <a:srgbClr val="0F172A"/>
-                </a:solidFill>
-                <a:latin typeface="Microsoft YaHei"/>
-              </a:defRPr>
-            </a:pPr>
-            <a:r>
-              <a:rPr sz="810" b="0">
-                <a:solidFill>
-                  <a:srgbClr val="0F172A"/>
-                </a:solidFill>
-                <a:latin typeface="Microsoft YaHei"/>
-              </a:rPr>
-              <a:t>公共交通规避是最清楚的疫情机制</a:t>
-            </a:r>
-          </a:p>
-        </p:txBody>
-      </p:sp>
-      <p:sp>
-        <p:nvSpPr>
-          <p:cNvPr id="44" name="Rectangle 43"/>
-          <p:cNvSpPr/>
-          <p:nvPr/>
-        </p:nvSpPr>
-        <p:spPr>
-          <a:xfrm>
-            <a:off x="658368" y="5184648"/>
-            <a:ext cx="3017520" cy="393192"/>
-          </a:xfrm>
-          <a:prstGeom prst="rect">
-            <a:avLst/>
-          </a:prstGeom>
-          <a:solidFill>
-            <a:srgbClr val="F8FAFC"/>
-          </a:solidFill>
-          <a:ln w="9525">
-            <a:solidFill>
-              <a:srgbClr val="CBD5E1"/>
-            </a:solidFill>
-          </a:ln>
-        </p:spPr>
-        <p:style>
-          <a:lnRef idx="1">
-            <a:schemeClr val="accent1"/>
-          </a:lnRef>
-          <a:fillRef idx="3">
-            <a:schemeClr val="accent1"/>
-          </a:fillRef>
-          <a:effectRef idx="2">
-            <a:schemeClr val="accent1"/>
-          </a:effectRef>
-          <a:fontRef idx="minor">
-            <a:schemeClr val="lt1"/>
-          </a:fontRef>
-        </p:style>
-        <p:txBody>
-          <a:bodyPr rtlCol="0" anchor="ctr"/>
-          <a:lstStyle/>
-          <a:p>
-            <a:pPr algn="ctr"/>
-          </a:p>
-        </p:txBody>
-      </p:sp>
-      <p:sp>
-        <p:nvSpPr>
-          <p:cNvPr id="45" name="TextBox 44"/>
-          <p:cNvSpPr txBox="1"/>
-          <p:nvPr/>
-        </p:nvSpPr>
-        <p:spPr>
-          <a:xfrm>
-            <a:off x="704088" y="5216652"/>
-            <a:ext cx="2926079" cy="329184"/>
-          </a:xfrm>
-          <a:prstGeom prst="rect">
-            <a:avLst/>
-          </a:prstGeom>
-          <a:noFill/>
-        </p:spPr>
-        <p:txBody>
-          <a:bodyPr wrap="square" lIns="27432" rIns="27432" tIns="9144" bIns="9144" anchor="ctr">
-            <a:spAutoFit/>
-          </a:bodyPr>
-          <a:lstStyle/>
-          <a:p>
-            <a:pPr algn="l">
-              <a:defRPr sz="810" b="1">
-                <a:solidFill>
-                  <a:srgbClr val="0F172A"/>
-                </a:solidFill>
-                <a:latin typeface="Microsoft YaHei"/>
-              </a:defRPr>
-            </a:pPr>
-            <a:r>
-              <a:rPr sz="810" b="1">
-                <a:solidFill>
-                  <a:srgbClr val="0F172A"/>
-                </a:solidFill>
-                <a:latin typeface="Microsoft YaHei"/>
-              </a:rPr>
-              <a:t>还没有接入外部实时事件数据</a:t>
-            </a:r>
-          </a:p>
-        </p:txBody>
-      </p:sp>
-      <p:sp>
-        <p:nvSpPr>
-          <p:cNvPr id="46" name="Rectangle 45"/>
-          <p:cNvSpPr/>
-          <p:nvPr/>
-        </p:nvSpPr>
-        <p:spPr>
-          <a:xfrm>
-            <a:off x="3675887" y="5184648"/>
-            <a:ext cx="6858000" cy="393192"/>
-          </a:xfrm>
-          <a:prstGeom prst="rect">
-            <a:avLst/>
-          </a:prstGeom>
-          <a:solidFill>
-            <a:srgbClr val="F8FAFC"/>
-          </a:solidFill>
-          <a:ln w="9525">
-            <a:solidFill>
-              <a:srgbClr val="CBD5E1"/>
-            </a:solidFill>
-          </a:ln>
-        </p:spPr>
-        <p:style>
-          <a:lnRef idx="1">
-            <a:schemeClr val="accent1"/>
-          </a:lnRef>
-          <a:fillRef idx="3">
-            <a:schemeClr val="accent1"/>
-          </a:fillRef>
-          <a:effectRef idx="2">
-            <a:schemeClr val="accent1"/>
-          </a:effectRef>
-          <a:fontRef idx="minor">
-            <a:schemeClr val="lt1"/>
-          </a:fontRef>
-        </p:style>
-        <p:txBody>
-          <a:bodyPr rtlCol="0" anchor="ctr"/>
-          <a:lstStyle/>
-          <a:p>
-            <a:pPr algn="ctr"/>
-          </a:p>
-        </p:txBody>
-      </p:sp>
-      <p:sp>
-        <p:nvSpPr>
-          <p:cNvPr id="47" name="TextBox 46"/>
-          <p:cNvSpPr txBox="1"/>
-          <p:nvPr/>
-        </p:nvSpPr>
-        <p:spPr>
-          <a:xfrm>
-            <a:off x="3721607" y="5216652"/>
-            <a:ext cx="6766560" cy="329184"/>
-          </a:xfrm>
-          <a:prstGeom prst="rect">
-            <a:avLst/>
-          </a:prstGeom>
-          <a:noFill/>
-        </p:spPr>
-        <p:txBody>
-          <a:bodyPr wrap="square" lIns="27432" rIns="27432" tIns="9144" bIns="9144" anchor="ctr">
-            <a:spAutoFit/>
-          </a:bodyPr>
-          <a:lstStyle/>
-          <a:p>
-            <a:pPr algn="l">
-              <a:defRPr sz="810" b="0">
-                <a:solidFill>
-                  <a:srgbClr val="0F172A"/>
-                </a:solidFill>
-                <a:latin typeface="Microsoft YaHei"/>
-              </a:defRPr>
-            </a:pPr>
-            <a:r>
-              <a:rPr sz="810" b="0">
-                <a:solidFill>
-                  <a:srgbClr val="0F172A"/>
-                </a:solidFill>
-                <a:latin typeface="Microsoft YaHei"/>
-              </a:rPr>
-              <a:t>后续可加入新闻、政策和 mobility index</a:t>
+              <a:t>传统模型负责“正常情况下谁会出行更多”，LLM 负责“疫情后哪些出行会被压低”，二者相乘得到 2022 的无标签修正预测。</a:t>
             </a:r>
           </a:p>
         </p:txBody>
@@ -23876,7 +24007,7 @@
                 </a:solidFill>
                 <a:latin typeface="Microsoft YaHei"/>
               </a:rPr>
-              <a:t>为什么传统 cross-year transfer 会失效</a:t>
+              <a:t>2022 为什么不是普通跨年预测</a:t>
             </a:r>
           </a:p>
         </p:txBody>
@@ -24300,7 +24431,7 @@
                 </a:solidFill>
                 <a:latin typeface="Microsoft YaHei"/>
               </a:rPr>
-              <a:t>historical routine predictor + LLM event prior</a:t>
+              <a:t>f_hist(X) × LLM event pressure</a:t>
             </a:r>
           </a:p>
         </p:txBody>
@@ -24512,7 +24643,7 @@
                 </a:solidFill>
                 <a:latin typeface="Microsoft YaHei"/>
               </a:rPr>
-              <a:t>不使用 2022 标签校准的对比体系</a:t>
+              <a:t>2022 标签只用于最终评估</a:t>
             </a:r>
           </a:p>
         </p:txBody>
@@ -24724,7 +24855,7 @@
                 </a:solidFill>
                 <a:latin typeface="Microsoft YaHei"/>
               </a:rPr>
-              <a:t>准确率提升来自哪里，LLM 的真实角色是什么</a:t>
+              <a:t>为什么 hybrid 比传统和纯 LLM 都更稳</a:t>
             </a:r>
           </a:p>
         </p:txBody>
@@ -27050,7 +27181,7 @@
                 </a:solidFill>
                 <a:latin typeface="Microsoft YaHei"/>
               </a:rPr>
-              <a:t>核心问题：历史 household travel model 在 2022 会系统性高估出行，因此我们研究 label-free event adaptation，而不是单纯调参。</a:t>
+              <a:t>核心问题：不使用 2022 标签调参时，能否用疫情事件先验修正历史模型对家庭出行次数的系统性高估。</a:t>
             </a:r>
           </a:p>
         </p:txBody>
@@ -27092,7 +27223,7 @@
                 </a:solidFill>
                 <a:latin typeface="Microsoft YaHei"/>
               </a:rPr>
-              <a:t>Core question: can structured LLM event priors repair post-pandemic shift without using 2022 target labels for calibration?</a:t>
+              <a:t>Core question: can event priors correct the post-pandemic overprediction without using 2022 target labels for calibration?</a:t>
             </a:r>
           </a:p>
         </p:txBody>
@@ -29953,7 +30084,7 @@
                 </a:solidFill>
                 <a:latin typeface="Microsoft YaHei"/>
               </a:rPr>
-              <a:t>Routine predictor + LLM event prior + fixed no-label adapter</a:t>
+              <a:t>历史模型给基线，LLM 只给事件折减因子</a:t>
             </a:r>
           </a:p>
         </p:txBody>
@@ -30189,7 +30320,7 @@
                 </a:solidFill>
                 <a:latin typeface="Microsoft YaHei"/>
               </a:rPr>
-              <a:t>Historical routine lane</a:t>
+              <a:t>Routine baseline</a:t>
             </a:r>
           </a:p>
         </p:txBody>
@@ -30491,7 +30622,7 @@
                 </a:solidFill>
                 <a:latin typeface="Microsoft YaHei"/>
               </a:rPr>
-              <a:t>Feature harmonization</a:t>
+              <a:t>Household features</a:t>
             </a:r>
           </a:p>
         </p:txBody>
@@ -30533,7 +30664,7 @@
                 </a:solidFill>
                 <a:latin typeface="Microsoft YaHei"/>
               </a:rPr>
-              <a:t>stable household covariates</a:t>
+              <a:t>stable covariates</a:t>
             </a:r>
           </a:p>
         </p:txBody>
@@ -30747,7 +30878,7 @@
                 </a:solidFill>
                 <a:latin typeface="Microsoft YaHei"/>
               </a:rPr>
-              <a:t>LLM event lane</a:t>
+              <a:t>Event prior</a:t>
             </a:r>
           </a:p>
         </p:txBody>
@@ -30877,7 +31008,7 @@
                 </a:solidFill>
                 <a:latin typeface="Microsoft YaHei"/>
               </a:rPr>
-              <a:t>2022 household profiles</a:t>
+              <a:t>2022 cohort profile</a:t>
             </a:r>
           </a:p>
         </p:txBody>
@@ -30919,7 +31050,7 @@
                 </a:solidFill>
                 <a:latin typeface="Microsoft YaHei"/>
               </a:rPr>
-              <a:t>cohort aggregation</a:t>
+              <a:t>aggregated households</a:t>
             </a:r>
           </a:p>
         </p:txBody>
@@ -31049,7 +31180,7 @@
                 </a:solidFill>
                 <a:latin typeface="Microsoft YaHei"/>
               </a:rPr>
-              <a:t>GPT-5.5 prompts</a:t>
+              <a:t>GPT-5.5 prompt</a:t>
             </a:r>
           </a:p>
         </p:txBody>
@@ -31091,7 +31222,7 @@
                 </a:solidFill>
                 <a:latin typeface="Microsoft YaHei"/>
               </a:rPr>
-              <a:t>structured event reasoning</a:t>
+              <a:t>pandemic context</a:t>
             </a:r>
           </a:p>
         </p:txBody>
@@ -31221,7 +31352,7 @@
                 </a:solidFill>
                 <a:latin typeface="Microsoft YaHei"/>
               </a:rPr>
-              <a:t>Event priors</a:t>
+              <a:t>Event pressure</a:t>
             </a:r>
           </a:p>
         </p:txBody>
@@ -31263,7 +31394,7 @@
                 </a:solidFill>
                 <a:latin typeface="Microsoft YaHei"/>
               </a:rPr>
-              <a:t>trip suppression / transit avoidance</a:t>
+              <a:t>s_event in [0, 1]</a:t>
             </a:r>
           </a:p>
         </p:txBody>
@@ -31305,7 +31436,7 @@
                 </a:solidFill>
                 <a:latin typeface="Microsoft YaHei"/>
               </a:rPr>
-              <a:t>No-label adapter lane</a:t>
+              <a:t>Fixed adapter</a:t>
             </a:r>
           </a:p>
         </p:txBody>
@@ -31435,7 +31566,7 @@
                 </a:solidFill>
                 <a:latin typeface="Microsoft YaHei"/>
               </a:rPr>
-              <a:t>Fixed correction</a:t>
+              <a:t>Label-free rule</a:t>
             </a:r>
           </a:p>
         </p:txBody>
@@ -31477,7 +31608,7 @@
                 </a:solidFill>
                 <a:latin typeface="Microsoft YaHei"/>
               </a:rPr>
-              <a:t>no 2022 label tuning</a:t>
+              <a:t>fixed alpha / threshold</a:t>
             </a:r>
           </a:p>
         </p:txBody>
@@ -31607,7 +31738,7 @@
                 </a:solidFill>
                 <a:latin typeface="Microsoft YaHei"/>
               </a:rPr>
-              <a:t>Predicted behavior</a:t>
+              <a:t>Corrected output</a:t>
             </a:r>
           </a:p>
         </p:txBody>
@@ -31649,7 +31780,7 @@
                 </a:solidFill>
                 <a:latin typeface="Microsoft YaHei"/>
               </a:rPr>
-              <a:t>trip count + mode shares</a:t>
+              <a:t>trips + mode shares</a:t>
             </a:r>
           </a:p>
         </p:txBody>
@@ -31908,7 +32039,7 @@
                 </a:solidFill>
                 <a:latin typeface="Microsoft YaHei"/>
               </a:rPr>
-              <a:t>Core rule</a:t>
+              <a:t>融合公式</a:t>
             </a:r>
           </a:p>
         </p:txBody>
@@ -31921,8 +32052,8 @@
         </p:nvSpPr>
         <p:spPr>
           <a:xfrm>
-            <a:off x="1874519" y="5614416"/>
-            <a:ext cx="8686800" cy="237744"/>
+            <a:off x="1828800" y="5596128"/>
+            <a:ext cx="5394960" cy="256032"/>
           </a:xfrm>
           <a:prstGeom prst="rect">
             <a:avLst/>
@@ -31936,7 +32067,7 @@
           <a:lstStyle/>
           <a:p>
             <a:pPr algn="l">
-              <a:defRPr sz="1150" b="1">
+              <a:defRPr sz="1200" b="1">
                 <a:solidFill>
                   <a:srgbClr val="0F172A"/>
                 </a:solidFill>
@@ -31944,13 +32075,55 @@
               </a:defRPr>
             </a:pPr>
             <a:r>
-              <a:rPr sz="1150" b="1">
+              <a:rPr sz="1200" b="1">
                 <a:solidFill>
                   <a:srgbClr val="0F172A"/>
                 </a:solidFill>
                 <a:latin typeface="Microsoft YaHei"/>
               </a:rPr>
-              <a:t>prediction = historical routine prediction x clip(1 - alpha x event_pressure, min_factor, 1)</a:t>
+              <a:t>ŷ_2022 = f_hist(X) × clip(1 − α × s_event, min_factor, 1)</a:t>
+            </a:r>
+          </a:p>
+        </p:txBody>
+      </p:sp>
+      <p:sp>
+        <p:nvSpPr>
+          <p:cNvPr id="54" name="TextBox 53"/>
+          <p:cNvSpPr txBox="1"/>
+          <p:nvPr/>
+        </p:nvSpPr>
+        <p:spPr>
+          <a:xfrm>
+            <a:off x="6995160" y="5614416"/>
+            <a:ext cx="3566160" cy="219456"/>
+          </a:xfrm>
+          <a:prstGeom prst="rect">
+            <a:avLst/>
+          </a:prstGeom>
+          <a:noFill/>
+        </p:spPr>
+        <p:txBody>
+          <a:bodyPr wrap="square" lIns="27432" rIns="27432" tIns="9144" bIns="9144" anchor="ctr">
+            <a:spAutoFit/>
+          </a:bodyPr>
+          <a:lstStyle/>
+          <a:p>
+            <a:pPr algn="l">
+              <a:defRPr sz="1000" b="1">
+                <a:solidFill>
+                  <a:srgbClr val="64748B"/>
+                </a:solidFill>
+                <a:latin typeface="Microsoft YaHei"/>
+              </a:defRPr>
+            </a:pPr>
+            <a:r>
+              <a:rPr sz="1000" b="1">
+                <a:solidFill>
+                  <a:srgbClr val="64748B"/>
+                </a:solidFill>
+                <a:latin typeface="Microsoft YaHei"/>
+              </a:rPr>
+              <a:t>LLM 不输出 trip count，只输出事件压力 s_event。</a:t>
             </a:r>
           </a:p>
         </p:txBody>
@@ -32187,7 +32360,7 @@
                 </a:solidFill>
                 <a:latin typeface="Microsoft YaHei"/>
               </a:rPr>
-              <a:t>约束 LLM 解释 event response，而不是直接预测标签</a:t>
+              <a:t>从 cohort 描述生成结构化疫情响应变量</a:t>
             </a:r>
           </a:p>
         </p:txBody>
@@ -32466,7 +32639,7 @@
                 </a:solidFill>
                 <a:latin typeface="Microsoft YaHei"/>
               </a:rPr>
-              <a:t>Prior field</a:t>
+              <a:t>LLM output</a:t>
             </a:r>
           </a:p>
         </p:txBody>
@@ -32551,7 +32724,7 @@
                 </a:solidFill>
                 <a:latin typeface="Microsoft YaHei"/>
               </a:rPr>
-              <a:t>Interpretation</a:t>
+              <a:t>变量含义</a:t>
             </a:r>
           </a:p>
         </p:txBody>
@@ -32636,7 +32809,7 @@
                 </a:solidFill>
                 <a:latin typeface="Microsoft YaHei"/>
               </a:rPr>
-              <a:t>Expected 2022 effect</a:t>
+              <a:t>进入模型的位置</a:t>
             </a:r>
           </a:p>
         </p:txBody>
@@ -32810,7 +32983,7 @@
                 </a:solidFill>
                 <a:latin typeface="Microsoft YaHei"/>
               </a:rPr>
-              <a:t>overall travel reduction pressure</a:t>
+              <a:t>总体出行折减压力</a:t>
             </a:r>
           </a:p>
         </p:txBody>
@@ -32897,7 +33070,7 @@
                 </a:solidFill>
                 <a:latin typeface="Microsoft YaHei"/>
               </a:rPr>
-              <a:t>lower total trip count</a:t>
+              <a:t>修正 total trips</a:t>
             </a:r>
           </a:p>
         </p:txBody>
@@ -33071,7 +33244,7 @@
                 </a:solidFill>
                 <a:latin typeface="Microsoft YaHei"/>
               </a:rPr>
-              <a:t>work-trip substitution probability</a:t>
+              <a:t>通勤被远程办公替代的可能性</a:t>
             </a:r>
           </a:p>
         </p:txBody>
@@ -33158,7 +33331,7 @@
                 </a:solidFill>
                 <a:latin typeface="Microsoft YaHei"/>
               </a:rPr>
-              <a:t>fewer commute-related trips</a:t>
+              <a:t>解释出行下降来源</a:t>
             </a:r>
           </a:p>
         </p:txBody>
@@ -33332,7 +33505,7 @@
                 </a:solidFill>
                 <a:latin typeface="Microsoft YaHei"/>
               </a:rPr>
-              <a:t>public-transit perceived risk</a:t>
+              <a:t>公共交通规避倾向</a:t>
             </a:r>
           </a:p>
         </p:txBody>
@@ -33419,7 +33592,7 @@
                 </a:solidFill>
                 <a:latin typeface="Microsoft YaHei"/>
               </a:rPr>
-              <a:t>lower transit share</a:t>
+              <a:t>修正 transit share</a:t>
             </a:r>
           </a:p>
         </p:txBody>
@@ -33593,7 +33766,7 @@
                 </a:solidFill>
                 <a:latin typeface="Microsoft YaHei"/>
               </a:rPr>
-              <a:t>online replacement of shopping trips</a:t>
+              <a:t>购物/服务被线上替代</a:t>
             </a:r>
           </a:p>
         </p:txBody>
@@ -33680,7 +33853,7 @@
                 </a:solidFill>
                 <a:latin typeface="Microsoft YaHei"/>
               </a:rPr>
-              <a:t>fewer discretionary trips</a:t>
+              <a:t>解释非通勤出行下降</a:t>
             </a:r>
           </a:p>
         </p:txBody>
@@ -33854,7 +34027,7 @@
                 </a:solidFill>
                 <a:latin typeface="Microsoft YaHei"/>
               </a:rPr>
-              <a:t>ability to return to routine mobility</a:t>
+              <a:t>恢复到常态出行的能力</a:t>
             </a:r>
           </a:p>
         </p:txBody>
@@ -33941,7 +34114,7 @@
                 </a:solidFill>
                 <a:latin typeface="Microsoft YaHei"/>
               </a:rPr>
-              <a:t>heterogeneous rebound</a:t>
+              <a:t>刻画 rebound 差异</a:t>
             </a:r>
           </a:p>
         </p:txBody>
@@ -34115,7 +34288,7 @@
                 </a:solidFill>
                 <a:latin typeface="Microsoft YaHei"/>
               </a:rPr>
-              <a:t>LLM self-reported certainty</a:t>
+              <a:t>LLM 对判断的自评置信度</a:t>
             </a:r>
           </a:p>
         </p:txBody>
@@ -34202,7 +34375,7 @@
                 </a:solidFill>
                 <a:latin typeface="Microsoft YaHei"/>
               </a:rPr>
-              <a:t>quality-check signal</a:t>
+              <a:t>质量检查信号</a:t>
             </a:r>
           </a:p>
         </p:txBody>
@@ -34287,7 +34460,7 @@
                 </a:solidFill>
                 <a:latin typeface="Microsoft YaHei"/>
               </a:rPr>
-              <a:t>Allowed in prompt</a:t>
+              <a:t>LLM 输入</a:t>
             </a:r>
           </a:p>
         </p:txBody>
@@ -34372,7 +34545,7 @@
                 </a:solidFill>
                 <a:latin typeface="Microsoft YaHei"/>
               </a:rPr>
-              <a:t>Excluded to avoid leakage</a:t>
+              <a:t>明确排除</a:t>
             </a:r>
           </a:p>
         </p:txBody>
@@ -34720,7 +34893,7 @@
                 </a:solidFill>
                 <a:latin typeface="Microsoft YaHei"/>
               </a:rPr>
-              <a:t>sample weights and household IDs</a:t>
+              <a:t>sample weights / household IDs</a:t>
             </a:r>
           </a:p>
         </p:txBody>
@@ -34894,7 +35067,7 @@
                 </a:solidFill>
                 <a:latin typeface="Microsoft YaHei"/>
               </a:rPr>
-              <a:t>aggregate target-year outcomes</a:t>
+              <a:t>aggregate 2022 outcomes</a:t>
             </a:r>
           </a:p>
         </p:txBody>
@@ -34908,7 +35081,7 @@
         <p:spPr>
           <a:xfrm>
             <a:off x="868680" y="5779008"/>
-            <a:ext cx="1417320" cy="201168"/>
+            <a:ext cx="1005840" cy="201168"/>
           </a:xfrm>
           <a:prstGeom prst="rect">
             <a:avLst/>
@@ -34936,7 +35109,7 @@
                 </a:solidFill>
                 <a:latin typeface="Microsoft YaHei"/>
               </a:rPr>
-              <a:t>Design implication</a:t>
+              <a:t>关键约束</a:t>
             </a:r>
           </a:p>
         </p:txBody>
@@ -34949,8 +35122,8 @@
         </p:nvSpPr>
         <p:spPr>
           <a:xfrm>
-            <a:off x="2240280" y="5742432"/>
-            <a:ext cx="8046720" cy="237744"/>
+            <a:off x="1874519" y="5733288"/>
+            <a:ext cx="8595360" cy="256032"/>
           </a:xfrm>
           <a:prstGeom prst="rect">
             <a:avLst/>
@@ -34964,7 +35137,7 @@
           <a:lstStyle/>
           <a:p>
             <a:pPr algn="l">
-              <a:defRPr sz="950" b="1">
+              <a:defRPr sz="1150" b="1">
                 <a:solidFill>
                   <a:srgbClr val="0F172A"/>
                 </a:solidFill>
@@ -34972,13 +35145,13 @@
               </a:defRPr>
             </a:pPr>
             <a:r>
-              <a:rPr sz="950" b="1">
+              <a:rPr sz="1150" b="1">
                 <a:solidFill>
                   <a:srgbClr val="0F172A"/>
                 </a:solidFill>
                 <a:latin typeface="Microsoft YaHei"/>
               </a:rPr>
-              <a:t>The LLM contributes event semantics; the historical model keeps household-level numerical grounding.</a:t>
+              <a:t>LLM 只提供 s_event；预测数值仍由历史模型 f_hist(X) 和固定修正规则控制。</a:t>
             </a:r>
           </a:p>
         </p:txBody>
@@ -35173,7 +35346,7 @@
                 </a:solidFill>
                 <a:latin typeface="Microsoft YaHei"/>
               </a:rPr>
-              <a:t>对比设计 / Evaluation Design</a:t>
+              <a:t>对比体系 / Evaluation Design</a:t>
             </a:r>
           </a:p>
         </p:txBody>
@@ -35215,7 +35388,7 @@
                 </a:solidFill>
                 <a:latin typeface="Microsoft YaHei"/>
               </a:rPr>
-              <a:t>Every baseline answers a different design question</a:t>
+              <a:t>传统模型、简单事件修正、纯 LLM 与 hybrid 方法逐层比较</a:t>
             </a:r>
           </a:p>
         </p:txBody>
@@ -35422,8 +35595,8 @@
         </p:nvSpPr>
         <p:spPr>
           <a:xfrm>
-            <a:off x="475488" y="1097280"/>
-            <a:ext cx="1874519" cy="310896"/>
+            <a:off x="475488" y="1078992"/>
+            <a:ext cx="1920240" cy="320040"/>
           </a:xfrm>
           <a:prstGeom prst="rect">
             <a:avLst/>
@@ -35465,8 +35638,8 @@
         </p:nvSpPr>
         <p:spPr>
           <a:xfrm>
-            <a:off x="512064" y="1133856"/>
-            <a:ext cx="1801367" cy="237744"/>
+            <a:off x="512064" y="1124712"/>
+            <a:ext cx="1847088" cy="228599"/>
           </a:xfrm>
           <a:prstGeom prst="rect">
             <a:avLst/>
@@ -35480,7 +35653,7 @@
           <a:lstStyle/>
           <a:p>
             <a:pPr algn="ctr">
-              <a:defRPr sz="740" b="1">
+              <a:defRPr sz="760" b="1">
                 <a:solidFill>
                   <a:srgbClr val="FFFFFF"/>
                 </a:solidFill>
@@ -35488,7 +35661,7 @@
               </a:defRPr>
             </a:pPr>
             <a:r>
-              <a:rPr sz="740" b="1">
+              <a:rPr sz="760" b="1">
                 <a:solidFill>
                   <a:srgbClr val="FFFFFF"/>
                 </a:solidFill>
@@ -35507,8 +35680,8 @@
         </p:nvSpPr>
         <p:spPr>
           <a:xfrm>
-            <a:off x="2350008" y="1097280"/>
-            <a:ext cx="1143000" cy="310896"/>
+            <a:off x="2395728" y="1078992"/>
+            <a:ext cx="914400" cy="320040"/>
           </a:xfrm>
           <a:prstGeom prst="rect">
             <a:avLst/>
@@ -35550,8 +35723,8 @@
         </p:nvSpPr>
         <p:spPr>
           <a:xfrm>
-            <a:off x="2386584" y="1133856"/>
-            <a:ext cx="1069848" cy="237744"/>
+            <a:off x="2432304" y="1124712"/>
+            <a:ext cx="841248" cy="228599"/>
           </a:xfrm>
           <a:prstGeom prst="rect">
             <a:avLst/>
@@ -35565,7 +35738,7 @@
           <a:lstStyle/>
           <a:p>
             <a:pPr algn="ctr">
-              <a:defRPr sz="740" b="1">
+              <a:defRPr sz="760" b="1">
                 <a:solidFill>
                   <a:srgbClr val="FFFFFF"/>
                 </a:solidFill>
@@ -35573,13 +35746,13 @@
               </a:defRPr>
             </a:pPr>
             <a:r>
-              <a:rPr sz="740" b="1">
+              <a:rPr sz="760" b="1">
                 <a:solidFill>
                   <a:srgbClr val="FFFFFF"/>
                 </a:solidFill>
                 <a:latin typeface="Microsoft YaHei"/>
               </a:rPr>
-              <a:t>pre-2022 labels</a:t>
+              <a:t>历史模型</a:t>
             </a:r>
           </a:p>
         </p:txBody>
@@ -35592,8 +35765,8 @@
         </p:nvSpPr>
         <p:spPr>
           <a:xfrm>
-            <a:off x="3493008" y="1097280"/>
-            <a:ext cx="914400" cy="310896"/>
+            <a:off x="3310128" y="1078992"/>
+            <a:ext cx="822960" cy="320040"/>
           </a:xfrm>
           <a:prstGeom prst="rect">
             <a:avLst/>
@@ -35635,8 +35808,8 @@
         </p:nvSpPr>
         <p:spPr>
           <a:xfrm>
-            <a:off x="3529584" y="1133856"/>
-            <a:ext cx="841248" cy="237744"/>
+            <a:off x="3346704" y="1124712"/>
+            <a:ext cx="749808" cy="228599"/>
           </a:xfrm>
           <a:prstGeom prst="rect">
             <a:avLst/>
@@ -35650,7 +35823,7 @@
           <a:lstStyle/>
           <a:p>
             <a:pPr algn="ctr">
-              <a:defRPr sz="740" b="1">
+              <a:defRPr sz="760" b="1">
                 <a:solidFill>
                   <a:srgbClr val="FFFFFF"/>
                 </a:solidFill>
@@ -35658,13 +35831,13 @@
               </a:defRPr>
             </a:pPr>
             <a:r>
-              <a:rPr sz="740" b="1">
+              <a:rPr sz="760" b="1">
                 <a:solidFill>
                   <a:srgbClr val="FFFFFF"/>
                 </a:solidFill>
                 <a:latin typeface="Microsoft YaHei"/>
               </a:rPr>
-              <a:t>LLM prior</a:t>
+              <a:t>LLM先验</a:t>
             </a:r>
           </a:p>
         </p:txBody>
@@ -35677,8 +35850,8 @@
         </p:nvSpPr>
         <p:spPr>
           <a:xfrm>
-            <a:off x="4407408" y="1097280"/>
-            <a:ext cx="960120" cy="310896"/>
+            <a:off x="4133087" y="1078992"/>
+            <a:ext cx="868680" cy="320040"/>
           </a:xfrm>
           <a:prstGeom prst="rect">
             <a:avLst/>
@@ -35720,8 +35893,8 @@
         </p:nvSpPr>
         <p:spPr>
           <a:xfrm>
-            <a:off x="4443984" y="1133856"/>
-            <a:ext cx="886968" cy="237744"/>
+            <a:off x="4169663" y="1124712"/>
+            <a:ext cx="795528" cy="228599"/>
           </a:xfrm>
           <a:prstGeom prst="rect">
             <a:avLst/>
@@ -35735,7 +35908,7 @@
           <a:lstStyle/>
           <a:p>
             <a:pPr algn="ctr">
-              <a:defRPr sz="740" b="1">
+              <a:defRPr sz="760" b="1">
                 <a:solidFill>
                   <a:srgbClr val="FFFFFF"/>
                 </a:solidFill>
@@ -35743,13 +35916,13 @@
               </a:defRPr>
             </a:pPr>
             <a:r>
-              <a:rPr sz="740" b="1">
+              <a:rPr sz="760" b="1">
                 <a:solidFill>
                   <a:srgbClr val="FFFFFF"/>
                 </a:solidFill>
                 <a:latin typeface="Microsoft YaHei"/>
               </a:rPr>
-              <a:t>2022 labels</a:t>
+              <a:t>2022标签</a:t>
             </a:r>
           </a:p>
         </p:txBody>
@@ -35762,8 +35935,8 @@
         </p:nvSpPr>
         <p:spPr>
           <a:xfrm>
-            <a:off x="5367527" y="1097280"/>
-            <a:ext cx="3657600" cy="310896"/>
+            <a:off x="5001768" y="1078992"/>
+            <a:ext cx="4434840" cy="320040"/>
           </a:xfrm>
           <a:prstGeom prst="rect">
             <a:avLst/>
@@ -35805,8 +35978,8 @@
         </p:nvSpPr>
         <p:spPr>
           <a:xfrm>
-            <a:off x="5404103" y="1133856"/>
-            <a:ext cx="3584448" cy="237744"/>
+            <a:off x="5038344" y="1124712"/>
+            <a:ext cx="4361688" cy="228599"/>
           </a:xfrm>
           <a:prstGeom prst="rect">
             <a:avLst/>
@@ -35820,7 +35993,7 @@
           <a:lstStyle/>
           <a:p>
             <a:pPr algn="ctr">
-              <a:defRPr sz="740" b="1">
+              <a:defRPr sz="760" b="1">
                 <a:solidFill>
                   <a:srgbClr val="FFFFFF"/>
                 </a:solidFill>
@@ -35828,13 +36001,13 @@
               </a:defRPr>
             </a:pPr>
             <a:r>
-              <a:rPr sz="740" b="1">
+              <a:rPr sz="760" b="1">
                 <a:solidFill>
                   <a:srgbClr val="FFFFFF"/>
                 </a:solidFill>
                 <a:latin typeface="Microsoft YaHei"/>
               </a:rPr>
-              <a:t>Role</a:t>
+              <a:t>对比作用</a:t>
             </a:r>
           </a:p>
         </p:txBody>
@@ -35847,8 +36020,8 @@
         </p:nvSpPr>
         <p:spPr>
           <a:xfrm>
-            <a:off x="9025128" y="1097280"/>
-            <a:ext cx="822960" cy="310896"/>
+            <a:off x="9436607" y="1078992"/>
+            <a:ext cx="685800" cy="320040"/>
           </a:xfrm>
           <a:prstGeom prst="rect">
             <a:avLst/>
@@ -35890,8 +36063,8 @@
         </p:nvSpPr>
         <p:spPr>
           <a:xfrm>
-            <a:off x="9061703" y="1133856"/>
-            <a:ext cx="749808" cy="237744"/>
+            <a:off x="9473183" y="1124712"/>
+            <a:ext cx="612648" cy="228599"/>
           </a:xfrm>
           <a:prstGeom prst="rect">
             <a:avLst/>
@@ -35905,7 +36078,7 @@
           <a:lstStyle/>
           <a:p>
             <a:pPr algn="ctr">
-              <a:defRPr sz="740" b="1">
+              <a:defRPr sz="760" b="1">
                 <a:solidFill>
                   <a:srgbClr val="FFFFFF"/>
                 </a:solidFill>
@@ -35913,7 +36086,7 @@
               </a:defRPr>
             </a:pPr>
             <a:r>
-              <a:rPr sz="740" b="1">
+              <a:rPr sz="760" b="1">
                 <a:solidFill>
                   <a:srgbClr val="FFFFFF"/>
                 </a:solidFill>
@@ -35932,8 +36105,8 @@
         </p:nvSpPr>
         <p:spPr>
           <a:xfrm>
-            <a:off x="475488" y="1408176"/>
-            <a:ext cx="1874519" cy="310896"/>
+            <a:off x="475488" y="1399031"/>
+            <a:ext cx="1920240" cy="320040"/>
           </a:xfrm>
           <a:prstGeom prst="rect">
             <a:avLst/>
@@ -35977,8 +36150,8 @@
         </p:nvSpPr>
         <p:spPr>
           <a:xfrm>
-            <a:off x="521208" y="1440180"/>
-            <a:ext cx="1783079" cy="246888"/>
+            <a:off x="521208" y="1435607"/>
+            <a:ext cx="1828800" cy="246887"/>
           </a:xfrm>
           <a:prstGeom prst="rect">
             <a:avLst/>
@@ -35992,7 +36165,7 @@
           <a:lstStyle/>
           <a:p>
             <a:pPr algn="l">
-              <a:defRPr sz="740" b="1">
+              <a:defRPr sz="755" b="1">
                 <a:solidFill>
                   <a:srgbClr val="0F172A"/>
                 </a:solidFill>
@@ -36000,7 +36173,7 @@
               </a:defRPr>
             </a:pPr>
             <a:r>
-              <a:rPr sz="740" b="1">
+              <a:rPr sz="755" b="1">
                 <a:solidFill>
                   <a:srgbClr val="0F172A"/>
                 </a:solidFill>
@@ -36019,8 +36192,8 @@
         </p:nvSpPr>
         <p:spPr>
           <a:xfrm>
-            <a:off x="2350008" y="1408176"/>
-            <a:ext cx="1143000" cy="310896"/>
+            <a:off x="2395728" y="1399031"/>
+            <a:ext cx="914400" cy="320040"/>
           </a:xfrm>
           <a:prstGeom prst="rect">
             <a:avLst/>
@@ -36064,36 +36237,36 @@
         </p:nvSpPr>
         <p:spPr>
           <a:xfrm>
-            <a:off x="2395727" y="1440180"/>
-            <a:ext cx="1051560" cy="246888"/>
-          </a:xfrm>
-          <a:prstGeom prst="rect">
-            <a:avLst/>
-          </a:prstGeom>
-          <a:noFill/>
-        </p:spPr>
-        <p:txBody>
-          <a:bodyPr wrap="square" lIns="27432" rIns="27432" tIns="9144" bIns="9144" anchor="ctr">
-            <a:spAutoFit/>
-          </a:bodyPr>
-          <a:lstStyle/>
-          <a:p>
-            <a:pPr algn="l">
-              <a:defRPr sz="740" b="0">
-                <a:solidFill>
-                  <a:srgbClr val="0F172A"/>
-                </a:solidFill>
-                <a:latin typeface="Microsoft YaHei"/>
-              </a:defRPr>
-            </a:pPr>
-            <a:r>
-              <a:rPr sz="740" b="0">
-                <a:solidFill>
-                  <a:srgbClr val="0F172A"/>
-                </a:solidFill>
-                <a:latin typeface="Microsoft YaHei"/>
-              </a:rPr>
-              <a:t>No</a:t>
+            <a:off x="2441448" y="1421891"/>
+            <a:ext cx="822960" cy="274320"/>
+          </a:xfrm>
+          <a:prstGeom prst="rect">
+            <a:avLst/>
+          </a:prstGeom>
+          <a:noFill/>
+        </p:spPr>
+        <p:txBody>
+          <a:bodyPr wrap="square" lIns="27432" rIns="27432" tIns="9144" bIns="9144" anchor="ctr">
+            <a:spAutoFit/>
+          </a:bodyPr>
+          <a:lstStyle/>
+          <a:p>
+            <a:pPr algn="ctr">
+              <a:defRPr sz="1250" b="1">
+                <a:solidFill>
+                  <a:srgbClr val="198754"/>
+                </a:solidFill>
+                <a:latin typeface="Microsoft YaHei"/>
+              </a:defRPr>
+            </a:pPr>
+            <a:r>
+              <a:rPr sz="1250" b="1">
+                <a:solidFill>
+                  <a:srgbClr val="198754"/>
+                </a:solidFill>
+                <a:latin typeface="Microsoft YaHei"/>
+              </a:rPr>
+              <a:t>●</a:t>
             </a:r>
           </a:p>
         </p:txBody>
@@ -36106,8 +36279,8 @@
         </p:nvSpPr>
         <p:spPr>
           <a:xfrm>
-            <a:off x="3493008" y="1408176"/>
-            <a:ext cx="914400" cy="310896"/>
+            <a:off x="3310128" y="1399031"/>
+            <a:ext cx="822960" cy="320040"/>
           </a:xfrm>
           <a:prstGeom prst="rect">
             <a:avLst/>
@@ -36151,36 +36324,36 @@
         </p:nvSpPr>
         <p:spPr>
           <a:xfrm>
-            <a:off x="3538727" y="1440180"/>
-            <a:ext cx="822960" cy="246888"/>
-          </a:xfrm>
-          <a:prstGeom prst="rect">
-            <a:avLst/>
-          </a:prstGeom>
-          <a:noFill/>
-        </p:spPr>
-        <p:txBody>
-          <a:bodyPr wrap="square" lIns="27432" rIns="27432" tIns="9144" bIns="9144" anchor="ctr">
-            <a:spAutoFit/>
-          </a:bodyPr>
-          <a:lstStyle/>
-          <a:p>
-            <a:pPr algn="l">
-              <a:defRPr sz="740" b="0">
-                <a:solidFill>
-                  <a:srgbClr val="0F172A"/>
-                </a:solidFill>
-                <a:latin typeface="Microsoft YaHei"/>
-              </a:defRPr>
-            </a:pPr>
-            <a:r>
-              <a:rPr sz="740" b="0">
-                <a:solidFill>
-                  <a:srgbClr val="0F172A"/>
-                </a:solidFill>
-                <a:latin typeface="Microsoft YaHei"/>
-              </a:rPr>
-              <a:t>No</a:t>
+            <a:off x="3355848" y="1421891"/>
+            <a:ext cx="731520" cy="274320"/>
+          </a:xfrm>
+          <a:prstGeom prst="rect">
+            <a:avLst/>
+          </a:prstGeom>
+          <a:noFill/>
+        </p:spPr>
+        <p:txBody>
+          <a:bodyPr wrap="square" lIns="27432" rIns="27432" tIns="9144" bIns="9144" anchor="ctr">
+            <a:spAutoFit/>
+          </a:bodyPr>
+          <a:lstStyle/>
+          <a:p>
+            <a:pPr algn="ctr">
+              <a:defRPr sz="1250" b="1">
+                <a:solidFill>
+                  <a:srgbClr val="BE123C"/>
+                </a:solidFill>
+                <a:latin typeface="Microsoft YaHei"/>
+              </a:defRPr>
+            </a:pPr>
+            <a:r>
+              <a:rPr sz="1250" b="1">
+                <a:solidFill>
+                  <a:srgbClr val="BE123C"/>
+                </a:solidFill>
+                <a:latin typeface="Microsoft YaHei"/>
+              </a:rPr>
+              <a:t>×</a:t>
             </a:r>
           </a:p>
         </p:txBody>
@@ -36193,8 +36366,8 @@
         </p:nvSpPr>
         <p:spPr>
           <a:xfrm>
-            <a:off x="4407408" y="1408176"/>
-            <a:ext cx="960120" cy="310896"/>
+            <a:off x="4133087" y="1399031"/>
+            <a:ext cx="868680" cy="320040"/>
           </a:xfrm>
           <a:prstGeom prst="rect">
             <a:avLst/>
@@ -36238,36 +36411,36 @@
         </p:nvSpPr>
         <p:spPr>
           <a:xfrm>
-            <a:off x="4453128" y="1440180"/>
-            <a:ext cx="868680" cy="246888"/>
-          </a:xfrm>
-          <a:prstGeom prst="rect">
-            <a:avLst/>
-          </a:prstGeom>
-          <a:noFill/>
-        </p:spPr>
-        <p:txBody>
-          <a:bodyPr wrap="square" lIns="27432" rIns="27432" tIns="9144" bIns="9144" anchor="ctr">
-            <a:spAutoFit/>
-          </a:bodyPr>
-          <a:lstStyle/>
-          <a:p>
-            <a:pPr algn="l">
-              <a:defRPr sz="740" b="0">
-                <a:solidFill>
-                  <a:srgbClr val="0F172A"/>
-                </a:solidFill>
-                <a:latin typeface="Microsoft YaHei"/>
-              </a:defRPr>
-            </a:pPr>
-            <a:r>
-              <a:rPr sz="740" b="0">
-                <a:solidFill>
-                  <a:srgbClr val="0F172A"/>
-                </a:solidFill>
-                <a:latin typeface="Microsoft YaHei"/>
-              </a:rPr>
-              <a:t>No</a:t>
+            <a:off x="4178807" y="1421891"/>
+            <a:ext cx="777240" cy="274320"/>
+          </a:xfrm>
+          <a:prstGeom prst="rect">
+            <a:avLst/>
+          </a:prstGeom>
+          <a:noFill/>
+        </p:spPr>
+        <p:txBody>
+          <a:bodyPr wrap="square" lIns="27432" rIns="27432" tIns="9144" bIns="9144" anchor="ctr">
+            <a:spAutoFit/>
+          </a:bodyPr>
+          <a:lstStyle/>
+          <a:p>
+            <a:pPr algn="ctr">
+              <a:defRPr sz="1250" b="1">
+                <a:solidFill>
+                  <a:srgbClr val="BE123C"/>
+                </a:solidFill>
+                <a:latin typeface="Microsoft YaHei"/>
+              </a:defRPr>
+            </a:pPr>
+            <a:r>
+              <a:rPr sz="1250" b="1">
+                <a:solidFill>
+                  <a:srgbClr val="BE123C"/>
+                </a:solidFill>
+                <a:latin typeface="Microsoft YaHei"/>
+              </a:rPr>
+              <a:t>×</a:t>
             </a:r>
           </a:p>
         </p:txBody>
@@ -36280,8 +36453,8 @@
         </p:nvSpPr>
         <p:spPr>
           <a:xfrm>
-            <a:off x="5367527" y="1408176"/>
-            <a:ext cx="3657600" cy="310896"/>
+            <a:off x="5001768" y="1399031"/>
+            <a:ext cx="4434840" cy="320040"/>
           </a:xfrm>
           <a:prstGeom prst="rect">
             <a:avLst/>
@@ -36325,8 +36498,8 @@
         </p:nvSpPr>
         <p:spPr>
           <a:xfrm>
-            <a:off x="5413247" y="1440180"/>
-            <a:ext cx="3566160" cy="246888"/>
+            <a:off x="5047488" y="1435607"/>
+            <a:ext cx="4343400" cy="246887"/>
           </a:xfrm>
           <a:prstGeom prst="rect">
             <a:avLst/>
@@ -36340,7 +36513,7 @@
           <a:lstStyle/>
           <a:p>
             <a:pPr algn="l">
-              <a:defRPr sz="740" b="0">
+              <a:defRPr sz="755" b="0">
                 <a:solidFill>
                   <a:srgbClr val="0F172A"/>
                 </a:solidFill>
@@ -36348,13 +36521,13 @@
               </a:defRPr>
             </a:pPr>
             <a:r>
-              <a:rPr sz="740" b="0">
+              <a:rPr sz="755" b="0">
                 <a:solidFill>
                   <a:srgbClr val="0F172A"/>
                 </a:solidFill>
                 <a:latin typeface="Microsoft YaHei"/>
               </a:rPr>
-              <a:t>naive historical level</a:t>
+              <a:t>只保留历史平均水平</a:t>
             </a:r>
           </a:p>
         </p:txBody>
@@ -36367,8 +36540,8 @@
         </p:nvSpPr>
         <p:spPr>
           <a:xfrm>
-            <a:off x="9025128" y="1408176"/>
-            <a:ext cx="822960" cy="310896"/>
+            <a:off x="9436607" y="1399031"/>
+            <a:ext cx="685800" cy="320040"/>
           </a:xfrm>
           <a:prstGeom prst="rect">
             <a:avLst/>
@@ -36412,22 +36585,22 @@
         </p:nvSpPr>
         <p:spPr>
           <a:xfrm>
-            <a:off x="9070848" y="1440180"/>
-            <a:ext cx="731520" cy="246888"/>
-          </a:xfrm>
-          <a:prstGeom prst="rect">
-            <a:avLst/>
-          </a:prstGeom>
-          <a:noFill/>
-        </p:spPr>
-        <p:txBody>
-          <a:bodyPr wrap="square" lIns="27432" rIns="27432" tIns="9144" bIns="9144" anchor="ctr">
-            <a:spAutoFit/>
-          </a:bodyPr>
-          <a:lstStyle/>
-          <a:p>
-            <a:pPr algn="l">
-              <a:defRPr sz="740" b="0">
+            <a:off x="9482328" y="1435607"/>
+            <a:ext cx="594360" cy="246887"/>
+          </a:xfrm>
+          <a:prstGeom prst="rect">
+            <a:avLst/>
+          </a:prstGeom>
+          <a:noFill/>
+        </p:spPr>
+        <p:txBody>
+          <a:bodyPr wrap="square" lIns="27432" rIns="27432" tIns="9144" bIns="9144" anchor="ctr">
+            <a:spAutoFit/>
+          </a:bodyPr>
+          <a:lstStyle/>
+          <a:p>
+            <a:pPr algn="r">
+              <a:defRPr sz="755" b="0">
                 <a:solidFill>
                   <a:srgbClr val="0F172A"/>
                 </a:solidFill>
@@ -36435,7 +36608,7 @@
               </a:defRPr>
             </a:pPr>
             <a:r>
-              <a:rPr sz="740" b="0">
+              <a:rPr sz="755" b="0">
                 <a:solidFill>
                   <a:srgbClr val="0F172A"/>
                 </a:solidFill>
@@ -36455,7 +36628,7 @@
         <p:spPr>
           <a:xfrm>
             <a:off x="475488" y="1719072"/>
-            <a:ext cx="1874519" cy="310896"/>
+            <a:ext cx="1920240" cy="320040"/>
           </a:xfrm>
           <a:prstGeom prst="rect">
             <a:avLst/>
@@ -36499,8 +36672,8 @@
         </p:nvSpPr>
         <p:spPr>
           <a:xfrm>
-            <a:off x="521208" y="1751075"/>
-            <a:ext cx="1783079" cy="246888"/>
+            <a:off x="521208" y="1755648"/>
+            <a:ext cx="1828800" cy="246887"/>
           </a:xfrm>
           <a:prstGeom prst="rect">
             <a:avLst/>
@@ -36514,7 +36687,7 @@
           <a:lstStyle/>
           <a:p>
             <a:pPr algn="l">
-              <a:defRPr sz="740" b="1">
+              <a:defRPr sz="755" b="1">
                 <a:solidFill>
                   <a:srgbClr val="0F172A"/>
                 </a:solidFill>
@@ -36522,7 +36695,7 @@
               </a:defRPr>
             </a:pPr>
             <a:r>
-              <a:rPr sz="740" b="1">
+              <a:rPr sz="755" b="1">
                 <a:solidFill>
                   <a:srgbClr val="0F172A"/>
                 </a:solidFill>
@@ -36541,8 +36714,8 @@
         </p:nvSpPr>
         <p:spPr>
           <a:xfrm>
-            <a:off x="2350008" y="1719072"/>
-            <a:ext cx="1143000" cy="310896"/>
+            <a:off x="2395728" y="1719072"/>
+            <a:ext cx="914400" cy="320040"/>
           </a:xfrm>
           <a:prstGeom prst="rect">
             <a:avLst/>
@@ -36586,36 +36759,36 @@
         </p:nvSpPr>
         <p:spPr>
           <a:xfrm>
-            <a:off x="2395727" y="1751075"/>
-            <a:ext cx="1051560" cy="246888"/>
-          </a:xfrm>
-          <a:prstGeom prst="rect">
-            <a:avLst/>
-          </a:prstGeom>
-          <a:noFill/>
-        </p:spPr>
-        <p:txBody>
-          <a:bodyPr wrap="square" lIns="27432" rIns="27432" tIns="9144" bIns="9144" anchor="ctr">
-            <a:spAutoFit/>
-          </a:bodyPr>
-          <a:lstStyle/>
-          <a:p>
-            <a:pPr algn="l">
-              <a:defRPr sz="740" b="0">
-                <a:solidFill>
-                  <a:srgbClr val="0F172A"/>
-                </a:solidFill>
-                <a:latin typeface="Microsoft YaHei"/>
-              </a:defRPr>
-            </a:pPr>
-            <a:r>
-              <a:rPr sz="740" b="0">
-                <a:solidFill>
-                  <a:srgbClr val="0F172A"/>
-                </a:solidFill>
-                <a:latin typeface="Microsoft YaHei"/>
-              </a:rPr>
-              <a:t>Yes</a:t>
+            <a:off x="2441448" y="1741931"/>
+            <a:ext cx="822960" cy="274320"/>
+          </a:xfrm>
+          <a:prstGeom prst="rect">
+            <a:avLst/>
+          </a:prstGeom>
+          <a:noFill/>
+        </p:spPr>
+        <p:txBody>
+          <a:bodyPr wrap="square" lIns="27432" rIns="27432" tIns="9144" bIns="9144" anchor="ctr">
+            <a:spAutoFit/>
+          </a:bodyPr>
+          <a:lstStyle/>
+          <a:p>
+            <a:pPr algn="ctr">
+              <a:defRPr sz="1250" b="1">
+                <a:solidFill>
+                  <a:srgbClr val="198754"/>
+                </a:solidFill>
+                <a:latin typeface="Microsoft YaHei"/>
+              </a:defRPr>
+            </a:pPr>
+            <a:r>
+              <a:rPr sz="1250" b="1">
+                <a:solidFill>
+                  <a:srgbClr val="198754"/>
+                </a:solidFill>
+                <a:latin typeface="Microsoft YaHei"/>
+              </a:rPr>
+              <a:t>●</a:t>
             </a:r>
           </a:p>
         </p:txBody>
@@ -36628,8 +36801,8 @@
         </p:nvSpPr>
         <p:spPr>
           <a:xfrm>
-            <a:off x="3493008" y="1719072"/>
-            <a:ext cx="914400" cy="310896"/>
+            <a:off x="3310128" y="1719072"/>
+            <a:ext cx="822960" cy="320040"/>
           </a:xfrm>
           <a:prstGeom prst="rect">
             <a:avLst/>
@@ -36673,36 +36846,36 @@
         </p:nvSpPr>
         <p:spPr>
           <a:xfrm>
-            <a:off x="3538727" y="1751075"/>
-            <a:ext cx="822960" cy="246888"/>
-          </a:xfrm>
-          <a:prstGeom prst="rect">
-            <a:avLst/>
-          </a:prstGeom>
-          <a:noFill/>
-        </p:spPr>
-        <p:txBody>
-          <a:bodyPr wrap="square" lIns="27432" rIns="27432" tIns="9144" bIns="9144" anchor="ctr">
-            <a:spAutoFit/>
-          </a:bodyPr>
-          <a:lstStyle/>
-          <a:p>
-            <a:pPr algn="l">
-              <a:defRPr sz="740" b="0">
-                <a:solidFill>
-                  <a:srgbClr val="0F172A"/>
-                </a:solidFill>
-                <a:latin typeface="Microsoft YaHei"/>
-              </a:defRPr>
-            </a:pPr>
-            <a:r>
-              <a:rPr sz="740" b="0">
-                <a:solidFill>
-                  <a:srgbClr val="0F172A"/>
-                </a:solidFill>
-                <a:latin typeface="Microsoft YaHei"/>
-              </a:rPr>
-              <a:t>No</a:t>
+            <a:off x="3355848" y="1741931"/>
+            <a:ext cx="731520" cy="274320"/>
+          </a:xfrm>
+          <a:prstGeom prst="rect">
+            <a:avLst/>
+          </a:prstGeom>
+          <a:noFill/>
+        </p:spPr>
+        <p:txBody>
+          <a:bodyPr wrap="square" lIns="27432" rIns="27432" tIns="9144" bIns="9144" anchor="ctr">
+            <a:spAutoFit/>
+          </a:bodyPr>
+          <a:lstStyle/>
+          <a:p>
+            <a:pPr algn="ctr">
+              <a:defRPr sz="1250" b="1">
+                <a:solidFill>
+                  <a:srgbClr val="BE123C"/>
+                </a:solidFill>
+                <a:latin typeface="Microsoft YaHei"/>
+              </a:defRPr>
+            </a:pPr>
+            <a:r>
+              <a:rPr sz="1250" b="1">
+                <a:solidFill>
+                  <a:srgbClr val="BE123C"/>
+                </a:solidFill>
+                <a:latin typeface="Microsoft YaHei"/>
+              </a:rPr>
+              <a:t>×</a:t>
             </a:r>
           </a:p>
         </p:txBody>
@@ -36715,8 +36888,8 @@
         </p:nvSpPr>
         <p:spPr>
           <a:xfrm>
-            <a:off x="4407408" y="1719072"/>
-            <a:ext cx="960120" cy="310896"/>
+            <a:off x="4133087" y="1719072"/>
+            <a:ext cx="868680" cy="320040"/>
           </a:xfrm>
           <a:prstGeom prst="rect">
             <a:avLst/>
@@ -36760,36 +36933,36 @@
         </p:nvSpPr>
         <p:spPr>
           <a:xfrm>
-            <a:off x="4453128" y="1751075"/>
-            <a:ext cx="868680" cy="246888"/>
-          </a:xfrm>
-          <a:prstGeom prst="rect">
-            <a:avLst/>
-          </a:prstGeom>
-          <a:noFill/>
-        </p:spPr>
-        <p:txBody>
-          <a:bodyPr wrap="square" lIns="27432" rIns="27432" tIns="9144" bIns="9144" anchor="ctr">
-            <a:spAutoFit/>
-          </a:bodyPr>
-          <a:lstStyle/>
-          <a:p>
-            <a:pPr algn="l">
-              <a:defRPr sz="740" b="0">
-                <a:solidFill>
-                  <a:srgbClr val="0F172A"/>
-                </a:solidFill>
-                <a:latin typeface="Microsoft YaHei"/>
-              </a:defRPr>
-            </a:pPr>
-            <a:r>
-              <a:rPr sz="740" b="0">
-                <a:solidFill>
-                  <a:srgbClr val="0F172A"/>
-                </a:solidFill>
-                <a:latin typeface="Microsoft YaHei"/>
-              </a:rPr>
-              <a:t>No</a:t>
+            <a:off x="4178807" y="1741931"/>
+            <a:ext cx="777240" cy="274320"/>
+          </a:xfrm>
+          <a:prstGeom prst="rect">
+            <a:avLst/>
+          </a:prstGeom>
+          <a:noFill/>
+        </p:spPr>
+        <p:txBody>
+          <a:bodyPr wrap="square" lIns="27432" rIns="27432" tIns="9144" bIns="9144" anchor="ctr">
+            <a:spAutoFit/>
+          </a:bodyPr>
+          <a:lstStyle/>
+          <a:p>
+            <a:pPr algn="ctr">
+              <a:defRPr sz="1250" b="1">
+                <a:solidFill>
+                  <a:srgbClr val="BE123C"/>
+                </a:solidFill>
+                <a:latin typeface="Microsoft YaHei"/>
+              </a:defRPr>
+            </a:pPr>
+            <a:r>
+              <a:rPr sz="1250" b="1">
+                <a:solidFill>
+                  <a:srgbClr val="BE123C"/>
+                </a:solidFill>
+                <a:latin typeface="Microsoft YaHei"/>
+              </a:rPr>
+              <a:t>×</a:t>
             </a:r>
           </a:p>
         </p:txBody>
@@ -36802,8 +36975,8 @@
         </p:nvSpPr>
         <p:spPr>
           <a:xfrm>
-            <a:off x="5367527" y="1719072"/>
-            <a:ext cx="3657600" cy="310896"/>
+            <a:off x="5001768" y="1719072"/>
+            <a:ext cx="4434840" cy="320040"/>
           </a:xfrm>
           <a:prstGeom prst="rect">
             <a:avLst/>
@@ -36847,8 +37020,8 @@
         </p:nvSpPr>
         <p:spPr>
           <a:xfrm>
-            <a:off x="5413247" y="1751075"/>
-            <a:ext cx="3566160" cy="246888"/>
+            <a:off x="5047488" y="1755648"/>
+            <a:ext cx="4343400" cy="246887"/>
           </a:xfrm>
           <a:prstGeom prst="rect">
             <a:avLst/>
@@ -36862,7 +37035,7 @@
           <a:lstStyle/>
           <a:p>
             <a:pPr algn="l">
-              <a:defRPr sz="740" b="0">
+              <a:defRPr sz="755" b="0">
                 <a:solidFill>
                   <a:srgbClr val="0F172A"/>
                 </a:solidFill>
@@ -36870,13 +37043,13 @@
               </a:defRPr>
             </a:pPr>
             <a:r>
-              <a:rPr sz="740" b="0">
+              <a:rPr sz="755" b="0">
                 <a:solidFill>
                   <a:srgbClr val="0F172A"/>
                 </a:solidFill>
                 <a:latin typeface="Microsoft YaHei"/>
               </a:rPr>
-              <a:t>routine transfer baseline</a:t>
+              <a:t>传统方法：家庭属性 -&gt; 出行次数</a:t>
             </a:r>
           </a:p>
         </p:txBody>
@@ -36889,8 +37062,8 @@
         </p:nvSpPr>
         <p:spPr>
           <a:xfrm>
-            <a:off x="9025128" y="1719072"/>
-            <a:ext cx="822960" cy="310896"/>
+            <a:off x="9436607" y="1719072"/>
+            <a:ext cx="685800" cy="320040"/>
           </a:xfrm>
           <a:prstGeom prst="rect">
             <a:avLst/>
@@ -36934,22 +37107,22 @@
         </p:nvSpPr>
         <p:spPr>
           <a:xfrm>
-            <a:off x="9070848" y="1751075"/>
-            <a:ext cx="731520" cy="246888"/>
-          </a:xfrm>
-          <a:prstGeom prst="rect">
-            <a:avLst/>
-          </a:prstGeom>
-          <a:noFill/>
-        </p:spPr>
-        <p:txBody>
-          <a:bodyPr wrap="square" lIns="27432" rIns="27432" tIns="9144" bIns="9144" anchor="ctr">
-            <a:spAutoFit/>
-          </a:bodyPr>
-          <a:lstStyle/>
-          <a:p>
-            <a:pPr algn="l">
-              <a:defRPr sz="740" b="0">
+            <a:off x="9482328" y="1755648"/>
+            <a:ext cx="594360" cy="246887"/>
+          </a:xfrm>
+          <a:prstGeom prst="rect">
+            <a:avLst/>
+          </a:prstGeom>
+          <a:noFill/>
+        </p:spPr>
+        <p:txBody>
+          <a:bodyPr wrap="square" lIns="27432" rIns="27432" tIns="9144" bIns="9144" anchor="ctr">
+            <a:spAutoFit/>
+          </a:bodyPr>
+          <a:lstStyle/>
+          <a:p>
+            <a:pPr algn="r">
+              <a:defRPr sz="755" b="0">
                 <a:solidFill>
                   <a:srgbClr val="0F172A"/>
                 </a:solidFill>
@@ -36957,7 +37130,7 @@
               </a:defRPr>
             </a:pPr>
             <a:r>
-              <a:rPr sz="740" b="0">
+              <a:rPr sz="755" b="0">
                 <a:solidFill>
                   <a:srgbClr val="0F172A"/>
                 </a:solidFill>
@@ -36976,8 +37149,8 @@
         </p:nvSpPr>
         <p:spPr>
           <a:xfrm>
-            <a:off x="475488" y="2029967"/>
-            <a:ext cx="1874519" cy="310896"/>
+            <a:off x="475488" y="2039111"/>
+            <a:ext cx="1920240" cy="320040"/>
           </a:xfrm>
           <a:prstGeom prst="rect">
             <a:avLst/>
@@ -37021,8 +37194,8 @@
         </p:nvSpPr>
         <p:spPr>
           <a:xfrm>
-            <a:off x="521208" y="2061972"/>
-            <a:ext cx="1783079" cy="246888"/>
+            <a:off x="521208" y="2075687"/>
+            <a:ext cx="1828800" cy="246887"/>
           </a:xfrm>
           <a:prstGeom prst="rect">
             <a:avLst/>
@@ -37036,7 +37209,7 @@
           <a:lstStyle/>
           <a:p>
             <a:pPr algn="l">
-              <a:defRPr sz="740" b="1">
+              <a:defRPr sz="755" b="1">
                 <a:solidFill>
                   <a:srgbClr val="0F172A"/>
                 </a:solidFill>
@@ -37044,7 +37217,7 @@
               </a:defRPr>
             </a:pPr>
             <a:r>
-              <a:rPr sz="740" b="1">
+              <a:rPr sz="755" b="1">
                 <a:solidFill>
                   <a:srgbClr val="0F172A"/>
                 </a:solidFill>
@@ -37063,8 +37236,8 @@
         </p:nvSpPr>
         <p:spPr>
           <a:xfrm>
-            <a:off x="2350008" y="2029967"/>
-            <a:ext cx="1143000" cy="310896"/>
+            <a:off x="2395728" y="2039111"/>
+            <a:ext cx="914400" cy="320040"/>
           </a:xfrm>
           <a:prstGeom prst="rect">
             <a:avLst/>
@@ -37108,36 +37281,36 @@
         </p:nvSpPr>
         <p:spPr>
           <a:xfrm>
-            <a:off x="2395727" y="2061972"/>
-            <a:ext cx="1051560" cy="246888"/>
-          </a:xfrm>
-          <a:prstGeom prst="rect">
-            <a:avLst/>
-          </a:prstGeom>
-          <a:noFill/>
-        </p:spPr>
-        <p:txBody>
-          <a:bodyPr wrap="square" lIns="27432" rIns="27432" tIns="9144" bIns="9144" anchor="ctr">
-            <a:spAutoFit/>
-          </a:bodyPr>
-          <a:lstStyle/>
-          <a:p>
-            <a:pPr algn="l">
-              <a:defRPr sz="740" b="0">
-                <a:solidFill>
-                  <a:srgbClr val="0F172A"/>
-                </a:solidFill>
-                <a:latin typeface="Microsoft YaHei"/>
-              </a:defRPr>
-            </a:pPr>
-            <a:r>
-              <a:rPr sz="740" b="0">
-                <a:solidFill>
-                  <a:srgbClr val="0F172A"/>
-                </a:solidFill>
-                <a:latin typeface="Microsoft YaHei"/>
-              </a:rPr>
-              <a:t>Yes</a:t>
+            <a:off x="2441448" y="2061971"/>
+            <a:ext cx="822960" cy="274320"/>
+          </a:xfrm>
+          <a:prstGeom prst="rect">
+            <a:avLst/>
+          </a:prstGeom>
+          <a:noFill/>
+        </p:spPr>
+        <p:txBody>
+          <a:bodyPr wrap="square" lIns="27432" rIns="27432" tIns="9144" bIns="9144" anchor="ctr">
+            <a:spAutoFit/>
+          </a:bodyPr>
+          <a:lstStyle/>
+          <a:p>
+            <a:pPr algn="ctr">
+              <a:defRPr sz="1250" b="1">
+                <a:solidFill>
+                  <a:srgbClr val="198754"/>
+                </a:solidFill>
+                <a:latin typeface="Microsoft YaHei"/>
+              </a:defRPr>
+            </a:pPr>
+            <a:r>
+              <a:rPr sz="1250" b="1">
+                <a:solidFill>
+                  <a:srgbClr val="198754"/>
+                </a:solidFill>
+                <a:latin typeface="Microsoft YaHei"/>
+              </a:rPr>
+              <a:t>●</a:t>
             </a:r>
           </a:p>
         </p:txBody>
@@ -37150,8 +37323,8 @@
         </p:nvSpPr>
         <p:spPr>
           <a:xfrm>
-            <a:off x="3493008" y="2029967"/>
-            <a:ext cx="914400" cy="310896"/>
+            <a:off x="3310128" y="2039111"/>
+            <a:ext cx="822960" cy="320040"/>
           </a:xfrm>
           <a:prstGeom prst="rect">
             <a:avLst/>
@@ -37195,36 +37368,36 @@
         </p:nvSpPr>
         <p:spPr>
           <a:xfrm>
-            <a:off x="3538727" y="2061972"/>
-            <a:ext cx="822960" cy="246888"/>
-          </a:xfrm>
-          <a:prstGeom prst="rect">
-            <a:avLst/>
-          </a:prstGeom>
-          <a:noFill/>
-        </p:spPr>
-        <p:txBody>
-          <a:bodyPr wrap="square" lIns="27432" rIns="27432" tIns="9144" bIns="9144" anchor="ctr">
-            <a:spAutoFit/>
-          </a:bodyPr>
-          <a:lstStyle/>
-          <a:p>
-            <a:pPr algn="l">
-              <a:defRPr sz="740" b="0">
-                <a:solidFill>
-                  <a:srgbClr val="0F172A"/>
-                </a:solidFill>
-                <a:latin typeface="Microsoft YaHei"/>
-              </a:defRPr>
-            </a:pPr>
-            <a:r>
-              <a:rPr sz="740" b="0">
-                <a:solidFill>
-                  <a:srgbClr val="0F172A"/>
-                </a:solidFill>
-                <a:latin typeface="Microsoft YaHei"/>
-              </a:rPr>
-              <a:t>No</a:t>
+            <a:off x="3355848" y="2061971"/>
+            <a:ext cx="731520" cy="274320"/>
+          </a:xfrm>
+          <a:prstGeom prst="rect">
+            <a:avLst/>
+          </a:prstGeom>
+          <a:noFill/>
+        </p:spPr>
+        <p:txBody>
+          <a:bodyPr wrap="square" lIns="27432" rIns="27432" tIns="9144" bIns="9144" anchor="ctr">
+            <a:spAutoFit/>
+          </a:bodyPr>
+          <a:lstStyle/>
+          <a:p>
+            <a:pPr algn="ctr">
+              <a:defRPr sz="1250" b="1">
+                <a:solidFill>
+                  <a:srgbClr val="BE123C"/>
+                </a:solidFill>
+                <a:latin typeface="Microsoft YaHei"/>
+              </a:defRPr>
+            </a:pPr>
+            <a:r>
+              <a:rPr sz="1250" b="1">
+                <a:solidFill>
+                  <a:srgbClr val="BE123C"/>
+                </a:solidFill>
+                <a:latin typeface="Microsoft YaHei"/>
+              </a:rPr>
+              <a:t>×</a:t>
             </a:r>
           </a:p>
         </p:txBody>
@@ -37237,8 +37410,8 @@
         </p:nvSpPr>
         <p:spPr>
           <a:xfrm>
-            <a:off x="4407408" y="2029967"/>
-            <a:ext cx="960120" cy="310896"/>
+            <a:off x="4133087" y="2039111"/>
+            <a:ext cx="868680" cy="320040"/>
           </a:xfrm>
           <a:prstGeom prst="rect">
             <a:avLst/>
@@ -37282,36 +37455,36 @@
         </p:nvSpPr>
         <p:spPr>
           <a:xfrm>
-            <a:off x="4453128" y="2061972"/>
-            <a:ext cx="868680" cy="246888"/>
-          </a:xfrm>
-          <a:prstGeom prst="rect">
-            <a:avLst/>
-          </a:prstGeom>
-          <a:noFill/>
-        </p:spPr>
-        <p:txBody>
-          <a:bodyPr wrap="square" lIns="27432" rIns="27432" tIns="9144" bIns="9144" anchor="ctr">
-            <a:spAutoFit/>
-          </a:bodyPr>
-          <a:lstStyle/>
-          <a:p>
-            <a:pPr algn="l">
-              <a:defRPr sz="740" b="0">
-                <a:solidFill>
-                  <a:srgbClr val="0F172A"/>
-                </a:solidFill>
-                <a:latin typeface="Microsoft YaHei"/>
-              </a:defRPr>
-            </a:pPr>
-            <a:r>
-              <a:rPr sz="740" b="0">
-                <a:solidFill>
-                  <a:srgbClr val="0F172A"/>
-                </a:solidFill>
-                <a:latin typeface="Microsoft YaHei"/>
-              </a:rPr>
-              <a:t>No</a:t>
+            <a:off x="4178807" y="2061971"/>
+            <a:ext cx="777240" cy="274320"/>
+          </a:xfrm>
+          <a:prstGeom prst="rect">
+            <a:avLst/>
+          </a:prstGeom>
+          <a:noFill/>
+        </p:spPr>
+        <p:txBody>
+          <a:bodyPr wrap="square" lIns="27432" rIns="27432" tIns="9144" bIns="9144" anchor="ctr">
+            <a:spAutoFit/>
+          </a:bodyPr>
+          <a:lstStyle/>
+          <a:p>
+            <a:pPr algn="ctr">
+              <a:defRPr sz="1250" b="1">
+                <a:solidFill>
+                  <a:srgbClr val="BE123C"/>
+                </a:solidFill>
+                <a:latin typeface="Microsoft YaHei"/>
+              </a:defRPr>
+            </a:pPr>
+            <a:r>
+              <a:rPr sz="1250" b="1">
+                <a:solidFill>
+                  <a:srgbClr val="BE123C"/>
+                </a:solidFill>
+                <a:latin typeface="Microsoft YaHei"/>
+              </a:rPr>
+              <a:t>×</a:t>
             </a:r>
           </a:p>
         </p:txBody>
@@ -37324,8 +37497,8 @@
         </p:nvSpPr>
         <p:spPr>
           <a:xfrm>
-            <a:off x="5367527" y="2029967"/>
-            <a:ext cx="3657600" cy="310896"/>
+            <a:off x="5001768" y="2039111"/>
+            <a:ext cx="4434840" cy="320040"/>
           </a:xfrm>
           <a:prstGeom prst="rect">
             <a:avLst/>
@@ -37369,8 +37542,8 @@
         </p:nvSpPr>
         <p:spPr>
           <a:xfrm>
-            <a:off x="5413247" y="2061972"/>
-            <a:ext cx="3566160" cy="246888"/>
+            <a:off x="5047488" y="2075687"/>
+            <a:ext cx="4343400" cy="246887"/>
           </a:xfrm>
           <a:prstGeom prst="rect">
             <a:avLst/>
@@ -37384,7 +37557,7 @@
           <a:lstStyle/>
           <a:p>
             <a:pPr algn="l">
-              <a:defRPr sz="740" b="0">
+              <a:defRPr sz="755" b="0">
                 <a:solidFill>
                   <a:srgbClr val="0F172A"/>
                 </a:solidFill>
@@ -37392,13 +37565,13 @@
               </a:defRPr>
             </a:pPr>
             <a:r>
-              <a:rPr sz="740" b="0">
+              <a:rPr sz="755" b="0">
                 <a:solidFill>
                   <a:srgbClr val="0F172A"/>
                 </a:solidFill>
                 <a:latin typeface="Microsoft YaHei"/>
               </a:rPr>
-              <a:t>simple non-semantic shift</a:t>
+              <a:t>统一趋势修正，不区分疫情机制</a:t>
             </a:r>
           </a:p>
         </p:txBody>
@@ -37411,8 +37584,8 @@
         </p:nvSpPr>
         <p:spPr>
           <a:xfrm>
-            <a:off x="9025128" y="2029967"/>
-            <a:ext cx="822960" cy="310896"/>
+            <a:off x="9436607" y="2039111"/>
+            <a:ext cx="685800" cy="320040"/>
           </a:xfrm>
           <a:prstGeom prst="rect">
             <a:avLst/>
@@ -37456,22 +37629,22 @@
         </p:nvSpPr>
         <p:spPr>
           <a:xfrm>
-            <a:off x="9070848" y="2061972"/>
-            <a:ext cx="731520" cy="246888"/>
-          </a:xfrm>
-          <a:prstGeom prst="rect">
-            <a:avLst/>
-          </a:prstGeom>
-          <a:noFill/>
-        </p:spPr>
-        <p:txBody>
-          <a:bodyPr wrap="square" lIns="27432" rIns="27432" tIns="9144" bIns="9144" anchor="ctr">
-            <a:spAutoFit/>
-          </a:bodyPr>
-          <a:lstStyle/>
-          <a:p>
-            <a:pPr algn="l">
-              <a:defRPr sz="740" b="0">
+            <a:off x="9482328" y="2075687"/>
+            <a:ext cx="594360" cy="246887"/>
+          </a:xfrm>
+          <a:prstGeom prst="rect">
+            <a:avLst/>
+          </a:prstGeom>
+          <a:noFill/>
+        </p:spPr>
+        <p:txBody>
+          <a:bodyPr wrap="square" lIns="27432" rIns="27432" tIns="9144" bIns="9144" anchor="ctr">
+            <a:spAutoFit/>
+          </a:bodyPr>
+          <a:lstStyle/>
+          <a:p>
+            <a:pPr algn="r">
+              <a:defRPr sz="755" b="0">
                 <a:solidFill>
                   <a:srgbClr val="0F172A"/>
                 </a:solidFill>
@@ -37479,7 +37652,7 @@
               </a:defRPr>
             </a:pPr>
             <a:r>
-              <a:rPr sz="740" b="0">
+              <a:rPr sz="755" b="0">
                 <a:solidFill>
                   <a:srgbClr val="0F172A"/>
                 </a:solidFill>
@@ -37498,8 +37671,8 @@
         </p:nvSpPr>
         <p:spPr>
           <a:xfrm>
-            <a:off x="475488" y="2340864"/>
-            <a:ext cx="1874519" cy="310896"/>
+            <a:off x="475488" y="2359152"/>
+            <a:ext cx="1920240" cy="320040"/>
           </a:xfrm>
           <a:prstGeom prst="rect">
             <a:avLst/>
@@ -37543,8 +37716,8 @@
         </p:nvSpPr>
         <p:spPr>
           <a:xfrm>
-            <a:off x="521208" y="2372868"/>
-            <a:ext cx="1783079" cy="246888"/>
+            <a:off x="521208" y="2395728"/>
+            <a:ext cx="1828800" cy="246887"/>
           </a:xfrm>
           <a:prstGeom prst="rect">
             <a:avLst/>
@@ -37558,7 +37731,7 @@
           <a:lstStyle/>
           <a:p>
             <a:pPr algn="l">
-              <a:defRPr sz="740" b="1">
+              <a:defRPr sz="755" b="1">
                 <a:solidFill>
                   <a:srgbClr val="0F172A"/>
                 </a:solidFill>
@@ -37566,7 +37739,7 @@
               </a:defRPr>
             </a:pPr>
             <a:r>
-              <a:rPr sz="740" b="1">
+              <a:rPr sz="755" b="1">
                 <a:solidFill>
                   <a:srgbClr val="0F172A"/>
                 </a:solidFill>
@@ -37585,8 +37758,8 @@
         </p:nvSpPr>
         <p:spPr>
           <a:xfrm>
-            <a:off x="2350008" y="2340864"/>
-            <a:ext cx="1143000" cy="310896"/>
+            <a:off x="2395728" y="2359152"/>
+            <a:ext cx="914400" cy="320040"/>
           </a:xfrm>
           <a:prstGeom prst="rect">
             <a:avLst/>
@@ -37630,36 +37803,36 @@
         </p:nvSpPr>
         <p:spPr>
           <a:xfrm>
-            <a:off x="2395727" y="2372868"/>
-            <a:ext cx="1051560" cy="246888"/>
-          </a:xfrm>
-          <a:prstGeom prst="rect">
-            <a:avLst/>
-          </a:prstGeom>
-          <a:noFill/>
-        </p:spPr>
-        <p:txBody>
-          <a:bodyPr wrap="square" lIns="27432" rIns="27432" tIns="9144" bIns="9144" anchor="ctr">
-            <a:spAutoFit/>
-          </a:bodyPr>
-          <a:lstStyle/>
-          <a:p>
-            <a:pPr algn="l">
-              <a:defRPr sz="740" b="0">
-                <a:solidFill>
-                  <a:srgbClr val="0F172A"/>
-                </a:solidFill>
-                <a:latin typeface="Microsoft YaHei"/>
-              </a:defRPr>
-            </a:pPr>
-            <a:r>
-              <a:rPr sz="740" b="0">
-                <a:solidFill>
-                  <a:srgbClr val="0F172A"/>
-                </a:solidFill>
-                <a:latin typeface="Microsoft YaHei"/>
-              </a:rPr>
-              <a:t>No</a:t>
+            <a:off x="2441448" y="2382012"/>
+            <a:ext cx="822960" cy="274320"/>
+          </a:xfrm>
+          <a:prstGeom prst="rect">
+            <a:avLst/>
+          </a:prstGeom>
+          <a:noFill/>
+        </p:spPr>
+        <p:txBody>
+          <a:bodyPr wrap="square" lIns="27432" rIns="27432" tIns="9144" bIns="9144" anchor="ctr">
+            <a:spAutoFit/>
+          </a:bodyPr>
+          <a:lstStyle/>
+          <a:p>
+            <a:pPr algn="ctr">
+              <a:defRPr sz="1250" b="1">
+                <a:solidFill>
+                  <a:srgbClr val="BE123C"/>
+                </a:solidFill>
+                <a:latin typeface="Microsoft YaHei"/>
+              </a:defRPr>
+            </a:pPr>
+            <a:r>
+              <a:rPr sz="1250" b="1">
+                <a:solidFill>
+                  <a:srgbClr val="BE123C"/>
+                </a:solidFill>
+                <a:latin typeface="Microsoft YaHei"/>
+              </a:rPr>
+              <a:t>×</a:t>
             </a:r>
           </a:p>
         </p:txBody>
@@ -37672,8 +37845,8 @@
         </p:nvSpPr>
         <p:spPr>
           <a:xfrm>
-            <a:off x="3493008" y="2340864"/>
-            <a:ext cx="914400" cy="310896"/>
+            <a:off x="3310128" y="2359152"/>
+            <a:ext cx="822960" cy="320040"/>
           </a:xfrm>
           <a:prstGeom prst="rect">
             <a:avLst/>
@@ -37717,36 +37890,36 @@
         </p:nvSpPr>
         <p:spPr>
           <a:xfrm>
-            <a:off x="3538727" y="2372868"/>
-            <a:ext cx="822960" cy="246888"/>
-          </a:xfrm>
-          <a:prstGeom prst="rect">
-            <a:avLst/>
-          </a:prstGeom>
-          <a:noFill/>
-        </p:spPr>
-        <p:txBody>
-          <a:bodyPr wrap="square" lIns="27432" rIns="27432" tIns="9144" bIns="9144" anchor="ctr">
-            <a:spAutoFit/>
-          </a:bodyPr>
-          <a:lstStyle/>
-          <a:p>
-            <a:pPr algn="l">
-              <a:defRPr sz="740" b="0">
-                <a:solidFill>
-                  <a:srgbClr val="0F172A"/>
-                </a:solidFill>
-                <a:latin typeface="Microsoft YaHei"/>
-              </a:defRPr>
-            </a:pPr>
-            <a:r>
-              <a:rPr sz="740" b="0">
-                <a:solidFill>
-                  <a:srgbClr val="0F172A"/>
-                </a:solidFill>
-                <a:latin typeface="Microsoft YaHei"/>
-              </a:rPr>
-              <a:t>Yes</a:t>
+            <a:off x="3355848" y="2382012"/>
+            <a:ext cx="731520" cy="274320"/>
+          </a:xfrm>
+          <a:prstGeom prst="rect">
+            <a:avLst/>
+          </a:prstGeom>
+          <a:noFill/>
+        </p:spPr>
+        <p:txBody>
+          <a:bodyPr wrap="square" lIns="27432" rIns="27432" tIns="9144" bIns="9144" anchor="ctr">
+            <a:spAutoFit/>
+          </a:bodyPr>
+          <a:lstStyle/>
+          <a:p>
+            <a:pPr algn="ctr">
+              <a:defRPr sz="1250" b="1">
+                <a:solidFill>
+                  <a:srgbClr val="198754"/>
+                </a:solidFill>
+                <a:latin typeface="Microsoft YaHei"/>
+              </a:defRPr>
+            </a:pPr>
+            <a:r>
+              <a:rPr sz="1250" b="1">
+                <a:solidFill>
+                  <a:srgbClr val="198754"/>
+                </a:solidFill>
+                <a:latin typeface="Microsoft YaHei"/>
+              </a:rPr>
+              <a:t>●</a:t>
             </a:r>
           </a:p>
         </p:txBody>
@@ -37759,8 +37932,8 @@
         </p:nvSpPr>
         <p:spPr>
           <a:xfrm>
-            <a:off x="4407408" y="2340864"/>
-            <a:ext cx="960120" cy="310896"/>
+            <a:off x="4133087" y="2359152"/>
+            <a:ext cx="868680" cy="320040"/>
           </a:xfrm>
           <a:prstGeom prst="rect">
             <a:avLst/>
@@ -37804,36 +37977,36 @@
         </p:nvSpPr>
         <p:spPr>
           <a:xfrm>
-            <a:off x="4453128" y="2372868"/>
-            <a:ext cx="868680" cy="246888"/>
-          </a:xfrm>
-          <a:prstGeom prst="rect">
-            <a:avLst/>
-          </a:prstGeom>
-          <a:noFill/>
-        </p:spPr>
-        <p:txBody>
-          <a:bodyPr wrap="square" lIns="27432" rIns="27432" tIns="9144" bIns="9144" anchor="ctr">
-            <a:spAutoFit/>
-          </a:bodyPr>
-          <a:lstStyle/>
-          <a:p>
-            <a:pPr algn="l">
-              <a:defRPr sz="740" b="0">
-                <a:solidFill>
-                  <a:srgbClr val="0F172A"/>
-                </a:solidFill>
-                <a:latin typeface="Microsoft YaHei"/>
-              </a:defRPr>
-            </a:pPr>
-            <a:r>
-              <a:rPr sz="740" b="0">
-                <a:solidFill>
-                  <a:srgbClr val="0F172A"/>
-                </a:solidFill>
-                <a:latin typeface="Microsoft YaHei"/>
-              </a:rPr>
-              <a:t>No</a:t>
+            <a:off x="4178807" y="2382012"/>
+            <a:ext cx="777240" cy="274320"/>
+          </a:xfrm>
+          <a:prstGeom prst="rect">
+            <a:avLst/>
+          </a:prstGeom>
+          <a:noFill/>
+        </p:spPr>
+        <p:txBody>
+          <a:bodyPr wrap="square" lIns="27432" rIns="27432" tIns="9144" bIns="9144" anchor="ctr">
+            <a:spAutoFit/>
+          </a:bodyPr>
+          <a:lstStyle/>
+          <a:p>
+            <a:pPr algn="ctr">
+              <a:defRPr sz="1250" b="1">
+                <a:solidFill>
+                  <a:srgbClr val="BE123C"/>
+                </a:solidFill>
+                <a:latin typeface="Microsoft YaHei"/>
+              </a:defRPr>
+            </a:pPr>
+            <a:r>
+              <a:rPr sz="1250" b="1">
+                <a:solidFill>
+                  <a:srgbClr val="BE123C"/>
+                </a:solidFill>
+                <a:latin typeface="Microsoft YaHei"/>
+              </a:rPr>
+              <a:t>×</a:t>
             </a:r>
           </a:p>
         </p:txBody>
@@ -37846,8 +38019,8 @@
         </p:nvSpPr>
         <p:spPr>
           <a:xfrm>
-            <a:off x="5367527" y="2340864"/>
-            <a:ext cx="3657600" cy="310896"/>
+            <a:off x="5001768" y="2359152"/>
+            <a:ext cx="4434840" cy="320040"/>
           </a:xfrm>
           <a:prstGeom prst="rect">
             <a:avLst/>
@@ -37891,8 +38064,8 @@
         </p:nvSpPr>
         <p:spPr>
           <a:xfrm>
-            <a:off x="5413247" y="2372868"/>
-            <a:ext cx="3566160" cy="246888"/>
+            <a:off x="5047488" y="2395728"/>
+            <a:ext cx="4343400" cy="246887"/>
           </a:xfrm>
           <a:prstGeom prst="rect">
             <a:avLst/>
@@ -37906,7 +38079,7 @@
           <a:lstStyle/>
           <a:p>
             <a:pPr algn="l">
-              <a:defRPr sz="740" b="0">
+              <a:defRPr sz="755" b="0">
                 <a:solidFill>
                   <a:srgbClr val="0F172A"/>
                 </a:solidFill>
@@ -37914,13 +38087,13 @@
               </a:defRPr>
             </a:pPr>
             <a:r>
-              <a:rPr sz="740" b="0">
+              <a:rPr sz="755" b="0">
                 <a:solidFill>
                   <a:srgbClr val="0F172A"/>
                 </a:solidFill>
                 <a:latin typeface="Microsoft YaHei"/>
               </a:rPr>
-              <a:t>event direction without baseline</a:t>
+              <a:t>只有事件方向，缺少 household baseline</a:t>
             </a:r>
           </a:p>
         </p:txBody>
@@ -37933,8 +38106,8 @@
         </p:nvSpPr>
         <p:spPr>
           <a:xfrm>
-            <a:off x="9025128" y="2340864"/>
-            <a:ext cx="822960" cy="310896"/>
+            <a:off x="9436607" y="2359152"/>
+            <a:ext cx="685800" cy="320040"/>
           </a:xfrm>
           <a:prstGeom prst="rect">
             <a:avLst/>
@@ -37978,22 +38151,22 @@
         </p:nvSpPr>
         <p:spPr>
           <a:xfrm>
-            <a:off x="9070848" y="2372868"/>
-            <a:ext cx="731520" cy="246888"/>
-          </a:xfrm>
-          <a:prstGeom prst="rect">
-            <a:avLst/>
-          </a:prstGeom>
-          <a:noFill/>
-        </p:spPr>
-        <p:txBody>
-          <a:bodyPr wrap="square" lIns="27432" rIns="27432" tIns="9144" bIns="9144" anchor="ctr">
-            <a:spAutoFit/>
-          </a:bodyPr>
-          <a:lstStyle/>
-          <a:p>
-            <a:pPr algn="l">
-              <a:defRPr sz="740" b="0">
+            <a:off x="9482328" y="2395728"/>
+            <a:ext cx="594360" cy="246887"/>
+          </a:xfrm>
+          <a:prstGeom prst="rect">
+            <a:avLst/>
+          </a:prstGeom>
+          <a:noFill/>
+        </p:spPr>
+        <p:txBody>
+          <a:bodyPr wrap="square" lIns="27432" rIns="27432" tIns="9144" bIns="9144" anchor="ctr">
+            <a:spAutoFit/>
+          </a:bodyPr>
+          <a:lstStyle/>
+          <a:p>
+            <a:pPr algn="r">
+              <a:defRPr sz="755" b="0">
                 <a:solidFill>
                   <a:srgbClr val="0F172A"/>
                 </a:solidFill>
@@ -38001,7 +38174,7 @@
               </a:defRPr>
             </a:pPr>
             <a:r>
-              <a:rPr sz="740" b="0">
+              <a:rPr sz="755" b="0">
                 <a:solidFill>
                   <a:srgbClr val="0F172A"/>
                 </a:solidFill>
@@ -38020,8 +38193,8 @@
         </p:nvSpPr>
         <p:spPr>
           <a:xfrm>
-            <a:off x="475488" y="2651760"/>
-            <a:ext cx="1874519" cy="310896"/>
+            <a:off x="475488" y="2679191"/>
+            <a:ext cx="1920240" cy="320040"/>
           </a:xfrm>
           <a:prstGeom prst="rect">
             <a:avLst/>
@@ -38065,8 +38238,8 @@
         </p:nvSpPr>
         <p:spPr>
           <a:xfrm>
-            <a:off x="521208" y="2683764"/>
-            <a:ext cx="1783079" cy="246888"/>
+            <a:off x="521208" y="2715768"/>
+            <a:ext cx="1828800" cy="246887"/>
           </a:xfrm>
           <a:prstGeom prst="rect">
             <a:avLst/>
@@ -38080,7 +38253,7 @@
           <a:lstStyle/>
           <a:p>
             <a:pPr algn="l">
-              <a:defRPr sz="740" b="1">
+              <a:defRPr sz="755" b="1">
                 <a:solidFill>
                   <a:srgbClr val="0F172A"/>
                 </a:solidFill>
@@ -38088,7 +38261,7 @@
               </a:defRPr>
             </a:pPr>
             <a:r>
-              <a:rPr sz="740" b="1">
+              <a:rPr sz="755" b="1">
                 <a:solidFill>
                   <a:srgbClr val="0F172A"/>
                 </a:solidFill>
@@ -38107,8 +38280,8 @@
         </p:nvSpPr>
         <p:spPr>
           <a:xfrm>
-            <a:off x="2350008" y="2651760"/>
-            <a:ext cx="1143000" cy="310896"/>
+            <a:off x="2395728" y="2679191"/>
+            <a:ext cx="914400" cy="320040"/>
           </a:xfrm>
           <a:prstGeom prst="rect">
             <a:avLst/>
@@ -38152,36 +38325,36 @@
         </p:nvSpPr>
         <p:spPr>
           <a:xfrm>
-            <a:off x="2395727" y="2683764"/>
-            <a:ext cx="1051560" cy="246888"/>
-          </a:xfrm>
-          <a:prstGeom prst="rect">
-            <a:avLst/>
-          </a:prstGeom>
-          <a:noFill/>
-        </p:spPr>
-        <p:txBody>
-          <a:bodyPr wrap="square" lIns="27432" rIns="27432" tIns="9144" bIns="9144" anchor="ctr">
-            <a:spAutoFit/>
-          </a:bodyPr>
-          <a:lstStyle/>
-          <a:p>
-            <a:pPr algn="l">
-              <a:defRPr sz="740" b="0">
-                <a:solidFill>
-                  <a:srgbClr val="0F172A"/>
-                </a:solidFill>
-                <a:latin typeface="Microsoft YaHei"/>
-              </a:defRPr>
-            </a:pPr>
-            <a:r>
-              <a:rPr sz="740" b="0">
-                <a:solidFill>
-                  <a:srgbClr val="0F172A"/>
-                </a:solidFill>
-                <a:latin typeface="Microsoft YaHei"/>
-              </a:rPr>
-              <a:t>Yes</a:t>
+            <a:off x="2441448" y="2702051"/>
+            <a:ext cx="822960" cy="274320"/>
+          </a:xfrm>
+          <a:prstGeom prst="rect">
+            <a:avLst/>
+          </a:prstGeom>
+          <a:noFill/>
+        </p:spPr>
+        <p:txBody>
+          <a:bodyPr wrap="square" lIns="27432" rIns="27432" tIns="9144" bIns="9144" anchor="ctr">
+            <a:spAutoFit/>
+          </a:bodyPr>
+          <a:lstStyle/>
+          <a:p>
+            <a:pPr algn="ctr">
+              <a:defRPr sz="1250" b="1">
+                <a:solidFill>
+                  <a:srgbClr val="198754"/>
+                </a:solidFill>
+                <a:latin typeface="Microsoft YaHei"/>
+              </a:defRPr>
+            </a:pPr>
+            <a:r>
+              <a:rPr sz="1250" b="1">
+                <a:solidFill>
+                  <a:srgbClr val="198754"/>
+                </a:solidFill>
+                <a:latin typeface="Microsoft YaHei"/>
+              </a:rPr>
+              <a:t>●</a:t>
             </a:r>
           </a:p>
         </p:txBody>
@@ -38194,8 +38367,8 @@
         </p:nvSpPr>
         <p:spPr>
           <a:xfrm>
-            <a:off x="3493008" y="2651760"/>
-            <a:ext cx="914400" cy="310896"/>
+            <a:off x="3310128" y="2679191"/>
+            <a:ext cx="822960" cy="320040"/>
           </a:xfrm>
           <a:prstGeom prst="rect">
             <a:avLst/>
@@ -38239,36 +38412,36 @@
         </p:nvSpPr>
         <p:spPr>
           <a:xfrm>
-            <a:off x="3538727" y="2683764"/>
-            <a:ext cx="822960" cy="246888"/>
-          </a:xfrm>
-          <a:prstGeom prst="rect">
-            <a:avLst/>
-          </a:prstGeom>
-          <a:noFill/>
-        </p:spPr>
-        <p:txBody>
-          <a:bodyPr wrap="square" lIns="27432" rIns="27432" tIns="9144" bIns="9144" anchor="ctr">
-            <a:spAutoFit/>
-          </a:bodyPr>
-          <a:lstStyle/>
-          <a:p>
-            <a:pPr algn="l">
-              <a:defRPr sz="740" b="0">
-                <a:solidFill>
-                  <a:srgbClr val="0F172A"/>
-                </a:solidFill>
-                <a:latin typeface="Microsoft YaHei"/>
-              </a:defRPr>
-            </a:pPr>
-            <a:r>
-              <a:rPr sz="740" b="0">
-                <a:solidFill>
-                  <a:srgbClr val="0F172A"/>
-                </a:solidFill>
-                <a:latin typeface="Microsoft YaHei"/>
-              </a:rPr>
-              <a:t>No</a:t>
+            <a:off x="3355848" y="2702051"/>
+            <a:ext cx="731520" cy="274320"/>
+          </a:xfrm>
+          <a:prstGeom prst="rect">
+            <a:avLst/>
+          </a:prstGeom>
+          <a:noFill/>
+        </p:spPr>
+        <p:txBody>
+          <a:bodyPr wrap="square" lIns="27432" rIns="27432" tIns="9144" bIns="9144" anchor="ctr">
+            <a:spAutoFit/>
+          </a:bodyPr>
+          <a:lstStyle/>
+          <a:p>
+            <a:pPr algn="ctr">
+              <a:defRPr sz="1250" b="1">
+                <a:solidFill>
+                  <a:srgbClr val="BE123C"/>
+                </a:solidFill>
+                <a:latin typeface="Microsoft YaHei"/>
+              </a:defRPr>
+            </a:pPr>
+            <a:r>
+              <a:rPr sz="1250" b="1">
+                <a:solidFill>
+                  <a:srgbClr val="BE123C"/>
+                </a:solidFill>
+                <a:latin typeface="Microsoft YaHei"/>
+              </a:rPr>
+              <a:t>×</a:t>
             </a:r>
           </a:p>
         </p:txBody>
@@ -38281,8 +38454,8 @@
         </p:nvSpPr>
         <p:spPr>
           <a:xfrm>
-            <a:off x="4407408" y="2651760"/>
-            <a:ext cx="960120" cy="310896"/>
+            <a:off x="4133087" y="2679191"/>
+            <a:ext cx="868680" cy="320040"/>
           </a:xfrm>
           <a:prstGeom prst="rect">
             <a:avLst/>
@@ -38326,36 +38499,36 @@
         </p:nvSpPr>
         <p:spPr>
           <a:xfrm>
-            <a:off x="4453128" y="2683764"/>
-            <a:ext cx="868680" cy="246888"/>
-          </a:xfrm>
-          <a:prstGeom prst="rect">
-            <a:avLst/>
-          </a:prstGeom>
-          <a:noFill/>
-        </p:spPr>
-        <p:txBody>
-          <a:bodyPr wrap="square" lIns="27432" rIns="27432" tIns="9144" bIns="9144" anchor="ctr">
-            <a:spAutoFit/>
-          </a:bodyPr>
-          <a:lstStyle/>
-          <a:p>
-            <a:pPr algn="l">
-              <a:defRPr sz="740" b="0">
-                <a:solidFill>
-                  <a:srgbClr val="0F172A"/>
-                </a:solidFill>
-                <a:latin typeface="Microsoft YaHei"/>
-              </a:defRPr>
-            </a:pPr>
-            <a:r>
-              <a:rPr sz="740" b="0">
-                <a:solidFill>
-                  <a:srgbClr val="0F172A"/>
-                </a:solidFill>
-                <a:latin typeface="Microsoft YaHei"/>
-              </a:rPr>
-              <a:t>No</a:t>
+            <a:off x="4178807" y="2702051"/>
+            <a:ext cx="777240" cy="274320"/>
+          </a:xfrm>
+          <a:prstGeom prst="rect">
+            <a:avLst/>
+          </a:prstGeom>
+          <a:noFill/>
+        </p:spPr>
+        <p:txBody>
+          <a:bodyPr wrap="square" lIns="27432" rIns="27432" tIns="9144" bIns="9144" anchor="ctr">
+            <a:spAutoFit/>
+          </a:bodyPr>
+          <a:lstStyle/>
+          <a:p>
+            <a:pPr algn="ctr">
+              <a:defRPr sz="1250" b="1">
+                <a:solidFill>
+                  <a:srgbClr val="BE123C"/>
+                </a:solidFill>
+                <a:latin typeface="Microsoft YaHei"/>
+              </a:defRPr>
+            </a:pPr>
+            <a:r>
+              <a:rPr sz="1250" b="1">
+                <a:solidFill>
+                  <a:srgbClr val="BE123C"/>
+                </a:solidFill>
+                <a:latin typeface="Microsoft YaHei"/>
+              </a:rPr>
+              <a:t>×</a:t>
             </a:r>
           </a:p>
         </p:txBody>
@@ -38368,8 +38541,8 @@
         </p:nvSpPr>
         <p:spPr>
           <a:xfrm>
-            <a:off x="5367527" y="2651760"/>
-            <a:ext cx="3657600" cy="310896"/>
+            <a:off x="5001768" y="2679191"/>
+            <a:ext cx="4434840" cy="320040"/>
           </a:xfrm>
           <a:prstGeom prst="rect">
             <a:avLst/>
@@ -38413,8 +38586,8 @@
         </p:nvSpPr>
         <p:spPr>
           <a:xfrm>
-            <a:off x="5413247" y="2683764"/>
-            <a:ext cx="3566160" cy="246888"/>
+            <a:off x="5047488" y="2715768"/>
+            <a:ext cx="4343400" cy="246887"/>
           </a:xfrm>
           <a:prstGeom prst="rect">
             <a:avLst/>
@@ -38428,7 +38601,7 @@
           <a:lstStyle/>
           <a:p>
             <a:pPr algn="l">
-              <a:defRPr sz="740" b="0">
+              <a:defRPr sz="755" b="0">
                 <a:solidFill>
                   <a:srgbClr val="0F172A"/>
                 </a:solidFill>
@@ -38436,13 +38609,13 @@
               </a:defRPr>
             </a:pPr>
             <a:r>
-              <a:rPr sz="740" b="0">
+              <a:rPr sz="755" b="0">
                 <a:solidFill>
                   <a:srgbClr val="0F172A"/>
                 </a:solidFill>
                 <a:latin typeface="Microsoft YaHei"/>
               </a:rPr>
-              <a:t>common pandemic downscaling</a:t>
+              <a:t>所有家庭使用同一疫情折减</a:t>
             </a:r>
           </a:p>
         </p:txBody>
@@ -38455,8 +38628,8 @@
         </p:nvSpPr>
         <p:spPr>
           <a:xfrm>
-            <a:off x="9025128" y="2651760"/>
-            <a:ext cx="822960" cy="310896"/>
+            <a:off x="9436607" y="2679191"/>
+            <a:ext cx="685800" cy="320040"/>
           </a:xfrm>
           <a:prstGeom prst="rect">
             <a:avLst/>
@@ -38500,22 +38673,22 @@
         </p:nvSpPr>
         <p:spPr>
           <a:xfrm>
-            <a:off x="9070848" y="2683764"/>
-            <a:ext cx="731520" cy="246888"/>
-          </a:xfrm>
-          <a:prstGeom prst="rect">
-            <a:avLst/>
-          </a:prstGeom>
-          <a:noFill/>
-        </p:spPr>
-        <p:txBody>
-          <a:bodyPr wrap="square" lIns="27432" rIns="27432" tIns="9144" bIns="9144" anchor="ctr">
-            <a:spAutoFit/>
-          </a:bodyPr>
-          <a:lstStyle/>
-          <a:p>
-            <a:pPr algn="l">
-              <a:defRPr sz="740" b="0">
+            <a:off x="9482328" y="2715768"/>
+            <a:ext cx="594360" cy="246887"/>
+          </a:xfrm>
+          <a:prstGeom prst="rect">
+            <a:avLst/>
+          </a:prstGeom>
+          <a:noFill/>
+        </p:spPr>
+        <p:txBody>
+          <a:bodyPr wrap="square" lIns="27432" rIns="27432" tIns="9144" bIns="9144" anchor="ctr">
+            <a:spAutoFit/>
+          </a:bodyPr>
+          <a:lstStyle/>
+          <a:p>
+            <a:pPr algn="r">
+              <a:defRPr sz="755" b="0">
                 <a:solidFill>
                   <a:srgbClr val="0F172A"/>
                 </a:solidFill>
@@ -38523,7 +38696,7 @@
               </a:defRPr>
             </a:pPr>
             <a:r>
-              <a:rPr sz="740" b="0">
+              <a:rPr sz="755" b="0">
                 <a:solidFill>
                   <a:srgbClr val="0F172A"/>
                 </a:solidFill>
@@ -38542,8 +38715,8 @@
         </p:nvSpPr>
         <p:spPr>
           <a:xfrm>
-            <a:off x="475488" y="2962656"/>
-            <a:ext cx="1874519" cy="310896"/>
+            <a:off x="475488" y="2999231"/>
+            <a:ext cx="1920240" cy="320040"/>
           </a:xfrm>
           <a:prstGeom prst="rect">
             <a:avLst/>
@@ -38587,8 +38760,8 @@
         </p:nvSpPr>
         <p:spPr>
           <a:xfrm>
-            <a:off x="521208" y="2994660"/>
-            <a:ext cx="1783079" cy="246888"/>
+            <a:off x="521208" y="3035807"/>
+            <a:ext cx="1828800" cy="246887"/>
           </a:xfrm>
           <a:prstGeom prst="rect">
             <a:avLst/>
@@ -38602,7 +38775,7 @@
           <a:lstStyle/>
           <a:p>
             <a:pPr algn="l">
-              <a:defRPr sz="740" b="1">
+              <a:defRPr sz="755" b="1">
                 <a:solidFill>
                   <a:srgbClr val="0F172A"/>
                 </a:solidFill>
@@ -38610,7 +38783,7 @@
               </a:defRPr>
             </a:pPr>
             <a:r>
-              <a:rPr sz="740" b="1">
+              <a:rPr sz="755" b="1">
                 <a:solidFill>
                   <a:srgbClr val="0F172A"/>
                 </a:solidFill>
@@ -38629,8 +38802,8 @@
         </p:nvSpPr>
         <p:spPr>
           <a:xfrm>
-            <a:off x="2350008" y="2962656"/>
-            <a:ext cx="1143000" cy="310896"/>
+            <a:off x="2395728" y="2999231"/>
+            <a:ext cx="914400" cy="320040"/>
           </a:xfrm>
           <a:prstGeom prst="rect">
             <a:avLst/>
@@ -38674,36 +38847,36 @@
         </p:nvSpPr>
         <p:spPr>
           <a:xfrm>
-            <a:off x="2395727" y="2994660"/>
-            <a:ext cx="1051560" cy="246888"/>
-          </a:xfrm>
-          <a:prstGeom prst="rect">
-            <a:avLst/>
-          </a:prstGeom>
-          <a:noFill/>
-        </p:spPr>
-        <p:txBody>
-          <a:bodyPr wrap="square" lIns="27432" rIns="27432" tIns="9144" bIns="9144" anchor="ctr">
-            <a:spAutoFit/>
-          </a:bodyPr>
-          <a:lstStyle/>
-          <a:p>
-            <a:pPr algn="l">
-              <a:defRPr sz="740" b="0">
-                <a:solidFill>
-                  <a:srgbClr val="0F172A"/>
-                </a:solidFill>
-                <a:latin typeface="Microsoft YaHei"/>
-              </a:defRPr>
-            </a:pPr>
-            <a:r>
-              <a:rPr sz="740" b="0">
-                <a:solidFill>
-                  <a:srgbClr val="0F172A"/>
-                </a:solidFill>
-                <a:latin typeface="Microsoft YaHei"/>
-              </a:rPr>
-              <a:t>Yes</a:t>
+            <a:off x="2441448" y="3022091"/>
+            <a:ext cx="822960" cy="274320"/>
+          </a:xfrm>
+          <a:prstGeom prst="rect">
+            <a:avLst/>
+          </a:prstGeom>
+          <a:noFill/>
+        </p:spPr>
+        <p:txBody>
+          <a:bodyPr wrap="square" lIns="27432" rIns="27432" tIns="9144" bIns="9144" anchor="ctr">
+            <a:spAutoFit/>
+          </a:bodyPr>
+          <a:lstStyle/>
+          <a:p>
+            <a:pPr algn="ctr">
+              <a:defRPr sz="1250" b="1">
+                <a:solidFill>
+                  <a:srgbClr val="198754"/>
+                </a:solidFill>
+                <a:latin typeface="Microsoft YaHei"/>
+              </a:defRPr>
+            </a:pPr>
+            <a:r>
+              <a:rPr sz="1250" b="1">
+                <a:solidFill>
+                  <a:srgbClr val="198754"/>
+                </a:solidFill>
+                <a:latin typeface="Microsoft YaHei"/>
+              </a:rPr>
+              <a:t>●</a:t>
             </a:r>
           </a:p>
         </p:txBody>
@@ -38716,8 +38889,8 @@
         </p:nvSpPr>
         <p:spPr>
           <a:xfrm>
-            <a:off x="3493008" y="2962656"/>
-            <a:ext cx="914400" cy="310896"/>
+            <a:off x="3310128" y="2999231"/>
+            <a:ext cx="822960" cy="320040"/>
           </a:xfrm>
           <a:prstGeom prst="rect">
             <a:avLst/>
@@ -38761,36 +38934,36 @@
         </p:nvSpPr>
         <p:spPr>
           <a:xfrm>
-            <a:off x="3538727" y="2994660"/>
-            <a:ext cx="822960" cy="246888"/>
-          </a:xfrm>
-          <a:prstGeom prst="rect">
-            <a:avLst/>
-          </a:prstGeom>
-          <a:noFill/>
-        </p:spPr>
-        <p:txBody>
-          <a:bodyPr wrap="square" lIns="27432" rIns="27432" tIns="9144" bIns="9144" anchor="ctr">
-            <a:spAutoFit/>
-          </a:bodyPr>
-          <a:lstStyle/>
-          <a:p>
-            <a:pPr algn="l">
-              <a:defRPr sz="740" b="0">
-                <a:solidFill>
-                  <a:srgbClr val="0F172A"/>
-                </a:solidFill>
-                <a:latin typeface="Microsoft YaHei"/>
-              </a:defRPr>
-            </a:pPr>
-            <a:r>
-              <a:rPr sz="740" b="0">
-                <a:solidFill>
-                  <a:srgbClr val="0F172A"/>
-                </a:solidFill>
-                <a:latin typeface="Microsoft YaHei"/>
-              </a:rPr>
-              <a:t>No</a:t>
+            <a:off x="3355848" y="3022091"/>
+            <a:ext cx="731520" cy="274320"/>
+          </a:xfrm>
+          <a:prstGeom prst="rect">
+            <a:avLst/>
+          </a:prstGeom>
+          <a:noFill/>
+        </p:spPr>
+        <p:txBody>
+          <a:bodyPr wrap="square" lIns="27432" rIns="27432" tIns="9144" bIns="9144" anchor="ctr">
+            <a:spAutoFit/>
+          </a:bodyPr>
+          <a:lstStyle/>
+          <a:p>
+            <a:pPr algn="ctr">
+              <a:defRPr sz="1250" b="1">
+                <a:solidFill>
+                  <a:srgbClr val="BE123C"/>
+                </a:solidFill>
+                <a:latin typeface="Microsoft YaHei"/>
+              </a:defRPr>
+            </a:pPr>
+            <a:r>
+              <a:rPr sz="1250" b="1">
+                <a:solidFill>
+                  <a:srgbClr val="BE123C"/>
+                </a:solidFill>
+                <a:latin typeface="Microsoft YaHei"/>
+              </a:rPr>
+              <a:t>×</a:t>
             </a:r>
           </a:p>
         </p:txBody>
@@ -38803,8 +38976,8 @@
         </p:nvSpPr>
         <p:spPr>
           <a:xfrm>
-            <a:off x="4407408" y="2962656"/>
-            <a:ext cx="960120" cy="310896"/>
+            <a:off x="4133087" y="2999231"/>
+            <a:ext cx="868680" cy="320040"/>
           </a:xfrm>
           <a:prstGeom prst="rect">
             <a:avLst/>
@@ -38848,36 +39021,36 @@
         </p:nvSpPr>
         <p:spPr>
           <a:xfrm>
-            <a:off x="4453128" y="2994660"/>
-            <a:ext cx="868680" cy="246888"/>
-          </a:xfrm>
-          <a:prstGeom prst="rect">
-            <a:avLst/>
-          </a:prstGeom>
-          <a:noFill/>
-        </p:spPr>
-        <p:txBody>
-          <a:bodyPr wrap="square" lIns="27432" rIns="27432" tIns="9144" bIns="9144" anchor="ctr">
-            <a:spAutoFit/>
-          </a:bodyPr>
-          <a:lstStyle/>
-          <a:p>
-            <a:pPr algn="l">
-              <a:defRPr sz="740" b="0">
-                <a:solidFill>
-                  <a:srgbClr val="0F172A"/>
-                </a:solidFill>
-                <a:latin typeface="Microsoft YaHei"/>
-              </a:defRPr>
-            </a:pPr>
-            <a:r>
-              <a:rPr sz="740" b="0">
-                <a:solidFill>
-                  <a:srgbClr val="0F172A"/>
-                </a:solidFill>
-                <a:latin typeface="Microsoft YaHei"/>
-              </a:rPr>
-              <a:t>No</a:t>
+            <a:off x="4178807" y="3022091"/>
+            <a:ext cx="777240" cy="274320"/>
+          </a:xfrm>
+          <a:prstGeom prst="rect">
+            <a:avLst/>
+          </a:prstGeom>
+          <a:noFill/>
+        </p:spPr>
+        <p:txBody>
+          <a:bodyPr wrap="square" lIns="27432" rIns="27432" tIns="9144" bIns="9144" anchor="ctr">
+            <a:spAutoFit/>
+          </a:bodyPr>
+          <a:lstStyle/>
+          <a:p>
+            <a:pPr algn="ctr">
+              <a:defRPr sz="1250" b="1">
+                <a:solidFill>
+                  <a:srgbClr val="BE123C"/>
+                </a:solidFill>
+                <a:latin typeface="Microsoft YaHei"/>
+              </a:defRPr>
+            </a:pPr>
+            <a:r>
+              <a:rPr sz="1250" b="1">
+                <a:solidFill>
+                  <a:srgbClr val="BE123C"/>
+                </a:solidFill>
+                <a:latin typeface="Microsoft YaHei"/>
+              </a:rPr>
+              <a:t>×</a:t>
             </a:r>
           </a:p>
         </p:txBody>
@@ -38890,8 +39063,8 @@
         </p:nvSpPr>
         <p:spPr>
           <a:xfrm>
-            <a:off x="5367527" y="2962656"/>
-            <a:ext cx="3657600" cy="310896"/>
+            <a:off x="5001768" y="2999231"/>
+            <a:ext cx="4434840" cy="320040"/>
           </a:xfrm>
           <a:prstGeom prst="rect">
             <a:avLst/>
@@ -38935,8 +39108,8 @@
         </p:nvSpPr>
         <p:spPr>
           <a:xfrm>
-            <a:off x="5413247" y="2994660"/>
-            <a:ext cx="3566160" cy="246888"/>
+            <a:off x="5047488" y="3035807"/>
+            <a:ext cx="4343400" cy="246887"/>
           </a:xfrm>
           <a:prstGeom prst="rect">
             <a:avLst/>
@@ -38950,7 +39123,7 @@
           <a:lstStyle/>
           <a:p>
             <a:pPr algn="l">
-              <a:defRPr sz="740" b="0">
+              <a:defRPr sz="755" b="0">
                 <a:solidFill>
                   <a:srgbClr val="0F172A"/>
                 </a:solidFill>
@@ -38958,13 +39131,13 @@
               </a:defRPr>
             </a:pPr>
             <a:r>
-              <a:rPr sz="740" b="0">
+              <a:rPr sz="755" b="0">
                 <a:solidFill>
                   <a:srgbClr val="0F172A"/>
                 </a:solidFill>
                 <a:latin typeface="Microsoft YaHei"/>
               </a:rPr>
-              <a:t>randomized event control</a:t>
+              <a:t>随机 pressure 对照</a:t>
             </a:r>
           </a:p>
         </p:txBody>
@@ -38977,8 +39150,8 @@
         </p:nvSpPr>
         <p:spPr>
           <a:xfrm>
-            <a:off x="9025128" y="2962656"/>
-            <a:ext cx="822960" cy="310896"/>
+            <a:off x="9436607" y="2999231"/>
+            <a:ext cx="685800" cy="320040"/>
           </a:xfrm>
           <a:prstGeom prst="rect">
             <a:avLst/>
@@ -39022,22 +39195,22 @@
         </p:nvSpPr>
         <p:spPr>
           <a:xfrm>
-            <a:off x="9070848" y="2994660"/>
-            <a:ext cx="731520" cy="246888"/>
-          </a:xfrm>
-          <a:prstGeom prst="rect">
-            <a:avLst/>
-          </a:prstGeom>
-          <a:noFill/>
-        </p:spPr>
-        <p:txBody>
-          <a:bodyPr wrap="square" lIns="27432" rIns="27432" tIns="9144" bIns="9144" anchor="ctr">
-            <a:spAutoFit/>
-          </a:bodyPr>
-          <a:lstStyle/>
-          <a:p>
-            <a:pPr algn="l">
-              <a:defRPr sz="740" b="0">
+            <a:off x="9482328" y="3035807"/>
+            <a:ext cx="594360" cy="246887"/>
+          </a:xfrm>
+          <a:prstGeom prst="rect">
+            <a:avLst/>
+          </a:prstGeom>
+          <a:noFill/>
+        </p:spPr>
+        <p:txBody>
+          <a:bodyPr wrap="square" lIns="27432" rIns="27432" tIns="9144" bIns="9144" anchor="ctr">
+            <a:spAutoFit/>
+          </a:bodyPr>
+          <a:lstStyle/>
+          <a:p>
+            <a:pPr algn="r">
+              <a:defRPr sz="755" b="0">
                 <a:solidFill>
                   <a:srgbClr val="0F172A"/>
                 </a:solidFill>
@@ -39045,7 +39218,7 @@
               </a:defRPr>
             </a:pPr>
             <a:r>
-              <a:rPr sz="740" b="0">
+              <a:rPr sz="755" b="0">
                 <a:solidFill>
                   <a:srgbClr val="0F172A"/>
                 </a:solidFill>
@@ -39064,8 +39237,8 @@
         </p:nvSpPr>
         <p:spPr>
           <a:xfrm>
-            <a:off x="475488" y="3273552"/>
-            <a:ext cx="1874519" cy="310896"/>
+            <a:off x="475488" y="3319272"/>
+            <a:ext cx="1920240" cy="320040"/>
           </a:xfrm>
           <a:prstGeom prst="rect">
             <a:avLst/>
@@ -39109,8 +39282,8 @@
         </p:nvSpPr>
         <p:spPr>
           <a:xfrm>
-            <a:off x="521208" y="3305556"/>
-            <a:ext cx="1783079" cy="246888"/>
+            <a:off x="521208" y="3355848"/>
+            <a:ext cx="1828800" cy="246887"/>
           </a:xfrm>
           <a:prstGeom prst="rect">
             <a:avLst/>
@@ -39124,7 +39297,7 @@
           <a:lstStyle/>
           <a:p>
             <a:pPr algn="l">
-              <a:defRPr sz="740" b="1">
+              <a:defRPr sz="755" b="1">
                 <a:solidFill>
                   <a:srgbClr val="0F172A"/>
                 </a:solidFill>
@@ -39132,7 +39305,7 @@
               </a:defRPr>
             </a:pPr>
             <a:r>
-              <a:rPr sz="740" b="1">
+              <a:rPr sz="755" b="1">
                 <a:solidFill>
                   <a:srgbClr val="0F172A"/>
                 </a:solidFill>
@@ -39151,8 +39324,8 @@
         </p:nvSpPr>
         <p:spPr>
           <a:xfrm>
-            <a:off x="2350008" y="3273552"/>
-            <a:ext cx="1143000" cy="310896"/>
+            <a:off x="2395728" y="3319272"/>
+            <a:ext cx="914400" cy="320040"/>
           </a:xfrm>
           <a:prstGeom prst="rect">
             <a:avLst/>
@@ -39196,36 +39369,36 @@
         </p:nvSpPr>
         <p:spPr>
           <a:xfrm>
-            <a:off x="2395727" y="3305556"/>
-            <a:ext cx="1051560" cy="246888"/>
-          </a:xfrm>
-          <a:prstGeom prst="rect">
-            <a:avLst/>
-          </a:prstGeom>
-          <a:noFill/>
-        </p:spPr>
-        <p:txBody>
-          <a:bodyPr wrap="square" lIns="27432" rIns="27432" tIns="9144" bIns="9144" anchor="ctr">
-            <a:spAutoFit/>
-          </a:bodyPr>
-          <a:lstStyle/>
-          <a:p>
-            <a:pPr algn="l">
-              <a:defRPr sz="740" b="0">
-                <a:solidFill>
-                  <a:srgbClr val="0F172A"/>
-                </a:solidFill>
-                <a:latin typeface="Microsoft YaHei"/>
-              </a:defRPr>
-            </a:pPr>
-            <a:r>
-              <a:rPr sz="740" b="0">
-                <a:solidFill>
-                  <a:srgbClr val="0F172A"/>
-                </a:solidFill>
-                <a:latin typeface="Microsoft YaHei"/>
-              </a:rPr>
-              <a:t>Yes</a:t>
+            <a:off x="2441448" y="3342132"/>
+            <a:ext cx="822960" cy="274320"/>
+          </a:xfrm>
+          <a:prstGeom prst="rect">
+            <a:avLst/>
+          </a:prstGeom>
+          <a:noFill/>
+        </p:spPr>
+        <p:txBody>
+          <a:bodyPr wrap="square" lIns="27432" rIns="27432" tIns="9144" bIns="9144" anchor="ctr">
+            <a:spAutoFit/>
+          </a:bodyPr>
+          <a:lstStyle/>
+          <a:p>
+            <a:pPr algn="ctr">
+              <a:defRPr sz="1250" b="1">
+                <a:solidFill>
+                  <a:srgbClr val="198754"/>
+                </a:solidFill>
+                <a:latin typeface="Microsoft YaHei"/>
+              </a:defRPr>
+            </a:pPr>
+            <a:r>
+              <a:rPr sz="1250" b="1">
+                <a:solidFill>
+                  <a:srgbClr val="198754"/>
+                </a:solidFill>
+                <a:latin typeface="Microsoft YaHei"/>
+              </a:rPr>
+              <a:t>●</a:t>
             </a:r>
           </a:p>
         </p:txBody>
@@ -39238,8 +39411,8 @@
         </p:nvSpPr>
         <p:spPr>
           <a:xfrm>
-            <a:off x="3493008" y="3273552"/>
-            <a:ext cx="914400" cy="310896"/>
+            <a:off x="3310128" y="3319272"/>
+            <a:ext cx="822960" cy="320040"/>
           </a:xfrm>
           <a:prstGeom prst="rect">
             <a:avLst/>
@@ -39283,36 +39456,36 @@
         </p:nvSpPr>
         <p:spPr>
           <a:xfrm>
-            <a:off x="3538727" y="3305556"/>
-            <a:ext cx="822960" cy="246888"/>
-          </a:xfrm>
-          <a:prstGeom prst="rect">
-            <a:avLst/>
-          </a:prstGeom>
-          <a:noFill/>
-        </p:spPr>
-        <p:txBody>
-          <a:bodyPr wrap="square" lIns="27432" rIns="27432" tIns="9144" bIns="9144" anchor="ctr">
-            <a:spAutoFit/>
-          </a:bodyPr>
-          <a:lstStyle/>
-          <a:p>
-            <a:pPr algn="l">
-              <a:defRPr sz="740" b="0">
-                <a:solidFill>
-                  <a:srgbClr val="0F172A"/>
-                </a:solidFill>
-                <a:latin typeface="Microsoft YaHei"/>
-              </a:defRPr>
-            </a:pPr>
-            <a:r>
-              <a:rPr sz="740" b="0">
-                <a:solidFill>
-                  <a:srgbClr val="0F172A"/>
-                </a:solidFill>
-                <a:latin typeface="Microsoft YaHei"/>
-              </a:rPr>
-              <a:t>Yes</a:t>
+            <a:off x="3355848" y="3342132"/>
+            <a:ext cx="731520" cy="274320"/>
+          </a:xfrm>
+          <a:prstGeom prst="rect">
+            <a:avLst/>
+          </a:prstGeom>
+          <a:noFill/>
+        </p:spPr>
+        <p:txBody>
+          <a:bodyPr wrap="square" lIns="27432" rIns="27432" tIns="9144" bIns="9144" anchor="ctr">
+            <a:spAutoFit/>
+          </a:bodyPr>
+          <a:lstStyle/>
+          <a:p>
+            <a:pPr algn="ctr">
+              <a:defRPr sz="1250" b="1">
+                <a:solidFill>
+                  <a:srgbClr val="198754"/>
+                </a:solidFill>
+                <a:latin typeface="Microsoft YaHei"/>
+              </a:defRPr>
+            </a:pPr>
+            <a:r>
+              <a:rPr sz="1250" b="1">
+                <a:solidFill>
+                  <a:srgbClr val="198754"/>
+                </a:solidFill>
+                <a:latin typeface="Microsoft YaHei"/>
+              </a:rPr>
+              <a:t>●</a:t>
             </a:r>
           </a:p>
         </p:txBody>
@@ -39325,8 +39498,8 @@
         </p:nvSpPr>
         <p:spPr>
           <a:xfrm>
-            <a:off x="4407408" y="3273552"/>
-            <a:ext cx="960120" cy="310896"/>
+            <a:off x="4133087" y="3319272"/>
+            <a:ext cx="868680" cy="320040"/>
           </a:xfrm>
           <a:prstGeom prst="rect">
             <a:avLst/>
@@ -39370,36 +39543,36 @@
         </p:nvSpPr>
         <p:spPr>
           <a:xfrm>
-            <a:off x="4453128" y="3305556"/>
-            <a:ext cx="868680" cy="246888"/>
-          </a:xfrm>
-          <a:prstGeom prst="rect">
-            <a:avLst/>
-          </a:prstGeom>
-          <a:noFill/>
-        </p:spPr>
-        <p:txBody>
-          <a:bodyPr wrap="square" lIns="27432" rIns="27432" tIns="9144" bIns="9144" anchor="ctr">
-            <a:spAutoFit/>
-          </a:bodyPr>
-          <a:lstStyle/>
-          <a:p>
-            <a:pPr algn="l">
-              <a:defRPr sz="740" b="0">
-                <a:solidFill>
-                  <a:srgbClr val="0F172A"/>
-                </a:solidFill>
-                <a:latin typeface="Microsoft YaHei"/>
-              </a:defRPr>
-            </a:pPr>
-            <a:r>
-              <a:rPr sz="740" b="0">
-                <a:solidFill>
-                  <a:srgbClr val="0F172A"/>
-                </a:solidFill>
-                <a:latin typeface="Microsoft YaHei"/>
-              </a:rPr>
-              <a:t>No</a:t>
+            <a:off x="4178807" y="3342132"/>
+            <a:ext cx="777240" cy="274320"/>
+          </a:xfrm>
+          <a:prstGeom prst="rect">
+            <a:avLst/>
+          </a:prstGeom>
+          <a:noFill/>
+        </p:spPr>
+        <p:txBody>
+          <a:bodyPr wrap="square" lIns="27432" rIns="27432" tIns="9144" bIns="9144" anchor="ctr">
+            <a:spAutoFit/>
+          </a:bodyPr>
+          <a:lstStyle/>
+          <a:p>
+            <a:pPr algn="ctr">
+              <a:defRPr sz="1250" b="1">
+                <a:solidFill>
+                  <a:srgbClr val="BE123C"/>
+                </a:solidFill>
+                <a:latin typeface="Microsoft YaHei"/>
+              </a:defRPr>
+            </a:pPr>
+            <a:r>
+              <a:rPr sz="1250" b="1">
+                <a:solidFill>
+                  <a:srgbClr val="BE123C"/>
+                </a:solidFill>
+                <a:latin typeface="Microsoft YaHei"/>
+              </a:rPr>
+              <a:t>×</a:t>
             </a:r>
           </a:p>
         </p:txBody>
@@ -39412,8 +39585,8 @@
         </p:nvSpPr>
         <p:spPr>
           <a:xfrm>
-            <a:off x="5367527" y="3273552"/>
-            <a:ext cx="3657600" cy="310896"/>
+            <a:off x="5001768" y="3319272"/>
+            <a:ext cx="4434840" cy="320040"/>
           </a:xfrm>
           <a:prstGeom prst="rect">
             <a:avLst/>
@@ -39457,8 +39630,8 @@
         </p:nvSpPr>
         <p:spPr>
           <a:xfrm>
-            <a:off x="5413247" y="3305556"/>
-            <a:ext cx="3566160" cy="246888"/>
+            <a:off x="5047488" y="3355848"/>
+            <a:ext cx="4343400" cy="246887"/>
           </a:xfrm>
           <a:prstGeom prst="rect">
             <a:avLst/>
@@ -39472,7 +39645,7 @@
           <a:lstStyle/>
           <a:p>
             <a:pPr algn="l">
-              <a:defRPr sz="740" b="0">
+              <a:defRPr sz="755" b="1">
                 <a:solidFill>
                   <a:srgbClr val="0F172A"/>
                 </a:solidFill>
@@ -39480,13 +39653,13 @@
               </a:defRPr>
             </a:pPr>
             <a:r>
-              <a:rPr sz="740" b="0">
+              <a:rPr sz="755" b="1">
                 <a:solidFill>
                   <a:srgbClr val="0F172A"/>
                 </a:solidFill>
                 <a:latin typeface="Microsoft YaHei"/>
               </a:rPr>
-              <a:t>routine + event correction</a:t>
+              <a:t>历史基线 × LLM 事件折减</a:t>
             </a:r>
           </a:p>
         </p:txBody>
@@ -39499,8 +39672,8 @@
         </p:nvSpPr>
         <p:spPr>
           <a:xfrm>
-            <a:off x="9025128" y="3273552"/>
-            <a:ext cx="822960" cy="310896"/>
+            <a:off x="9436607" y="3319272"/>
+            <a:ext cx="685800" cy="320040"/>
           </a:xfrm>
           <a:prstGeom prst="rect">
             <a:avLst/>
@@ -39544,8 +39717,50 @@
         </p:nvSpPr>
         <p:spPr>
           <a:xfrm>
-            <a:off x="9070848" y="3305556"/>
-            <a:ext cx="731520" cy="246888"/>
+            <a:off x="9482328" y="3355848"/>
+            <a:ext cx="594360" cy="246887"/>
+          </a:xfrm>
+          <a:prstGeom prst="rect">
+            <a:avLst/>
+          </a:prstGeom>
+          <a:noFill/>
+        </p:spPr>
+        <p:txBody>
+          <a:bodyPr wrap="square" lIns="27432" rIns="27432" tIns="9144" bIns="9144" anchor="ctr">
+            <a:spAutoFit/>
+          </a:bodyPr>
+          <a:lstStyle/>
+          <a:p>
+            <a:pPr algn="r">
+              <a:defRPr sz="755" b="1">
+                <a:solidFill>
+                  <a:srgbClr val="0F172A"/>
+                </a:solidFill>
+                <a:latin typeface="Microsoft YaHei"/>
+              </a:defRPr>
+            </a:pPr>
+            <a:r>
+              <a:rPr sz="755" b="1">
+                <a:solidFill>
+                  <a:srgbClr val="0F172A"/>
+                </a:solidFill>
+                <a:latin typeface="Microsoft YaHei"/>
+              </a:rPr>
+              <a:t>2.50</a:t>
+            </a:r>
+          </a:p>
+        </p:txBody>
+      </p:sp>
+      <p:sp>
+        <p:nvSpPr>
+          <p:cNvPr id="108" name="TextBox 107"/>
+          <p:cNvSpPr txBox="1"/>
+          <p:nvPr/>
+        </p:nvSpPr>
+        <p:spPr>
+          <a:xfrm>
+            <a:off x="594360" y="3730752"/>
+            <a:ext cx="3017520" cy="201168"/>
           </a:xfrm>
           <a:prstGeom prst="rect">
             <a:avLst/>
@@ -39559,35 +39774,35 @@
           <a:lstStyle/>
           <a:p>
             <a:pPr algn="l">
-              <a:defRPr sz="740" b="0">
-                <a:solidFill>
-                  <a:srgbClr val="0F172A"/>
-                </a:solidFill>
-                <a:latin typeface="Microsoft YaHei"/>
-              </a:defRPr>
-            </a:pPr>
-            <a:r>
-              <a:rPr sz="740" b="0">
-                <a:solidFill>
-                  <a:srgbClr val="0F172A"/>
-                </a:solidFill>
-                <a:latin typeface="Microsoft YaHei"/>
-              </a:rPr>
-              <a:t>2.50</a:t>
-            </a:r>
-          </a:p>
-        </p:txBody>
-      </p:sp>
-      <p:sp>
-        <p:nvSpPr>
-          <p:cNvPr id="108" name="Rounded Rectangle 107"/>
+              <a:defRPr sz="850" b="1">
+                <a:solidFill>
+                  <a:srgbClr val="64748B"/>
+                </a:solidFill>
+                <a:latin typeface="Microsoft YaHei"/>
+              </a:defRPr>
+            </a:pPr>
+            <a:r>
+              <a:rPr sz="850" b="1">
+                <a:solidFill>
+                  <a:srgbClr val="64748B"/>
+                </a:solidFill>
+                <a:latin typeface="Microsoft YaHei"/>
+              </a:rPr>
+              <a:t>● 使用 / used    × 不使用 / not used</a:t>
+            </a:r>
+          </a:p>
+        </p:txBody>
+      </p:sp>
+      <p:sp>
+        <p:nvSpPr>
+          <p:cNvPr id="109" name="Rounded Rectangle 108"/>
           <p:cNvSpPr/>
           <p:nvPr/>
         </p:nvSpPr>
         <p:spPr>
           <a:xfrm>
-            <a:off x="749808" y="5230368"/>
-            <a:ext cx="10012680" cy="987552"/>
+            <a:off x="749808" y="5029200"/>
+            <a:ext cx="10012680" cy="1143000"/>
           </a:xfrm>
           <a:prstGeom prst="roundRect">
             <a:avLst/>
@@ -39625,14 +39840,14 @@
       </p:sp>
       <p:sp>
         <p:nvSpPr>
-          <p:cNvPr id="109" name="Rectangle 108"/>
+          <p:cNvPr id="110" name="Rectangle 109"/>
           <p:cNvSpPr/>
           <p:nvPr/>
         </p:nvSpPr>
         <p:spPr>
           <a:xfrm>
-            <a:off x="749808" y="5230368"/>
-            <a:ext cx="50292" cy="987552"/>
+            <a:off x="749808" y="5029200"/>
+            <a:ext cx="50292" cy="1143000"/>
           </a:xfrm>
           <a:prstGeom prst="rect">
             <a:avLst/>
@@ -39668,14 +39883,14 @@
       </p:sp>
       <p:sp>
         <p:nvSpPr>
-          <p:cNvPr id="110" name="TextBox 109"/>
-          <p:cNvSpPr txBox="1"/>
-          <p:nvPr/>
-        </p:nvSpPr>
-        <p:spPr>
-          <a:xfrm>
-            <a:off x="914400" y="5321807"/>
-            <a:ext cx="9720072" cy="355518"/>
+          <p:cNvPr id="111" name="TextBox 110"/>
+          <p:cNvSpPr txBox="1"/>
+          <p:nvPr/>
+        </p:nvSpPr>
+        <p:spPr>
+          <a:xfrm>
+            <a:off x="914400" y="5120640"/>
+            <a:ext cx="9720072" cy="411479"/>
           </a:xfrm>
           <a:prstGeom prst="rect">
             <a:avLst/>
@@ -39703,21 +39918,21 @@
                 </a:solidFill>
                 <a:latin typeface="Microsoft YaHei"/>
               </a:rPr>
-              <a:t>公平性原则：2022 标签只用于最后 evaluation，主方法使用固定 no-label 参数，避免把测试年标签隐含用于调参。</a:t>
-            </a:r>
-          </a:p>
-        </p:txBody>
-      </p:sp>
-      <p:sp>
-        <p:nvSpPr>
-          <p:cNvPr id="111" name="TextBox 110"/>
-          <p:cNvSpPr txBox="1"/>
-          <p:nvPr/>
-        </p:nvSpPr>
-        <p:spPr>
-          <a:xfrm>
-            <a:off x="914400" y="5741334"/>
-            <a:ext cx="9720072" cy="403433"/>
+              <a:t>对比逻辑：传统 XGBoost 有 household baseline 但缺少疫情机制；LLM-only 有事件方向但缺少家庭数值基线；hybrid 把两者合在一起。</a:t>
+            </a:r>
+          </a:p>
+        </p:txBody>
+      </p:sp>
+      <p:sp>
+        <p:nvSpPr>
+          <p:cNvPr id="112" name="TextBox 111"/>
+          <p:cNvSpPr txBox="1"/>
+          <p:nvPr/>
+        </p:nvSpPr>
+        <p:spPr>
+          <a:xfrm>
+            <a:off x="914400" y="5596128"/>
+            <a:ext cx="9720072" cy="502920"/>
           </a:xfrm>
           <a:prstGeom prst="rect">
             <a:avLst/>
@@ -39745,7 +39960,7 @@
                 </a:solidFill>
                 <a:latin typeface="Microsoft YaHei"/>
               </a:rPr>
-              <a:t>Fairness rule: 2022 labels are held out until final evaluation; the primary method uses fixed parameters rather than target-year calibration.</a:t>
+              <a:t>The comparison isolates the value of each component: household grounding from the historical model and event pressure from the LLM.</a:t>
             </a:r>
           </a:p>
         </p:txBody>
@@ -43138,7 +43353,7 @@
                 </a:solidFill>
                 <a:latin typeface="Microsoft YaHei"/>
               </a:rPr>
-              <a:t>结果主线：普通 XGBoost 学到的是正常时期出行强度，所以 2022 明显高估；LLM prior 提供缺失的疫情方向。</a:t>
+              <a:t>普通 XGBoost 保留了家庭差异，但把 2022 当作常态延续，产生明显高估；加入事件折减后，wMAE 降到 2.50，bias 接近 0。</a:t>
             </a:r>
           </a:p>
         </p:txBody>
@@ -43180,7 +43395,7 @@
                 </a:solidFill>
                 <a:latin typeface="Microsoft YaHei"/>
               </a:rPr>
-              <a:t>Main insight: the historical model transfers routine mobility into a post-pandemic year, while the LLM prior supplies the missing event direction.</a:t>
+              <a:t>XGBoost preserves household differences but misses the pandemic shift. Event correction lowers wMAE to 2.50 and removes most systematic bias.</a:t>
             </a:r>
           </a:p>
         </p:txBody>
@@ -43417,7 +43632,7 @@
                 </a:solidFill>
                 <a:latin typeface="Microsoft YaHei"/>
               </a:rPr>
-              <a:t>分析图1：主方法同时降低误差和系统性偏差</a:t>
+              <a:t>横轴是 |bias|，纵轴是 wMAE，越靠左下越好</a:t>
             </a:r>
           </a:p>
         </p:txBody>
@@ -43765,7 +43980,7 @@
                 </a:solidFill>
                 <a:latin typeface="Microsoft YaHei"/>
               </a:rPr>
-              <a:t>这张图要讲的不是“哪个点最低”这么简单，而是说明我们的方法同时移动到低 MAE 和低 bias 的区域。</a:t>
+              <a:t>Hybrid 位于低误差、低偏差区域；普通 XGBoost 的偏差较大，说明 2022 的整体高估不能只靠家庭表格变量解决。</a:t>
             </a:r>
           </a:p>
         </p:txBody>
@@ -43807,7 +44022,7 @@
                 </a:solidFill>
                 <a:latin typeface="Microsoft YaHei"/>
               </a:rPr>
-              <a:t>The proposed correction improves both household error and systematic bias, rather than improving one metric at the cost of the other.</a:t>
+              <a:t>The hybrid method moves toward lower error and near-zero bias; the ordinary historical model keeps a clear positive shift.</a:t>
             </a:r>
           </a:p>
         </p:txBody>
@@ -43892,7 +44107,7 @@
                 </a:solidFill>
                 <a:latin typeface="Microsoft YaHei"/>
               </a:rPr>
-              <a:t>Reading guide</a:t>
+              <a:t>读图方式</a:t>
             </a:r>
           </a:p>
         </p:txBody>
@@ -43977,7 +44192,7 @@
                 </a:solidFill>
                 <a:latin typeface="Microsoft YaHei"/>
               </a:rPr>
-              <a:t>Story</a:t>
+              <a:t>含义</a:t>
             </a:r>
           </a:p>
         </p:txBody>
@@ -44064,7 +44279,7 @@
                 </a:solidFill>
                 <a:latin typeface="Microsoft YaHei"/>
               </a:rPr>
-              <a:t>x-axis</a:t>
+              <a:t>横轴</a:t>
             </a:r>
           </a:p>
         </p:txBody>
@@ -44151,7 +44366,7 @@
                 </a:solidFill>
                 <a:latin typeface="Microsoft YaHei"/>
               </a:rPr>
-              <a:t>closer to zero means lower systematic shift</a:t>
+              <a:t>越接近 0，系统性偏差越小</a:t>
             </a:r>
           </a:p>
         </p:txBody>
@@ -44238,7 +44453,7 @@
                 </a:solidFill>
                 <a:latin typeface="Microsoft YaHei"/>
               </a:rPr>
-              <a:t>y-axis</a:t>
+              <a:t>纵轴</a:t>
             </a:r>
           </a:p>
         </p:txBody>
@@ -44325,7 +44540,7 @@
                 </a:solidFill>
                 <a:latin typeface="Microsoft YaHei"/>
               </a:rPr>
-              <a:t>lower means smaller household trip-count error</a:t>
+              <a:t>越低，家庭出行次数误差越小</a:t>
             </a:r>
           </a:p>
         </p:txBody>
@@ -44412,7 +44627,7 @@
                 </a:solidFill>
                 <a:latin typeface="Microsoft YaHei"/>
               </a:rPr>
-              <a:t>point size</a:t>
+              <a:t>点大小</a:t>
             </a:r>
           </a:p>
         </p:txBody>
@@ -44499,7 +44714,7 @@
                 </a:solidFill>
                 <a:latin typeface="Microsoft YaHei"/>
               </a:rPr>
-              <a:t>weighted RMSE, reflecting large-error risk</a:t>
+              <a:t>代表 weighted RMSE，反映大误差风险</a:t>
             </a:r>
           </a:p>
         </p:txBody>
@@ -44586,7 +44801,7 @@
                 </a:solidFill>
                 <a:latin typeface="Microsoft YaHei"/>
               </a:rPr>
-              <a:t>hybrid gated</a:t>
+              <a:t>Hybrid</a:t>
             </a:r>
           </a:p>
         </p:txBody>
@@ -44673,7 +44888,7 @@
                 </a:solidFill>
                 <a:latin typeface="Microsoft YaHei"/>
               </a:rPr>
-              <a:t>near the lower-left region</a:t>
+              <a:t>位于低误差、低偏差区域</a:t>
             </a:r>
           </a:p>
         </p:txBody>

--- a/outputs/final_project/NHTS_Travel_Behavior_Template_Presentation.pptx
+++ b/outputs/final_project/NHTS_Travel_Behavior_Template_Presentation.pptx
@@ -14708,7 +14708,7 @@
                 </a:solidFill>
                 <a:latin typeface="Microsoft YaHei"/>
               </a:rPr>
-              <a:t>方式结构是否已经解决？</a:t>
+              <a:t>是否只是通用下调？</a:t>
             </a:r>
           </a:p>
         </p:txBody>
@@ -14795,7 +14795,7 @@
                 </a:solidFill>
                 <a:latin typeface="Microsoft YaHei"/>
               </a:rPr>
-              <a:t>还没有；主要是 transit 维度更清楚</a:t>
+              <a:t>pre-COVID placebo 中 full suppression 会过度修正</a:t>
             </a:r>
           </a:p>
         </p:txBody>

--- a/outputs/final_project/NHTS_Travel_Behavior_Template_Presentation.pptx
+++ b/outputs/final_project/NHTS_Travel_Behavior_Template_Presentation.pptx
@@ -20127,7 +20127,7 @@
           <a:lstStyle/>
           <a:p>
             <a:pPr algn="l">
-              <a:defRPr sz="1200" b="1">
+              <a:defRPr sz="1050" b="1">
                 <a:solidFill>
                   <a:srgbClr val="0F172A"/>
                 </a:solidFill>
@@ -20135,13 +20135,13 @@
               </a:defRPr>
             </a:pPr>
             <a:r>
-              <a:rPr sz="1200" b="1">
+              <a:rPr sz="1050" b="1">
                 <a:solidFill>
                   <a:srgbClr val="0F172A"/>
                 </a:solidFill>
                 <a:latin typeface="Microsoft YaHei"/>
               </a:rPr>
-              <a:t>LLM 输出的是 s_event，不是 y；最终预测 = 历史 household baseline × 事件折减系数。</a:t>
+              <a:t>LLM-only has direction but weaker calibration: wMAE 2.72 -&gt; 2.50; wBias -0.37 -&gt; -0.02.</a:t>
             </a:r>
           </a:p>
         </p:txBody>

--- a/outputs/final_project/NHTS_Travel_Behavior_Template_Presentation.pptx
+++ b/outputs/final_project/NHTS_Travel_Behavior_Template_Presentation.pptx
@@ -10739,7 +10739,7 @@
                 </a:solidFill>
                 <a:latin typeface="Microsoft YaHei"/>
               </a:rPr>
-              <a:t>Min error</a:t>
+              <a:t>Calibration</a:t>
             </a:r>
           </a:p>
         </p:txBody>
@@ -10826,7 +10826,7 @@
                 </a:solidFill>
                 <a:latin typeface="Microsoft YaHei"/>
               </a:rPr>
-              <a:t>LLM suppression</a:t>
+              <a:t>Gated LLM</a:t>
             </a:r>
           </a:p>
         </p:txBody>
@@ -10913,7 +10913,7 @@
                 </a:solidFill>
                 <a:latin typeface="Microsoft YaHei"/>
               </a:rPr>
-              <a:t>2.482</a:t>
+              <a:t>2.502</a:t>
             </a:r>
           </a:p>
         </p:txBody>
@@ -11000,7 +11000,7 @@
                 </a:solidFill>
                 <a:latin typeface="Microsoft YaHei"/>
               </a:rPr>
-              <a:t>0.540</a:t>
+              <a:t>0.023</a:t>
             </a:r>
           </a:p>
         </p:txBody>
@@ -17231,7 +17231,7 @@
                 </a:solidFill>
                 <a:latin typeface="Microsoft YaHei"/>
               </a:rPr>
-              <a:t>Best sensitivity</a:t>
+              <a:t>Weighted R2</a:t>
             </a:r>
           </a:p>
         </p:txBody>
@@ -17273,7 +17273,7 @@
                 </a:solidFill>
                 <a:latin typeface="Microsoft YaHei"/>
               </a:rPr>
-              <a:t>2.482</a:t>
+              <a:t>0.248</a:t>
             </a:r>
           </a:p>
         </p:txBody>
@@ -17315,7 +17315,7 @@
                 </a:solidFill>
                 <a:latin typeface="Microsoft YaHei"/>
               </a:rPr>
-              <a:t>wMAE, not main claim</a:t>
+              <a:t>primary gated rule</a:t>
             </a:r>
           </a:p>
         </p:txBody>

--- a/outputs/final_project/NHTS_Travel_Behavior_Template_Presentation.pptx
+++ b/outputs/final_project/NHTS_Travel_Behavior_Template_Presentation.pptx
@@ -8939,7 +8939,7 @@
         <p:spPr>
           <a:xfrm>
             <a:off x="7086600" y="2852928"/>
-            <a:ext cx="1325880" cy="457200"/>
+            <a:ext cx="1325880" cy="384048"/>
           </a:xfrm>
           <a:prstGeom prst="rect">
             <a:avLst/>
@@ -8982,7 +8982,7 @@
         <p:spPr>
           <a:xfrm>
             <a:off x="7123176" y="2926080"/>
-            <a:ext cx="1252728" cy="329184"/>
+            <a:ext cx="1252728" cy="256031"/>
           </a:xfrm>
           <a:prstGeom prst="rect">
             <a:avLst/>
@@ -9024,7 +9024,7 @@
         <p:spPr>
           <a:xfrm>
             <a:off x="8412480" y="2852928"/>
-            <a:ext cx="2834640" cy="457200"/>
+            <a:ext cx="2834640" cy="384048"/>
           </a:xfrm>
           <a:prstGeom prst="rect">
             <a:avLst/>
@@ -9067,7 +9067,7 @@
         <p:spPr>
           <a:xfrm>
             <a:off x="8449055" y="2926080"/>
-            <a:ext cx="2761488" cy="329184"/>
+            <a:ext cx="2761488" cy="256031"/>
           </a:xfrm>
           <a:prstGeom prst="rect">
             <a:avLst/>
@@ -9108,8 +9108,8 @@
         </p:nvSpPr>
         <p:spPr>
           <a:xfrm>
-            <a:off x="7086600" y="3310128"/>
-            <a:ext cx="1325880" cy="457200"/>
+            <a:off x="7086600" y="3236976"/>
+            <a:ext cx="1325880" cy="384048"/>
           </a:xfrm>
           <a:prstGeom prst="rect">
             <a:avLst/>
@@ -9153,8 +9153,8 @@
         </p:nvSpPr>
         <p:spPr>
           <a:xfrm>
-            <a:off x="7141464" y="3374136"/>
-            <a:ext cx="1216152" cy="329184"/>
+            <a:off x="7141464" y="3300984"/>
+            <a:ext cx="1216152" cy="256031"/>
           </a:xfrm>
           <a:prstGeom prst="rect">
             <a:avLst/>
@@ -9195,8 +9195,8 @@
         </p:nvSpPr>
         <p:spPr>
           <a:xfrm>
-            <a:off x="8412480" y="3310128"/>
-            <a:ext cx="2834640" cy="457200"/>
+            <a:off x="8412480" y="3236976"/>
+            <a:ext cx="2834640" cy="384048"/>
           </a:xfrm>
           <a:prstGeom prst="rect">
             <a:avLst/>
@@ -9240,8 +9240,8 @@
         </p:nvSpPr>
         <p:spPr>
           <a:xfrm>
-            <a:off x="8467344" y="3374136"/>
-            <a:ext cx="2724912" cy="329184"/>
+            <a:off x="8467344" y="3300984"/>
+            <a:ext cx="2724912" cy="256031"/>
           </a:xfrm>
           <a:prstGeom prst="rect">
             <a:avLst/>
@@ -9282,8 +9282,8 @@
         </p:nvSpPr>
         <p:spPr>
           <a:xfrm>
-            <a:off x="7086600" y="3767328"/>
-            <a:ext cx="1325880" cy="457200"/>
+            <a:off x="7086600" y="3621024"/>
+            <a:ext cx="1325880" cy="384048"/>
           </a:xfrm>
           <a:prstGeom prst="rect">
             <a:avLst/>
@@ -9327,8 +9327,8 @@
         </p:nvSpPr>
         <p:spPr>
           <a:xfrm>
-            <a:off x="7141464" y="3831336"/>
-            <a:ext cx="1216152" cy="329184"/>
+            <a:off x="7141464" y="3685032"/>
+            <a:ext cx="1216152" cy="256031"/>
           </a:xfrm>
           <a:prstGeom prst="rect">
             <a:avLst/>
@@ -9369,8 +9369,8 @@
         </p:nvSpPr>
         <p:spPr>
           <a:xfrm>
-            <a:off x="8412480" y="3767328"/>
-            <a:ext cx="2834640" cy="457200"/>
+            <a:off x="8412480" y="3621024"/>
+            <a:ext cx="2834640" cy="384048"/>
           </a:xfrm>
           <a:prstGeom prst="rect">
             <a:avLst/>
@@ -9414,8 +9414,8 @@
         </p:nvSpPr>
         <p:spPr>
           <a:xfrm>
-            <a:off x="8467344" y="3831336"/>
-            <a:ext cx="2724912" cy="329184"/>
+            <a:off x="8467344" y="3685032"/>
+            <a:ext cx="2724912" cy="256031"/>
           </a:xfrm>
           <a:prstGeom prst="rect">
             <a:avLst/>
@@ -9456,8 +9456,8 @@
         </p:nvSpPr>
         <p:spPr>
           <a:xfrm>
-            <a:off x="7086600" y="4224528"/>
-            <a:ext cx="1325880" cy="457200"/>
+            <a:off x="7086600" y="4005072"/>
+            <a:ext cx="1325880" cy="384048"/>
           </a:xfrm>
           <a:prstGeom prst="rect">
             <a:avLst/>
@@ -9501,8 +9501,8 @@
         </p:nvSpPr>
         <p:spPr>
           <a:xfrm>
-            <a:off x="7141464" y="4288536"/>
-            <a:ext cx="1216152" cy="329184"/>
+            <a:off x="7141464" y="4069080"/>
+            <a:ext cx="1216152" cy="256031"/>
           </a:xfrm>
           <a:prstGeom prst="rect">
             <a:avLst/>
@@ -9543,8 +9543,8 @@
         </p:nvSpPr>
         <p:spPr>
           <a:xfrm>
-            <a:off x="8412480" y="4224528"/>
-            <a:ext cx="2834640" cy="457200"/>
+            <a:off x="8412480" y="4005072"/>
+            <a:ext cx="2834640" cy="384048"/>
           </a:xfrm>
           <a:prstGeom prst="rect">
             <a:avLst/>
@@ -9588,8 +9588,8 @@
         </p:nvSpPr>
         <p:spPr>
           <a:xfrm>
-            <a:off x="8467344" y="4288536"/>
-            <a:ext cx="2724912" cy="329184"/>
+            <a:off x="8467344" y="4069080"/>
+            <a:ext cx="2724912" cy="256031"/>
           </a:xfrm>
           <a:prstGeom prst="rect">
             <a:avLst/>
@@ -9630,8 +9630,8 @@
         </p:nvSpPr>
         <p:spPr>
           <a:xfrm>
-            <a:off x="7086600" y="4681728"/>
-            <a:ext cx="1325880" cy="457200"/>
+            <a:off x="7086600" y="4389120"/>
+            <a:ext cx="1325880" cy="384048"/>
           </a:xfrm>
           <a:prstGeom prst="rect">
             <a:avLst/>
@@ -9675,8 +9675,8 @@
         </p:nvSpPr>
         <p:spPr>
           <a:xfrm>
-            <a:off x="7141464" y="4745736"/>
-            <a:ext cx="1216152" cy="329184"/>
+            <a:off x="7141464" y="4453128"/>
+            <a:ext cx="1216152" cy="256031"/>
           </a:xfrm>
           <a:prstGeom prst="rect">
             <a:avLst/>
@@ -9717,8 +9717,8 @@
         </p:nvSpPr>
         <p:spPr>
           <a:xfrm>
-            <a:off x="8412480" y="4681728"/>
-            <a:ext cx="2834640" cy="457200"/>
+            <a:off x="8412480" y="4389120"/>
+            <a:ext cx="2834640" cy="384048"/>
           </a:xfrm>
           <a:prstGeom prst="rect">
             <a:avLst/>
@@ -9762,8 +9762,8 @@
         </p:nvSpPr>
         <p:spPr>
           <a:xfrm>
-            <a:off x="8467344" y="4745736"/>
-            <a:ext cx="2724912" cy="329184"/>
+            <a:off x="8467344" y="4453128"/>
+            <a:ext cx="2724912" cy="256031"/>
           </a:xfrm>
           <a:prstGeom prst="rect">
             <a:avLst/>
@@ -10241,7 +10241,7 @@
         <p:spPr>
           <a:xfrm>
             <a:off x="749808" y="4572000"/>
-            <a:ext cx="1508760" cy="457200"/>
+            <a:ext cx="1508760" cy="393192"/>
           </a:xfrm>
           <a:prstGeom prst="rect">
             <a:avLst/>
@@ -10284,7 +10284,7 @@
         <p:spPr>
           <a:xfrm>
             <a:off x="786384" y="4645152"/>
-            <a:ext cx="1435607" cy="329184"/>
+            <a:ext cx="1435607" cy="265176"/>
           </a:xfrm>
           <a:prstGeom prst="rect">
             <a:avLst/>
@@ -10326,7 +10326,7 @@
         <p:spPr>
           <a:xfrm>
             <a:off x="2258568" y="4572000"/>
-            <a:ext cx="1965960" cy="457200"/>
+            <a:ext cx="1965960" cy="393192"/>
           </a:xfrm>
           <a:prstGeom prst="rect">
             <a:avLst/>
@@ -10369,7 +10369,7 @@
         <p:spPr>
           <a:xfrm>
             <a:off x="2295144" y="4645152"/>
-            <a:ext cx="1892807" cy="329184"/>
+            <a:ext cx="1892807" cy="265176"/>
           </a:xfrm>
           <a:prstGeom prst="rect">
             <a:avLst/>
@@ -10411,7 +10411,7 @@
         <p:spPr>
           <a:xfrm>
             <a:off x="4224528" y="4572000"/>
-            <a:ext cx="731520" cy="457200"/>
+            <a:ext cx="731520" cy="393192"/>
           </a:xfrm>
           <a:prstGeom prst="rect">
             <a:avLst/>
@@ -10454,7 +10454,7 @@
         <p:spPr>
           <a:xfrm>
             <a:off x="4261104" y="4645152"/>
-            <a:ext cx="658368" cy="329184"/>
+            <a:ext cx="658368" cy="265176"/>
           </a:xfrm>
           <a:prstGeom prst="rect">
             <a:avLst/>
@@ -10496,7 +10496,7 @@
         <p:spPr>
           <a:xfrm>
             <a:off x="4956048" y="4572000"/>
-            <a:ext cx="731520" cy="457200"/>
+            <a:ext cx="731520" cy="393192"/>
           </a:xfrm>
           <a:prstGeom prst="rect">
             <a:avLst/>
@@ -10539,7 +10539,7 @@
         <p:spPr>
           <a:xfrm>
             <a:off x="4992624" y="4645152"/>
-            <a:ext cx="658368" cy="329184"/>
+            <a:ext cx="658368" cy="265176"/>
           </a:xfrm>
           <a:prstGeom prst="rect">
             <a:avLst/>
@@ -10581,7 +10581,7 @@
         <p:spPr>
           <a:xfrm>
             <a:off x="5687568" y="4572000"/>
-            <a:ext cx="822960" cy="457200"/>
+            <a:ext cx="822960" cy="393192"/>
           </a:xfrm>
           <a:prstGeom prst="rect">
             <a:avLst/>
@@ -10624,7 +10624,7 @@
         <p:spPr>
           <a:xfrm>
             <a:off x="5724144" y="4645152"/>
-            <a:ext cx="749808" cy="329184"/>
+            <a:ext cx="749808" cy="265176"/>
           </a:xfrm>
           <a:prstGeom prst="rect">
             <a:avLst/>
@@ -10665,8 +10665,8 @@
         </p:nvSpPr>
         <p:spPr>
           <a:xfrm>
-            <a:off x="749808" y="5029200"/>
-            <a:ext cx="1508760" cy="457200"/>
+            <a:off x="749808" y="4965192"/>
+            <a:ext cx="1508760" cy="393192"/>
           </a:xfrm>
           <a:prstGeom prst="rect">
             <a:avLst/>
@@ -10710,8 +10710,8 @@
         </p:nvSpPr>
         <p:spPr>
           <a:xfrm>
-            <a:off x="804671" y="5093208"/>
-            <a:ext cx="1399031" cy="329184"/>
+            <a:off x="804671" y="5029200"/>
+            <a:ext cx="1399031" cy="265176"/>
           </a:xfrm>
           <a:prstGeom prst="rect">
             <a:avLst/>
@@ -10752,8 +10752,8 @@
         </p:nvSpPr>
         <p:spPr>
           <a:xfrm>
-            <a:off x="2258568" y="5029200"/>
-            <a:ext cx="1965960" cy="457200"/>
+            <a:off x="2258568" y="4965192"/>
+            <a:ext cx="1965960" cy="393192"/>
           </a:xfrm>
           <a:prstGeom prst="rect">
             <a:avLst/>
@@ -10797,8 +10797,8 @@
         </p:nvSpPr>
         <p:spPr>
           <a:xfrm>
-            <a:off x="2313432" y="5093208"/>
-            <a:ext cx="1856231" cy="329184"/>
+            <a:off x="2313432" y="5029200"/>
+            <a:ext cx="1856231" cy="265176"/>
           </a:xfrm>
           <a:prstGeom prst="rect">
             <a:avLst/>
@@ -10839,8 +10839,8 @@
         </p:nvSpPr>
         <p:spPr>
           <a:xfrm>
-            <a:off x="4224528" y="5029200"/>
-            <a:ext cx="731520" cy="457200"/>
+            <a:off x="4224528" y="4965192"/>
+            <a:ext cx="731520" cy="393192"/>
           </a:xfrm>
           <a:prstGeom prst="rect">
             <a:avLst/>
@@ -10884,8 +10884,8 @@
         </p:nvSpPr>
         <p:spPr>
           <a:xfrm>
-            <a:off x="4279392" y="5093208"/>
-            <a:ext cx="621792" cy="329184"/>
+            <a:off x="4279392" y="5029200"/>
+            <a:ext cx="621792" cy="265176"/>
           </a:xfrm>
           <a:prstGeom prst="rect">
             <a:avLst/>
@@ -10926,8 +10926,8 @@
         </p:nvSpPr>
         <p:spPr>
           <a:xfrm>
-            <a:off x="4956048" y="5029200"/>
-            <a:ext cx="731520" cy="457200"/>
+            <a:off x="4956048" y="4965192"/>
+            <a:ext cx="731520" cy="393192"/>
           </a:xfrm>
           <a:prstGeom prst="rect">
             <a:avLst/>
@@ -10971,8 +10971,8 @@
         </p:nvSpPr>
         <p:spPr>
           <a:xfrm>
-            <a:off x="5010912" y="5093208"/>
-            <a:ext cx="621792" cy="329184"/>
+            <a:off x="5010912" y="5029200"/>
+            <a:ext cx="621792" cy="265176"/>
           </a:xfrm>
           <a:prstGeom prst="rect">
             <a:avLst/>
@@ -11013,8 +11013,8 @@
         </p:nvSpPr>
         <p:spPr>
           <a:xfrm>
-            <a:off x="5687568" y="5029200"/>
-            <a:ext cx="822960" cy="457200"/>
+            <a:off x="5687568" y="4965192"/>
+            <a:ext cx="822960" cy="393192"/>
           </a:xfrm>
           <a:prstGeom prst="rect">
             <a:avLst/>
@@ -11058,8 +11058,8 @@
         </p:nvSpPr>
         <p:spPr>
           <a:xfrm>
-            <a:off x="5742432" y="5093208"/>
-            <a:ext cx="713232" cy="329184"/>
+            <a:off x="5742432" y="5029200"/>
+            <a:ext cx="713232" cy="265176"/>
           </a:xfrm>
           <a:prstGeom prst="rect">
             <a:avLst/>
@@ -11100,8 +11100,8 @@
         </p:nvSpPr>
         <p:spPr>
           <a:xfrm>
-            <a:off x="749808" y="5486400"/>
-            <a:ext cx="1508760" cy="457200"/>
+            <a:off x="749808" y="5358384"/>
+            <a:ext cx="1508760" cy="393192"/>
           </a:xfrm>
           <a:prstGeom prst="rect">
             <a:avLst/>
@@ -11145,8 +11145,8 @@
         </p:nvSpPr>
         <p:spPr>
           <a:xfrm>
-            <a:off x="804671" y="5550408"/>
-            <a:ext cx="1399031" cy="329184"/>
+            <a:off x="804671" y="5422392"/>
+            <a:ext cx="1399031" cy="265176"/>
           </a:xfrm>
           <a:prstGeom prst="rect">
             <a:avLst/>
@@ -11187,8 +11187,8 @@
         </p:nvSpPr>
         <p:spPr>
           <a:xfrm>
-            <a:off x="2258568" y="5486400"/>
-            <a:ext cx="1965960" cy="457200"/>
+            <a:off x="2258568" y="5358384"/>
+            <a:ext cx="1965960" cy="393192"/>
           </a:xfrm>
           <a:prstGeom prst="rect">
             <a:avLst/>
@@ -11232,8 +11232,8 @@
         </p:nvSpPr>
         <p:spPr>
           <a:xfrm>
-            <a:off x="2313432" y="5550408"/>
-            <a:ext cx="1856231" cy="329184"/>
+            <a:off x="2313432" y="5422392"/>
+            <a:ext cx="1856231" cy="265176"/>
           </a:xfrm>
           <a:prstGeom prst="rect">
             <a:avLst/>
@@ -11274,8 +11274,8 @@
         </p:nvSpPr>
         <p:spPr>
           <a:xfrm>
-            <a:off x="4224528" y="5486400"/>
-            <a:ext cx="731520" cy="457200"/>
+            <a:off x="4224528" y="5358384"/>
+            <a:ext cx="731520" cy="393192"/>
           </a:xfrm>
           <a:prstGeom prst="rect">
             <a:avLst/>
@@ -11319,8 +11319,8 @@
         </p:nvSpPr>
         <p:spPr>
           <a:xfrm>
-            <a:off x="4279392" y="5550408"/>
-            <a:ext cx="621792" cy="329184"/>
+            <a:off x="4279392" y="5422392"/>
+            <a:ext cx="621792" cy="265176"/>
           </a:xfrm>
           <a:prstGeom prst="rect">
             <a:avLst/>
@@ -11361,8 +11361,8 @@
         </p:nvSpPr>
         <p:spPr>
           <a:xfrm>
-            <a:off x="4956048" y="5486400"/>
-            <a:ext cx="731520" cy="457200"/>
+            <a:off x="4956048" y="5358384"/>
+            <a:ext cx="731520" cy="393192"/>
           </a:xfrm>
           <a:prstGeom prst="rect">
             <a:avLst/>
@@ -11406,8 +11406,8 @@
         </p:nvSpPr>
         <p:spPr>
           <a:xfrm>
-            <a:off x="5010912" y="5550408"/>
-            <a:ext cx="621792" cy="329184"/>
+            <a:off x="5010912" y="5422392"/>
+            <a:ext cx="621792" cy="265176"/>
           </a:xfrm>
           <a:prstGeom prst="rect">
             <a:avLst/>
@@ -11448,8 +11448,8 @@
         </p:nvSpPr>
         <p:spPr>
           <a:xfrm>
-            <a:off x="5687568" y="5486400"/>
-            <a:ext cx="822960" cy="457200"/>
+            <a:off x="5687568" y="5358384"/>
+            <a:ext cx="822960" cy="393192"/>
           </a:xfrm>
           <a:prstGeom prst="rect">
             <a:avLst/>
@@ -11493,8 +11493,8 @@
         </p:nvSpPr>
         <p:spPr>
           <a:xfrm>
-            <a:off x="5742432" y="5550408"/>
-            <a:ext cx="713232" cy="329184"/>
+            <a:off x="5742432" y="5422392"/>
+            <a:ext cx="713232" cy="265176"/>
           </a:xfrm>
           <a:prstGeom prst="rect">
             <a:avLst/>
@@ -11535,8 +11535,8 @@
         </p:nvSpPr>
         <p:spPr>
           <a:xfrm>
-            <a:off x="749808" y="5943600"/>
-            <a:ext cx="1508760" cy="457200"/>
+            <a:off x="749808" y="5751576"/>
+            <a:ext cx="1508760" cy="393192"/>
           </a:xfrm>
           <a:prstGeom prst="rect">
             <a:avLst/>
@@ -11580,8 +11580,8 @@
         </p:nvSpPr>
         <p:spPr>
           <a:xfrm>
-            <a:off x="804671" y="6007608"/>
-            <a:ext cx="1399031" cy="329184"/>
+            <a:off x="804671" y="5815584"/>
+            <a:ext cx="1399031" cy="265176"/>
           </a:xfrm>
           <a:prstGeom prst="rect">
             <a:avLst/>
@@ -11622,8 +11622,8 @@
         </p:nvSpPr>
         <p:spPr>
           <a:xfrm>
-            <a:off x="2258568" y="5943600"/>
-            <a:ext cx="1965960" cy="457200"/>
+            <a:off x="2258568" y="5751576"/>
+            <a:ext cx="1965960" cy="393192"/>
           </a:xfrm>
           <a:prstGeom prst="rect">
             <a:avLst/>
@@ -11667,8 +11667,8 @@
         </p:nvSpPr>
         <p:spPr>
           <a:xfrm>
-            <a:off x="2313432" y="6007608"/>
-            <a:ext cx="1856231" cy="329184"/>
+            <a:off x="2313432" y="5815584"/>
+            <a:ext cx="1856231" cy="265176"/>
           </a:xfrm>
           <a:prstGeom prst="rect">
             <a:avLst/>
@@ -11709,8 +11709,8 @@
         </p:nvSpPr>
         <p:spPr>
           <a:xfrm>
-            <a:off x="4224528" y="5943600"/>
-            <a:ext cx="731520" cy="457200"/>
+            <a:off x="4224528" y="5751576"/>
+            <a:ext cx="731520" cy="393192"/>
           </a:xfrm>
           <a:prstGeom prst="rect">
             <a:avLst/>
@@ -11754,8 +11754,8 @@
         </p:nvSpPr>
         <p:spPr>
           <a:xfrm>
-            <a:off x="4279392" y="6007608"/>
-            <a:ext cx="621792" cy="329184"/>
+            <a:off x="4279392" y="5815584"/>
+            <a:ext cx="621792" cy="265176"/>
           </a:xfrm>
           <a:prstGeom prst="rect">
             <a:avLst/>
@@ -11796,8 +11796,8 @@
         </p:nvSpPr>
         <p:spPr>
           <a:xfrm>
-            <a:off x="4956048" y="5943600"/>
-            <a:ext cx="731520" cy="457200"/>
+            <a:off x="4956048" y="5751576"/>
+            <a:ext cx="731520" cy="393192"/>
           </a:xfrm>
           <a:prstGeom prst="rect">
             <a:avLst/>
@@ -11841,8 +11841,8 @@
         </p:nvSpPr>
         <p:spPr>
           <a:xfrm>
-            <a:off x="5010912" y="6007608"/>
-            <a:ext cx="621792" cy="329184"/>
+            <a:off x="5010912" y="5815584"/>
+            <a:ext cx="621792" cy="265176"/>
           </a:xfrm>
           <a:prstGeom prst="rect">
             <a:avLst/>
@@ -11883,8 +11883,8 @@
         </p:nvSpPr>
         <p:spPr>
           <a:xfrm>
-            <a:off x="5687568" y="5943600"/>
-            <a:ext cx="822960" cy="457200"/>
+            <a:off x="5687568" y="5751576"/>
+            <a:ext cx="822960" cy="393192"/>
           </a:xfrm>
           <a:prstGeom prst="rect">
             <a:avLst/>
@@ -11928,8 +11928,8 @@
         </p:nvSpPr>
         <p:spPr>
           <a:xfrm>
-            <a:off x="5742432" y="6007608"/>
-            <a:ext cx="713232" cy="329184"/>
+            <a:off x="5742432" y="5815584"/>
+            <a:ext cx="713232" cy="265176"/>
           </a:xfrm>
           <a:prstGeom prst="rect">
             <a:avLst/>
@@ -13943,7 +13943,7 @@
         <p:spPr>
           <a:xfrm>
             <a:off x="6812280" y="2971800"/>
-            <a:ext cx="1828800" cy="457200"/>
+            <a:ext cx="1828800" cy="384048"/>
           </a:xfrm>
           <a:prstGeom prst="rect">
             <a:avLst/>
@@ -13986,7 +13986,7 @@
         <p:spPr>
           <a:xfrm>
             <a:off x="6848856" y="3044952"/>
-            <a:ext cx="1755648" cy="329184"/>
+            <a:ext cx="1755648" cy="256031"/>
           </a:xfrm>
           <a:prstGeom prst="rect">
             <a:avLst/>
@@ -14028,7 +14028,7 @@
         <p:spPr>
           <a:xfrm>
             <a:off x="8641080" y="2971800"/>
-            <a:ext cx="2514600" cy="457200"/>
+            <a:ext cx="2514600" cy="384048"/>
           </a:xfrm>
           <a:prstGeom prst="rect">
             <a:avLst/>
@@ -14071,7 +14071,7 @@
         <p:spPr>
           <a:xfrm>
             <a:off x="8677655" y="3044952"/>
-            <a:ext cx="2441448" cy="329184"/>
+            <a:ext cx="2441448" cy="256031"/>
           </a:xfrm>
           <a:prstGeom prst="rect">
             <a:avLst/>
@@ -14112,8 +14112,8 @@
         </p:nvSpPr>
         <p:spPr>
           <a:xfrm>
-            <a:off x="6812280" y="3429000"/>
-            <a:ext cx="1828800" cy="457200"/>
+            <a:off x="6812280" y="3355848"/>
+            <a:ext cx="1828800" cy="384048"/>
           </a:xfrm>
           <a:prstGeom prst="rect">
             <a:avLst/>
@@ -14157,8 +14157,8 @@
         </p:nvSpPr>
         <p:spPr>
           <a:xfrm>
-            <a:off x="6867144" y="3493008"/>
-            <a:ext cx="1719072" cy="329184"/>
+            <a:off x="6867144" y="3419856"/>
+            <a:ext cx="1719072" cy="256031"/>
           </a:xfrm>
           <a:prstGeom prst="rect">
             <a:avLst/>
@@ -14199,8 +14199,8 @@
         </p:nvSpPr>
         <p:spPr>
           <a:xfrm>
-            <a:off x="8641080" y="3429000"/>
-            <a:ext cx="2514600" cy="457200"/>
+            <a:off x="8641080" y="3355848"/>
+            <a:ext cx="2514600" cy="384048"/>
           </a:xfrm>
           <a:prstGeom prst="rect">
             <a:avLst/>
@@ -14244,8 +14244,8 @@
         </p:nvSpPr>
         <p:spPr>
           <a:xfrm>
-            <a:off x="8695944" y="3493008"/>
-            <a:ext cx="2404872" cy="329184"/>
+            <a:off x="8695944" y="3419856"/>
+            <a:ext cx="2404872" cy="256031"/>
           </a:xfrm>
           <a:prstGeom prst="rect">
             <a:avLst/>
@@ -14286,8 +14286,8 @@
         </p:nvSpPr>
         <p:spPr>
           <a:xfrm>
-            <a:off x="6812280" y="3886200"/>
-            <a:ext cx="1828800" cy="457200"/>
+            <a:off x="6812280" y="3739896"/>
+            <a:ext cx="1828800" cy="384048"/>
           </a:xfrm>
           <a:prstGeom prst="rect">
             <a:avLst/>
@@ -14331,8 +14331,8 @@
         </p:nvSpPr>
         <p:spPr>
           <a:xfrm>
-            <a:off x="6867144" y="3950208"/>
-            <a:ext cx="1719072" cy="329184"/>
+            <a:off x="6867144" y="3803904"/>
+            <a:ext cx="1719072" cy="256031"/>
           </a:xfrm>
           <a:prstGeom prst="rect">
             <a:avLst/>
@@ -14373,8 +14373,8 @@
         </p:nvSpPr>
         <p:spPr>
           <a:xfrm>
-            <a:off x="8641080" y="3886200"/>
-            <a:ext cx="2514600" cy="457200"/>
+            <a:off x="8641080" y="3739896"/>
+            <a:ext cx="2514600" cy="384048"/>
           </a:xfrm>
           <a:prstGeom prst="rect">
             <a:avLst/>
@@ -14418,8 +14418,8 @@
         </p:nvSpPr>
         <p:spPr>
           <a:xfrm>
-            <a:off x="8695944" y="3950208"/>
-            <a:ext cx="2404872" cy="329184"/>
+            <a:off x="8695944" y="3803904"/>
+            <a:ext cx="2404872" cy="256031"/>
           </a:xfrm>
           <a:prstGeom prst="rect">
             <a:avLst/>
@@ -14460,8 +14460,8 @@
         </p:nvSpPr>
         <p:spPr>
           <a:xfrm>
-            <a:off x="6812280" y="4343400"/>
-            <a:ext cx="1828800" cy="457200"/>
+            <a:off x="6812280" y="4123944"/>
+            <a:ext cx="1828800" cy="384048"/>
           </a:xfrm>
           <a:prstGeom prst="rect">
             <a:avLst/>
@@ -14505,8 +14505,8 @@
         </p:nvSpPr>
         <p:spPr>
           <a:xfrm>
-            <a:off x="6867144" y="4407408"/>
-            <a:ext cx="1719072" cy="329184"/>
+            <a:off x="6867144" y="4187952"/>
+            <a:ext cx="1719072" cy="256031"/>
           </a:xfrm>
           <a:prstGeom prst="rect">
             <a:avLst/>
@@ -14547,8 +14547,8 @@
         </p:nvSpPr>
         <p:spPr>
           <a:xfrm>
-            <a:off x="8641080" y="4343400"/>
-            <a:ext cx="2514600" cy="457200"/>
+            <a:off x="8641080" y="4123944"/>
+            <a:ext cx="2514600" cy="384048"/>
           </a:xfrm>
           <a:prstGeom prst="rect">
             <a:avLst/>
@@ -14592,8 +14592,8 @@
         </p:nvSpPr>
         <p:spPr>
           <a:xfrm>
-            <a:off x="8695944" y="4407408"/>
-            <a:ext cx="2404872" cy="329184"/>
+            <a:off x="8695944" y="4187952"/>
+            <a:ext cx="2404872" cy="256031"/>
           </a:xfrm>
           <a:prstGeom prst="rect">
             <a:avLst/>
@@ -14634,8 +14634,8 @@
         </p:nvSpPr>
         <p:spPr>
           <a:xfrm>
-            <a:off x="6812280" y="4800600"/>
-            <a:ext cx="1828800" cy="457200"/>
+            <a:off x="6812280" y="4507992"/>
+            <a:ext cx="1828800" cy="384048"/>
           </a:xfrm>
           <a:prstGeom prst="rect">
             <a:avLst/>
@@ -14679,8 +14679,8 @@
         </p:nvSpPr>
         <p:spPr>
           <a:xfrm>
-            <a:off x="6867144" y="4864608"/>
-            <a:ext cx="1719072" cy="329184"/>
+            <a:off x="6867144" y="4572000"/>
+            <a:ext cx="1719072" cy="256031"/>
           </a:xfrm>
           <a:prstGeom prst="rect">
             <a:avLst/>
@@ -14721,8 +14721,8 @@
         </p:nvSpPr>
         <p:spPr>
           <a:xfrm>
-            <a:off x="8641080" y="4800600"/>
-            <a:ext cx="2514600" cy="457200"/>
+            <a:off x="8641080" y="4507992"/>
+            <a:ext cx="2514600" cy="384048"/>
           </a:xfrm>
           <a:prstGeom prst="rect">
             <a:avLst/>
@@ -14766,8 +14766,8 @@
         </p:nvSpPr>
         <p:spPr>
           <a:xfrm>
-            <a:off x="8695944" y="4864608"/>
-            <a:ext cx="2404872" cy="329184"/>
+            <a:off x="8695944" y="4572000"/>
+            <a:ext cx="2404872" cy="256031"/>
           </a:xfrm>
           <a:prstGeom prst="rect">
             <a:avLst/>
@@ -15393,7 +15393,7 @@
         <p:spPr>
           <a:xfrm>
             <a:off x="6995160" y="2880360"/>
-            <a:ext cx="1600200" cy="457200"/>
+            <a:ext cx="1600200" cy="384048"/>
           </a:xfrm>
           <a:prstGeom prst="rect">
             <a:avLst/>
@@ -15436,7 +15436,7 @@
         <p:spPr>
           <a:xfrm>
             <a:off x="7031736" y="2953512"/>
-            <a:ext cx="1527048" cy="329184"/>
+            <a:ext cx="1527048" cy="256031"/>
           </a:xfrm>
           <a:prstGeom prst="rect">
             <a:avLst/>
@@ -15478,7 +15478,7 @@
         <p:spPr>
           <a:xfrm>
             <a:off x="8595360" y="2880360"/>
-            <a:ext cx="2423160" cy="457200"/>
+            <a:ext cx="2423160" cy="384048"/>
           </a:xfrm>
           <a:prstGeom prst="rect">
             <a:avLst/>
@@ -15521,7 +15521,7 @@
         <p:spPr>
           <a:xfrm>
             <a:off x="8631936" y="2953512"/>
-            <a:ext cx="2350008" cy="329184"/>
+            <a:ext cx="2350008" cy="256031"/>
           </a:xfrm>
           <a:prstGeom prst="rect">
             <a:avLst/>
@@ -15562,8 +15562,8 @@
         </p:nvSpPr>
         <p:spPr>
           <a:xfrm>
-            <a:off x="6995160" y="3337560"/>
-            <a:ext cx="1600200" cy="457200"/>
+            <a:off x="6995160" y="3264408"/>
+            <a:ext cx="1600200" cy="384048"/>
           </a:xfrm>
           <a:prstGeom prst="rect">
             <a:avLst/>
@@ -15607,8 +15607,8 @@
         </p:nvSpPr>
         <p:spPr>
           <a:xfrm>
-            <a:off x="7050024" y="3401568"/>
-            <a:ext cx="1490472" cy="329184"/>
+            <a:off x="7050024" y="3328415"/>
+            <a:ext cx="1490472" cy="256031"/>
           </a:xfrm>
           <a:prstGeom prst="rect">
             <a:avLst/>
@@ -15649,8 +15649,8 @@
         </p:nvSpPr>
         <p:spPr>
           <a:xfrm>
-            <a:off x="8595360" y="3337560"/>
-            <a:ext cx="2423160" cy="457200"/>
+            <a:off x="8595360" y="3264408"/>
+            <a:ext cx="2423160" cy="384048"/>
           </a:xfrm>
           <a:prstGeom prst="rect">
             <a:avLst/>
@@ -15694,8 +15694,8 @@
         </p:nvSpPr>
         <p:spPr>
           <a:xfrm>
-            <a:off x="8650224" y="3401568"/>
-            <a:ext cx="2313432" cy="329184"/>
+            <a:off x="8650224" y="3328415"/>
+            <a:ext cx="2313432" cy="256031"/>
           </a:xfrm>
           <a:prstGeom prst="rect">
             <a:avLst/>
@@ -15736,8 +15736,8 @@
         </p:nvSpPr>
         <p:spPr>
           <a:xfrm>
-            <a:off x="6995160" y="3794760"/>
-            <a:ext cx="1600200" cy="457200"/>
+            <a:off x="6995160" y="3648456"/>
+            <a:ext cx="1600200" cy="384048"/>
           </a:xfrm>
           <a:prstGeom prst="rect">
             <a:avLst/>
@@ -15781,8 +15781,8 @@
         </p:nvSpPr>
         <p:spPr>
           <a:xfrm>
-            <a:off x="7050024" y="3858768"/>
-            <a:ext cx="1490472" cy="329184"/>
+            <a:off x="7050024" y="3712463"/>
+            <a:ext cx="1490472" cy="256031"/>
           </a:xfrm>
           <a:prstGeom prst="rect">
             <a:avLst/>
@@ -15823,8 +15823,8 @@
         </p:nvSpPr>
         <p:spPr>
           <a:xfrm>
-            <a:off x="8595360" y="3794760"/>
-            <a:ext cx="2423160" cy="457200"/>
+            <a:off x="8595360" y="3648456"/>
+            <a:ext cx="2423160" cy="384048"/>
           </a:xfrm>
           <a:prstGeom prst="rect">
             <a:avLst/>
@@ -15868,8 +15868,8 @@
         </p:nvSpPr>
         <p:spPr>
           <a:xfrm>
-            <a:off x="8650224" y="3858768"/>
-            <a:ext cx="2313432" cy="329184"/>
+            <a:off x="8650224" y="3712463"/>
+            <a:ext cx="2313432" cy="256031"/>
           </a:xfrm>
           <a:prstGeom prst="rect">
             <a:avLst/>
@@ -15910,8 +15910,8 @@
         </p:nvSpPr>
         <p:spPr>
           <a:xfrm>
-            <a:off x="6995160" y="4251960"/>
-            <a:ext cx="1600200" cy="457200"/>
+            <a:off x="6995160" y="4032504"/>
+            <a:ext cx="1600200" cy="384048"/>
           </a:xfrm>
           <a:prstGeom prst="rect">
             <a:avLst/>
@@ -15955,8 +15955,8 @@
         </p:nvSpPr>
         <p:spPr>
           <a:xfrm>
-            <a:off x="7050024" y="4315968"/>
-            <a:ext cx="1490472" cy="329184"/>
+            <a:off x="7050024" y="4096512"/>
+            <a:ext cx="1490472" cy="256031"/>
           </a:xfrm>
           <a:prstGeom prst="rect">
             <a:avLst/>
@@ -15997,8 +15997,8 @@
         </p:nvSpPr>
         <p:spPr>
           <a:xfrm>
-            <a:off x="8595360" y="4251960"/>
-            <a:ext cx="2423160" cy="457200"/>
+            <a:off x="8595360" y="4032504"/>
+            <a:ext cx="2423160" cy="384048"/>
           </a:xfrm>
           <a:prstGeom prst="rect">
             <a:avLst/>
@@ -16042,8 +16042,8 @@
         </p:nvSpPr>
         <p:spPr>
           <a:xfrm>
-            <a:off x="8650224" y="4315968"/>
-            <a:ext cx="2313432" cy="329184"/>
+            <a:off x="8650224" y="4096512"/>
+            <a:ext cx="2313432" cy="256031"/>
           </a:xfrm>
           <a:prstGeom prst="rect">
             <a:avLst/>
@@ -21095,7 +21095,7 @@
         <p:spPr>
           <a:xfrm>
             <a:off x="713232" y="2487168"/>
-            <a:ext cx="2057400" cy="457200"/>
+            <a:ext cx="2057400" cy="384048"/>
           </a:xfrm>
           <a:prstGeom prst="rect">
             <a:avLst/>
@@ -21138,7 +21138,7 @@
         <p:spPr>
           <a:xfrm>
             <a:off x="749808" y="2560320"/>
-            <a:ext cx="1984248" cy="329184"/>
+            <a:ext cx="1984248" cy="256031"/>
           </a:xfrm>
           <a:prstGeom prst="rect">
             <a:avLst/>
@@ -21180,7 +21180,7 @@
         <p:spPr>
           <a:xfrm>
             <a:off x="2770632" y="2487168"/>
-            <a:ext cx="1005840" cy="457200"/>
+            <a:ext cx="1005840" cy="384048"/>
           </a:xfrm>
           <a:prstGeom prst="rect">
             <a:avLst/>
@@ -21223,7 +21223,7 @@
         <p:spPr>
           <a:xfrm>
             <a:off x="2807208" y="2560320"/>
-            <a:ext cx="932688" cy="329184"/>
+            <a:ext cx="932688" cy="256031"/>
           </a:xfrm>
           <a:prstGeom prst="rect">
             <a:avLst/>
@@ -21265,7 +21265,7 @@
         <p:spPr>
           <a:xfrm>
             <a:off x="3776472" y="2487168"/>
-            <a:ext cx="1005840" cy="457200"/>
+            <a:ext cx="1005840" cy="384048"/>
           </a:xfrm>
           <a:prstGeom prst="rect">
             <a:avLst/>
@@ -21308,7 +21308,7 @@
         <p:spPr>
           <a:xfrm>
             <a:off x="3813048" y="2560320"/>
-            <a:ext cx="932688" cy="329184"/>
+            <a:ext cx="932688" cy="256031"/>
           </a:xfrm>
           <a:prstGeom prst="rect">
             <a:avLst/>
@@ -21350,7 +21350,7 @@
         <p:spPr>
           <a:xfrm>
             <a:off x="4782312" y="2487168"/>
-            <a:ext cx="1965960" cy="457200"/>
+            <a:ext cx="1965960" cy="384048"/>
           </a:xfrm>
           <a:prstGeom prst="rect">
             <a:avLst/>
@@ -21393,7 +21393,7 @@
         <p:spPr>
           <a:xfrm>
             <a:off x="4818888" y="2560320"/>
-            <a:ext cx="1892807" cy="329184"/>
+            <a:ext cx="1892807" cy="256031"/>
           </a:xfrm>
           <a:prstGeom prst="rect">
             <a:avLst/>
@@ -21434,8 +21434,8 @@
         </p:nvSpPr>
         <p:spPr>
           <a:xfrm>
-            <a:off x="713232" y="2944368"/>
-            <a:ext cx="2057400" cy="457200"/>
+            <a:off x="713232" y="2871216"/>
+            <a:ext cx="2057400" cy="384048"/>
           </a:xfrm>
           <a:prstGeom prst="rect">
             <a:avLst/>
@@ -21479,8 +21479,8 @@
         </p:nvSpPr>
         <p:spPr>
           <a:xfrm>
-            <a:off x="768096" y="3008376"/>
-            <a:ext cx="1947672" cy="329184"/>
+            <a:off x="768096" y="2935224"/>
+            <a:ext cx="1947672" cy="256031"/>
           </a:xfrm>
           <a:prstGeom prst="rect">
             <a:avLst/>
@@ -21521,8 +21521,8 @@
         </p:nvSpPr>
         <p:spPr>
           <a:xfrm>
-            <a:off x="2770632" y="2944368"/>
-            <a:ext cx="1005840" cy="457200"/>
+            <a:off x="2770632" y="2871216"/>
+            <a:ext cx="1005840" cy="384048"/>
           </a:xfrm>
           <a:prstGeom prst="rect">
             <a:avLst/>
@@ -21566,8 +21566,8 @@
         </p:nvSpPr>
         <p:spPr>
           <a:xfrm>
-            <a:off x="2825496" y="3008376"/>
-            <a:ext cx="896112" cy="329184"/>
+            <a:off x="2825496" y="2935224"/>
+            <a:ext cx="896112" cy="256031"/>
           </a:xfrm>
           <a:prstGeom prst="rect">
             <a:avLst/>
@@ -21608,8 +21608,8 @@
         </p:nvSpPr>
         <p:spPr>
           <a:xfrm>
-            <a:off x="3776472" y="2944368"/>
-            <a:ext cx="1005840" cy="457200"/>
+            <a:off x="3776472" y="2871216"/>
+            <a:ext cx="1005840" cy="384048"/>
           </a:xfrm>
           <a:prstGeom prst="rect">
             <a:avLst/>
@@ -21653,8 +21653,8 @@
         </p:nvSpPr>
         <p:spPr>
           <a:xfrm>
-            <a:off x="3831335" y="3008376"/>
-            <a:ext cx="896112" cy="329184"/>
+            <a:off x="3831335" y="2935224"/>
+            <a:ext cx="896112" cy="256031"/>
           </a:xfrm>
           <a:prstGeom prst="rect">
             <a:avLst/>
@@ -21695,8 +21695,8 @@
         </p:nvSpPr>
         <p:spPr>
           <a:xfrm>
-            <a:off x="4782312" y="2944368"/>
-            <a:ext cx="1965960" cy="457200"/>
+            <a:off x="4782312" y="2871216"/>
+            <a:ext cx="1965960" cy="384048"/>
           </a:xfrm>
           <a:prstGeom prst="rect">
             <a:avLst/>
@@ -21740,8 +21740,8 @@
         </p:nvSpPr>
         <p:spPr>
           <a:xfrm>
-            <a:off x="4837176" y="3008376"/>
-            <a:ext cx="1856231" cy="329184"/>
+            <a:off x="4837176" y="2935224"/>
+            <a:ext cx="1856231" cy="256031"/>
           </a:xfrm>
           <a:prstGeom prst="rect">
             <a:avLst/>
@@ -21782,8 +21782,8 @@
         </p:nvSpPr>
         <p:spPr>
           <a:xfrm>
-            <a:off x="713232" y="3401568"/>
-            <a:ext cx="2057400" cy="457200"/>
+            <a:off x="713232" y="3255264"/>
+            <a:ext cx="2057400" cy="384048"/>
           </a:xfrm>
           <a:prstGeom prst="rect">
             <a:avLst/>
@@ -21827,8 +21827,8 @@
         </p:nvSpPr>
         <p:spPr>
           <a:xfrm>
-            <a:off x="768096" y="3465576"/>
-            <a:ext cx="1947672" cy="329184"/>
+            <a:off x="768096" y="3319272"/>
+            <a:ext cx="1947672" cy="256031"/>
           </a:xfrm>
           <a:prstGeom prst="rect">
             <a:avLst/>
@@ -21869,8 +21869,8 @@
         </p:nvSpPr>
         <p:spPr>
           <a:xfrm>
-            <a:off x="2770632" y="3401568"/>
-            <a:ext cx="1005840" cy="457200"/>
+            <a:off x="2770632" y="3255264"/>
+            <a:ext cx="1005840" cy="384048"/>
           </a:xfrm>
           <a:prstGeom prst="rect">
             <a:avLst/>
@@ -21914,8 +21914,8 @@
         </p:nvSpPr>
         <p:spPr>
           <a:xfrm>
-            <a:off x="2825496" y="3465576"/>
-            <a:ext cx="896112" cy="329184"/>
+            <a:off x="2825496" y="3319272"/>
+            <a:ext cx="896112" cy="256031"/>
           </a:xfrm>
           <a:prstGeom prst="rect">
             <a:avLst/>
@@ -21956,8 +21956,8 @@
         </p:nvSpPr>
         <p:spPr>
           <a:xfrm>
-            <a:off x="3776472" y="3401568"/>
-            <a:ext cx="1005840" cy="457200"/>
+            <a:off x="3776472" y="3255264"/>
+            <a:ext cx="1005840" cy="384048"/>
           </a:xfrm>
           <a:prstGeom prst="rect">
             <a:avLst/>
@@ -22001,8 +22001,8 @@
         </p:nvSpPr>
         <p:spPr>
           <a:xfrm>
-            <a:off x="3831335" y="3465576"/>
-            <a:ext cx="896112" cy="329184"/>
+            <a:off x="3831335" y="3319272"/>
+            <a:ext cx="896112" cy="256031"/>
           </a:xfrm>
           <a:prstGeom prst="rect">
             <a:avLst/>
@@ -22043,8 +22043,8 @@
         </p:nvSpPr>
         <p:spPr>
           <a:xfrm>
-            <a:off x="4782312" y="3401568"/>
-            <a:ext cx="1965960" cy="457200"/>
+            <a:off x="4782312" y="3255264"/>
+            <a:ext cx="1965960" cy="384048"/>
           </a:xfrm>
           <a:prstGeom prst="rect">
             <a:avLst/>
@@ -22088,8 +22088,8 @@
         </p:nvSpPr>
         <p:spPr>
           <a:xfrm>
-            <a:off x="4837176" y="3465576"/>
-            <a:ext cx="1856231" cy="329184"/>
+            <a:off x="4837176" y="3319272"/>
+            <a:ext cx="1856231" cy="256031"/>
           </a:xfrm>
           <a:prstGeom prst="rect">
             <a:avLst/>
@@ -22130,8 +22130,8 @@
         </p:nvSpPr>
         <p:spPr>
           <a:xfrm>
-            <a:off x="713232" y="3858768"/>
-            <a:ext cx="2057400" cy="457200"/>
+            <a:off x="713232" y="3639312"/>
+            <a:ext cx="2057400" cy="384048"/>
           </a:xfrm>
           <a:prstGeom prst="rect">
             <a:avLst/>
@@ -22175,8 +22175,8 @@
         </p:nvSpPr>
         <p:spPr>
           <a:xfrm>
-            <a:off x="768096" y="3922776"/>
-            <a:ext cx="1947672" cy="329184"/>
+            <a:off x="768096" y="3703320"/>
+            <a:ext cx="1947672" cy="256031"/>
           </a:xfrm>
           <a:prstGeom prst="rect">
             <a:avLst/>
@@ -22217,8 +22217,8 @@
         </p:nvSpPr>
         <p:spPr>
           <a:xfrm>
-            <a:off x="2770632" y="3858768"/>
-            <a:ext cx="1005840" cy="457200"/>
+            <a:off x="2770632" y="3639312"/>
+            <a:ext cx="1005840" cy="384048"/>
           </a:xfrm>
           <a:prstGeom prst="rect">
             <a:avLst/>
@@ -22262,8 +22262,8 @@
         </p:nvSpPr>
         <p:spPr>
           <a:xfrm>
-            <a:off x="2825496" y="3922776"/>
-            <a:ext cx="896112" cy="329184"/>
+            <a:off x="2825496" y="3703320"/>
+            <a:ext cx="896112" cy="256031"/>
           </a:xfrm>
           <a:prstGeom prst="rect">
             <a:avLst/>
@@ -22304,8 +22304,8 @@
         </p:nvSpPr>
         <p:spPr>
           <a:xfrm>
-            <a:off x="3776472" y="3858768"/>
-            <a:ext cx="1005840" cy="457200"/>
+            <a:off x="3776472" y="3639312"/>
+            <a:ext cx="1005840" cy="384048"/>
           </a:xfrm>
           <a:prstGeom prst="rect">
             <a:avLst/>
@@ -22349,8 +22349,8 @@
         </p:nvSpPr>
         <p:spPr>
           <a:xfrm>
-            <a:off x="3831335" y="3922776"/>
-            <a:ext cx="896112" cy="329184"/>
+            <a:off x="3831335" y="3703320"/>
+            <a:ext cx="896112" cy="256031"/>
           </a:xfrm>
           <a:prstGeom prst="rect">
             <a:avLst/>
@@ -22391,8 +22391,8 @@
         </p:nvSpPr>
         <p:spPr>
           <a:xfrm>
-            <a:off x="4782312" y="3858768"/>
-            <a:ext cx="1965960" cy="457200"/>
+            <a:off x="4782312" y="3639312"/>
+            <a:ext cx="1965960" cy="384048"/>
           </a:xfrm>
           <a:prstGeom prst="rect">
             <a:avLst/>
@@ -22436,8 +22436,8 @@
         </p:nvSpPr>
         <p:spPr>
           <a:xfrm>
-            <a:off x="4837176" y="3922776"/>
-            <a:ext cx="1856231" cy="329184"/>
+            <a:off x="4837176" y="3703320"/>
+            <a:ext cx="1856231" cy="256031"/>
           </a:xfrm>
           <a:prstGeom prst="rect">
             <a:avLst/>
@@ -33344,7 +33344,7 @@
         <p:spPr>
           <a:xfrm>
             <a:off x="621792" y="1170432"/>
-            <a:ext cx="5074920" cy="457200"/>
+            <a:ext cx="5074920" cy="384048"/>
           </a:xfrm>
           <a:prstGeom prst="rect">
             <a:avLst/>
@@ -33387,7 +33387,7 @@
         <p:spPr>
           <a:xfrm>
             <a:off x="658368" y="1243584"/>
-            <a:ext cx="5001768" cy="329184"/>
+            <a:ext cx="5001768" cy="256031"/>
           </a:xfrm>
           <a:prstGeom prst="rect">
             <a:avLst/>
@@ -33429,7 +33429,7 @@
         <p:spPr>
           <a:xfrm>
             <a:off x="5696712" y="1170432"/>
-            <a:ext cx="5349240" cy="457200"/>
+            <a:ext cx="5349240" cy="384048"/>
           </a:xfrm>
           <a:prstGeom prst="rect">
             <a:avLst/>
@@ -33472,7 +33472,7 @@
         <p:spPr>
           <a:xfrm>
             <a:off x="5733288" y="1243584"/>
-            <a:ext cx="5276088" cy="329184"/>
+            <a:ext cx="5276088" cy="256031"/>
           </a:xfrm>
           <a:prstGeom prst="rect">
             <a:avLst/>
@@ -33513,8 +33513,8 @@
         </p:nvSpPr>
         <p:spPr>
           <a:xfrm>
-            <a:off x="621792" y="1627632"/>
-            <a:ext cx="5074920" cy="457200"/>
+            <a:off x="621792" y="1554480"/>
+            <a:ext cx="5074920" cy="384048"/>
           </a:xfrm>
           <a:prstGeom prst="rect">
             <a:avLst/>
@@ -33558,8 +33558,8 @@
         </p:nvSpPr>
         <p:spPr>
           <a:xfrm>
-            <a:off x="676656" y="1691640"/>
-            <a:ext cx="4965192" cy="329184"/>
+            <a:off x="676656" y="1618488"/>
+            <a:ext cx="4965192" cy="256031"/>
           </a:xfrm>
           <a:prstGeom prst="rect">
             <a:avLst/>
@@ -33600,8 +33600,8 @@
         </p:nvSpPr>
         <p:spPr>
           <a:xfrm>
-            <a:off x="5696712" y="1627632"/>
-            <a:ext cx="5349240" cy="457200"/>
+            <a:off x="5696712" y="1554480"/>
+            <a:ext cx="5349240" cy="384048"/>
           </a:xfrm>
           <a:prstGeom prst="rect">
             <a:avLst/>
@@ -33645,8 +33645,8 @@
         </p:nvSpPr>
         <p:spPr>
           <a:xfrm>
-            <a:off x="5751575" y="1691640"/>
-            <a:ext cx="5239512" cy="329184"/>
+            <a:off x="5751575" y="1618488"/>
+            <a:ext cx="5239512" cy="256031"/>
           </a:xfrm>
           <a:prstGeom prst="rect">
             <a:avLst/>
@@ -33687,8 +33687,8 @@
         </p:nvSpPr>
         <p:spPr>
           <a:xfrm>
-            <a:off x="621792" y="2084832"/>
-            <a:ext cx="5074920" cy="457200"/>
+            <a:off x="621792" y="1938528"/>
+            <a:ext cx="5074920" cy="384048"/>
           </a:xfrm>
           <a:prstGeom prst="rect">
             <a:avLst/>
@@ -33732,8 +33732,8 @@
         </p:nvSpPr>
         <p:spPr>
           <a:xfrm>
-            <a:off x="676656" y="2148840"/>
-            <a:ext cx="4965192" cy="329184"/>
+            <a:off x="676656" y="2002536"/>
+            <a:ext cx="4965192" cy="256031"/>
           </a:xfrm>
           <a:prstGeom prst="rect">
             <a:avLst/>
@@ -33774,8 +33774,8 @@
         </p:nvSpPr>
         <p:spPr>
           <a:xfrm>
-            <a:off x="5696712" y="2084832"/>
-            <a:ext cx="5349240" cy="457200"/>
+            <a:off x="5696712" y="1938528"/>
+            <a:ext cx="5349240" cy="384048"/>
           </a:xfrm>
           <a:prstGeom prst="rect">
             <a:avLst/>
@@ -33819,8 +33819,8 @@
         </p:nvSpPr>
         <p:spPr>
           <a:xfrm>
-            <a:off x="5751575" y="2148840"/>
-            <a:ext cx="5239512" cy="329184"/>
+            <a:off x="5751575" y="2002536"/>
+            <a:ext cx="5239512" cy="256031"/>
           </a:xfrm>
           <a:prstGeom prst="rect">
             <a:avLst/>
@@ -33861,8 +33861,8 @@
         </p:nvSpPr>
         <p:spPr>
           <a:xfrm>
-            <a:off x="621792" y="2542032"/>
-            <a:ext cx="5074920" cy="457200"/>
+            <a:off x="621792" y="2322576"/>
+            <a:ext cx="5074920" cy="384048"/>
           </a:xfrm>
           <a:prstGeom prst="rect">
             <a:avLst/>
@@ -33906,8 +33906,8 @@
         </p:nvSpPr>
         <p:spPr>
           <a:xfrm>
-            <a:off x="676656" y="2606040"/>
-            <a:ext cx="4965192" cy="329184"/>
+            <a:off x="676656" y="2386584"/>
+            <a:ext cx="4965192" cy="256031"/>
           </a:xfrm>
           <a:prstGeom prst="rect">
             <a:avLst/>
@@ -33948,8 +33948,8 @@
         </p:nvSpPr>
         <p:spPr>
           <a:xfrm>
-            <a:off x="5696712" y="2542032"/>
-            <a:ext cx="5349240" cy="457200"/>
+            <a:off x="5696712" y="2322576"/>
+            <a:ext cx="5349240" cy="384048"/>
           </a:xfrm>
           <a:prstGeom prst="rect">
             <a:avLst/>
@@ -33993,8 +33993,8 @@
         </p:nvSpPr>
         <p:spPr>
           <a:xfrm>
-            <a:off x="5751575" y="2606040"/>
-            <a:ext cx="5239512" cy="329184"/>
+            <a:off x="5751575" y="2386584"/>
+            <a:ext cx="5239512" cy="256031"/>
           </a:xfrm>
           <a:prstGeom prst="rect">
             <a:avLst/>
@@ -34035,8 +34035,8 @@
         </p:nvSpPr>
         <p:spPr>
           <a:xfrm>
-            <a:off x="621792" y="2999232"/>
-            <a:ext cx="5074920" cy="457200"/>
+            <a:off x="621792" y="2706624"/>
+            <a:ext cx="5074920" cy="384048"/>
           </a:xfrm>
           <a:prstGeom prst="rect">
             <a:avLst/>
@@ -34080,8 +34080,8 @@
         </p:nvSpPr>
         <p:spPr>
           <a:xfrm>
-            <a:off x="676656" y="3063240"/>
-            <a:ext cx="4965192" cy="329184"/>
+            <a:off x="676656" y="2770632"/>
+            <a:ext cx="4965192" cy="256031"/>
           </a:xfrm>
           <a:prstGeom prst="rect">
             <a:avLst/>
@@ -34122,8 +34122,8 @@
         </p:nvSpPr>
         <p:spPr>
           <a:xfrm>
-            <a:off x="5696712" y="2999232"/>
-            <a:ext cx="5349240" cy="457200"/>
+            <a:off x="5696712" y="2706624"/>
+            <a:ext cx="5349240" cy="384048"/>
           </a:xfrm>
           <a:prstGeom prst="rect">
             <a:avLst/>
@@ -34167,8 +34167,8 @@
         </p:nvSpPr>
         <p:spPr>
           <a:xfrm>
-            <a:off x="5751575" y="3063240"/>
-            <a:ext cx="5239512" cy="329184"/>
+            <a:off x="5751575" y="2770632"/>
+            <a:ext cx="5239512" cy="256031"/>
           </a:xfrm>
           <a:prstGeom prst="rect">
             <a:avLst/>
@@ -38079,7 +38079,7 @@
         <p:spPr>
           <a:xfrm>
             <a:off x="658368" y="2761488"/>
-            <a:ext cx="2148840" cy="457200"/>
+            <a:ext cx="2148840" cy="384048"/>
           </a:xfrm>
           <a:prstGeom prst="rect">
             <a:avLst/>
@@ -38122,7 +38122,7 @@
         <p:spPr>
           <a:xfrm>
             <a:off x="694944" y="2834640"/>
-            <a:ext cx="2075688" cy="329184"/>
+            <a:ext cx="2075688" cy="256031"/>
           </a:xfrm>
           <a:prstGeom prst="rect">
             <a:avLst/>
@@ -38164,7 +38164,7 @@
         <p:spPr>
           <a:xfrm>
             <a:off x="2807208" y="2761488"/>
-            <a:ext cx="3200400" cy="457200"/>
+            <a:ext cx="3200400" cy="384048"/>
           </a:xfrm>
           <a:prstGeom prst="rect">
             <a:avLst/>
@@ -38207,7 +38207,7 @@
         <p:spPr>
           <a:xfrm>
             <a:off x="2843784" y="2834640"/>
-            <a:ext cx="3127248" cy="329184"/>
+            <a:ext cx="3127248" cy="256031"/>
           </a:xfrm>
           <a:prstGeom prst="rect">
             <a:avLst/>
@@ -38249,7 +38249,7 @@
         <p:spPr>
           <a:xfrm>
             <a:off x="6007607" y="2761488"/>
-            <a:ext cx="2788920" cy="457200"/>
+            <a:ext cx="2788920" cy="384048"/>
           </a:xfrm>
           <a:prstGeom prst="rect">
             <a:avLst/>
@@ -38292,7 +38292,7 @@
         <p:spPr>
           <a:xfrm>
             <a:off x="6044183" y="2834640"/>
-            <a:ext cx="2715768" cy="329184"/>
+            <a:ext cx="2715768" cy="256031"/>
           </a:xfrm>
           <a:prstGeom prst="rect">
             <a:avLst/>
@@ -38334,7 +38334,7 @@
         <p:spPr>
           <a:xfrm>
             <a:off x="8796528" y="2761488"/>
-            <a:ext cx="2148840" cy="457200"/>
+            <a:ext cx="2148840" cy="384048"/>
           </a:xfrm>
           <a:prstGeom prst="rect">
             <a:avLst/>
@@ -38377,7 +38377,7 @@
         <p:spPr>
           <a:xfrm>
             <a:off x="8833104" y="2834640"/>
-            <a:ext cx="2075688" cy="329184"/>
+            <a:ext cx="2075688" cy="256031"/>
           </a:xfrm>
           <a:prstGeom prst="rect">
             <a:avLst/>
@@ -38418,8 +38418,8 @@
         </p:nvSpPr>
         <p:spPr>
           <a:xfrm>
-            <a:off x="658368" y="3218688"/>
-            <a:ext cx="2148840" cy="457200"/>
+            <a:off x="658368" y="3145536"/>
+            <a:ext cx="2148840" cy="384048"/>
           </a:xfrm>
           <a:prstGeom prst="rect">
             <a:avLst/>
@@ -38463,8 +38463,8 @@
         </p:nvSpPr>
         <p:spPr>
           <a:xfrm>
-            <a:off x="713232" y="3282696"/>
-            <a:ext cx="2039112" cy="329184"/>
+            <a:off x="713232" y="3209544"/>
+            <a:ext cx="2039112" cy="256031"/>
           </a:xfrm>
           <a:prstGeom prst="rect">
             <a:avLst/>
@@ -38505,8 +38505,8 @@
         </p:nvSpPr>
         <p:spPr>
           <a:xfrm>
-            <a:off x="2807208" y="3218688"/>
-            <a:ext cx="3200400" cy="457200"/>
+            <a:off x="2807208" y="3145536"/>
+            <a:ext cx="3200400" cy="384048"/>
           </a:xfrm>
           <a:prstGeom prst="rect">
             <a:avLst/>
@@ -38550,8 +38550,8 @@
         </p:nvSpPr>
         <p:spPr>
           <a:xfrm>
-            <a:off x="2862072" y="3282696"/>
-            <a:ext cx="3090672" cy="329184"/>
+            <a:off x="2862072" y="3209544"/>
+            <a:ext cx="3090672" cy="256031"/>
           </a:xfrm>
           <a:prstGeom prst="rect">
             <a:avLst/>
@@ -38592,8 +38592,8 @@
         </p:nvSpPr>
         <p:spPr>
           <a:xfrm>
-            <a:off x="6007607" y="3218688"/>
-            <a:ext cx="2788920" cy="457200"/>
+            <a:off x="6007607" y="3145536"/>
+            <a:ext cx="2788920" cy="384048"/>
           </a:xfrm>
           <a:prstGeom prst="rect">
             <a:avLst/>
@@ -38637,8 +38637,8 @@
         </p:nvSpPr>
         <p:spPr>
           <a:xfrm>
-            <a:off x="6062471" y="3282696"/>
-            <a:ext cx="2679191" cy="329184"/>
+            <a:off x="6062471" y="3209544"/>
+            <a:ext cx="2679191" cy="256031"/>
           </a:xfrm>
           <a:prstGeom prst="rect">
             <a:avLst/>
@@ -38679,8 +38679,8 @@
         </p:nvSpPr>
         <p:spPr>
           <a:xfrm>
-            <a:off x="8796528" y="3218688"/>
-            <a:ext cx="2148840" cy="457200"/>
+            <a:off x="8796528" y="3145536"/>
+            <a:ext cx="2148840" cy="384048"/>
           </a:xfrm>
           <a:prstGeom prst="rect">
             <a:avLst/>
@@ -38724,8 +38724,8 @@
         </p:nvSpPr>
         <p:spPr>
           <a:xfrm>
-            <a:off x="8851392" y="3282696"/>
-            <a:ext cx="2039112" cy="329184"/>
+            <a:off x="8851392" y="3209544"/>
+            <a:ext cx="2039112" cy="256031"/>
           </a:xfrm>
           <a:prstGeom prst="rect">
             <a:avLst/>
@@ -38766,8 +38766,8 @@
         </p:nvSpPr>
         <p:spPr>
           <a:xfrm>
-            <a:off x="658368" y="3675887"/>
-            <a:ext cx="2148840" cy="457200"/>
+            <a:off x="658368" y="3529584"/>
+            <a:ext cx="2148840" cy="384048"/>
           </a:xfrm>
           <a:prstGeom prst="rect">
             <a:avLst/>
@@ -38811,8 +38811,8 @@
         </p:nvSpPr>
         <p:spPr>
           <a:xfrm>
-            <a:off x="713232" y="3739896"/>
-            <a:ext cx="2039112" cy="329184"/>
+            <a:off x="713232" y="3593591"/>
+            <a:ext cx="2039112" cy="256031"/>
           </a:xfrm>
           <a:prstGeom prst="rect">
             <a:avLst/>
@@ -38853,8 +38853,8 @@
         </p:nvSpPr>
         <p:spPr>
           <a:xfrm>
-            <a:off x="2807208" y="3675887"/>
-            <a:ext cx="3200400" cy="457200"/>
+            <a:off x="2807208" y="3529584"/>
+            <a:ext cx="3200400" cy="384048"/>
           </a:xfrm>
           <a:prstGeom prst="rect">
             <a:avLst/>
@@ -38898,8 +38898,8 @@
         </p:nvSpPr>
         <p:spPr>
           <a:xfrm>
-            <a:off x="2862072" y="3739896"/>
-            <a:ext cx="3090672" cy="329184"/>
+            <a:off x="2862072" y="3593591"/>
+            <a:ext cx="3090672" cy="256031"/>
           </a:xfrm>
           <a:prstGeom prst="rect">
             <a:avLst/>
@@ -38940,8 +38940,8 @@
         </p:nvSpPr>
         <p:spPr>
           <a:xfrm>
-            <a:off x="6007607" y="3675887"/>
-            <a:ext cx="2788920" cy="457200"/>
+            <a:off x="6007607" y="3529584"/>
+            <a:ext cx="2788920" cy="384048"/>
           </a:xfrm>
           <a:prstGeom prst="rect">
             <a:avLst/>
@@ -38985,8 +38985,8 @@
         </p:nvSpPr>
         <p:spPr>
           <a:xfrm>
-            <a:off x="6062471" y="3739896"/>
-            <a:ext cx="2679191" cy="329184"/>
+            <a:off x="6062471" y="3593591"/>
+            <a:ext cx="2679191" cy="256031"/>
           </a:xfrm>
           <a:prstGeom prst="rect">
             <a:avLst/>
@@ -39027,8 +39027,8 @@
         </p:nvSpPr>
         <p:spPr>
           <a:xfrm>
-            <a:off x="8796528" y="3675887"/>
-            <a:ext cx="2148840" cy="457200"/>
+            <a:off x="8796528" y="3529584"/>
+            <a:ext cx="2148840" cy="384048"/>
           </a:xfrm>
           <a:prstGeom prst="rect">
             <a:avLst/>
@@ -39072,8 +39072,8 @@
         </p:nvSpPr>
         <p:spPr>
           <a:xfrm>
-            <a:off x="8851392" y="3739896"/>
-            <a:ext cx="2039112" cy="329184"/>
+            <a:off x="8851392" y="3593591"/>
+            <a:ext cx="2039112" cy="256031"/>
           </a:xfrm>
           <a:prstGeom prst="rect">
             <a:avLst/>
@@ -39114,8 +39114,8 @@
         </p:nvSpPr>
         <p:spPr>
           <a:xfrm>
-            <a:off x="658368" y="4133087"/>
-            <a:ext cx="2148840" cy="457200"/>
+            <a:off x="658368" y="3913632"/>
+            <a:ext cx="2148840" cy="384048"/>
           </a:xfrm>
           <a:prstGeom prst="rect">
             <a:avLst/>
@@ -39159,8 +39159,8 @@
         </p:nvSpPr>
         <p:spPr>
           <a:xfrm>
-            <a:off x="713232" y="4197096"/>
-            <a:ext cx="2039112" cy="329184"/>
+            <a:off x="713232" y="3977640"/>
+            <a:ext cx="2039112" cy="256031"/>
           </a:xfrm>
           <a:prstGeom prst="rect">
             <a:avLst/>
@@ -39201,8 +39201,8 @@
         </p:nvSpPr>
         <p:spPr>
           <a:xfrm>
-            <a:off x="2807208" y="4133087"/>
-            <a:ext cx="3200400" cy="457200"/>
+            <a:off x="2807208" y="3913632"/>
+            <a:ext cx="3200400" cy="384048"/>
           </a:xfrm>
           <a:prstGeom prst="rect">
             <a:avLst/>
@@ -39246,8 +39246,8 @@
         </p:nvSpPr>
         <p:spPr>
           <a:xfrm>
-            <a:off x="2862072" y="4197096"/>
-            <a:ext cx="3090672" cy="329184"/>
+            <a:off x="2862072" y="3977640"/>
+            <a:ext cx="3090672" cy="256031"/>
           </a:xfrm>
           <a:prstGeom prst="rect">
             <a:avLst/>
@@ -39288,8 +39288,8 @@
         </p:nvSpPr>
         <p:spPr>
           <a:xfrm>
-            <a:off x="6007607" y="4133087"/>
-            <a:ext cx="2788920" cy="457200"/>
+            <a:off x="6007607" y="3913632"/>
+            <a:ext cx="2788920" cy="384048"/>
           </a:xfrm>
           <a:prstGeom prst="rect">
             <a:avLst/>
@@ -39333,8 +39333,8 @@
         </p:nvSpPr>
         <p:spPr>
           <a:xfrm>
-            <a:off x="6062471" y="4197096"/>
-            <a:ext cx="2679191" cy="329184"/>
+            <a:off x="6062471" y="3977640"/>
+            <a:ext cx="2679191" cy="256031"/>
           </a:xfrm>
           <a:prstGeom prst="rect">
             <a:avLst/>
@@ -39375,8 +39375,8 @@
         </p:nvSpPr>
         <p:spPr>
           <a:xfrm>
-            <a:off x="8796528" y="4133087"/>
-            <a:ext cx="2148840" cy="457200"/>
+            <a:off x="8796528" y="3913632"/>
+            <a:ext cx="2148840" cy="384048"/>
           </a:xfrm>
           <a:prstGeom prst="rect">
             <a:avLst/>
@@ -39420,8 +39420,8 @@
         </p:nvSpPr>
         <p:spPr>
           <a:xfrm>
-            <a:off x="8851392" y="4197096"/>
-            <a:ext cx="2039112" cy="329184"/>
+            <a:off x="8851392" y="3977640"/>
+            <a:ext cx="2039112" cy="256031"/>
           </a:xfrm>
           <a:prstGeom prst="rect">
             <a:avLst/>
@@ -39462,8 +39462,8 @@
         </p:nvSpPr>
         <p:spPr>
           <a:xfrm>
-            <a:off x="658368" y="4590288"/>
-            <a:ext cx="2148840" cy="457200"/>
+            <a:off x="658368" y="4297680"/>
+            <a:ext cx="2148840" cy="384048"/>
           </a:xfrm>
           <a:prstGeom prst="rect">
             <a:avLst/>
@@ -39507,8 +39507,8 @@
         </p:nvSpPr>
         <p:spPr>
           <a:xfrm>
-            <a:off x="713232" y="4654296"/>
-            <a:ext cx="2039112" cy="329184"/>
+            <a:off x="713232" y="4361688"/>
+            <a:ext cx="2039112" cy="256031"/>
           </a:xfrm>
           <a:prstGeom prst="rect">
             <a:avLst/>
@@ -39549,8 +39549,8 @@
         </p:nvSpPr>
         <p:spPr>
           <a:xfrm>
-            <a:off x="2807208" y="4590288"/>
-            <a:ext cx="3200400" cy="457200"/>
+            <a:off x="2807208" y="4297680"/>
+            <a:ext cx="3200400" cy="384048"/>
           </a:xfrm>
           <a:prstGeom prst="rect">
             <a:avLst/>
@@ -39594,8 +39594,8 @@
         </p:nvSpPr>
         <p:spPr>
           <a:xfrm>
-            <a:off x="2862072" y="4654296"/>
-            <a:ext cx="3090672" cy="329184"/>
+            <a:off x="2862072" y="4361688"/>
+            <a:ext cx="3090672" cy="256031"/>
           </a:xfrm>
           <a:prstGeom prst="rect">
             <a:avLst/>
@@ -39636,8 +39636,8 @@
         </p:nvSpPr>
         <p:spPr>
           <a:xfrm>
-            <a:off x="6007607" y="4590288"/>
-            <a:ext cx="2788920" cy="457200"/>
+            <a:off x="6007607" y="4297680"/>
+            <a:ext cx="2788920" cy="384048"/>
           </a:xfrm>
           <a:prstGeom prst="rect">
             <a:avLst/>
@@ -39681,8 +39681,8 @@
         </p:nvSpPr>
         <p:spPr>
           <a:xfrm>
-            <a:off x="6062471" y="4654296"/>
-            <a:ext cx="2679191" cy="329184"/>
+            <a:off x="6062471" y="4361688"/>
+            <a:ext cx="2679191" cy="256031"/>
           </a:xfrm>
           <a:prstGeom prst="rect">
             <a:avLst/>
@@ -39723,8 +39723,8 @@
         </p:nvSpPr>
         <p:spPr>
           <a:xfrm>
-            <a:off x="8796528" y="4590288"/>
-            <a:ext cx="2148840" cy="457200"/>
+            <a:off x="8796528" y="4297680"/>
+            <a:ext cx="2148840" cy="384048"/>
           </a:xfrm>
           <a:prstGeom prst="rect">
             <a:avLst/>
@@ -39768,8 +39768,8 @@
         </p:nvSpPr>
         <p:spPr>
           <a:xfrm>
-            <a:off x="8851392" y="4654296"/>
-            <a:ext cx="2039112" cy="329184"/>
+            <a:off x="8851392" y="4361688"/>
+            <a:ext cx="2039112" cy="256031"/>
           </a:xfrm>
           <a:prstGeom prst="rect">
             <a:avLst/>
@@ -42130,7 +42130,7 @@
         <p:spPr>
           <a:xfrm>
             <a:off x="8412480" y="1755648"/>
-            <a:ext cx="1234440" cy="457200"/>
+            <a:ext cx="1234440" cy="384048"/>
           </a:xfrm>
           <a:prstGeom prst="rect">
             <a:avLst/>
@@ -42173,7 +42173,7 @@
         <p:spPr>
           <a:xfrm>
             <a:off x="8449055" y="1828800"/>
-            <a:ext cx="1161288" cy="329184"/>
+            <a:ext cx="1161288" cy="256031"/>
           </a:xfrm>
           <a:prstGeom prst="rect">
             <a:avLst/>
@@ -42215,7 +42215,7 @@
         <p:spPr>
           <a:xfrm>
             <a:off x="9646919" y="1755648"/>
-            <a:ext cx="1234440" cy="457200"/>
+            <a:ext cx="1234440" cy="384048"/>
           </a:xfrm>
           <a:prstGeom prst="rect">
             <a:avLst/>
@@ -42258,7 +42258,7 @@
         <p:spPr>
           <a:xfrm>
             <a:off x="9683495" y="1828800"/>
-            <a:ext cx="1161288" cy="329184"/>
+            <a:ext cx="1161288" cy="256031"/>
           </a:xfrm>
           <a:prstGeom prst="rect">
             <a:avLst/>
@@ -42299,8 +42299,8 @@
         </p:nvSpPr>
         <p:spPr>
           <a:xfrm>
-            <a:off x="8412480" y="2212848"/>
-            <a:ext cx="1234440" cy="457200"/>
+            <a:off x="8412480" y="2139696"/>
+            <a:ext cx="1234440" cy="384048"/>
           </a:xfrm>
           <a:prstGeom prst="rect">
             <a:avLst/>
@@ -42344,8 +42344,8 @@
         </p:nvSpPr>
         <p:spPr>
           <a:xfrm>
-            <a:off x="8467344" y="2276856"/>
-            <a:ext cx="1124712" cy="329184"/>
+            <a:off x="8467344" y="2203703"/>
+            <a:ext cx="1124712" cy="256031"/>
           </a:xfrm>
           <a:prstGeom prst="rect">
             <a:avLst/>
@@ -42386,8 +42386,8 @@
         </p:nvSpPr>
         <p:spPr>
           <a:xfrm>
-            <a:off x="9646919" y="2212848"/>
-            <a:ext cx="1234440" cy="457200"/>
+            <a:off x="9646919" y="2139696"/>
+            <a:ext cx="1234440" cy="384048"/>
           </a:xfrm>
           <a:prstGeom prst="rect">
             <a:avLst/>
@@ -42431,8 +42431,8 @@
         </p:nvSpPr>
         <p:spPr>
           <a:xfrm>
-            <a:off x="9701784" y="2276856"/>
-            <a:ext cx="1124712" cy="329184"/>
+            <a:off x="9701784" y="2203703"/>
+            <a:ext cx="1124712" cy="256031"/>
           </a:xfrm>
           <a:prstGeom prst="rect">
             <a:avLst/>
@@ -42473,8 +42473,8 @@
         </p:nvSpPr>
         <p:spPr>
           <a:xfrm>
-            <a:off x="8412480" y="2670048"/>
-            <a:ext cx="1234440" cy="457200"/>
+            <a:off x="8412480" y="2523744"/>
+            <a:ext cx="1234440" cy="384048"/>
           </a:xfrm>
           <a:prstGeom prst="rect">
             <a:avLst/>
@@ -42518,8 +42518,8 @@
         </p:nvSpPr>
         <p:spPr>
           <a:xfrm>
-            <a:off x="8467344" y="2734056"/>
-            <a:ext cx="1124712" cy="329184"/>
+            <a:off x="8467344" y="2587751"/>
+            <a:ext cx="1124712" cy="256031"/>
           </a:xfrm>
           <a:prstGeom prst="rect">
             <a:avLst/>
@@ -42560,8 +42560,8 @@
         </p:nvSpPr>
         <p:spPr>
           <a:xfrm>
-            <a:off x="9646919" y="2670048"/>
-            <a:ext cx="1234440" cy="457200"/>
+            <a:off x="9646919" y="2523744"/>
+            <a:ext cx="1234440" cy="384048"/>
           </a:xfrm>
           <a:prstGeom prst="rect">
             <a:avLst/>
@@ -42605,8 +42605,8 @@
         </p:nvSpPr>
         <p:spPr>
           <a:xfrm>
-            <a:off x="9701784" y="2734056"/>
-            <a:ext cx="1124712" cy="329184"/>
+            <a:off x="9701784" y="2587751"/>
+            <a:ext cx="1124712" cy="256031"/>
           </a:xfrm>
           <a:prstGeom prst="rect">
             <a:avLst/>
@@ -42647,8 +42647,8 @@
         </p:nvSpPr>
         <p:spPr>
           <a:xfrm>
-            <a:off x="8412480" y="3127248"/>
-            <a:ext cx="1234440" cy="457200"/>
+            <a:off x="8412480" y="2907791"/>
+            <a:ext cx="1234440" cy="384048"/>
           </a:xfrm>
           <a:prstGeom prst="rect">
             <a:avLst/>
@@ -42692,8 +42692,8 @@
         </p:nvSpPr>
         <p:spPr>
           <a:xfrm>
-            <a:off x="8467344" y="3191256"/>
-            <a:ext cx="1124712" cy="329184"/>
+            <a:off x="8467344" y="2971799"/>
+            <a:ext cx="1124712" cy="256031"/>
           </a:xfrm>
           <a:prstGeom prst="rect">
             <a:avLst/>
@@ -42734,8 +42734,8 @@
         </p:nvSpPr>
         <p:spPr>
           <a:xfrm>
-            <a:off x="9646919" y="3127248"/>
-            <a:ext cx="1234440" cy="457200"/>
+            <a:off x="9646919" y="2907791"/>
+            <a:ext cx="1234440" cy="384048"/>
           </a:xfrm>
           <a:prstGeom prst="rect">
             <a:avLst/>
@@ -42779,8 +42779,8 @@
         </p:nvSpPr>
         <p:spPr>
           <a:xfrm>
-            <a:off x="9701784" y="3191256"/>
-            <a:ext cx="1124712" cy="329184"/>
+            <a:off x="9701784" y="2971799"/>
+            <a:ext cx="1124712" cy="256031"/>
           </a:xfrm>
           <a:prstGeom prst="rect">
             <a:avLst/>
@@ -43210,7 +43210,7 @@
         <p:spPr>
           <a:xfrm>
             <a:off x="621792" y="1078992"/>
-            <a:ext cx="2148840" cy="457200"/>
+            <a:ext cx="2148840" cy="384048"/>
           </a:xfrm>
           <a:prstGeom prst="rect">
             <a:avLst/>
@@ -43253,7 +43253,7 @@
         <p:spPr>
           <a:xfrm>
             <a:off x="658368" y="1152144"/>
-            <a:ext cx="2075688" cy="329184"/>
+            <a:ext cx="2075688" cy="256031"/>
           </a:xfrm>
           <a:prstGeom prst="rect">
             <a:avLst/>
@@ -43295,7 +43295,7 @@
         <p:spPr>
           <a:xfrm>
             <a:off x="2770632" y="1078992"/>
-            <a:ext cx="4069080" cy="457200"/>
+            <a:ext cx="4069080" cy="384048"/>
           </a:xfrm>
           <a:prstGeom prst="rect">
             <a:avLst/>
@@ -43338,7 +43338,7 @@
         <p:spPr>
           <a:xfrm>
             <a:off x="2807208" y="1152144"/>
-            <a:ext cx="3995928" cy="329184"/>
+            <a:ext cx="3995928" cy="256031"/>
           </a:xfrm>
           <a:prstGeom prst="rect">
             <a:avLst/>
@@ -43380,7 +43380,7 @@
         <p:spPr>
           <a:xfrm>
             <a:off x="6839712" y="1078992"/>
-            <a:ext cx="3931920" cy="457200"/>
+            <a:ext cx="3931920" cy="384048"/>
           </a:xfrm>
           <a:prstGeom prst="rect">
             <a:avLst/>
@@ -43423,7 +43423,7 @@
         <p:spPr>
           <a:xfrm>
             <a:off x="6876288" y="1152144"/>
-            <a:ext cx="3858768" cy="329184"/>
+            <a:ext cx="3858768" cy="256031"/>
           </a:xfrm>
           <a:prstGeom prst="rect">
             <a:avLst/>
@@ -43464,8 +43464,8 @@
         </p:nvSpPr>
         <p:spPr>
           <a:xfrm>
-            <a:off x="621792" y="1536192"/>
-            <a:ext cx="2148840" cy="457200"/>
+            <a:off x="621792" y="1463039"/>
+            <a:ext cx="2148840" cy="384048"/>
           </a:xfrm>
           <a:prstGeom prst="rect">
             <a:avLst/>
@@ -43509,8 +43509,8 @@
         </p:nvSpPr>
         <p:spPr>
           <a:xfrm>
-            <a:off x="676656" y="1600200"/>
-            <a:ext cx="2039112" cy="329184"/>
+            <a:off x="676656" y="1527048"/>
+            <a:ext cx="2039112" cy="256031"/>
           </a:xfrm>
           <a:prstGeom prst="rect">
             <a:avLst/>
@@ -43551,8 +43551,8 @@
         </p:nvSpPr>
         <p:spPr>
           <a:xfrm>
-            <a:off x="2770632" y="1536192"/>
-            <a:ext cx="4069080" cy="457200"/>
+            <a:off x="2770632" y="1463039"/>
+            <a:ext cx="4069080" cy="384048"/>
           </a:xfrm>
           <a:prstGeom prst="rect">
             <a:avLst/>
@@ -43596,8 +43596,8 @@
         </p:nvSpPr>
         <p:spPr>
           <a:xfrm>
-            <a:off x="2825496" y="1600200"/>
-            <a:ext cx="3959352" cy="329184"/>
+            <a:off x="2825496" y="1527048"/>
+            <a:ext cx="3959352" cy="256031"/>
           </a:xfrm>
           <a:prstGeom prst="rect">
             <a:avLst/>
@@ -43638,8 +43638,8 @@
         </p:nvSpPr>
         <p:spPr>
           <a:xfrm>
-            <a:off x="6839712" y="1536192"/>
-            <a:ext cx="3931920" cy="457200"/>
+            <a:off x="6839712" y="1463039"/>
+            <a:ext cx="3931920" cy="384048"/>
           </a:xfrm>
           <a:prstGeom prst="rect">
             <a:avLst/>
@@ -43683,8 +43683,8 @@
         </p:nvSpPr>
         <p:spPr>
           <a:xfrm>
-            <a:off x="6894576" y="1600200"/>
-            <a:ext cx="3822191" cy="329184"/>
+            <a:off x="6894576" y="1527048"/>
+            <a:ext cx="3822191" cy="256031"/>
           </a:xfrm>
           <a:prstGeom prst="rect">
             <a:avLst/>
@@ -43725,8 +43725,8 @@
         </p:nvSpPr>
         <p:spPr>
           <a:xfrm>
-            <a:off x="621792" y="1993391"/>
-            <a:ext cx="2148840" cy="457200"/>
+            <a:off x="621792" y="1847088"/>
+            <a:ext cx="2148840" cy="384048"/>
           </a:xfrm>
           <a:prstGeom prst="rect">
             <a:avLst/>
@@ -43770,8 +43770,8 @@
         </p:nvSpPr>
         <p:spPr>
           <a:xfrm>
-            <a:off x="676656" y="2057399"/>
-            <a:ext cx="2039112" cy="329184"/>
+            <a:off x="676656" y="1911095"/>
+            <a:ext cx="2039112" cy="256031"/>
           </a:xfrm>
           <a:prstGeom prst="rect">
             <a:avLst/>
@@ -43812,8 +43812,8 @@
         </p:nvSpPr>
         <p:spPr>
           <a:xfrm>
-            <a:off x="2770632" y="1993391"/>
-            <a:ext cx="4069080" cy="457200"/>
+            <a:off x="2770632" y="1847088"/>
+            <a:ext cx="4069080" cy="384048"/>
           </a:xfrm>
           <a:prstGeom prst="rect">
             <a:avLst/>
@@ -43857,8 +43857,8 @@
         </p:nvSpPr>
         <p:spPr>
           <a:xfrm>
-            <a:off x="2825496" y="2057399"/>
-            <a:ext cx="3959352" cy="329184"/>
+            <a:off x="2825496" y="1911095"/>
+            <a:ext cx="3959352" cy="256031"/>
           </a:xfrm>
           <a:prstGeom prst="rect">
             <a:avLst/>
@@ -43899,8 +43899,8 @@
         </p:nvSpPr>
         <p:spPr>
           <a:xfrm>
-            <a:off x="6839712" y="1993391"/>
-            <a:ext cx="3931920" cy="457200"/>
+            <a:off x="6839712" y="1847088"/>
+            <a:ext cx="3931920" cy="384048"/>
           </a:xfrm>
           <a:prstGeom prst="rect">
             <a:avLst/>
@@ -43944,8 +43944,8 @@
         </p:nvSpPr>
         <p:spPr>
           <a:xfrm>
-            <a:off x="6894576" y="2057399"/>
-            <a:ext cx="3822191" cy="329184"/>
+            <a:off x="6894576" y="1911095"/>
+            <a:ext cx="3822191" cy="256031"/>
           </a:xfrm>
           <a:prstGeom prst="rect">
             <a:avLst/>
@@ -43986,8 +43986,8 @@
         </p:nvSpPr>
         <p:spPr>
           <a:xfrm>
-            <a:off x="621792" y="2450591"/>
-            <a:ext cx="2148840" cy="457200"/>
+            <a:off x="621792" y="2231136"/>
+            <a:ext cx="2148840" cy="384048"/>
           </a:xfrm>
           <a:prstGeom prst="rect">
             <a:avLst/>
@@ -44031,8 +44031,8 @@
         </p:nvSpPr>
         <p:spPr>
           <a:xfrm>
-            <a:off x="676656" y="2514599"/>
-            <a:ext cx="2039112" cy="329184"/>
+            <a:off x="676656" y="2295144"/>
+            <a:ext cx="2039112" cy="256031"/>
           </a:xfrm>
           <a:prstGeom prst="rect">
             <a:avLst/>
@@ -44073,8 +44073,8 @@
         </p:nvSpPr>
         <p:spPr>
           <a:xfrm>
-            <a:off x="2770632" y="2450591"/>
-            <a:ext cx="4069080" cy="457200"/>
+            <a:off x="2770632" y="2231136"/>
+            <a:ext cx="4069080" cy="384048"/>
           </a:xfrm>
           <a:prstGeom prst="rect">
             <a:avLst/>
@@ -44118,8 +44118,8 @@
         </p:nvSpPr>
         <p:spPr>
           <a:xfrm>
-            <a:off x="2825496" y="2514599"/>
-            <a:ext cx="3959352" cy="329184"/>
+            <a:off x="2825496" y="2295144"/>
+            <a:ext cx="3959352" cy="256031"/>
           </a:xfrm>
           <a:prstGeom prst="rect">
             <a:avLst/>
@@ -44160,8 +44160,8 @@
         </p:nvSpPr>
         <p:spPr>
           <a:xfrm>
-            <a:off x="6839712" y="2450591"/>
-            <a:ext cx="3931920" cy="457200"/>
+            <a:off x="6839712" y="2231136"/>
+            <a:ext cx="3931920" cy="384048"/>
           </a:xfrm>
           <a:prstGeom prst="rect">
             <a:avLst/>
@@ -44205,8 +44205,8 @@
         </p:nvSpPr>
         <p:spPr>
           <a:xfrm>
-            <a:off x="6894576" y="2514599"/>
-            <a:ext cx="3822191" cy="329184"/>
+            <a:off x="6894576" y="2295144"/>
+            <a:ext cx="3822191" cy="256031"/>
           </a:xfrm>
           <a:prstGeom prst="rect">
             <a:avLst/>
@@ -44247,8 +44247,8 @@
         </p:nvSpPr>
         <p:spPr>
           <a:xfrm>
-            <a:off x="621792" y="2907791"/>
-            <a:ext cx="2148840" cy="457200"/>
+            <a:off x="621792" y="2615184"/>
+            <a:ext cx="2148840" cy="384048"/>
           </a:xfrm>
           <a:prstGeom prst="rect">
             <a:avLst/>
@@ -44292,8 +44292,8 @@
         </p:nvSpPr>
         <p:spPr>
           <a:xfrm>
-            <a:off x="676656" y="2971799"/>
-            <a:ext cx="2039112" cy="329184"/>
+            <a:off x="676656" y="2679191"/>
+            <a:ext cx="2039112" cy="256031"/>
           </a:xfrm>
           <a:prstGeom prst="rect">
             <a:avLst/>
@@ -44334,8 +44334,8 @@
         </p:nvSpPr>
         <p:spPr>
           <a:xfrm>
-            <a:off x="2770632" y="2907791"/>
-            <a:ext cx="4069080" cy="457200"/>
+            <a:off x="2770632" y="2615184"/>
+            <a:ext cx="4069080" cy="384048"/>
           </a:xfrm>
           <a:prstGeom prst="rect">
             <a:avLst/>
@@ -44379,8 +44379,8 @@
         </p:nvSpPr>
         <p:spPr>
           <a:xfrm>
-            <a:off x="2825496" y="2971799"/>
-            <a:ext cx="3959352" cy="329184"/>
+            <a:off x="2825496" y="2679191"/>
+            <a:ext cx="3959352" cy="256031"/>
           </a:xfrm>
           <a:prstGeom prst="rect">
             <a:avLst/>
@@ -44421,8 +44421,8 @@
         </p:nvSpPr>
         <p:spPr>
           <a:xfrm>
-            <a:off x="6839712" y="2907791"/>
-            <a:ext cx="3931920" cy="457200"/>
+            <a:off x="6839712" y="2615184"/>
+            <a:ext cx="3931920" cy="384048"/>
           </a:xfrm>
           <a:prstGeom prst="rect">
             <a:avLst/>
@@ -44466,8 +44466,8 @@
         </p:nvSpPr>
         <p:spPr>
           <a:xfrm>
-            <a:off x="6894576" y="2971799"/>
-            <a:ext cx="3822191" cy="329184"/>
+            <a:off x="6894576" y="2679191"/>
+            <a:ext cx="3822191" cy="256031"/>
           </a:xfrm>
           <a:prstGeom prst="rect">
             <a:avLst/>
@@ -44508,8 +44508,8 @@
         </p:nvSpPr>
         <p:spPr>
           <a:xfrm>
-            <a:off x="621792" y="3364991"/>
-            <a:ext cx="2148840" cy="457200"/>
+            <a:off x="621792" y="2999232"/>
+            <a:ext cx="2148840" cy="384048"/>
           </a:xfrm>
           <a:prstGeom prst="rect">
             <a:avLst/>
@@ -44553,8 +44553,8 @@
         </p:nvSpPr>
         <p:spPr>
           <a:xfrm>
-            <a:off x="676656" y="3428999"/>
-            <a:ext cx="2039112" cy="329184"/>
+            <a:off x="676656" y="3063240"/>
+            <a:ext cx="2039112" cy="256031"/>
           </a:xfrm>
           <a:prstGeom prst="rect">
             <a:avLst/>
@@ -44595,8 +44595,8 @@
         </p:nvSpPr>
         <p:spPr>
           <a:xfrm>
-            <a:off x="2770632" y="3364991"/>
-            <a:ext cx="4069080" cy="457200"/>
+            <a:off x="2770632" y="2999232"/>
+            <a:ext cx="4069080" cy="384048"/>
           </a:xfrm>
           <a:prstGeom prst="rect">
             <a:avLst/>
@@ -44640,8 +44640,8 @@
         </p:nvSpPr>
         <p:spPr>
           <a:xfrm>
-            <a:off x="2825496" y="3428999"/>
-            <a:ext cx="3959352" cy="329184"/>
+            <a:off x="2825496" y="3063240"/>
+            <a:ext cx="3959352" cy="256031"/>
           </a:xfrm>
           <a:prstGeom prst="rect">
             <a:avLst/>
@@ -44682,8 +44682,8 @@
         </p:nvSpPr>
         <p:spPr>
           <a:xfrm>
-            <a:off x="6839712" y="3364991"/>
-            <a:ext cx="3931920" cy="457200"/>
+            <a:off x="6839712" y="2999232"/>
+            <a:ext cx="3931920" cy="384048"/>
           </a:xfrm>
           <a:prstGeom prst="rect">
             <a:avLst/>
@@ -44727,8 +44727,8 @@
         </p:nvSpPr>
         <p:spPr>
           <a:xfrm>
-            <a:off x="6894576" y="3428999"/>
-            <a:ext cx="3822191" cy="329184"/>
+            <a:off x="6894576" y="3063240"/>
+            <a:ext cx="3822191" cy="256031"/>
           </a:xfrm>
           <a:prstGeom prst="rect">
             <a:avLst/>
@@ -44769,8 +44769,8 @@
         </p:nvSpPr>
         <p:spPr>
           <a:xfrm>
-            <a:off x="621792" y="3822191"/>
-            <a:ext cx="2148840" cy="457200"/>
+            <a:off x="621792" y="3383280"/>
+            <a:ext cx="2148840" cy="384048"/>
           </a:xfrm>
           <a:prstGeom prst="rect">
             <a:avLst/>
@@ -44814,8 +44814,8 @@
         </p:nvSpPr>
         <p:spPr>
           <a:xfrm>
-            <a:off x="676656" y="3886200"/>
-            <a:ext cx="2039112" cy="329184"/>
+            <a:off x="676656" y="3447288"/>
+            <a:ext cx="2039112" cy="256031"/>
           </a:xfrm>
           <a:prstGeom prst="rect">
             <a:avLst/>
@@ -44856,8 +44856,8 @@
         </p:nvSpPr>
         <p:spPr>
           <a:xfrm>
-            <a:off x="2770632" y="3822191"/>
-            <a:ext cx="4069080" cy="457200"/>
+            <a:off x="2770632" y="3383280"/>
+            <a:ext cx="4069080" cy="384048"/>
           </a:xfrm>
           <a:prstGeom prst="rect">
             <a:avLst/>
@@ -44901,8 +44901,8 @@
         </p:nvSpPr>
         <p:spPr>
           <a:xfrm>
-            <a:off x="2825496" y="3886200"/>
-            <a:ext cx="3959352" cy="329184"/>
+            <a:off x="2825496" y="3447288"/>
+            <a:ext cx="3959352" cy="256031"/>
           </a:xfrm>
           <a:prstGeom prst="rect">
             <a:avLst/>
@@ -44943,8 +44943,8 @@
         </p:nvSpPr>
         <p:spPr>
           <a:xfrm>
-            <a:off x="6839712" y="3822191"/>
-            <a:ext cx="3931920" cy="457200"/>
+            <a:off x="6839712" y="3383280"/>
+            <a:ext cx="3931920" cy="384048"/>
           </a:xfrm>
           <a:prstGeom prst="rect">
             <a:avLst/>
@@ -44988,8 +44988,8 @@
         </p:nvSpPr>
         <p:spPr>
           <a:xfrm>
-            <a:off x="6894576" y="3886200"/>
-            <a:ext cx="3822191" cy="329184"/>
+            <a:off x="6894576" y="3447288"/>
+            <a:ext cx="3822191" cy="256031"/>
           </a:xfrm>
           <a:prstGeom prst="rect">
             <a:avLst/>
@@ -45031,7 +45031,7 @@
         <p:spPr>
           <a:xfrm>
             <a:off x="749808" y="4434840"/>
-            <a:ext cx="4709160" cy="457200"/>
+            <a:ext cx="4709160" cy="384048"/>
           </a:xfrm>
           <a:prstGeom prst="rect">
             <a:avLst/>
@@ -45074,7 +45074,7 @@
         <p:spPr>
           <a:xfrm>
             <a:off x="786384" y="4507992"/>
-            <a:ext cx="4636008" cy="329184"/>
+            <a:ext cx="4636008" cy="256031"/>
           </a:xfrm>
           <a:prstGeom prst="rect">
             <a:avLst/>
@@ -45116,7 +45116,7 @@
         <p:spPr>
           <a:xfrm>
             <a:off x="5458968" y="4434840"/>
-            <a:ext cx="4709160" cy="457200"/>
+            <a:ext cx="4709160" cy="384048"/>
           </a:xfrm>
           <a:prstGeom prst="rect">
             <a:avLst/>
@@ -45159,7 +45159,7 @@
         <p:spPr>
           <a:xfrm>
             <a:off x="5495544" y="4507992"/>
-            <a:ext cx="4636008" cy="329184"/>
+            <a:ext cx="4636008" cy="256031"/>
           </a:xfrm>
           <a:prstGeom prst="rect">
             <a:avLst/>
@@ -45200,8 +45200,8 @@
         </p:nvSpPr>
         <p:spPr>
           <a:xfrm>
-            <a:off x="749808" y="4892040"/>
-            <a:ext cx="4709160" cy="457200"/>
+            <a:off x="749808" y="4818888"/>
+            <a:ext cx="4709160" cy="384048"/>
           </a:xfrm>
           <a:prstGeom prst="rect">
             <a:avLst/>
@@ -45245,8 +45245,8 @@
         </p:nvSpPr>
         <p:spPr>
           <a:xfrm>
-            <a:off x="804671" y="4956048"/>
-            <a:ext cx="4599432" cy="329184"/>
+            <a:off x="804671" y="4882896"/>
+            <a:ext cx="4599432" cy="256031"/>
           </a:xfrm>
           <a:prstGeom prst="rect">
             <a:avLst/>
@@ -45287,8 +45287,8 @@
         </p:nvSpPr>
         <p:spPr>
           <a:xfrm>
-            <a:off x="5458968" y="4892040"/>
-            <a:ext cx="4709160" cy="457200"/>
+            <a:off x="5458968" y="4818888"/>
+            <a:ext cx="4709160" cy="384048"/>
           </a:xfrm>
           <a:prstGeom prst="rect">
             <a:avLst/>
@@ -45332,8 +45332,8 @@
         </p:nvSpPr>
         <p:spPr>
           <a:xfrm>
-            <a:off x="5513832" y="4956048"/>
-            <a:ext cx="4599432" cy="329184"/>
+            <a:off x="5513832" y="4882896"/>
+            <a:ext cx="4599432" cy="256031"/>
           </a:xfrm>
           <a:prstGeom prst="rect">
             <a:avLst/>
@@ -45374,8 +45374,8 @@
         </p:nvSpPr>
         <p:spPr>
           <a:xfrm>
-            <a:off x="749808" y="5349240"/>
-            <a:ext cx="4709160" cy="457200"/>
+            <a:off x="749808" y="5202936"/>
+            <a:ext cx="4709160" cy="384048"/>
           </a:xfrm>
           <a:prstGeom prst="rect">
             <a:avLst/>
@@ -45419,8 +45419,8 @@
         </p:nvSpPr>
         <p:spPr>
           <a:xfrm>
-            <a:off x="804671" y="5413248"/>
-            <a:ext cx="4599432" cy="329184"/>
+            <a:off x="804671" y="5266944"/>
+            <a:ext cx="4599432" cy="256031"/>
           </a:xfrm>
           <a:prstGeom prst="rect">
             <a:avLst/>
@@ -45461,8 +45461,8 @@
         </p:nvSpPr>
         <p:spPr>
           <a:xfrm>
-            <a:off x="5458968" y="5349240"/>
-            <a:ext cx="4709160" cy="457200"/>
+            <a:off x="5458968" y="5202936"/>
+            <a:ext cx="4709160" cy="384048"/>
           </a:xfrm>
           <a:prstGeom prst="rect">
             <a:avLst/>
@@ -45506,8 +45506,8 @@
         </p:nvSpPr>
         <p:spPr>
           <a:xfrm>
-            <a:off x="5513832" y="5413248"/>
-            <a:ext cx="4599432" cy="329184"/>
+            <a:off x="5513832" y="5266944"/>
+            <a:ext cx="4599432" cy="256031"/>
           </a:xfrm>
           <a:prstGeom prst="rect">
             <a:avLst/>
@@ -45548,8 +45548,8 @@
         </p:nvSpPr>
         <p:spPr>
           <a:xfrm>
-            <a:off x="749808" y="5806440"/>
-            <a:ext cx="4709160" cy="457200"/>
+            <a:off x="749808" y="5586983"/>
+            <a:ext cx="4709160" cy="384048"/>
           </a:xfrm>
           <a:prstGeom prst="rect">
             <a:avLst/>
@@ -45593,8 +45593,8 @@
         </p:nvSpPr>
         <p:spPr>
           <a:xfrm>
-            <a:off x="804671" y="5870448"/>
-            <a:ext cx="4599432" cy="329184"/>
+            <a:off x="804671" y="5650992"/>
+            <a:ext cx="4599432" cy="256031"/>
           </a:xfrm>
           <a:prstGeom prst="rect">
             <a:avLst/>
@@ -45635,8 +45635,8 @@
         </p:nvSpPr>
         <p:spPr>
           <a:xfrm>
-            <a:off x="5458968" y="5806440"/>
-            <a:ext cx="4709160" cy="457200"/>
+            <a:off x="5458968" y="5586983"/>
+            <a:ext cx="4709160" cy="384048"/>
           </a:xfrm>
           <a:prstGeom prst="rect">
             <a:avLst/>
@@ -45680,8 +45680,8 @@
         </p:nvSpPr>
         <p:spPr>
           <a:xfrm>
-            <a:off x="5513832" y="5870448"/>
-            <a:ext cx="4599432" cy="329184"/>
+            <a:off x="5513832" y="5650992"/>
+            <a:ext cx="4599432" cy="256031"/>
           </a:xfrm>
           <a:prstGeom prst="rect">
             <a:avLst/>
@@ -46110,8 +46110,8 @@
         </p:nvSpPr>
         <p:spPr>
           <a:xfrm>
-            <a:off x="475488" y="1078992"/>
-            <a:ext cx="1920240" cy="438912"/>
+            <a:off x="475488" y="1024128"/>
+            <a:ext cx="1965960" cy="356616"/>
           </a:xfrm>
           <a:prstGeom prst="rect">
             <a:avLst/>
@@ -46153,8 +46153,8 @@
         </p:nvSpPr>
         <p:spPr>
           <a:xfrm>
-            <a:off x="512064" y="1152144"/>
-            <a:ext cx="1847088" cy="310896"/>
+            <a:off x="512064" y="1088136"/>
+            <a:ext cx="1892807" cy="246888"/>
           </a:xfrm>
           <a:prstGeom prst="rect">
             <a:avLst/>
@@ -46168,7 +46168,7 @@
           <a:lstStyle/>
           <a:p>
             <a:pPr algn="ctr">
-              <a:defRPr sz="1200" b="1">
+              <a:defRPr sz="1050" b="1">
                 <a:solidFill>
                   <a:srgbClr val="FFFFFF"/>
                 </a:solidFill>
@@ -46176,7 +46176,7 @@
               </a:defRPr>
             </a:pPr>
             <a:r>
-              <a:rPr sz="1200" b="1">
+              <a:rPr sz="1050" b="1">
                 <a:solidFill>
                   <a:srgbClr val="FFFFFF"/>
                 </a:solidFill>
@@ -46195,8 +46195,8 @@
         </p:nvSpPr>
         <p:spPr>
           <a:xfrm>
-            <a:off x="2395728" y="1078992"/>
-            <a:ext cx="914400" cy="438912"/>
+            <a:off x="2441448" y="1024128"/>
+            <a:ext cx="914400" cy="356616"/>
           </a:xfrm>
           <a:prstGeom prst="rect">
             <a:avLst/>
@@ -46238,8 +46238,8 @@
         </p:nvSpPr>
         <p:spPr>
           <a:xfrm>
-            <a:off x="2432304" y="1152144"/>
-            <a:ext cx="841248" cy="310896"/>
+            <a:off x="2478024" y="1088136"/>
+            <a:ext cx="841248" cy="246888"/>
           </a:xfrm>
           <a:prstGeom prst="rect">
             <a:avLst/>
@@ -46253,7 +46253,7 @@
           <a:lstStyle/>
           <a:p>
             <a:pPr algn="ctr">
-              <a:defRPr sz="1200" b="1">
+              <a:defRPr sz="1050" b="1">
                 <a:solidFill>
                   <a:srgbClr val="FFFFFF"/>
                 </a:solidFill>
@@ -46261,7 +46261,7 @@
               </a:defRPr>
             </a:pPr>
             <a:r>
-              <a:rPr sz="1200" b="1">
+              <a:rPr sz="1050" b="1">
                 <a:solidFill>
                   <a:srgbClr val="FFFFFF"/>
                 </a:solidFill>
@@ -46280,8 +46280,8 @@
         </p:nvSpPr>
         <p:spPr>
           <a:xfrm>
-            <a:off x="3310128" y="1078992"/>
-            <a:ext cx="822960" cy="438912"/>
+            <a:off x="3355848" y="1024128"/>
+            <a:ext cx="822960" cy="356616"/>
           </a:xfrm>
           <a:prstGeom prst="rect">
             <a:avLst/>
@@ -46323,8 +46323,8 @@
         </p:nvSpPr>
         <p:spPr>
           <a:xfrm>
-            <a:off x="3346704" y="1152144"/>
-            <a:ext cx="749808" cy="310896"/>
+            <a:off x="3392424" y="1088136"/>
+            <a:ext cx="749808" cy="246888"/>
           </a:xfrm>
           <a:prstGeom prst="rect">
             <a:avLst/>
@@ -46338,7 +46338,7 @@
           <a:lstStyle/>
           <a:p>
             <a:pPr algn="ctr">
-              <a:defRPr sz="1200" b="1">
+              <a:defRPr sz="1050" b="1">
                 <a:solidFill>
                   <a:srgbClr val="FFFFFF"/>
                 </a:solidFill>
@@ -46346,7 +46346,7 @@
               </a:defRPr>
             </a:pPr>
             <a:r>
-              <a:rPr sz="1200" b="1">
+              <a:rPr sz="1050" b="1">
                 <a:solidFill>
                   <a:srgbClr val="FFFFFF"/>
                 </a:solidFill>
@@ -46365,8 +46365,8 @@
         </p:nvSpPr>
         <p:spPr>
           <a:xfrm>
-            <a:off x="4133087" y="1078992"/>
-            <a:ext cx="868680" cy="438912"/>
+            <a:off x="4178808" y="1024128"/>
+            <a:ext cx="868680" cy="356616"/>
           </a:xfrm>
           <a:prstGeom prst="rect">
             <a:avLst/>
@@ -46408,8 +46408,8 @@
         </p:nvSpPr>
         <p:spPr>
           <a:xfrm>
-            <a:off x="4169663" y="1152144"/>
-            <a:ext cx="795528" cy="310896"/>
+            <a:off x="4215384" y="1088136"/>
+            <a:ext cx="795528" cy="246888"/>
           </a:xfrm>
           <a:prstGeom prst="rect">
             <a:avLst/>
@@ -46423,7 +46423,7 @@
           <a:lstStyle/>
           <a:p>
             <a:pPr algn="ctr">
-              <a:defRPr sz="1200" b="1">
+              <a:defRPr sz="1050" b="1">
                 <a:solidFill>
                   <a:srgbClr val="FFFFFF"/>
                 </a:solidFill>
@@ -46431,7 +46431,7 @@
               </a:defRPr>
             </a:pPr>
             <a:r>
-              <a:rPr sz="1200" b="1">
+              <a:rPr sz="1050" b="1">
                 <a:solidFill>
                   <a:srgbClr val="FFFFFF"/>
                 </a:solidFill>
@@ -46450,8 +46450,8 @@
         </p:nvSpPr>
         <p:spPr>
           <a:xfrm>
-            <a:off x="5001768" y="1078992"/>
-            <a:ext cx="4434840" cy="438912"/>
+            <a:off x="5047488" y="1024128"/>
+            <a:ext cx="4389120" cy="356616"/>
           </a:xfrm>
           <a:prstGeom prst="rect">
             <a:avLst/>
@@ -46493,8 +46493,8 @@
         </p:nvSpPr>
         <p:spPr>
           <a:xfrm>
-            <a:off x="5038344" y="1152144"/>
-            <a:ext cx="4361688" cy="310896"/>
+            <a:off x="5084064" y="1088136"/>
+            <a:ext cx="4315968" cy="246888"/>
           </a:xfrm>
           <a:prstGeom prst="rect">
             <a:avLst/>
@@ -46508,7 +46508,7 @@
           <a:lstStyle/>
           <a:p>
             <a:pPr algn="ctr">
-              <a:defRPr sz="1200" b="1">
+              <a:defRPr sz="1050" b="1">
                 <a:solidFill>
                   <a:srgbClr val="FFFFFF"/>
                 </a:solidFill>
@@ -46516,7 +46516,7 @@
               </a:defRPr>
             </a:pPr>
             <a:r>
-              <a:rPr sz="1200" b="1">
+              <a:rPr sz="1050" b="1">
                 <a:solidFill>
                   <a:srgbClr val="FFFFFF"/>
                 </a:solidFill>
@@ -46535,8 +46535,8 @@
         </p:nvSpPr>
         <p:spPr>
           <a:xfrm>
-            <a:off x="9436607" y="1078992"/>
-            <a:ext cx="685800" cy="438912"/>
+            <a:off x="9436607" y="1024128"/>
+            <a:ext cx="685800" cy="356616"/>
           </a:xfrm>
           <a:prstGeom prst="rect">
             <a:avLst/>
@@ -46578,8 +46578,8 @@
         </p:nvSpPr>
         <p:spPr>
           <a:xfrm>
-            <a:off x="9473183" y="1152144"/>
-            <a:ext cx="612648" cy="310896"/>
+            <a:off x="9473183" y="1088136"/>
+            <a:ext cx="612648" cy="246888"/>
           </a:xfrm>
           <a:prstGeom prst="rect">
             <a:avLst/>
@@ -46593,7 +46593,7 @@
           <a:lstStyle/>
           <a:p>
             <a:pPr algn="ctr">
-              <a:defRPr sz="1200" b="1">
+              <a:defRPr sz="1050" b="1">
                 <a:solidFill>
                   <a:srgbClr val="FFFFFF"/>
                 </a:solidFill>
@@ -46601,7 +46601,7 @@
               </a:defRPr>
             </a:pPr>
             <a:r>
-              <a:rPr sz="1200" b="1">
+              <a:rPr sz="1050" b="1">
                 <a:solidFill>
                   <a:srgbClr val="FFFFFF"/>
                 </a:solidFill>
@@ -46620,8 +46620,8 @@
         </p:nvSpPr>
         <p:spPr>
           <a:xfrm>
-            <a:off x="475488" y="1517904"/>
-            <a:ext cx="1920240" cy="438912"/>
+            <a:off x="475488" y="1380744"/>
+            <a:ext cx="1965960" cy="356616"/>
           </a:xfrm>
           <a:prstGeom prst="rect">
             <a:avLst/>
@@ -46665,8 +46665,8 @@
         </p:nvSpPr>
         <p:spPr>
           <a:xfrm>
-            <a:off x="530352" y="1581912"/>
-            <a:ext cx="1810512" cy="310896"/>
+            <a:off x="530352" y="1435608"/>
+            <a:ext cx="1856231" cy="246888"/>
           </a:xfrm>
           <a:prstGeom prst="rect">
             <a:avLst/>
@@ -46680,7 +46680,7 @@
           <a:lstStyle/>
           <a:p>
             <a:pPr algn="l">
-              <a:defRPr sz="1200" b="1">
+              <a:defRPr sz="1050" b="1">
                 <a:solidFill>
                   <a:srgbClr val="0F172A"/>
                 </a:solidFill>
@@ -46688,7 +46688,7 @@
               </a:defRPr>
             </a:pPr>
             <a:r>
-              <a:rPr sz="1200" b="1">
+              <a:rPr sz="1050" b="1">
                 <a:solidFill>
                   <a:srgbClr val="0F172A"/>
                 </a:solidFill>
@@ -46707,8 +46707,8 @@
         </p:nvSpPr>
         <p:spPr>
           <a:xfrm>
-            <a:off x="2395728" y="1517904"/>
-            <a:ext cx="914400" cy="438912"/>
+            <a:off x="2441448" y="1380744"/>
+            <a:ext cx="914400" cy="356616"/>
           </a:xfrm>
           <a:prstGeom prst="rect">
             <a:avLst/>
@@ -46752,8 +46752,8 @@
         </p:nvSpPr>
         <p:spPr>
           <a:xfrm>
-            <a:off x="2441448" y="1581912"/>
-            <a:ext cx="822960" cy="310896"/>
+            <a:off x="2487168" y="1435608"/>
+            <a:ext cx="822960" cy="246888"/>
           </a:xfrm>
           <a:prstGeom prst="rect">
             <a:avLst/>
@@ -46794,8 +46794,8 @@
         </p:nvSpPr>
         <p:spPr>
           <a:xfrm>
-            <a:off x="3310128" y="1517904"/>
-            <a:ext cx="822960" cy="438912"/>
+            <a:off x="3355848" y="1380744"/>
+            <a:ext cx="822960" cy="356616"/>
           </a:xfrm>
           <a:prstGeom prst="rect">
             <a:avLst/>
@@ -46839,8 +46839,8 @@
         </p:nvSpPr>
         <p:spPr>
           <a:xfrm>
-            <a:off x="3355848" y="1581912"/>
-            <a:ext cx="731520" cy="310896"/>
+            <a:off x="3401568" y="1435608"/>
+            <a:ext cx="731520" cy="246888"/>
           </a:xfrm>
           <a:prstGeom prst="rect">
             <a:avLst/>
@@ -46881,8 +46881,8 @@
         </p:nvSpPr>
         <p:spPr>
           <a:xfrm>
-            <a:off x="4133087" y="1517904"/>
-            <a:ext cx="868680" cy="438912"/>
+            <a:off x="4178808" y="1380744"/>
+            <a:ext cx="868680" cy="356616"/>
           </a:xfrm>
           <a:prstGeom prst="rect">
             <a:avLst/>
@@ -46926,8 +46926,8 @@
         </p:nvSpPr>
         <p:spPr>
           <a:xfrm>
-            <a:off x="4178807" y="1581912"/>
-            <a:ext cx="777240" cy="310896"/>
+            <a:off x="4224528" y="1435608"/>
+            <a:ext cx="777240" cy="246888"/>
           </a:xfrm>
           <a:prstGeom prst="rect">
             <a:avLst/>
@@ -46968,8 +46968,8 @@
         </p:nvSpPr>
         <p:spPr>
           <a:xfrm>
-            <a:off x="5001768" y="1517904"/>
-            <a:ext cx="4434840" cy="438912"/>
+            <a:off x="5047488" y="1380744"/>
+            <a:ext cx="4389120" cy="356616"/>
           </a:xfrm>
           <a:prstGeom prst="rect">
             <a:avLst/>
@@ -47013,8 +47013,8 @@
         </p:nvSpPr>
         <p:spPr>
           <a:xfrm>
-            <a:off x="5056632" y="1581912"/>
-            <a:ext cx="4325112" cy="310896"/>
+            <a:off x="5102351" y="1435608"/>
+            <a:ext cx="4279392" cy="246888"/>
           </a:xfrm>
           <a:prstGeom prst="rect">
             <a:avLst/>
@@ -47028,7 +47028,7 @@
           <a:lstStyle/>
           <a:p>
             <a:pPr algn="l">
-              <a:defRPr sz="1200" b="0">
+              <a:defRPr sz="1050" b="0">
                 <a:solidFill>
                   <a:srgbClr val="0F172A"/>
                 </a:solidFill>
@@ -47036,7 +47036,7 @@
               </a:defRPr>
             </a:pPr>
             <a:r>
-              <a:rPr sz="1200" b="0">
+              <a:rPr sz="1050" b="0">
                 <a:solidFill>
                   <a:srgbClr val="0F172A"/>
                 </a:solidFill>
@@ -47055,8 +47055,8 @@
         </p:nvSpPr>
         <p:spPr>
           <a:xfrm>
-            <a:off x="9436607" y="1517904"/>
-            <a:ext cx="685800" cy="438912"/>
+            <a:off x="9436607" y="1380744"/>
+            <a:ext cx="685800" cy="356616"/>
           </a:xfrm>
           <a:prstGeom prst="rect">
             <a:avLst/>
@@ -47100,8 +47100,8 @@
         </p:nvSpPr>
         <p:spPr>
           <a:xfrm>
-            <a:off x="9491472" y="1581912"/>
-            <a:ext cx="576072" cy="310896"/>
+            <a:off x="9491472" y="1435608"/>
+            <a:ext cx="576072" cy="246888"/>
           </a:xfrm>
           <a:prstGeom prst="rect">
             <a:avLst/>
@@ -47115,7 +47115,7 @@
           <a:lstStyle/>
           <a:p>
             <a:pPr algn="r">
-              <a:defRPr sz="1200" b="0">
+              <a:defRPr sz="1050" b="0">
                 <a:solidFill>
                   <a:srgbClr val="0F172A"/>
                 </a:solidFill>
@@ -47123,7 +47123,7 @@
               </a:defRPr>
             </a:pPr>
             <a:r>
-              <a:rPr sz="1200" b="0">
+              <a:rPr sz="1050" b="0">
                 <a:solidFill>
                   <a:srgbClr val="0F172A"/>
                 </a:solidFill>
@@ -47142,8 +47142,8 @@
         </p:nvSpPr>
         <p:spPr>
           <a:xfrm>
-            <a:off x="475488" y="1956815"/>
-            <a:ext cx="1920240" cy="438912"/>
+            <a:off x="475488" y="1737360"/>
+            <a:ext cx="1965960" cy="356616"/>
           </a:xfrm>
           <a:prstGeom prst="rect">
             <a:avLst/>
@@ -47187,8 +47187,8 @@
         </p:nvSpPr>
         <p:spPr>
           <a:xfrm>
-            <a:off x="530352" y="2020823"/>
-            <a:ext cx="1810512" cy="310896"/>
+            <a:off x="530352" y="1792224"/>
+            <a:ext cx="1856231" cy="246888"/>
           </a:xfrm>
           <a:prstGeom prst="rect">
             <a:avLst/>
@@ -47202,7 +47202,7 @@
           <a:lstStyle/>
           <a:p>
             <a:pPr algn="l">
-              <a:defRPr sz="1200" b="1">
+              <a:defRPr sz="1050" b="1">
                 <a:solidFill>
                   <a:srgbClr val="0F172A"/>
                 </a:solidFill>
@@ -47210,7 +47210,7 @@
               </a:defRPr>
             </a:pPr>
             <a:r>
-              <a:rPr sz="1200" b="1">
+              <a:rPr sz="1050" b="1">
                 <a:solidFill>
                   <a:srgbClr val="0F172A"/>
                 </a:solidFill>
@@ -47229,8 +47229,8 @@
         </p:nvSpPr>
         <p:spPr>
           <a:xfrm>
-            <a:off x="2395728" y="1956815"/>
-            <a:ext cx="914400" cy="438912"/>
+            <a:off x="2441448" y="1737360"/>
+            <a:ext cx="914400" cy="356616"/>
           </a:xfrm>
           <a:prstGeom prst="rect">
             <a:avLst/>
@@ -47274,8 +47274,8 @@
         </p:nvSpPr>
         <p:spPr>
           <a:xfrm>
-            <a:off x="2441448" y="2020823"/>
-            <a:ext cx="822960" cy="310896"/>
+            <a:off x="2487168" y="1792224"/>
+            <a:ext cx="822960" cy="246888"/>
           </a:xfrm>
           <a:prstGeom prst="rect">
             <a:avLst/>
@@ -47316,8 +47316,8 @@
         </p:nvSpPr>
         <p:spPr>
           <a:xfrm>
-            <a:off x="3310128" y="1956815"/>
-            <a:ext cx="822960" cy="438912"/>
+            <a:off x="3355848" y="1737360"/>
+            <a:ext cx="822960" cy="356616"/>
           </a:xfrm>
           <a:prstGeom prst="rect">
             <a:avLst/>
@@ -47361,8 +47361,8 @@
         </p:nvSpPr>
         <p:spPr>
           <a:xfrm>
-            <a:off x="3355848" y="2020823"/>
-            <a:ext cx="731520" cy="310896"/>
+            <a:off x="3401568" y="1792224"/>
+            <a:ext cx="731520" cy="246888"/>
           </a:xfrm>
           <a:prstGeom prst="rect">
             <a:avLst/>
@@ -47403,8 +47403,8 @@
         </p:nvSpPr>
         <p:spPr>
           <a:xfrm>
-            <a:off x="4133087" y="1956815"/>
-            <a:ext cx="868680" cy="438912"/>
+            <a:off x="4178808" y="1737360"/>
+            <a:ext cx="868680" cy="356616"/>
           </a:xfrm>
           <a:prstGeom prst="rect">
             <a:avLst/>
@@ -47448,8 +47448,8 @@
         </p:nvSpPr>
         <p:spPr>
           <a:xfrm>
-            <a:off x="4178807" y="2020823"/>
-            <a:ext cx="777240" cy="310896"/>
+            <a:off x="4224528" y="1792224"/>
+            <a:ext cx="777240" cy="246888"/>
           </a:xfrm>
           <a:prstGeom prst="rect">
             <a:avLst/>
@@ -47490,8 +47490,8 @@
         </p:nvSpPr>
         <p:spPr>
           <a:xfrm>
-            <a:off x="5001768" y="1956815"/>
-            <a:ext cx="4434840" cy="438912"/>
+            <a:off x="5047488" y="1737360"/>
+            <a:ext cx="4389120" cy="356616"/>
           </a:xfrm>
           <a:prstGeom prst="rect">
             <a:avLst/>
@@ -47535,8 +47535,8 @@
         </p:nvSpPr>
         <p:spPr>
           <a:xfrm>
-            <a:off x="5056632" y="2020823"/>
-            <a:ext cx="4325112" cy="310896"/>
+            <a:off x="5102351" y="1792224"/>
+            <a:ext cx="4279392" cy="246888"/>
           </a:xfrm>
           <a:prstGeom prst="rect">
             <a:avLst/>
@@ -47550,7 +47550,7 @@
           <a:lstStyle/>
           <a:p>
             <a:pPr algn="l">
-              <a:defRPr sz="1200" b="0">
+              <a:defRPr sz="1050" b="0">
                 <a:solidFill>
                   <a:srgbClr val="0F172A"/>
                 </a:solidFill>
@@ -47558,7 +47558,7 @@
               </a:defRPr>
             </a:pPr>
             <a:r>
-              <a:rPr sz="1200" b="0">
+              <a:rPr sz="1050" b="0">
                 <a:solidFill>
                   <a:srgbClr val="0F172A"/>
                 </a:solidFill>
@@ -47577,8 +47577,8 @@
         </p:nvSpPr>
         <p:spPr>
           <a:xfrm>
-            <a:off x="9436607" y="1956815"/>
-            <a:ext cx="685800" cy="438912"/>
+            <a:off x="9436607" y="1737360"/>
+            <a:ext cx="685800" cy="356616"/>
           </a:xfrm>
           <a:prstGeom prst="rect">
             <a:avLst/>
@@ -47622,8 +47622,8 @@
         </p:nvSpPr>
         <p:spPr>
           <a:xfrm>
-            <a:off x="9491472" y="2020823"/>
-            <a:ext cx="576072" cy="310896"/>
+            <a:off x="9491472" y="1792224"/>
+            <a:ext cx="576072" cy="246888"/>
           </a:xfrm>
           <a:prstGeom prst="rect">
             <a:avLst/>
@@ -47637,7 +47637,7 @@
           <a:lstStyle/>
           <a:p>
             <a:pPr algn="r">
-              <a:defRPr sz="1200" b="0">
+              <a:defRPr sz="1050" b="0">
                 <a:solidFill>
                   <a:srgbClr val="0F172A"/>
                 </a:solidFill>
@@ -47645,7 +47645,7 @@
               </a:defRPr>
             </a:pPr>
             <a:r>
-              <a:rPr sz="1200" b="0">
+              <a:rPr sz="1050" b="0">
                 <a:solidFill>
                   <a:srgbClr val="0F172A"/>
                 </a:solidFill>
@@ -47664,8 +47664,8 @@
         </p:nvSpPr>
         <p:spPr>
           <a:xfrm>
-            <a:off x="475488" y="2395728"/>
-            <a:ext cx="1920240" cy="438912"/>
+            <a:off x="475488" y="2093976"/>
+            <a:ext cx="1965960" cy="356616"/>
           </a:xfrm>
           <a:prstGeom prst="rect">
             <a:avLst/>
@@ -47709,8 +47709,8 @@
         </p:nvSpPr>
         <p:spPr>
           <a:xfrm>
-            <a:off x="530352" y="2459736"/>
-            <a:ext cx="1810512" cy="310896"/>
+            <a:off x="530352" y="2148840"/>
+            <a:ext cx="1856231" cy="246888"/>
           </a:xfrm>
           <a:prstGeom prst="rect">
             <a:avLst/>
@@ -47724,7 +47724,7 @@
           <a:lstStyle/>
           <a:p>
             <a:pPr algn="l">
-              <a:defRPr sz="1200" b="1">
+              <a:defRPr sz="1050" b="1">
                 <a:solidFill>
                   <a:srgbClr val="0F172A"/>
                 </a:solidFill>
@@ -47732,7 +47732,7 @@
               </a:defRPr>
             </a:pPr>
             <a:r>
-              <a:rPr sz="1200" b="1">
+              <a:rPr sz="1050" b="1">
                 <a:solidFill>
                   <a:srgbClr val="0F172A"/>
                 </a:solidFill>
@@ -47751,8 +47751,8 @@
         </p:nvSpPr>
         <p:spPr>
           <a:xfrm>
-            <a:off x="2395728" y="2395728"/>
-            <a:ext cx="914400" cy="438912"/>
+            <a:off x="2441448" y="2093976"/>
+            <a:ext cx="914400" cy="356616"/>
           </a:xfrm>
           <a:prstGeom prst="rect">
             <a:avLst/>
@@ -47796,8 +47796,8 @@
         </p:nvSpPr>
         <p:spPr>
           <a:xfrm>
-            <a:off x="2441448" y="2459736"/>
-            <a:ext cx="822960" cy="310896"/>
+            <a:off x="2487168" y="2148840"/>
+            <a:ext cx="822960" cy="246888"/>
           </a:xfrm>
           <a:prstGeom prst="rect">
             <a:avLst/>
@@ -47838,8 +47838,8 @@
         </p:nvSpPr>
         <p:spPr>
           <a:xfrm>
-            <a:off x="3310128" y="2395728"/>
-            <a:ext cx="822960" cy="438912"/>
+            <a:off x="3355848" y="2093976"/>
+            <a:ext cx="822960" cy="356616"/>
           </a:xfrm>
           <a:prstGeom prst="rect">
             <a:avLst/>
@@ -47883,8 +47883,8 @@
         </p:nvSpPr>
         <p:spPr>
           <a:xfrm>
-            <a:off x="3355848" y="2459736"/>
-            <a:ext cx="731520" cy="310896"/>
+            <a:off x="3401568" y="2148840"/>
+            <a:ext cx="731520" cy="246888"/>
           </a:xfrm>
           <a:prstGeom prst="rect">
             <a:avLst/>
@@ -47925,8 +47925,8 @@
         </p:nvSpPr>
         <p:spPr>
           <a:xfrm>
-            <a:off x="4133087" y="2395728"/>
-            <a:ext cx="868680" cy="438912"/>
+            <a:off x="4178808" y="2093976"/>
+            <a:ext cx="868680" cy="356616"/>
           </a:xfrm>
           <a:prstGeom prst="rect">
             <a:avLst/>
@@ -47970,8 +47970,8 @@
         </p:nvSpPr>
         <p:spPr>
           <a:xfrm>
-            <a:off x="4178807" y="2459736"/>
-            <a:ext cx="777240" cy="310896"/>
+            <a:off x="4224528" y="2148840"/>
+            <a:ext cx="777240" cy="246888"/>
           </a:xfrm>
           <a:prstGeom prst="rect">
             <a:avLst/>
@@ -48012,8 +48012,8 @@
         </p:nvSpPr>
         <p:spPr>
           <a:xfrm>
-            <a:off x="5001768" y="2395728"/>
-            <a:ext cx="4434840" cy="438912"/>
+            <a:off x="5047488" y="2093976"/>
+            <a:ext cx="4389120" cy="356616"/>
           </a:xfrm>
           <a:prstGeom prst="rect">
             <a:avLst/>
@@ -48057,8 +48057,8 @@
         </p:nvSpPr>
         <p:spPr>
           <a:xfrm>
-            <a:off x="5056632" y="2459736"/>
-            <a:ext cx="4325112" cy="310896"/>
+            <a:off x="5102351" y="2148840"/>
+            <a:ext cx="4279392" cy="246888"/>
           </a:xfrm>
           <a:prstGeom prst="rect">
             <a:avLst/>
@@ -48072,7 +48072,7 @@
           <a:lstStyle/>
           <a:p>
             <a:pPr algn="l">
-              <a:defRPr sz="1200" b="0">
+              <a:defRPr sz="1050" b="0">
                 <a:solidFill>
                   <a:srgbClr val="0F172A"/>
                 </a:solidFill>
@@ -48080,7 +48080,7 @@
               </a:defRPr>
             </a:pPr>
             <a:r>
-              <a:rPr sz="1200" b="0">
+              <a:rPr sz="1050" b="0">
                 <a:solidFill>
                   <a:srgbClr val="0F172A"/>
                 </a:solidFill>
@@ -48099,8 +48099,8 @@
         </p:nvSpPr>
         <p:spPr>
           <a:xfrm>
-            <a:off x="9436607" y="2395728"/>
-            <a:ext cx="685800" cy="438912"/>
+            <a:off x="9436607" y="2093976"/>
+            <a:ext cx="685800" cy="356616"/>
           </a:xfrm>
           <a:prstGeom prst="rect">
             <a:avLst/>
@@ -48144,8 +48144,8 @@
         </p:nvSpPr>
         <p:spPr>
           <a:xfrm>
-            <a:off x="9491472" y="2459736"/>
-            <a:ext cx="576072" cy="310896"/>
+            <a:off x="9491472" y="2148840"/>
+            <a:ext cx="576072" cy="246888"/>
           </a:xfrm>
           <a:prstGeom prst="rect">
             <a:avLst/>
@@ -48159,7 +48159,7 @@
           <a:lstStyle/>
           <a:p>
             <a:pPr algn="r">
-              <a:defRPr sz="1200" b="0">
+              <a:defRPr sz="1050" b="0">
                 <a:solidFill>
                   <a:srgbClr val="0F172A"/>
                 </a:solidFill>
@@ -48167,7 +48167,7 @@
               </a:defRPr>
             </a:pPr>
             <a:r>
-              <a:rPr sz="1200" b="0">
+              <a:rPr sz="1050" b="0">
                 <a:solidFill>
                   <a:srgbClr val="0F172A"/>
                 </a:solidFill>
@@ -48186,8 +48186,8 @@
         </p:nvSpPr>
         <p:spPr>
           <a:xfrm>
-            <a:off x="475488" y="2834639"/>
-            <a:ext cx="1920240" cy="438912"/>
+            <a:off x="475488" y="2450592"/>
+            <a:ext cx="1965960" cy="356616"/>
           </a:xfrm>
           <a:prstGeom prst="rect">
             <a:avLst/>
@@ -48231,8 +48231,8 @@
         </p:nvSpPr>
         <p:spPr>
           <a:xfrm>
-            <a:off x="530352" y="2898647"/>
-            <a:ext cx="1810512" cy="310896"/>
+            <a:off x="530352" y="2505456"/>
+            <a:ext cx="1856231" cy="246888"/>
           </a:xfrm>
           <a:prstGeom prst="rect">
             <a:avLst/>
@@ -48246,7 +48246,7 @@
           <a:lstStyle/>
           <a:p>
             <a:pPr algn="l">
-              <a:defRPr sz="1200" b="1">
+              <a:defRPr sz="1050" b="1">
                 <a:solidFill>
                   <a:srgbClr val="0F172A"/>
                 </a:solidFill>
@@ -48254,7 +48254,7 @@
               </a:defRPr>
             </a:pPr>
             <a:r>
-              <a:rPr sz="1200" b="1">
+              <a:rPr sz="1050" b="1">
                 <a:solidFill>
                   <a:srgbClr val="0F172A"/>
                 </a:solidFill>
@@ -48273,8 +48273,8 @@
         </p:nvSpPr>
         <p:spPr>
           <a:xfrm>
-            <a:off x="2395728" y="2834639"/>
-            <a:ext cx="914400" cy="438912"/>
+            <a:off x="2441448" y="2450592"/>
+            <a:ext cx="914400" cy="356616"/>
           </a:xfrm>
           <a:prstGeom prst="rect">
             <a:avLst/>
@@ -48318,8 +48318,8 @@
         </p:nvSpPr>
         <p:spPr>
           <a:xfrm>
-            <a:off x="2441448" y="2898647"/>
-            <a:ext cx="822960" cy="310896"/>
+            <a:off x="2487168" y="2505456"/>
+            <a:ext cx="822960" cy="246888"/>
           </a:xfrm>
           <a:prstGeom prst="rect">
             <a:avLst/>
@@ -48360,8 +48360,8 @@
         </p:nvSpPr>
         <p:spPr>
           <a:xfrm>
-            <a:off x="3310128" y="2834639"/>
-            <a:ext cx="822960" cy="438912"/>
+            <a:off x="3355848" y="2450592"/>
+            <a:ext cx="822960" cy="356616"/>
           </a:xfrm>
           <a:prstGeom prst="rect">
             <a:avLst/>
@@ -48405,8 +48405,8 @@
         </p:nvSpPr>
         <p:spPr>
           <a:xfrm>
-            <a:off x="3355848" y="2898647"/>
-            <a:ext cx="731520" cy="310896"/>
+            <a:off x="3401568" y="2505456"/>
+            <a:ext cx="731520" cy="246888"/>
           </a:xfrm>
           <a:prstGeom prst="rect">
             <a:avLst/>
@@ -48447,8 +48447,8 @@
         </p:nvSpPr>
         <p:spPr>
           <a:xfrm>
-            <a:off x="4133087" y="2834639"/>
-            <a:ext cx="868680" cy="438912"/>
+            <a:off x="4178808" y="2450592"/>
+            <a:ext cx="868680" cy="356616"/>
           </a:xfrm>
           <a:prstGeom prst="rect">
             <a:avLst/>
@@ -48492,8 +48492,8 @@
         </p:nvSpPr>
         <p:spPr>
           <a:xfrm>
-            <a:off x="4178807" y="2898647"/>
-            <a:ext cx="777240" cy="310896"/>
+            <a:off x="4224528" y="2505456"/>
+            <a:ext cx="777240" cy="246888"/>
           </a:xfrm>
           <a:prstGeom prst="rect">
             <a:avLst/>
@@ -48534,8 +48534,8 @@
         </p:nvSpPr>
         <p:spPr>
           <a:xfrm>
-            <a:off x="5001768" y="2834639"/>
-            <a:ext cx="4434840" cy="438912"/>
+            <a:off x="5047488" y="2450592"/>
+            <a:ext cx="4389120" cy="356616"/>
           </a:xfrm>
           <a:prstGeom prst="rect">
             <a:avLst/>
@@ -48579,8 +48579,8 @@
         </p:nvSpPr>
         <p:spPr>
           <a:xfrm>
-            <a:off x="5056632" y="2898647"/>
-            <a:ext cx="4325112" cy="310896"/>
+            <a:off x="5102351" y="2505456"/>
+            <a:ext cx="4279392" cy="246888"/>
           </a:xfrm>
           <a:prstGeom prst="rect">
             <a:avLst/>
@@ -48594,7 +48594,7 @@
           <a:lstStyle/>
           <a:p>
             <a:pPr algn="l">
-              <a:defRPr sz="1200" b="0">
+              <a:defRPr sz="1050" b="0">
                 <a:solidFill>
                   <a:srgbClr val="0F172A"/>
                 </a:solidFill>
@@ -48602,7 +48602,7 @@
               </a:defRPr>
             </a:pPr>
             <a:r>
-              <a:rPr sz="1200" b="0">
+              <a:rPr sz="1050" b="0">
                 <a:solidFill>
                   <a:srgbClr val="0F172A"/>
                 </a:solidFill>
@@ -48621,8 +48621,8 @@
         </p:nvSpPr>
         <p:spPr>
           <a:xfrm>
-            <a:off x="9436607" y="2834639"/>
-            <a:ext cx="685800" cy="438912"/>
+            <a:off x="9436607" y="2450592"/>
+            <a:ext cx="685800" cy="356616"/>
           </a:xfrm>
           <a:prstGeom prst="rect">
             <a:avLst/>
@@ -48666,8 +48666,8 @@
         </p:nvSpPr>
         <p:spPr>
           <a:xfrm>
-            <a:off x="9491472" y="2898647"/>
-            <a:ext cx="576072" cy="310896"/>
+            <a:off x="9491472" y="2505456"/>
+            <a:ext cx="576072" cy="246888"/>
           </a:xfrm>
           <a:prstGeom prst="rect">
             <a:avLst/>
@@ -48681,7 +48681,7 @@
           <a:lstStyle/>
           <a:p>
             <a:pPr algn="r">
-              <a:defRPr sz="1200" b="0">
+              <a:defRPr sz="1050" b="0">
                 <a:solidFill>
                   <a:srgbClr val="0F172A"/>
                 </a:solidFill>
@@ -48689,7 +48689,7 @@
               </a:defRPr>
             </a:pPr>
             <a:r>
-              <a:rPr sz="1200" b="0">
+              <a:rPr sz="1050" b="0">
                 <a:solidFill>
                   <a:srgbClr val="0F172A"/>
                 </a:solidFill>
@@ -48708,8 +48708,8 @@
         </p:nvSpPr>
         <p:spPr>
           <a:xfrm>
-            <a:off x="475488" y="3273552"/>
-            <a:ext cx="1920240" cy="438912"/>
+            <a:off x="475488" y="2807208"/>
+            <a:ext cx="1965960" cy="356616"/>
           </a:xfrm>
           <a:prstGeom prst="rect">
             <a:avLst/>
@@ -48753,8 +48753,8 @@
         </p:nvSpPr>
         <p:spPr>
           <a:xfrm>
-            <a:off x="530352" y="3337560"/>
-            <a:ext cx="1810512" cy="310896"/>
+            <a:off x="530352" y="2862072"/>
+            <a:ext cx="1856231" cy="246888"/>
           </a:xfrm>
           <a:prstGeom prst="rect">
             <a:avLst/>
@@ -48768,7 +48768,7 @@
           <a:lstStyle/>
           <a:p>
             <a:pPr algn="l">
-              <a:defRPr sz="1200" b="1">
+              <a:defRPr sz="1050" b="1">
                 <a:solidFill>
                   <a:srgbClr val="0F172A"/>
                 </a:solidFill>
@@ -48776,13 +48776,13 @@
               </a:defRPr>
             </a:pPr>
             <a:r>
-              <a:rPr sz="1200" b="1">
+              <a:rPr sz="1050" b="1">
                 <a:solidFill>
                   <a:srgbClr val="0F172A"/>
                 </a:solidFill>
                 <a:latin typeface="Microsoft YaHei"/>
               </a:rPr>
-              <a:t>Global event rule</a:t>
+              <a:t>Zero-shot rule tree</a:t>
             </a:r>
           </a:p>
         </p:txBody>
@@ -48795,8 +48795,8 @@
         </p:nvSpPr>
         <p:spPr>
           <a:xfrm>
-            <a:off x="2395728" y="3273552"/>
-            <a:ext cx="914400" cy="438912"/>
+            <a:off x="2441448" y="2807208"/>
+            <a:ext cx="914400" cy="356616"/>
           </a:xfrm>
           <a:prstGeom prst="rect">
             <a:avLst/>
@@ -48840,8 +48840,8 @@
         </p:nvSpPr>
         <p:spPr>
           <a:xfrm>
-            <a:off x="2441448" y="3337560"/>
-            <a:ext cx="822960" cy="310896"/>
+            <a:off x="2487168" y="2862072"/>
+            <a:ext cx="822960" cy="246888"/>
           </a:xfrm>
           <a:prstGeom prst="rect">
             <a:avLst/>
@@ -48857,7 +48857,7 @@
             <a:pPr algn="ctr">
               <a:defRPr sz="1200" b="1">
                 <a:solidFill>
-                  <a:srgbClr val="198754"/>
+                  <a:srgbClr val="BE123C"/>
                 </a:solidFill>
                 <a:latin typeface="Microsoft YaHei"/>
               </a:defRPr>
@@ -48865,11 +48865,11 @@
             <a:r>
               <a:rPr sz="1200" b="1">
                 <a:solidFill>
-                  <a:srgbClr val="198754"/>
-                </a:solidFill>
-                <a:latin typeface="Microsoft YaHei"/>
-              </a:rPr>
-              <a:t>●</a:t>
+                  <a:srgbClr val="BE123C"/>
+                </a:solidFill>
+                <a:latin typeface="Microsoft YaHei"/>
+              </a:rPr>
+              <a:t>×</a:t>
             </a:r>
           </a:p>
         </p:txBody>
@@ -48882,8 +48882,8 @@
         </p:nvSpPr>
         <p:spPr>
           <a:xfrm>
-            <a:off x="3310128" y="3273552"/>
-            <a:ext cx="822960" cy="438912"/>
+            <a:off x="3355848" y="2807208"/>
+            <a:ext cx="822960" cy="356616"/>
           </a:xfrm>
           <a:prstGeom prst="rect">
             <a:avLst/>
@@ -48927,8 +48927,8 @@
         </p:nvSpPr>
         <p:spPr>
           <a:xfrm>
-            <a:off x="3355848" y="3337560"/>
-            <a:ext cx="731520" cy="310896"/>
+            <a:off x="3401568" y="2862072"/>
+            <a:ext cx="731520" cy="246888"/>
           </a:xfrm>
           <a:prstGeom prst="rect">
             <a:avLst/>
@@ -48944,7 +48944,7 @@
             <a:pPr algn="ctr">
               <a:defRPr sz="1200" b="1">
                 <a:solidFill>
-                  <a:srgbClr val="BE123C"/>
+                  <a:srgbClr val="198754"/>
                 </a:solidFill>
                 <a:latin typeface="Microsoft YaHei"/>
               </a:defRPr>
@@ -48952,11 +48952,11 @@
             <a:r>
               <a:rPr sz="1200" b="1">
                 <a:solidFill>
-                  <a:srgbClr val="BE123C"/>
-                </a:solidFill>
-                <a:latin typeface="Microsoft YaHei"/>
-              </a:rPr>
-              <a:t>×</a:t>
+                  <a:srgbClr val="198754"/>
+                </a:solidFill>
+                <a:latin typeface="Microsoft YaHei"/>
+              </a:rPr>
+              <a:t>●</a:t>
             </a:r>
           </a:p>
         </p:txBody>
@@ -48969,8 +48969,8 @@
         </p:nvSpPr>
         <p:spPr>
           <a:xfrm>
-            <a:off x="4133087" y="3273552"/>
-            <a:ext cx="868680" cy="438912"/>
+            <a:off x="4178808" y="2807208"/>
+            <a:ext cx="868680" cy="356616"/>
           </a:xfrm>
           <a:prstGeom prst="rect">
             <a:avLst/>
@@ -49014,8 +49014,8 @@
         </p:nvSpPr>
         <p:spPr>
           <a:xfrm>
-            <a:off x="4178807" y="3337560"/>
-            <a:ext cx="777240" cy="310896"/>
+            <a:off x="4224528" y="2862072"/>
+            <a:ext cx="777240" cy="246888"/>
           </a:xfrm>
           <a:prstGeom prst="rect">
             <a:avLst/>
@@ -49056,8 +49056,8 @@
         </p:nvSpPr>
         <p:spPr>
           <a:xfrm>
-            <a:off x="5001768" y="3273552"/>
-            <a:ext cx="4434840" cy="438912"/>
+            <a:off x="5047488" y="2807208"/>
+            <a:ext cx="4389120" cy="356616"/>
           </a:xfrm>
           <a:prstGeom prst="rect">
             <a:avLst/>
@@ -49101,8 +49101,8 @@
         </p:nvSpPr>
         <p:spPr>
           <a:xfrm>
-            <a:off x="5056632" y="3337560"/>
-            <a:ext cx="4325112" cy="310896"/>
+            <a:off x="5102351" y="2862072"/>
+            <a:ext cx="4279392" cy="246888"/>
           </a:xfrm>
           <a:prstGeom prst="rect">
             <a:avLst/>
@@ -49116,7 +49116,7 @@
           <a:lstStyle/>
           <a:p>
             <a:pPr algn="l">
-              <a:defRPr sz="1200" b="0">
+              <a:defRPr sz="1050" b="0">
                 <a:solidFill>
                   <a:srgbClr val="0F172A"/>
                 </a:solidFill>
@@ -49124,13 +49124,13 @@
               </a:defRPr>
             </a:pPr>
             <a:r>
-              <a:rPr sz="1200" b="0">
+              <a:rPr sz="1050" b="0">
                 <a:solidFill>
                   <a:srgbClr val="0F172A"/>
                 </a:solidFill>
                 <a:latin typeface="Microsoft YaHei"/>
               </a:rPr>
-              <a:t>所有家庭使用同一疫情折减</a:t>
+              <a:t>LLM 直接构建规则树，无数值校准</a:t>
             </a:r>
           </a:p>
         </p:txBody>
@@ -49143,8 +49143,8 @@
         </p:nvSpPr>
         <p:spPr>
           <a:xfrm>
-            <a:off x="9436607" y="3273552"/>
-            <a:ext cx="685800" cy="438912"/>
+            <a:off x="9436607" y="2807208"/>
+            <a:ext cx="685800" cy="356616"/>
           </a:xfrm>
           <a:prstGeom prst="rect">
             <a:avLst/>
@@ -49188,8 +49188,8 @@
         </p:nvSpPr>
         <p:spPr>
           <a:xfrm>
-            <a:off x="9491472" y="3337560"/>
-            <a:ext cx="576072" cy="310896"/>
+            <a:off x="9491472" y="2862072"/>
+            <a:ext cx="576072" cy="246888"/>
           </a:xfrm>
           <a:prstGeom prst="rect">
             <a:avLst/>
@@ -49203,7 +49203,7 @@
           <a:lstStyle/>
           <a:p>
             <a:pPr algn="r">
-              <a:defRPr sz="1200" b="0">
+              <a:defRPr sz="1050" b="0">
                 <a:solidFill>
                   <a:srgbClr val="0F172A"/>
                 </a:solidFill>
@@ -49211,13 +49211,13 @@
               </a:defRPr>
             </a:pPr>
             <a:r>
-              <a:rPr sz="1200" b="0">
+              <a:rPr sz="1050" b="0">
                 <a:solidFill>
                   <a:srgbClr val="0F172A"/>
                 </a:solidFill>
                 <a:latin typeface="Microsoft YaHei"/>
               </a:rPr>
-              <a:t>2.52</a:t>
+              <a:t>2.60</a:t>
             </a:r>
           </a:p>
         </p:txBody>
@@ -49230,8 +49230,8 @@
         </p:nvSpPr>
         <p:spPr>
           <a:xfrm>
-            <a:off x="475488" y="3712463"/>
-            <a:ext cx="1920240" cy="438912"/>
+            <a:off x="475488" y="3163824"/>
+            <a:ext cx="1965960" cy="356616"/>
           </a:xfrm>
           <a:prstGeom prst="rect">
             <a:avLst/>
@@ -49275,8 +49275,8 @@
         </p:nvSpPr>
         <p:spPr>
           <a:xfrm>
-            <a:off x="530352" y="3776472"/>
-            <a:ext cx="1810512" cy="310896"/>
+            <a:off x="530352" y="3218688"/>
+            <a:ext cx="1856231" cy="246888"/>
           </a:xfrm>
           <a:prstGeom prst="rect">
             <a:avLst/>
@@ -49290,7 +49290,7 @@
           <a:lstStyle/>
           <a:p>
             <a:pPr algn="l">
-              <a:defRPr sz="1200" b="1">
+              <a:defRPr sz="1050" b="1">
                 <a:solidFill>
                   <a:srgbClr val="0F172A"/>
                 </a:solidFill>
@@ -49298,13 +49298,13 @@
               </a:defRPr>
             </a:pPr>
             <a:r>
-              <a:rPr sz="1200" b="1">
+              <a:rPr sz="1050" b="1">
                 <a:solidFill>
                   <a:srgbClr val="0F172A"/>
                 </a:solidFill>
                 <a:latin typeface="Microsoft YaHei"/>
               </a:rPr>
-              <a:t>Random pressure</a:t>
+              <a:t>Rule + 500 history</a:t>
             </a:r>
           </a:p>
         </p:txBody>
@@ -49317,8 +49317,8 @@
         </p:nvSpPr>
         <p:spPr>
           <a:xfrm>
-            <a:off x="2395728" y="3712463"/>
-            <a:ext cx="914400" cy="438912"/>
+            <a:off x="2441448" y="3163824"/>
+            <a:ext cx="914400" cy="356616"/>
           </a:xfrm>
           <a:prstGeom prst="rect">
             <a:avLst/>
@@ -49362,8 +49362,8 @@
         </p:nvSpPr>
         <p:spPr>
           <a:xfrm>
-            <a:off x="2441448" y="3776472"/>
-            <a:ext cx="822960" cy="310896"/>
+            <a:off x="2487168" y="3218688"/>
+            <a:ext cx="822960" cy="246888"/>
           </a:xfrm>
           <a:prstGeom prst="rect">
             <a:avLst/>
@@ -49404,8 +49404,8 @@
         </p:nvSpPr>
         <p:spPr>
           <a:xfrm>
-            <a:off x="3310128" y="3712463"/>
-            <a:ext cx="822960" cy="438912"/>
+            <a:off x="3355848" y="3163824"/>
+            <a:ext cx="822960" cy="356616"/>
           </a:xfrm>
           <a:prstGeom prst="rect">
             <a:avLst/>
@@ -49449,8 +49449,8 @@
         </p:nvSpPr>
         <p:spPr>
           <a:xfrm>
-            <a:off x="3355848" y="3776472"/>
-            <a:ext cx="731520" cy="310896"/>
+            <a:off x="3401568" y="3218688"/>
+            <a:ext cx="731520" cy="246888"/>
           </a:xfrm>
           <a:prstGeom prst="rect">
             <a:avLst/>
@@ -49466,7 +49466,7 @@
             <a:pPr algn="ctr">
               <a:defRPr sz="1200" b="1">
                 <a:solidFill>
-                  <a:srgbClr val="BE123C"/>
+                  <a:srgbClr val="198754"/>
                 </a:solidFill>
                 <a:latin typeface="Microsoft YaHei"/>
               </a:defRPr>
@@ -49474,11 +49474,11 @@
             <a:r>
               <a:rPr sz="1200" b="1">
                 <a:solidFill>
-                  <a:srgbClr val="BE123C"/>
-                </a:solidFill>
-                <a:latin typeface="Microsoft YaHei"/>
-              </a:rPr>
-              <a:t>×</a:t>
+                  <a:srgbClr val="198754"/>
+                </a:solidFill>
+                <a:latin typeface="Microsoft YaHei"/>
+              </a:rPr>
+              <a:t>●</a:t>
             </a:r>
           </a:p>
         </p:txBody>
@@ -49491,8 +49491,8 @@
         </p:nvSpPr>
         <p:spPr>
           <a:xfrm>
-            <a:off x="4133087" y="3712463"/>
-            <a:ext cx="868680" cy="438912"/>
+            <a:off x="4178808" y="3163824"/>
+            <a:ext cx="868680" cy="356616"/>
           </a:xfrm>
           <a:prstGeom prst="rect">
             <a:avLst/>
@@ -49536,8 +49536,8 @@
         </p:nvSpPr>
         <p:spPr>
           <a:xfrm>
-            <a:off x="4178807" y="3776472"/>
-            <a:ext cx="777240" cy="310896"/>
+            <a:off x="4224528" y="3218688"/>
+            <a:ext cx="777240" cy="246888"/>
           </a:xfrm>
           <a:prstGeom prst="rect">
             <a:avLst/>
@@ -49578,8 +49578,8 @@
         </p:nvSpPr>
         <p:spPr>
           <a:xfrm>
-            <a:off x="5001768" y="3712463"/>
-            <a:ext cx="4434840" cy="438912"/>
+            <a:off x="5047488" y="3163824"/>
+            <a:ext cx="4389120" cy="356616"/>
           </a:xfrm>
           <a:prstGeom prst="rect">
             <a:avLst/>
@@ -49623,8 +49623,8 @@
         </p:nvSpPr>
         <p:spPr>
           <a:xfrm>
-            <a:off x="5056632" y="3776472"/>
-            <a:ext cx="4325112" cy="310896"/>
+            <a:off x="5102351" y="3218688"/>
+            <a:ext cx="4279392" cy="246888"/>
           </a:xfrm>
           <a:prstGeom prst="rect">
             <a:avLst/>
@@ -49638,7 +49638,7 @@
           <a:lstStyle/>
           <a:p>
             <a:pPr algn="l">
-              <a:defRPr sz="1200" b="0">
+              <a:defRPr sz="1050" b="0">
                 <a:solidFill>
                   <a:srgbClr val="0F172A"/>
                 </a:solidFill>
@@ -49646,13 +49646,13 @@
               </a:defRPr>
             </a:pPr>
             <a:r>
-              <a:rPr sz="1200" b="0">
+              <a:rPr sz="1050" b="0">
                 <a:solidFill>
                   <a:srgbClr val="0F172A"/>
                 </a:solidFill>
                 <a:latin typeface="Microsoft YaHei"/>
               </a:rPr>
-              <a:t>随机 pressure 对照</a:t>
+              <a:t>LLM 规则 + 少量历史标签校准</a:t>
             </a:r>
           </a:p>
         </p:txBody>
@@ -49665,8 +49665,8 @@
         </p:nvSpPr>
         <p:spPr>
           <a:xfrm>
-            <a:off x="9436607" y="3712463"/>
-            <a:ext cx="685800" cy="438912"/>
+            <a:off x="9436607" y="3163824"/>
+            <a:ext cx="685800" cy="356616"/>
           </a:xfrm>
           <a:prstGeom prst="rect">
             <a:avLst/>
@@ -49710,8 +49710,8 @@
         </p:nvSpPr>
         <p:spPr>
           <a:xfrm>
-            <a:off x="9491472" y="3776472"/>
-            <a:ext cx="576072" cy="310896"/>
+            <a:off x="9491472" y="3218688"/>
+            <a:ext cx="576072" cy="246888"/>
           </a:xfrm>
           <a:prstGeom prst="rect">
             <a:avLst/>
@@ -49725,7 +49725,7 @@
           <a:lstStyle/>
           <a:p>
             <a:pPr algn="r">
-              <a:defRPr sz="1200" b="0">
+              <a:defRPr sz="1050" b="0">
                 <a:solidFill>
                   <a:srgbClr val="0F172A"/>
                 </a:solidFill>
@@ -49733,13 +49733,13 @@
               </a:defRPr>
             </a:pPr>
             <a:r>
-              <a:rPr sz="1200" b="0">
+              <a:rPr sz="1050" b="0">
                 <a:solidFill>
                   <a:srgbClr val="0F172A"/>
                 </a:solidFill>
                 <a:latin typeface="Microsoft YaHei"/>
               </a:rPr>
-              <a:t>2.65</a:t>
+              <a:t>2.77</a:t>
             </a:r>
           </a:p>
         </p:txBody>
@@ -49752,8 +49752,8 @@
         </p:nvSpPr>
         <p:spPr>
           <a:xfrm>
-            <a:off x="475488" y="4151376"/>
-            <a:ext cx="1920240" cy="438912"/>
+            <a:off x="475488" y="3520440"/>
+            <a:ext cx="1965960" cy="356616"/>
           </a:xfrm>
           <a:prstGeom prst="rect">
             <a:avLst/>
@@ -49797,8 +49797,8 @@
         </p:nvSpPr>
         <p:spPr>
           <a:xfrm>
-            <a:off x="530352" y="4215384"/>
-            <a:ext cx="1810512" cy="310896"/>
+            <a:off x="530352" y="3575304"/>
+            <a:ext cx="1856231" cy="246888"/>
           </a:xfrm>
           <a:prstGeom prst="rect">
             <a:avLst/>
@@ -49812,7 +49812,7 @@
           <a:lstStyle/>
           <a:p>
             <a:pPr algn="l">
-              <a:defRPr sz="1200" b="1">
+              <a:defRPr sz="1050" b="1">
                 <a:solidFill>
                   <a:srgbClr val="0F172A"/>
                 </a:solidFill>
@@ -49820,13 +49820,13 @@
               </a:defRPr>
             </a:pPr>
             <a:r>
-              <a:rPr sz="1200" b="1">
+              <a:rPr sz="1050" b="1">
                 <a:solidFill>
                   <a:srgbClr val="0F172A"/>
                 </a:solidFill>
                 <a:latin typeface="Microsoft YaHei"/>
               </a:rPr>
-              <a:t>Hybrid gated</a:t>
+              <a:t>Global event rule</a:t>
             </a:r>
           </a:p>
         </p:txBody>
@@ -49839,8 +49839,8 @@
         </p:nvSpPr>
         <p:spPr>
           <a:xfrm>
-            <a:off x="2395728" y="4151376"/>
-            <a:ext cx="914400" cy="438912"/>
+            <a:off x="2441448" y="3520440"/>
+            <a:ext cx="914400" cy="356616"/>
           </a:xfrm>
           <a:prstGeom prst="rect">
             <a:avLst/>
@@ -49884,8 +49884,8 @@
         </p:nvSpPr>
         <p:spPr>
           <a:xfrm>
-            <a:off x="2441448" y="4215384"/>
-            <a:ext cx="822960" cy="310896"/>
+            <a:off x="2487168" y="3575304"/>
+            <a:ext cx="822960" cy="246888"/>
           </a:xfrm>
           <a:prstGeom prst="rect">
             <a:avLst/>
@@ -49926,8 +49926,8 @@
         </p:nvSpPr>
         <p:spPr>
           <a:xfrm>
-            <a:off x="3310128" y="4151376"/>
-            <a:ext cx="822960" cy="438912"/>
+            <a:off x="3355848" y="3520440"/>
+            <a:ext cx="822960" cy="356616"/>
           </a:xfrm>
           <a:prstGeom prst="rect">
             <a:avLst/>
@@ -49971,8 +49971,8 @@
         </p:nvSpPr>
         <p:spPr>
           <a:xfrm>
-            <a:off x="3355848" y="4215384"/>
-            <a:ext cx="731520" cy="310896"/>
+            <a:off x="3401568" y="3575304"/>
+            <a:ext cx="731520" cy="246888"/>
           </a:xfrm>
           <a:prstGeom prst="rect">
             <a:avLst/>
@@ -49988,7 +49988,7 @@
             <a:pPr algn="ctr">
               <a:defRPr sz="1200" b="1">
                 <a:solidFill>
-                  <a:srgbClr val="198754"/>
+                  <a:srgbClr val="BE123C"/>
                 </a:solidFill>
                 <a:latin typeface="Microsoft YaHei"/>
               </a:defRPr>
@@ -49996,11 +49996,11 @@
             <a:r>
               <a:rPr sz="1200" b="1">
                 <a:solidFill>
-                  <a:srgbClr val="198754"/>
-                </a:solidFill>
-                <a:latin typeface="Microsoft YaHei"/>
-              </a:rPr>
-              <a:t>●</a:t>
+                  <a:srgbClr val="BE123C"/>
+                </a:solidFill>
+                <a:latin typeface="Microsoft YaHei"/>
+              </a:rPr>
+              <a:t>×</a:t>
             </a:r>
           </a:p>
         </p:txBody>
@@ -50013,8 +50013,8 @@
         </p:nvSpPr>
         <p:spPr>
           <a:xfrm>
-            <a:off x="4133087" y="4151376"/>
-            <a:ext cx="868680" cy="438912"/>
+            <a:off x="4178808" y="3520440"/>
+            <a:ext cx="868680" cy="356616"/>
           </a:xfrm>
           <a:prstGeom prst="rect">
             <a:avLst/>
@@ -50058,8 +50058,8 @@
         </p:nvSpPr>
         <p:spPr>
           <a:xfrm>
-            <a:off x="4178807" y="4215384"/>
-            <a:ext cx="777240" cy="310896"/>
+            <a:off x="4224528" y="3575304"/>
+            <a:ext cx="777240" cy="246888"/>
           </a:xfrm>
           <a:prstGeom prst="rect">
             <a:avLst/>
@@ -50100,8 +50100,8 @@
         </p:nvSpPr>
         <p:spPr>
           <a:xfrm>
-            <a:off x="5001768" y="4151376"/>
-            <a:ext cx="4434840" cy="438912"/>
+            <a:off x="5047488" y="3520440"/>
+            <a:ext cx="4389120" cy="356616"/>
           </a:xfrm>
           <a:prstGeom prst="rect">
             <a:avLst/>
@@ -50145,8 +50145,8 @@
         </p:nvSpPr>
         <p:spPr>
           <a:xfrm>
-            <a:off x="5056632" y="4215384"/>
-            <a:ext cx="4325112" cy="310896"/>
+            <a:off x="5102351" y="3575304"/>
+            <a:ext cx="4279392" cy="246888"/>
           </a:xfrm>
           <a:prstGeom prst="rect">
             <a:avLst/>
@@ -50160,7 +50160,7 @@
           <a:lstStyle/>
           <a:p>
             <a:pPr algn="l">
-              <a:defRPr sz="1200" b="1">
+              <a:defRPr sz="1050" b="0">
                 <a:solidFill>
                   <a:srgbClr val="0F172A"/>
                 </a:solidFill>
@@ -50168,13 +50168,13 @@
               </a:defRPr>
             </a:pPr>
             <a:r>
-              <a:rPr sz="1200" b="1">
+              <a:rPr sz="1050" b="0">
                 <a:solidFill>
                   <a:srgbClr val="0F172A"/>
                 </a:solidFill>
                 <a:latin typeface="Microsoft YaHei"/>
               </a:rPr>
-              <a:t>历史基线 × LLM 事件折减</a:t>
+              <a:t>所有家庭使用同一疫情折减</a:t>
             </a:r>
           </a:p>
         </p:txBody>
@@ -50187,8 +50187,8 @@
         </p:nvSpPr>
         <p:spPr>
           <a:xfrm>
-            <a:off x="9436607" y="4151376"/>
-            <a:ext cx="685800" cy="438912"/>
+            <a:off x="9436607" y="3520440"/>
+            <a:ext cx="685800" cy="356616"/>
           </a:xfrm>
           <a:prstGeom prst="rect">
             <a:avLst/>
@@ -50232,8 +50232,8 @@
         </p:nvSpPr>
         <p:spPr>
           <a:xfrm>
-            <a:off x="9491472" y="4215384"/>
-            <a:ext cx="576072" cy="310896"/>
+            <a:off x="9491472" y="3575304"/>
+            <a:ext cx="576072" cy="246888"/>
           </a:xfrm>
           <a:prstGeom prst="rect">
             <a:avLst/>
@@ -50247,7 +50247,7 @@
           <a:lstStyle/>
           <a:p>
             <a:pPr algn="r">
-              <a:defRPr sz="1200" b="1">
+              <a:defRPr sz="1050" b="0">
                 <a:solidFill>
                   <a:srgbClr val="0F172A"/>
                 </a:solidFill>
@@ -50255,71 +50255,29 @@
               </a:defRPr>
             </a:pPr>
             <a:r>
-              <a:rPr sz="1200" b="1">
+              <a:rPr sz="1050" b="0">
                 <a:solidFill>
                   <a:srgbClr val="0F172A"/>
                 </a:solidFill>
                 <a:latin typeface="Microsoft YaHei"/>
               </a:rPr>
-              <a:t>2.50</a:t>
-            </a:r>
-          </a:p>
-        </p:txBody>
-      </p:sp>
-      <p:sp>
-        <p:nvSpPr>
-          <p:cNvPr id="107" name="TextBox 106"/>
-          <p:cNvSpPr txBox="1"/>
-          <p:nvPr/>
-        </p:nvSpPr>
-        <p:spPr>
-          <a:xfrm>
-            <a:off x="594360" y="4617720"/>
-            <a:ext cx="3383280" cy="219456"/>
-          </a:xfrm>
-          <a:prstGeom prst="rect">
-            <a:avLst/>
-          </a:prstGeom>
-          <a:noFill/>
-        </p:spPr>
-        <p:txBody>
-          <a:bodyPr wrap="square" lIns="27432" rIns="27432" tIns="9144" bIns="9144" anchor="ctr">
-            <a:spAutoFit/>
-          </a:bodyPr>
-          <a:lstStyle/>
-          <a:p>
-            <a:pPr algn="l">
-              <a:defRPr sz="1200" b="1">
-                <a:solidFill>
-                  <a:srgbClr val="64748B"/>
-                </a:solidFill>
-                <a:latin typeface="Microsoft YaHei"/>
-              </a:defRPr>
-            </a:pPr>
-            <a:r>
-              <a:rPr sz="1200" b="1">
-                <a:solidFill>
-                  <a:srgbClr val="64748B"/>
-                </a:solidFill>
-                <a:latin typeface="Microsoft YaHei"/>
-              </a:rPr>
-              <a:t>● 使用 / used    × 不使用 / not used</a:t>
-            </a:r>
-          </a:p>
-        </p:txBody>
-      </p:sp>
-      <p:sp>
-        <p:nvSpPr>
-          <p:cNvPr id="108" name="Rounded Rectangle 107"/>
+              <a:t>2.52</a:t>
+            </a:r>
+          </a:p>
+        </p:txBody>
+      </p:sp>
+      <p:sp>
+        <p:nvSpPr>
+          <p:cNvPr id="107" name="Rectangle 106"/>
           <p:cNvSpPr/>
           <p:nvPr/>
         </p:nvSpPr>
         <p:spPr>
           <a:xfrm>
-            <a:off x="749808" y="4919472"/>
-            <a:ext cx="10012680" cy="1170432"/>
-          </a:xfrm>
-          <a:prstGeom prst="roundRect">
+            <a:off x="475488" y="3877056"/>
+            <a:ext cx="1965960" cy="356616"/>
+          </a:xfrm>
+          <a:prstGeom prst="rect">
             <a:avLst/>
           </a:prstGeom>
           <a:solidFill>
@@ -50355,14 +50313,1100 @@
       </p:sp>
       <p:sp>
         <p:nvSpPr>
+          <p:cNvPr id="108" name="TextBox 107"/>
+          <p:cNvSpPr txBox="1"/>
+          <p:nvPr/>
+        </p:nvSpPr>
+        <p:spPr>
+          <a:xfrm>
+            <a:off x="530352" y="3931920"/>
+            <a:ext cx="1856231" cy="246888"/>
+          </a:xfrm>
+          <a:prstGeom prst="rect">
+            <a:avLst/>
+          </a:prstGeom>
+          <a:noFill/>
+        </p:spPr>
+        <p:txBody>
+          <a:bodyPr wrap="square" lIns="27432" rIns="27432" tIns="9144" bIns="9144" anchor="ctr">
+            <a:spAutoFit/>
+          </a:bodyPr>
+          <a:lstStyle/>
+          <a:p>
+            <a:pPr algn="l">
+              <a:defRPr sz="1050" b="1">
+                <a:solidFill>
+                  <a:srgbClr val="0F172A"/>
+                </a:solidFill>
+                <a:latin typeface="Microsoft YaHei"/>
+              </a:defRPr>
+            </a:pPr>
+            <a:r>
+              <a:rPr sz="1050" b="1">
+                <a:solidFill>
+                  <a:srgbClr val="0F172A"/>
+                </a:solidFill>
+                <a:latin typeface="Microsoft YaHei"/>
+              </a:rPr>
+              <a:t>Random pressure</a:t>
+            </a:r>
+          </a:p>
+        </p:txBody>
+      </p:sp>
+      <p:sp>
+        <p:nvSpPr>
           <p:cNvPr id="109" name="Rectangle 108"/>
           <p:cNvSpPr/>
           <p:nvPr/>
         </p:nvSpPr>
         <p:spPr>
           <a:xfrm>
-            <a:off x="749808" y="4919472"/>
-            <a:ext cx="50292" cy="1170432"/>
+            <a:off x="2441448" y="3877056"/>
+            <a:ext cx="914400" cy="356616"/>
+          </a:xfrm>
+          <a:prstGeom prst="rect">
+            <a:avLst/>
+          </a:prstGeom>
+          <a:solidFill>
+            <a:srgbClr val="F1F5F9"/>
+          </a:solidFill>
+          <a:ln w="9525">
+            <a:solidFill>
+              <a:srgbClr val="CBD5E1"/>
+            </a:solidFill>
+          </a:ln>
+        </p:spPr>
+        <p:style>
+          <a:lnRef idx="1">
+            <a:schemeClr val="accent1"/>
+          </a:lnRef>
+          <a:fillRef idx="3">
+            <a:schemeClr val="accent1"/>
+          </a:fillRef>
+          <a:effectRef idx="2">
+            <a:schemeClr val="accent1"/>
+          </a:effectRef>
+          <a:fontRef idx="minor">
+            <a:schemeClr val="lt1"/>
+          </a:fontRef>
+        </p:style>
+        <p:txBody>
+          <a:bodyPr rtlCol="0" anchor="ctr"/>
+          <a:lstStyle/>
+          <a:p>
+            <a:pPr algn="ctr"/>
+          </a:p>
+        </p:txBody>
+      </p:sp>
+      <p:sp>
+        <p:nvSpPr>
+          <p:cNvPr id="110" name="TextBox 109"/>
+          <p:cNvSpPr txBox="1"/>
+          <p:nvPr/>
+        </p:nvSpPr>
+        <p:spPr>
+          <a:xfrm>
+            <a:off x="2487168" y="3931920"/>
+            <a:ext cx="822960" cy="246888"/>
+          </a:xfrm>
+          <a:prstGeom prst="rect">
+            <a:avLst/>
+          </a:prstGeom>
+          <a:noFill/>
+        </p:spPr>
+        <p:txBody>
+          <a:bodyPr wrap="square" lIns="27432" rIns="27432" tIns="9144" bIns="9144" anchor="ctr">
+            <a:spAutoFit/>
+          </a:bodyPr>
+          <a:lstStyle/>
+          <a:p>
+            <a:pPr algn="ctr">
+              <a:defRPr sz="1200" b="1">
+                <a:solidFill>
+                  <a:srgbClr val="198754"/>
+                </a:solidFill>
+                <a:latin typeface="Microsoft YaHei"/>
+              </a:defRPr>
+            </a:pPr>
+            <a:r>
+              <a:rPr sz="1200" b="1">
+                <a:solidFill>
+                  <a:srgbClr val="198754"/>
+                </a:solidFill>
+                <a:latin typeface="Microsoft YaHei"/>
+              </a:rPr>
+              <a:t>●</a:t>
+            </a:r>
+          </a:p>
+        </p:txBody>
+      </p:sp>
+      <p:sp>
+        <p:nvSpPr>
+          <p:cNvPr id="111" name="Rectangle 110"/>
+          <p:cNvSpPr/>
+          <p:nvPr/>
+        </p:nvSpPr>
+        <p:spPr>
+          <a:xfrm>
+            <a:off x="3355848" y="3877056"/>
+            <a:ext cx="822960" cy="356616"/>
+          </a:xfrm>
+          <a:prstGeom prst="rect">
+            <a:avLst/>
+          </a:prstGeom>
+          <a:solidFill>
+            <a:srgbClr val="F1F5F9"/>
+          </a:solidFill>
+          <a:ln w="9525">
+            <a:solidFill>
+              <a:srgbClr val="CBD5E1"/>
+            </a:solidFill>
+          </a:ln>
+        </p:spPr>
+        <p:style>
+          <a:lnRef idx="1">
+            <a:schemeClr val="accent1"/>
+          </a:lnRef>
+          <a:fillRef idx="3">
+            <a:schemeClr val="accent1"/>
+          </a:fillRef>
+          <a:effectRef idx="2">
+            <a:schemeClr val="accent1"/>
+          </a:effectRef>
+          <a:fontRef idx="minor">
+            <a:schemeClr val="lt1"/>
+          </a:fontRef>
+        </p:style>
+        <p:txBody>
+          <a:bodyPr rtlCol="0" anchor="ctr"/>
+          <a:lstStyle/>
+          <a:p>
+            <a:pPr algn="ctr"/>
+          </a:p>
+        </p:txBody>
+      </p:sp>
+      <p:sp>
+        <p:nvSpPr>
+          <p:cNvPr id="112" name="TextBox 111"/>
+          <p:cNvSpPr txBox="1"/>
+          <p:nvPr/>
+        </p:nvSpPr>
+        <p:spPr>
+          <a:xfrm>
+            <a:off x="3401568" y="3931920"/>
+            <a:ext cx="731520" cy="246888"/>
+          </a:xfrm>
+          <a:prstGeom prst="rect">
+            <a:avLst/>
+          </a:prstGeom>
+          <a:noFill/>
+        </p:spPr>
+        <p:txBody>
+          <a:bodyPr wrap="square" lIns="27432" rIns="27432" tIns="9144" bIns="9144" anchor="ctr">
+            <a:spAutoFit/>
+          </a:bodyPr>
+          <a:lstStyle/>
+          <a:p>
+            <a:pPr algn="ctr">
+              <a:defRPr sz="1200" b="1">
+                <a:solidFill>
+                  <a:srgbClr val="BE123C"/>
+                </a:solidFill>
+                <a:latin typeface="Microsoft YaHei"/>
+              </a:defRPr>
+            </a:pPr>
+            <a:r>
+              <a:rPr sz="1200" b="1">
+                <a:solidFill>
+                  <a:srgbClr val="BE123C"/>
+                </a:solidFill>
+                <a:latin typeface="Microsoft YaHei"/>
+              </a:rPr>
+              <a:t>×</a:t>
+            </a:r>
+          </a:p>
+        </p:txBody>
+      </p:sp>
+      <p:sp>
+        <p:nvSpPr>
+          <p:cNvPr id="113" name="Rectangle 112"/>
+          <p:cNvSpPr/>
+          <p:nvPr/>
+        </p:nvSpPr>
+        <p:spPr>
+          <a:xfrm>
+            <a:off x="4178808" y="3877056"/>
+            <a:ext cx="868680" cy="356616"/>
+          </a:xfrm>
+          <a:prstGeom prst="rect">
+            <a:avLst/>
+          </a:prstGeom>
+          <a:solidFill>
+            <a:srgbClr val="F1F5F9"/>
+          </a:solidFill>
+          <a:ln w="9525">
+            <a:solidFill>
+              <a:srgbClr val="CBD5E1"/>
+            </a:solidFill>
+          </a:ln>
+        </p:spPr>
+        <p:style>
+          <a:lnRef idx="1">
+            <a:schemeClr val="accent1"/>
+          </a:lnRef>
+          <a:fillRef idx="3">
+            <a:schemeClr val="accent1"/>
+          </a:fillRef>
+          <a:effectRef idx="2">
+            <a:schemeClr val="accent1"/>
+          </a:effectRef>
+          <a:fontRef idx="minor">
+            <a:schemeClr val="lt1"/>
+          </a:fontRef>
+        </p:style>
+        <p:txBody>
+          <a:bodyPr rtlCol="0" anchor="ctr"/>
+          <a:lstStyle/>
+          <a:p>
+            <a:pPr algn="ctr"/>
+          </a:p>
+        </p:txBody>
+      </p:sp>
+      <p:sp>
+        <p:nvSpPr>
+          <p:cNvPr id="114" name="TextBox 113"/>
+          <p:cNvSpPr txBox="1"/>
+          <p:nvPr/>
+        </p:nvSpPr>
+        <p:spPr>
+          <a:xfrm>
+            <a:off x="4224528" y="3931920"/>
+            <a:ext cx="777240" cy="246888"/>
+          </a:xfrm>
+          <a:prstGeom prst="rect">
+            <a:avLst/>
+          </a:prstGeom>
+          <a:noFill/>
+        </p:spPr>
+        <p:txBody>
+          <a:bodyPr wrap="square" lIns="27432" rIns="27432" tIns="9144" bIns="9144" anchor="ctr">
+            <a:spAutoFit/>
+          </a:bodyPr>
+          <a:lstStyle/>
+          <a:p>
+            <a:pPr algn="ctr">
+              <a:defRPr sz="1200" b="1">
+                <a:solidFill>
+                  <a:srgbClr val="BE123C"/>
+                </a:solidFill>
+                <a:latin typeface="Microsoft YaHei"/>
+              </a:defRPr>
+            </a:pPr>
+            <a:r>
+              <a:rPr sz="1200" b="1">
+                <a:solidFill>
+                  <a:srgbClr val="BE123C"/>
+                </a:solidFill>
+                <a:latin typeface="Microsoft YaHei"/>
+              </a:rPr>
+              <a:t>×</a:t>
+            </a:r>
+          </a:p>
+        </p:txBody>
+      </p:sp>
+      <p:sp>
+        <p:nvSpPr>
+          <p:cNvPr id="115" name="Rectangle 114"/>
+          <p:cNvSpPr/>
+          <p:nvPr/>
+        </p:nvSpPr>
+        <p:spPr>
+          <a:xfrm>
+            <a:off x="5047488" y="3877056"/>
+            <a:ext cx="4389120" cy="356616"/>
+          </a:xfrm>
+          <a:prstGeom prst="rect">
+            <a:avLst/>
+          </a:prstGeom>
+          <a:solidFill>
+            <a:srgbClr val="F1F5F9"/>
+          </a:solidFill>
+          <a:ln w="9525">
+            <a:solidFill>
+              <a:srgbClr val="CBD5E1"/>
+            </a:solidFill>
+          </a:ln>
+        </p:spPr>
+        <p:style>
+          <a:lnRef idx="1">
+            <a:schemeClr val="accent1"/>
+          </a:lnRef>
+          <a:fillRef idx="3">
+            <a:schemeClr val="accent1"/>
+          </a:fillRef>
+          <a:effectRef idx="2">
+            <a:schemeClr val="accent1"/>
+          </a:effectRef>
+          <a:fontRef idx="minor">
+            <a:schemeClr val="lt1"/>
+          </a:fontRef>
+        </p:style>
+        <p:txBody>
+          <a:bodyPr rtlCol="0" anchor="ctr"/>
+          <a:lstStyle/>
+          <a:p>
+            <a:pPr algn="ctr"/>
+          </a:p>
+        </p:txBody>
+      </p:sp>
+      <p:sp>
+        <p:nvSpPr>
+          <p:cNvPr id="116" name="TextBox 115"/>
+          <p:cNvSpPr txBox="1"/>
+          <p:nvPr/>
+        </p:nvSpPr>
+        <p:spPr>
+          <a:xfrm>
+            <a:off x="5102351" y="3931920"/>
+            <a:ext cx="4279392" cy="246888"/>
+          </a:xfrm>
+          <a:prstGeom prst="rect">
+            <a:avLst/>
+          </a:prstGeom>
+          <a:noFill/>
+        </p:spPr>
+        <p:txBody>
+          <a:bodyPr wrap="square" lIns="27432" rIns="27432" tIns="9144" bIns="9144" anchor="ctr">
+            <a:spAutoFit/>
+          </a:bodyPr>
+          <a:lstStyle/>
+          <a:p>
+            <a:pPr algn="l">
+              <a:defRPr sz="1050" b="0">
+                <a:solidFill>
+                  <a:srgbClr val="0F172A"/>
+                </a:solidFill>
+                <a:latin typeface="Microsoft YaHei"/>
+              </a:defRPr>
+            </a:pPr>
+            <a:r>
+              <a:rPr sz="1050" b="0">
+                <a:solidFill>
+                  <a:srgbClr val="0F172A"/>
+                </a:solidFill>
+                <a:latin typeface="Microsoft YaHei"/>
+              </a:rPr>
+              <a:t>随机 pressure 对照</a:t>
+            </a:r>
+          </a:p>
+        </p:txBody>
+      </p:sp>
+      <p:sp>
+        <p:nvSpPr>
+          <p:cNvPr id="117" name="Rectangle 116"/>
+          <p:cNvSpPr/>
+          <p:nvPr/>
+        </p:nvSpPr>
+        <p:spPr>
+          <a:xfrm>
+            <a:off x="9436607" y="3877056"/>
+            <a:ext cx="685800" cy="356616"/>
+          </a:xfrm>
+          <a:prstGeom prst="rect">
+            <a:avLst/>
+          </a:prstGeom>
+          <a:solidFill>
+            <a:srgbClr val="F1F5F9"/>
+          </a:solidFill>
+          <a:ln w="9525">
+            <a:solidFill>
+              <a:srgbClr val="CBD5E1"/>
+            </a:solidFill>
+          </a:ln>
+        </p:spPr>
+        <p:style>
+          <a:lnRef idx="1">
+            <a:schemeClr val="accent1"/>
+          </a:lnRef>
+          <a:fillRef idx="3">
+            <a:schemeClr val="accent1"/>
+          </a:fillRef>
+          <a:effectRef idx="2">
+            <a:schemeClr val="accent1"/>
+          </a:effectRef>
+          <a:fontRef idx="minor">
+            <a:schemeClr val="lt1"/>
+          </a:fontRef>
+        </p:style>
+        <p:txBody>
+          <a:bodyPr rtlCol="0" anchor="ctr"/>
+          <a:lstStyle/>
+          <a:p>
+            <a:pPr algn="ctr"/>
+          </a:p>
+        </p:txBody>
+      </p:sp>
+      <p:sp>
+        <p:nvSpPr>
+          <p:cNvPr id="118" name="TextBox 117"/>
+          <p:cNvSpPr txBox="1"/>
+          <p:nvPr/>
+        </p:nvSpPr>
+        <p:spPr>
+          <a:xfrm>
+            <a:off x="9491472" y="3931920"/>
+            <a:ext cx="576072" cy="246888"/>
+          </a:xfrm>
+          <a:prstGeom prst="rect">
+            <a:avLst/>
+          </a:prstGeom>
+          <a:noFill/>
+        </p:spPr>
+        <p:txBody>
+          <a:bodyPr wrap="square" lIns="27432" rIns="27432" tIns="9144" bIns="9144" anchor="ctr">
+            <a:spAutoFit/>
+          </a:bodyPr>
+          <a:lstStyle/>
+          <a:p>
+            <a:pPr algn="r">
+              <a:defRPr sz="1050" b="0">
+                <a:solidFill>
+                  <a:srgbClr val="0F172A"/>
+                </a:solidFill>
+                <a:latin typeface="Microsoft YaHei"/>
+              </a:defRPr>
+            </a:pPr>
+            <a:r>
+              <a:rPr sz="1050" b="0">
+                <a:solidFill>
+                  <a:srgbClr val="0F172A"/>
+                </a:solidFill>
+                <a:latin typeface="Microsoft YaHei"/>
+              </a:rPr>
+              <a:t>2.65</a:t>
+            </a:r>
+          </a:p>
+        </p:txBody>
+      </p:sp>
+      <p:sp>
+        <p:nvSpPr>
+          <p:cNvPr id="119" name="Rectangle 118"/>
+          <p:cNvSpPr/>
+          <p:nvPr/>
+        </p:nvSpPr>
+        <p:spPr>
+          <a:xfrm>
+            <a:off x="475488" y="4233672"/>
+            <a:ext cx="1965960" cy="356616"/>
+          </a:xfrm>
+          <a:prstGeom prst="rect">
+            <a:avLst/>
+          </a:prstGeom>
+          <a:solidFill>
+            <a:srgbClr val="F8FAFC"/>
+          </a:solidFill>
+          <a:ln w="9525">
+            <a:solidFill>
+              <a:srgbClr val="CBD5E1"/>
+            </a:solidFill>
+          </a:ln>
+        </p:spPr>
+        <p:style>
+          <a:lnRef idx="1">
+            <a:schemeClr val="accent1"/>
+          </a:lnRef>
+          <a:fillRef idx="3">
+            <a:schemeClr val="accent1"/>
+          </a:fillRef>
+          <a:effectRef idx="2">
+            <a:schemeClr val="accent1"/>
+          </a:effectRef>
+          <a:fontRef idx="minor">
+            <a:schemeClr val="lt1"/>
+          </a:fontRef>
+        </p:style>
+        <p:txBody>
+          <a:bodyPr rtlCol="0" anchor="ctr"/>
+          <a:lstStyle/>
+          <a:p>
+            <a:pPr algn="ctr"/>
+          </a:p>
+        </p:txBody>
+      </p:sp>
+      <p:sp>
+        <p:nvSpPr>
+          <p:cNvPr id="120" name="TextBox 119"/>
+          <p:cNvSpPr txBox="1"/>
+          <p:nvPr/>
+        </p:nvSpPr>
+        <p:spPr>
+          <a:xfrm>
+            <a:off x="530352" y="4288536"/>
+            <a:ext cx="1856231" cy="246888"/>
+          </a:xfrm>
+          <a:prstGeom prst="rect">
+            <a:avLst/>
+          </a:prstGeom>
+          <a:noFill/>
+        </p:spPr>
+        <p:txBody>
+          <a:bodyPr wrap="square" lIns="27432" rIns="27432" tIns="9144" bIns="9144" anchor="ctr">
+            <a:spAutoFit/>
+          </a:bodyPr>
+          <a:lstStyle/>
+          <a:p>
+            <a:pPr algn="l">
+              <a:defRPr sz="1050" b="1">
+                <a:solidFill>
+                  <a:srgbClr val="0F172A"/>
+                </a:solidFill>
+                <a:latin typeface="Microsoft YaHei"/>
+              </a:defRPr>
+            </a:pPr>
+            <a:r>
+              <a:rPr sz="1050" b="1">
+                <a:solidFill>
+                  <a:srgbClr val="0F172A"/>
+                </a:solidFill>
+                <a:latin typeface="Microsoft YaHei"/>
+              </a:rPr>
+              <a:t>Hybrid gated</a:t>
+            </a:r>
+          </a:p>
+        </p:txBody>
+      </p:sp>
+      <p:sp>
+        <p:nvSpPr>
+          <p:cNvPr id="121" name="Rectangle 120"/>
+          <p:cNvSpPr/>
+          <p:nvPr/>
+        </p:nvSpPr>
+        <p:spPr>
+          <a:xfrm>
+            <a:off x="2441448" y="4233672"/>
+            <a:ext cx="914400" cy="356616"/>
+          </a:xfrm>
+          <a:prstGeom prst="rect">
+            <a:avLst/>
+          </a:prstGeom>
+          <a:solidFill>
+            <a:srgbClr val="F8FAFC"/>
+          </a:solidFill>
+          <a:ln w="9525">
+            <a:solidFill>
+              <a:srgbClr val="CBD5E1"/>
+            </a:solidFill>
+          </a:ln>
+        </p:spPr>
+        <p:style>
+          <a:lnRef idx="1">
+            <a:schemeClr val="accent1"/>
+          </a:lnRef>
+          <a:fillRef idx="3">
+            <a:schemeClr val="accent1"/>
+          </a:fillRef>
+          <a:effectRef idx="2">
+            <a:schemeClr val="accent1"/>
+          </a:effectRef>
+          <a:fontRef idx="minor">
+            <a:schemeClr val="lt1"/>
+          </a:fontRef>
+        </p:style>
+        <p:txBody>
+          <a:bodyPr rtlCol="0" anchor="ctr"/>
+          <a:lstStyle/>
+          <a:p>
+            <a:pPr algn="ctr"/>
+          </a:p>
+        </p:txBody>
+      </p:sp>
+      <p:sp>
+        <p:nvSpPr>
+          <p:cNvPr id="122" name="TextBox 121"/>
+          <p:cNvSpPr txBox="1"/>
+          <p:nvPr/>
+        </p:nvSpPr>
+        <p:spPr>
+          <a:xfrm>
+            <a:off x="2487168" y="4288536"/>
+            <a:ext cx="822960" cy="246888"/>
+          </a:xfrm>
+          <a:prstGeom prst="rect">
+            <a:avLst/>
+          </a:prstGeom>
+          <a:noFill/>
+        </p:spPr>
+        <p:txBody>
+          <a:bodyPr wrap="square" lIns="27432" rIns="27432" tIns="9144" bIns="9144" anchor="ctr">
+            <a:spAutoFit/>
+          </a:bodyPr>
+          <a:lstStyle/>
+          <a:p>
+            <a:pPr algn="ctr">
+              <a:defRPr sz="1200" b="1">
+                <a:solidFill>
+                  <a:srgbClr val="198754"/>
+                </a:solidFill>
+                <a:latin typeface="Microsoft YaHei"/>
+              </a:defRPr>
+            </a:pPr>
+            <a:r>
+              <a:rPr sz="1200" b="1">
+                <a:solidFill>
+                  <a:srgbClr val="198754"/>
+                </a:solidFill>
+                <a:latin typeface="Microsoft YaHei"/>
+              </a:rPr>
+              <a:t>●</a:t>
+            </a:r>
+          </a:p>
+        </p:txBody>
+      </p:sp>
+      <p:sp>
+        <p:nvSpPr>
+          <p:cNvPr id="123" name="Rectangle 122"/>
+          <p:cNvSpPr/>
+          <p:nvPr/>
+        </p:nvSpPr>
+        <p:spPr>
+          <a:xfrm>
+            <a:off x="3355848" y="4233672"/>
+            <a:ext cx="822960" cy="356616"/>
+          </a:xfrm>
+          <a:prstGeom prst="rect">
+            <a:avLst/>
+          </a:prstGeom>
+          <a:solidFill>
+            <a:srgbClr val="F8FAFC"/>
+          </a:solidFill>
+          <a:ln w="9525">
+            <a:solidFill>
+              <a:srgbClr val="CBD5E1"/>
+            </a:solidFill>
+          </a:ln>
+        </p:spPr>
+        <p:style>
+          <a:lnRef idx="1">
+            <a:schemeClr val="accent1"/>
+          </a:lnRef>
+          <a:fillRef idx="3">
+            <a:schemeClr val="accent1"/>
+          </a:fillRef>
+          <a:effectRef idx="2">
+            <a:schemeClr val="accent1"/>
+          </a:effectRef>
+          <a:fontRef idx="minor">
+            <a:schemeClr val="lt1"/>
+          </a:fontRef>
+        </p:style>
+        <p:txBody>
+          <a:bodyPr rtlCol="0" anchor="ctr"/>
+          <a:lstStyle/>
+          <a:p>
+            <a:pPr algn="ctr"/>
+          </a:p>
+        </p:txBody>
+      </p:sp>
+      <p:sp>
+        <p:nvSpPr>
+          <p:cNvPr id="124" name="TextBox 123"/>
+          <p:cNvSpPr txBox="1"/>
+          <p:nvPr/>
+        </p:nvSpPr>
+        <p:spPr>
+          <a:xfrm>
+            <a:off x="3401568" y="4288536"/>
+            <a:ext cx="731520" cy="246888"/>
+          </a:xfrm>
+          <a:prstGeom prst="rect">
+            <a:avLst/>
+          </a:prstGeom>
+          <a:noFill/>
+        </p:spPr>
+        <p:txBody>
+          <a:bodyPr wrap="square" lIns="27432" rIns="27432" tIns="9144" bIns="9144" anchor="ctr">
+            <a:spAutoFit/>
+          </a:bodyPr>
+          <a:lstStyle/>
+          <a:p>
+            <a:pPr algn="ctr">
+              <a:defRPr sz="1200" b="1">
+                <a:solidFill>
+                  <a:srgbClr val="198754"/>
+                </a:solidFill>
+                <a:latin typeface="Microsoft YaHei"/>
+              </a:defRPr>
+            </a:pPr>
+            <a:r>
+              <a:rPr sz="1200" b="1">
+                <a:solidFill>
+                  <a:srgbClr val="198754"/>
+                </a:solidFill>
+                <a:latin typeface="Microsoft YaHei"/>
+              </a:rPr>
+              <a:t>●</a:t>
+            </a:r>
+          </a:p>
+        </p:txBody>
+      </p:sp>
+      <p:sp>
+        <p:nvSpPr>
+          <p:cNvPr id="125" name="Rectangle 124"/>
+          <p:cNvSpPr/>
+          <p:nvPr/>
+        </p:nvSpPr>
+        <p:spPr>
+          <a:xfrm>
+            <a:off x="4178808" y="4233672"/>
+            <a:ext cx="868680" cy="356616"/>
+          </a:xfrm>
+          <a:prstGeom prst="rect">
+            <a:avLst/>
+          </a:prstGeom>
+          <a:solidFill>
+            <a:srgbClr val="F8FAFC"/>
+          </a:solidFill>
+          <a:ln w="9525">
+            <a:solidFill>
+              <a:srgbClr val="CBD5E1"/>
+            </a:solidFill>
+          </a:ln>
+        </p:spPr>
+        <p:style>
+          <a:lnRef idx="1">
+            <a:schemeClr val="accent1"/>
+          </a:lnRef>
+          <a:fillRef idx="3">
+            <a:schemeClr val="accent1"/>
+          </a:fillRef>
+          <a:effectRef idx="2">
+            <a:schemeClr val="accent1"/>
+          </a:effectRef>
+          <a:fontRef idx="minor">
+            <a:schemeClr val="lt1"/>
+          </a:fontRef>
+        </p:style>
+        <p:txBody>
+          <a:bodyPr rtlCol="0" anchor="ctr"/>
+          <a:lstStyle/>
+          <a:p>
+            <a:pPr algn="ctr"/>
+          </a:p>
+        </p:txBody>
+      </p:sp>
+      <p:sp>
+        <p:nvSpPr>
+          <p:cNvPr id="126" name="TextBox 125"/>
+          <p:cNvSpPr txBox="1"/>
+          <p:nvPr/>
+        </p:nvSpPr>
+        <p:spPr>
+          <a:xfrm>
+            <a:off x="4224528" y="4288536"/>
+            <a:ext cx="777240" cy="246888"/>
+          </a:xfrm>
+          <a:prstGeom prst="rect">
+            <a:avLst/>
+          </a:prstGeom>
+          <a:noFill/>
+        </p:spPr>
+        <p:txBody>
+          <a:bodyPr wrap="square" lIns="27432" rIns="27432" tIns="9144" bIns="9144" anchor="ctr">
+            <a:spAutoFit/>
+          </a:bodyPr>
+          <a:lstStyle/>
+          <a:p>
+            <a:pPr algn="ctr">
+              <a:defRPr sz="1200" b="1">
+                <a:solidFill>
+                  <a:srgbClr val="BE123C"/>
+                </a:solidFill>
+                <a:latin typeface="Microsoft YaHei"/>
+              </a:defRPr>
+            </a:pPr>
+            <a:r>
+              <a:rPr sz="1200" b="1">
+                <a:solidFill>
+                  <a:srgbClr val="BE123C"/>
+                </a:solidFill>
+                <a:latin typeface="Microsoft YaHei"/>
+              </a:rPr>
+              <a:t>×</a:t>
+            </a:r>
+          </a:p>
+        </p:txBody>
+      </p:sp>
+      <p:sp>
+        <p:nvSpPr>
+          <p:cNvPr id="127" name="Rectangle 126"/>
+          <p:cNvSpPr/>
+          <p:nvPr/>
+        </p:nvSpPr>
+        <p:spPr>
+          <a:xfrm>
+            <a:off x="5047488" y="4233672"/>
+            <a:ext cx="4389120" cy="356616"/>
+          </a:xfrm>
+          <a:prstGeom prst="rect">
+            <a:avLst/>
+          </a:prstGeom>
+          <a:solidFill>
+            <a:srgbClr val="F8FAFC"/>
+          </a:solidFill>
+          <a:ln w="9525">
+            <a:solidFill>
+              <a:srgbClr val="CBD5E1"/>
+            </a:solidFill>
+          </a:ln>
+        </p:spPr>
+        <p:style>
+          <a:lnRef idx="1">
+            <a:schemeClr val="accent1"/>
+          </a:lnRef>
+          <a:fillRef idx="3">
+            <a:schemeClr val="accent1"/>
+          </a:fillRef>
+          <a:effectRef idx="2">
+            <a:schemeClr val="accent1"/>
+          </a:effectRef>
+          <a:fontRef idx="minor">
+            <a:schemeClr val="lt1"/>
+          </a:fontRef>
+        </p:style>
+        <p:txBody>
+          <a:bodyPr rtlCol="0" anchor="ctr"/>
+          <a:lstStyle/>
+          <a:p>
+            <a:pPr algn="ctr"/>
+          </a:p>
+        </p:txBody>
+      </p:sp>
+      <p:sp>
+        <p:nvSpPr>
+          <p:cNvPr id="128" name="TextBox 127"/>
+          <p:cNvSpPr txBox="1"/>
+          <p:nvPr/>
+        </p:nvSpPr>
+        <p:spPr>
+          <a:xfrm>
+            <a:off x="5102351" y="4288536"/>
+            <a:ext cx="4279392" cy="246888"/>
+          </a:xfrm>
+          <a:prstGeom prst="rect">
+            <a:avLst/>
+          </a:prstGeom>
+          <a:noFill/>
+        </p:spPr>
+        <p:txBody>
+          <a:bodyPr wrap="square" lIns="27432" rIns="27432" tIns="9144" bIns="9144" anchor="ctr">
+            <a:spAutoFit/>
+          </a:bodyPr>
+          <a:lstStyle/>
+          <a:p>
+            <a:pPr algn="l">
+              <a:defRPr sz="1050" b="1">
+                <a:solidFill>
+                  <a:srgbClr val="0F172A"/>
+                </a:solidFill>
+                <a:latin typeface="Microsoft YaHei"/>
+              </a:defRPr>
+            </a:pPr>
+            <a:r>
+              <a:rPr sz="1050" b="1">
+                <a:solidFill>
+                  <a:srgbClr val="0F172A"/>
+                </a:solidFill>
+                <a:latin typeface="Microsoft YaHei"/>
+              </a:rPr>
+              <a:t>历史基线 × LLM 事件折减</a:t>
+            </a:r>
+          </a:p>
+        </p:txBody>
+      </p:sp>
+      <p:sp>
+        <p:nvSpPr>
+          <p:cNvPr id="129" name="Rectangle 128"/>
+          <p:cNvSpPr/>
+          <p:nvPr/>
+        </p:nvSpPr>
+        <p:spPr>
+          <a:xfrm>
+            <a:off x="9436607" y="4233672"/>
+            <a:ext cx="685800" cy="356616"/>
+          </a:xfrm>
+          <a:prstGeom prst="rect">
+            <a:avLst/>
+          </a:prstGeom>
+          <a:solidFill>
+            <a:srgbClr val="F8FAFC"/>
+          </a:solidFill>
+          <a:ln w="9525">
+            <a:solidFill>
+              <a:srgbClr val="CBD5E1"/>
+            </a:solidFill>
+          </a:ln>
+        </p:spPr>
+        <p:style>
+          <a:lnRef idx="1">
+            <a:schemeClr val="accent1"/>
+          </a:lnRef>
+          <a:fillRef idx="3">
+            <a:schemeClr val="accent1"/>
+          </a:fillRef>
+          <a:effectRef idx="2">
+            <a:schemeClr val="accent1"/>
+          </a:effectRef>
+          <a:fontRef idx="minor">
+            <a:schemeClr val="lt1"/>
+          </a:fontRef>
+        </p:style>
+        <p:txBody>
+          <a:bodyPr rtlCol="0" anchor="ctr"/>
+          <a:lstStyle/>
+          <a:p>
+            <a:pPr algn="ctr"/>
+          </a:p>
+        </p:txBody>
+      </p:sp>
+      <p:sp>
+        <p:nvSpPr>
+          <p:cNvPr id="130" name="TextBox 129"/>
+          <p:cNvSpPr txBox="1"/>
+          <p:nvPr/>
+        </p:nvSpPr>
+        <p:spPr>
+          <a:xfrm>
+            <a:off x="9491472" y="4288536"/>
+            <a:ext cx="576072" cy="246888"/>
+          </a:xfrm>
+          <a:prstGeom prst="rect">
+            <a:avLst/>
+          </a:prstGeom>
+          <a:noFill/>
+        </p:spPr>
+        <p:txBody>
+          <a:bodyPr wrap="square" lIns="27432" rIns="27432" tIns="9144" bIns="9144" anchor="ctr">
+            <a:spAutoFit/>
+          </a:bodyPr>
+          <a:lstStyle/>
+          <a:p>
+            <a:pPr algn="r">
+              <a:defRPr sz="1050" b="1">
+                <a:solidFill>
+                  <a:srgbClr val="0F172A"/>
+                </a:solidFill>
+                <a:latin typeface="Microsoft YaHei"/>
+              </a:defRPr>
+            </a:pPr>
+            <a:r>
+              <a:rPr sz="1050" b="1">
+                <a:solidFill>
+                  <a:srgbClr val="0F172A"/>
+                </a:solidFill>
+                <a:latin typeface="Microsoft YaHei"/>
+              </a:rPr>
+              <a:t>2.50</a:t>
+            </a:r>
+          </a:p>
+        </p:txBody>
+      </p:sp>
+      <p:sp>
+        <p:nvSpPr>
+          <p:cNvPr id="131" name="TextBox 130"/>
+          <p:cNvSpPr txBox="1"/>
+          <p:nvPr/>
+        </p:nvSpPr>
+        <p:spPr>
+          <a:xfrm>
+            <a:off x="594360" y="4736592"/>
+            <a:ext cx="3383280" cy="219456"/>
+          </a:xfrm>
+          <a:prstGeom prst="rect">
+            <a:avLst/>
+          </a:prstGeom>
+          <a:noFill/>
+        </p:spPr>
+        <p:txBody>
+          <a:bodyPr wrap="square" lIns="27432" rIns="27432" tIns="9144" bIns="9144" anchor="ctr">
+            <a:spAutoFit/>
+          </a:bodyPr>
+          <a:lstStyle/>
+          <a:p>
+            <a:pPr algn="l">
+              <a:defRPr sz="1200" b="1">
+                <a:solidFill>
+                  <a:srgbClr val="64748B"/>
+                </a:solidFill>
+                <a:latin typeface="Microsoft YaHei"/>
+              </a:defRPr>
+            </a:pPr>
+            <a:r>
+              <a:rPr sz="1200" b="1">
+                <a:solidFill>
+                  <a:srgbClr val="64748B"/>
+                </a:solidFill>
+                <a:latin typeface="Microsoft YaHei"/>
+              </a:rPr>
+              <a:t>● 使用 / used    × 不使用 / not used</a:t>
+            </a:r>
+          </a:p>
+        </p:txBody>
+      </p:sp>
+      <p:sp>
+        <p:nvSpPr>
+          <p:cNvPr id="132" name="Rounded Rectangle 131"/>
+          <p:cNvSpPr/>
+          <p:nvPr/>
+        </p:nvSpPr>
+        <p:spPr>
+          <a:xfrm>
+            <a:off x="749808" y="4983480"/>
+            <a:ext cx="10012680" cy="1042415"/>
+          </a:xfrm>
+          <a:prstGeom prst="roundRect">
+            <a:avLst/>
+          </a:prstGeom>
+          <a:solidFill>
+            <a:srgbClr val="F1F5F9"/>
+          </a:solidFill>
+          <a:ln w="9525">
+            <a:solidFill>
+              <a:srgbClr val="CBD5E1"/>
+            </a:solidFill>
+          </a:ln>
+        </p:spPr>
+        <p:style>
+          <a:lnRef idx="1">
+            <a:schemeClr val="accent1"/>
+          </a:lnRef>
+          <a:fillRef idx="3">
+            <a:schemeClr val="accent1"/>
+          </a:fillRef>
+          <a:effectRef idx="2">
+            <a:schemeClr val="accent1"/>
+          </a:effectRef>
+          <a:fontRef idx="minor">
+            <a:schemeClr val="lt1"/>
+          </a:fontRef>
+        </p:style>
+        <p:txBody>
+          <a:bodyPr rtlCol="0" anchor="ctr"/>
+          <a:lstStyle/>
+          <a:p>
+            <a:pPr algn="ctr"/>
+          </a:p>
+        </p:txBody>
+      </p:sp>
+      <p:sp>
+        <p:nvSpPr>
+          <p:cNvPr id="133" name="Rectangle 132"/>
+          <p:cNvSpPr/>
+          <p:nvPr/>
+        </p:nvSpPr>
+        <p:spPr>
+          <a:xfrm>
+            <a:off x="749808" y="4983480"/>
+            <a:ext cx="50292" cy="1042415"/>
           </a:xfrm>
           <a:prstGeom prst="rect">
             <a:avLst/>
@@ -50398,14 +51442,14 @@
       </p:sp>
       <p:sp>
         <p:nvSpPr>
-          <p:cNvPr id="110" name="TextBox 109"/>
-          <p:cNvSpPr txBox="1"/>
-          <p:nvPr/>
-        </p:nvSpPr>
-        <p:spPr>
-          <a:xfrm>
-            <a:off x="914400" y="5010912"/>
-            <a:ext cx="9720072" cy="420624"/>
+          <p:cNvPr id="134" name="TextBox 133"/>
+          <p:cNvSpPr txBox="1"/>
+          <p:nvPr/>
+        </p:nvSpPr>
+        <p:spPr>
+          <a:xfrm>
+            <a:off x="914400" y="5074920"/>
+            <a:ext cx="9720072" cy="375269"/>
           </a:xfrm>
           <a:prstGeom prst="rect">
             <a:avLst/>
@@ -50433,21 +51477,21 @@
                 </a:solidFill>
                 <a:latin typeface="Microsoft YaHei"/>
               </a:rPr>
-              <a:t>对比逻辑：传统 XGBoost 有 household baseline 但缺少疫情机制；LLM-only 有事件方向但缺少家庭数值基线；hybrid 把两者合在一起。</a:t>
-            </a:r>
-          </a:p>
-        </p:txBody>
-      </p:sp>
-      <p:sp>
-        <p:nvSpPr>
-          <p:cNvPr id="111" name="TextBox 110"/>
-          <p:cNvSpPr txBox="1"/>
-          <p:nvPr/>
-        </p:nvSpPr>
-        <p:spPr>
-          <a:xfrm>
-            <a:off x="914400" y="5495544"/>
-            <a:ext cx="9720072" cy="521208"/>
+              <a:t>对比逻辑：LLM 直接构树能给出事件方向，但缺少历史行为的数值锚点；小样本规则校准仍偏高估。主方法保留 household baseline，再用 LLM 事件先验做无标签修正。</a:t>
+            </a:r>
+          </a:p>
+        </p:txBody>
+      </p:sp>
+      <p:sp>
+        <p:nvSpPr>
+          <p:cNvPr id="135" name="TextBox 134"/>
+          <p:cNvSpPr txBox="1"/>
+          <p:nvPr/>
+        </p:nvSpPr>
+        <p:spPr>
+          <a:xfrm>
+            <a:off x="914400" y="5514197"/>
+            <a:ext cx="9720072" cy="438546"/>
           </a:xfrm>
           <a:prstGeom prst="rect">
             <a:avLst/>
@@ -50475,7 +51519,7 @@
                 </a:solidFill>
                 <a:latin typeface="Microsoft YaHei"/>
               </a:rPr>
-              <a:t>The comparison isolates the value of each component: household grounding from the traditional supervised baseline and event pressure from the LLM.</a:t>
+              <a:t>The comparison isolates household grounding, zero-shot rule priors, small historical calibration, and the final gated event adapter.</a:t>
             </a:r>
           </a:p>
         </p:txBody>
@@ -50876,7 +51920,7 @@
         </p:nvSpPr>
         <p:spPr>
           <a:xfrm>
-            <a:off x="594360" y="1156716"/>
+            <a:off x="594360" y="1101852"/>
             <a:ext cx="2057400" cy="219456"/>
           </a:xfrm>
           <a:prstGeom prst="rect">
@@ -50918,7 +51962,7 @@
         </p:nvSpPr>
         <p:spPr>
           <a:xfrm>
-            <a:off x="2743200" y="1207008"/>
+            <a:off x="2743200" y="1152144"/>
             <a:ext cx="2971800" cy="155448"/>
           </a:xfrm>
           <a:prstGeom prst="rect">
@@ -50961,7 +52005,7 @@
         </p:nvSpPr>
         <p:spPr>
           <a:xfrm>
-            <a:off x="2743200" y="1207008"/>
+            <a:off x="2743200" y="1152144"/>
             <a:ext cx="2729917" cy="155448"/>
           </a:xfrm>
           <a:prstGeom prst="rect">
@@ -51004,7 +52048,7 @@
         </p:nvSpPr>
         <p:spPr>
           <a:xfrm>
-            <a:off x="5806440" y="1152144"/>
+            <a:off x="5806440" y="1097280"/>
             <a:ext cx="502920" cy="219456"/>
           </a:xfrm>
           <a:prstGeom prst="rect">
@@ -51046,7 +52090,7 @@
         </p:nvSpPr>
         <p:spPr>
           <a:xfrm>
-            <a:off x="594360" y="1656588"/>
+            <a:off x="594360" y="1496187"/>
             <a:ext cx="2057400" cy="219456"/>
           </a:xfrm>
           <a:prstGeom prst="rect">
@@ -51088,7 +52132,7 @@
         </p:nvSpPr>
         <p:spPr>
           <a:xfrm>
-            <a:off x="2743200" y="1706880"/>
+            <a:off x="2743200" y="1546479"/>
             <a:ext cx="2971800" cy="155448"/>
           </a:xfrm>
           <a:prstGeom prst="rect">
@@ -51131,7 +52175,7 @@
         </p:nvSpPr>
         <p:spPr>
           <a:xfrm>
-            <a:off x="2743200" y="1706880"/>
+            <a:off x="2743200" y="1546479"/>
             <a:ext cx="2148456" cy="155448"/>
           </a:xfrm>
           <a:prstGeom prst="rect">
@@ -51174,7 +52218,7 @@
         </p:nvSpPr>
         <p:spPr>
           <a:xfrm>
-            <a:off x="5806440" y="1652016"/>
+            <a:off x="5806440" y="1491615"/>
             <a:ext cx="502920" cy="219456"/>
           </a:xfrm>
           <a:prstGeom prst="rect">
@@ -51216,7 +52260,7 @@
         </p:nvSpPr>
         <p:spPr>
           <a:xfrm>
-            <a:off x="594360" y="2156459"/>
+            <a:off x="594360" y="1890522"/>
             <a:ext cx="2057400" cy="219456"/>
           </a:xfrm>
           <a:prstGeom prst="rect">
@@ -51258,7 +52302,7 @@
         </p:nvSpPr>
         <p:spPr>
           <a:xfrm>
-            <a:off x="2743200" y="2206752"/>
+            <a:off x="2743200" y="1940814"/>
             <a:ext cx="2971800" cy="155448"/>
           </a:xfrm>
           <a:prstGeom prst="rect">
@@ -51301,7 +52345,7 @@
         </p:nvSpPr>
         <p:spPr>
           <a:xfrm>
-            <a:off x="2743200" y="2206752"/>
+            <a:off x="2743200" y="1940814"/>
             <a:ext cx="2055717" cy="155448"/>
           </a:xfrm>
           <a:prstGeom prst="rect">
@@ -51344,7 +52388,7 @@
         </p:nvSpPr>
         <p:spPr>
           <a:xfrm>
-            <a:off x="5806440" y="2151887"/>
+            <a:off x="5806440" y="1885950"/>
             <a:ext cx="502920" cy="219456"/>
           </a:xfrm>
           <a:prstGeom prst="rect">
@@ -51386,7 +52430,7 @@
         </p:nvSpPr>
         <p:spPr>
           <a:xfrm>
-            <a:off x="594360" y="2656332"/>
+            <a:off x="594360" y="2284857"/>
             <a:ext cx="2057400" cy="219456"/>
           </a:xfrm>
           <a:prstGeom prst="rect">
@@ -51428,7 +52472,7 @@
         </p:nvSpPr>
         <p:spPr>
           <a:xfrm>
-            <a:off x="2743200" y="2706624"/>
+            <a:off x="2743200" y="2335149"/>
             <a:ext cx="2971800" cy="155448"/>
           </a:xfrm>
           <a:prstGeom prst="rect">
@@ -51471,7 +52515,7 @@
         </p:nvSpPr>
         <p:spPr>
           <a:xfrm>
-            <a:off x="2743200" y="2706624"/>
+            <a:off x="2743200" y="2335149"/>
             <a:ext cx="1345984" cy="155448"/>
           </a:xfrm>
           <a:prstGeom prst="rect">
@@ -51514,7 +52558,7 @@
         </p:nvSpPr>
         <p:spPr>
           <a:xfrm>
-            <a:off x="5806440" y="2651760"/>
+            <a:off x="5806440" y="2280285"/>
             <a:ext cx="502920" cy="219456"/>
           </a:xfrm>
           <a:prstGeom prst="rect">
@@ -51556,7 +52600,7 @@
         </p:nvSpPr>
         <p:spPr>
           <a:xfrm>
-            <a:off x="594360" y="3156204"/>
+            <a:off x="594360" y="2679192"/>
             <a:ext cx="2057400" cy="219456"/>
           </a:xfrm>
           <a:prstGeom prst="rect">
@@ -51585,7 +52629,7 @@
                 </a:solidFill>
                 <a:latin typeface="Microsoft YaHei"/>
               </a:rPr>
-              <a:t>Global event rule</a:t>
+              <a:t>Zero-shot rule tree</a:t>
             </a:r>
           </a:p>
         </p:txBody>
@@ -51598,7 +52642,7 @@
         </p:nvSpPr>
         <p:spPr>
           <a:xfrm>
-            <a:off x="2743200" y="3206496"/>
+            <a:off x="2743200" y="2729484"/>
             <a:ext cx="2971800" cy="155448"/>
           </a:xfrm>
           <a:prstGeom prst="rect">
@@ -51641,7 +52685,347 @@
         </p:nvSpPr>
         <p:spPr>
           <a:xfrm>
-            <a:off x="2743200" y="3206496"/>
+            <a:off x="2743200" y="2729484"/>
+            <a:ext cx="1288744" cy="155448"/>
+          </a:xfrm>
+          <a:prstGeom prst="rect">
+            <a:avLst/>
+          </a:prstGeom>
+          <a:solidFill>
+            <a:srgbClr val="2563EB"/>
+          </a:solidFill>
+          <a:ln>
+            <a:noFill/>
+          </a:ln>
+        </p:spPr>
+        <p:style>
+          <a:lnRef idx="1">
+            <a:schemeClr val="accent1"/>
+          </a:lnRef>
+          <a:fillRef idx="3">
+            <a:schemeClr val="accent1"/>
+          </a:fillRef>
+          <a:effectRef idx="2">
+            <a:schemeClr val="accent1"/>
+          </a:effectRef>
+          <a:fontRef idx="minor">
+            <a:schemeClr val="lt1"/>
+          </a:fontRef>
+        </p:style>
+        <p:txBody>
+          <a:bodyPr rtlCol="0" anchor="ctr"/>
+          <a:lstStyle/>
+          <a:p>
+            <a:pPr algn="ctr"/>
+          </a:p>
+        </p:txBody>
+      </p:sp>
+      <p:sp>
+        <p:nvSpPr>
+          <p:cNvPr id="30" name="TextBox 29"/>
+          <p:cNvSpPr txBox="1"/>
+          <p:nvPr/>
+        </p:nvSpPr>
+        <p:spPr>
+          <a:xfrm>
+            <a:off x="5806440" y="2674620"/>
+            <a:ext cx="502920" cy="219456"/>
+          </a:xfrm>
+          <a:prstGeom prst="rect">
+            <a:avLst/>
+          </a:prstGeom>
+          <a:noFill/>
+        </p:spPr>
+        <p:txBody>
+          <a:bodyPr wrap="square" lIns="27432" rIns="27432" tIns="9144" bIns="9144" anchor="ctr">
+            <a:spAutoFit/>
+          </a:bodyPr>
+          <a:lstStyle/>
+          <a:p>
+            <a:pPr algn="r">
+              <a:defRPr sz="800" b="1">
+                <a:solidFill>
+                  <a:srgbClr val="2563EB"/>
+                </a:solidFill>
+                <a:latin typeface="Microsoft YaHei"/>
+              </a:defRPr>
+            </a:pPr>
+            <a:r>
+              <a:rPr sz="800" b="1">
+                <a:solidFill>
+                  <a:srgbClr val="2563EB"/>
+                </a:solidFill>
+                <a:latin typeface="Microsoft YaHei"/>
+              </a:rPr>
+              <a:t>2.60</a:t>
+            </a:r>
+          </a:p>
+        </p:txBody>
+      </p:sp>
+      <p:sp>
+        <p:nvSpPr>
+          <p:cNvPr id="31" name="TextBox 30"/>
+          <p:cNvSpPr txBox="1"/>
+          <p:nvPr/>
+        </p:nvSpPr>
+        <p:spPr>
+          <a:xfrm>
+            <a:off x="594360" y="3073526"/>
+            <a:ext cx="2057400" cy="219456"/>
+          </a:xfrm>
+          <a:prstGeom prst="rect">
+            <a:avLst/>
+          </a:prstGeom>
+          <a:noFill/>
+        </p:spPr>
+        <p:txBody>
+          <a:bodyPr wrap="square" lIns="27432" rIns="27432" tIns="9144" bIns="9144" anchor="ctr">
+            <a:spAutoFit/>
+          </a:bodyPr>
+          <a:lstStyle/>
+          <a:p>
+            <a:pPr algn="l">
+              <a:defRPr sz="780" b="0">
+                <a:solidFill>
+                  <a:srgbClr val="0F172A"/>
+                </a:solidFill>
+                <a:latin typeface="Microsoft YaHei"/>
+              </a:defRPr>
+            </a:pPr>
+            <a:r>
+              <a:rPr sz="780" b="0">
+                <a:solidFill>
+                  <a:srgbClr val="0F172A"/>
+                </a:solidFill>
+                <a:latin typeface="Microsoft YaHei"/>
+              </a:rPr>
+              <a:t>Rule + 500 history</a:t>
+            </a:r>
+          </a:p>
+        </p:txBody>
+      </p:sp>
+      <p:sp>
+        <p:nvSpPr>
+          <p:cNvPr id="32" name="Rectangle 31"/>
+          <p:cNvSpPr/>
+          <p:nvPr/>
+        </p:nvSpPr>
+        <p:spPr>
+          <a:xfrm>
+            <a:off x="2743200" y="3123819"/>
+            <a:ext cx="2971800" cy="155448"/>
+          </a:xfrm>
+          <a:prstGeom prst="rect">
+            <a:avLst/>
+          </a:prstGeom>
+          <a:solidFill>
+            <a:srgbClr val="E2E8F0"/>
+          </a:solidFill>
+          <a:ln>
+            <a:noFill/>
+          </a:ln>
+        </p:spPr>
+        <p:style>
+          <a:lnRef idx="1">
+            <a:schemeClr val="accent1"/>
+          </a:lnRef>
+          <a:fillRef idx="3">
+            <a:schemeClr val="accent1"/>
+          </a:fillRef>
+          <a:effectRef idx="2">
+            <a:schemeClr val="accent1"/>
+          </a:effectRef>
+          <a:fontRef idx="minor">
+            <a:schemeClr val="lt1"/>
+          </a:fontRef>
+        </p:style>
+        <p:txBody>
+          <a:bodyPr rtlCol="0" anchor="ctr"/>
+          <a:lstStyle/>
+          <a:p>
+            <a:pPr algn="ctr"/>
+          </a:p>
+        </p:txBody>
+      </p:sp>
+      <p:sp>
+        <p:nvSpPr>
+          <p:cNvPr id="33" name="Rectangle 32"/>
+          <p:cNvSpPr/>
+          <p:nvPr/>
+        </p:nvSpPr>
+        <p:spPr>
+          <a:xfrm>
+            <a:off x="2743200" y="3123819"/>
+            <a:ext cx="1373131" cy="155448"/>
+          </a:xfrm>
+          <a:prstGeom prst="rect">
+            <a:avLst/>
+          </a:prstGeom>
+          <a:solidFill>
+            <a:srgbClr val="EA580C"/>
+          </a:solidFill>
+          <a:ln>
+            <a:noFill/>
+          </a:ln>
+        </p:spPr>
+        <p:style>
+          <a:lnRef idx="1">
+            <a:schemeClr val="accent1"/>
+          </a:lnRef>
+          <a:fillRef idx="3">
+            <a:schemeClr val="accent1"/>
+          </a:fillRef>
+          <a:effectRef idx="2">
+            <a:schemeClr val="accent1"/>
+          </a:effectRef>
+          <a:fontRef idx="minor">
+            <a:schemeClr val="lt1"/>
+          </a:fontRef>
+        </p:style>
+        <p:txBody>
+          <a:bodyPr rtlCol="0" anchor="ctr"/>
+          <a:lstStyle/>
+          <a:p>
+            <a:pPr algn="ctr"/>
+          </a:p>
+        </p:txBody>
+      </p:sp>
+      <p:sp>
+        <p:nvSpPr>
+          <p:cNvPr id="34" name="TextBox 33"/>
+          <p:cNvSpPr txBox="1"/>
+          <p:nvPr/>
+        </p:nvSpPr>
+        <p:spPr>
+          <a:xfrm>
+            <a:off x="5806440" y="3068954"/>
+            <a:ext cx="502920" cy="219456"/>
+          </a:xfrm>
+          <a:prstGeom prst="rect">
+            <a:avLst/>
+          </a:prstGeom>
+          <a:noFill/>
+        </p:spPr>
+        <p:txBody>
+          <a:bodyPr wrap="square" lIns="27432" rIns="27432" tIns="9144" bIns="9144" anchor="ctr">
+            <a:spAutoFit/>
+          </a:bodyPr>
+          <a:lstStyle/>
+          <a:p>
+            <a:pPr algn="r">
+              <a:defRPr sz="800" b="1">
+                <a:solidFill>
+                  <a:srgbClr val="EA580C"/>
+                </a:solidFill>
+                <a:latin typeface="Microsoft YaHei"/>
+              </a:defRPr>
+            </a:pPr>
+            <a:r>
+              <a:rPr sz="800" b="1">
+                <a:solidFill>
+                  <a:srgbClr val="EA580C"/>
+                </a:solidFill>
+                <a:latin typeface="Microsoft YaHei"/>
+              </a:rPr>
+              <a:t>2.77</a:t>
+            </a:r>
+          </a:p>
+        </p:txBody>
+      </p:sp>
+      <p:sp>
+        <p:nvSpPr>
+          <p:cNvPr id="35" name="TextBox 34"/>
+          <p:cNvSpPr txBox="1"/>
+          <p:nvPr/>
+        </p:nvSpPr>
+        <p:spPr>
+          <a:xfrm>
+            <a:off x="594360" y="3467862"/>
+            <a:ext cx="2057400" cy="219456"/>
+          </a:xfrm>
+          <a:prstGeom prst="rect">
+            <a:avLst/>
+          </a:prstGeom>
+          <a:noFill/>
+        </p:spPr>
+        <p:txBody>
+          <a:bodyPr wrap="square" lIns="27432" rIns="27432" tIns="9144" bIns="9144" anchor="ctr">
+            <a:spAutoFit/>
+          </a:bodyPr>
+          <a:lstStyle/>
+          <a:p>
+            <a:pPr algn="l">
+              <a:defRPr sz="780" b="0">
+                <a:solidFill>
+                  <a:srgbClr val="0F172A"/>
+                </a:solidFill>
+                <a:latin typeface="Microsoft YaHei"/>
+              </a:defRPr>
+            </a:pPr>
+            <a:r>
+              <a:rPr sz="780" b="0">
+                <a:solidFill>
+                  <a:srgbClr val="0F172A"/>
+                </a:solidFill>
+                <a:latin typeface="Microsoft YaHei"/>
+              </a:rPr>
+              <a:t>Global event rule</a:t>
+            </a:r>
+          </a:p>
+        </p:txBody>
+      </p:sp>
+      <p:sp>
+        <p:nvSpPr>
+          <p:cNvPr id="36" name="Rectangle 35"/>
+          <p:cNvSpPr/>
+          <p:nvPr/>
+        </p:nvSpPr>
+        <p:spPr>
+          <a:xfrm>
+            <a:off x="2743200" y="3518154"/>
+            <a:ext cx="2971800" cy="155448"/>
+          </a:xfrm>
+          <a:prstGeom prst="rect">
+            <a:avLst/>
+          </a:prstGeom>
+          <a:solidFill>
+            <a:srgbClr val="E2E8F0"/>
+          </a:solidFill>
+          <a:ln>
+            <a:noFill/>
+          </a:ln>
+        </p:spPr>
+        <p:style>
+          <a:lnRef idx="1">
+            <a:schemeClr val="accent1"/>
+          </a:lnRef>
+          <a:fillRef idx="3">
+            <a:schemeClr val="accent1"/>
+          </a:fillRef>
+          <a:effectRef idx="2">
+            <a:schemeClr val="accent1"/>
+          </a:effectRef>
+          <a:fontRef idx="minor">
+            <a:schemeClr val="lt1"/>
+          </a:fontRef>
+        </p:style>
+        <p:txBody>
+          <a:bodyPr rtlCol="0" anchor="ctr"/>
+          <a:lstStyle/>
+          <a:p>
+            <a:pPr algn="ctr"/>
+          </a:p>
+        </p:txBody>
+      </p:sp>
+      <p:sp>
+        <p:nvSpPr>
+          <p:cNvPr id="37" name="Rectangle 36"/>
+          <p:cNvSpPr/>
+          <p:nvPr/>
+        </p:nvSpPr>
+        <p:spPr>
+          <a:xfrm>
+            <a:off x="2743200" y="3518154"/>
             <a:ext cx="1249310" cy="155448"/>
           </a:xfrm>
           <a:prstGeom prst="rect">
@@ -51678,13 +53062,13 @@
       </p:sp>
       <p:sp>
         <p:nvSpPr>
-          <p:cNvPr id="30" name="TextBox 29"/>
-          <p:cNvSpPr txBox="1"/>
-          <p:nvPr/>
-        </p:nvSpPr>
-        <p:spPr>
-          <a:xfrm>
-            <a:off x="5806440" y="3151632"/>
+          <p:cNvPr id="38" name="TextBox 37"/>
+          <p:cNvSpPr txBox="1"/>
+          <p:nvPr/>
+        </p:nvSpPr>
+        <p:spPr>
+          <a:xfrm>
+            <a:off x="5806440" y="3463290"/>
             <a:ext cx="502920" cy="219456"/>
           </a:xfrm>
           <a:prstGeom prst="rect">
@@ -51720,13 +53104,13 @@
       </p:sp>
       <p:sp>
         <p:nvSpPr>
-          <p:cNvPr id="31" name="TextBox 30"/>
-          <p:cNvSpPr txBox="1"/>
-          <p:nvPr/>
-        </p:nvSpPr>
-        <p:spPr>
-          <a:xfrm>
-            <a:off x="594360" y="3656076"/>
+          <p:cNvPr id="39" name="TextBox 38"/>
+          <p:cNvSpPr txBox="1"/>
+          <p:nvPr/>
+        </p:nvSpPr>
+        <p:spPr>
+          <a:xfrm>
+            <a:off x="594360" y="3862197"/>
             <a:ext cx="2057400" cy="219456"/>
           </a:xfrm>
           <a:prstGeom prst="rect">
@@ -51762,13 +53146,13 @@
       </p:sp>
       <p:sp>
         <p:nvSpPr>
-          <p:cNvPr id="32" name="Rectangle 31"/>
+          <p:cNvPr id="40" name="Rectangle 39"/>
           <p:cNvSpPr/>
           <p:nvPr/>
         </p:nvSpPr>
         <p:spPr>
           <a:xfrm>
-            <a:off x="2743200" y="3706368"/>
+            <a:off x="2743200" y="3912489"/>
             <a:ext cx="2971800" cy="155448"/>
           </a:xfrm>
           <a:prstGeom prst="rect">
@@ -51805,13 +53189,13 @@
       </p:sp>
       <p:sp>
         <p:nvSpPr>
-          <p:cNvPr id="33" name="Rectangle 32"/>
+          <p:cNvPr id="41" name="Rectangle 40"/>
           <p:cNvSpPr/>
           <p:nvPr/>
         </p:nvSpPr>
         <p:spPr>
           <a:xfrm>
-            <a:off x="2743200" y="3706368"/>
+            <a:off x="2743200" y="3912489"/>
             <a:ext cx="1239379" cy="155448"/>
           </a:xfrm>
           <a:prstGeom prst="rect">
@@ -51848,13 +53232,13 @@
       </p:sp>
       <p:sp>
         <p:nvSpPr>
-          <p:cNvPr id="34" name="TextBox 33"/>
-          <p:cNvSpPr txBox="1"/>
-          <p:nvPr/>
-        </p:nvSpPr>
-        <p:spPr>
-          <a:xfrm>
-            <a:off x="5806440" y="3651504"/>
+          <p:cNvPr id="42" name="TextBox 41"/>
+          <p:cNvSpPr txBox="1"/>
+          <p:nvPr/>
+        </p:nvSpPr>
+        <p:spPr>
+          <a:xfrm>
+            <a:off x="5806440" y="3857625"/>
             <a:ext cx="502920" cy="219456"/>
           </a:xfrm>
           <a:prstGeom prst="rect">
@@ -51890,14 +53274,14 @@
       </p:sp>
       <p:sp>
         <p:nvSpPr>
-          <p:cNvPr id="35" name="Rectangle 34"/>
+          <p:cNvPr id="43" name="Rectangle 42"/>
           <p:cNvSpPr/>
           <p:nvPr/>
         </p:nvSpPr>
         <p:spPr>
           <a:xfrm>
-            <a:off x="6537960" y="1170432"/>
-            <a:ext cx="1874519" cy="457200"/>
+            <a:off x="6537960" y="1078992"/>
+            <a:ext cx="1874519" cy="384048"/>
           </a:xfrm>
           <a:prstGeom prst="rect">
             <a:avLst/>
@@ -51933,14 +53317,14 @@
       </p:sp>
       <p:sp>
         <p:nvSpPr>
-          <p:cNvPr id="36" name="TextBox 35"/>
-          <p:cNvSpPr txBox="1"/>
-          <p:nvPr/>
-        </p:nvSpPr>
-        <p:spPr>
-          <a:xfrm>
-            <a:off x="6574536" y="1243584"/>
-            <a:ext cx="1801367" cy="329184"/>
+          <p:cNvPr id="44" name="TextBox 43"/>
+          <p:cNvSpPr txBox="1"/>
+          <p:nvPr/>
+        </p:nvSpPr>
+        <p:spPr>
+          <a:xfrm>
+            <a:off x="6574536" y="1152144"/>
+            <a:ext cx="1801367" cy="256031"/>
           </a:xfrm>
           <a:prstGeom prst="rect">
             <a:avLst/>
@@ -51975,14 +53359,14 @@
       </p:sp>
       <p:sp>
         <p:nvSpPr>
-          <p:cNvPr id="37" name="Rectangle 36"/>
+          <p:cNvPr id="45" name="Rectangle 44"/>
           <p:cNvSpPr/>
           <p:nvPr/>
         </p:nvSpPr>
         <p:spPr>
           <a:xfrm>
-            <a:off x="8412480" y="1170432"/>
-            <a:ext cx="822960" cy="457200"/>
+            <a:off x="8412480" y="1078992"/>
+            <a:ext cx="822960" cy="384048"/>
           </a:xfrm>
           <a:prstGeom prst="rect">
             <a:avLst/>
@@ -52018,14 +53402,14 @@
       </p:sp>
       <p:sp>
         <p:nvSpPr>
-          <p:cNvPr id="38" name="TextBox 37"/>
-          <p:cNvSpPr txBox="1"/>
-          <p:nvPr/>
-        </p:nvSpPr>
-        <p:spPr>
-          <a:xfrm>
-            <a:off x="8449055" y="1243584"/>
-            <a:ext cx="749808" cy="329184"/>
+          <p:cNvPr id="46" name="TextBox 45"/>
+          <p:cNvSpPr txBox="1"/>
+          <p:nvPr/>
+        </p:nvSpPr>
+        <p:spPr>
+          <a:xfrm>
+            <a:off x="8449055" y="1152144"/>
+            <a:ext cx="749808" cy="256031"/>
           </a:xfrm>
           <a:prstGeom prst="rect">
             <a:avLst/>
@@ -52060,14 +53444,14 @@
       </p:sp>
       <p:sp>
         <p:nvSpPr>
-          <p:cNvPr id="39" name="Rectangle 38"/>
+          <p:cNvPr id="47" name="Rectangle 46"/>
           <p:cNvSpPr/>
           <p:nvPr/>
         </p:nvSpPr>
         <p:spPr>
           <a:xfrm>
-            <a:off x="9235440" y="1170432"/>
-            <a:ext cx="822960" cy="457200"/>
+            <a:off x="9235440" y="1078992"/>
+            <a:ext cx="822960" cy="384048"/>
           </a:xfrm>
           <a:prstGeom prst="rect">
             <a:avLst/>
@@ -52103,14 +53487,14 @@
       </p:sp>
       <p:sp>
         <p:nvSpPr>
-          <p:cNvPr id="40" name="TextBox 39"/>
-          <p:cNvSpPr txBox="1"/>
-          <p:nvPr/>
-        </p:nvSpPr>
-        <p:spPr>
-          <a:xfrm>
-            <a:off x="9272015" y="1243584"/>
-            <a:ext cx="749808" cy="329184"/>
+          <p:cNvPr id="48" name="TextBox 47"/>
+          <p:cNvSpPr txBox="1"/>
+          <p:nvPr/>
+        </p:nvSpPr>
+        <p:spPr>
+          <a:xfrm>
+            <a:off x="9272015" y="1152144"/>
+            <a:ext cx="749808" cy="256031"/>
           </a:xfrm>
           <a:prstGeom prst="rect">
             <a:avLst/>
@@ -52145,14 +53529,14 @@
       </p:sp>
       <p:sp>
         <p:nvSpPr>
-          <p:cNvPr id="41" name="Rectangle 40"/>
+          <p:cNvPr id="49" name="Rectangle 48"/>
           <p:cNvSpPr/>
           <p:nvPr/>
         </p:nvSpPr>
         <p:spPr>
           <a:xfrm>
-            <a:off x="10058400" y="1170432"/>
-            <a:ext cx="731520" cy="457200"/>
+            <a:off x="10058400" y="1078992"/>
+            <a:ext cx="731520" cy="384048"/>
           </a:xfrm>
           <a:prstGeom prst="rect">
             <a:avLst/>
@@ -52188,14 +53572,14 @@
       </p:sp>
       <p:sp>
         <p:nvSpPr>
-          <p:cNvPr id="42" name="TextBox 41"/>
-          <p:cNvSpPr txBox="1"/>
-          <p:nvPr/>
-        </p:nvSpPr>
-        <p:spPr>
-          <a:xfrm>
-            <a:off x="10094976" y="1243584"/>
-            <a:ext cx="658368" cy="329184"/>
+          <p:cNvPr id="50" name="TextBox 49"/>
+          <p:cNvSpPr txBox="1"/>
+          <p:nvPr/>
+        </p:nvSpPr>
+        <p:spPr>
+          <a:xfrm>
+            <a:off x="10094976" y="1152144"/>
+            <a:ext cx="658368" cy="256031"/>
           </a:xfrm>
           <a:prstGeom prst="rect">
             <a:avLst/>
@@ -52230,14 +53614,14 @@
       </p:sp>
       <p:sp>
         <p:nvSpPr>
-          <p:cNvPr id="43" name="Rectangle 42"/>
+          <p:cNvPr id="51" name="Rectangle 50"/>
           <p:cNvSpPr/>
           <p:nvPr/>
         </p:nvSpPr>
         <p:spPr>
           <a:xfrm>
-            <a:off x="6537960" y="1627632"/>
-            <a:ext cx="1874519" cy="457200"/>
+            <a:off x="6537960" y="1463039"/>
+            <a:ext cx="1874519" cy="384048"/>
           </a:xfrm>
           <a:prstGeom prst="rect">
             <a:avLst/>
@@ -52275,14 +53659,14 @@
       </p:sp>
       <p:sp>
         <p:nvSpPr>
-          <p:cNvPr id="44" name="TextBox 43"/>
-          <p:cNvSpPr txBox="1"/>
-          <p:nvPr/>
-        </p:nvSpPr>
-        <p:spPr>
-          <a:xfrm>
-            <a:off x="6592824" y="1691640"/>
-            <a:ext cx="1764791" cy="329184"/>
+          <p:cNvPr id="52" name="TextBox 51"/>
+          <p:cNvSpPr txBox="1"/>
+          <p:nvPr/>
+        </p:nvSpPr>
+        <p:spPr>
+          <a:xfrm>
+            <a:off x="6592824" y="1527048"/>
+            <a:ext cx="1764791" cy="256031"/>
           </a:xfrm>
           <a:prstGeom prst="rect">
             <a:avLst/>
@@ -52317,14 +53701,14 @@
       </p:sp>
       <p:sp>
         <p:nvSpPr>
-          <p:cNvPr id="45" name="Rectangle 44"/>
+          <p:cNvPr id="53" name="Rectangle 52"/>
           <p:cNvSpPr/>
           <p:nvPr/>
         </p:nvSpPr>
         <p:spPr>
           <a:xfrm>
-            <a:off x="8412480" y="1627632"/>
-            <a:ext cx="822960" cy="457200"/>
+            <a:off x="8412480" y="1463039"/>
+            <a:ext cx="822960" cy="384048"/>
           </a:xfrm>
           <a:prstGeom prst="rect">
             <a:avLst/>
@@ -52362,14 +53746,14 @@
       </p:sp>
       <p:sp>
         <p:nvSpPr>
-          <p:cNvPr id="46" name="TextBox 45"/>
-          <p:cNvSpPr txBox="1"/>
-          <p:nvPr/>
-        </p:nvSpPr>
-        <p:spPr>
-          <a:xfrm>
-            <a:off x="8467344" y="1691640"/>
-            <a:ext cx="713232" cy="329184"/>
+          <p:cNvPr id="54" name="TextBox 53"/>
+          <p:cNvSpPr txBox="1"/>
+          <p:nvPr/>
+        </p:nvSpPr>
+        <p:spPr>
+          <a:xfrm>
+            <a:off x="8467344" y="1527048"/>
+            <a:ext cx="713232" cy="256031"/>
           </a:xfrm>
           <a:prstGeom prst="rect">
             <a:avLst/>
@@ -52404,14 +53788,14 @@
       </p:sp>
       <p:sp>
         <p:nvSpPr>
-          <p:cNvPr id="47" name="Rectangle 46"/>
+          <p:cNvPr id="55" name="Rectangle 54"/>
           <p:cNvSpPr/>
           <p:nvPr/>
         </p:nvSpPr>
         <p:spPr>
           <a:xfrm>
-            <a:off x="9235440" y="1627632"/>
-            <a:ext cx="822960" cy="457200"/>
+            <a:off x="9235440" y="1463039"/>
+            <a:ext cx="822960" cy="384048"/>
           </a:xfrm>
           <a:prstGeom prst="rect">
             <a:avLst/>
@@ -52449,14 +53833,14 @@
       </p:sp>
       <p:sp>
         <p:nvSpPr>
-          <p:cNvPr id="48" name="TextBox 47"/>
-          <p:cNvSpPr txBox="1"/>
-          <p:nvPr/>
-        </p:nvSpPr>
-        <p:spPr>
-          <a:xfrm>
-            <a:off x="9290304" y="1691640"/>
-            <a:ext cx="713232" cy="329184"/>
+          <p:cNvPr id="56" name="TextBox 55"/>
+          <p:cNvSpPr txBox="1"/>
+          <p:nvPr/>
+        </p:nvSpPr>
+        <p:spPr>
+          <a:xfrm>
+            <a:off x="9290304" y="1527048"/>
+            <a:ext cx="713232" cy="256031"/>
           </a:xfrm>
           <a:prstGeom prst="rect">
             <a:avLst/>
@@ -52491,14 +53875,14 @@
       </p:sp>
       <p:sp>
         <p:nvSpPr>
-          <p:cNvPr id="49" name="Rectangle 48"/>
+          <p:cNvPr id="57" name="Rectangle 56"/>
           <p:cNvSpPr/>
           <p:nvPr/>
         </p:nvSpPr>
         <p:spPr>
           <a:xfrm>
-            <a:off x="10058400" y="1627632"/>
-            <a:ext cx="731520" cy="457200"/>
+            <a:off x="10058400" y="1463039"/>
+            <a:ext cx="731520" cy="384048"/>
           </a:xfrm>
           <a:prstGeom prst="rect">
             <a:avLst/>
@@ -52536,14 +53920,14 @@
       </p:sp>
       <p:sp>
         <p:nvSpPr>
-          <p:cNvPr id="50" name="TextBox 49"/>
-          <p:cNvSpPr txBox="1"/>
-          <p:nvPr/>
-        </p:nvSpPr>
-        <p:spPr>
-          <a:xfrm>
-            <a:off x="10113264" y="1691640"/>
-            <a:ext cx="621792" cy="329184"/>
+          <p:cNvPr id="58" name="TextBox 57"/>
+          <p:cNvSpPr txBox="1"/>
+          <p:nvPr/>
+        </p:nvSpPr>
+        <p:spPr>
+          <a:xfrm>
+            <a:off x="10113264" y="1527048"/>
+            <a:ext cx="621792" cy="256031"/>
           </a:xfrm>
           <a:prstGeom prst="rect">
             <a:avLst/>
@@ -52578,14 +53962,14 @@
       </p:sp>
       <p:sp>
         <p:nvSpPr>
-          <p:cNvPr id="51" name="Rectangle 50"/>
+          <p:cNvPr id="59" name="Rectangle 58"/>
           <p:cNvSpPr/>
           <p:nvPr/>
         </p:nvSpPr>
         <p:spPr>
           <a:xfrm>
-            <a:off x="6537960" y="2084832"/>
-            <a:ext cx="1874519" cy="457200"/>
+            <a:off x="6537960" y="1847088"/>
+            <a:ext cx="1874519" cy="384048"/>
           </a:xfrm>
           <a:prstGeom prst="rect">
             <a:avLst/>
@@ -52623,14 +54007,14 @@
       </p:sp>
       <p:sp>
         <p:nvSpPr>
-          <p:cNvPr id="52" name="TextBox 51"/>
-          <p:cNvSpPr txBox="1"/>
-          <p:nvPr/>
-        </p:nvSpPr>
-        <p:spPr>
-          <a:xfrm>
-            <a:off x="6592824" y="2148840"/>
-            <a:ext cx="1764791" cy="329184"/>
+          <p:cNvPr id="60" name="TextBox 59"/>
+          <p:cNvSpPr txBox="1"/>
+          <p:nvPr/>
+        </p:nvSpPr>
+        <p:spPr>
+          <a:xfrm>
+            <a:off x="6592824" y="1911095"/>
+            <a:ext cx="1764791" cy="256031"/>
           </a:xfrm>
           <a:prstGeom prst="rect">
             <a:avLst/>
@@ -52665,14 +54049,14 @@
       </p:sp>
       <p:sp>
         <p:nvSpPr>
-          <p:cNvPr id="53" name="Rectangle 52"/>
+          <p:cNvPr id="61" name="Rectangle 60"/>
           <p:cNvSpPr/>
           <p:nvPr/>
         </p:nvSpPr>
         <p:spPr>
           <a:xfrm>
-            <a:off x="8412480" y="2084832"/>
-            <a:ext cx="822960" cy="457200"/>
+            <a:off x="8412480" y="1847088"/>
+            <a:ext cx="822960" cy="384048"/>
           </a:xfrm>
           <a:prstGeom prst="rect">
             <a:avLst/>
@@ -52710,14 +54094,14 @@
       </p:sp>
       <p:sp>
         <p:nvSpPr>
-          <p:cNvPr id="54" name="TextBox 53"/>
-          <p:cNvSpPr txBox="1"/>
-          <p:nvPr/>
-        </p:nvSpPr>
-        <p:spPr>
-          <a:xfrm>
-            <a:off x="8467344" y="2148840"/>
-            <a:ext cx="713232" cy="329184"/>
+          <p:cNvPr id="62" name="TextBox 61"/>
+          <p:cNvSpPr txBox="1"/>
+          <p:nvPr/>
+        </p:nvSpPr>
+        <p:spPr>
+          <a:xfrm>
+            <a:off x="8467344" y="1911095"/>
+            <a:ext cx="713232" cy="256031"/>
           </a:xfrm>
           <a:prstGeom prst="rect">
             <a:avLst/>
@@ -52752,14 +54136,14 @@
       </p:sp>
       <p:sp>
         <p:nvSpPr>
-          <p:cNvPr id="55" name="Rectangle 54"/>
+          <p:cNvPr id="63" name="Rectangle 62"/>
           <p:cNvSpPr/>
           <p:nvPr/>
         </p:nvSpPr>
         <p:spPr>
           <a:xfrm>
-            <a:off x="9235440" y="2084832"/>
-            <a:ext cx="822960" cy="457200"/>
+            <a:off x="9235440" y="1847088"/>
+            <a:ext cx="822960" cy="384048"/>
           </a:xfrm>
           <a:prstGeom prst="rect">
             <a:avLst/>
@@ -52797,14 +54181,14 @@
       </p:sp>
       <p:sp>
         <p:nvSpPr>
-          <p:cNvPr id="56" name="TextBox 55"/>
-          <p:cNvSpPr txBox="1"/>
-          <p:nvPr/>
-        </p:nvSpPr>
-        <p:spPr>
-          <a:xfrm>
-            <a:off x="9290304" y="2148840"/>
-            <a:ext cx="713232" cy="329184"/>
+          <p:cNvPr id="64" name="TextBox 63"/>
+          <p:cNvSpPr txBox="1"/>
+          <p:nvPr/>
+        </p:nvSpPr>
+        <p:spPr>
+          <a:xfrm>
+            <a:off x="9290304" y="1911095"/>
+            <a:ext cx="713232" cy="256031"/>
           </a:xfrm>
           <a:prstGeom prst="rect">
             <a:avLst/>
@@ -52839,14 +54223,14 @@
       </p:sp>
       <p:sp>
         <p:nvSpPr>
-          <p:cNvPr id="57" name="Rectangle 56"/>
+          <p:cNvPr id="65" name="Rectangle 64"/>
           <p:cNvSpPr/>
           <p:nvPr/>
         </p:nvSpPr>
         <p:spPr>
           <a:xfrm>
-            <a:off x="10058400" y="2084832"/>
-            <a:ext cx="731520" cy="457200"/>
+            <a:off x="10058400" y="1847088"/>
+            <a:ext cx="731520" cy="384048"/>
           </a:xfrm>
           <a:prstGeom prst="rect">
             <a:avLst/>
@@ -52884,14 +54268,14 @@
       </p:sp>
       <p:sp>
         <p:nvSpPr>
-          <p:cNvPr id="58" name="TextBox 57"/>
-          <p:cNvSpPr txBox="1"/>
-          <p:nvPr/>
-        </p:nvSpPr>
-        <p:spPr>
-          <a:xfrm>
-            <a:off x="10113264" y="2148840"/>
-            <a:ext cx="621792" cy="329184"/>
+          <p:cNvPr id="66" name="TextBox 65"/>
+          <p:cNvSpPr txBox="1"/>
+          <p:nvPr/>
+        </p:nvSpPr>
+        <p:spPr>
+          <a:xfrm>
+            <a:off x="10113264" y="1911095"/>
+            <a:ext cx="621792" cy="256031"/>
           </a:xfrm>
           <a:prstGeom prst="rect">
             <a:avLst/>
@@ -52926,14 +54310,14 @@
       </p:sp>
       <p:sp>
         <p:nvSpPr>
-          <p:cNvPr id="59" name="Rectangle 58"/>
+          <p:cNvPr id="67" name="Rectangle 66"/>
           <p:cNvSpPr/>
           <p:nvPr/>
         </p:nvSpPr>
         <p:spPr>
           <a:xfrm>
-            <a:off x="6537960" y="2542032"/>
-            <a:ext cx="1874519" cy="457200"/>
+            <a:off x="6537960" y="2231136"/>
+            <a:ext cx="1874519" cy="384048"/>
           </a:xfrm>
           <a:prstGeom prst="rect">
             <a:avLst/>
@@ -52971,14 +54355,14 @@
       </p:sp>
       <p:sp>
         <p:nvSpPr>
-          <p:cNvPr id="60" name="TextBox 59"/>
-          <p:cNvSpPr txBox="1"/>
-          <p:nvPr/>
-        </p:nvSpPr>
-        <p:spPr>
-          <a:xfrm>
-            <a:off x="6592824" y="2606040"/>
-            <a:ext cx="1764791" cy="329184"/>
+          <p:cNvPr id="68" name="TextBox 67"/>
+          <p:cNvSpPr txBox="1"/>
+          <p:nvPr/>
+        </p:nvSpPr>
+        <p:spPr>
+          <a:xfrm>
+            <a:off x="6592824" y="2295144"/>
+            <a:ext cx="1764791" cy="256031"/>
           </a:xfrm>
           <a:prstGeom prst="rect">
             <a:avLst/>
@@ -53013,14 +54397,14 @@
       </p:sp>
       <p:sp>
         <p:nvSpPr>
-          <p:cNvPr id="61" name="Rectangle 60"/>
+          <p:cNvPr id="69" name="Rectangle 68"/>
           <p:cNvSpPr/>
           <p:nvPr/>
         </p:nvSpPr>
         <p:spPr>
           <a:xfrm>
-            <a:off x="8412480" y="2542032"/>
-            <a:ext cx="822960" cy="457200"/>
+            <a:off x="8412480" y="2231136"/>
+            <a:ext cx="822960" cy="384048"/>
           </a:xfrm>
           <a:prstGeom prst="rect">
             <a:avLst/>
@@ -53058,14 +54442,14 @@
       </p:sp>
       <p:sp>
         <p:nvSpPr>
-          <p:cNvPr id="62" name="TextBox 61"/>
-          <p:cNvSpPr txBox="1"/>
-          <p:nvPr/>
-        </p:nvSpPr>
-        <p:spPr>
-          <a:xfrm>
-            <a:off x="8467344" y="2606040"/>
-            <a:ext cx="713232" cy="329184"/>
+          <p:cNvPr id="70" name="TextBox 69"/>
+          <p:cNvSpPr txBox="1"/>
+          <p:nvPr/>
+        </p:nvSpPr>
+        <p:spPr>
+          <a:xfrm>
+            <a:off x="8467344" y="2295144"/>
+            <a:ext cx="713232" cy="256031"/>
           </a:xfrm>
           <a:prstGeom prst="rect">
             <a:avLst/>
@@ -53100,14 +54484,14 @@
       </p:sp>
       <p:sp>
         <p:nvSpPr>
-          <p:cNvPr id="63" name="Rectangle 62"/>
+          <p:cNvPr id="71" name="Rectangle 70"/>
           <p:cNvSpPr/>
           <p:nvPr/>
         </p:nvSpPr>
         <p:spPr>
           <a:xfrm>
-            <a:off x="9235440" y="2542032"/>
-            <a:ext cx="822960" cy="457200"/>
+            <a:off x="9235440" y="2231136"/>
+            <a:ext cx="822960" cy="384048"/>
           </a:xfrm>
           <a:prstGeom prst="rect">
             <a:avLst/>
@@ -53145,14 +54529,14 @@
       </p:sp>
       <p:sp>
         <p:nvSpPr>
-          <p:cNvPr id="64" name="TextBox 63"/>
-          <p:cNvSpPr txBox="1"/>
-          <p:nvPr/>
-        </p:nvSpPr>
-        <p:spPr>
-          <a:xfrm>
-            <a:off x="9290304" y="2606040"/>
-            <a:ext cx="713232" cy="329184"/>
+          <p:cNvPr id="72" name="TextBox 71"/>
+          <p:cNvSpPr txBox="1"/>
+          <p:nvPr/>
+        </p:nvSpPr>
+        <p:spPr>
+          <a:xfrm>
+            <a:off x="9290304" y="2295144"/>
+            <a:ext cx="713232" cy="256031"/>
           </a:xfrm>
           <a:prstGeom prst="rect">
             <a:avLst/>
@@ -53187,14 +54571,14 @@
       </p:sp>
       <p:sp>
         <p:nvSpPr>
-          <p:cNvPr id="65" name="Rectangle 64"/>
+          <p:cNvPr id="73" name="Rectangle 72"/>
           <p:cNvSpPr/>
           <p:nvPr/>
         </p:nvSpPr>
         <p:spPr>
           <a:xfrm>
-            <a:off x="10058400" y="2542032"/>
-            <a:ext cx="731520" cy="457200"/>
+            <a:off x="10058400" y="2231136"/>
+            <a:ext cx="731520" cy="384048"/>
           </a:xfrm>
           <a:prstGeom prst="rect">
             <a:avLst/>
@@ -53232,14 +54616,14 @@
       </p:sp>
       <p:sp>
         <p:nvSpPr>
-          <p:cNvPr id="66" name="TextBox 65"/>
-          <p:cNvSpPr txBox="1"/>
-          <p:nvPr/>
-        </p:nvSpPr>
-        <p:spPr>
-          <a:xfrm>
-            <a:off x="10113264" y="2606040"/>
-            <a:ext cx="621792" cy="329184"/>
+          <p:cNvPr id="74" name="TextBox 73"/>
+          <p:cNvSpPr txBox="1"/>
+          <p:nvPr/>
+        </p:nvSpPr>
+        <p:spPr>
+          <a:xfrm>
+            <a:off x="10113264" y="2295144"/>
+            <a:ext cx="621792" cy="256031"/>
           </a:xfrm>
           <a:prstGeom prst="rect">
             <a:avLst/>
@@ -53274,14 +54658,14 @@
       </p:sp>
       <p:sp>
         <p:nvSpPr>
-          <p:cNvPr id="67" name="Rectangle 66"/>
+          <p:cNvPr id="75" name="Rectangle 74"/>
           <p:cNvSpPr/>
           <p:nvPr/>
         </p:nvSpPr>
         <p:spPr>
           <a:xfrm>
-            <a:off x="6537960" y="2999232"/>
-            <a:ext cx="1874519" cy="457200"/>
+            <a:off x="6537960" y="2615184"/>
+            <a:ext cx="1874519" cy="384048"/>
           </a:xfrm>
           <a:prstGeom prst="rect">
             <a:avLst/>
@@ -53319,14 +54703,14 @@
       </p:sp>
       <p:sp>
         <p:nvSpPr>
-          <p:cNvPr id="68" name="TextBox 67"/>
-          <p:cNvSpPr txBox="1"/>
-          <p:nvPr/>
-        </p:nvSpPr>
-        <p:spPr>
-          <a:xfrm>
-            <a:off x="6592824" y="3063240"/>
-            <a:ext cx="1764791" cy="329184"/>
+          <p:cNvPr id="76" name="TextBox 75"/>
+          <p:cNvSpPr txBox="1"/>
+          <p:nvPr/>
+        </p:nvSpPr>
+        <p:spPr>
+          <a:xfrm>
+            <a:off x="6592824" y="2679191"/>
+            <a:ext cx="1764791" cy="256031"/>
           </a:xfrm>
           <a:prstGeom prst="rect">
             <a:avLst/>
@@ -53354,21 +54738,21 @@
                 </a:solidFill>
                 <a:latin typeface="Microsoft YaHei"/>
               </a:rPr>
-              <a:t>Hybrid gated</a:t>
-            </a:r>
-          </a:p>
-        </p:txBody>
-      </p:sp>
-      <p:sp>
-        <p:nvSpPr>
-          <p:cNvPr id="69" name="Rectangle 68"/>
+              <a:t>Zero-shot tree</a:t>
+            </a:r>
+          </a:p>
+        </p:txBody>
+      </p:sp>
+      <p:sp>
+        <p:nvSpPr>
+          <p:cNvPr id="77" name="Rectangle 76"/>
           <p:cNvSpPr/>
           <p:nvPr/>
         </p:nvSpPr>
         <p:spPr>
           <a:xfrm>
-            <a:off x="8412480" y="2999232"/>
-            <a:ext cx="822960" cy="457200"/>
+            <a:off x="8412480" y="2615184"/>
+            <a:ext cx="822960" cy="384048"/>
           </a:xfrm>
           <a:prstGeom prst="rect">
             <a:avLst/>
@@ -53406,14 +54790,14 @@
       </p:sp>
       <p:sp>
         <p:nvSpPr>
-          <p:cNvPr id="70" name="TextBox 69"/>
-          <p:cNvSpPr txBox="1"/>
-          <p:nvPr/>
-        </p:nvSpPr>
-        <p:spPr>
-          <a:xfrm>
-            <a:off x="8467344" y="3063240"/>
-            <a:ext cx="713232" cy="329184"/>
+          <p:cNvPr id="78" name="TextBox 77"/>
+          <p:cNvSpPr txBox="1"/>
+          <p:nvPr/>
+        </p:nvSpPr>
+        <p:spPr>
+          <a:xfrm>
+            <a:off x="8467344" y="2679191"/>
+            <a:ext cx="713232" cy="256031"/>
           </a:xfrm>
           <a:prstGeom prst="rect">
             <a:avLst/>
@@ -53441,21 +54825,21 @@
                 </a:solidFill>
                 <a:latin typeface="Microsoft YaHei"/>
               </a:rPr>
-              <a:t>2.502</a:t>
-            </a:r>
-          </a:p>
-        </p:txBody>
-      </p:sp>
-      <p:sp>
-        <p:nvSpPr>
-          <p:cNvPr id="71" name="Rectangle 70"/>
+              <a:t>2.602</a:t>
+            </a:r>
+          </a:p>
+        </p:txBody>
+      </p:sp>
+      <p:sp>
+        <p:nvSpPr>
+          <p:cNvPr id="79" name="Rectangle 78"/>
           <p:cNvSpPr/>
           <p:nvPr/>
         </p:nvSpPr>
         <p:spPr>
           <a:xfrm>
-            <a:off x="9235440" y="2999232"/>
-            <a:ext cx="822960" cy="457200"/>
+            <a:off x="9235440" y="2615184"/>
+            <a:ext cx="822960" cy="384048"/>
           </a:xfrm>
           <a:prstGeom prst="rect">
             <a:avLst/>
@@ -53493,14 +54877,14 @@
       </p:sp>
       <p:sp>
         <p:nvSpPr>
-          <p:cNvPr id="72" name="TextBox 71"/>
-          <p:cNvSpPr txBox="1"/>
-          <p:nvPr/>
-        </p:nvSpPr>
-        <p:spPr>
-          <a:xfrm>
-            <a:off x="9290304" y="3063240"/>
-            <a:ext cx="713232" cy="329184"/>
+          <p:cNvPr id="80" name="TextBox 79"/>
+          <p:cNvSpPr txBox="1"/>
+          <p:nvPr/>
+        </p:nvSpPr>
+        <p:spPr>
+          <a:xfrm>
+            <a:off x="9290304" y="2679191"/>
+            <a:ext cx="713232" cy="256031"/>
           </a:xfrm>
           <a:prstGeom prst="rect">
             <a:avLst/>
@@ -53528,21 +54912,21 @@
                 </a:solidFill>
                 <a:latin typeface="Microsoft YaHei"/>
               </a:rPr>
-              <a:t>-0.023</a:t>
-            </a:r>
-          </a:p>
-        </p:txBody>
-      </p:sp>
-      <p:sp>
-        <p:nvSpPr>
-          <p:cNvPr id="73" name="Rectangle 72"/>
+              <a:t>-0.407</a:t>
+            </a:r>
+          </a:p>
+        </p:txBody>
+      </p:sp>
+      <p:sp>
+        <p:nvSpPr>
+          <p:cNvPr id="81" name="Rectangle 80"/>
           <p:cNvSpPr/>
           <p:nvPr/>
         </p:nvSpPr>
         <p:spPr>
           <a:xfrm>
-            <a:off x="10058400" y="2999232"/>
-            <a:ext cx="731520" cy="457200"/>
+            <a:off x="10058400" y="2615184"/>
+            <a:ext cx="731520" cy="384048"/>
           </a:xfrm>
           <a:prstGeom prst="rect">
             <a:avLst/>
@@ -53580,14 +54964,14 @@
       </p:sp>
       <p:sp>
         <p:nvSpPr>
-          <p:cNvPr id="74" name="TextBox 73"/>
-          <p:cNvSpPr txBox="1"/>
-          <p:nvPr/>
-        </p:nvSpPr>
-        <p:spPr>
-          <a:xfrm>
-            <a:off x="10113264" y="3063240"/>
-            <a:ext cx="621792" cy="329184"/>
+          <p:cNvPr id="82" name="TextBox 81"/>
+          <p:cNvSpPr txBox="1"/>
+          <p:nvPr/>
+        </p:nvSpPr>
+        <p:spPr>
+          <a:xfrm>
+            <a:off x="10113264" y="2679191"/>
+            <a:ext cx="621792" cy="256031"/>
           </a:xfrm>
           <a:prstGeom prst="rect">
             <a:avLst/>
@@ -53615,23 +54999,23 @@
                 </a:solidFill>
                 <a:latin typeface="Microsoft YaHei"/>
               </a:rPr>
-              <a:t>0.248</a:t>
-            </a:r>
-          </a:p>
-        </p:txBody>
-      </p:sp>
-      <p:sp>
-        <p:nvSpPr>
-          <p:cNvPr id="75" name="Rounded Rectangle 74"/>
+              <a:t>0.151</a:t>
+            </a:r>
+          </a:p>
+        </p:txBody>
+      </p:sp>
+      <p:sp>
+        <p:nvSpPr>
+          <p:cNvPr id="83" name="Rectangle 82"/>
           <p:cNvSpPr/>
           <p:nvPr/>
         </p:nvSpPr>
         <p:spPr>
           <a:xfrm>
-            <a:off x="6547104" y="3035808"/>
-            <a:ext cx="1874519" cy="749808"/>
-          </a:xfrm>
-          <a:prstGeom prst="roundRect">
+            <a:off x="6537960" y="2999232"/>
+            <a:ext cx="1874519" cy="384048"/>
+          </a:xfrm>
+          <a:prstGeom prst="rect">
             <a:avLst/>
           </a:prstGeom>
           <a:solidFill>
@@ -53667,185 +55051,58 @@
       </p:sp>
       <p:sp>
         <p:nvSpPr>
-          <p:cNvPr id="76" name="Rectangle 75"/>
+          <p:cNvPr id="84" name="TextBox 83"/>
+          <p:cNvSpPr txBox="1"/>
+          <p:nvPr/>
+        </p:nvSpPr>
+        <p:spPr>
+          <a:xfrm>
+            <a:off x="6592824" y="3063240"/>
+            <a:ext cx="1764791" cy="256031"/>
+          </a:xfrm>
+          <a:prstGeom prst="rect">
+            <a:avLst/>
+          </a:prstGeom>
+          <a:noFill/>
+        </p:spPr>
+        <p:txBody>
+          <a:bodyPr wrap="square" lIns="27432" rIns="27432" tIns="9144" bIns="9144" anchor="t">
+            <a:spAutoFit/>
+          </a:bodyPr>
+          <a:lstStyle/>
+          <a:p>
+            <a:pPr algn="l">
+              <a:defRPr sz="1200" b="1">
+                <a:solidFill>
+                  <a:srgbClr val="0F172A"/>
+                </a:solidFill>
+                <a:latin typeface="Microsoft YaHei"/>
+              </a:defRPr>
+            </a:pPr>
+            <a:r>
+              <a:rPr sz="1200" b="1">
+                <a:solidFill>
+                  <a:srgbClr val="0F172A"/>
+                </a:solidFill>
+                <a:latin typeface="Microsoft YaHei"/>
+              </a:rPr>
+              <a:t>Rule + 500 hist.</a:t>
+            </a:r>
+          </a:p>
+        </p:txBody>
+      </p:sp>
+      <p:sp>
+        <p:nvSpPr>
+          <p:cNvPr id="85" name="Rectangle 84"/>
           <p:cNvSpPr/>
           <p:nvPr/>
         </p:nvSpPr>
         <p:spPr>
           <a:xfrm>
-            <a:off x="6547104" y="3035808"/>
-            <a:ext cx="50292" cy="749808"/>
-          </a:xfrm>
-          <a:prstGeom prst="rect">
-            <a:avLst/>
-          </a:prstGeom>
-          <a:solidFill>
-            <a:srgbClr val="198754"/>
-          </a:solidFill>
-          <a:ln>
-            <a:noFill/>
-          </a:ln>
-        </p:spPr>
-        <p:style>
-          <a:lnRef idx="1">
-            <a:schemeClr val="accent1"/>
-          </a:lnRef>
-          <a:fillRef idx="3">
-            <a:schemeClr val="accent1"/>
-          </a:fillRef>
-          <a:effectRef idx="2">
-            <a:schemeClr val="accent1"/>
-          </a:effectRef>
-          <a:fontRef idx="minor">
-            <a:schemeClr val="lt1"/>
-          </a:fontRef>
-        </p:style>
-        <p:txBody>
-          <a:bodyPr rtlCol="0" anchor="ctr"/>
-          <a:lstStyle/>
-          <a:p>
-            <a:pPr algn="ctr"/>
-          </a:p>
-        </p:txBody>
-      </p:sp>
-      <p:sp>
-        <p:nvSpPr>
-          <p:cNvPr id="77" name="TextBox 76"/>
-          <p:cNvSpPr txBox="1"/>
-          <p:nvPr/>
-        </p:nvSpPr>
-        <p:spPr>
-          <a:xfrm>
-            <a:off x="6675120" y="3108960"/>
-            <a:ext cx="1655063" cy="164592"/>
-          </a:xfrm>
-          <a:prstGeom prst="rect">
-            <a:avLst/>
-          </a:prstGeom>
-          <a:noFill/>
-        </p:spPr>
-        <p:txBody>
-          <a:bodyPr wrap="square" lIns="27432" rIns="27432" tIns="9144" bIns="9144" anchor="ctr">
-            <a:spAutoFit/>
-          </a:bodyPr>
-          <a:lstStyle/>
-          <a:p>
-            <a:pPr algn="l">
-              <a:defRPr sz="780" b="1">
-                <a:solidFill>
-                  <a:srgbClr val="64748B"/>
-                </a:solidFill>
-                <a:latin typeface="Microsoft YaHei"/>
-              </a:defRPr>
-            </a:pPr>
-            <a:r>
-              <a:rPr sz="780" b="1">
-                <a:solidFill>
-                  <a:srgbClr val="64748B"/>
-                </a:solidFill>
-                <a:latin typeface="Microsoft YaHei"/>
-              </a:rPr>
-              <a:t>MAE reduction</a:t>
-            </a:r>
-          </a:p>
-        </p:txBody>
-      </p:sp>
-      <p:sp>
-        <p:nvSpPr>
-          <p:cNvPr id="78" name="TextBox 77"/>
-          <p:cNvSpPr txBox="1"/>
-          <p:nvPr/>
-        </p:nvSpPr>
-        <p:spPr>
-          <a:xfrm>
-            <a:off x="6675120" y="3282696"/>
-            <a:ext cx="1655063" cy="292608"/>
-          </a:xfrm>
-          <a:prstGeom prst="rect">
-            <a:avLst/>
-          </a:prstGeom>
-          <a:noFill/>
-        </p:spPr>
-        <p:txBody>
-          <a:bodyPr wrap="square" lIns="27432" rIns="27432" tIns="9144" bIns="9144" anchor="ctr">
-            <a:spAutoFit/>
-          </a:bodyPr>
-          <a:lstStyle/>
-          <a:p>
-            <a:pPr algn="l">
-              <a:defRPr sz="1600" b="1">
-                <a:solidFill>
-                  <a:srgbClr val="198754"/>
-                </a:solidFill>
-                <a:latin typeface="Microsoft YaHei"/>
-              </a:defRPr>
-            </a:pPr>
-            <a:r>
-              <a:rPr sz="1600" b="1">
-                <a:solidFill>
-                  <a:srgbClr val="198754"/>
-                </a:solidFill>
-                <a:latin typeface="Microsoft YaHei"/>
-              </a:rPr>
-              <a:t>-42.3%</a:t>
-            </a:r>
-          </a:p>
-        </p:txBody>
-      </p:sp>
-      <p:sp>
-        <p:nvSpPr>
-          <p:cNvPr id="79" name="TextBox 78"/>
-          <p:cNvSpPr txBox="1"/>
-          <p:nvPr/>
-        </p:nvSpPr>
-        <p:spPr>
-          <a:xfrm>
-            <a:off x="6675120" y="3593591"/>
-            <a:ext cx="1655063" cy="182880"/>
-          </a:xfrm>
-          <a:prstGeom prst="rect">
-            <a:avLst/>
-          </a:prstGeom>
-          <a:noFill/>
-        </p:spPr>
-        <p:txBody>
-          <a:bodyPr wrap="square" lIns="27432" rIns="27432" tIns="9144" bIns="9144" anchor="ctr">
-            <a:spAutoFit/>
-          </a:bodyPr>
-          <a:lstStyle/>
-          <a:p>
-            <a:pPr algn="l">
-              <a:defRPr sz="750" b="0">
-                <a:solidFill>
-                  <a:srgbClr val="64748B"/>
-                </a:solidFill>
-                <a:latin typeface="Microsoft YaHei"/>
-              </a:defRPr>
-            </a:pPr>
-            <a:r>
-              <a:rPr sz="750" b="0">
-                <a:solidFill>
-                  <a:srgbClr val="64748B"/>
-                </a:solidFill>
-                <a:latin typeface="Microsoft YaHei"/>
-              </a:rPr>
-              <a:t>primary vs XGBoost</a:t>
-            </a:r>
-          </a:p>
-        </p:txBody>
-      </p:sp>
-      <p:sp>
-        <p:nvSpPr>
-          <p:cNvPr id="80" name="Rounded Rectangle 79"/>
-          <p:cNvSpPr/>
-          <p:nvPr/>
-        </p:nvSpPr>
-        <p:spPr>
-          <a:xfrm>
-            <a:off x="8641080" y="3035808"/>
-            <a:ext cx="1874519" cy="749808"/>
-          </a:xfrm>
-          <a:prstGeom prst="roundRect">
+            <a:off x="8412480" y="2999232"/>
+            <a:ext cx="822960" cy="384048"/>
+          </a:xfrm>
+          <a:prstGeom prst="rect">
             <a:avLst/>
           </a:prstGeom>
           <a:solidFill>
@@ -53881,23 +55138,67 @@
       </p:sp>
       <p:sp>
         <p:nvSpPr>
-          <p:cNvPr id="81" name="Rectangle 80"/>
+          <p:cNvPr id="86" name="TextBox 85"/>
+          <p:cNvSpPr txBox="1"/>
+          <p:nvPr/>
+        </p:nvSpPr>
+        <p:spPr>
+          <a:xfrm>
+            <a:off x="8467344" y="3063240"/>
+            <a:ext cx="713232" cy="256031"/>
+          </a:xfrm>
+          <a:prstGeom prst="rect">
+            <a:avLst/>
+          </a:prstGeom>
+          <a:noFill/>
+        </p:spPr>
+        <p:txBody>
+          <a:bodyPr wrap="square" lIns="27432" rIns="27432" tIns="9144" bIns="9144" anchor="t">
+            <a:spAutoFit/>
+          </a:bodyPr>
+          <a:lstStyle/>
+          <a:p>
+            <a:pPr algn="l">
+              <a:defRPr sz="1200" b="0">
+                <a:solidFill>
+                  <a:srgbClr val="0F172A"/>
+                </a:solidFill>
+                <a:latin typeface="Microsoft YaHei"/>
+              </a:defRPr>
+            </a:pPr>
+            <a:r>
+              <a:rPr sz="1200" b="0">
+                <a:solidFill>
+                  <a:srgbClr val="0F172A"/>
+                </a:solidFill>
+                <a:latin typeface="Microsoft YaHei"/>
+              </a:rPr>
+              <a:t>2.772</a:t>
+            </a:r>
+          </a:p>
+        </p:txBody>
+      </p:sp>
+      <p:sp>
+        <p:nvSpPr>
+          <p:cNvPr id="87" name="Rectangle 86"/>
           <p:cNvSpPr/>
           <p:nvPr/>
         </p:nvSpPr>
         <p:spPr>
           <a:xfrm>
-            <a:off x="8641080" y="3035808"/>
-            <a:ext cx="50292" cy="749808"/>
+            <a:off x="9235440" y="2999232"/>
+            <a:ext cx="822960" cy="384048"/>
           </a:xfrm>
           <a:prstGeom prst="rect">
             <a:avLst/>
           </a:prstGeom>
           <a:solidFill>
-            <a:srgbClr val="2563EB"/>
+            <a:srgbClr val="F8FAFC"/>
           </a:solidFill>
-          <a:ln>
-            <a:noFill/>
+          <a:ln w="9525">
+            <a:solidFill>
+              <a:srgbClr val="CBD5E1"/>
+            </a:solidFill>
           </a:ln>
         </p:spPr>
         <p:style>
@@ -53924,142 +55225,145 @@
       </p:sp>
       <p:sp>
         <p:nvSpPr>
-          <p:cNvPr id="82" name="TextBox 81"/>
-          <p:cNvSpPr txBox="1"/>
-          <p:nvPr/>
-        </p:nvSpPr>
-        <p:spPr>
-          <a:xfrm>
-            <a:off x="8769096" y="3108960"/>
-            <a:ext cx="1655063" cy="164592"/>
-          </a:xfrm>
-          <a:prstGeom prst="rect">
-            <a:avLst/>
-          </a:prstGeom>
-          <a:noFill/>
-        </p:spPr>
-        <p:txBody>
-          <a:bodyPr wrap="square" lIns="27432" rIns="27432" tIns="9144" bIns="9144" anchor="ctr">
+          <p:cNvPr id="88" name="TextBox 87"/>
+          <p:cNvSpPr txBox="1"/>
+          <p:nvPr/>
+        </p:nvSpPr>
+        <p:spPr>
+          <a:xfrm>
+            <a:off x="9290304" y="3063240"/>
+            <a:ext cx="713232" cy="256031"/>
+          </a:xfrm>
+          <a:prstGeom prst="rect">
+            <a:avLst/>
+          </a:prstGeom>
+          <a:noFill/>
+        </p:spPr>
+        <p:txBody>
+          <a:bodyPr wrap="square" lIns="27432" rIns="27432" tIns="9144" bIns="9144" anchor="t">
             <a:spAutoFit/>
           </a:bodyPr>
           <a:lstStyle/>
           <a:p>
             <a:pPr algn="l">
-              <a:defRPr sz="780" b="1">
-                <a:solidFill>
-                  <a:srgbClr val="64748B"/>
-                </a:solidFill>
-                <a:latin typeface="Microsoft YaHei"/>
-              </a:defRPr>
-            </a:pPr>
-            <a:r>
-              <a:rPr sz="780" b="1">
-                <a:solidFill>
-                  <a:srgbClr val="64748B"/>
-                </a:solidFill>
-                <a:latin typeface="Microsoft YaHei"/>
-              </a:rPr>
-              <a:t>Bias reduction</a:t>
-            </a:r>
-          </a:p>
-        </p:txBody>
-      </p:sp>
-      <p:sp>
-        <p:nvSpPr>
-          <p:cNvPr id="83" name="TextBox 82"/>
-          <p:cNvSpPr txBox="1"/>
-          <p:nvPr/>
-        </p:nvSpPr>
-        <p:spPr>
-          <a:xfrm>
-            <a:off x="8769096" y="3282696"/>
-            <a:ext cx="1655063" cy="292608"/>
-          </a:xfrm>
-          <a:prstGeom prst="rect">
-            <a:avLst/>
-          </a:prstGeom>
-          <a:noFill/>
-        </p:spPr>
-        <p:txBody>
-          <a:bodyPr wrap="square" lIns="27432" rIns="27432" tIns="9144" bIns="9144" anchor="ctr">
+              <a:defRPr sz="1200" b="0">
+                <a:solidFill>
+                  <a:srgbClr val="0F172A"/>
+                </a:solidFill>
+                <a:latin typeface="Microsoft YaHei"/>
+              </a:defRPr>
+            </a:pPr>
+            <a:r>
+              <a:rPr sz="1200" b="0">
+                <a:solidFill>
+                  <a:srgbClr val="0F172A"/>
+                </a:solidFill>
+                <a:latin typeface="Microsoft YaHei"/>
+              </a:rPr>
+              <a:t>+0.463</a:t>
+            </a:r>
+          </a:p>
+        </p:txBody>
+      </p:sp>
+      <p:sp>
+        <p:nvSpPr>
+          <p:cNvPr id="89" name="Rectangle 88"/>
+          <p:cNvSpPr/>
+          <p:nvPr/>
+        </p:nvSpPr>
+        <p:spPr>
+          <a:xfrm>
+            <a:off x="10058400" y="2999232"/>
+            <a:ext cx="731520" cy="384048"/>
+          </a:xfrm>
+          <a:prstGeom prst="rect">
+            <a:avLst/>
+          </a:prstGeom>
+          <a:solidFill>
+            <a:srgbClr val="F8FAFC"/>
+          </a:solidFill>
+          <a:ln w="9525">
+            <a:solidFill>
+              <a:srgbClr val="CBD5E1"/>
+            </a:solidFill>
+          </a:ln>
+        </p:spPr>
+        <p:style>
+          <a:lnRef idx="1">
+            <a:schemeClr val="accent1"/>
+          </a:lnRef>
+          <a:fillRef idx="3">
+            <a:schemeClr val="accent1"/>
+          </a:fillRef>
+          <a:effectRef idx="2">
+            <a:schemeClr val="accent1"/>
+          </a:effectRef>
+          <a:fontRef idx="minor">
+            <a:schemeClr val="lt1"/>
+          </a:fontRef>
+        </p:style>
+        <p:txBody>
+          <a:bodyPr rtlCol="0" anchor="ctr"/>
+          <a:lstStyle/>
+          <a:p>
+            <a:pPr algn="ctr"/>
+          </a:p>
+        </p:txBody>
+      </p:sp>
+      <p:sp>
+        <p:nvSpPr>
+          <p:cNvPr id="90" name="TextBox 89"/>
+          <p:cNvSpPr txBox="1"/>
+          <p:nvPr/>
+        </p:nvSpPr>
+        <p:spPr>
+          <a:xfrm>
+            <a:off x="10113264" y="3063240"/>
+            <a:ext cx="621792" cy="256031"/>
+          </a:xfrm>
+          <a:prstGeom prst="rect">
+            <a:avLst/>
+          </a:prstGeom>
+          <a:noFill/>
+        </p:spPr>
+        <p:txBody>
+          <a:bodyPr wrap="square" lIns="27432" rIns="27432" tIns="9144" bIns="9144" anchor="t">
             <a:spAutoFit/>
           </a:bodyPr>
           <a:lstStyle/>
           <a:p>
             <a:pPr algn="l">
-              <a:defRPr sz="1600" b="1">
-                <a:solidFill>
-                  <a:srgbClr val="2563EB"/>
-                </a:solidFill>
-                <a:latin typeface="Microsoft YaHei"/>
-              </a:defRPr>
-            </a:pPr>
-            <a:r>
-              <a:rPr sz="1600" b="1">
-                <a:solidFill>
-                  <a:srgbClr val="2563EB"/>
-                </a:solidFill>
-                <a:latin typeface="Microsoft YaHei"/>
-              </a:rPr>
-              <a:t>-99.4%</a:t>
-            </a:r>
-          </a:p>
-        </p:txBody>
-      </p:sp>
-      <p:sp>
-        <p:nvSpPr>
-          <p:cNvPr id="84" name="TextBox 83"/>
-          <p:cNvSpPr txBox="1"/>
-          <p:nvPr/>
-        </p:nvSpPr>
-        <p:spPr>
-          <a:xfrm>
-            <a:off x="8769096" y="3593591"/>
-            <a:ext cx="1655063" cy="182880"/>
-          </a:xfrm>
-          <a:prstGeom prst="rect">
-            <a:avLst/>
-          </a:prstGeom>
-          <a:noFill/>
-        </p:spPr>
-        <p:txBody>
-          <a:bodyPr wrap="square" lIns="27432" rIns="27432" tIns="9144" bIns="9144" anchor="ctr">
-            <a:spAutoFit/>
-          </a:bodyPr>
-          <a:lstStyle/>
-          <a:p>
-            <a:pPr algn="l">
-              <a:defRPr sz="750" b="0">
-                <a:solidFill>
-                  <a:srgbClr val="64748B"/>
-                </a:solidFill>
-                <a:latin typeface="Microsoft YaHei"/>
-              </a:defRPr>
-            </a:pPr>
-            <a:r>
-              <a:rPr sz="750" b="0">
-                <a:solidFill>
-                  <a:srgbClr val="64748B"/>
-                </a:solidFill>
-                <a:latin typeface="Microsoft YaHei"/>
-              </a:rPr>
-              <a:t>absolute weighted bias</a:t>
-            </a:r>
-          </a:p>
-        </p:txBody>
-      </p:sp>
-      <p:sp>
-        <p:nvSpPr>
-          <p:cNvPr id="85" name="Rounded Rectangle 84"/>
+              <a:defRPr sz="1200" b="0">
+                <a:solidFill>
+                  <a:srgbClr val="0F172A"/>
+                </a:solidFill>
+                <a:latin typeface="Microsoft YaHei"/>
+              </a:defRPr>
+            </a:pPr>
+            <a:r>
+              <a:rPr sz="1200" b="0">
+                <a:solidFill>
+                  <a:srgbClr val="0F172A"/>
+                </a:solidFill>
+                <a:latin typeface="Microsoft YaHei"/>
+              </a:rPr>
+              <a:t>0.154</a:t>
+            </a:r>
+          </a:p>
+        </p:txBody>
+      </p:sp>
+      <p:sp>
+        <p:nvSpPr>
+          <p:cNvPr id="91" name="Rectangle 90"/>
           <p:cNvSpPr/>
           <p:nvPr/>
         </p:nvSpPr>
         <p:spPr>
           <a:xfrm>
-            <a:off x="749808" y="4892040"/>
-            <a:ext cx="10012680" cy="1115568"/>
-          </a:xfrm>
-          <a:prstGeom prst="roundRect">
+            <a:off x="6537960" y="3383280"/>
+            <a:ext cx="1874519" cy="384048"/>
+          </a:xfrm>
+          <a:prstGeom prst="rect">
             <a:avLst/>
           </a:prstGeom>
           <a:solidFill>
@@ -54095,7 +55399,783 @@
       </p:sp>
       <p:sp>
         <p:nvSpPr>
-          <p:cNvPr id="86" name="Rectangle 85"/>
+          <p:cNvPr id="92" name="TextBox 91"/>
+          <p:cNvSpPr txBox="1"/>
+          <p:nvPr/>
+        </p:nvSpPr>
+        <p:spPr>
+          <a:xfrm>
+            <a:off x="6592824" y="3447288"/>
+            <a:ext cx="1764791" cy="256031"/>
+          </a:xfrm>
+          <a:prstGeom prst="rect">
+            <a:avLst/>
+          </a:prstGeom>
+          <a:noFill/>
+        </p:spPr>
+        <p:txBody>
+          <a:bodyPr wrap="square" lIns="27432" rIns="27432" tIns="9144" bIns="9144" anchor="t">
+            <a:spAutoFit/>
+          </a:bodyPr>
+          <a:lstStyle/>
+          <a:p>
+            <a:pPr algn="l">
+              <a:defRPr sz="1200" b="1">
+                <a:solidFill>
+                  <a:srgbClr val="0F172A"/>
+                </a:solidFill>
+                <a:latin typeface="Microsoft YaHei"/>
+              </a:defRPr>
+            </a:pPr>
+            <a:r>
+              <a:rPr sz="1200" b="1">
+                <a:solidFill>
+                  <a:srgbClr val="0F172A"/>
+                </a:solidFill>
+                <a:latin typeface="Microsoft YaHei"/>
+              </a:rPr>
+              <a:t>Hybrid gated</a:t>
+            </a:r>
+          </a:p>
+        </p:txBody>
+      </p:sp>
+      <p:sp>
+        <p:nvSpPr>
+          <p:cNvPr id="93" name="Rectangle 92"/>
+          <p:cNvSpPr/>
+          <p:nvPr/>
+        </p:nvSpPr>
+        <p:spPr>
+          <a:xfrm>
+            <a:off x="8412480" y="3383280"/>
+            <a:ext cx="822960" cy="384048"/>
+          </a:xfrm>
+          <a:prstGeom prst="rect">
+            <a:avLst/>
+          </a:prstGeom>
+          <a:solidFill>
+            <a:srgbClr val="F1F5F9"/>
+          </a:solidFill>
+          <a:ln w="9525">
+            <a:solidFill>
+              <a:srgbClr val="CBD5E1"/>
+            </a:solidFill>
+          </a:ln>
+        </p:spPr>
+        <p:style>
+          <a:lnRef idx="1">
+            <a:schemeClr val="accent1"/>
+          </a:lnRef>
+          <a:fillRef idx="3">
+            <a:schemeClr val="accent1"/>
+          </a:fillRef>
+          <a:effectRef idx="2">
+            <a:schemeClr val="accent1"/>
+          </a:effectRef>
+          <a:fontRef idx="minor">
+            <a:schemeClr val="lt1"/>
+          </a:fontRef>
+        </p:style>
+        <p:txBody>
+          <a:bodyPr rtlCol="0" anchor="ctr"/>
+          <a:lstStyle/>
+          <a:p>
+            <a:pPr algn="ctr"/>
+          </a:p>
+        </p:txBody>
+      </p:sp>
+      <p:sp>
+        <p:nvSpPr>
+          <p:cNvPr id="94" name="TextBox 93"/>
+          <p:cNvSpPr txBox="1"/>
+          <p:nvPr/>
+        </p:nvSpPr>
+        <p:spPr>
+          <a:xfrm>
+            <a:off x="8467344" y="3447288"/>
+            <a:ext cx="713232" cy="256031"/>
+          </a:xfrm>
+          <a:prstGeom prst="rect">
+            <a:avLst/>
+          </a:prstGeom>
+          <a:noFill/>
+        </p:spPr>
+        <p:txBody>
+          <a:bodyPr wrap="square" lIns="27432" rIns="27432" tIns="9144" bIns="9144" anchor="t">
+            <a:spAutoFit/>
+          </a:bodyPr>
+          <a:lstStyle/>
+          <a:p>
+            <a:pPr algn="l">
+              <a:defRPr sz="1200" b="0">
+                <a:solidFill>
+                  <a:srgbClr val="0F172A"/>
+                </a:solidFill>
+                <a:latin typeface="Microsoft YaHei"/>
+              </a:defRPr>
+            </a:pPr>
+            <a:r>
+              <a:rPr sz="1200" b="0">
+                <a:solidFill>
+                  <a:srgbClr val="0F172A"/>
+                </a:solidFill>
+                <a:latin typeface="Microsoft YaHei"/>
+              </a:rPr>
+              <a:t>2.502</a:t>
+            </a:r>
+          </a:p>
+        </p:txBody>
+      </p:sp>
+      <p:sp>
+        <p:nvSpPr>
+          <p:cNvPr id="95" name="Rectangle 94"/>
+          <p:cNvSpPr/>
+          <p:nvPr/>
+        </p:nvSpPr>
+        <p:spPr>
+          <a:xfrm>
+            <a:off x="9235440" y="3383280"/>
+            <a:ext cx="822960" cy="384048"/>
+          </a:xfrm>
+          <a:prstGeom prst="rect">
+            <a:avLst/>
+          </a:prstGeom>
+          <a:solidFill>
+            <a:srgbClr val="F1F5F9"/>
+          </a:solidFill>
+          <a:ln w="9525">
+            <a:solidFill>
+              <a:srgbClr val="CBD5E1"/>
+            </a:solidFill>
+          </a:ln>
+        </p:spPr>
+        <p:style>
+          <a:lnRef idx="1">
+            <a:schemeClr val="accent1"/>
+          </a:lnRef>
+          <a:fillRef idx="3">
+            <a:schemeClr val="accent1"/>
+          </a:fillRef>
+          <a:effectRef idx="2">
+            <a:schemeClr val="accent1"/>
+          </a:effectRef>
+          <a:fontRef idx="minor">
+            <a:schemeClr val="lt1"/>
+          </a:fontRef>
+        </p:style>
+        <p:txBody>
+          <a:bodyPr rtlCol="0" anchor="ctr"/>
+          <a:lstStyle/>
+          <a:p>
+            <a:pPr algn="ctr"/>
+          </a:p>
+        </p:txBody>
+      </p:sp>
+      <p:sp>
+        <p:nvSpPr>
+          <p:cNvPr id="96" name="TextBox 95"/>
+          <p:cNvSpPr txBox="1"/>
+          <p:nvPr/>
+        </p:nvSpPr>
+        <p:spPr>
+          <a:xfrm>
+            <a:off x="9290304" y="3447288"/>
+            <a:ext cx="713232" cy="256031"/>
+          </a:xfrm>
+          <a:prstGeom prst="rect">
+            <a:avLst/>
+          </a:prstGeom>
+          <a:noFill/>
+        </p:spPr>
+        <p:txBody>
+          <a:bodyPr wrap="square" lIns="27432" rIns="27432" tIns="9144" bIns="9144" anchor="t">
+            <a:spAutoFit/>
+          </a:bodyPr>
+          <a:lstStyle/>
+          <a:p>
+            <a:pPr algn="l">
+              <a:defRPr sz="1200" b="0">
+                <a:solidFill>
+                  <a:srgbClr val="0F172A"/>
+                </a:solidFill>
+                <a:latin typeface="Microsoft YaHei"/>
+              </a:defRPr>
+            </a:pPr>
+            <a:r>
+              <a:rPr sz="1200" b="0">
+                <a:solidFill>
+                  <a:srgbClr val="0F172A"/>
+                </a:solidFill>
+                <a:latin typeface="Microsoft YaHei"/>
+              </a:rPr>
+              <a:t>-0.023</a:t>
+            </a:r>
+          </a:p>
+        </p:txBody>
+      </p:sp>
+      <p:sp>
+        <p:nvSpPr>
+          <p:cNvPr id="97" name="Rectangle 96"/>
+          <p:cNvSpPr/>
+          <p:nvPr/>
+        </p:nvSpPr>
+        <p:spPr>
+          <a:xfrm>
+            <a:off x="10058400" y="3383280"/>
+            <a:ext cx="731520" cy="384048"/>
+          </a:xfrm>
+          <a:prstGeom prst="rect">
+            <a:avLst/>
+          </a:prstGeom>
+          <a:solidFill>
+            <a:srgbClr val="F1F5F9"/>
+          </a:solidFill>
+          <a:ln w="9525">
+            <a:solidFill>
+              <a:srgbClr val="CBD5E1"/>
+            </a:solidFill>
+          </a:ln>
+        </p:spPr>
+        <p:style>
+          <a:lnRef idx="1">
+            <a:schemeClr val="accent1"/>
+          </a:lnRef>
+          <a:fillRef idx="3">
+            <a:schemeClr val="accent1"/>
+          </a:fillRef>
+          <a:effectRef idx="2">
+            <a:schemeClr val="accent1"/>
+          </a:effectRef>
+          <a:fontRef idx="minor">
+            <a:schemeClr val="lt1"/>
+          </a:fontRef>
+        </p:style>
+        <p:txBody>
+          <a:bodyPr rtlCol="0" anchor="ctr"/>
+          <a:lstStyle/>
+          <a:p>
+            <a:pPr algn="ctr"/>
+          </a:p>
+        </p:txBody>
+      </p:sp>
+      <p:sp>
+        <p:nvSpPr>
+          <p:cNvPr id="98" name="TextBox 97"/>
+          <p:cNvSpPr txBox="1"/>
+          <p:nvPr/>
+        </p:nvSpPr>
+        <p:spPr>
+          <a:xfrm>
+            <a:off x="10113264" y="3447288"/>
+            <a:ext cx="621792" cy="256031"/>
+          </a:xfrm>
+          <a:prstGeom prst="rect">
+            <a:avLst/>
+          </a:prstGeom>
+          <a:noFill/>
+        </p:spPr>
+        <p:txBody>
+          <a:bodyPr wrap="square" lIns="27432" rIns="27432" tIns="9144" bIns="9144" anchor="t">
+            <a:spAutoFit/>
+          </a:bodyPr>
+          <a:lstStyle/>
+          <a:p>
+            <a:pPr algn="l">
+              <a:defRPr sz="1200" b="0">
+                <a:solidFill>
+                  <a:srgbClr val="0F172A"/>
+                </a:solidFill>
+                <a:latin typeface="Microsoft YaHei"/>
+              </a:defRPr>
+            </a:pPr>
+            <a:r>
+              <a:rPr sz="1200" b="0">
+                <a:solidFill>
+                  <a:srgbClr val="0F172A"/>
+                </a:solidFill>
+                <a:latin typeface="Microsoft YaHei"/>
+              </a:rPr>
+              <a:t>0.248</a:t>
+            </a:r>
+          </a:p>
+        </p:txBody>
+      </p:sp>
+      <p:sp>
+        <p:nvSpPr>
+          <p:cNvPr id="99" name="Rounded Rectangle 98"/>
+          <p:cNvSpPr/>
+          <p:nvPr/>
+        </p:nvSpPr>
+        <p:spPr>
+          <a:xfrm>
+            <a:off x="6547104" y="3950208"/>
+            <a:ext cx="1874519" cy="658368"/>
+          </a:xfrm>
+          <a:prstGeom prst="roundRect">
+            <a:avLst/>
+          </a:prstGeom>
+          <a:solidFill>
+            <a:srgbClr val="F8FAFC"/>
+          </a:solidFill>
+          <a:ln w="9525">
+            <a:solidFill>
+              <a:srgbClr val="CBD5E1"/>
+            </a:solidFill>
+          </a:ln>
+        </p:spPr>
+        <p:style>
+          <a:lnRef idx="1">
+            <a:schemeClr val="accent1"/>
+          </a:lnRef>
+          <a:fillRef idx="3">
+            <a:schemeClr val="accent1"/>
+          </a:fillRef>
+          <a:effectRef idx="2">
+            <a:schemeClr val="accent1"/>
+          </a:effectRef>
+          <a:fontRef idx="minor">
+            <a:schemeClr val="lt1"/>
+          </a:fontRef>
+        </p:style>
+        <p:txBody>
+          <a:bodyPr rtlCol="0" anchor="ctr"/>
+          <a:lstStyle/>
+          <a:p>
+            <a:pPr algn="ctr"/>
+          </a:p>
+        </p:txBody>
+      </p:sp>
+      <p:sp>
+        <p:nvSpPr>
+          <p:cNvPr id="100" name="Rectangle 99"/>
+          <p:cNvSpPr/>
+          <p:nvPr/>
+        </p:nvSpPr>
+        <p:spPr>
+          <a:xfrm>
+            <a:off x="6547104" y="3950208"/>
+            <a:ext cx="50292" cy="658368"/>
+          </a:xfrm>
+          <a:prstGeom prst="rect">
+            <a:avLst/>
+          </a:prstGeom>
+          <a:solidFill>
+            <a:srgbClr val="198754"/>
+          </a:solidFill>
+          <a:ln>
+            <a:noFill/>
+          </a:ln>
+        </p:spPr>
+        <p:style>
+          <a:lnRef idx="1">
+            <a:schemeClr val="accent1"/>
+          </a:lnRef>
+          <a:fillRef idx="3">
+            <a:schemeClr val="accent1"/>
+          </a:fillRef>
+          <a:effectRef idx="2">
+            <a:schemeClr val="accent1"/>
+          </a:effectRef>
+          <a:fontRef idx="minor">
+            <a:schemeClr val="lt1"/>
+          </a:fontRef>
+        </p:style>
+        <p:txBody>
+          <a:bodyPr rtlCol="0" anchor="ctr"/>
+          <a:lstStyle/>
+          <a:p>
+            <a:pPr algn="ctr"/>
+          </a:p>
+        </p:txBody>
+      </p:sp>
+      <p:sp>
+        <p:nvSpPr>
+          <p:cNvPr id="101" name="TextBox 100"/>
+          <p:cNvSpPr txBox="1"/>
+          <p:nvPr/>
+        </p:nvSpPr>
+        <p:spPr>
+          <a:xfrm>
+            <a:off x="6675120" y="4023360"/>
+            <a:ext cx="1655063" cy="164592"/>
+          </a:xfrm>
+          <a:prstGeom prst="rect">
+            <a:avLst/>
+          </a:prstGeom>
+          <a:noFill/>
+        </p:spPr>
+        <p:txBody>
+          <a:bodyPr wrap="square" lIns="27432" rIns="27432" tIns="9144" bIns="9144" anchor="ctr">
+            <a:spAutoFit/>
+          </a:bodyPr>
+          <a:lstStyle/>
+          <a:p>
+            <a:pPr algn="l">
+              <a:defRPr sz="780" b="1">
+                <a:solidFill>
+                  <a:srgbClr val="64748B"/>
+                </a:solidFill>
+                <a:latin typeface="Microsoft YaHei"/>
+              </a:defRPr>
+            </a:pPr>
+            <a:r>
+              <a:rPr sz="780" b="1">
+                <a:solidFill>
+                  <a:srgbClr val="64748B"/>
+                </a:solidFill>
+                <a:latin typeface="Microsoft YaHei"/>
+              </a:rPr>
+              <a:t>MAE reduction</a:t>
+            </a:r>
+          </a:p>
+        </p:txBody>
+      </p:sp>
+      <p:sp>
+        <p:nvSpPr>
+          <p:cNvPr id="102" name="TextBox 101"/>
+          <p:cNvSpPr txBox="1"/>
+          <p:nvPr/>
+        </p:nvSpPr>
+        <p:spPr>
+          <a:xfrm>
+            <a:off x="6675120" y="4197096"/>
+            <a:ext cx="1655063" cy="292608"/>
+          </a:xfrm>
+          <a:prstGeom prst="rect">
+            <a:avLst/>
+          </a:prstGeom>
+          <a:noFill/>
+        </p:spPr>
+        <p:txBody>
+          <a:bodyPr wrap="square" lIns="27432" rIns="27432" tIns="9144" bIns="9144" anchor="ctr">
+            <a:spAutoFit/>
+          </a:bodyPr>
+          <a:lstStyle/>
+          <a:p>
+            <a:pPr algn="l">
+              <a:defRPr sz="1600" b="1">
+                <a:solidFill>
+                  <a:srgbClr val="198754"/>
+                </a:solidFill>
+                <a:latin typeface="Microsoft YaHei"/>
+              </a:defRPr>
+            </a:pPr>
+            <a:r>
+              <a:rPr sz="1600" b="1">
+                <a:solidFill>
+                  <a:srgbClr val="198754"/>
+                </a:solidFill>
+                <a:latin typeface="Microsoft YaHei"/>
+              </a:rPr>
+              <a:t>-42.3%</a:t>
+            </a:r>
+          </a:p>
+        </p:txBody>
+      </p:sp>
+      <p:sp>
+        <p:nvSpPr>
+          <p:cNvPr id="103" name="TextBox 102"/>
+          <p:cNvSpPr txBox="1"/>
+          <p:nvPr/>
+        </p:nvSpPr>
+        <p:spPr>
+          <a:xfrm>
+            <a:off x="6675120" y="4507992"/>
+            <a:ext cx="1655063" cy="182880"/>
+          </a:xfrm>
+          <a:prstGeom prst="rect">
+            <a:avLst/>
+          </a:prstGeom>
+          <a:noFill/>
+        </p:spPr>
+        <p:txBody>
+          <a:bodyPr wrap="square" lIns="27432" rIns="27432" tIns="9144" bIns="9144" anchor="ctr">
+            <a:spAutoFit/>
+          </a:bodyPr>
+          <a:lstStyle/>
+          <a:p>
+            <a:pPr algn="l">
+              <a:defRPr sz="750" b="0">
+                <a:solidFill>
+                  <a:srgbClr val="64748B"/>
+                </a:solidFill>
+                <a:latin typeface="Microsoft YaHei"/>
+              </a:defRPr>
+            </a:pPr>
+            <a:r>
+              <a:rPr sz="750" b="0">
+                <a:solidFill>
+                  <a:srgbClr val="64748B"/>
+                </a:solidFill>
+                <a:latin typeface="Microsoft YaHei"/>
+              </a:rPr>
+              <a:t>primary vs XGBoost</a:t>
+            </a:r>
+          </a:p>
+        </p:txBody>
+      </p:sp>
+      <p:sp>
+        <p:nvSpPr>
+          <p:cNvPr id="104" name="Rounded Rectangle 103"/>
+          <p:cNvSpPr/>
+          <p:nvPr/>
+        </p:nvSpPr>
+        <p:spPr>
+          <a:xfrm>
+            <a:off x="8641080" y="3950208"/>
+            <a:ext cx="1874519" cy="658368"/>
+          </a:xfrm>
+          <a:prstGeom prst="roundRect">
+            <a:avLst/>
+          </a:prstGeom>
+          <a:solidFill>
+            <a:srgbClr val="F8FAFC"/>
+          </a:solidFill>
+          <a:ln w="9525">
+            <a:solidFill>
+              <a:srgbClr val="CBD5E1"/>
+            </a:solidFill>
+          </a:ln>
+        </p:spPr>
+        <p:style>
+          <a:lnRef idx="1">
+            <a:schemeClr val="accent1"/>
+          </a:lnRef>
+          <a:fillRef idx="3">
+            <a:schemeClr val="accent1"/>
+          </a:fillRef>
+          <a:effectRef idx="2">
+            <a:schemeClr val="accent1"/>
+          </a:effectRef>
+          <a:fontRef idx="minor">
+            <a:schemeClr val="lt1"/>
+          </a:fontRef>
+        </p:style>
+        <p:txBody>
+          <a:bodyPr rtlCol="0" anchor="ctr"/>
+          <a:lstStyle/>
+          <a:p>
+            <a:pPr algn="ctr"/>
+          </a:p>
+        </p:txBody>
+      </p:sp>
+      <p:sp>
+        <p:nvSpPr>
+          <p:cNvPr id="105" name="Rectangle 104"/>
+          <p:cNvSpPr/>
+          <p:nvPr/>
+        </p:nvSpPr>
+        <p:spPr>
+          <a:xfrm>
+            <a:off x="8641080" y="3950208"/>
+            <a:ext cx="50292" cy="658368"/>
+          </a:xfrm>
+          <a:prstGeom prst="rect">
+            <a:avLst/>
+          </a:prstGeom>
+          <a:solidFill>
+            <a:srgbClr val="2563EB"/>
+          </a:solidFill>
+          <a:ln>
+            <a:noFill/>
+          </a:ln>
+        </p:spPr>
+        <p:style>
+          <a:lnRef idx="1">
+            <a:schemeClr val="accent1"/>
+          </a:lnRef>
+          <a:fillRef idx="3">
+            <a:schemeClr val="accent1"/>
+          </a:fillRef>
+          <a:effectRef idx="2">
+            <a:schemeClr val="accent1"/>
+          </a:effectRef>
+          <a:fontRef idx="minor">
+            <a:schemeClr val="lt1"/>
+          </a:fontRef>
+        </p:style>
+        <p:txBody>
+          <a:bodyPr rtlCol="0" anchor="ctr"/>
+          <a:lstStyle/>
+          <a:p>
+            <a:pPr algn="ctr"/>
+          </a:p>
+        </p:txBody>
+      </p:sp>
+      <p:sp>
+        <p:nvSpPr>
+          <p:cNvPr id="106" name="TextBox 105"/>
+          <p:cNvSpPr txBox="1"/>
+          <p:nvPr/>
+        </p:nvSpPr>
+        <p:spPr>
+          <a:xfrm>
+            <a:off x="8769096" y="4023360"/>
+            <a:ext cx="1655063" cy="164592"/>
+          </a:xfrm>
+          <a:prstGeom prst="rect">
+            <a:avLst/>
+          </a:prstGeom>
+          <a:noFill/>
+        </p:spPr>
+        <p:txBody>
+          <a:bodyPr wrap="square" lIns="27432" rIns="27432" tIns="9144" bIns="9144" anchor="ctr">
+            <a:spAutoFit/>
+          </a:bodyPr>
+          <a:lstStyle/>
+          <a:p>
+            <a:pPr algn="l">
+              <a:defRPr sz="780" b="1">
+                <a:solidFill>
+                  <a:srgbClr val="64748B"/>
+                </a:solidFill>
+                <a:latin typeface="Microsoft YaHei"/>
+              </a:defRPr>
+            </a:pPr>
+            <a:r>
+              <a:rPr sz="780" b="1">
+                <a:solidFill>
+                  <a:srgbClr val="64748B"/>
+                </a:solidFill>
+                <a:latin typeface="Microsoft YaHei"/>
+              </a:rPr>
+              <a:t>Bias reduction</a:t>
+            </a:r>
+          </a:p>
+        </p:txBody>
+      </p:sp>
+      <p:sp>
+        <p:nvSpPr>
+          <p:cNvPr id="107" name="TextBox 106"/>
+          <p:cNvSpPr txBox="1"/>
+          <p:nvPr/>
+        </p:nvSpPr>
+        <p:spPr>
+          <a:xfrm>
+            <a:off x="8769096" y="4197096"/>
+            <a:ext cx="1655063" cy="292608"/>
+          </a:xfrm>
+          <a:prstGeom prst="rect">
+            <a:avLst/>
+          </a:prstGeom>
+          <a:noFill/>
+        </p:spPr>
+        <p:txBody>
+          <a:bodyPr wrap="square" lIns="27432" rIns="27432" tIns="9144" bIns="9144" anchor="ctr">
+            <a:spAutoFit/>
+          </a:bodyPr>
+          <a:lstStyle/>
+          <a:p>
+            <a:pPr algn="l">
+              <a:defRPr sz="1600" b="1">
+                <a:solidFill>
+                  <a:srgbClr val="2563EB"/>
+                </a:solidFill>
+                <a:latin typeface="Microsoft YaHei"/>
+              </a:defRPr>
+            </a:pPr>
+            <a:r>
+              <a:rPr sz="1600" b="1">
+                <a:solidFill>
+                  <a:srgbClr val="2563EB"/>
+                </a:solidFill>
+                <a:latin typeface="Microsoft YaHei"/>
+              </a:rPr>
+              <a:t>-99.4%</a:t>
+            </a:r>
+          </a:p>
+        </p:txBody>
+      </p:sp>
+      <p:sp>
+        <p:nvSpPr>
+          <p:cNvPr id="108" name="TextBox 107"/>
+          <p:cNvSpPr txBox="1"/>
+          <p:nvPr/>
+        </p:nvSpPr>
+        <p:spPr>
+          <a:xfrm>
+            <a:off x="8769096" y="4507992"/>
+            <a:ext cx="1655063" cy="182880"/>
+          </a:xfrm>
+          <a:prstGeom prst="rect">
+            <a:avLst/>
+          </a:prstGeom>
+          <a:noFill/>
+        </p:spPr>
+        <p:txBody>
+          <a:bodyPr wrap="square" lIns="27432" rIns="27432" tIns="9144" bIns="9144" anchor="ctr">
+            <a:spAutoFit/>
+          </a:bodyPr>
+          <a:lstStyle/>
+          <a:p>
+            <a:pPr algn="l">
+              <a:defRPr sz="750" b="0">
+                <a:solidFill>
+                  <a:srgbClr val="64748B"/>
+                </a:solidFill>
+                <a:latin typeface="Microsoft YaHei"/>
+              </a:defRPr>
+            </a:pPr>
+            <a:r>
+              <a:rPr sz="750" b="0">
+                <a:solidFill>
+                  <a:srgbClr val="64748B"/>
+                </a:solidFill>
+                <a:latin typeface="Microsoft YaHei"/>
+              </a:rPr>
+              <a:t>absolute weighted bias</a:t>
+            </a:r>
+          </a:p>
+        </p:txBody>
+      </p:sp>
+      <p:sp>
+        <p:nvSpPr>
+          <p:cNvPr id="109" name="Rounded Rectangle 108"/>
+          <p:cNvSpPr/>
+          <p:nvPr/>
+        </p:nvSpPr>
+        <p:spPr>
+          <a:xfrm>
+            <a:off x="749808" y="4892040"/>
+            <a:ext cx="10012680" cy="1115568"/>
+          </a:xfrm>
+          <a:prstGeom prst="roundRect">
+            <a:avLst/>
+          </a:prstGeom>
+          <a:solidFill>
+            <a:srgbClr val="F1F5F9"/>
+          </a:solidFill>
+          <a:ln w="9525">
+            <a:solidFill>
+              <a:srgbClr val="CBD5E1"/>
+            </a:solidFill>
+          </a:ln>
+        </p:spPr>
+        <p:style>
+          <a:lnRef idx="1">
+            <a:schemeClr val="accent1"/>
+          </a:lnRef>
+          <a:fillRef idx="3">
+            <a:schemeClr val="accent1"/>
+          </a:fillRef>
+          <a:effectRef idx="2">
+            <a:schemeClr val="accent1"/>
+          </a:effectRef>
+          <a:fontRef idx="minor">
+            <a:schemeClr val="lt1"/>
+          </a:fontRef>
+        </p:style>
+        <p:txBody>
+          <a:bodyPr rtlCol="0" anchor="ctr"/>
+          <a:lstStyle/>
+          <a:p>
+            <a:pPr algn="ctr"/>
+          </a:p>
+        </p:txBody>
+      </p:sp>
+      <p:sp>
+        <p:nvSpPr>
+          <p:cNvPr id="110" name="Rectangle 109"/>
           <p:cNvSpPr/>
           <p:nvPr/>
         </p:nvSpPr>
@@ -54138,7 +56218,7 @@
       </p:sp>
       <p:sp>
         <p:nvSpPr>
-          <p:cNvPr id="87" name="TextBox 86"/>
+          <p:cNvPr id="111" name="TextBox 110"/>
           <p:cNvSpPr txBox="1"/>
           <p:nvPr/>
         </p:nvSpPr>
@@ -54173,14 +56253,14 @@
                 </a:solidFill>
                 <a:latin typeface="Microsoft YaHei"/>
               </a:rPr>
-              <a:t>CatBoost GPU 等更强表格模型仍明显高估 2022；加入事件折减后，wMAE 降到 2.50，bias 接近 0。</a:t>
-            </a:r>
-          </a:p>
-        </p:txBody>
-      </p:sp>
-      <p:sp>
-        <p:nvSpPr>
-          <p:cNvPr id="88" name="TextBox 87"/>
+              <a:t>CatBoost GPU、zero-shot LLM rule tree 和少量历史校准规则都没有超过主方法；加入 gated event adapter 后，wMAE 降到 2.50，bias 接近 0。</a:t>
+            </a:r>
+          </a:p>
+        </p:txBody>
+      </p:sp>
+      <p:sp>
+        <p:nvSpPr>
+          <p:cNvPr id="112" name="TextBox 111"/>
           <p:cNvSpPr txBox="1"/>
           <p:nvPr/>
         </p:nvSpPr>
@@ -54215,7 +56295,7 @@
                 </a:solidFill>
                 <a:latin typeface="Microsoft YaHei"/>
               </a:rPr>
-              <a:t>Stronger tabular baselines still overpredict 2022. Event correction lowers wMAE to 2.50 and removes most systematic bias.</a:t>
+              <a:t>The main adapter outperforms stronger tabular, zero-shot rule-tree, and small-data calibration baselines while removing most systematic bias.</a:t>
             </a:r>
           </a:p>
         </p:txBody>

--- a/outputs/final_project/NHTS_Travel_Behavior_Template_Presentation.pptx
+++ b/outputs/final_project/NHTS_Travel_Behavior_Template_Presentation.pptx
@@ -35418,7 +35418,7 @@
                 </a:solidFill>
                 <a:latin typeface="Microsoft YaHei"/>
               </a:rPr>
-              <a:t>从交通预测到 LLM 事件泛化</a:t>
+              <a:t>2025-2026: LLM mobility, causal events, and foundation models</a:t>
             </a:r>
           </a:p>
         </p:txBody>
@@ -35697,7 +35697,7 @@
                 </a:solidFill>
                 <a:latin typeface="Microsoft YaHei"/>
               </a:rPr>
-              <a:t>研究方向</a:t>
+              <a:t>最新方向</a:t>
             </a:r>
           </a:p>
         </p:txBody>
@@ -35782,7 +35782,7 @@
                 </a:solidFill>
                 <a:latin typeface="Microsoft YaHei"/>
               </a:rPr>
-              <a:t>已有做法</a:t>
+              <a:t>2025-2026 代表线索</a:t>
             </a:r>
           </a:p>
         </p:txBody>
@@ -35867,7 +35867,7 @@
                 </a:solidFill>
                 <a:latin typeface="Microsoft YaHei"/>
               </a:rPr>
-              <a:t>本项目的切入点</a:t>
+              <a:t>本项目的位置</a:t>
             </a:r>
           </a:p>
         </p:txBody>
@@ -35954,7 +35954,7 @@
                 </a:solidFill>
                 <a:latin typeface="Microsoft YaHei"/>
               </a:rPr>
-              <a:t>Travel demand modeling</a:t>
+              <a:t>Event-driven mobility</a:t>
             </a:r>
           </a:p>
         </p:txBody>
@@ -36041,7 +36041,7 @@
                 </a:solidFill>
                 <a:latin typeface="Microsoft YaHei"/>
               </a:rPr>
-              <a:t>用 household covariates 预测出行强度/方式</a:t>
+              <a:t>ELLMob ICLR'26; CausalMob KDD'25</a:t>
             </a:r>
           </a:p>
         </p:txBody>
@@ -36128,7 +36128,7 @@
                 </a:solidFill>
                 <a:latin typeface="Microsoft YaHei"/>
               </a:rPr>
-              <a:t>2022 是疫情后 shift，不是普通外推</a:t>
+              <a:t>把 COVID shock 转成 label-free event priors</a:t>
             </a:r>
           </a:p>
         </p:txBody>
@@ -36215,7 +36215,7 @@
                 </a:solidFill>
                 <a:latin typeface="Microsoft YaHei"/>
               </a:rPr>
-              <a:t>ML for NHTS</a:t>
+              <a:t>Zero-shot LLM mobility</a:t>
             </a:r>
           </a:p>
         </p:txBody>
@@ -36302,7 +36302,7 @@
                 </a:solidFill>
                 <a:latin typeface="Microsoft YaHei"/>
               </a:rPr>
-              <a:t>XGBoost 等模型捕捉非线性家庭差异</a:t>
+              <a:t>AgentMove NAACL'25; ELP-Mob GIS'25</a:t>
             </a:r>
           </a:p>
         </p:txBody>
@@ -36389,7 +36389,7 @@
                 </a:solidFill>
                 <a:latin typeface="Microsoft YaHei"/>
               </a:rPr>
-              <a:t>传统监督模型缺少事件机制变量</a:t>
+              <a:t>直接 LLM 可做 baseline，但数值校准弱</a:t>
             </a:r>
           </a:p>
         </p:txBody>
@@ -36476,7 +36476,7 @@
                 </a:solidFill>
                 <a:latin typeface="Microsoft YaHei"/>
               </a:rPr>
-              <a:t>LLM mobility forecasting</a:t>
+              <a:t>Mobility foundation models</a:t>
             </a:r>
           </a:p>
         </p:txBody>
@@ -36563,7 +36563,7 @@
                 </a:solidFill>
                 <a:latin typeface="Microsoft YaHei"/>
               </a:rPr>
-              <a:t>利用文本事件、语义和少样本泛化</a:t>
+              <a:t>UniMob KDD'25; STFM survey'25</a:t>
             </a:r>
           </a:p>
         </p:txBody>
@@ -36650,7 +36650,7 @@
                 </a:solidFill>
                 <a:latin typeface="Microsoft YaHei"/>
               </a:rPr>
-              <a:t>LLM 不直接预测 y，只生成 event priors</a:t>
+              <a:t>不训练大 FM；用轻量 adapter 处理 survey shift</a:t>
             </a:r>
           </a:p>
         </p:txBody>
@@ -36737,7 +36737,7 @@
                 </a:solidFill>
                 <a:latin typeface="Microsoft YaHei"/>
               </a:rPr>
-              <a:t>Sustainable mobility</a:t>
+              <a:t>Planning evaluation</a:t>
             </a:r>
           </a:p>
         </p:txBody>
@@ -36824,7 +36824,7 @@
                 </a:solidFill>
                 <a:latin typeface="Microsoft YaHei"/>
               </a:rPr>
-              <a:t>关注 transit、active mobility 与不平等</a:t>
+              <a:t>causal guardrails + multi-objective metrics</a:t>
             </a:r>
           </a:p>
         </p:txBody>
@@ -36911,7 +36911,7 @@
                 </a:solidFill>
                 <a:latin typeface="Microsoft YaHei"/>
               </a:rPr>
-              <a:t>输出扩展到 mode / purpose / derived trips</a:t>
+              <a:t>同时报告 accuracy、bias、equity、mode/purpose</a:t>
             </a:r>
           </a:p>
         </p:txBody>
@@ -37040,7 +37040,7 @@
                 </a:solidFill>
                 <a:latin typeface="Microsoft YaHei"/>
               </a:rPr>
-              <a:t>缺的不是更复杂的黑箱，而是一个能把“日常出行规律”和“疫情事件机制”组合起来、且不依赖 2022 标签校准的可解释框架。</a:t>
+              <a:t>缺口：已有工作多关注 trajectory / flow / sensor forecasting；NHTS household survey 的 post-pandemic label-free event adaptation 仍需要一个可解释、可审计框架。</a:t>
             </a:r>
           </a:p>
         </p:txBody>

--- a/outputs/final_project/NHTS_Travel_Behavior_Template_Presentation.pptx
+++ b/outputs/final_project/NHTS_Travel_Behavior_Template_Presentation.pptx
@@ -31,6 +31,12 @@
     <p:sldId id="276" r:id="rId27"/>
     <p:sldId id="277" r:id="rId28"/>
     <p:sldId id="278" r:id="rId29"/>
+    <p:sldId id="279" r:id="rId30"/>
+    <p:sldId id="280" r:id="rId31"/>
+    <p:sldId id="281" r:id="rId32"/>
+    <p:sldId id="282" r:id="rId33"/>
+    <p:sldId id="283" r:id="rId34"/>
+    <p:sldId id="284" r:id="rId35"/>
   </p:sldIdLst>
   <p:sldSz cx="12192000" cy="6858000"/>
   <p:notesSz cx="6858000" cy="9144000"/>
@@ -32944,6 +32950,9282 @@
               </a:rPr>
               <a:t>用 NHTS 历史数据学习正常出行规律，用 LLM 事件先验泛化疫情冲击，并输出家庭层面的出行强度、方式结构和目的结构。</a:t>
             </a:r>
+          </a:p>
+        </p:txBody>
+      </p:sp>
+    </p:spTree>
+  </p:cSld>
+  <p:clrMapOvr>
+    <a:masterClrMapping/>
+  </p:clrMapOvr>
+</p:sld>
+</file>
+
+<file path=ppt/slides/slide24.xml><?xml version="1.0" encoding="utf-8"?>
+<p:sld xmlns:a="http://schemas.openxmlformats.org/drawingml/2006/main" xmlns:p="http://schemas.openxmlformats.org/presentationml/2006/main" xmlns:r="http://schemas.openxmlformats.org/officeDocument/2006/relationships">
+  <p:cSld>
+    <p:bg>
+      <p:bgPr>
+        <a:solidFill>
+          <a:srgbClr val="FFFFFF"/>
+        </a:solidFill>
+        <a:effectLst/>
+      </p:bgPr>
+    </p:bg>
+    <p:spTree>
+      <p:nvGrpSpPr>
+        <p:cNvPr id="1" name=""/>
+        <p:cNvGrpSpPr/>
+        <p:nvPr/>
+      </p:nvGrpSpPr>
+      <p:grpSpPr/>
+      <p:sp>
+        <p:nvSpPr>
+          <p:cNvPr id="2" name="TextBox 1"/>
+          <p:cNvSpPr txBox="1"/>
+          <p:nvPr/>
+        </p:nvSpPr>
+        <p:spPr>
+          <a:xfrm>
+            <a:off x="384048" y="109728"/>
+            <a:ext cx="4480560" cy="164592"/>
+          </a:xfrm>
+          <a:prstGeom prst="rect">
+            <a:avLst/>
+          </a:prstGeom>
+          <a:noFill/>
+        </p:spPr>
+        <p:txBody>
+          <a:bodyPr wrap="square" lIns="27432" rIns="27432" tIns="9144" bIns="9144" anchor="ctr">
+            <a:spAutoFit/>
+          </a:bodyPr>
+          <a:lstStyle/>
+          <a:p>
+            <a:pPr algn="l">
+              <a:defRPr sz="750" b="1">
+                <a:solidFill>
+                  <a:srgbClr val="64748B"/>
+                </a:solidFill>
+                <a:latin typeface="Microsoft YaHei"/>
+              </a:defRPr>
+            </a:pPr>
+            <a:r>
+              <a:rPr sz="750" b="1">
+                <a:solidFill>
+                  <a:srgbClr val="64748B"/>
+                </a:solidFill>
+                <a:latin typeface="Microsoft YaHei"/>
+              </a:rPr>
+              <a:t>Mobility Inequality and Sustainable Development</a:t>
+            </a:r>
+          </a:p>
+        </p:txBody>
+      </p:sp>
+      <p:sp>
+        <p:nvSpPr>
+          <p:cNvPr id="3" name="TextBox 2"/>
+          <p:cNvSpPr txBox="1"/>
+          <p:nvPr/>
+        </p:nvSpPr>
+        <p:spPr>
+          <a:xfrm>
+            <a:off x="384048" y="347472"/>
+            <a:ext cx="777240" cy="292608"/>
+          </a:xfrm>
+          <a:prstGeom prst="rect">
+            <a:avLst/>
+          </a:prstGeom>
+          <a:noFill/>
+        </p:spPr>
+        <p:txBody>
+          <a:bodyPr wrap="square" lIns="27432" rIns="27432" tIns="9144" bIns="9144" anchor="ctr">
+            <a:spAutoFit/>
+          </a:bodyPr>
+          <a:lstStyle/>
+          <a:p>
+            <a:pPr algn="l">
+              <a:defRPr sz="1300" b="1">
+                <a:solidFill>
+                  <a:srgbClr val="EA580C"/>
+                </a:solidFill>
+                <a:latin typeface="Microsoft YaHei"/>
+              </a:defRPr>
+            </a:pPr>
+            <a:r>
+              <a:rPr sz="1300" b="1">
+                <a:solidFill>
+                  <a:srgbClr val="EA580C"/>
+                </a:solidFill>
+                <a:latin typeface="Microsoft YaHei"/>
+              </a:rPr>
+              <a:t>BACKUP</a:t>
+            </a:r>
+          </a:p>
+        </p:txBody>
+      </p:sp>
+      <p:sp>
+        <p:nvSpPr>
+          <p:cNvPr id="4" name="TextBox 3"/>
+          <p:cNvSpPr txBox="1"/>
+          <p:nvPr/>
+        </p:nvSpPr>
+        <p:spPr>
+          <a:xfrm>
+            <a:off x="1234440" y="246888"/>
+            <a:ext cx="8412480" cy="329184"/>
+          </a:xfrm>
+          <a:prstGeom prst="rect">
+            <a:avLst/>
+          </a:prstGeom>
+          <a:noFill/>
+        </p:spPr>
+        <p:txBody>
+          <a:bodyPr wrap="square" lIns="27432" rIns="27432" tIns="9144" bIns="9144" anchor="ctr">
+            <a:spAutoFit/>
+          </a:bodyPr>
+          <a:lstStyle/>
+          <a:p>
+            <a:pPr algn="l">
+              <a:defRPr sz="1700" b="1">
+                <a:solidFill>
+                  <a:srgbClr val="0F172A"/>
+                </a:solidFill>
+                <a:latin typeface="Microsoft YaHei"/>
+              </a:defRPr>
+            </a:pPr>
+            <a:r>
+              <a:rPr sz="1700" b="1">
+                <a:solidFill>
+                  <a:srgbClr val="0F172A"/>
+                </a:solidFill>
+                <a:latin typeface="Microsoft YaHei"/>
+              </a:rPr>
+              <a:t>为什么不直接让 LLM 构建 2022 决策树？</a:t>
+            </a:r>
+          </a:p>
+        </p:txBody>
+      </p:sp>
+      <p:sp>
+        <p:nvSpPr>
+          <p:cNvPr id="5" name="TextBox 4"/>
+          <p:cNvSpPr txBox="1"/>
+          <p:nvPr/>
+        </p:nvSpPr>
+        <p:spPr>
+          <a:xfrm>
+            <a:off x="1252728" y="585216"/>
+            <a:ext cx="8869680" cy="228600"/>
+          </a:xfrm>
+          <a:prstGeom prst="rect">
+            <a:avLst/>
+          </a:prstGeom>
+          <a:noFill/>
+        </p:spPr>
+        <p:txBody>
+          <a:bodyPr wrap="square" lIns="27432" rIns="27432" tIns="9144" bIns="9144" anchor="ctr">
+            <a:spAutoFit/>
+          </a:bodyPr>
+          <a:lstStyle/>
+          <a:p>
+            <a:pPr algn="l">
+              <a:defRPr sz="850" b="0">
+                <a:solidFill>
+                  <a:srgbClr val="64748B"/>
+                </a:solidFill>
+                <a:latin typeface="Microsoft YaHei"/>
+              </a:defRPr>
+            </a:pPr>
+            <a:r>
+              <a:rPr sz="850" b="0">
+                <a:solidFill>
+                  <a:srgbClr val="64748B"/>
+                </a:solidFill>
+                <a:latin typeface="Microsoft YaHei"/>
+              </a:rPr>
+              <a:t>Why not ask the LLM to build the 2022 decision tree directly?</a:t>
+            </a:r>
+          </a:p>
+        </p:txBody>
+      </p:sp>
+      <p:pic>
+        <p:nvPicPr>
+          <p:cNvPr id="6" name="Picture 5" descr="image.png"/>
+          <p:cNvPicPr>
+            <a:picLocks noChangeAspect="1"/>
+          </p:cNvPicPr>
+          <p:nvPr/>
+        </p:nvPicPr>
+        <p:blipFill>
+          <a:blip r:embed="rId2"/>
+          <a:stretch>
+            <a:fillRect/>
+          </a:stretch>
+        </p:blipFill>
+        <p:spPr>
+          <a:xfrm>
+            <a:off x="11018520" y="201168"/>
+            <a:ext cx="713232" cy="502730"/>
+          </a:xfrm>
+          <a:prstGeom prst="rect">
+            <a:avLst/>
+          </a:prstGeom>
+        </p:spPr>
+      </p:pic>
+      <p:sp>
+        <p:nvSpPr>
+          <p:cNvPr id="7" name="Rectangle 6"/>
+          <p:cNvSpPr/>
+          <p:nvPr/>
+        </p:nvSpPr>
+        <p:spPr>
+          <a:xfrm>
+            <a:off x="384048" y="877824"/>
+            <a:ext cx="11201400" cy="10972"/>
+          </a:xfrm>
+          <a:prstGeom prst="rect">
+            <a:avLst/>
+          </a:prstGeom>
+          <a:solidFill>
+            <a:srgbClr val="CBD5E1"/>
+          </a:solidFill>
+          <a:ln>
+            <a:noFill/>
+          </a:ln>
+        </p:spPr>
+        <p:style>
+          <a:lnRef idx="1">
+            <a:schemeClr val="accent1"/>
+          </a:lnRef>
+          <a:fillRef idx="3">
+            <a:schemeClr val="accent1"/>
+          </a:fillRef>
+          <a:effectRef idx="2">
+            <a:schemeClr val="accent1"/>
+          </a:effectRef>
+          <a:fontRef idx="minor">
+            <a:schemeClr val="lt1"/>
+          </a:fontRef>
+        </p:style>
+        <p:txBody>
+          <a:bodyPr rtlCol="0" anchor="ctr"/>
+          <a:lstStyle/>
+          <a:p>
+            <a:pPr algn="ctr"/>
+          </a:p>
+        </p:txBody>
+      </p:sp>
+      <p:sp>
+        <p:nvSpPr>
+          <p:cNvPr id="8" name="Rectangle 7"/>
+          <p:cNvSpPr/>
+          <p:nvPr/>
+        </p:nvSpPr>
+        <p:spPr>
+          <a:xfrm>
+            <a:off x="384048" y="6428232"/>
+            <a:ext cx="11201400" cy="10972"/>
+          </a:xfrm>
+          <a:prstGeom prst="rect">
+            <a:avLst/>
+          </a:prstGeom>
+          <a:solidFill>
+            <a:srgbClr val="CBD5E1"/>
+          </a:solidFill>
+          <a:ln>
+            <a:noFill/>
+          </a:ln>
+        </p:spPr>
+        <p:style>
+          <a:lnRef idx="1">
+            <a:schemeClr val="accent1"/>
+          </a:lnRef>
+          <a:fillRef idx="3">
+            <a:schemeClr val="accent1"/>
+          </a:fillRef>
+          <a:effectRef idx="2">
+            <a:schemeClr val="accent1"/>
+          </a:effectRef>
+          <a:fontRef idx="minor">
+            <a:schemeClr val="lt1"/>
+          </a:fontRef>
+        </p:style>
+        <p:txBody>
+          <a:bodyPr rtlCol="0" anchor="ctr"/>
+          <a:lstStyle/>
+          <a:p>
+            <a:pPr algn="ctr"/>
+          </a:p>
+        </p:txBody>
+      </p:sp>
+      <p:sp>
+        <p:nvSpPr>
+          <p:cNvPr id="9" name="TextBox 8"/>
+          <p:cNvSpPr txBox="1"/>
+          <p:nvPr/>
+        </p:nvSpPr>
+        <p:spPr>
+          <a:xfrm>
+            <a:off x="384048" y="6473952"/>
+            <a:ext cx="5212080" cy="164592"/>
+          </a:xfrm>
+          <a:prstGeom prst="rect">
+            <a:avLst/>
+          </a:prstGeom>
+          <a:noFill/>
+        </p:spPr>
+        <p:txBody>
+          <a:bodyPr wrap="square" lIns="27432" rIns="27432" tIns="9144" bIns="9144" anchor="ctr">
+            <a:spAutoFit/>
+          </a:bodyPr>
+          <a:lstStyle/>
+          <a:p>
+            <a:pPr algn="l">
+              <a:defRPr sz="750" b="0">
+                <a:solidFill>
+                  <a:srgbClr val="64748B"/>
+                </a:solidFill>
+                <a:latin typeface="Microsoft YaHei"/>
+              </a:defRPr>
+            </a:pPr>
+            <a:r>
+              <a:rPr sz="750" b="0">
+                <a:solidFill>
+                  <a:srgbClr val="64748B"/>
+                </a:solidFill>
+                <a:latin typeface="Microsoft YaHei"/>
+              </a:rPr>
+              <a:t>Appendix: reviewer and instructor Q&amp;A</a:t>
+            </a:r>
+          </a:p>
+        </p:txBody>
+      </p:sp>
+      <p:sp>
+        <p:nvSpPr>
+          <p:cNvPr id="10" name="TextBox 9"/>
+          <p:cNvSpPr txBox="1"/>
+          <p:nvPr/>
+        </p:nvSpPr>
+        <p:spPr>
+          <a:xfrm>
+            <a:off x="10149840" y="6473952"/>
+            <a:ext cx="1417320" cy="164592"/>
+          </a:xfrm>
+          <a:prstGeom prst="rect">
+            <a:avLst/>
+          </a:prstGeom>
+          <a:noFill/>
+        </p:spPr>
+        <p:txBody>
+          <a:bodyPr wrap="square" lIns="27432" rIns="27432" tIns="9144" bIns="9144" anchor="ctr">
+            <a:spAutoFit/>
+          </a:bodyPr>
+          <a:lstStyle/>
+          <a:p>
+            <a:pPr algn="r">
+              <a:defRPr sz="750" b="1">
+                <a:solidFill>
+                  <a:srgbClr val="64748B"/>
+                </a:solidFill>
+                <a:latin typeface="Microsoft YaHei"/>
+              </a:defRPr>
+            </a:pPr>
+            <a:r>
+              <a:rPr sz="750" b="1">
+                <a:solidFill>
+                  <a:srgbClr val="64748B"/>
+                </a:solidFill>
+                <a:latin typeface="Microsoft YaHei"/>
+              </a:rPr>
+              <a:t>B1</a:t>
+            </a:r>
+          </a:p>
+        </p:txBody>
+      </p:sp>
+      <p:sp>
+        <p:nvSpPr>
+          <p:cNvPr id="11" name="Rounded Rectangle 10"/>
+          <p:cNvSpPr/>
+          <p:nvPr/>
+        </p:nvSpPr>
+        <p:spPr>
+          <a:xfrm>
+            <a:off x="658368" y="1115568"/>
+            <a:ext cx="10287000" cy="749808"/>
+          </a:xfrm>
+          <a:prstGeom prst="roundRect">
+            <a:avLst/>
+          </a:prstGeom>
+          <a:solidFill>
+            <a:srgbClr val="F1F5F9"/>
+          </a:solidFill>
+          <a:ln w="9525">
+            <a:solidFill>
+              <a:srgbClr val="CBD5E1"/>
+            </a:solidFill>
+          </a:ln>
+        </p:spPr>
+        <p:style>
+          <a:lnRef idx="1">
+            <a:schemeClr val="accent1"/>
+          </a:lnRef>
+          <a:fillRef idx="3">
+            <a:schemeClr val="accent1"/>
+          </a:fillRef>
+          <a:effectRef idx="2">
+            <a:schemeClr val="accent1"/>
+          </a:effectRef>
+          <a:fontRef idx="minor">
+            <a:schemeClr val="lt1"/>
+          </a:fontRef>
+        </p:style>
+        <p:txBody>
+          <a:bodyPr rtlCol="0" anchor="ctr"/>
+          <a:lstStyle/>
+          <a:p>
+            <a:pPr algn="ctr"/>
+          </a:p>
+        </p:txBody>
+      </p:sp>
+      <p:sp>
+        <p:nvSpPr>
+          <p:cNvPr id="12" name="TextBox 11"/>
+          <p:cNvSpPr txBox="1"/>
+          <p:nvPr/>
+        </p:nvSpPr>
+        <p:spPr>
+          <a:xfrm>
+            <a:off x="868680" y="1298448"/>
+            <a:ext cx="1463040" cy="182880"/>
+          </a:xfrm>
+          <a:prstGeom prst="rect">
+            <a:avLst/>
+          </a:prstGeom>
+          <a:noFill/>
+        </p:spPr>
+        <p:txBody>
+          <a:bodyPr wrap="square" lIns="27432" rIns="27432" tIns="9144" bIns="9144" anchor="ctr">
+            <a:spAutoFit/>
+          </a:bodyPr>
+          <a:lstStyle/>
+          <a:p>
+            <a:pPr algn="l">
+              <a:defRPr sz="1000" b="1">
+                <a:solidFill>
+                  <a:srgbClr val="EA580C"/>
+                </a:solidFill>
+                <a:latin typeface="Microsoft YaHei"/>
+              </a:defRPr>
+            </a:pPr>
+            <a:r>
+              <a:rPr sz="1000" b="1">
+                <a:solidFill>
+                  <a:srgbClr val="EA580C"/>
+                </a:solidFill>
+                <a:latin typeface="Microsoft YaHei"/>
+              </a:rPr>
+              <a:t>Short answer</a:t>
+            </a:r>
+          </a:p>
+        </p:txBody>
+      </p:sp>
+      <p:sp>
+        <p:nvSpPr>
+          <p:cNvPr id="13" name="TextBox 12"/>
+          <p:cNvSpPr txBox="1"/>
+          <p:nvPr/>
+        </p:nvSpPr>
+        <p:spPr>
+          <a:xfrm>
+            <a:off x="2240280" y="1216152"/>
+            <a:ext cx="8366760" cy="329184"/>
+          </a:xfrm>
+          <a:prstGeom prst="rect">
+            <a:avLst/>
+          </a:prstGeom>
+          <a:noFill/>
+        </p:spPr>
+        <p:txBody>
+          <a:bodyPr wrap="square" lIns="27432" rIns="27432" tIns="9144" bIns="9144" anchor="ctr">
+            <a:spAutoFit/>
+          </a:bodyPr>
+          <a:lstStyle/>
+          <a:p>
+            <a:pPr algn="l">
+              <a:defRPr sz="1300" b="1">
+                <a:solidFill>
+                  <a:srgbClr val="0F172A"/>
+                </a:solidFill>
+                <a:latin typeface="Microsoft YaHei"/>
+              </a:defRPr>
+            </a:pPr>
+            <a:r>
+              <a:rPr sz="1300" b="1">
+                <a:solidFill>
+                  <a:srgbClr val="0F172A"/>
+                </a:solidFill>
+                <a:latin typeface="Microsoft YaHei"/>
+              </a:rPr>
+              <a:t>已经实现为 baseline；方向有用，但数值校准弱于 hybrid adapter。</a:t>
+            </a:r>
+          </a:p>
+        </p:txBody>
+      </p:sp>
+      <p:sp>
+        <p:nvSpPr>
+          <p:cNvPr id="14" name="Rectangle 13"/>
+          <p:cNvSpPr/>
+          <p:nvPr/>
+        </p:nvSpPr>
+        <p:spPr>
+          <a:xfrm>
+            <a:off x="713232" y="2176272"/>
+            <a:ext cx="4023360" cy="420624"/>
+          </a:xfrm>
+          <a:prstGeom prst="rect">
+            <a:avLst/>
+          </a:prstGeom>
+          <a:solidFill>
+            <a:srgbClr val="00796B"/>
+          </a:solidFill>
+          <a:ln>
+            <a:noFill/>
+          </a:ln>
+        </p:spPr>
+        <p:style>
+          <a:lnRef idx="1">
+            <a:schemeClr val="accent1"/>
+          </a:lnRef>
+          <a:fillRef idx="3">
+            <a:schemeClr val="accent1"/>
+          </a:fillRef>
+          <a:effectRef idx="2">
+            <a:schemeClr val="accent1"/>
+          </a:effectRef>
+          <a:fontRef idx="minor">
+            <a:schemeClr val="lt1"/>
+          </a:fontRef>
+        </p:style>
+        <p:txBody>
+          <a:bodyPr rtlCol="0" anchor="ctr"/>
+          <a:lstStyle/>
+          <a:p>
+            <a:pPr algn="ctr"/>
+          </a:p>
+        </p:txBody>
+      </p:sp>
+      <p:sp>
+        <p:nvSpPr>
+          <p:cNvPr id="15" name="TextBox 14"/>
+          <p:cNvSpPr txBox="1"/>
+          <p:nvPr/>
+        </p:nvSpPr>
+        <p:spPr>
+          <a:xfrm>
+            <a:off x="749808" y="2249424"/>
+            <a:ext cx="3950208" cy="292608"/>
+          </a:xfrm>
+          <a:prstGeom prst="rect">
+            <a:avLst/>
+          </a:prstGeom>
+          <a:noFill/>
+        </p:spPr>
+        <p:txBody>
+          <a:bodyPr wrap="square" lIns="27432" rIns="27432" tIns="9144" bIns="9144" anchor="ctr">
+            <a:spAutoFit/>
+          </a:bodyPr>
+          <a:lstStyle/>
+          <a:p>
+            <a:pPr algn="ctr">
+              <a:defRPr sz="1200" b="1">
+                <a:solidFill>
+                  <a:srgbClr val="FFFFFF"/>
+                </a:solidFill>
+                <a:latin typeface="Microsoft YaHei"/>
+              </a:defRPr>
+            </a:pPr>
+            <a:r>
+              <a:rPr sz="1200" b="1">
+                <a:solidFill>
+                  <a:srgbClr val="FFFFFF"/>
+                </a:solidFill>
+                <a:latin typeface="Microsoft YaHei"/>
+              </a:rPr>
+              <a:t>Evidence</a:t>
+            </a:r>
+          </a:p>
+        </p:txBody>
+      </p:sp>
+      <p:sp>
+        <p:nvSpPr>
+          <p:cNvPr id="16" name="Rectangle 15"/>
+          <p:cNvSpPr/>
+          <p:nvPr/>
+        </p:nvSpPr>
+        <p:spPr>
+          <a:xfrm>
+            <a:off x="4736592" y="2176272"/>
+            <a:ext cx="6035040" cy="420624"/>
+          </a:xfrm>
+          <a:prstGeom prst="rect">
+            <a:avLst/>
+          </a:prstGeom>
+          <a:solidFill>
+            <a:srgbClr val="00796B"/>
+          </a:solidFill>
+          <a:ln>
+            <a:noFill/>
+          </a:ln>
+        </p:spPr>
+        <p:style>
+          <a:lnRef idx="1">
+            <a:schemeClr val="accent1"/>
+          </a:lnRef>
+          <a:fillRef idx="3">
+            <a:schemeClr val="accent1"/>
+          </a:fillRef>
+          <a:effectRef idx="2">
+            <a:schemeClr val="accent1"/>
+          </a:effectRef>
+          <a:fontRef idx="minor">
+            <a:schemeClr val="lt1"/>
+          </a:fontRef>
+        </p:style>
+        <p:txBody>
+          <a:bodyPr rtlCol="0" anchor="ctr"/>
+          <a:lstStyle/>
+          <a:p>
+            <a:pPr algn="ctr"/>
+          </a:p>
+        </p:txBody>
+      </p:sp>
+      <p:sp>
+        <p:nvSpPr>
+          <p:cNvPr id="17" name="TextBox 16"/>
+          <p:cNvSpPr txBox="1"/>
+          <p:nvPr/>
+        </p:nvSpPr>
+        <p:spPr>
+          <a:xfrm>
+            <a:off x="4773168" y="2249424"/>
+            <a:ext cx="5961888" cy="292608"/>
+          </a:xfrm>
+          <a:prstGeom prst="rect">
+            <a:avLst/>
+          </a:prstGeom>
+          <a:noFill/>
+        </p:spPr>
+        <p:txBody>
+          <a:bodyPr wrap="square" lIns="27432" rIns="27432" tIns="9144" bIns="9144" anchor="ctr">
+            <a:spAutoFit/>
+          </a:bodyPr>
+          <a:lstStyle/>
+          <a:p>
+            <a:pPr algn="ctr">
+              <a:defRPr sz="1200" b="1">
+                <a:solidFill>
+                  <a:srgbClr val="FFFFFF"/>
+                </a:solidFill>
+                <a:latin typeface="Microsoft YaHei"/>
+              </a:defRPr>
+            </a:pPr>
+            <a:r>
+              <a:rPr sz="1200" b="1">
+                <a:solidFill>
+                  <a:srgbClr val="FFFFFF"/>
+                </a:solidFill>
+                <a:latin typeface="Microsoft YaHei"/>
+              </a:rPr>
+              <a:t>Value / implication</a:t>
+            </a:r>
+          </a:p>
+        </p:txBody>
+      </p:sp>
+      <p:sp>
+        <p:nvSpPr>
+          <p:cNvPr id="18" name="Rectangle 17"/>
+          <p:cNvSpPr/>
+          <p:nvPr/>
+        </p:nvSpPr>
+        <p:spPr>
+          <a:xfrm>
+            <a:off x="713232" y="2596896"/>
+            <a:ext cx="4023360" cy="420624"/>
+          </a:xfrm>
+          <a:prstGeom prst="rect">
+            <a:avLst/>
+          </a:prstGeom>
+          <a:solidFill>
+            <a:srgbClr val="F8FAFC"/>
+          </a:solidFill>
+          <a:ln w="9525">
+            <a:solidFill>
+              <a:srgbClr val="CBD5E1"/>
+            </a:solidFill>
+          </a:ln>
+        </p:spPr>
+        <p:style>
+          <a:lnRef idx="1">
+            <a:schemeClr val="accent1"/>
+          </a:lnRef>
+          <a:fillRef idx="3">
+            <a:schemeClr val="accent1"/>
+          </a:fillRef>
+          <a:effectRef idx="2">
+            <a:schemeClr val="accent1"/>
+          </a:effectRef>
+          <a:fontRef idx="minor">
+            <a:schemeClr val="lt1"/>
+          </a:fontRef>
+        </p:style>
+        <p:txBody>
+          <a:bodyPr rtlCol="0" anchor="ctr"/>
+          <a:lstStyle/>
+          <a:p>
+            <a:pPr algn="ctr"/>
+          </a:p>
+        </p:txBody>
+      </p:sp>
+      <p:sp>
+        <p:nvSpPr>
+          <p:cNvPr id="19" name="TextBox 18"/>
+          <p:cNvSpPr txBox="1"/>
+          <p:nvPr/>
+        </p:nvSpPr>
+        <p:spPr>
+          <a:xfrm>
+            <a:off x="768096" y="2660903"/>
+            <a:ext cx="3913632" cy="292608"/>
+          </a:xfrm>
+          <a:prstGeom prst="rect">
+            <a:avLst/>
+          </a:prstGeom>
+          <a:noFill/>
+        </p:spPr>
+        <p:txBody>
+          <a:bodyPr wrap="square" lIns="27432" rIns="27432" tIns="9144" bIns="9144" anchor="t">
+            <a:spAutoFit/>
+          </a:bodyPr>
+          <a:lstStyle/>
+          <a:p>
+            <a:pPr algn="l">
+              <a:defRPr sz="1200" b="1">
+                <a:solidFill>
+                  <a:srgbClr val="0F172A"/>
+                </a:solidFill>
+                <a:latin typeface="Microsoft YaHei"/>
+              </a:defRPr>
+            </a:pPr>
+            <a:r>
+              <a:rPr sz="1200" b="1">
+                <a:solidFill>
+                  <a:srgbClr val="0F172A"/>
+                </a:solidFill>
+                <a:latin typeface="Microsoft YaHei"/>
+              </a:rPr>
+              <a:t>Zero-shot LLM rule tree</a:t>
+            </a:r>
+          </a:p>
+        </p:txBody>
+      </p:sp>
+      <p:sp>
+        <p:nvSpPr>
+          <p:cNvPr id="20" name="Rectangle 19"/>
+          <p:cNvSpPr/>
+          <p:nvPr/>
+        </p:nvSpPr>
+        <p:spPr>
+          <a:xfrm>
+            <a:off x="4736592" y="2596896"/>
+            <a:ext cx="6035040" cy="420624"/>
+          </a:xfrm>
+          <a:prstGeom prst="rect">
+            <a:avLst/>
+          </a:prstGeom>
+          <a:solidFill>
+            <a:srgbClr val="F8FAFC"/>
+          </a:solidFill>
+          <a:ln w="9525">
+            <a:solidFill>
+              <a:srgbClr val="CBD5E1"/>
+            </a:solidFill>
+          </a:ln>
+        </p:spPr>
+        <p:style>
+          <a:lnRef idx="1">
+            <a:schemeClr val="accent1"/>
+          </a:lnRef>
+          <a:fillRef idx="3">
+            <a:schemeClr val="accent1"/>
+          </a:fillRef>
+          <a:effectRef idx="2">
+            <a:schemeClr val="accent1"/>
+          </a:effectRef>
+          <a:fontRef idx="minor">
+            <a:schemeClr val="lt1"/>
+          </a:fontRef>
+        </p:style>
+        <p:txBody>
+          <a:bodyPr rtlCol="0" anchor="ctr"/>
+          <a:lstStyle/>
+          <a:p>
+            <a:pPr algn="ctr"/>
+          </a:p>
+        </p:txBody>
+      </p:sp>
+      <p:sp>
+        <p:nvSpPr>
+          <p:cNvPr id="21" name="TextBox 20"/>
+          <p:cNvSpPr txBox="1"/>
+          <p:nvPr/>
+        </p:nvSpPr>
+        <p:spPr>
+          <a:xfrm>
+            <a:off x="4791456" y="2660903"/>
+            <a:ext cx="5925312" cy="292608"/>
+          </a:xfrm>
+          <a:prstGeom prst="rect">
+            <a:avLst/>
+          </a:prstGeom>
+          <a:noFill/>
+        </p:spPr>
+        <p:txBody>
+          <a:bodyPr wrap="square" lIns="27432" rIns="27432" tIns="9144" bIns="9144" anchor="t">
+            <a:spAutoFit/>
+          </a:bodyPr>
+          <a:lstStyle/>
+          <a:p>
+            <a:pPr algn="l">
+              <a:defRPr sz="1200" b="0">
+                <a:solidFill>
+                  <a:srgbClr val="0F172A"/>
+                </a:solidFill>
+                <a:latin typeface="Microsoft YaHei"/>
+              </a:defRPr>
+            </a:pPr>
+            <a:r>
+              <a:rPr sz="1200" b="0">
+                <a:solidFill>
+                  <a:srgbClr val="0F172A"/>
+                </a:solidFill>
+                <a:latin typeface="Microsoft YaHei"/>
+              </a:rPr>
+              <a:t>wMAE 2.6019; wBias -0.4072</a:t>
+            </a:r>
+          </a:p>
+        </p:txBody>
+      </p:sp>
+      <p:sp>
+        <p:nvSpPr>
+          <p:cNvPr id="22" name="Rectangle 21"/>
+          <p:cNvSpPr/>
+          <p:nvPr/>
+        </p:nvSpPr>
+        <p:spPr>
+          <a:xfrm>
+            <a:off x="713232" y="3017520"/>
+            <a:ext cx="4023360" cy="420624"/>
+          </a:xfrm>
+          <a:prstGeom prst="rect">
+            <a:avLst/>
+          </a:prstGeom>
+          <a:solidFill>
+            <a:srgbClr val="F1F5F9"/>
+          </a:solidFill>
+          <a:ln w="9525">
+            <a:solidFill>
+              <a:srgbClr val="CBD5E1"/>
+            </a:solidFill>
+          </a:ln>
+        </p:spPr>
+        <p:style>
+          <a:lnRef idx="1">
+            <a:schemeClr val="accent1"/>
+          </a:lnRef>
+          <a:fillRef idx="3">
+            <a:schemeClr val="accent1"/>
+          </a:fillRef>
+          <a:effectRef idx="2">
+            <a:schemeClr val="accent1"/>
+          </a:effectRef>
+          <a:fontRef idx="minor">
+            <a:schemeClr val="lt1"/>
+          </a:fontRef>
+        </p:style>
+        <p:txBody>
+          <a:bodyPr rtlCol="0" anchor="ctr"/>
+          <a:lstStyle/>
+          <a:p>
+            <a:pPr algn="ctr"/>
+          </a:p>
+        </p:txBody>
+      </p:sp>
+      <p:sp>
+        <p:nvSpPr>
+          <p:cNvPr id="23" name="TextBox 22"/>
+          <p:cNvSpPr txBox="1"/>
+          <p:nvPr/>
+        </p:nvSpPr>
+        <p:spPr>
+          <a:xfrm>
+            <a:off x="768096" y="3081527"/>
+            <a:ext cx="3913632" cy="292608"/>
+          </a:xfrm>
+          <a:prstGeom prst="rect">
+            <a:avLst/>
+          </a:prstGeom>
+          <a:noFill/>
+        </p:spPr>
+        <p:txBody>
+          <a:bodyPr wrap="square" lIns="27432" rIns="27432" tIns="9144" bIns="9144" anchor="t">
+            <a:spAutoFit/>
+          </a:bodyPr>
+          <a:lstStyle/>
+          <a:p>
+            <a:pPr algn="l">
+              <a:defRPr sz="1200" b="1">
+                <a:solidFill>
+                  <a:srgbClr val="0F172A"/>
+                </a:solidFill>
+                <a:latin typeface="Microsoft YaHei"/>
+              </a:defRPr>
+            </a:pPr>
+            <a:r>
+              <a:rPr sz="1200" b="1">
+                <a:solidFill>
+                  <a:srgbClr val="0F172A"/>
+                </a:solidFill>
+                <a:latin typeface="Microsoft YaHei"/>
+              </a:rPr>
+              <a:t>Pseudo-label tree</a:t>
+            </a:r>
+          </a:p>
+        </p:txBody>
+      </p:sp>
+      <p:sp>
+        <p:nvSpPr>
+          <p:cNvPr id="24" name="Rectangle 23"/>
+          <p:cNvSpPr/>
+          <p:nvPr/>
+        </p:nvSpPr>
+        <p:spPr>
+          <a:xfrm>
+            <a:off x="4736592" y="3017520"/>
+            <a:ext cx="6035040" cy="420624"/>
+          </a:xfrm>
+          <a:prstGeom prst="rect">
+            <a:avLst/>
+          </a:prstGeom>
+          <a:solidFill>
+            <a:srgbClr val="F1F5F9"/>
+          </a:solidFill>
+          <a:ln w="9525">
+            <a:solidFill>
+              <a:srgbClr val="CBD5E1"/>
+            </a:solidFill>
+          </a:ln>
+        </p:spPr>
+        <p:style>
+          <a:lnRef idx="1">
+            <a:schemeClr val="accent1"/>
+          </a:lnRef>
+          <a:fillRef idx="3">
+            <a:schemeClr val="accent1"/>
+          </a:fillRef>
+          <a:effectRef idx="2">
+            <a:schemeClr val="accent1"/>
+          </a:effectRef>
+          <a:fontRef idx="minor">
+            <a:schemeClr val="lt1"/>
+          </a:fontRef>
+        </p:style>
+        <p:txBody>
+          <a:bodyPr rtlCol="0" anchor="ctr"/>
+          <a:lstStyle/>
+          <a:p>
+            <a:pPr algn="ctr"/>
+          </a:p>
+        </p:txBody>
+      </p:sp>
+      <p:sp>
+        <p:nvSpPr>
+          <p:cNvPr id="25" name="TextBox 24"/>
+          <p:cNvSpPr txBox="1"/>
+          <p:nvPr/>
+        </p:nvSpPr>
+        <p:spPr>
+          <a:xfrm>
+            <a:off x="4791456" y="3081527"/>
+            <a:ext cx="5925312" cy="292608"/>
+          </a:xfrm>
+          <a:prstGeom prst="rect">
+            <a:avLst/>
+          </a:prstGeom>
+          <a:noFill/>
+        </p:spPr>
+        <p:txBody>
+          <a:bodyPr wrap="square" lIns="27432" rIns="27432" tIns="9144" bIns="9144" anchor="t">
+            <a:spAutoFit/>
+          </a:bodyPr>
+          <a:lstStyle/>
+          <a:p>
+            <a:pPr algn="l">
+              <a:defRPr sz="1200" b="0">
+                <a:solidFill>
+                  <a:srgbClr val="0F172A"/>
+                </a:solidFill>
+                <a:latin typeface="Microsoft YaHei"/>
+              </a:defRPr>
+            </a:pPr>
+            <a:r>
+              <a:rPr sz="1200" b="0">
+                <a:solidFill>
+                  <a:srgbClr val="0F172A"/>
+                </a:solidFill>
+                <a:latin typeface="Microsoft YaHei"/>
+              </a:rPr>
+              <a:t>wMAE 2.6040; still follows LLM belief labels</a:t>
+            </a:r>
+          </a:p>
+        </p:txBody>
+      </p:sp>
+      <p:sp>
+        <p:nvSpPr>
+          <p:cNvPr id="26" name="Rectangle 25"/>
+          <p:cNvSpPr/>
+          <p:nvPr/>
+        </p:nvSpPr>
+        <p:spPr>
+          <a:xfrm>
+            <a:off x="713232" y="3438144"/>
+            <a:ext cx="4023360" cy="420624"/>
+          </a:xfrm>
+          <a:prstGeom prst="rect">
+            <a:avLst/>
+          </a:prstGeom>
+          <a:solidFill>
+            <a:srgbClr val="F8FAFC"/>
+          </a:solidFill>
+          <a:ln w="9525">
+            <a:solidFill>
+              <a:srgbClr val="CBD5E1"/>
+            </a:solidFill>
+          </a:ln>
+        </p:spPr>
+        <p:style>
+          <a:lnRef idx="1">
+            <a:schemeClr val="accent1"/>
+          </a:lnRef>
+          <a:fillRef idx="3">
+            <a:schemeClr val="accent1"/>
+          </a:fillRef>
+          <a:effectRef idx="2">
+            <a:schemeClr val="accent1"/>
+          </a:effectRef>
+          <a:fontRef idx="minor">
+            <a:schemeClr val="lt1"/>
+          </a:fontRef>
+        </p:style>
+        <p:txBody>
+          <a:bodyPr rtlCol="0" anchor="ctr"/>
+          <a:lstStyle/>
+          <a:p>
+            <a:pPr algn="ctr"/>
+          </a:p>
+        </p:txBody>
+      </p:sp>
+      <p:sp>
+        <p:nvSpPr>
+          <p:cNvPr id="27" name="TextBox 26"/>
+          <p:cNvSpPr txBox="1"/>
+          <p:nvPr/>
+        </p:nvSpPr>
+        <p:spPr>
+          <a:xfrm>
+            <a:off x="768096" y="3502151"/>
+            <a:ext cx="3913632" cy="292608"/>
+          </a:xfrm>
+          <a:prstGeom prst="rect">
+            <a:avLst/>
+          </a:prstGeom>
+          <a:noFill/>
+        </p:spPr>
+        <p:txBody>
+          <a:bodyPr wrap="square" lIns="27432" rIns="27432" tIns="9144" bIns="9144" anchor="t">
+            <a:spAutoFit/>
+          </a:bodyPr>
+          <a:lstStyle/>
+          <a:p>
+            <a:pPr algn="l">
+              <a:defRPr sz="1200" b="1">
+                <a:solidFill>
+                  <a:srgbClr val="0F172A"/>
+                </a:solidFill>
+                <a:latin typeface="Microsoft YaHei"/>
+              </a:defRPr>
+            </a:pPr>
+            <a:r>
+              <a:rPr sz="1200" b="1">
+                <a:solidFill>
+                  <a:srgbClr val="0F172A"/>
+                </a:solidFill>
+                <a:latin typeface="Microsoft YaHei"/>
+              </a:rPr>
+              <a:t>Primary hybrid gated</a:t>
+            </a:r>
+          </a:p>
+        </p:txBody>
+      </p:sp>
+      <p:sp>
+        <p:nvSpPr>
+          <p:cNvPr id="28" name="Rectangle 27"/>
+          <p:cNvSpPr/>
+          <p:nvPr/>
+        </p:nvSpPr>
+        <p:spPr>
+          <a:xfrm>
+            <a:off x="4736592" y="3438144"/>
+            <a:ext cx="6035040" cy="420624"/>
+          </a:xfrm>
+          <a:prstGeom prst="rect">
+            <a:avLst/>
+          </a:prstGeom>
+          <a:solidFill>
+            <a:srgbClr val="F8FAFC"/>
+          </a:solidFill>
+          <a:ln w="9525">
+            <a:solidFill>
+              <a:srgbClr val="CBD5E1"/>
+            </a:solidFill>
+          </a:ln>
+        </p:spPr>
+        <p:style>
+          <a:lnRef idx="1">
+            <a:schemeClr val="accent1"/>
+          </a:lnRef>
+          <a:fillRef idx="3">
+            <a:schemeClr val="accent1"/>
+          </a:fillRef>
+          <a:effectRef idx="2">
+            <a:schemeClr val="accent1"/>
+          </a:effectRef>
+          <a:fontRef idx="minor">
+            <a:schemeClr val="lt1"/>
+          </a:fontRef>
+        </p:style>
+        <p:txBody>
+          <a:bodyPr rtlCol="0" anchor="ctr"/>
+          <a:lstStyle/>
+          <a:p>
+            <a:pPr algn="ctr"/>
+          </a:p>
+        </p:txBody>
+      </p:sp>
+      <p:sp>
+        <p:nvSpPr>
+          <p:cNvPr id="29" name="TextBox 28"/>
+          <p:cNvSpPr txBox="1"/>
+          <p:nvPr/>
+        </p:nvSpPr>
+        <p:spPr>
+          <a:xfrm>
+            <a:off x="4791456" y="3502151"/>
+            <a:ext cx="5925312" cy="292608"/>
+          </a:xfrm>
+          <a:prstGeom prst="rect">
+            <a:avLst/>
+          </a:prstGeom>
+          <a:noFill/>
+        </p:spPr>
+        <p:txBody>
+          <a:bodyPr wrap="square" lIns="27432" rIns="27432" tIns="9144" bIns="9144" anchor="t">
+            <a:spAutoFit/>
+          </a:bodyPr>
+          <a:lstStyle/>
+          <a:p>
+            <a:pPr algn="l">
+              <a:defRPr sz="1200" b="0">
+                <a:solidFill>
+                  <a:srgbClr val="0F172A"/>
+                </a:solidFill>
+                <a:latin typeface="Microsoft YaHei"/>
+              </a:defRPr>
+            </a:pPr>
+            <a:r>
+              <a:rPr sz="1200" b="0">
+                <a:solidFill>
+                  <a:srgbClr val="0F172A"/>
+                </a:solidFill>
+                <a:latin typeface="Microsoft YaHei"/>
+              </a:rPr>
+              <a:t>wMAE 2.5023; wBias -0.0230</a:t>
+            </a:r>
+          </a:p>
+        </p:txBody>
+      </p:sp>
+      <p:sp>
+        <p:nvSpPr>
+          <p:cNvPr id="30" name="Rectangle 29"/>
+          <p:cNvSpPr/>
+          <p:nvPr/>
+        </p:nvSpPr>
+        <p:spPr>
+          <a:xfrm>
+            <a:off x="713232" y="3858768"/>
+            <a:ext cx="4023360" cy="420624"/>
+          </a:xfrm>
+          <a:prstGeom prst="rect">
+            <a:avLst/>
+          </a:prstGeom>
+          <a:solidFill>
+            <a:srgbClr val="F1F5F9"/>
+          </a:solidFill>
+          <a:ln w="9525">
+            <a:solidFill>
+              <a:srgbClr val="CBD5E1"/>
+            </a:solidFill>
+          </a:ln>
+        </p:spPr>
+        <p:style>
+          <a:lnRef idx="1">
+            <a:schemeClr val="accent1"/>
+          </a:lnRef>
+          <a:fillRef idx="3">
+            <a:schemeClr val="accent1"/>
+          </a:fillRef>
+          <a:effectRef idx="2">
+            <a:schemeClr val="accent1"/>
+          </a:effectRef>
+          <a:fontRef idx="minor">
+            <a:schemeClr val="lt1"/>
+          </a:fontRef>
+        </p:style>
+        <p:txBody>
+          <a:bodyPr rtlCol="0" anchor="ctr"/>
+          <a:lstStyle/>
+          <a:p>
+            <a:pPr algn="ctr"/>
+          </a:p>
+        </p:txBody>
+      </p:sp>
+      <p:sp>
+        <p:nvSpPr>
+          <p:cNvPr id="31" name="TextBox 30"/>
+          <p:cNvSpPr txBox="1"/>
+          <p:nvPr/>
+        </p:nvSpPr>
+        <p:spPr>
+          <a:xfrm>
+            <a:off x="768096" y="3922776"/>
+            <a:ext cx="3913632" cy="292608"/>
+          </a:xfrm>
+          <a:prstGeom prst="rect">
+            <a:avLst/>
+          </a:prstGeom>
+          <a:noFill/>
+        </p:spPr>
+        <p:txBody>
+          <a:bodyPr wrap="square" lIns="27432" rIns="27432" tIns="9144" bIns="9144" anchor="t">
+            <a:spAutoFit/>
+          </a:bodyPr>
+          <a:lstStyle/>
+          <a:p>
+            <a:pPr algn="l">
+              <a:defRPr sz="1200" b="1">
+                <a:solidFill>
+                  <a:srgbClr val="0F172A"/>
+                </a:solidFill>
+                <a:latin typeface="Microsoft YaHei"/>
+              </a:defRPr>
+            </a:pPr>
+            <a:r>
+              <a:rPr sz="1200" b="1">
+                <a:solidFill>
+                  <a:srgbClr val="0F172A"/>
+                </a:solidFill>
+                <a:latin typeface="Microsoft YaHei"/>
+              </a:rPr>
+              <a:t>Key issue</a:t>
+            </a:r>
+          </a:p>
+        </p:txBody>
+      </p:sp>
+      <p:sp>
+        <p:nvSpPr>
+          <p:cNvPr id="32" name="Rectangle 31"/>
+          <p:cNvSpPr/>
+          <p:nvPr/>
+        </p:nvSpPr>
+        <p:spPr>
+          <a:xfrm>
+            <a:off x="4736592" y="3858768"/>
+            <a:ext cx="6035040" cy="420624"/>
+          </a:xfrm>
+          <a:prstGeom prst="rect">
+            <a:avLst/>
+          </a:prstGeom>
+          <a:solidFill>
+            <a:srgbClr val="F1F5F9"/>
+          </a:solidFill>
+          <a:ln w="9525">
+            <a:solidFill>
+              <a:srgbClr val="CBD5E1"/>
+            </a:solidFill>
+          </a:ln>
+        </p:spPr>
+        <p:style>
+          <a:lnRef idx="1">
+            <a:schemeClr val="accent1"/>
+          </a:lnRef>
+          <a:fillRef idx="3">
+            <a:schemeClr val="accent1"/>
+          </a:fillRef>
+          <a:effectRef idx="2">
+            <a:schemeClr val="accent1"/>
+          </a:effectRef>
+          <a:fontRef idx="minor">
+            <a:schemeClr val="lt1"/>
+          </a:fontRef>
+        </p:style>
+        <p:txBody>
+          <a:bodyPr rtlCol="0" anchor="ctr"/>
+          <a:lstStyle/>
+          <a:p>
+            <a:pPr algn="ctr"/>
+          </a:p>
+        </p:txBody>
+      </p:sp>
+      <p:sp>
+        <p:nvSpPr>
+          <p:cNvPr id="33" name="TextBox 32"/>
+          <p:cNvSpPr txBox="1"/>
+          <p:nvPr/>
+        </p:nvSpPr>
+        <p:spPr>
+          <a:xfrm>
+            <a:off x="4791456" y="3922776"/>
+            <a:ext cx="5925312" cy="292608"/>
+          </a:xfrm>
+          <a:prstGeom prst="rect">
+            <a:avLst/>
+          </a:prstGeom>
+          <a:noFill/>
+        </p:spPr>
+        <p:txBody>
+          <a:bodyPr wrap="square" lIns="27432" rIns="27432" tIns="9144" bIns="9144" anchor="t">
+            <a:spAutoFit/>
+          </a:bodyPr>
+          <a:lstStyle/>
+          <a:p>
+            <a:pPr algn="l">
+              <a:defRPr sz="1200" b="0">
+                <a:solidFill>
+                  <a:srgbClr val="0F172A"/>
+                </a:solidFill>
+                <a:latin typeface="Microsoft YaHei"/>
+              </a:defRPr>
+            </a:pPr>
+            <a:r>
+              <a:rPr sz="1200" b="0">
+                <a:solidFill>
+                  <a:srgbClr val="0F172A"/>
+                </a:solidFill>
+                <a:latin typeface="Microsoft YaHei"/>
+              </a:rPr>
+              <a:t>No target labels for split thresholds and leaf values</a:t>
+            </a:r>
+          </a:p>
+        </p:txBody>
+      </p:sp>
+      <p:sp>
+        <p:nvSpPr>
+          <p:cNvPr id="34" name="Rounded Rectangle 33"/>
+          <p:cNvSpPr/>
+          <p:nvPr/>
+        </p:nvSpPr>
+        <p:spPr>
+          <a:xfrm>
+            <a:off x="749808" y="5074920"/>
+            <a:ext cx="10012680" cy="1005840"/>
+          </a:xfrm>
+          <a:prstGeom prst="roundRect">
+            <a:avLst/>
+          </a:prstGeom>
+          <a:solidFill>
+            <a:srgbClr val="F1F5F9"/>
+          </a:solidFill>
+          <a:ln w="9525">
+            <a:solidFill>
+              <a:srgbClr val="CBD5E1"/>
+            </a:solidFill>
+          </a:ln>
+        </p:spPr>
+        <p:style>
+          <a:lnRef idx="1">
+            <a:schemeClr val="accent1"/>
+          </a:lnRef>
+          <a:fillRef idx="3">
+            <a:schemeClr val="accent1"/>
+          </a:fillRef>
+          <a:effectRef idx="2">
+            <a:schemeClr val="accent1"/>
+          </a:effectRef>
+          <a:fontRef idx="minor">
+            <a:schemeClr val="lt1"/>
+          </a:fontRef>
+        </p:style>
+        <p:txBody>
+          <a:bodyPr rtlCol="0" anchor="ctr"/>
+          <a:lstStyle/>
+          <a:p>
+            <a:pPr algn="ctr"/>
+          </a:p>
+        </p:txBody>
+      </p:sp>
+      <p:sp>
+        <p:nvSpPr>
+          <p:cNvPr id="35" name="Rectangle 34"/>
+          <p:cNvSpPr/>
+          <p:nvPr/>
+        </p:nvSpPr>
+        <p:spPr>
+          <a:xfrm>
+            <a:off x="749808" y="5074920"/>
+            <a:ext cx="50292" cy="1005840"/>
+          </a:xfrm>
+          <a:prstGeom prst="rect">
+            <a:avLst/>
+          </a:prstGeom>
+          <a:solidFill>
+            <a:srgbClr val="2563EB"/>
+          </a:solidFill>
+          <a:ln>
+            <a:noFill/>
+          </a:ln>
+        </p:spPr>
+        <p:style>
+          <a:lnRef idx="1">
+            <a:schemeClr val="accent1"/>
+          </a:lnRef>
+          <a:fillRef idx="3">
+            <a:schemeClr val="accent1"/>
+          </a:fillRef>
+          <a:effectRef idx="2">
+            <a:schemeClr val="accent1"/>
+          </a:effectRef>
+          <a:fontRef idx="minor">
+            <a:schemeClr val="lt1"/>
+          </a:fontRef>
+        </p:style>
+        <p:txBody>
+          <a:bodyPr rtlCol="0" anchor="ctr"/>
+          <a:lstStyle/>
+          <a:p>
+            <a:pPr algn="ctr"/>
+          </a:p>
+        </p:txBody>
+      </p:sp>
+      <p:sp>
+        <p:nvSpPr>
+          <p:cNvPr id="36" name="TextBox 35"/>
+          <p:cNvSpPr txBox="1"/>
+          <p:nvPr/>
+        </p:nvSpPr>
+        <p:spPr>
+          <a:xfrm>
+            <a:off x="914400" y="5166359"/>
+            <a:ext cx="9720072" cy="362102"/>
+          </a:xfrm>
+          <a:prstGeom prst="rect">
+            <a:avLst/>
+          </a:prstGeom>
+          <a:noFill/>
+        </p:spPr>
+        <p:txBody>
+          <a:bodyPr wrap="square" lIns="27432" rIns="27432" tIns="9144" bIns="9144" anchor="t">
+            <a:spAutoFit/>
+          </a:bodyPr>
+          <a:lstStyle/>
+          <a:p>
+            <a:pPr algn="l">
+              <a:defRPr sz="1200" b="1">
+                <a:solidFill>
+                  <a:srgbClr val="0F172A"/>
+                </a:solidFill>
+                <a:latin typeface="Microsoft YaHei"/>
+              </a:defRPr>
+            </a:pPr>
+            <a:r>
+              <a:rPr sz="1200" b="1">
+                <a:solidFill>
+                  <a:srgbClr val="0F172A"/>
+                </a:solidFill>
+                <a:latin typeface="Microsoft YaHei"/>
+              </a:rPr>
+              <a:t>答法：LLM 可以生成 qualitative belief tree，但没有 2022 标签时无法学习真实 NHTS 的 split threshold 和 leaf value。我们的设计把数值预测锚定在历史 NHTS household baseline 上，只让 LLM 提供事件机制先验。</a:t>
+            </a:r>
+          </a:p>
+        </p:txBody>
+      </p:sp>
+      <p:sp>
+        <p:nvSpPr>
+          <p:cNvPr id="37" name="TextBox 36"/>
+          <p:cNvSpPr txBox="1"/>
+          <p:nvPr/>
+        </p:nvSpPr>
+        <p:spPr>
+          <a:xfrm>
+            <a:off x="914400" y="5592470"/>
+            <a:ext cx="9720072" cy="415137"/>
+          </a:xfrm>
+          <a:prstGeom prst="rect">
+            <a:avLst/>
+          </a:prstGeom>
+          <a:noFill/>
+        </p:spPr>
+        <p:txBody>
+          <a:bodyPr wrap="square" lIns="27432" rIns="27432" tIns="9144" bIns="9144" anchor="t">
+            <a:spAutoFit/>
+          </a:bodyPr>
+          <a:lstStyle/>
+          <a:p>
+            <a:pPr algn="l">
+              <a:defRPr sz="1200" b="0">
+                <a:solidFill>
+                  <a:srgbClr val="64748B"/>
+                </a:solidFill>
+                <a:latin typeface="Microsoft YaHei"/>
+              </a:defRPr>
+            </a:pPr>
+          </a:p>
+        </p:txBody>
+      </p:sp>
+    </p:spTree>
+  </p:cSld>
+  <p:clrMapOvr>
+    <a:masterClrMapping/>
+  </p:clrMapOvr>
+</p:sld>
+</file>
+
+<file path=ppt/slides/slide25.xml><?xml version="1.0" encoding="utf-8"?>
+<p:sld xmlns:a="http://schemas.openxmlformats.org/drawingml/2006/main" xmlns:p="http://schemas.openxmlformats.org/presentationml/2006/main" xmlns:r="http://schemas.openxmlformats.org/officeDocument/2006/relationships">
+  <p:cSld>
+    <p:bg>
+      <p:bgPr>
+        <a:solidFill>
+          <a:srgbClr val="FFFFFF"/>
+        </a:solidFill>
+        <a:effectLst/>
+      </p:bgPr>
+    </p:bg>
+    <p:spTree>
+      <p:nvGrpSpPr>
+        <p:cNvPr id="1" name=""/>
+        <p:cNvGrpSpPr/>
+        <p:nvPr/>
+      </p:nvGrpSpPr>
+      <p:grpSpPr/>
+      <p:sp>
+        <p:nvSpPr>
+          <p:cNvPr id="2" name="TextBox 1"/>
+          <p:cNvSpPr txBox="1"/>
+          <p:nvPr/>
+        </p:nvSpPr>
+        <p:spPr>
+          <a:xfrm>
+            <a:off x="384048" y="109728"/>
+            <a:ext cx="4480560" cy="164592"/>
+          </a:xfrm>
+          <a:prstGeom prst="rect">
+            <a:avLst/>
+          </a:prstGeom>
+          <a:noFill/>
+        </p:spPr>
+        <p:txBody>
+          <a:bodyPr wrap="square" lIns="27432" rIns="27432" tIns="9144" bIns="9144" anchor="ctr">
+            <a:spAutoFit/>
+          </a:bodyPr>
+          <a:lstStyle/>
+          <a:p>
+            <a:pPr algn="l">
+              <a:defRPr sz="750" b="1">
+                <a:solidFill>
+                  <a:srgbClr val="64748B"/>
+                </a:solidFill>
+                <a:latin typeface="Microsoft YaHei"/>
+              </a:defRPr>
+            </a:pPr>
+            <a:r>
+              <a:rPr sz="750" b="1">
+                <a:solidFill>
+                  <a:srgbClr val="64748B"/>
+                </a:solidFill>
+                <a:latin typeface="Microsoft YaHei"/>
+              </a:rPr>
+              <a:t>Mobility Inequality and Sustainable Development</a:t>
+            </a:r>
+          </a:p>
+        </p:txBody>
+      </p:sp>
+      <p:sp>
+        <p:nvSpPr>
+          <p:cNvPr id="3" name="TextBox 2"/>
+          <p:cNvSpPr txBox="1"/>
+          <p:nvPr/>
+        </p:nvSpPr>
+        <p:spPr>
+          <a:xfrm>
+            <a:off x="384048" y="347472"/>
+            <a:ext cx="777240" cy="292608"/>
+          </a:xfrm>
+          <a:prstGeom prst="rect">
+            <a:avLst/>
+          </a:prstGeom>
+          <a:noFill/>
+        </p:spPr>
+        <p:txBody>
+          <a:bodyPr wrap="square" lIns="27432" rIns="27432" tIns="9144" bIns="9144" anchor="ctr">
+            <a:spAutoFit/>
+          </a:bodyPr>
+          <a:lstStyle/>
+          <a:p>
+            <a:pPr algn="l">
+              <a:defRPr sz="1300" b="1">
+                <a:solidFill>
+                  <a:srgbClr val="EA580C"/>
+                </a:solidFill>
+                <a:latin typeface="Microsoft YaHei"/>
+              </a:defRPr>
+            </a:pPr>
+            <a:r>
+              <a:rPr sz="1300" b="1">
+                <a:solidFill>
+                  <a:srgbClr val="EA580C"/>
+                </a:solidFill>
+                <a:latin typeface="Microsoft YaHei"/>
+              </a:rPr>
+              <a:t>BACKUP</a:t>
+            </a:r>
+          </a:p>
+        </p:txBody>
+      </p:sp>
+      <p:sp>
+        <p:nvSpPr>
+          <p:cNvPr id="4" name="TextBox 3"/>
+          <p:cNvSpPr txBox="1"/>
+          <p:nvPr/>
+        </p:nvSpPr>
+        <p:spPr>
+          <a:xfrm>
+            <a:off x="1234440" y="246888"/>
+            <a:ext cx="8412480" cy="329184"/>
+          </a:xfrm>
+          <a:prstGeom prst="rect">
+            <a:avLst/>
+          </a:prstGeom>
+          <a:noFill/>
+        </p:spPr>
+        <p:txBody>
+          <a:bodyPr wrap="square" lIns="27432" rIns="27432" tIns="9144" bIns="9144" anchor="ctr">
+            <a:spAutoFit/>
+          </a:bodyPr>
+          <a:lstStyle/>
+          <a:p>
+            <a:pPr algn="l">
+              <a:defRPr sz="1700" b="1">
+                <a:solidFill>
+                  <a:srgbClr val="0F172A"/>
+                </a:solidFill>
+                <a:latin typeface="Microsoft YaHei"/>
+              </a:defRPr>
+            </a:pPr>
+            <a:r>
+              <a:rPr sz="1700" b="1">
+                <a:solidFill>
+                  <a:srgbClr val="0F172A"/>
+                </a:solidFill>
+                <a:latin typeface="Microsoft YaHei"/>
+              </a:rPr>
+              <a:t>有没有使用 2022 标签或 retrospective leakage？</a:t>
+            </a:r>
+          </a:p>
+        </p:txBody>
+      </p:sp>
+      <p:sp>
+        <p:nvSpPr>
+          <p:cNvPr id="5" name="TextBox 4"/>
+          <p:cNvSpPr txBox="1"/>
+          <p:nvPr/>
+        </p:nvSpPr>
+        <p:spPr>
+          <a:xfrm>
+            <a:off x="1252728" y="585216"/>
+            <a:ext cx="8869680" cy="228600"/>
+          </a:xfrm>
+          <a:prstGeom prst="rect">
+            <a:avLst/>
+          </a:prstGeom>
+          <a:noFill/>
+        </p:spPr>
+        <p:txBody>
+          <a:bodyPr wrap="square" lIns="27432" rIns="27432" tIns="9144" bIns="9144" anchor="ctr">
+            <a:spAutoFit/>
+          </a:bodyPr>
+          <a:lstStyle/>
+          <a:p>
+            <a:pPr algn="l">
+              <a:defRPr sz="850" b="0">
+                <a:solidFill>
+                  <a:srgbClr val="64748B"/>
+                </a:solidFill>
+                <a:latin typeface="Microsoft YaHei"/>
+              </a:defRPr>
+            </a:pPr>
+            <a:r>
+              <a:rPr sz="850" b="0">
+                <a:solidFill>
+                  <a:srgbClr val="64748B"/>
+                </a:solidFill>
+                <a:latin typeface="Microsoft YaHei"/>
+              </a:rPr>
+              <a:t>Did the pipeline use 2022 labels or retrospective leakage?</a:t>
+            </a:r>
+          </a:p>
+        </p:txBody>
+      </p:sp>
+      <p:pic>
+        <p:nvPicPr>
+          <p:cNvPr id="6" name="Picture 5" descr="image.png"/>
+          <p:cNvPicPr>
+            <a:picLocks noChangeAspect="1"/>
+          </p:cNvPicPr>
+          <p:nvPr/>
+        </p:nvPicPr>
+        <p:blipFill>
+          <a:blip r:embed="rId2"/>
+          <a:stretch>
+            <a:fillRect/>
+          </a:stretch>
+        </p:blipFill>
+        <p:spPr>
+          <a:xfrm>
+            <a:off x="11018520" y="201168"/>
+            <a:ext cx="713232" cy="502730"/>
+          </a:xfrm>
+          <a:prstGeom prst="rect">
+            <a:avLst/>
+          </a:prstGeom>
+        </p:spPr>
+      </p:pic>
+      <p:sp>
+        <p:nvSpPr>
+          <p:cNvPr id="7" name="Rectangle 6"/>
+          <p:cNvSpPr/>
+          <p:nvPr/>
+        </p:nvSpPr>
+        <p:spPr>
+          <a:xfrm>
+            <a:off x="384048" y="877824"/>
+            <a:ext cx="11201400" cy="10972"/>
+          </a:xfrm>
+          <a:prstGeom prst="rect">
+            <a:avLst/>
+          </a:prstGeom>
+          <a:solidFill>
+            <a:srgbClr val="CBD5E1"/>
+          </a:solidFill>
+          <a:ln>
+            <a:noFill/>
+          </a:ln>
+        </p:spPr>
+        <p:style>
+          <a:lnRef idx="1">
+            <a:schemeClr val="accent1"/>
+          </a:lnRef>
+          <a:fillRef idx="3">
+            <a:schemeClr val="accent1"/>
+          </a:fillRef>
+          <a:effectRef idx="2">
+            <a:schemeClr val="accent1"/>
+          </a:effectRef>
+          <a:fontRef idx="minor">
+            <a:schemeClr val="lt1"/>
+          </a:fontRef>
+        </p:style>
+        <p:txBody>
+          <a:bodyPr rtlCol="0" anchor="ctr"/>
+          <a:lstStyle/>
+          <a:p>
+            <a:pPr algn="ctr"/>
+          </a:p>
+        </p:txBody>
+      </p:sp>
+      <p:sp>
+        <p:nvSpPr>
+          <p:cNvPr id="8" name="Rectangle 7"/>
+          <p:cNvSpPr/>
+          <p:nvPr/>
+        </p:nvSpPr>
+        <p:spPr>
+          <a:xfrm>
+            <a:off x="384048" y="6428232"/>
+            <a:ext cx="11201400" cy="10972"/>
+          </a:xfrm>
+          <a:prstGeom prst="rect">
+            <a:avLst/>
+          </a:prstGeom>
+          <a:solidFill>
+            <a:srgbClr val="CBD5E1"/>
+          </a:solidFill>
+          <a:ln>
+            <a:noFill/>
+          </a:ln>
+        </p:spPr>
+        <p:style>
+          <a:lnRef idx="1">
+            <a:schemeClr val="accent1"/>
+          </a:lnRef>
+          <a:fillRef idx="3">
+            <a:schemeClr val="accent1"/>
+          </a:fillRef>
+          <a:effectRef idx="2">
+            <a:schemeClr val="accent1"/>
+          </a:effectRef>
+          <a:fontRef idx="minor">
+            <a:schemeClr val="lt1"/>
+          </a:fontRef>
+        </p:style>
+        <p:txBody>
+          <a:bodyPr rtlCol="0" anchor="ctr"/>
+          <a:lstStyle/>
+          <a:p>
+            <a:pPr algn="ctr"/>
+          </a:p>
+        </p:txBody>
+      </p:sp>
+      <p:sp>
+        <p:nvSpPr>
+          <p:cNvPr id="9" name="TextBox 8"/>
+          <p:cNvSpPr txBox="1"/>
+          <p:nvPr/>
+        </p:nvSpPr>
+        <p:spPr>
+          <a:xfrm>
+            <a:off x="384048" y="6473952"/>
+            <a:ext cx="5212080" cy="164592"/>
+          </a:xfrm>
+          <a:prstGeom prst="rect">
+            <a:avLst/>
+          </a:prstGeom>
+          <a:noFill/>
+        </p:spPr>
+        <p:txBody>
+          <a:bodyPr wrap="square" lIns="27432" rIns="27432" tIns="9144" bIns="9144" anchor="ctr">
+            <a:spAutoFit/>
+          </a:bodyPr>
+          <a:lstStyle/>
+          <a:p>
+            <a:pPr algn="l">
+              <a:defRPr sz="750" b="0">
+                <a:solidFill>
+                  <a:srgbClr val="64748B"/>
+                </a:solidFill>
+                <a:latin typeface="Microsoft YaHei"/>
+              </a:defRPr>
+            </a:pPr>
+            <a:r>
+              <a:rPr sz="750" b="0">
+                <a:solidFill>
+                  <a:srgbClr val="64748B"/>
+                </a:solidFill>
+                <a:latin typeface="Microsoft YaHei"/>
+              </a:rPr>
+              <a:t>Appendix: reviewer and instructor Q&amp;A</a:t>
+            </a:r>
+          </a:p>
+        </p:txBody>
+      </p:sp>
+      <p:sp>
+        <p:nvSpPr>
+          <p:cNvPr id="10" name="TextBox 9"/>
+          <p:cNvSpPr txBox="1"/>
+          <p:nvPr/>
+        </p:nvSpPr>
+        <p:spPr>
+          <a:xfrm>
+            <a:off x="10149840" y="6473952"/>
+            <a:ext cx="1417320" cy="164592"/>
+          </a:xfrm>
+          <a:prstGeom prst="rect">
+            <a:avLst/>
+          </a:prstGeom>
+          <a:noFill/>
+        </p:spPr>
+        <p:txBody>
+          <a:bodyPr wrap="square" lIns="27432" rIns="27432" tIns="9144" bIns="9144" anchor="ctr">
+            <a:spAutoFit/>
+          </a:bodyPr>
+          <a:lstStyle/>
+          <a:p>
+            <a:pPr algn="r">
+              <a:defRPr sz="750" b="1">
+                <a:solidFill>
+                  <a:srgbClr val="64748B"/>
+                </a:solidFill>
+                <a:latin typeface="Microsoft YaHei"/>
+              </a:defRPr>
+            </a:pPr>
+            <a:r>
+              <a:rPr sz="750" b="1">
+                <a:solidFill>
+                  <a:srgbClr val="64748B"/>
+                </a:solidFill>
+                <a:latin typeface="Microsoft YaHei"/>
+              </a:rPr>
+              <a:t>B2</a:t>
+            </a:r>
+          </a:p>
+        </p:txBody>
+      </p:sp>
+      <p:sp>
+        <p:nvSpPr>
+          <p:cNvPr id="11" name="Rounded Rectangle 10"/>
+          <p:cNvSpPr/>
+          <p:nvPr/>
+        </p:nvSpPr>
+        <p:spPr>
+          <a:xfrm>
+            <a:off x="658368" y="1115568"/>
+            <a:ext cx="10287000" cy="749808"/>
+          </a:xfrm>
+          <a:prstGeom prst="roundRect">
+            <a:avLst/>
+          </a:prstGeom>
+          <a:solidFill>
+            <a:srgbClr val="F1F5F9"/>
+          </a:solidFill>
+          <a:ln w="9525">
+            <a:solidFill>
+              <a:srgbClr val="CBD5E1"/>
+            </a:solidFill>
+          </a:ln>
+        </p:spPr>
+        <p:style>
+          <a:lnRef idx="1">
+            <a:schemeClr val="accent1"/>
+          </a:lnRef>
+          <a:fillRef idx="3">
+            <a:schemeClr val="accent1"/>
+          </a:fillRef>
+          <a:effectRef idx="2">
+            <a:schemeClr val="accent1"/>
+          </a:effectRef>
+          <a:fontRef idx="minor">
+            <a:schemeClr val="lt1"/>
+          </a:fontRef>
+        </p:style>
+        <p:txBody>
+          <a:bodyPr rtlCol="0" anchor="ctr"/>
+          <a:lstStyle/>
+          <a:p>
+            <a:pPr algn="ctr"/>
+          </a:p>
+        </p:txBody>
+      </p:sp>
+      <p:sp>
+        <p:nvSpPr>
+          <p:cNvPr id="12" name="TextBox 11"/>
+          <p:cNvSpPr txBox="1"/>
+          <p:nvPr/>
+        </p:nvSpPr>
+        <p:spPr>
+          <a:xfrm>
+            <a:off x="868680" y="1298448"/>
+            <a:ext cx="1463040" cy="182880"/>
+          </a:xfrm>
+          <a:prstGeom prst="rect">
+            <a:avLst/>
+          </a:prstGeom>
+          <a:noFill/>
+        </p:spPr>
+        <p:txBody>
+          <a:bodyPr wrap="square" lIns="27432" rIns="27432" tIns="9144" bIns="9144" anchor="ctr">
+            <a:spAutoFit/>
+          </a:bodyPr>
+          <a:lstStyle/>
+          <a:p>
+            <a:pPr algn="l">
+              <a:defRPr sz="1000" b="1">
+                <a:solidFill>
+                  <a:srgbClr val="EA580C"/>
+                </a:solidFill>
+                <a:latin typeface="Microsoft YaHei"/>
+              </a:defRPr>
+            </a:pPr>
+            <a:r>
+              <a:rPr sz="1000" b="1">
+                <a:solidFill>
+                  <a:srgbClr val="EA580C"/>
+                </a:solidFill>
+                <a:latin typeface="Microsoft YaHei"/>
+              </a:rPr>
+              <a:t>Short answer</a:t>
+            </a:r>
+          </a:p>
+        </p:txBody>
+      </p:sp>
+      <p:sp>
+        <p:nvSpPr>
+          <p:cNvPr id="13" name="TextBox 12"/>
+          <p:cNvSpPr txBox="1"/>
+          <p:nvPr/>
+        </p:nvSpPr>
+        <p:spPr>
+          <a:xfrm>
+            <a:off x="2240280" y="1216152"/>
+            <a:ext cx="8366760" cy="329184"/>
+          </a:xfrm>
+          <a:prstGeom prst="rect">
+            <a:avLst/>
+          </a:prstGeom>
+          <a:noFill/>
+        </p:spPr>
+        <p:txBody>
+          <a:bodyPr wrap="square" lIns="27432" rIns="27432" tIns="9144" bIns="9144" anchor="ctr">
+            <a:spAutoFit/>
+          </a:bodyPr>
+          <a:lstStyle/>
+          <a:p>
+            <a:pPr algn="l">
+              <a:defRPr sz="1300" b="1">
+                <a:solidFill>
+                  <a:srgbClr val="0F172A"/>
+                </a:solidFill>
+                <a:latin typeface="Microsoft YaHei"/>
+              </a:defRPr>
+            </a:pPr>
+            <a:r>
+              <a:rPr sz="1300" b="1">
+                <a:solidFill>
+                  <a:srgbClr val="0F172A"/>
+                </a:solidFill>
+                <a:latin typeface="Microsoft YaHei"/>
+              </a:rPr>
+              <a:t>主方法不使用 2022 CNTTDHH 训练或校准；2022 只做最终 evaluation。</a:t>
+            </a:r>
+          </a:p>
+        </p:txBody>
+      </p:sp>
+      <p:sp>
+        <p:nvSpPr>
+          <p:cNvPr id="14" name="Rectangle 13"/>
+          <p:cNvSpPr/>
+          <p:nvPr/>
+        </p:nvSpPr>
+        <p:spPr>
+          <a:xfrm>
+            <a:off x="713232" y="2176272"/>
+            <a:ext cx="4023360" cy="420624"/>
+          </a:xfrm>
+          <a:prstGeom prst="rect">
+            <a:avLst/>
+          </a:prstGeom>
+          <a:solidFill>
+            <a:srgbClr val="00796B"/>
+          </a:solidFill>
+          <a:ln>
+            <a:noFill/>
+          </a:ln>
+        </p:spPr>
+        <p:style>
+          <a:lnRef idx="1">
+            <a:schemeClr val="accent1"/>
+          </a:lnRef>
+          <a:fillRef idx="3">
+            <a:schemeClr val="accent1"/>
+          </a:fillRef>
+          <a:effectRef idx="2">
+            <a:schemeClr val="accent1"/>
+          </a:effectRef>
+          <a:fontRef idx="minor">
+            <a:schemeClr val="lt1"/>
+          </a:fontRef>
+        </p:style>
+        <p:txBody>
+          <a:bodyPr rtlCol="0" anchor="ctr"/>
+          <a:lstStyle/>
+          <a:p>
+            <a:pPr algn="ctr"/>
+          </a:p>
+        </p:txBody>
+      </p:sp>
+      <p:sp>
+        <p:nvSpPr>
+          <p:cNvPr id="15" name="TextBox 14"/>
+          <p:cNvSpPr txBox="1"/>
+          <p:nvPr/>
+        </p:nvSpPr>
+        <p:spPr>
+          <a:xfrm>
+            <a:off x="749808" y="2249424"/>
+            <a:ext cx="3950208" cy="292608"/>
+          </a:xfrm>
+          <a:prstGeom prst="rect">
+            <a:avLst/>
+          </a:prstGeom>
+          <a:noFill/>
+        </p:spPr>
+        <p:txBody>
+          <a:bodyPr wrap="square" lIns="27432" rIns="27432" tIns="9144" bIns="9144" anchor="ctr">
+            <a:spAutoFit/>
+          </a:bodyPr>
+          <a:lstStyle/>
+          <a:p>
+            <a:pPr algn="ctr">
+              <a:defRPr sz="1200" b="1">
+                <a:solidFill>
+                  <a:srgbClr val="FFFFFF"/>
+                </a:solidFill>
+                <a:latin typeface="Microsoft YaHei"/>
+              </a:defRPr>
+            </a:pPr>
+            <a:r>
+              <a:rPr sz="1200" b="1">
+                <a:solidFill>
+                  <a:srgbClr val="FFFFFF"/>
+                </a:solidFill>
+                <a:latin typeface="Microsoft YaHei"/>
+              </a:rPr>
+              <a:t>Evidence</a:t>
+            </a:r>
+          </a:p>
+        </p:txBody>
+      </p:sp>
+      <p:sp>
+        <p:nvSpPr>
+          <p:cNvPr id="16" name="Rectangle 15"/>
+          <p:cNvSpPr/>
+          <p:nvPr/>
+        </p:nvSpPr>
+        <p:spPr>
+          <a:xfrm>
+            <a:off x="4736592" y="2176272"/>
+            <a:ext cx="6035040" cy="420624"/>
+          </a:xfrm>
+          <a:prstGeom prst="rect">
+            <a:avLst/>
+          </a:prstGeom>
+          <a:solidFill>
+            <a:srgbClr val="00796B"/>
+          </a:solidFill>
+          <a:ln>
+            <a:noFill/>
+          </a:ln>
+        </p:spPr>
+        <p:style>
+          <a:lnRef idx="1">
+            <a:schemeClr val="accent1"/>
+          </a:lnRef>
+          <a:fillRef idx="3">
+            <a:schemeClr val="accent1"/>
+          </a:fillRef>
+          <a:effectRef idx="2">
+            <a:schemeClr val="accent1"/>
+          </a:effectRef>
+          <a:fontRef idx="minor">
+            <a:schemeClr val="lt1"/>
+          </a:fontRef>
+        </p:style>
+        <p:txBody>
+          <a:bodyPr rtlCol="0" anchor="ctr"/>
+          <a:lstStyle/>
+          <a:p>
+            <a:pPr algn="ctr"/>
+          </a:p>
+        </p:txBody>
+      </p:sp>
+      <p:sp>
+        <p:nvSpPr>
+          <p:cNvPr id="17" name="TextBox 16"/>
+          <p:cNvSpPr txBox="1"/>
+          <p:nvPr/>
+        </p:nvSpPr>
+        <p:spPr>
+          <a:xfrm>
+            <a:off x="4773168" y="2249424"/>
+            <a:ext cx="5961888" cy="292608"/>
+          </a:xfrm>
+          <a:prstGeom prst="rect">
+            <a:avLst/>
+          </a:prstGeom>
+          <a:noFill/>
+        </p:spPr>
+        <p:txBody>
+          <a:bodyPr wrap="square" lIns="27432" rIns="27432" tIns="9144" bIns="9144" anchor="ctr">
+            <a:spAutoFit/>
+          </a:bodyPr>
+          <a:lstStyle/>
+          <a:p>
+            <a:pPr algn="ctr">
+              <a:defRPr sz="1200" b="1">
+                <a:solidFill>
+                  <a:srgbClr val="FFFFFF"/>
+                </a:solidFill>
+                <a:latin typeface="Microsoft YaHei"/>
+              </a:defRPr>
+            </a:pPr>
+            <a:r>
+              <a:rPr sz="1200" b="1">
+                <a:solidFill>
+                  <a:srgbClr val="FFFFFF"/>
+                </a:solidFill>
+                <a:latin typeface="Microsoft YaHei"/>
+              </a:rPr>
+              <a:t>Value / implication</a:t>
+            </a:r>
+          </a:p>
+        </p:txBody>
+      </p:sp>
+      <p:sp>
+        <p:nvSpPr>
+          <p:cNvPr id="18" name="Rectangle 17"/>
+          <p:cNvSpPr/>
+          <p:nvPr/>
+        </p:nvSpPr>
+        <p:spPr>
+          <a:xfrm>
+            <a:off x="713232" y="2596896"/>
+            <a:ext cx="4023360" cy="420624"/>
+          </a:xfrm>
+          <a:prstGeom prst="rect">
+            <a:avLst/>
+          </a:prstGeom>
+          <a:solidFill>
+            <a:srgbClr val="F8FAFC"/>
+          </a:solidFill>
+          <a:ln w="9525">
+            <a:solidFill>
+              <a:srgbClr val="CBD5E1"/>
+            </a:solidFill>
+          </a:ln>
+        </p:spPr>
+        <p:style>
+          <a:lnRef idx="1">
+            <a:schemeClr val="accent1"/>
+          </a:lnRef>
+          <a:fillRef idx="3">
+            <a:schemeClr val="accent1"/>
+          </a:fillRef>
+          <a:effectRef idx="2">
+            <a:schemeClr val="accent1"/>
+          </a:effectRef>
+          <a:fontRef idx="minor">
+            <a:schemeClr val="lt1"/>
+          </a:fontRef>
+        </p:style>
+        <p:txBody>
+          <a:bodyPr rtlCol="0" anchor="ctr"/>
+          <a:lstStyle/>
+          <a:p>
+            <a:pPr algn="ctr"/>
+          </a:p>
+        </p:txBody>
+      </p:sp>
+      <p:sp>
+        <p:nvSpPr>
+          <p:cNvPr id="19" name="TextBox 18"/>
+          <p:cNvSpPr txBox="1"/>
+          <p:nvPr/>
+        </p:nvSpPr>
+        <p:spPr>
+          <a:xfrm>
+            <a:off x="768096" y="2660903"/>
+            <a:ext cx="3913632" cy="292608"/>
+          </a:xfrm>
+          <a:prstGeom prst="rect">
+            <a:avLst/>
+          </a:prstGeom>
+          <a:noFill/>
+        </p:spPr>
+        <p:txBody>
+          <a:bodyPr wrap="square" lIns="27432" rIns="27432" tIns="9144" bIns="9144" anchor="t">
+            <a:spAutoFit/>
+          </a:bodyPr>
+          <a:lstStyle/>
+          <a:p>
+            <a:pPr algn="l">
+              <a:defRPr sz="1200" b="1">
+                <a:solidFill>
+                  <a:srgbClr val="0F172A"/>
+                </a:solidFill>
+                <a:latin typeface="Microsoft YaHei"/>
+              </a:defRPr>
+            </a:pPr>
+            <a:r>
+              <a:rPr sz="1200" b="1">
+                <a:solidFill>
+                  <a:srgbClr val="0F172A"/>
+                </a:solidFill>
+                <a:latin typeface="Microsoft YaHei"/>
+              </a:rPr>
+              <a:t>Main method</a:t>
+            </a:r>
+          </a:p>
+        </p:txBody>
+      </p:sp>
+      <p:sp>
+        <p:nvSpPr>
+          <p:cNvPr id="20" name="Rectangle 19"/>
+          <p:cNvSpPr/>
+          <p:nvPr/>
+        </p:nvSpPr>
+        <p:spPr>
+          <a:xfrm>
+            <a:off x="4736592" y="2596896"/>
+            <a:ext cx="6035040" cy="420624"/>
+          </a:xfrm>
+          <a:prstGeom prst="rect">
+            <a:avLst/>
+          </a:prstGeom>
+          <a:solidFill>
+            <a:srgbClr val="F8FAFC"/>
+          </a:solidFill>
+          <a:ln w="9525">
+            <a:solidFill>
+              <a:srgbClr val="CBD5E1"/>
+            </a:solidFill>
+          </a:ln>
+        </p:spPr>
+        <p:style>
+          <a:lnRef idx="1">
+            <a:schemeClr val="accent1"/>
+          </a:lnRef>
+          <a:fillRef idx="3">
+            <a:schemeClr val="accent1"/>
+          </a:fillRef>
+          <a:effectRef idx="2">
+            <a:schemeClr val="accent1"/>
+          </a:effectRef>
+          <a:fontRef idx="minor">
+            <a:schemeClr val="lt1"/>
+          </a:fontRef>
+        </p:style>
+        <p:txBody>
+          <a:bodyPr rtlCol="0" anchor="ctr"/>
+          <a:lstStyle/>
+          <a:p>
+            <a:pPr algn="ctr"/>
+          </a:p>
+        </p:txBody>
+      </p:sp>
+      <p:sp>
+        <p:nvSpPr>
+          <p:cNvPr id="21" name="TextBox 20"/>
+          <p:cNvSpPr txBox="1"/>
+          <p:nvPr/>
+        </p:nvSpPr>
+        <p:spPr>
+          <a:xfrm>
+            <a:off x="4791456" y="2660903"/>
+            <a:ext cx="5925312" cy="292608"/>
+          </a:xfrm>
+          <a:prstGeom prst="rect">
+            <a:avLst/>
+          </a:prstGeom>
+          <a:noFill/>
+        </p:spPr>
+        <p:txBody>
+          <a:bodyPr wrap="square" lIns="27432" rIns="27432" tIns="9144" bIns="9144" anchor="t">
+            <a:spAutoFit/>
+          </a:bodyPr>
+          <a:lstStyle/>
+          <a:p>
+            <a:pPr algn="l">
+              <a:defRPr sz="1200" b="0">
+                <a:solidFill>
+                  <a:srgbClr val="0F172A"/>
+                </a:solidFill>
+                <a:latin typeface="Microsoft YaHei"/>
+              </a:defRPr>
+            </a:pPr>
+            <a:r>
+              <a:rPr sz="1200" b="0">
+                <a:solidFill>
+                  <a:srgbClr val="0F172A"/>
+                </a:solidFill>
+                <a:latin typeface="Microsoft YaHei"/>
+              </a:rPr>
+              <a:t>gated_trip_suppression_a1_d0p15 fixed before evaluation</a:t>
+            </a:r>
+          </a:p>
+        </p:txBody>
+      </p:sp>
+      <p:sp>
+        <p:nvSpPr>
+          <p:cNvPr id="22" name="Rectangle 21"/>
+          <p:cNvSpPr/>
+          <p:nvPr/>
+        </p:nvSpPr>
+        <p:spPr>
+          <a:xfrm>
+            <a:off x="713232" y="3017520"/>
+            <a:ext cx="4023360" cy="420624"/>
+          </a:xfrm>
+          <a:prstGeom prst="rect">
+            <a:avLst/>
+          </a:prstGeom>
+          <a:solidFill>
+            <a:srgbClr val="F1F5F9"/>
+          </a:solidFill>
+          <a:ln w="9525">
+            <a:solidFill>
+              <a:srgbClr val="CBD5E1"/>
+            </a:solidFill>
+          </a:ln>
+        </p:spPr>
+        <p:style>
+          <a:lnRef idx="1">
+            <a:schemeClr val="accent1"/>
+          </a:lnRef>
+          <a:fillRef idx="3">
+            <a:schemeClr val="accent1"/>
+          </a:fillRef>
+          <a:effectRef idx="2">
+            <a:schemeClr val="accent1"/>
+          </a:effectRef>
+          <a:fontRef idx="minor">
+            <a:schemeClr val="lt1"/>
+          </a:fontRef>
+        </p:style>
+        <p:txBody>
+          <a:bodyPr rtlCol="0" anchor="ctr"/>
+          <a:lstStyle/>
+          <a:p>
+            <a:pPr algn="ctr"/>
+          </a:p>
+        </p:txBody>
+      </p:sp>
+      <p:sp>
+        <p:nvSpPr>
+          <p:cNvPr id="23" name="TextBox 22"/>
+          <p:cNvSpPr txBox="1"/>
+          <p:nvPr/>
+        </p:nvSpPr>
+        <p:spPr>
+          <a:xfrm>
+            <a:off x="768096" y="3081527"/>
+            <a:ext cx="3913632" cy="292608"/>
+          </a:xfrm>
+          <a:prstGeom prst="rect">
+            <a:avLst/>
+          </a:prstGeom>
+          <a:noFill/>
+        </p:spPr>
+        <p:txBody>
+          <a:bodyPr wrap="square" lIns="27432" rIns="27432" tIns="9144" bIns="9144" anchor="t">
+            <a:spAutoFit/>
+          </a:bodyPr>
+          <a:lstStyle/>
+          <a:p>
+            <a:pPr algn="l">
+              <a:defRPr sz="1200" b="1">
+                <a:solidFill>
+                  <a:srgbClr val="0F172A"/>
+                </a:solidFill>
+                <a:latin typeface="Microsoft YaHei"/>
+              </a:defRPr>
+            </a:pPr>
+            <a:r>
+              <a:rPr sz="1200" b="1">
+                <a:solidFill>
+                  <a:srgbClr val="0F172A"/>
+                </a:solidFill>
+                <a:latin typeface="Microsoft YaHei"/>
+              </a:rPr>
+              <a:t>LLM inputs</a:t>
+            </a:r>
+          </a:p>
+        </p:txBody>
+      </p:sp>
+      <p:sp>
+        <p:nvSpPr>
+          <p:cNvPr id="24" name="Rectangle 23"/>
+          <p:cNvSpPr/>
+          <p:nvPr/>
+        </p:nvSpPr>
+        <p:spPr>
+          <a:xfrm>
+            <a:off x="4736592" y="3017520"/>
+            <a:ext cx="6035040" cy="420624"/>
+          </a:xfrm>
+          <a:prstGeom prst="rect">
+            <a:avLst/>
+          </a:prstGeom>
+          <a:solidFill>
+            <a:srgbClr val="F1F5F9"/>
+          </a:solidFill>
+          <a:ln w="9525">
+            <a:solidFill>
+              <a:srgbClr val="CBD5E1"/>
+            </a:solidFill>
+          </a:ln>
+        </p:spPr>
+        <p:style>
+          <a:lnRef idx="1">
+            <a:schemeClr val="accent1"/>
+          </a:lnRef>
+          <a:fillRef idx="3">
+            <a:schemeClr val="accent1"/>
+          </a:fillRef>
+          <a:effectRef idx="2">
+            <a:schemeClr val="accent1"/>
+          </a:effectRef>
+          <a:fontRef idx="minor">
+            <a:schemeClr val="lt1"/>
+          </a:fontRef>
+        </p:style>
+        <p:txBody>
+          <a:bodyPr rtlCol="0" anchor="ctr"/>
+          <a:lstStyle/>
+          <a:p>
+            <a:pPr algn="ctr"/>
+          </a:p>
+        </p:txBody>
+      </p:sp>
+      <p:sp>
+        <p:nvSpPr>
+          <p:cNvPr id="25" name="TextBox 24"/>
+          <p:cNvSpPr txBox="1"/>
+          <p:nvPr/>
+        </p:nvSpPr>
+        <p:spPr>
+          <a:xfrm>
+            <a:off x="4791456" y="3081527"/>
+            <a:ext cx="5925312" cy="292608"/>
+          </a:xfrm>
+          <a:prstGeom prst="rect">
+            <a:avLst/>
+          </a:prstGeom>
+          <a:noFill/>
+        </p:spPr>
+        <p:txBody>
+          <a:bodyPr wrap="square" lIns="27432" rIns="27432" tIns="9144" bIns="9144" anchor="t">
+            <a:spAutoFit/>
+          </a:bodyPr>
+          <a:lstStyle/>
+          <a:p>
+            <a:pPr algn="l">
+              <a:defRPr sz="1200" b="0">
+                <a:solidFill>
+                  <a:srgbClr val="0F172A"/>
+                </a:solidFill>
+                <a:latin typeface="Microsoft YaHei"/>
+              </a:defRPr>
+            </a:pPr>
+            <a:r>
+              <a:rPr sz="1200" b="0">
+                <a:solidFill>
+                  <a:srgbClr val="0F172A"/>
+                </a:solidFill>
+                <a:latin typeface="Microsoft YaHei"/>
+              </a:rPr>
+              <a:t>Exclude HOUSEID, CNTTDHH, WTHHFIN</a:t>
+            </a:r>
+          </a:p>
+        </p:txBody>
+      </p:sp>
+      <p:sp>
+        <p:nvSpPr>
+          <p:cNvPr id="26" name="Rectangle 25"/>
+          <p:cNvSpPr/>
+          <p:nvPr/>
+        </p:nvSpPr>
+        <p:spPr>
+          <a:xfrm>
+            <a:off x="713232" y="3438144"/>
+            <a:ext cx="4023360" cy="420624"/>
+          </a:xfrm>
+          <a:prstGeom prst="rect">
+            <a:avLst/>
+          </a:prstGeom>
+          <a:solidFill>
+            <a:srgbClr val="F8FAFC"/>
+          </a:solidFill>
+          <a:ln w="9525">
+            <a:solidFill>
+              <a:srgbClr val="CBD5E1"/>
+            </a:solidFill>
+          </a:ln>
+        </p:spPr>
+        <p:style>
+          <a:lnRef idx="1">
+            <a:schemeClr val="accent1"/>
+          </a:lnRef>
+          <a:fillRef idx="3">
+            <a:schemeClr val="accent1"/>
+          </a:fillRef>
+          <a:effectRef idx="2">
+            <a:schemeClr val="accent1"/>
+          </a:effectRef>
+          <a:fontRef idx="minor">
+            <a:schemeClr val="lt1"/>
+          </a:fontRef>
+        </p:style>
+        <p:txBody>
+          <a:bodyPr rtlCol="0" anchor="ctr"/>
+          <a:lstStyle/>
+          <a:p>
+            <a:pPr algn="ctr"/>
+          </a:p>
+        </p:txBody>
+      </p:sp>
+      <p:sp>
+        <p:nvSpPr>
+          <p:cNvPr id="27" name="TextBox 26"/>
+          <p:cNvSpPr txBox="1"/>
+          <p:nvPr/>
+        </p:nvSpPr>
+        <p:spPr>
+          <a:xfrm>
+            <a:off x="768096" y="3502151"/>
+            <a:ext cx="3913632" cy="292608"/>
+          </a:xfrm>
+          <a:prstGeom prst="rect">
+            <a:avLst/>
+          </a:prstGeom>
+          <a:noFill/>
+        </p:spPr>
+        <p:txBody>
+          <a:bodyPr wrap="square" lIns="27432" rIns="27432" tIns="9144" bIns="9144" anchor="t">
+            <a:spAutoFit/>
+          </a:bodyPr>
+          <a:lstStyle/>
+          <a:p>
+            <a:pPr algn="l">
+              <a:defRPr sz="1200" b="1">
+                <a:solidFill>
+                  <a:srgbClr val="0F172A"/>
+                </a:solidFill>
+                <a:latin typeface="Microsoft YaHei"/>
+              </a:defRPr>
+            </a:pPr>
+            <a:r>
+              <a:rPr sz="1200" b="1">
+                <a:solidFill>
+                  <a:srgbClr val="0F172A"/>
+                </a:solidFill>
+                <a:latin typeface="Microsoft YaHei"/>
+              </a:rPr>
+              <a:t>Leakage audit</a:t>
+            </a:r>
+          </a:p>
+        </p:txBody>
+      </p:sp>
+      <p:sp>
+        <p:nvSpPr>
+          <p:cNvPr id="28" name="Rectangle 27"/>
+          <p:cNvSpPr/>
+          <p:nvPr/>
+        </p:nvSpPr>
+        <p:spPr>
+          <a:xfrm>
+            <a:off x="4736592" y="3438144"/>
+            <a:ext cx="6035040" cy="420624"/>
+          </a:xfrm>
+          <a:prstGeom prst="rect">
+            <a:avLst/>
+          </a:prstGeom>
+          <a:solidFill>
+            <a:srgbClr val="F8FAFC"/>
+          </a:solidFill>
+          <a:ln w="9525">
+            <a:solidFill>
+              <a:srgbClr val="CBD5E1"/>
+            </a:solidFill>
+          </a:ln>
+        </p:spPr>
+        <p:style>
+          <a:lnRef idx="1">
+            <a:schemeClr val="accent1"/>
+          </a:lnRef>
+          <a:fillRef idx="3">
+            <a:schemeClr val="accent1"/>
+          </a:fillRef>
+          <a:effectRef idx="2">
+            <a:schemeClr val="accent1"/>
+          </a:effectRef>
+          <a:fontRef idx="minor">
+            <a:schemeClr val="lt1"/>
+          </a:fontRef>
+        </p:style>
+        <p:txBody>
+          <a:bodyPr rtlCol="0" anchor="ctr"/>
+          <a:lstStyle/>
+          <a:p>
+            <a:pPr algn="ctr"/>
+          </a:p>
+        </p:txBody>
+      </p:sp>
+      <p:sp>
+        <p:nvSpPr>
+          <p:cNvPr id="29" name="TextBox 28"/>
+          <p:cNvSpPr txBox="1"/>
+          <p:nvPr/>
+        </p:nvSpPr>
+        <p:spPr>
+          <a:xfrm>
+            <a:off x="4791456" y="3502151"/>
+            <a:ext cx="5925312" cy="292608"/>
+          </a:xfrm>
+          <a:prstGeom prst="rect">
+            <a:avLst/>
+          </a:prstGeom>
+          <a:noFill/>
+        </p:spPr>
+        <p:txBody>
+          <a:bodyPr wrap="square" lIns="27432" rIns="27432" tIns="9144" bIns="9144" anchor="t">
+            <a:spAutoFit/>
+          </a:bodyPr>
+          <a:lstStyle/>
+          <a:p>
+            <a:pPr algn="l">
+              <a:defRPr sz="1200" b="0">
+                <a:solidFill>
+                  <a:srgbClr val="0F172A"/>
+                </a:solidFill>
+                <a:latin typeface="Microsoft YaHei"/>
+              </a:defRPr>
+            </a:pPr>
+            <a:r>
+              <a:rPr sz="1200" b="0">
+                <a:solidFill>
+                  <a:srgbClr val="0F172A"/>
+                </a:solidFill>
+                <a:latin typeface="Microsoft YaHei"/>
+              </a:rPr>
+              <a:t>LLM-facing files pass forbidden-column scan</a:t>
+            </a:r>
+          </a:p>
+        </p:txBody>
+      </p:sp>
+      <p:sp>
+        <p:nvSpPr>
+          <p:cNvPr id="30" name="Rectangle 29"/>
+          <p:cNvSpPr/>
+          <p:nvPr/>
+        </p:nvSpPr>
+        <p:spPr>
+          <a:xfrm>
+            <a:off x="713232" y="3858768"/>
+            <a:ext cx="4023360" cy="420624"/>
+          </a:xfrm>
+          <a:prstGeom prst="rect">
+            <a:avLst/>
+          </a:prstGeom>
+          <a:solidFill>
+            <a:srgbClr val="F1F5F9"/>
+          </a:solidFill>
+          <a:ln w="9525">
+            <a:solidFill>
+              <a:srgbClr val="CBD5E1"/>
+            </a:solidFill>
+          </a:ln>
+        </p:spPr>
+        <p:style>
+          <a:lnRef idx="1">
+            <a:schemeClr val="accent1"/>
+          </a:lnRef>
+          <a:fillRef idx="3">
+            <a:schemeClr val="accent1"/>
+          </a:fillRef>
+          <a:effectRef idx="2">
+            <a:schemeClr val="accent1"/>
+          </a:effectRef>
+          <a:fontRef idx="minor">
+            <a:schemeClr val="lt1"/>
+          </a:fontRef>
+        </p:style>
+        <p:txBody>
+          <a:bodyPr rtlCol="0" anchor="ctr"/>
+          <a:lstStyle/>
+          <a:p>
+            <a:pPr algn="ctr"/>
+          </a:p>
+        </p:txBody>
+      </p:sp>
+      <p:sp>
+        <p:nvSpPr>
+          <p:cNvPr id="31" name="TextBox 30"/>
+          <p:cNvSpPr txBox="1"/>
+          <p:nvPr/>
+        </p:nvSpPr>
+        <p:spPr>
+          <a:xfrm>
+            <a:off x="768096" y="3922776"/>
+            <a:ext cx="3913632" cy="292608"/>
+          </a:xfrm>
+          <a:prstGeom prst="rect">
+            <a:avLst/>
+          </a:prstGeom>
+          <a:noFill/>
+        </p:spPr>
+        <p:txBody>
+          <a:bodyPr wrap="square" lIns="27432" rIns="27432" tIns="9144" bIns="9144" anchor="t">
+            <a:spAutoFit/>
+          </a:bodyPr>
+          <a:lstStyle/>
+          <a:p>
+            <a:pPr algn="l">
+              <a:defRPr sz="1200" b="1">
+                <a:solidFill>
+                  <a:srgbClr val="0F172A"/>
+                </a:solidFill>
+                <a:latin typeface="Microsoft YaHei"/>
+              </a:defRPr>
+            </a:pPr>
+            <a:r>
+              <a:rPr sz="1200" b="1">
+                <a:solidFill>
+                  <a:srgbClr val="0F172A"/>
+                </a:solidFill>
+                <a:latin typeface="Microsoft YaHei"/>
+              </a:rPr>
+              <a:t>Prospective context</a:t>
+            </a:r>
+          </a:p>
+        </p:txBody>
+      </p:sp>
+      <p:sp>
+        <p:nvSpPr>
+          <p:cNvPr id="32" name="Rectangle 31"/>
+          <p:cNvSpPr/>
+          <p:nvPr/>
+        </p:nvSpPr>
+        <p:spPr>
+          <a:xfrm>
+            <a:off x="4736592" y="3858768"/>
+            <a:ext cx="6035040" cy="420624"/>
+          </a:xfrm>
+          <a:prstGeom prst="rect">
+            <a:avLst/>
+          </a:prstGeom>
+          <a:solidFill>
+            <a:srgbClr val="F1F5F9"/>
+          </a:solidFill>
+          <a:ln w="9525">
+            <a:solidFill>
+              <a:srgbClr val="CBD5E1"/>
+            </a:solidFill>
+          </a:ln>
+        </p:spPr>
+        <p:style>
+          <a:lnRef idx="1">
+            <a:schemeClr val="accent1"/>
+          </a:lnRef>
+          <a:fillRef idx="3">
+            <a:schemeClr val="accent1"/>
+          </a:fillRef>
+          <a:effectRef idx="2">
+            <a:schemeClr val="accent1"/>
+          </a:effectRef>
+          <a:fontRef idx="minor">
+            <a:schemeClr val="lt1"/>
+          </a:fontRef>
+        </p:style>
+        <p:txBody>
+          <a:bodyPr rtlCol="0" anchor="ctr"/>
+          <a:lstStyle/>
+          <a:p>
+            <a:pPr algn="ctr"/>
+          </a:p>
+        </p:txBody>
+      </p:sp>
+      <p:sp>
+        <p:nvSpPr>
+          <p:cNvPr id="33" name="TextBox 32"/>
+          <p:cNvSpPr txBox="1"/>
+          <p:nvPr/>
+        </p:nvSpPr>
+        <p:spPr>
+          <a:xfrm>
+            <a:off x="4791456" y="3922776"/>
+            <a:ext cx="5925312" cy="292608"/>
+          </a:xfrm>
+          <a:prstGeom prst="rect">
+            <a:avLst/>
+          </a:prstGeom>
+          <a:noFill/>
+        </p:spPr>
+        <p:txBody>
+          <a:bodyPr wrap="square" lIns="27432" rIns="27432" tIns="9144" bIns="9144" anchor="t">
+            <a:spAutoFit/>
+          </a:bodyPr>
+          <a:lstStyle/>
+          <a:p>
+            <a:pPr algn="l">
+              <a:defRPr sz="1200" b="0">
+                <a:solidFill>
+                  <a:srgbClr val="0F172A"/>
+                </a:solidFill>
+                <a:latin typeface="Microsoft YaHei"/>
+              </a:defRPr>
+            </a:pPr>
+            <a:r>
+              <a:rPr sz="1200" b="0">
+                <a:solidFill>
+                  <a:srgbClr val="0F172A"/>
+                </a:solidFill>
+                <a:latin typeface="Microsoft YaHei"/>
+              </a:rPr>
+              <a:t>prospective_event_context_2022 documents event assumptions</a:t>
+            </a:r>
+          </a:p>
+        </p:txBody>
+      </p:sp>
+      <p:sp>
+        <p:nvSpPr>
+          <p:cNvPr id="34" name="Rounded Rectangle 33"/>
+          <p:cNvSpPr/>
+          <p:nvPr/>
+        </p:nvSpPr>
+        <p:spPr>
+          <a:xfrm>
+            <a:off x="749808" y="5074920"/>
+            <a:ext cx="10012680" cy="1005840"/>
+          </a:xfrm>
+          <a:prstGeom prst="roundRect">
+            <a:avLst/>
+          </a:prstGeom>
+          <a:solidFill>
+            <a:srgbClr val="F1F5F9"/>
+          </a:solidFill>
+          <a:ln w="9525">
+            <a:solidFill>
+              <a:srgbClr val="CBD5E1"/>
+            </a:solidFill>
+          </a:ln>
+        </p:spPr>
+        <p:style>
+          <a:lnRef idx="1">
+            <a:schemeClr val="accent1"/>
+          </a:lnRef>
+          <a:fillRef idx="3">
+            <a:schemeClr val="accent1"/>
+          </a:fillRef>
+          <a:effectRef idx="2">
+            <a:schemeClr val="accent1"/>
+          </a:effectRef>
+          <a:fontRef idx="minor">
+            <a:schemeClr val="lt1"/>
+          </a:fontRef>
+        </p:style>
+        <p:txBody>
+          <a:bodyPr rtlCol="0" anchor="ctr"/>
+          <a:lstStyle/>
+          <a:p>
+            <a:pPr algn="ctr"/>
+          </a:p>
+        </p:txBody>
+      </p:sp>
+      <p:sp>
+        <p:nvSpPr>
+          <p:cNvPr id="35" name="Rectangle 34"/>
+          <p:cNvSpPr/>
+          <p:nvPr/>
+        </p:nvSpPr>
+        <p:spPr>
+          <a:xfrm>
+            <a:off x="749808" y="5074920"/>
+            <a:ext cx="50292" cy="1005840"/>
+          </a:xfrm>
+          <a:prstGeom prst="rect">
+            <a:avLst/>
+          </a:prstGeom>
+          <a:solidFill>
+            <a:srgbClr val="2563EB"/>
+          </a:solidFill>
+          <a:ln>
+            <a:noFill/>
+          </a:ln>
+        </p:spPr>
+        <p:style>
+          <a:lnRef idx="1">
+            <a:schemeClr val="accent1"/>
+          </a:lnRef>
+          <a:fillRef idx="3">
+            <a:schemeClr val="accent1"/>
+          </a:fillRef>
+          <a:effectRef idx="2">
+            <a:schemeClr val="accent1"/>
+          </a:effectRef>
+          <a:fontRef idx="minor">
+            <a:schemeClr val="lt1"/>
+          </a:fontRef>
+        </p:style>
+        <p:txBody>
+          <a:bodyPr rtlCol="0" anchor="ctr"/>
+          <a:lstStyle/>
+          <a:p>
+            <a:pPr algn="ctr"/>
+          </a:p>
+        </p:txBody>
+      </p:sp>
+      <p:sp>
+        <p:nvSpPr>
+          <p:cNvPr id="36" name="TextBox 35"/>
+          <p:cNvSpPr txBox="1"/>
+          <p:nvPr/>
+        </p:nvSpPr>
+        <p:spPr>
+          <a:xfrm>
+            <a:off x="914400" y="5166359"/>
+            <a:ext cx="9720072" cy="362102"/>
+          </a:xfrm>
+          <a:prstGeom prst="rect">
+            <a:avLst/>
+          </a:prstGeom>
+          <a:noFill/>
+        </p:spPr>
+        <p:txBody>
+          <a:bodyPr wrap="square" lIns="27432" rIns="27432" tIns="9144" bIns="9144" anchor="t">
+            <a:spAutoFit/>
+          </a:bodyPr>
+          <a:lstStyle/>
+          <a:p>
+            <a:pPr algn="l">
+              <a:defRPr sz="1200" b="1">
+                <a:solidFill>
+                  <a:srgbClr val="0F172A"/>
+                </a:solidFill>
+                <a:latin typeface="Microsoft YaHei"/>
+              </a:defRPr>
+            </a:pPr>
+            <a:r>
+              <a:rPr sz="1200" b="1">
+                <a:solidFill>
+                  <a:srgbClr val="0F172A"/>
+                </a:solidFill>
+                <a:latin typeface="Microsoft YaHei"/>
+              </a:rPr>
+              <a:t>答法：LLM 输入是 cohort-level household profile 和泛化疫情事件语境，不含目标值、权重和 household ID。我们用 leakage audit、zero-shot baseline、placebo 和 fixed adapter 共同约束 no-label claim。</a:t>
+            </a:r>
+          </a:p>
+        </p:txBody>
+      </p:sp>
+      <p:sp>
+        <p:nvSpPr>
+          <p:cNvPr id="37" name="TextBox 36"/>
+          <p:cNvSpPr txBox="1"/>
+          <p:nvPr/>
+        </p:nvSpPr>
+        <p:spPr>
+          <a:xfrm>
+            <a:off x="914400" y="5592470"/>
+            <a:ext cx="9720072" cy="415137"/>
+          </a:xfrm>
+          <a:prstGeom prst="rect">
+            <a:avLst/>
+          </a:prstGeom>
+          <a:noFill/>
+        </p:spPr>
+        <p:txBody>
+          <a:bodyPr wrap="square" lIns="27432" rIns="27432" tIns="9144" bIns="9144" anchor="t">
+            <a:spAutoFit/>
+          </a:bodyPr>
+          <a:lstStyle/>
+          <a:p>
+            <a:pPr algn="l">
+              <a:defRPr sz="1200" b="0">
+                <a:solidFill>
+                  <a:srgbClr val="64748B"/>
+                </a:solidFill>
+                <a:latin typeface="Microsoft YaHei"/>
+              </a:defRPr>
+            </a:pPr>
+          </a:p>
+        </p:txBody>
+      </p:sp>
+    </p:spTree>
+  </p:cSld>
+  <p:clrMapOvr>
+    <a:masterClrMapping/>
+  </p:clrMapOvr>
+</p:sld>
+</file>
+
+<file path=ppt/slides/slide26.xml><?xml version="1.0" encoding="utf-8"?>
+<p:sld xmlns:a="http://schemas.openxmlformats.org/drawingml/2006/main" xmlns:p="http://schemas.openxmlformats.org/presentationml/2006/main" xmlns:r="http://schemas.openxmlformats.org/officeDocument/2006/relationships">
+  <p:cSld>
+    <p:bg>
+      <p:bgPr>
+        <a:solidFill>
+          <a:srgbClr val="FFFFFF"/>
+        </a:solidFill>
+        <a:effectLst/>
+      </p:bgPr>
+    </p:bg>
+    <p:spTree>
+      <p:nvGrpSpPr>
+        <p:cNvPr id="1" name=""/>
+        <p:cNvGrpSpPr/>
+        <p:nvPr/>
+      </p:nvGrpSpPr>
+      <p:grpSpPr/>
+      <p:sp>
+        <p:nvSpPr>
+          <p:cNvPr id="2" name="TextBox 1"/>
+          <p:cNvSpPr txBox="1"/>
+          <p:nvPr/>
+        </p:nvSpPr>
+        <p:spPr>
+          <a:xfrm>
+            <a:off x="384048" y="109728"/>
+            <a:ext cx="4480560" cy="164592"/>
+          </a:xfrm>
+          <a:prstGeom prst="rect">
+            <a:avLst/>
+          </a:prstGeom>
+          <a:noFill/>
+        </p:spPr>
+        <p:txBody>
+          <a:bodyPr wrap="square" lIns="27432" rIns="27432" tIns="9144" bIns="9144" anchor="ctr">
+            <a:spAutoFit/>
+          </a:bodyPr>
+          <a:lstStyle/>
+          <a:p>
+            <a:pPr algn="l">
+              <a:defRPr sz="750" b="1">
+                <a:solidFill>
+                  <a:srgbClr val="64748B"/>
+                </a:solidFill>
+                <a:latin typeface="Microsoft YaHei"/>
+              </a:defRPr>
+            </a:pPr>
+            <a:r>
+              <a:rPr sz="750" b="1">
+                <a:solidFill>
+                  <a:srgbClr val="64748B"/>
+                </a:solidFill>
+                <a:latin typeface="Microsoft YaHei"/>
+              </a:rPr>
+              <a:t>Mobility Inequality and Sustainable Development</a:t>
+            </a:r>
+          </a:p>
+        </p:txBody>
+      </p:sp>
+      <p:sp>
+        <p:nvSpPr>
+          <p:cNvPr id="3" name="TextBox 2"/>
+          <p:cNvSpPr txBox="1"/>
+          <p:nvPr/>
+        </p:nvSpPr>
+        <p:spPr>
+          <a:xfrm>
+            <a:off x="384048" y="347472"/>
+            <a:ext cx="777240" cy="292608"/>
+          </a:xfrm>
+          <a:prstGeom prst="rect">
+            <a:avLst/>
+          </a:prstGeom>
+          <a:noFill/>
+        </p:spPr>
+        <p:txBody>
+          <a:bodyPr wrap="square" lIns="27432" rIns="27432" tIns="9144" bIns="9144" anchor="ctr">
+            <a:spAutoFit/>
+          </a:bodyPr>
+          <a:lstStyle/>
+          <a:p>
+            <a:pPr algn="l">
+              <a:defRPr sz="1300" b="1">
+                <a:solidFill>
+                  <a:srgbClr val="EA580C"/>
+                </a:solidFill>
+                <a:latin typeface="Microsoft YaHei"/>
+              </a:defRPr>
+            </a:pPr>
+            <a:r>
+              <a:rPr sz="1300" b="1">
+                <a:solidFill>
+                  <a:srgbClr val="EA580C"/>
+                </a:solidFill>
+                <a:latin typeface="Microsoft YaHei"/>
+              </a:rPr>
+              <a:t>BACKUP</a:t>
+            </a:r>
+          </a:p>
+        </p:txBody>
+      </p:sp>
+      <p:sp>
+        <p:nvSpPr>
+          <p:cNvPr id="4" name="TextBox 3"/>
+          <p:cNvSpPr txBox="1"/>
+          <p:nvPr/>
+        </p:nvSpPr>
+        <p:spPr>
+          <a:xfrm>
+            <a:off x="1234440" y="246888"/>
+            <a:ext cx="8412480" cy="329184"/>
+          </a:xfrm>
+          <a:prstGeom prst="rect">
+            <a:avLst/>
+          </a:prstGeom>
+          <a:noFill/>
+        </p:spPr>
+        <p:txBody>
+          <a:bodyPr wrap="square" lIns="27432" rIns="27432" tIns="9144" bIns="9144" anchor="ctr">
+            <a:spAutoFit/>
+          </a:bodyPr>
+          <a:lstStyle/>
+          <a:p>
+            <a:pPr algn="l">
+              <a:defRPr sz="1700" b="1">
+                <a:solidFill>
+                  <a:srgbClr val="0F172A"/>
+                </a:solidFill>
+                <a:latin typeface="Microsoft YaHei"/>
+              </a:defRPr>
+            </a:pPr>
+            <a:r>
+              <a:rPr sz="1700" b="1">
+                <a:solidFill>
+                  <a:srgbClr val="0F172A"/>
+                </a:solidFill>
+                <a:latin typeface="Microsoft YaHei"/>
+              </a:rPr>
+              <a:t>Global event prior 已经很强，LLM 还贡献什么？</a:t>
+            </a:r>
+          </a:p>
+        </p:txBody>
+      </p:sp>
+      <p:sp>
+        <p:nvSpPr>
+          <p:cNvPr id="5" name="TextBox 4"/>
+          <p:cNvSpPr txBox="1"/>
+          <p:nvPr/>
+        </p:nvSpPr>
+        <p:spPr>
+          <a:xfrm>
+            <a:off x="1252728" y="585216"/>
+            <a:ext cx="8869680" cy="228600"/>
+          </a:xfrm>
+          <a:prstGeom prst="rect">
+            <a:avLst/>
+          </a:prstGeom>
+          <a:noFill/>
+        </p:spPr>
+        <p:txBody>
+          <a:bodyPr wrap="square" lIns="27432" rIns="27432" tIns="9144" bIns="9144" anchor="ctr">
+            <a:spAutoFit/>
+          </a:bodyPr>
+          <a:lstStyle/>
+          <a:p>
+            <a:pPr algn="l">
+              <a:defRPr sz="850" b="0">
+                <a:solidFill>
+                  <a:srgbClr val="64748B"/>
+                </a:solidFill>
+                <a:latin typeface="Microsoft YaHei"/>
+              </a:defRPr>
+            </a:pPr>
+            <a:r>
+              <a:rPr sz="850" b="0">
+                <a:solidFill>
+                  <a:srgbClr val="64748B"/>
+                </a:solidFill>
+                <a:latin typeface="Microsoft YaHei"/>
+              </a:rPr>
+              <a:t>If the global prior is strong, what does the LLM add?</a:t>
+            </a:r>
+          </a:p>
+        </p:txBody>
+      </p:sp>
+      <p:pic>
+        <p:nvPicPr>
+          <p:cNvPr id="6" name="Picture 5" descr="image.png"/>
+          <p:cNvPicPr>
+            <a:picLocks noChangeAspect="1"/>
+          </p:cNvPicPr>
+          <p:nvPr/>
+        </p:nvPicPr>
+        <p:blipFill>
+          <a:blip r:embed="rId2"/>
+          <a:stretch>
+            <a:fillRect/>
+          </a:stretch>
+        </p:blipFill>
+        <p:spPr>
+          <a:xfrm>
+            <a:off x="11018520" y="201168"/>
+            <a:ext cx="713232" cy="502730"/>
+          </a:xfrm>
+          <a:prstGeom prst="rect">
+            <a:avLst/>
+          </a:prstGeom>
+        </p:spPr>
+      </p:pic>
+      <p:sp>
+        <p:nvSpPr>
+          <p:cNvPr id="7" name="Rectangle 6"/>
+          <p:cNvSpPr/>
+          <p:nvPr/>
+        </p:nvSpPr>
+        <p:spPr>
+          <a:xfrm>
+            <a:off x="384048" y="877824"/>
+            <a:ext cx="11201400" cy="10972"/>
+          </a:xfrm>
+          <a:prstGeom prst="rect">
+            <a:avLst/>
+          </a:prstGeom>
+          <a:solidFill>
+            <a:srgbClr val="CBD5E1"/>
+          </a:solidFill>
+          <a:ln>
+            <a:noFill/>
+          </a:ln>
+        </p:spPr>
+        <p:style>
+          <a:lnRef idx="1">
+            <a:schemeClr val="accent1"/>
+          </a:lnRef>
+          <a:fillRef idx="3">
+            <a:schemeClr val="accent1"/>
+          </a:fillRef>
+          <a:effectRef idx="2">
+            <a:schemeClr val="accent1"/>
+          </a:effectRef>
+          <a:fontRef idx="minor">
+            <a:schemeClr val="lt1"/>
+          </a:fontRef>
+        </p:style>
+        <p:txBody>
+          <a:bodyPr rtlCol="0" anchor="ctr"/>
+          <a:lstStyle/>
+          <a:p>
+            <a:pPr algn="ctr"/>
+          </a:p>
+        </p:txBody>
+      </p:sp>
+      <p:sp>
+        <p:nvSpPr>
+          <p:cNvPr id="8" name="Rectangle 7"/>
+          <p:cNvSpPr/>
+          <p:nvPr/>
+        </p:nvSpPr>
+        <p:spPr>
+          <a:xfrm>
+            <a:off x="384048" y="6428232"/>
+            <a:ext cx="11201400" cy="10972"/>
+          </a:xfrm>
+          <a:prstGeom prst="rect">
+            <a:avLst/>
+          </a:prstGeom>
+          <a:solidFill>
+            <a:srgbClr val="CBD5E1"/>
+          </a:solidFill>
+          <a:ln>
+            <a:noFill/>
+          </a:ln>
+        </p:spPr>
+        <p:style>
+          <a:lnRef idx="1">
+            <a:schemeClr val="accent1"/>
+          </a:lnRef>
+          <a:fillRef idx="3">
+            <a:schemeClr val="accent1"/>
+          </a:fillRef>
+          <a:effectRef idx="2">
+            <a:schemeClr val="accent1"/>
+          </a:effectRef>
+          <a:fontRef idx="minor">
+            <a:schemeClr val="lt1"/>
+          </a:fontRef>
+        </p:style>
+        <p:txBody>
+          <a:bodyPr rtlCol="0" anchor="ctr"/>
+          <a:lstStyle/>
+          <a:p>
+            <a:pPr algn="ctr"/>
+          </a:p>
+        </p:txBody>
+      </p:sp>
+      <p:sp>
+        <p:nvSpPr>
+          <p:cNvPr id="9" name="TextBox 8"/>
+          <p:cNvSpPr txBox="1"/>
+          <p:nvPr/>
+        </p:nvSpPr>
+        <p:spPr>
+          <a:xfrm>
+            <a:off x="384048" y="6473952"/>
+            <a:ext cx="5212080" cy="164592"/>
+          </a:xfrm>
+          <a:prstGeom prst="rect">
+            <a:avLst/>
+          </a:prstGeom>
+          <a:noFill/>
+        </p:spPr>
+        <p:txBody>
+          <a:bodyPr wrap="square" lIns="27432" rIns="27432" tIns="9144" bIns="9144" anchor="ctr">
+            <a:spAutoFit/>
+          </a:bodyPr>
+          <a:lstStyle/>
+          <a:p>
+            <a:pPr algn="l">
+              <a:defRPr sz="750" b="0">
+                <a:solidFill>
+                  <a:srgbClr val="64748B"/>
+                </a:solidFill>
+                <a:latin typeface="Microsoft YaHei"/>
+              </a:defRPr>
+            </a:pPr>
+            <a:r>
+              <a:rPr sz="750" b="0">
+                <a:solidFill>
+                  <a:srgbClr val="64748B"/>
+                </a:solidFill>
+                <a:latin typeface="Microsoft YaHei"/>
+              </a:rPr>
+              <a:t>Appendix: reviewer and instructor Q&amp;A</a:t>
+            </a:r>
+          </a:p>
+        </p:txBody>
+      </p:sp>
+      <p:sp>
+        <p:nvSpPr>
+          <p:cNvPr id="10" name="TextBox 9"/>
+          <p:cNvSpPr txBox="1"/>
+          <p:nvPr/>
+        </p:nvSpPr>
+        <p:spPr>
+          <a:xfrm>
+            <a:off x="10149840" y="6473952"/>
+            <a:ext cx="1417320" cy="164592"/>
+          </a:xfrm>
+          <a:prstGeom prst="rect">
+            <a:avLst/>
+          </a:prstGeom>
+          <a:noFill/>
+        </p:spPr>
+        <p:txBody>
+          <a:bodyPr wrap="square" lIns="27432" rIns="27432" tIns="9144" bIns="9144" anchor="ctr">
+            <a:spAutoFit/>
+          </a:bodyPr>
+          <a:lstStyle/>
+          <a:p>
+            <a:pPr algn="r">
+              <a:defRPr sz="750" b="1">
+                <a:solidFill>
+                  <a:srgbClr val="64748B"/>
+                </a:solidFill>
+                <a:latin typeface="Microsoft YaHei"/>
+              </a:defRPr>
+            </a:pPr>
+            <a:r>
+              <a:rPr sz="750" b="1">
+                <a:solidFill>
+                  <a:srgbClr val="64748B"/>
+                </a:solidFill>
+                <a:latin typeface="Microsoft YaHei"/>
+              </a:rPr>
+              <a:t>B3</a:t>
+            </a:r>
+          </a:p>
+        </p:txBody>
+      </p:sp>
+      <p:sp>
+        <p:nvSpPr>
+          <p:cNvPr id="11" name="Rounded Rectangle 10"/>
+          <p:cNvSpPr/>
+          <p:nvPr/>
+        </p:nvSpPr>
+        <p:spPr>
+          <a:xfrm>
+            <a:off x="658368" y="1115568"/>
+            <a:ext cx="10287000" cy="749808"/>
+          </a:xfrm>
+          <a:prstGeom prst="roundRect">
+            <a:avLst/>
+          </a:prstGeom>
+          <a:solidFill>
+            <a:srgbClr val="F1F5F9"/>
+          </a:solidFill>
+          <a:ln w="9525">
+            <a:solidFill>
+              <a:srgbClr val="CBD5E1"/>
+            </a:solidFill>
+          </a:ln>
+        </p:spPr>
+        <p:style>
+          <a:lnRef idx="1">
+            <a:schemeClr val="accent1"/>
+          </a:lnRef>
+          <a:fillRef idx="3">
+            <a:schemeClr val="accent1"/>
+          </a:fillRef>
+          <a:effectRef idx="2">
+            <a:schemeClr val="accent1"/>
+          </a:effectRef>
+          <a:fontRef idx="minor">
+            <a:schemeClr val="lt1"/>
+          </a:fontRef>
+        </p:style>
+        <p:txBody>
+          <a:bodyPr rtlCol="0" anchor="ctr"/>
+          <a:lstStyle/>
+          <a:p>
+            <a:pPr algn="ctr"/>
+          </a:p>
+        </p:txBody>
+      </p:sp>
+      <p:sp>
+        <p:nvSpPr>
+          <p:cNvPr id="12" name="TextBox 11"/>
+          <p:cNvSpPr txBox="1"/>
+          <p:nvPr/>
+        </p:nvSpPr>
+        <p:spPr>
+          <a:xfrm>
+            <a:off x="868680" y="1298448"/>
+            <a:ext cx="1463040" cy="182880"/>
+          </a:xfrm>
+          <a:prstGeom prst="rect">
+            <a:avLst/>
+          </a:prstGeom>
+          <a:noFill/>
+        </p:spPr>
+        <p:txBody>
+          <a:bodyPr wrap="square" lIns="27432" rIns="27432" tIns="9144" bIns="9144" anchor="ctr">
+            <a:spAutoFit/>
+          </a:bodyPr>
+          <a:lstStyle/>
+          <a:p>
+            <a:pPr algn="l">
+              <a:defRPr sz="1000" b="1">
+                <a:solidFill>
+                  <a:srgbClr val="EA580C"/>
+                </a:solidFill>
+                <a:latin typeface="Microsoft YaHei"/>
+              </a:defRPr>
+            </a:pPr>
+            <a:r>
+              <a:rPr sz="1000" b="1">
+                <a:solidFill>
+                  <a:srgbClr val="EA580C"/>
+                </a:solidFill>
+                <a:latin typeface="Microsoft YaHei"/>
+              </a:rPr>
+              <a:t>Short answer</a:t>
+            </a:r>
+          </a:p>
+        </p:txBody>
+      </p:sp>
+      <p:sp>
+        <p:nvSpPr>
+          <p:cNvPr id="13" name="TextBox 12"/>
+          <p:cNvSpPr txBox="1"/>
+          <p:nvPr/>
+        </p:nvSpPr>
+        <p:spPr>
+          <a:xfrm>
+            <a:off x="2240280" y="1216152"/>
+            <a:ext cx="8366760" cy="329184"/>
+          </a:xfrm>
+          <a:prstGeom prst="rect">
+            <a:avLst/>
+          </a:prstGeom>
+          <a:noFill/>
+        </p:spPr>
+        <p:txBody>
+          <a:bodyPr wrap="square" lIns="27432" rIns="27432" tIns="9144" bIns="9144" anchor="ctr">
+            <a:spAutoFit/>
+          </a:bodyPr>
+          <a:lstStyle/>
+          <a:p>
+            <a:pPr algn="l">
+              <a:defRPr sz="1300" b="1">
+                <a:solidFill>
+                  <a:srgbClr val="0F172A"/>
+                </a:solidFill>
+                <a:latin typeface="Microsoft YaHei"/>
+              </a:defRPr>
+            </a:pPr>
+            <a:r>
+              <a:rPr sz="1300" b="1">
+                <a:solidFill>
+                  <a:srgbClr val="0F172A"/>
+                </a:solidFill>
+                <a:latin typeface="Microsoft YaHei"/>
+              </a:rPr>
+              <a:t>主贡献应表述为 event-level correction；cohort ranking 是增量 refinement。</a:t>
+            </a:r>
+          </a:p>
+        </p:txBody>
+      </p:sp>
+      <p:sp>
+        <p:nvSpPr>
+          <p:cNvPr id="14" name="Rectangle 13"/>
+          <p:cNvSpPr/>
+          <p:nvPr/>
+        </p:nvSpPr>
+        <p:spPr>
+          <a:xfrm>
+            <a:off x="713232" y="2176272"/>
+            <a:ext cx="4023360" cy="420624"/>
+          </a:xfrm>
+          <a:prstGeom prst="rect">
+            <a:avLst/>
+          </a:prstGeom>
+          <a:solidFill>
+            <a:srgbClr val="00796B"/>
+          </a:solidFill>
+          <a:ln>
+            <a:noFill/>
+          </a:ln>
+        </p:spPr>
+        <p:style>
+          <a:lnRef idx="1">
+            <a:schemeClr val="accent1"/>
+          </a:lnRef>
+          <a:fillRef idx="3">
+            <a:schemeClr val="accent1"/>
+          </a:fillRef>
+          <a:effectRef idx="2">
+            <a:schemeClr val="accent1"/>
+          </a:effectRef>
+          <a:fontRef idx="minor">
+            <a:schemeClr val="lt1"/>
+          </a:fontRef>
+        </p:style>
+        <p:txBody>
+          <a:bodyPr rtlCol="0" anchor="ctr"/>
+          <a:lstStyle/>
+          <a:p>
+            <a:pPr algn="ctr"/>
+          </a:p>
+        </p:txBody>
+      </p:sp>
+      <p:sp>
+        <p:nvSpPr>
+          <p:cNvPr id="15" name="TextBox 14"/>
+          <p:cNvSpPr txBox="1"/>
+          <p:nvPr/>
+        </p:nvSpPr>
+        <p:spPr>
+          <a:xfrm>
+            <a:off x="749808" y="2249424"/>
+            <a:ext cx="3950208" cy="292608"/>
+          </a:xfrm>
+          <a:prstGeom prst="rect">
+            <a:avLst/>
+          </a:prstGeom>
+          <a:noFill/>
+        </p:spPr>
+        <p:txBody>
+          <a:bodyPr wrap="square" lIns="27432" rIns="27432" tIns="9144" bIns="9144" anchor="ctr">
+            <a:spAutoFit/>
+          </a:bodyPr>
+          <a:lstStyle/>
+          <a:p>
+            <a:pPr algn="ctr">
+              <a:defRPr sz="1200" b="1">
+                <a:solidFill>
+                  <a:srgbClr val="FFFFFF"/>
+                </a:solidFill>
+                <a:latin typeface="Microsoft YaHei"/>
+              </a:defRPr>
+            </a:pPr>
+            <a:r>
+              <a:rPr sz="1200" b="1">
+                <a:solidFill>
+                  <a:srgbClr val="FFFFFF"/>
+                </a:solidFill>
+                <a:latin typeface="Microsoft YaHei"/>
+              </a:rPr>
+              <a:t>Evidence</a:t>
+            </a:r>
+          </a:p>
+        </p:txBody>
+      </p:sp>
+      <p:sp>
+        <p:nvSpPr>
+          <p:cNvPr id="16" name="Rectangle 15"/>
+          <p:cNvSpPr/>
+          <p:nvPr/>
+        </p:nvSpPr>
+        <p:spPr>
+          <a:xfrm>
+            <a:off x="4736592" y="2176272"/>
+            <a:ext cx="6035040" cy="420624"/>
+          </a:xfrm>
+          <a:prstGeom prst="rect">
+            <a:avLst/>
+          </a:prstGeom>
+          <a:solidFill>
+            <a:srgbClr val="00796B"/>
+          </a:solidFill>
+          <a:ln>
+            <a:noFill/>
+          </a:ln>
+        </p:spPr>
+        <p:style>
+          <a:lnRef idx="1">
+            <a:schemeClr val="accent1"/>
+          </a:lnRef>
+          <a:fillRef idx="3">
+            <a:schemeClr val="accent1"/>
+          </a:fillRef>
+          <a:effectRef idx="2">
+            <a:schemeClr val="accent1"/>
+          </a:effectRef>
+          <a:fontRef idx="minor">
+            <a:schemeClr val="lt1"/>
+          </a:fontRef>
+        </p:style>
+        <p:txBody>
+          <a:bodyPr rtlCol="0" anchor="ctr"/>
+          <a:lstStyle/>
+          <a:p>
+            <a:pPr algn="ctr"/>
+          </a:p>
+        </p:txBody>
+      </p:sp>
+      <p:sp>
+        <p:nvSpPr>
+          <p:cNvPr id="17" name="TextBox 16"/>
+          <p:cNvSpPr txBox="1"/>
+          <p:nvPr/>
+        </p:nvSpPr>
+        <p:spPr>
+          <a:xfrm>
+            <a:off x="4773168" y="2249424"/>
+            <a:ext cx="5961888" cy="292608"/>
+          </a:xfrm>
+          <a:prstGeom prst="rect">
+            <a:avLst/>
+          </a:prstGeom>
+          <a:noFill/>
+        </p:spPr>
+        <p:txBody>
+          <a:bodyPr wrap="square" lIns="27432" rIns="27432" tIns="9144" bIns="9144" anchor="ctr">
+            <a:spAutoFit/>
+          </a:bodyPr>
+          <a:lstStyle/>
+          <a:p>
+            <a:pPr algn="ctr">
+              <a:defRPr sz="1200" b="1">
+                <a:solidFill>
+                  <a:srgbClr val="FFFFFF"/>
+                </a:solidFill>
+                <a:latin typeface="Microsoft YaHei"/>
+              </a:defRPr>
+            </a:pPr>
+            <a:r>
+              <a:rPr sz="1200" b="1">
+                <a:solidFill>
+                  <a:srgbClr val="FFFFFF"/>
+                </a:solidFill>
+                <a:latin typeface="Microsoft YaHei"/>
+              </a:rPr>
+              <a:t>Value / implication</a:t>
+            </a:r>
+          </a:p>
+        </p:txBody>
+      </p:sp>
+      <p:sp>
+        <p:nvSpPr>
+          <p:cNvPr id="18" name="Rectangle 17"/>
+          <p:cNvSpPr/>
+          <p:nvPr/>
+        </p:nvSpPr>
+        <p:spPr>
+          <a:xfrm>
+            <a:off x="713232" y="2596896"/>
+            <a:ext cx="4023360" cy="420624"/>
+          </a:xfrm>
+          <a:prstGeom prst="rect">
+            <a:avLst/>
+          </a:prstGeom>
+          <a:solidFill>
+            <a:srgbClr val="F8FAFC"/>
+          </a:solidFill>
+          <a:ln w="9525">
+            <a:solidFill>
+              <a:srgbClr val="CBD5E1"/>
+            </a:solidFill>
+          </a:ln>
+        </p:spPr>
+        <p:style>
+          <a:lnRef idx="1">
+            <a:schemeClr val="accent1"/>
+          </a:lnRef>
+          <a:fillRef idx="3">
+            <a:schemeClr val="accent1"/>
+          </a:fillRef>
+          <a:effectRef idx="2">
+            <a:schemeClr val="accent1"/>
+          </a:effectRef>
+          <a:fontRef idx="minor">
+            <a:schemeClr val="lt1"/>
+          </a:fontRef>
+        </p:style>
+        <p:txBody>
+          <a:bodyPr rtlCol="0" anchor="ctr"/>
+          <a:lstStyle/>
+          <a:p>
+            <a:pPr algn="ctr"/>
+          </a:p>
+        </p:txBody>
+      </p:sp>
+      <p:sp>
+        <p:nvSpPr>
+          <p:cNvPr id="19" name="TextBox 18"/>
+          <p:cNvSpPr txBox="1"/>
+          <p:nvPr/>
+        </p:nvSpPr>
+        <p:spPr>
+          <a:xfrm>
+            <a:off x="768096" y="2660903"/>
+            <a:ext cx="3913632" cy="292608"/>
+          </a:xfrm>
+          <a:prstGeom prst="rect">
+            <a:avLst/>
+          </a:prstGeom>
+          <a:noFill/>
+        </p:spPr>
+        <p:txBody>
+          <a:bodyPr wrap="square" lIns="27432" rIns="27432" tIns="9144" bIns="9144" anchor="t">
+            <a:spAutoFit/>
+          </a:bodyPr>
+          <a:lstStyle/>
+          <a:p>
+            <a:pPr algn="l">
+              <a:defRPr sz="1200" b="1">
+                <a:solidFill>
+                  <a:srgbClr val="0F172A"/>
+                </a:solidFill>
+                <a:latin typeface="Microsoft YaHei"/>
+              </a:defRPr>
+            </a:pPr>
+            <a:r>
+              <a:rPr sz="1200" b="1">
+                <a:solidFill>
+                  <a:srgbClr val="0F172A"/>
+                </a:solidFill>
+                <a:latin typeface="Microsoft YaHei"/>
+              </a:rPr>
+              <a:t>Global event prior</a:t>
+            </a:r>
+          </a:p>
+        </p:txBody>
+      </p:sp>
+      <p:sp>
+        <p:nvSpPr>
+          <p:cNvPr id="20" name="Rectangle 19"/>
+          <p:cNvSpPr/>
+          <p:nvPr/>
+        </p:nvSpPr>
+        <p:spPr>
+          <a:xfrm>
+            <a:off x="4736592" y="2596896"/>
+            <a:ext cx="6035040" cy="420624"/>
+          </a:xfrm>
+          <a:prstGeom prst="rect">
+            <a:avLst/>
+          </a:prstGeom>
+          <a:solidFill>
+            <a:srgbClr val="F8FAFC"/>
+          </a:solidFill>
+          <a:ln w="9525">
+            <a:solidFill>
+              <a:srgbClr val="CBD5E1"/>
+            </a:solidFill>
+          </a:ln>
+        </p:spPr>
+        <p:style>
+          <a:lnRef idx="1">
+            <a:schemeClr val="accent1"/>
+          </a:lnRef>
+          <a:fillRef idx="3">
+            <a:schemeClr val="accent1"/>
+          </a:fillRef>
+          <a:effectRef idx="2">
+            <a:schemeClr val="accent1"/>
+          </a:effectRef>
+          <a:fontRef idx="minor">
+            <a:schemeClr val="lt1"/>
+          </a:fontRef>
+        </p:style>
+        <p:txBody>
+          <a:bodyPr rtlCol="0" anchor="ctr"/>
+          <a:lstStyle/>
+          <a:p>
+            <a:pPr algn="ctr"/>
+          </a:p>
+        </p:txBody>
+      </p:sp>
+      <p:sp>
+        <p:nvSpPr>
+          <p:cNvPr id="21" name="TextBox 20"/>
+          <p:cNvSpPr txBox="1"/>
+          <p:nvPr/>
+        </p:nvSpPr>
+        <p:spPr>
+          <a:xfrm>
+            <a:off x="4791456" y="2660903"/>
+            <a:ext cx="5925312" cy="292608"/>
+          </a:xfrm>
+          <a:prstGeom prst="rect">
+            <a:avLst/>
+          </a:prstGeom>
+          <a:noFill/>
+        </p:spPr>
+        <p:txBody>
+          <a:bodyPr wrap="square" lIns="27432" rIns="27432" tIns="9144" bIns="9144" anchor="t">
+            <a:spAutoFit/>
+          </a:bodyPr>
+          <a:lstStyle/>
+          <a:p>
+            <a:pPr algn="l">
+              <a:defRPr sz="1200" b="0">
+                <a:solidFill>
+                  <a:srgbClr val="0F172A"/>
+                </a:solidFill>
+                <a:latin typeface="Microsoft YaHei"/>
+              </a:defRPr>
+            </a:pPr>
+            <a:r>
+              <a:rPr sz="1200" b="0">
+                <a:solidFill>
+                  <a:srgbClr val="0F172A"/>
+                </a:solidFill>
+                <a:latin typeface="Microsoft YaHei"/>
+              </a:rPr>
+              <a:t>wMAE 2.5223; wBias -0.7477</a:t>
+            </a:r>
+          </a:p>
+        </p:txBody>
+      </p:sp>
+      <p:sp>
+        <p:nvSpPr>
+          <p:cNvPr id="22" name="Rectangle 21"/>
+          <p:cNvSpPr/>
+          <p:nvPr/>
+        </p:nvSpPr>
+        <p:spPr>
+          <a:xfrm>
+            <a:off x="713232" y="3017520"/>
+            <a:ext cx="4023360" cy="420624"/>
+          </a:xfrm>
+          <a:prstGeom prst="rect">
+            <a:avLst/>
+          </a:prstGeom>
+          <a:solidFill>
+            <a:srgbClr val="F1F5F9"/>
+          </a:solidFill>
+          <a:ln w="9525">
+            <a:solidFill>
+              <a:srgbClr val="CBD5E1"/>
+            </a:solidFill>
+          </a:ln>
+        </p:spPr>
+        <p:style>
+          <a:lnRef idx="1">
+            <a:schemeClr val="accent1"/>
+          </a:lnRef>
+          <a:fillRef idx="3">
+            <a:schemeClr val="accent1"/>
+          </a:fillRef>
+          <a:effectRef idx="2">
+            <a:schemeClr val="accent1"/>
+          </a:effectRef>
+          <a:fontRef idx="minor">
+            <a:schemeClr val="lt1"/>
+          </a:fontRef>
+        </p:style>
+        <p:txBody>
+          <a:bodyPr rtlCol="0" anchor="ctr"/>
+          <a:lstStyle/>
+          <a:p>
+            <a:pPr algn="ctr"/>
+          </a:p>
+        </p:txBody>
+      </p:sp>
+      <p:sp>
+        <p:nvSpPr>
+          <p:cNvPr id="23" name="TextBox 22"/>
+          <p:cNvSpPr txBox="1"/>
+          <p:nvPr/>
+        </p:nvSpPr>
+        <p:spPr>
+          <a:xfrm>
+            <a:off x="768096" y="3081527"/>
+            <a:ext cx="3913632" cy="292608"/>
+          </a:xfrm>
+          <a:prstGeom prst="rect">
+            <a:avLst/>
+          </a:prstGeom>
+          <a:noFill/>
+        </p:spPr>
+        <p:txBody>
+          <a:bodyPr wrap="square" lIns="27432" rIns="27432" tIns="9144" bIns="9144" anchor="t">
+            <a:spAutoFit/>
+          </a:bodyPr>
+          <a:lstStyle/>
+          <a:p>
+            <a:pPr algn="l">
+              <a:defRPr sz="1200" b="1">
+                <a:solidFill>
+                  <a:srgbClr val="0F172A"/>
+                </a:solidFill>
+                <a:latin typeface="Microsoft YaHei"/>
+              </a:defRPr>
+            </a:pPr>
+            <a:r>
+              <a:rPr sz="1200" b="1">
+                <a:solidFill>
+                  <a:srgbClr val="0F172A"/>
+                </a:solidFill>
+                <a:latin typeface="Microsoft YaHei"/>
+              </a:rPr>
+              <a:t>Primary gated adapter</a:t>
+            </a:r>
+          </a:p>
+        </p:txBody>
+      </p:sp>
+      <p:sp>
+        <p:nvSpPr>
+          <p:cNvPr id="24" name="Rectangle 23"/>
+          <p:cNvSpPr/>
+          <p:nvPr/>
+        </p:nvSpPr>
+        <p:spPr>
+          <a:xfrm>
+            <a:off x="4736592" y="3017520"/>
+            <a:ext cx="6035040" cy="420624"/>
+          </a:xfrm>
+          <a:prstGeom prst="rect">
+            <a:avLst/>
+          </a:prstGeom>
+          <a:solidFill>
+            <a:srgbClr val="F1F5F9"/>
+          </a:solidFill>
+          <a:ln w="9525">
+            <a:solidFill>
+              <a:srgbClr val="CBD5E1"/>
+            </a:solidFill>
+          </a:ln>
+        </p:spPr>
+        <p:style>
+          <a:lnRef idx="1">
+            <a:schemeClr val="accent1"/>
+          </a:lnRef>
+          <a:fillRef idx="3">
+            <a:schemeClr val="accent1"/>
+          </a:fillRef>
+          <a:effectRef idx="2">
+            <a:schemeClr val="accent1"/>
+          </a:effectRef>
+          <a:fontRef idx="minor">
+            <a:schemeClr val="lt1"/>
+          </a:fontRef>
+        </p:style>
+        <p:txBody>
+          <a:bodyPr rtlCol="0" anchor="ctr"/>
+          <a:lstStyle/>
+          <a:p>
+            <a:pPr algn="ctr"/>
+          </a:p>
+        </p:txBody>
+      </p:sp>
+      <p:sp>
+        <p:nvSpPr>
+          <p:cNvPr id="25" name="TextBox 24"/>
+          <p:cNvSpPr txBox="1"/>
+          <p:nvPr/>
+        </p:nvSpPr>
+        <p:spPr>
+          <a:xfrm>
+            <a:off x="4791456" y="3081527"/>
+            <a:ext cx="5925312" cy="292608"/>
+          </a:xfrm>
+          <a:prstGeom prst="rect">
+            <a:avLst/>
+          </a:prstGeom>
+          <a:noFill/>
+        </p:spPr>
+        <p:txBody>
+          <a:bodyPr wrap="square" lIns="27432" rIns="27432" tIns="9144" bIns="9144" anchor="t">
+            <a:spAutoFit/>
+          </a:bodyPr>
+          <a:lstStyle/>
+          <a:p>
+            <a:pPr algn="l">
+              <a:defRPr sz="1200" b="0">
+                <a:solidFill>
+                  <a:srgbClr val="0F172A"/>
+                </a:solidFill>
+                <a:latin typeface="Microsoft YaHei"/>
+              </a:defRPr>
+            </a:pPr>
+            <a:r>
+              <a:rPr sz="1200" b="0">
+                <a:solidFill>
+                  <a:srgbClr val="0F172A"/>
+                </a:solidFill>
+                <a:latin typeface="Microsoft YaHei"/>
+              </a:rPr>
+              <a:t>wMAE 2.5023; wBias -0.0230</a:t>
+            </a:r>
+          </a:p>
+        </p:txBody>
+      </p:sp>
+      <p:sp>
+        <p:nvSpPr>
+          <p:cNvPr id="26" name="Rectangle 25"/>
+          <p:cNvSpPr/>
+          <p:nvPr/>
+        </p:nvSpPr>
+        <p:spPr>
+          <a:xfrm>
+            <a:off x="713232" y="3438144"/>
+            <a:ext cx="4023360" cy="420624"/>
+          </a:xfrm>
+          <a:prstGeom prst="rect">
+            <a:avLst/>
+          </a:prstGeom>
+          <a:solidFill>
+            <a:srgbClr val="F8FAFC"/>
+          </a:solidFill>
+          <a:ln w="9525">
+            <a:solidFill>
+              <a:srgbClr val="CBD5E1"/>
+            </a:solidFill>
+          </a:ln>
+        </p:spPr>
+        <p:style>
+          <a:lnRef idx="1">
+            <a:schemeClr val="accent1"/>
+          </a:lnRef>
+          <a:fillRef idx="3">
+            <a:schemeClr val="accent1"/>
+          </a:fillRef>
+          <a:effectRef idx="2">
+            <a:schemeClr val="accent1"/>
+          </a:effectRef>
+          <a:fontRef idx="minor">
+            <a:schemeClr val="lt1"/>
+          </a:fontRef>
+        </p:style>
+        <p:txBody>
+          <a:bodyPr rtlCol="0" anchor="ctr"/>
+          <a:lstStyle/>
+          <a:p>
+            <a:pPr algn="ctr"/>
+          </a:p>
+        </p:txBody>
+      </p:sp>
+      <p:sp>
+        <p:nvSpPr>
+          <p:cNvPr id="27" name="TextBox 26"/>
+          <p:cNvSpPr txBox="1"/>
+          <p:nvPr/>
+        </p:nvSpPr>
+        <p:spPr>
+          <a:xfrm>
+            <a:off x="768096" y="3502151"/>
+            <a:ext cx="3913632" cy="292608"/>
+          </a:xfrm>
+          <a:prstGeom prst="rect">
+            <a:avLst/>
+          </a:prstGeom>
+          <a:noFill/>
+        </p:spPr>
+        <p:txBody>
+          <a:bodyPr wrap="square" lIns="27432" rIns="27432" tIns="9144" bIns="9144" anchor="t">
+            <a:spAutoFit/>
+          </a:bodyPr>
+          <a:lstStyle/>
+          <a:p>
+            <a:pPr algn="l">
+              <a:defRPr sz="1200" b="1">
+                <a:solidFill>
+                  <a:srgbClr val="0F172A"/>
+                </a:solidFill>
+                <a:latin typeface="Microsoft YaHei"/>
+              </a:defRPr>
+            </a:pPr>
+            <a:r>
+              <a:rPr sz="1200" b="1">
+                <a:solidFill>
+                  <a:srgbClr val="0F172A"/>
+                </a:solidFill>
+                <a:latin typeface="Microsoft YaHei"/>
+              </a:rPr>
+              <a:t>Pseudo-event ranked</a:t>
+            </a:r>
+          </a:p>
+        </p:txBody>
+      </p:sp>
+      <p:sp>
+        <p:nvSpPr>
+          <p:cNvPr id="28" name="Rectangle 27"/>
+          <p:cNvSpPr/>
+          <p:nvPr/>
+        </p:nvSpPr>
+        <p:spPr>
+          <a:xfrm>
+            <a:off x="4736592" y="3438144"/>
+            <a:ext cx="6035040" cy="420624"/>
+          </a:xfrm>
+          <a:prstGeom prst="rect">
+            <a:avLst/>
+          </a:prstGeom>
+          <a:solidFill>
+            <a:srgbClr val="F8FAFC"/>
+          </a:solidFill>
+          <a:ln w="9525">
+            <a:solidFill>
+              <a:srgbClr val="CBD5E1"/>
+            </a:solidFill>
+          </a:ln>
+        </p:spPr>
+        <p:style>
+          <a:lnRef idx="1">
+            <a:schemeClr val="accent1"/>
+          </a:lnRef>
+          <a:fillRef idx="3">
+            <a:schemeClr val="accent1"/>
+          </a:fillRef>
+          <a:effectRef idx="2">
+            <a:schemeClr val="accent1"/>
+          </a:effectRef>
+          <a:fontRef idx="minor">
+            <a:schemeClr val="lt1"/>
+          </a:fontRef>
+        </p:style>
+        <p:txBody>
+          <a:bodyPr rtlCol="0" anchor="ctr"/>
+          <a:lstStyle/>
+          <a:p>
+            <a:pPr algn="ctr"/>
+          </a:p>
+        </p:txBody>
+      </p:sp>
+      <p:sp>
+        <p:nvSpPr>
+          <p:cNvPr id="29" name="TextBox 28"/>
+          <p:cNvSpPr txBox="1"/>
+          <p:nvPr/>
+        </p:nvSpPr>
+        <p:spPr>
+          <a:xfrm>
+            <a:off x="4791456" y="3502151"/>
+            <a:ext cx="5925312" cy="292608"/>
+          </a:xfrm>
+          <a:prstGeom prst="rect">
+            <a:avLst/>
+          </a:prstGeom>
+          <a:noFill/>
+        </p:spPr>
+        <p:txBody>
+          <a:bodyPr wrap="square" lIns="27432" rIns="27432" tIns="9144" bIns="9144" anchor="t">
+            <a:spAutoFit/>
+          </a:bodyPr>
+          <a:lstStyle/>
+          <a:p>
+            <a:pPr algn="l">
+              <a:defRPr sz="1200" b="0">
+                <a:solidFill>
+                  <a:srgbClr val="0F172A"/>
+                </a:solidFill>
+                <a:latin typeface="Microsoft YaHei"/>
+              </a:defRPr>
+            </a:pPr>
+            <a:r>
+              <a:rPr sz="1200" b="0">
+                <a:solidFill>
+                  <a:srgbClr val="0F172A"/>
+                </a:solidFill>
+                <a:latin typeface="Microsoft YaHei"/>
+              </a:rPr>
+              <a:t>best placebo wMAE 2.6274</a:t>
+            </a:r>
+          </a:p>
+        </p:txBody>
+      </p:sp>
+      <p:sp>
+        <p:nvSpPr>
+          <p:cNvPr id="30" name="Rectangle 29"/>
+          <p:cNvSpPr/>
+          <p:nvPr/>
+        </p:nvSpPr>
+        <p:spPr>
+          <a:xfrm>
+            <a:off x="713232" y="3858768"/>
+            <a:ext cx="4023360" cy="420624"/>
+          </a:xfrm>
+          <a:prstGeom prst="rect">
+            <a:avLst/>
+          </a:prstGeom>
+          <a:solidFill>
+            <a:srgbClr val="F1F5F9"/>
+          </a:solidFill>
+          <a:ln w="9525">
+            <a:solidFill>
+              <a:srgbClr val="CBD5E1"/>
+            </a:solidFill>
+          </a:ln>
+        </p:spPr>
+        <p:style>
+          <a:lnRef idx="1">
+            <a:schemeClr val="accent1"/>
+          </a:lnRef>
+          <a:fillRef idx="3">
+            <a:schemeClr val="accent1"/>
+          </a:fillRef>
+          <a:effectRef idx="2">
+            <a:schemeClr val="accent1"/>
+          </a:effectRef>
+          <a:fontRef idx="minor">
+            <a:schemeClr val="lt1"/>
+          </a:fontRef>
+        </p:style>
+        <p:txBody>
+          <a:bodyPr rtlCol="0" anchor="ctr"/>
+          <a:lstStyle/>
+          <a:p>
+            <a:pPr algn="ctr"/>
+          </a:p>
+        </p:txBody>
+      </p:sp>
+      <p:sp>
+        <p:nvSpPr>
+          <p:cNvPr id="31" name="TextBox 30"/>
+          <p:cNvSpPr txBox="1"/>
+          <p:nvPr/>
+        </p:nvSpPr>
+        <p:spPr>
+          <a:xfrm>
+            <a:off x="768096" y="3922776"/>
+            <a:ext cx="3913632" cy="292608"/>
+          </a:xfrm>
+          <a:prstGeom prst="rect">
+            <a:avLst/>
+          </a:prstGeom>
+          <a:noFill/>
+        </p:spPr>
+        <p:txBody>
+          <a:bodyPr wrap="square" lIns="27432" rIns="27432" tIns="9144" bIns="9144" anchor="t">
+            <a:spAutoFit/>
+          </a:bodyPr>
+          <a:lstStyle/>
+          <a:p>
+            <a:pPr algn="l">
+              <a:defRPr sz="1200" b="1">
+                <a:solidFill>
+                  <a:srgbClr val="0F172A"/>
+                </a:solidFill>
+                <a:latin typeface="Microsoft YaHei"/>
+              </a:defRPr>
+            </a:pPr>
+            <a:r>
+              <a:rPr sz="1200" b="1">
+                <a:solidFill>
+                  <a:srgbClr val="0F172A"/>
+                </a:solidFill>
+                <a:latin typeface="Microsoft YaHei"/>
+              </a:rPr>
+              <a:t>Pseudo-event gated</a:t>
+            </a:r>
+          </a:p>
+        </p:txBody>
+      </p:sp>
+      <p:sp>
+        <p:nvSpPr>
+          <p:cNvPr id="32" name="Rectangle 31"/>
+          <p:cNvSpPr/>
+          <p:nvPr/>
+        </p:nvSpPr>
+        <p:spPr>
+          <a:xfrm>
+            <a:off x="4736592" y="3858768"/>
+            <a:ext cx="6035040" cy="420624"/>
+          </a:xfrm>
+          <a:prstGeom prst="rect">
+            <a:avLst/>
+          </a:prstGeom>
+          <a:solidFill>
+            <a:srgbClr val="F1F5F9"/>
+          </a:solidFill>
+          <a:ln w="9525">
+            <a:solidFill>
+              <a:srgbClr val="CBD5E1"/>
+            </a:solidFill>
+          </a:ln>
+        </p:spPr>
+        <p:style>
+          <a:lnRef idx="1">
+            <a:schemeClr val="accent1"/>
+          </a:lnRef>
+          <a:fillRef idx="3">
+            <a:schemeClr val="accent1"/>
+          </a:fillRef>
+          <a:effectRef idx="2">
+            <a:schemeClr val="accent1"/>
+          </a:effectRef>
+          <a:fontRef idx="minor">
+            <a:schemeClr val="lt1"/>
+          </a:fontRef>
+        </p:style>
+        <p:txBody>
+          <a:bodyPr rtlCol="0" anchor="ctr"/>
+          <a:lstStyle/>
+          <a:p>
+            <a:pPr algn="ctr"/>
+          </a:p>
+        </p:txBody>
+      </p:sp>
+      <p:sp>
+        <p:nvSpPr>
+          <p:cNvPr id="33" name="TextBox 32"/>
+          <p:cNvSpPr txBox="1"/>
+          <p:nvPr/>
+        </p:nvSpPr>
+        <p:spPr>
+          <a:xfrm>
+            <a:off x="4791456" y="3922776"/>
+            <a:ext cx="5925312" cy="292608"/>
+          </a:xfrm>
+          <a:prstGeom prst="rect">
+            <a:avLst/>
+          </a:prstGeom>
+          <a:noFill/>
+        </p:spPr>
+        <p:txBody>
+          <a:bodyPr wrap="square" lIns="27432" rIns="27432" tIns="9144" bIns="9144" anchor="t">
+            <a:spAutoFit/>
+          </a:bodyPr>
+          <a:lstStyle/>
+          <a:p>
+            <a:pPr algn="l">
+              <a:defRPr sz="1200" b="0">
+                <a:solidFill>
+                  <a:srgbClr val="0F172A"/>
+                </a:solidFill>
+                <a:latin typeface="Microsoft YaHei"/>
+              </a:defRPr>
+            </a:pPr>
+            <a:r>
+              <a:rPr sz="1200" b="0">
+                <a:solidFill>
+                  <a:srgbClr val="0F172A"/>
+                </a:solidFill>
+                <a:latin typeface="Microsoft YaHei"/>
+              </a:rPr>
+              <a:t>best gated placebo wMAE 2.5610</a:t>
+            </a:r>
+          </a:p>
+        </p:txBody>
+      </p:sp>
+      <p:sp>
+        <p:nvSpPr>
+          <p:cNvPr id="34" name="Rounded Rectangle 33"/>
+          <p:cNvSpPr/>
+          <p:nvPr/>
+        </p:nvSpPr>
+        <p:spPr>
+          <a:xfrm>
+            <a:off x="749808" y="5074920"/>
+            <a:ext cx="10012680" cy="1005840"/>
+          </a:xfrm>
+          <a:prstGeom prst="roundRect">
+            <a:avLst/>
+          </a:prstGeom>
+          <a:solidFill>
+            <a:srgbClr val="F1F5F9"/>
+          </a:solidFill>
+          <a:ln w="9525">
+            <a:solidFill>
+              <a:srgbClr val="CBD5E1"/>
+            </a:solidFill>
+          </a:ln>
+        </p:spPr>
+        <p:style>
+          <a:lnRef idx="1">
+            <a:schemeClr val="accent1"/>
+          </a:lnRef>
+          <a:fillRef idx="3">
+            <a:schemeClr val="accent1"/>
+          </a:fillRef>
+          <a:effectRef idx="2">
+            <a:schemeClr val="accent1"/>
+          </a:effectRef>
+          <a:fontRef idx="minor">
+            <a:schemeClr val="lt1"/>
+          </a:fontRef>
+        </p:style>
+        <p:txBody>
+          <a:bodyPr rtlCol="0" anchor="ctr"/>
+          <a:lstStyle/>
+          <a:p>
+            <a:pPr algn="ctr"/>
+          </a:p>
+        </p:txBody>
+      </p:sp>
+      <p:sp>
+        <p:nvSpPr>
+          <p:cNvPr id="35" name="Rectangle 34"/>
+          <p:cNvSpPr/>
+          <p:nvPr/>
+        </p:nvSpPr>
+        <p:spPr>
+          <a:xfrm>
+            <a:off x="749808" y="5074920"/>
+            <a:ext cx="50292" cy="1005840"/>
+          </a:xfrm>
+          <a:prstGeom prst="rect">
+            <a:avLst/>
+          </a:prstGeom>
+          <a:solidFill>
+            <a:srgbClr val="2563EB"/>
+          </a:solidFill>
+          <a:ln>
+            <a:noFill/>
+          </a:ln>
+        </p:spPr>
+        <p:style>
+          <a:lnRef idx="1">
+            <a:schemeClr val="accent1"/>
+          </a:lnRef>
+          <a:fillRef idx="3">
+            <a:schemeClr val="accent1"/>
+          </a:fillRef>
+          <a:effectRef idx="2">
+            <a:schemeClr val="accent1"/>
+          </a:effectRef>
+          <a:fontRef idx="minor">
+            <a:schemeClr val="lt1"/>
+          </a:fontRef>
+        </p:style>
+        <p:txBody>
+          <a:bodyPr rtlCol="0" anchor="ctr"/>
+          <a:lstStyle/>
+          <a:p>
+            <a:pPr algn="ctr"/>
+          </a:p>
+        </p:txBody>
+      </p:sp>
+      <p:sp>
+        <p:nvSpPr>
+          <p:cNvPr id="36" name="TextBox 35"/>
+          <p:cNvSpPr txBox="1"/>
+          <p:nvPr/>
+        </p:nvSpPr>
+        <p:spPr>
+          <a:xfrm>
+            <a:off x="914400" y="5166359"/>
+            <a:ext cx="9720072" cy="362102"/>
+          </a:xfrm>
+          <a:prstGeom prst="rect">
+            <a:avLst/>
+          </a:prstGeom>
+          <a:noFill/>
+        </p:spPr>
+        <p:txBody>
+          <a:bodyPr wrap="square" lIns="27432" rIns="27432" tIns="9144" bIns="9144" anchor="t">
+            <a:spAutoFit/>
+          </a:bodyPr>
+          <a:lstStyle/>
+          <a:p>
+            <a:pPr algn="l">
+              <a:defRPr sz="1200" b="1">
+                <a:solidFill>
+                  <a:srgbClr val="0F172A"/>
+                </a:solidFill>
+                <a:latin typeface="Microsoft YaHei"/>
+              </a:defRPr>
+            </a:pPr>
+            <a:r>
+              <a:rPr sz="1200" b="1">
+                <a:solidFill>
+                  <a:srgbClr val="0F172A"/>
+                </a:solidFill>
+                <a:latin typeface="Microsoft YaHei"/>
+              </a:rPr>
+              <a:t>答法：不能夸大成 LLM cohort ranking 独自贡献全部提升。更准确的说法是：LLM event semantics 给出 label-free event correction，gated cohort refinement 改善 calibration 和 robustness。</a:t>
+            </a:r>
+          </a:p>
+        </p:txBody>
+      </p:sp>
+      <p:sp>
+        <p:nvSpPr>
+          <p:cNvPr id="37" name="TextBox 36"/>
+          <p:cNvSpPr txBox="1"/>
+          <p:nvPr/>
+        </p:nvSpPr>
+        <p:spPr>
+          <a:xfrm>
+            <a:off x="914400" y="5592470"/>
+            <a:ext cx="9720072" cy="415137"/>
+          </a:xfrm>
+          <a:prstGeom prst="rect">
+            <a:avLst/>
+          </a:prstGeom>
+          <a:noFill/>
+        </p:spPr>
+        <p:txBody>
+          <a:bodyPr wrap="square" lIns="27432" rIns="27432" tIns="9144" bIns="9144" anchor="t">
+            <a:spAutoFit/>
+          </a:bodyPr>
+          <a:lstStyle/>
+          <a:p>
+            <a:pPr algn="l">
+              <a:defRPr sz="1200" b="0">
+                <a:solidFill>
+                  <a:srgbClr val="64748B"/>
+                </a:solidFill>
+                <a:latin typeface="Microsoft YaHei"/>
+              </a:defRPr>
+            </a:pPr>
+          </a:p>
+        </p:txBody>
+      </p:sp>
+    </p:spTree>
+  </p:cSld>
+  <p:clrMapOvr>
+    <a:masterClrMapping/>
+  </p:clrMapOvr>
+</p:sld>
+</file>
+
+<file path=ppt/slides/slide27.xml><?xml version="1.0" encoding="utf-8"?>
+<p:sld xmlns:a="http://schemas.openxmlformats.org/drawingml/2006/main" xmlns:p="http://schemas.openxmlformats.org/presentationml/2006/main" xmlns:r="http://schemas.openxmlformats.org/officeDocument/2006/relationships">
+  <p:cSld>
+    <p:bg>
+      <p:bgPr>
+        <a:solidFill>
+          <a:srgbClr val="FFFFFF"/>
+        </a:solidFill>
+        <a:effectLst/>
+      </p:bgPr>
+    </p:bg>
+    <p:spTree>
+      <p:nvGrpSpPr>
+        <p:cNvPr id="1" name=""/>
+        <p:cNvGrpSpPr/>
+        <p:nvPr/>
+      </p:nvGrpSpPr>
+      <p:grpSpPr/>
+      <p:sp>
+        <p:nvSpPr>
+          <p:cNvPr id="2" name="TextBox 1"/>
+          <p:cNvSpPr txBox="1"/>
+          <p:nvPr/>
+        </p:nvSpPr>
+        <p:spPr>
+          <a:xfrm>
+            <a:off x="384048" y="109728"/>
+            <a:ext cx="4480560" cy="164592"/>
+          </a:xfrm>
+          <a:prstGeom prst="rect">
+            <a:avLst/>
+          </a:prstGeom>
+          <a:noFill/>
+        </p:spPr>
+        <p:txBody>
+          <a:bodyPr wrap="square" lIns="27432" rIns="27432" tIns="9144" bIns="9144" anchor="ctr">
+            <a:spAutoFit/>
+          </a:bodyPr>
+          <a:lstStyle/>
+          <a:p>
+            <a:pPr algn="l">
+              <a:defRPr sz="750" b="1">
+                <a:solidFill>
+                  <a:srgbClr val="64748B"/>
+                </a:solidFill>
+                <a:latin typeface="Microsoft YaHei"/>
+              </a:defRPr>
+            </a:pPr>
+            <a:r>
+              <a:rPr sz="750" b="1">
+                <a:solidFill>
+                  <a:srgbClr val="64748B"/>
+                </a:solidFill>
+                <a:latin typeface="Microsoft YaHei"/>
+              </a:rPr>
+              <a:t>Mobility Inequality and Sustainable Development</a:t>
+            </a:r>
+          </a:p>
+        </p:txBody>
+      </p:sp>
+      <p:sp>
+        <p:nvSpPr>
+          <p:cNvPr id="3" name="TextBox 2"/>
+          <p:cNvSpPr txBox="1"/>
+          <p:nvPr/>
+        </p:nvSpPr>
+        <p:spPr>
+          <a:xfrm>
+            <a:off x="384048" y="347472"/>
+            <a:ext cx="777240" cy="292608"/>
+          </a:xfrm>
+          <a:prstGeom prst="rect">
+            <a:avLst/>
+          </a:prstGeom>
+          <a:noFill/>
+        </p:spPr>
+        <p:txBody>
+          <a:bodyPr wrap="square" lIns="27432" rIns="27432" tIns="9144" bIns="9144" anchor="ctr">
+            <a:spAutoFit/>
+          </a:bodyPr>
+          <a:lstStyle/>
+          <a:p>
+            <a:pPr algn="l">
+              <a:defRPr sz="1300" b="1">
+                <a:solidFill>
+                  <a:srgbClr val="EA580C"/>
+                </a:solidFill>
+                <a:latin typeface="Microsoft YaHei"/>
+              </a:defRPr>
+            </a:pPr>
+            <a:r>
+              <a:rPr sz="1300" b="1">
+                <a:solidFill>
+                  <a:srgbClr val="EA580C"/>
+                </a:solidFill>
+                <a:latin typeface="Microsoft YaHei"/>
+              </a:rPr>
+              <a:t>BACKUP</a:t>
+            </a:r>
+          </a:p>
+        </p:txBody>
+      </p:sp>
+      <p:sp>
+        <p:nvSpPr>
+          <p:cNvPr id="4" name="TextBox 3"/>
+          <p:cNvSpPr txBox="1"/>
+          <p:nvPr/>
+        </p:nvSpPr>
+        <p:spPr>
+          <a:xfrm>
+            <a:off x="1234440" y="246888"/>
+            <a:ext cx="8412480" cy="329184"/>
+          </a:xfrm>
+          <a:prstGeom prst="rect">
+            <a:avLst/>
+          </a:prstGeom>
+          <a:noFill/>
+        </p:spPr>
+        <p:txBody>
+          <a:bodyPr wrap="square" lIns="27432" rIns="27432" tIns="9144" bIns="9144" anchor="ctr">
+            <a:spAutoFit/>
+          </a:bodyPr>
+          <a:lstStyle/>
+          <a:p>
+            <a:pPr algn="l">
+              <a:defRPr sz="1700" b="1">
+                <a:solidFill>
+                  <a:srgbClr val="0F172A"/>
+                </a:solidFill>
+                <a:latin typeface="Microsoft YaHei"/>
+              </a:defRPr>
+            </a:pPr>
+            <a:r>
+              <a:rPr sz="1700" b="1">
+                <a:solidFill>
+                  <a:srgbClr val="0F172A"/>
+                </a:solidFill>
+                <a:latin typeface="Microsoft YaHei"/>
+              </a:rPr>
+              <a:t>和 2025-2026 mobility foundation model 有什么区别？</a:t>
+            </a:r>
+          </a:p>
+        </p:txBody>
+      </p:sp>
+      <p:sp>
+        <p:nvSpPr>
+          <p:cNvPr id="5" name="TextBox 4"/>
+          <p:cNvSpPr txBox="1"/>
+          <p:nvPr/>
+        </p:nvSpPr>
+        <p:spPr>
+          <a:xfrm>
+            <a:off x="1252728" y="585216"/>
+            <a:ext cx="8869680" cy="228600"/>
+          </a:xfrm>
+          <a:prstGeom prst="rect">
+            <a:avLst/>
+          </a:prstGeom>
+          <a:noFill/>
+        </p:spPr>
+        <p:txBody>
+          <a:bodyPr wrap="square" lIns="27432" rIns="27432" tIns="9144" bIns="9144" anchor="ctr">
+            <a:spAutoFit/>
+          </a:bodyPr>
+          <a:lstStyle/>
+          <a:p>
+            <a:pPr algn="l">
+              <a:defRPr sz="850" b="0">
+                <a:solidFill>
+                  <a:srgbClr val="64748B"/>
+                </a:solidFill>
+                <a:latin typeface="Microsoft YaHei"/>
+              </a:defRPr>
+            </a:pPr>
+            <a:r>
+              <a:rPr sz="850" b="0">
+                <a:solidFill>
+                  <a:srgbClr val="64748B"/>
+                </a:solidFill>
+                <a:latin typeface="Microsoft YaHei"/>
+              </a:rPr>
+              <a:t>How is this different from recent mobility foundation-model work?</a:t>
+            </a:r>
+          </a:p>
+        </p:txBody>
+      </p:sp>
+      <p:pic>
+        <p:nvPicPr>
+          <p:cNvPr id="6" name="Picture 5" descr="image.png"/>
+          <p:cNvPicPr>
+            <a:picLocks noChangeAspect="1"/>
+          </p:cNvPicPr>
+          <p:nvPr/>
+        </p:nvPicPr>
+        <p:blipFill>
+          <a:blip r:embed="rId2"/>
+          <a:stretch>
+            <a:fillRect/>
+          </a:stretch>
+        </p:blipFill>
+        <p:spPr>
+          <a:xfrm>
+            <a:off x="11018520" y="201168"/>
+            <a:ext cx="713232" cy="502730"/>
+          </a:xfrm>
+          <a:prstGeom prst="rect">
+            <a:avLst/>
+          </a:prstGeom>
+        </p:spPr>
+      </p:pic>
+      <p:sp>
+        <p:nvSpPr>
+          <p:cNvPr id="7" name="Rectangle 6"/>
+          <p:cNvSpPr/>
+          <p:nvPr/>
+        </p:nvSpPr>
+        <p:spPr>
+          <a:xfrm>
+            <a:off x="384048" y="877824"/>
+            <a:ext cx="11201400" cy="10972"/>
+          </a:xfrm>
+          <a:prstGeom prst="rect">
+            <a:avLst/>
+          </a:prstGeom>
+          <a:solidFill>
+            <a:srgbClr val="CBD5E1"/>
+          </a:solidFill>
+          <a:ln>
+            <a:noFill/>
+          </a:ln>
+        </p:spPr>
+        <p:style>
+          <a:lnRef idx="1">
+            <a:schemeClr val="accent1"/>
+          </a:lnRef>
+          <a:fillRef idx="3">
+            <a:schemeClr val="accent1"/>
+          </a:fillRef>
+          <a:effectRef idx="2">
+            <a:schemeClr val="accent1"/>
+          </a:effectRef>
+          <a:fontRef idx="minor">
+            <a:schemeClr val="lt1"/>
+          </a:fontRef>
+        </p:style>
+        <p:txBody>
+          <a:bodyPr rtlCol="0" anchor="ctr"/>
+          <a:lstStyle/>
+          <a:p>
+            <a:pPr algn="ctr"/>
+          </a:p>
+        </p:txBody>
+      </p:sp>
+      <p:sp>
+        <p:nvSpPr>
+          <p:cNvPr id="8" name="Rectangle 7"/>
+          <p:cNvSpPr/>
+          <p:nvPr/>
+        </p:nvSpPr>
+        <p:spPr>
+          <a:xfrm>
+            <a:off x="384048" y="6428232"/>
+            <a:ext cx="11201400" cy="10972"/>
+          </a:xfrm>
+          <a:prstGeom prst="rect">
+            <a:avLst/>
+          </a:prstGeom>
+          <a:solidFill>
+            <a:srgbClr val="CBD5E1"/>
+          </a:solidFill>
+          <a:ln>
+            <a:noFill/>
+          </a:ln>
+        </p:spPr>
+        <p:style>
+          <a:lnRef idx="1">
+            <a:schemeClr val="accent1"/>
+          </a:lnRef>
+          <a:fillRef idx="3">
+            <a:schemeClr val="accent1"/>
+          </a:fillRef>
+          <a:effectRef idx="2">
+            <a:schemeClr val="accent1"/>
+          </a:effectRef>
+          <a:fontRef idx="minor">
+            <a:schemeClr val="lt1"/>
+          </a:fontRef>
+        </p:style>
+        <p:txBody>
+          <a:bodyPr rtlCol="0" anchor="ctr"/>
+          <a:lstStyle/>
+          <a:p>
+            <a:pPr algn="ctr"/>
+          </a:p>
+        </p:txBody>
+      </p:sp>
+      <p:sp>
+        <p:nvSpPr>
+          <p:cNvPr id="9" name="TextBox 8"/>
+          <p:cNvSpPr txBox="1"/>
+          <p:nvPr/>
+        </p:nvSpPr>
+        <p:spPr>
+          <a:xfrm>
+            <a:off x="384048" y="6473952"/>
+            <a:ext cx="5212080" cy="164592"/>
+          </a:xfrm>
+          <a:prstGeom prst="rect">
+            <a:avLst/>
+          </a:prstGeom>
+          <a:noFill/>
+        </p:spPr>
+        <p:txBody>
+          <a:bodyPr wrap="square" lIns="27432" rIns="27432" tIns="9144" bIns="9144" anchor="ctr">
+            <a:spAutoFit/>
+          </a:bodyPr>
+          <a:lstStyle/>
+          <a:p>
+            <a:pPr algn="l">
+              <a:defRPr sz="750" b="0">
+                <a:solidFill>
+                  <a:srgbClr val="64748B"/>
+                </a:solidFill>
+                <a:latin typeface="Microsoft YaHei"/>
+              </a:defRPr>
+            </a:pPr>
+            <a:r>
+              <a:rPr sz="750" b="0">
+                <a:solidFill>
+                  <a:srgbClr val="64748B"/>
+                </a:solidFill>
+                <a:latin typeface="Microsoft YaHei"/>
+              </a:rPr>
+              <a:t>Appendix: reviewer and instructor Q&amp;A</a:t>
+            </a:r>
+          </a:p>
+        </p:txBody>
+      </p:sp>
+      <p:sp>
+        <p:nvSpPr>
+          <p:cNvPr id="10" name="TextBox 9"/>
+          <p:cNvSpPr txBox="1"/>
+          <p:nvPr/>
+        </p:nvSpPr>
+        <p:spPr>
+          <a:xfrm>
+            <a:off x="10149840" y="6473952"/>
+            <a:ext cx="1417320" cy="164592"/>
+          </a:xfrm>
+          <a:prstGeom prst="rect">
+            <a:avLst/>
+          </a:prstGeom>
+          <a:noFill/>
+        </p:spPr>
+        <p:txBody>
+          <a:bodyPr wrap="square" lIns="27432" rIns="27432" tIns="9144" bIns="9144" anchor="ctr">
+            <a:spAutoFit/>
+          </a:bodyPr>
+          <a:lstStyle/>
+          <a:p>
+            <a:pPr algn="r">
+              <a:defRPr sz="750" b="1">
+                <a:solidFill>
+                  <a:srgbClr val="64748B"/>
+                </a:solidFill>
+                <a:latin typeface="Microsoft YaHei"/>
+              </a:defRPr>
+            </a:pPr>
+            <a:r>
+              <a:rPr sz="750" b="1">
+                <a:solidFill>
+                  <a:srgbClr val="64748B"/>
+                </a:solidFill>
+                <a:latin typeface="Microsoft YaHei"/>
+              </a:rPr>
+              <a:t>B4</a:t>
+            </a:r>
+          </a:p>
+        </p:txBody>
+      </p:sp>
+      <p:sp>
+        <p:nvSpPr>
+          <p:cNvPr id="11" name="Rounded Rectangle 10"/>
+          <p:cNvSpPr/>
+          <p:nvPr/>
+        </p:nvSpPr>
+        <p:spPr>
+          <a:xfrm>
+            <a:off x="658368" y="1115568"/>
+            <a:ext cx="10287000" cy="749808"/>
+          </a:xfrm>
+          <a:prstGeom prst="roundRect">
+            <a:avLst/>
+          </a:prstGeom>
+          <a:solidFill>
+            <a:srgbClr val="F1F5F9"/>
+          </a:solidFill>
+          <a:ln w="9525">
+            <a:solidFill>
+              <a:srgbClr val="CBD5E1"/>
+            </a:solidFill>
+          </a:ln>
+        </p:spPr>
+        <p:style>
+          <a:lnRef idx="1">
+            <a:schemeClr val="accent1"/>
+          </a:lnRef>
+          <a:fillRef idx="3">
+            <a:schemeClr val="accent1"/>
+          </a:fillRef>
+          <a:effectRef idx="2">
+            <a:schemeClr val="accent1"/>
+          </a:effectRef>
+          <a:fontRef idx="minor">
+            <a:schemeClr val="lt1"/>
+          </a:fontRef>
+        </p:style>
+        <p:txBody>
+          <a:bodyPr rtlCol="0" anchor="ctr"/>
+          <a:lstStyle/>
+          <a:p>
+            <a:pPr algn="ctr"/>
+          </a:p>
+        </p:txBody>
+      </p:sp>
+      <p:sp>
+        <p:nvSpPr>
+          <p:cNvPr id="12" name="TextBox 11"/>
+          <p:cNvSpPr txBox="1"/>
+          <p:nvPr/>
+        </p:nvSpPr>
+        <p:spPr>
+          <a:xfrm>
+            <a:off x="868680" y="1298448"/>
+            <a:ext cx="1463040" cy="182880"/>
+          </a:xfrm>
+          <a:prstGeom prst="rect">
+            <a:avLst/>
+          </a:prstGeom>
+          <a:noFill/>
+        </p:spPr>
+        <p:txBody>
+          <a:bodyPr wrap="square" lIns="27432" rIns="27432" tIns="9144" bIns="9144" anchor="ctr">
+            <a:spAutoFit/>
+          </a:bodyPr>
+          <a:lstStyle/>
+          <a:p>
+            <a:pPr algn="l">
+              <a:defRPr sz="1000" b="1">
+                <a:solidFill>
+                  <a:srgbClr val="EA580C"/>
+                </a:solidFill>
+                <a:latin typeface="Microsoft YaHei"/>
+              </a:defRPr>
+            </a:pPr>
+            <a:r>
+              <a:rPr sz="1000" b="1">
+                <a:solidFill>
+                  <a:srgbClr val="EA580C"/>
+                </a:solidFill>
+                <a:latin typeface="Microsoft YaHei"/>
+              </a:rPr>
+              <a:t>Short answer</a:t>
+            </a:r>
+          </a:p>
+        </p:txBody>
+      </p:sp>
+      <p:sp>
+        <p:nvSpPr>
+          <p:cNvPr id="13" name="TextBox 12"/>
+          <p:cNvSpPr txBox="1"/>
+          <p:nvPr/>
+        </p:nvSpPr>
+        <p:spPr>
+          <a:xfrm>
+            <a:off x="2240280" y="1216152"/>
+            <a:ext cx="8366760" cy="329184"/>
+          </a:xfrm>
+          <a:prstGeom prst="rect">
+            <a:avLst/>
+          </a:prstGeom>
+          <a:noFill/>
+        </p:spPr>
+        <p:txBody>
+          <a:bodyPr wrap="square" lIns="27432" rIns="27432" tIns="9144" bIns="9144" anchor="ctr">
+            <a:spAutoFit/>
+          </a:bodyPr>
+          <a:lstStyle/>
+          <a:p>
+            <a:pPr algn="l">
+              <a:defRPr sz="1300" b="1">
+                <a:solidFill>
+                  <a:srgbClr val="0F172A"/>
+                </a:solidFill>
+                <a:latin typeface="Microsoft YaHei"/>
+              </a:defRPr>
+            </a:pPr>
+            <a:r>
+              <a:rPr sz="1300" b="1">
+                <a:solidFill>
+                  <a:srgbClr val="0F172A"/>
+                </a:solidFill>
+                <a:latin typeface="Microsoft YaHei"/>
+              </a:rPr>
+              <a:t>最新工作多是 trajectory / flow / sensor forecasting；我们是 NHTS household survey 的 event adaptation。</a:t>
+            </a:r>
+          </a:p>
+        </p:txBody>
+      </p:sp>
+      <p:sp>
+        <p:nvSpPr>
+          <p:cNvPr id="14" name="Rectangle 13"/>
+          <p:cNvSpPr/>
+          <p:nvPr/>
+        </p:nvSpPr>
+        <p:spPr>
+          <a:xfrm>
+            <a:off x="713232" y="2176272"/>
+            <a:ext cx="4023360" cy="420624"/>
+          </a:xfrm>
+          <a:prstGeom prst="rect">
+            <a:avLst/>
+          </a:prstGeom>
+          <a:solidFill>
+            <a:srgbClr val="00796B"/>
+          </a:solidFill>
+          <a:ln>
+            <a:noFill/>
+          </a:ln>
+        </p:spPr>
+        <p:style>
+          <a:lnRef idx="1">
+            <a:schemeClr val="accent1"/>
+          </a:lnRef>
+          <a:fillRef idx="3">
+            <a:schemeClr val="accent1"/>
+          </a:fillRef>
+          <a:effectRef idx="2">
+            <a:schemeClr val="accent1"/>
+          </a:effectRef>
+          <a:fontRef idx="minor">
+            <a:schemeClr val="lt1"/>
+          </a:fontRef>
+        </p:style>
+        <p:txBody>
+          <a:bodyPr rtlCol="0" anchor="ctr"/>
+          <a:lstStyle/>
+          <a:p>
+            <a:pPr algn="ctr"/>
+          </a:p>
+        </p:txBody>
+      </p:sp>
+      <p:sp>
+        <p:nvSpPr>
+          <p:cNvPr id="15" name="TextBox 14"/>
+          <p:cNvSpPr txBox="1"/>
+          <p:nvPr/>
+        </p:nvSpPr>
+        <p:spPr>
+          <a:xfrm>
+            <a:off x="749808" y="2249424"/>
+            <a:ext cx="3950208" cy="292608"/>
+          </a:xfrm>
+          <a:prstGeom prst="rect">
+            <a:avLst/>
+          </a:prstGeom>
+          <a:noFill/>
+        </p:spPr>
+        <p:txBody>
+          <a:bodyPr wrap="square" lIns="27432" rIns="27432" tIns="9144" bIns="9144" anchor="ctr">
+            <a:spAutoFit/>
+          </a:bodyPr>
+          <a:lstStyle/>
+          <a:p>
+            <a:pPr algn="ctr">
+              <a:defRPr sz="1200" b="1">
+                <a:solidFill>
+                  <a:srgbClr val="FFFFFF"/>
+                </a:solidFill>
+                <a:latin typeface="Microsoft YaHei"/>
+              </a:defRPr>
+            </a:pPr>
+            <a:r>
+              <a:rPr sz="1200" b="1">
+                <a:solidFill>
+                  <a:srgbClr val="FFFFFF"/>
+                </a:solidFill>
+                <a:latin typeface="Microsoft YaHei"/>
+              </a:rPr>
+              <a:t>Evidence</a:t>
+            </a:r>
+          </a:p>
+        </p:txBody>
+      </p:sp>
+      <p:sp>
+        <p:nvSpPr>
+          <p:cNvPr id="16" name="Rectangle 15"/>
+          <p:cNvSpPr/>
+          <p:nvPr/>
+        </p:nvSpPr>
+        <p:spPr>
+          <a:xfrm>
+            <a:off x="4736592" y="2176272"/>
+            <a:ext cx="6035040" cy="420624"/>
+          </a:xfrm>
+          <a:prstGeom prst="rect">
+            <a:avLst/>
+          </a:prstGeom>
+          <a:solidFill>
+            <a:srgbClr val="00796B"/>
+          </a:solidFill>
+          <a:ln>
+            <a:noFill/>
+          </a:ln>
+        </p:spPr>
+        <p:style>
+          <a:lnRef idx="1">
+            <a:schemeClr val="accent1"/>
+          </a:lnRef>
+          <a:fillRef idx="3">
+            <a:schemeClr val="accent1"/>
+          </a:fillRef>
+          <a:effectRef idx="2">
+            <a:schemeClr val="accent1"/>
+          </a:effectRef>
+          <a:fontRef idx="minor">
+            <a:schemeClr val="lt1"/>
+          </a:fontRef>
+        </p:style>
+        <p:txBody>
+          <a:bodyPr rtlCol="0" anchor="ctr"/>
+          <a:lstStyle/>
+          <a:p>
+            <a:pPr algn="ctr"/>
+          </a:p>
+        </p:txBody>
+      </p:sp>
+      <p:sp>
+        <p:nvSpPr>
+          <p:cNvPr id="17" name="TextBox 16"/>
+          <p:cNvSpPr txBox="1"/>
+          <p:nvPr/>
+        </p:nvSpPr>
+        <p:spPr>
+          <a:xfrm>
+            <a:off x="4773168" y="2249424"/>
+            <a:ext cx="5961888" cy="292608"/>
+          </a:xfrm>
+          <a:prstGeom prst="rect">
+            <a:avLst/>
+          </a:prstGeom>
+          <a:noFill/>
+        </p:spPr>
+        <p:txBody>
+          <a:bodyPr wrap="square" lIns="27432" rIns="27432" tIns="9144" bIns="9144" anchor="ctr">
+            <a:spAutoFit/>
+          </a:bodyPr>
+          <a:lstStyle/>
+          <a:p>
+            <a:pPr algn="ctr">
+              <a:defRPr sz="1200" b="1">
+                <a:solidFill>
+                  <a:srgbClr val="FFFFFF"/>
+                </a:solidFill>
+                <a:latin typeface="Microsoft YaHei"/>
+              </a:defRPr>
+            </a:pPr>
+            <a:r>
+              <a:rPr sz="1200" b="1">
+                <a:solidFill>
+                  <a:srgbClr val="FFFFFF"/>
+                </a:solidFill>
+                <a:latin typeface="Microsoft YaHei"/>
+              </a:rPr>
+              <a:t>Value / implication</a:t>
+            </a:r>
+          </a:p>
+        </p:txBody>
+      </p:sp>
+      <p:sp>
+        <p:nvSpPr>
+          <p:cNvPr id="18" name="Rectangle 17"/>
+          <p:cNvSpPr/>
+          <p:nvPr/>
+        </p:nvSpPr>
+        <p:spPr>
+          <a:xfrm>
+            <a:off x="713232" y="2596896"/>
+            <a:ext cx="4023360" cy="420624"/>
+          </a:xfrm>
+          <a:prstGeom prst="rect">
+            <a:avLst/>
+          </a:prstGeom>
+          <a:solidFill>
+            <a:srgbClr val="F8FAFC"/>
+          </a:solidFill>
+          <a:ln w="9525">
+            <a:solidFill>
+              <a:srgbClr val="CBD5E1"/>
+            </a:solidFill>
+          </a:ln>
+        </p:spPr>
+        <p:style>
+          <a:lnRef idx="1">
+            <a:schemeClr val="accent1"/>
+          </a:lnRef>
+          <a:fillRef idx="3">
+            <a:schemeClr val="accent1"/>
+          </a:fillRef>
+          <a:effectRef idx="2">
+            <a:schemeClr val="accent1"/>
+          </a:effectRef>
+          <a:fontRef idx="minor">
+            <a:schemeClr val="lt1"/>
+          </a:fontRef>
+        </p:style>
+        <p:txBody>
+          <a:bodyPr rtlCol="0" anchor="ctr"/>
+          <a:lstStyle/>
+          <a:p>
+            <a:pPr algn="ctr"/>
+          </a:p>
+        </p:txBody>
+      </p:sp>
+      <p:sp>
+        <p:nvSpPr>
+          <p:cNvPr id="19" name="TextBox 18"/>
+          <p:cNvSpPr txBox="1"/>
+          <p:nvPr/>
+        </p:nvSpPr>
+        <p:spPr>
+          <a:xfrm>
+            <a:off x="768096" y="2660903"/>
+            <a:ext cx="3913632" cy="292608"/>
+          </a:xfrm>
+          <a:prstGeom prst="rect">
+            <a:avLst/>
+          </a:prstGeom>
+          <a:noFill/>
+        </p:spPr>
+        <p:txBody>
+          <a:bodyPr wrap="square" lIns="27432" rIns="27432" tIns="9144" bIns="9144" anchor="t">
+            <a:spAutoFit/>
+          </a:bodyPr>
+          <a:lstStyle/>
+          <a:p>
+            <a:pPr algn="l">
+              <a:defRPr sz="1200" b="1">
+                <a:solidFill>
+                  <a:srgbClr val="0F172A"/>
+                </a:solidFill>
+                <a:latin typeface="Microsoft YaHei"/>
+              </a:defRPr>
+            </a:pPr>
+            <a:r>
+              <a:rPr sz="1200" b="1">
+                <a:solidFill>
+                  <a:srgbClr val="0F172A"/>
+                </a:solidFill>
+                <a:latin typeface="Microsoft YaHei"/>
+              </a:rPr>
+              <a:t>Event-driven LLM mobility</a:t>
+            </a:r>
+          </a:p>
+        </p:txBody>
+      </p:sp>
+      <p:sp>
+        <p:nvSpPr>
+          <p:cNvPr id="20" name="Rectangle 19"/>
+          <p:cNvSpPr/>
+          <p:nvPr/>
+        </p:nvSpPr>
+        <p:spPr>
+          <a:xfrm>
+            <a:off x="4736592" y="2596896"/>
+            <a:ext cx="6035040" cy="420624"/>
+          </a:xfrm>
+          <a:prstGeom prst="rect">
+            <a:avLst/>
+          </a:prstGeom>
+          <a:solidFill>
+            <a:srgbClr val="F8FAFC"/>
+          </a:solidFill>
+          <a:ln w="9525">
+            <a:solidFill>
+              <a:srgbClr val="CBD5E1"/>
+            </a:solidFill>
+          </a:ln>
+        </p:spPr>
+        <p:style>
+          <a:lnRef idx="1">
+            <a:schemeClr val="accent1"/>
+          </a:lnRef>
+          <a:fillRef idx="3">
+            <a:schemeClr val="accent1"/>
+          </a:fillRef>
+          <a:effectRef idx="2">
+            <a:schemeClr val="accent1"/>
+          </a:effectRef>
+          <a:fontRef idx="minor">
+            <a:schemeClr val="lt1"/>
+          </a:fontRef>
+        </p:style>
+        <p:txBody>
+          <a:bodyPr rtlCol="0" anchor="ctr"/>
+          <a:lstStyle/>
+          <a:p>
+            <a:pPr algn="ctr"/>
+          </a:p>
+        </p:txBody>
+      </p:sp>
+      <p:sp>
+        <p:nvSpPr>
+          <p:cNvPr id="21" name="TextBox 20"/>
+          <p:cNvSpPr txBox="1"/>
+          <p:nvPr/>
+        </p:nvSpPr>
+        <p:spPr>
+          <a:xfrm>
+            <a:off x="4791456" y="2660903"/>
+            <a:ext cx="5925312" cy="292608"/>
+          </a:xfrm>
+          <a:prstGeom prst="rect">
+            <a:avLst/>
+          </a:prstGeom>
+          <a:noFill/>
+        </p:spPr>
+        <p:txBody>
+          <a:bodyPr wrap="square" lIns="27432" rIns="27432" tIns="9144" bIns="9144" anchor="t">
+            <a:spAutoFit/>
+          </a:bodyPr>
+          <a:lstStyle/>
+          <a:p>
+            <a:pPr algn="l">
+              <a:defRPr sz="1200" b="0">
+                <a:solidFill>
+                  <a:srgbClr val="0F172A"/>
+                </a:solidFill>
+                <a:latin typeface="Microsoft YaHei"/>
+              </a:defRPr>
+            </a:pPr>
+            <a:r>
+              <a:rPr sz="1200" b="0">
+                <a:solidFill>
+                  <a:srgbClr val="0F172A"/>
+                </a:solidFill>
+                <a:latin typeface="Microsoft YaHei"/>
+              </a:rPr>
+              <a:t>ELLMob ICLR'26; CausalMob KDD'25</a:t>
+            </a:r>
+          </a:p>
+        </p:txBody>
+      </p:sp>
+      <p:sp>
+        <p:nvSpPr>
+          <p:cNvPr id="22" name="Rectangle 21"/>
+          <p:cNvSpPr/>
+          <p:nvPr/>
+        </p:nvSpPr>
+        <p:spPr>
+          <a:xfrm>
+            <a:off x="713232" y="3017520"/>
+            <a:ext cx="4023360" cy="420624"/>
+          </a:xfrm>
+          <a:prstGeom prst="rect">
+            <a:avLst/>
+          </a:prstGeom>
+          <a:solidFill>
+            <a:srgbClr val="F1F5F9"/>
+          </a:solidFill>
+          <a:ln w="9525">
+            <a:solidFill>
+              <a:srgbClr val="CBD5E1"/>
+            </a:solidFill>
+          </a:ln>
+        </p:spPr>
+        <p:style>
+          <a:lnRef idx="1">
+            <a:schemeClr val="accent1"/>
+          </a:lnRef>
+          <a:fillRef idx="3">
+            <a:schemeClr val="accent1"/>
+          </a:fillRef>
+          <a:effectRef idx="2">
+            <a:schemeClr val="accent1"/>
+          </a:effectRef>
+          <a:fontRef idx="minor">
+            <a:schemeClr val="lt1"/>
+          </a:fontRef>
+        </p:style>
+        <p:txBody>
+          <a:bodyPr rtlCol="0" anchor="ctr"/>
+          <a:lstStyle/>
+          <a:p>
+            <a:pPr algn="ctr"/>
+          </a:p>
+        </p:txBody>
+      </p:sp>
+      <p:sp>
+        <p:nvSpPr>
+          <p:cNvPr id="23" name="TextBox 22"/>
+          <p:cNvSpPr txBox="1"/>
+          <p:nvPr/>
+        </p:nvSpPr>
+        <p:spPr>
+          <a:xfrm>
+            <a:off x="768096" y="3081527"/>
+            <a:ext cx="3913632" cy="292608"/>
+          </a:xfrm>
+          <a:prstGeom prst="rect">
+            <a:avLst/>
+          </a:prstGeom>
+          <a:noFill/>
+        </p:spPr>
+        <p:txBody>
+          <a:bodyPr wrap="square" lIns="27432" rIns="27432" tIns="9144" bIns="9144" anchor="t">
+            <a:spAutoFit/>
+          </a:bodyPr>
+          <a:lstStyle/>
+          <a:p>
+            <a:pPr algn="l">
+              <a:defRPr sz="1200" b="1">
+                <a:solidFill>
+                  <a:srgbClr val="0F172A"/>
+                </a:solidFill>
+                <a:latin typeface="Microsoft YaHei"/>
+              </a:defRPr>
+            </a:pPr>
+            <a:r>
+              <a:rPr sz="1200" b="1">
+                <a:solidFill>
+                  <a:srgbClr val="0F172A"/>
+                </a:solidFill>
+                <a:latin typeface="Microsoft YaHei"/>
+              </a:rPr>
+              <a:t>Zero-shot / efficient LLM mobility</a:t>
+            </a:r>
+          </a:p>
+        </p:txBody>
+      </p:sp>
+      <p:sp>
+        <p:nvSpPr>
+          <p:cNvPr id="24" name="Rectangle 23"/>
+          <p:cNvSpPr/>
+          <p:nvPr/>
+        </p:nvSpPr>
+        <p:spPr>
+          <a:xfrm>
+            <a:off x="4736592" y="3017520"/>
+            <a:ext cx="6035040" cy="420624"/>
+          </a:xfrm>
+          <a:prstGeom prst="rect">
+            <a:avLst/>
+          </a:prstGeom>
+          <a:solidFill>
+            <a:srgbClr val="F1F5F9"/>
+          </a:solidFill>
+          <a:ln w="9525">
+            <a:solidFill>
+              <a:srgbClr val="CBD5E1"/>
+            </a:solidFill>
+          </a:ln>
+        </p:spPr>
+        <p:style>
+          <a:lnRef idx="1">
+            <a:schemeClr val="accent1"/>
+          </a:lnRef>
+          <a:fillRef idx="3">
+            <a:schemeClr val="accent1"/>
+          </a:fillRef>
+          <a:effectRef idx="2">
+            <a:schemeClr val="accent1"/>
+          </a:effectRef>
+          <a:fontRef idx="minor">
+            <a:schemeClr val="lt1"/>
+          </a:fontRef>
+        </p:style>
+        <p:txBody>
+          <a:bodyPr rtlCol="0" anchor="ctr"/>
+          <a:lstStyle/>
+          <a:p>
+            <a:pPr algn="ctr"/>
+          </a:p>
+        </p:txBody>
+      </p:sp>
+      <p:sp>
+        <p:nvSpPr>
+          <p:cNvPr id="25" name="TextBox 24"/>
+          <p:cNvSpPr txBox="1"/>
+          <p:nvPr/>
+        </p:nvSpPr>
+        <p:spPr>
+          <a:xfrm>
+            <a:off x="4791456" y="3081527"/>
+            <a:ext cx="5925312" cy="292608"/>
+          </a:xfrm>
+          <a:prstGeom prst="rect">
+            <a:avLst/>
+          </a:prstGeom>
+          <a:noFill/>
+        </p:spPr>
+        <p:txBody>
+          <a:bodyPr wrap="square" lIns="27432" rIns="27432" tIns="9144" bIns="9144" anchor="t">
+            <a:spAutoFit/>
+          </a:bodyPr>
+          <a:lstStyle/>
+          <a:p>
+            <a:pPr algn="l">
+              <a:defRPr sz="1200" b="0">
+                <a:solidFill>
+                  <a:srgbClr val="0F172A"/>
+                </a:solidFill>
+                <a:latin typeface="Microsoft YaHei"/>
+              </a:defRPr>
+            </a:pPr>
+            <a:r>
+              <a:rPr sz="1200" b="0">
+                <a:solidFill>
+                  <a:srgbClr val="0F172A"/>
+                </a:solidFill>
+                <a:latin typeface="Microsoft YaHei"/>
+              </a:rPr>
+              <a:t>AgentMove NAACL'25; ELP-Mob GIS'25</a:t>
+            </a:r>
+          </a:p>
+        </p:txBody>
+      </p:sp>
+      <p:sp>
+        <p:nvSpPr>
+          <p:cNvPr id="26" name="Rectangle 25"/>
+          <p:cNvSpPr/>
+          <p:nvPr/>
+        </p:nvSpPr>
+        <p:spPr>
+          <a:xfrm>
+            <a:off x="713232" y="3438144"/>
+            <a:ext cx="4023360" cy="420624"/>
+          </a:xfrm>
+          <a:prstGeom prst="rect">
+            <a:avLst/>
+          </a:prstGeom>
+          <a:solidFill>
+            <a:srgbClr val="F8FAFC"/>
+          </a:solidFill>
+          <a:ln w="9525">
+            <a:solidFill>
+              <a:srgbClr val="CBD5E1"/>
+            </a:solidFill>
+          </a:ln>
+        </p:spPr>
+        <p:style>
+          <a:lnRef idx="1">
+            <a:schemeClr val="accent1"/>
+          </a:lnRef>
+          <a:fillRef idx="3">
+            <a:schemeClr val="accent1"/>
+          </a:fillRef>
+          <a:effectRef idx="2">
+            <a:schemeClr val="accent1"/>
+          </a:effectRef>
+          <a:fontRef idx="minor">
+            <a:schemeClr val="lt1"/>
+          </a:fontRef>
+        </p:style>
+        <p:txBody>
+          <a:bodyPr rtlCol="0" anchor="ctr"/>
+          <a:lstStyle/>
+          <a:p>
+            <a:pPr algn="ctr"/>
+          </a:p>
+        </p:txBody>
+      </p:sp>
+      <p:sp>
+        <p:nvSpPr>
+          <p:cNvPr id="27" name="TextBox 26"/>
+          <p:cNvSpPr txBox="1"/>
+          <p:nvPr/>
+        </p:nvSpPr>
+        <p:spPr>
+          <a:xfrm>
+            <a:off x="768096" y="3502151"/>
+            <a:ext cx="3913632" cy="292608"/>
+          </a:xfrm>
+          <a:prstGeom prst="rect">
+            <a:avLst/>
+          </a:prstGeom>
+          <a:noFill/>
+        </p:spPr>
+        <p:txBody>
+          <a:bodyPr wrap="square" lIns="27432" rIns="27432" tIns="9144" bIns="9144" anchor="t">
+            <a:spAutoFit/>
+          </a:bodyPr>
+          <a:lstStyle/>
+          <a:p>
+            <a:pPr algn="l">
+              <a:defRPr sz="1200" b="1">
+                <a:solidFill>
+                  <a:srgbClr val="0F172A"/>
+                </a:solidFill>
+                <a:latin typeface="Microsoft YaHei"/>
+              </a:defRPr>
+            </a:pPr>
+            <a:r>
+              <a:rPr sz="1200" b="1">
+                <a:solidFill>
+                  <a:srgbClr val="0F172A"/>
+                </a:solidFill>
+                <a:latin typeface="Microsoft YaHei"/>
+              </a:rPr>
+              <a:t>Foundation model direction</a:t>
+            </a:r>
+          </a:p>
+        </p:txBody>
+      </p:sp>
+      <p:sp>
+        <p:nvSpPr>
+          <p:cNvPr id="28" name="Rectangle 27"/>
+          <p:cNvSpPr/>
+          <p:nvPr/>
+        </p:nvSpPr>
+        <p:spPr>
+          <a:xfrm>
+            <a:off x="4736592" y="3438144"/>
+            <a:ext cx="6035040" cy="420624"/>
+          </a:xfrm>
+          <a:prstGeom prst="rect">
+            <a:avLst/>
+          </a:prstGeom>
+          <a:solidFill>
+            <a:srgbClr val="F8FAFC"/>
+          </a:solidFill>
+          <a:ln w="9525">
+            <a:solidFill>
+              <a:srgbClr val="CBD5E1"/>
+            </a:solidFill>
+          </a:ln>
+        </p:spPr>
+        <p:style>
+          <a:lnRef idx="1">
+            <a:schemeClr val="accent1"/>
+          </a:lnRef>
+          <a:fillRef idx="3">
+            <a:schemeClr val="accent1"/>
+          </a:fillRef>
+          <a:effectRef idx="2">
+            <a:schemeClr val="accent1"/>
+          </a:effectRef>
+          <a:fontRef idx="minor">
+            <a:schemeClr val="lt1"/>
+          </a:fontRef>
+        </p:style>
+        <p:txBody>
+          <a:bodyPr rtlCol="0" anchor="ctr"/>
+          <a:lstStyle/>
+          <a:p>
+            <a:pPr algn="ctr"/>
+          </a:p>
+        </p:txBody>
+      </p:sp>
+      <p:sp>
+        <p:nvSpPr>
+          <p:cNvPr id="29" name="TextBox 28"/>
+          <p:cNvSpPr txBox="1"/>
+          <p:nvPr/>
+        </p:nvSpPr>
+        <p:spPr>
+          <a:xfrm>
+            <a:off x="4791456" y="3502151"/>
+            <a:ext cx="5925312" cy="292608"/>
+          </a:xfrm>
+          <a:prstGeom prst="rect">
+            <a:avLst/>
+          </a:prstGeom>
+          <a:noFill/>
+        </p:spPr>
+        <p:txBody>
+          <a:bodyPr wrap="square" lIns="27432" rIns="27432" tIns="9144" bIns="9144" anchor="t">
+            <a:spAutoFit/>
+          </a:bodyPr>
+          <a:lstStyle/>
+          <a:p>
+            <a:pPr algn="l">
+              <a:defRPr sz="1200" b="0">
+                <a:solidFill>
+                  <a:srgbClr val="0F172A"/>
+                </a:solidFill>
+                <a:latin typeface="Microsoft YaHei"/>
+              </a:defRPr>
+            </a:pPr>
+            <a:r>
+              <a:rPr sz="1200" b="0">
+                <a:solidFill>
+                  <a:srgbClr val="0F172A"/>
+                </a:solidFill>
+                <a:latin typeface="Microsoft YaHei"/>
+              </a:rPr>
+              <a:t>UniMob KDD'25; STFM survey'25</a:t>
+            </a:r>
+          </a:p>
+        </p:txBody>
+      </p:sp>
+      <p:sp>
+        <p:nvSpPr>
+          <p:cNvPr id="30" name="Rectangle 29"/>
+          <p:cNvSpPr/>
+          <p:nvPr/>
+        </p:nvSpPr>
+        <p:spPr>
+          <a:xfrm>
+            <a:off x="713232" y="3858768"/>
+            <a:ext cx="4023360" cy="420624"/>
+          </a:xfrm>
+          <a:prstGeom prst="rect">
+            <a:avLst/>
+          </a:prstGeom>
+          <a:solidFill>
+            <a:srgbClr val="F1F5F9"/>
+          </a:solidFill>
+          <a:ln w="9525">
+            <a:solidFill>
+              <a:srgbClr val="CBD5E1"/>
+            </a:solidFill>
+          </a:ln>
+        </p:spPr>
+        <p:style>
+          <a:lnRef idx="1">
+            <a:schemeClr val="accent1"/>
+          </a:lnRef>
+          <a:fillRef idx="3">
+            <a:schemeClr val="accent1"/>
+          </a:fillRef>
+          <a:effectRef idx="2">
+            <a:schemeClr val="accent1"/>
+          </a:effectRef>
+          <a:fontRef idx="minor">
+            <a:schemeClr val="lt1"/>
+          </a:fontRef>
+        </p:style>
+        <p:txBody>
+          <a:bodyPr rtlCol="0" anchor="ctr"/>
+          <a:lstStyle/>
+          <a:p>
+            <a:pPr algn="ctr"/>
+          </a:p>
+        </p:txBody>
+      </p:sp>
+      <p:sp>
+        <p:nvSpPr>
+          <p:cNvPr id="31" name="TextBox 30"/>
+          <p:cNvSpPr txBox="1"/>
+          <p:nvPr/>
+        </p:nvSpPr>
+        <p:spPr>
+          <a:xfrm>
+            <a:off x="768096" y="3922776"/>
+            <a:ext cx="3913632" cy="292608"/>
+          </a:xfrm>
+          <a:prstGeom prst="rect">
+            <a:avLst/>
+          </a:prstGeom>
+          <a:noFill/>
+        </p:spPr>
+        <p:txBody>
+          <a:bodyPr wrap="square" lIns="27432" rIns="27432" tIns="9144" bIns="9144" anchor="t">
+            <a:spAutoFit/>
+          </a:bodyPr>
+          <a:lstStyle/>
+          <a:p>
+            <a:pPr algn="l">
+              <a:defRPr sz="1200" b="1">
+                <a:solidFill>
+                  <a:srgbClr val="0F172A"/>
+                </a:solidFill>
+                <a:latin typeface="Microsoft YaHei"/>
+              </a:defRPr>
+            </a:pPr>
+            <a:r>
+              <a:rPr sz="1200" b="1">
+                <a:solidFill>
+                  <a:srgbClr val="0F172A"/>
+                </a:solidFill>
+                <a:latin typeface="Microsoft YaHei"/>
+              </a:rPr>
+              <a:t>Our unit</a:t>
+            </a:r>
+          </a:p>
+        </p:txBody>
+      </p:sp>
+      <p:sp>
+        <p:nvSpPr>
+          <p:cNvPr id="32" name="Rectangle 31"/>
+          <p:cNvSpPr/>
+          <p:nvPr/>
+        </p:nvSpPr>
+        <p:spPr>
+          <a:xfrm>
+            <a:off x="4736592" y="3858768"/>
+            <a:ext cx="6035040" cy="420624"/>
+          </a:xfrm>
+          <a:prstGeom prst="rect">
+            <a:avLst/>
+          </a:prstGeom>
+          <a:solidFill>
+            <a:srgbClr val="F1F5F9"/>
+          </a:solidFill>
+          <a:ln w="9525">
+            <a:solidFill>
+              <a:srgbClr val="CBD5E1"/>
+            </a:solidFill>
+          </a:ln>
+        </p:spPr>
+        <p:style>
+          <a:lnRef idx="1">
+            <a:schemeClr val="accent1"/>
+          </a:lnRef>
+          <a:fillRef idx="3">
+            <a:schemeClr val="accent1"/>
+          </a:fillRef>
+          <a:effectRef idx="2">
+            <a:schemeClr val="accent1"/>
+          </a:effectRef>
+          <a:fontRef idx="minor">
+            <a:schemeClr val="lt1"/>
+          </a:fontRef>
+        </p:style>
+        <p:txBody>
+          <a:bodyPr rtlCol="0" anchor="ctr"/>
+          <a:lstStyle/>
+          <a:p>
+            <a:pPr algn="ctr"/>
+          </a:p>
+        </p:txBody>
+      </p:sp>
+      <p:sp>
+        <p:nvSpPr>
+          <p:cNvPr id="33" name="TextBox 32"/>
+          <p:cNvSpPr txBox="1"/>
+          <p:nvPr/>
+        </p:nvSpPr>
+        <p:spPr>
+          <a:xfrm>
+            <a:off x="4791456" y="3922776"/>
+            <a:ext cx="5925312" cy="292608"/>
+          </a:xfrm>
+          <a:prstGeom prst="rect">
+            <a:avLst/>
+          </a:prstGeom>
+          <a:noFill/>
+        </p:spPr>
+        <p:txBody>
+          <a:bodyPr wrap="square" lIns="27432" rIns="27432" tIns="9144" bIns="9144" anchor="t">
+            <a:spAutoFit/>
+          </a:bodyPr>
+          <a:lstStyle/>
+          <a:p>
+            <a:pPr algn="l">
+              <a:defRPr sz="1200" b="0">
+                <a:solidFill>
+                  <a:srgbClr val="0F172A"/>
+                </a:solidFill>
+                <a:latin typeface="Microsoft YaHei"/>
+              </a:defRPr>
+            </a:pPr>
+            <a:r>
+              <a:rPr sz="1200" b="0">
+                <a:solidFill>
+                  <a:srgbClr val="0F172A"/>
+                </a:solidFill>
+                <a:latin typeface="Microsoft YaHei"/>
+              </a:rPr>
+              <a:t>Household survey record, not trajectory or road node</a:t>
+            </a:r>
+          </a:p>
+        </p:txBody>
+      </p:sp>
+      <p:sp>
+        <p:nvSpPr>
+          <p:cNvPr id="34" name="Rounded Rectangle 33"/>
+          <p:cNvSpPr/>
+          <p:nvPr/>
+        </p:nvSpPr>
+        <p:spPr>
+          <a:xfrm>
+            <a:off x="749808" y="5074920"/>
+            <a:ext cx="10012680" cy="1005840"/>
+          </a:xfrm>
+          <a:prstGeom prst="roundRect">
+            <a:avLst/>
+          </a:prstGeom>
+          <a:solidFill>
+            <a:srgbClr val="F1F5F9"/>
+          </a:solidFill>
+          <a:ln w="9525">
+            <a:solidFill>
+              <a:srgbClr val="CBD5E1"/>
+            </a:solidFill>
+          </a:ln>
+        </p:spPr>
+        <p:style>
+          <a:lnRef idx="1">
+            <a:schemeClr val="accent1"/>
+          </a:lnRef>
+          <a:fillRef idx="3">
+            <a:schemeClr val="accent1"/>
+          </a:fillRef>
+          <a:effectRef idx="2">
+            <a:schemeClr val="accent1"/>
+          </a:effectRef>
+          <a:fontRef idx="minor">
+            <a:schemeClr val="lt1"/>
+          </a:fontRef>
+        </p:style>
+        <p:txBody>
+          <a:bodyPr rtlCol="0" anchor="ctr"/>
+          <a:lstStyle/>
+          <a:p>
+            <a:pPr algn="ctr"/>
+          </a:p>
+        </p:txBody>
+      </p:sp>
+      <p:sp>
+        <p:nvSpPr>
+          <p:cNvPr id="35" name="Rectangle 34"/>
+          <p:cNvSpPr/>
+          <p:nvPr/>
+        </p:nvSpPr>
+        <p:spPr>
+          <a:xfrm>
+            <a:off x="749808" y="5074920"/>
+            <a:ext cx="50292" cy="1005840"/>
+          </a:xfrm>
+          <a:prstGeom prst="rect">
+            <a:avLst/>
+          </a:prstGeom>
+          <a:solidFill>
+            <a:srgbClr val="2563EB"/>
+          </a:solidFill>
+          <a:ln>
+            <a:noFill/>
+          </a:ln>
+        </p:spPr>
+        <p:style>
+          <a:lnRef idx="1">
+            <a:schemeClr val="accent1"/>
+          </a:lnRef>
+          <a:fillRef idx="3">
+            <a:schemeClr val="accent1"/>
+          </a:fillRef>
+          <a:effectRef idx="2">
+            <a:schemeClr val="accent1"/>
+          </a:effectRef>
+          <a:fontRef idx="minor">
+            <a:schemeClr val="lt1"/>
+          </a:fontRef>
+        </p:style>
+        <p:txBody>
+          <a:bodyPr rtlCol="0" anchor="ctr"/>
+          <a:lstStyle/>
+          <a:p>
+            <a:pPr algn="ctr"/>
+          </a:p>
+        </p:txBody>
+      </p:sp>
+      <p:sp>
+        <p:nvSpPr>
+          <p:cNvPr id="36" name="TextBox 35"/>
+          <p:cNvSpPr txBox="1"/>
+          <p:nvPr/>
+        </p:nvSpPr>
+        <p:spPr>
+          <a:xfrm>
+            <a:off x="914400" y="5166359"/>
+            <a:ext cx="9720072" cy="362102"/>
+          </a:xfrm>
+          <a:prstGeom prst="rect">
+            <a:avLst/>
+          </a:prstGeom>
+          <a:noFill/>
+        </p:spPr>
+        <p:txBody>
+          <a:bodyPr wrap="square" lIns="27432" rIns="27432" tIns="9144" bIns="9144" anchor="t">
+            <a:spAutoFit/>
+          </a:bodyPr>
+          <a:lstStyle/>
+          <a:p>
+            <a:pPr algn="l">
+              <a:defRPr sz="1200" b="1">
+                <a:solidFill>
+                  <a:srgbClr val="0F172A"/>
+                </a:solidFill>
+                <a:latin typeface="Microsoft YaHei"/>
+              </a:defRPr>
+            </a:pPr>
+            <a:r>
+              <a:rPr sz="1200" b="1">
+                <a:solidFill>
+                  <a:srgbClr val="0F172A"/>
+                </a:solidFill>
+                <a:latin typeface="Microsoft YaHei"/>
+              </a:rPr>
+              <a:t>答法：我们借用了 event-generalization 思路，但不声称训练 universal mobility foundation model。LLM 是 structured event-prior generator，数值需求预测仍由 NHTS 历史标签锚定。</a:t>
+            </a:r>
+          </a:p>
+        </p:txBody>
+      </p:sp>
+      <p:sp>
+        <p:nvSpPr>
+          <p:cNvPr id="37" name="TextBox 36"/>
+          <p:cNvSpPr txBox="1"/>
+          <p:nvPr/>
+        </p:nvSpPr>
+        <p:spPr>
+          <a:xfrm>
+            <a:off x="914400" y="5592470"/>
+            <a:ext cx="9720072" cy="415137"/>
+          </a:xfrm>
+          <a:prstGeom prst="rect">
+            <a:avLst/>
+          </a:prstGeom>
+          <a:noFill/>
+        </p:spPr>
+        <p:txBody>
+          <a:bodyPr wrap="square" lIns="27432" rIns="27432" tIns="9144" bIns="9144" anchor="t">
+            <a:spAutoFit/>
+          </a:bodyPr>
+          <a:lstStyle/>
+          <a:p>
+            <a:pPr algn="l">
+              <a:defRPr sz="1200" b="0">
+                <a:solidFill>
+                  <a:srgbClr val="64748B"/>
+                </a:solidFill>
+                <a:latin typeface="Microsoft YaHei"/>
+              </a:defRPr>
+            </a:pPr>
+          </a:p>
+        </p:txBody>
+      </p:sp>
+    </p:spTree>
+  </p:cSld>
+  <p:clrMapOvr>
+    <a:masterClrMapping/>
+  </p:clrMapOvr>
+</p:sld>
+</file>
+
+<file path=ppt/slides/slide28.xml><?xml version="1.0" encoding="utf-8"?>
+<p:sld xmlns:a="http://schemas.openxmlformats.org/drawingml/2006/main" xmlns:p="http://schemas.openxmlformats.org/presentationml/2006/main" xmlns:r="http://schemas.openxmlformats.org/officeDocument/2006/relationships">
+  <p:cSld>
+    <p:bg>
+      <p:bgPr>
+        <a:solidFill>
+          <a:srgbClr val="FFFFFF"/>
+        </a:solidFill>
+        <a:effectLst/>
+      </p:bgPr>
+    </p:bg>
+    <p:spTree>
+      <p:nvGrpSpPr>
+        <p:cNvPr id="1" name=""/>
+        <p:cNvGrpSpPr/>
+        <p:nvPr/>
+      </p:nvGrpSpPr>
+      <p:grpSpPr/>
+      <p:sp>
+        <p:nvSpPr>
+          <p:cNvPr id="2" name="TextBox 1"/>
+          <p:cNvSpPr txBox="1"/>
+          <p:nvPr/>
+        </p:nvSpPr>
+        <p:spPr>
+          <a:xfrm>
+            <a:off x="384048" y="109728"/>
+            <a:ext cx="4480560" cy="164592"/>
+          </a:xfrm>
+          <a:prstGeom prst="rect">
+            <a:avLst/>
+          </a:prstGeom>
+          <a:noFill/>
+        </p:spPr>
+        <p:txBody>
+          <a:bodyPr wrap="square" lIns="27432" rIns="27432" tIns="9144" bIns="9144" anchor="ctr">
+            <a:spAutoFit/>
+          </a:bodyPr>
+          <a:lstStyle/>
+          <a:p>
+            <a:pPr algn="l">
+              <a:defRPr sz="750" b="1">
+                <a:solidFill>
+                  <a:srgbClr val="64748B"/>
+                </a:solidFill>
+                <a:latin typeface="Microsoft YaHei"/>
+              </a:defRPr>
+            </a:pPr>
+            <a:r>
+              <a:rPr sz="750" b="1">
+                <a:solidFill>
+                  <a:srgbClr val="64748B"/>
+                </a:solidFill>
+                <a:latin typeface="Microsoft YaHei"/>
+              </a:rPr>
+              <a:t>Mobility Inequality and Sustainable Development</a:t>
+            </a:r>
+          </a:p>
+        </p:txBody>
+      </p:sp>
+      <p:sp>
+        <p:nvSpPr>
+          <p:cNvPr id="3" name="TextBox 2"/>
+          <p:cNvSpPr txBox="1"/>
+          <p:nvPr/>
+        </p:nvSpPr>
+        <p:spPr>
+          <a:xfrm>
+            <a:off x="384048" y="347472"/>
+            <a:ext cx="777240" cy="292608"/>
+          </a:xfrm>
+          <a:prstGeom prst="rect">
+            <a:avLst/>
+          </a:prstGeom>
+          <a:noFill/>
+        </p:spPr>
+        <p:txBody>
+          <a:bodyPr wrap="square" lIns="27432" rIns="27432" tIns="9144" bIns="9144" anchor="ctr">
+            <a:spAutoFit/>
+          </a:bodyPr>
+          <a:lstStyle/>
+          <a:p>
+            <a:pPr algn="l">
+              <a:defRPr sz="1300" b="1">
+                <a:solidFill>
+                  <a:srgbClr val="EA580C"/>
+                </a:solidFill>
+                <a:latin typeface="Microsoft YaHei"/>
+              </a:defRPr>
+            </a:pPr>
+            <a:r>
+              <a:rPr sz="1300" b="1">
+                <a:solidFill>
+                  <a:srgbClr val="EA580C"/>
+                </a:solidFill>
+                <a:latin typeface="Microsoft YaHei"/>
+              </a:rPr>
+              <a:t>BACKUP</a:t>
+            </a:r>
+          </a:p>
+        </p:txBody>
+      </p:sp>
+      <p:sp>
+        <p:nvSpPr>
+          <p:cNvPr id="4" name="TextBox 3"/>
+          <p:cNvSpPr txBox="1"/>
+          <p:nvPr/>
+        </p:nvSpPr>
+        <p:spPr>
+          <a:xfrm>
+            <a:off x="1234440" y="246888"/>
+            <a:ext cx="8412480" cy="329184"/>
+          </a:xfrm>
+          <a:prstGeom prst="rect">
+            <a:avLst/>
+          </a:prstGeom>
+          <a:noFill/>
+        </p:spPr>
+        <p:txBody>
+          <a:bodyPr wrap="square" lIns="27432" rIns="27432" tIns="9144" bIns="9144" anchor="ctr">
+            <a:spAutoFit/>
+          </a:bodyPr>
+          <a:lstStyle/>
+          <a:p>
+            <a:pPr algn="l">
+              <a:defRPr sz="1700" b="1">
+                <a:solidFill>
+                  <a:srgbClr val="0F172A"/>
+                </a:solidFill>
+                <a:latin typeface="Microsoft YaHei"/>
+              </a:defRPr>
+            </a:pPr>
+            <a:r>
+              <a:rPr sz="1700" b="1">
+                <a:solidFill>
+                  <a:srgbClr val="0F172A"/>
+                </a:solidFill>
+                <a:latin typeface="Microsoft YaHei"/>
+              </a:rPr>
+              <a:t>Mode / purpose 是否已经解决？</a:t>
+            </a:r>
+          </a:p>
+        </p:txBody>
+      </p:sp>
+      <p:sp>
+        <p:nvSpPr>
+          <p:cNvPr id="5" name="TextBox 4"/>
+          <p:cNvSpPr txBox="1"/>
+          <p:nvPr/>
+        </p:nvSpPr>
+        <p:spPr>
+          <a:xfrm>
+            <a:off x="1252728" y="585216"/>
+            <a:ext cx="8869680" cy="228600"/>
+          </a:xfrm>
+          <a:prstGeom prst="rect">
+            <a:avLst/>
+          </a:prstGeom>
+          <a:noFill/>
+        </p:spPr>
+        <p:txBody>
+          <a:bodyPr wrap="square" lIns="27432" rIns="27432" tIns="9144" bIns="9144" anchor="ctr">
+            <a:spAutoFit/>
+          </a:bodyPr>
+          <a:lstStyle/>
+          <a:p>
+            <a:pPr algn="l">
+              <a:defRPr sz="850" b="0">
+                <a:solidFill>
+                  <a:srgbClr val="64748B"/>
+                </a:solidFill>
+                <a:latin typeface="Microsoft YaHei"/>
+              </a:defRPr>
+            </a:pPr>
+            <a:r>
+              <a:rPr sz="850" b="0">
+                <a:solidFill>
+                  <a:srgbClr val="64748B"/>
+                </a:solidFill>
+                <a:latin typeface="Microsoft YaHei"/>
+              </a:rPr>
+              <a:t>Are mode and purpose choice solved?</a:t>
+            </a:r>
+          </a:p>
+        </p:txBody>
+      </p:sp>
+      <p:pic>
+        <p:nvPicPr>
+          <p:cNvPr id="6" name="Picture 5" descr="image.png"/>
+          <p:cNvPicPr>
+            <a:picLocks noChangeAspect="1"/>
+          </p:cNvPicPr>
+          <p:nvPr/>
+        </p:nvPicPr>
+        <p:blipFill>
+          <a:blip r:embed="rId2"/>
+          <a:stretch>
+            <a:fillRect/>
+          </a:stretch>
+        </p:blipFill>
+        <p:spPr>
+          <a:xfrm>
+            <a:off x="11018520" y="201168"/>
+            <a:ext cx="713232" cy="502730"/>
+          </a:xfrm>
+          <a:prstGeom prst="rect">
+            <a:avLst/>
+          </a:prstGeom>
+        </p:spPr>
+      </p:pic>
+      <p:sp>
+        <p:nvSpPr>
+          <p:cNvPr id="7" name="Rectangle 6"/>
+          <p:cNvSpPr/>
+          <p:nvPr/>
+        </p:nvSpPr>
+        <p:spPr>
+          <a:xfrm>
+            <a:off x="384048" y="877824"/>
+            <a:ext cx="11201400" cy="10972"/>
+          </a:xfrm>
+          <a:prstGeom prst="rect">
+            <a:avLst/>
+          </a:prstGeom>
+          <a:solidFill>
+            <a:srgbClr val="CBD5E1"/>
+          </a:solidFill>
+          <a:ln>
+            <a:noFill/>
+          </a:ln>
+        </p:spPr>
+        <p:style>
+          <a:lnRef idx="1">
+            <a:schemeClr val="accent1"/>
+          </a:lnRef>
+          <a:fillRef idx="3">
+            <a:schemeClr val="accent1"/>
+          </a:fillRef>
+          <a:effectRef idx="2">
+            <a:schemeClr val="accent1"/>
+          </a:effectRef>
+          <a:fontRef idx="minor">
+            <a:schemeClr val="lt1"/>
+          </a:fontRef>
+        </p:style>
+        <p:txBody>
+          <a:bodyPr rtlCol="0" anchor="ctr"/>
+          <a:lstStyle/>
+          <a:p>
+            <a:pPr algn="ctr"/>
+          </a:p>
+        </p:txBody>
+      </p:sp>
+      <p:sp>
+        <p:nvSpPr>
+          <p:cNvPr id="8" name="Rectangle 7"/>
+          <p:cNvSpPr/>
+          <p:nvPr/>
+        </p:nvSpPr>
+        <p:spPr>
+          <a:xfrm>
+            <a:off x="384048" y="6428232"/>
+            <a:ext cx="11201400" cy="10972"/>
+          </a:xfrm>
+          <a:prstGeom prst="rect">
+            <a:avLst/>
+          </a:prstGeom>
+          <a:solidFill>
+            <a:srgbClr val="CBD5E1"/>
+          </a:solidFill>
+          <a:ln>
+            <a:noFill/>
+          </a:ln>
+        </p:spPr>
+        <p:style>
+          <a:lnRef idx="1">
+            <a:schemeClr val="accent1"/>
+          </a:lnRef>
+          <a:fillRef idx="3">
+            <a:schemeClr val="accent1"/>
+          </a:fillRef>
+          <a:effectRef idx="2">
+            <a:schemeClr val="accent1"/>
+          </a:effectRef>
+          <a:fontRef idx="minor">
+            <a:schemeClr val="lt1"/>
+          </a:fontRef>
+        </p:style>
+        <p:txBody>
+          <a:bodyPr rtlCol="0" anchor="ctr"/>
+          <a:lstStyle/>
+          <a:p>
+            <a:pPr algn="ctr"/>
+          </a:p>
+        </p:txBody>
+      </p:sp>
+      <p:sp>
+        <p:nvSpPr>
+          <p:cNvPr id="9" name="TextBox 8"/>
+          <p:cNvSpPr txBox="1"/>
+          <p:nvPr/>
+        </p:nvSpPr>
+        <p:spPr>
+          <a:xfrm>
+            <a:off x="384048" y="6473952"/>
+            <a:ext cx="5212080" cy="164592"/>
+          </a:xfrm>
+          <a:prstGeom prst="rect">
+            <a:avLst/>
+          </a:prstGeom>
+          <a:noFill/>
+        </p:spPr>
+        <p:txBody>
+          <a:bodyPr wrap="square" lIns="27432" rIns="27432" tIns="9144" bIns="9144" anchor="ctr">
+            <a:spAutoFit/>
+          </a:bodyPr>
+          <a:lstStyle/>
+          <a:p>
+            <a:pPr algn="l">
+              <a:defRPr sz="750" b="0">
+                <a:solidFill>
+                  <a:srgbClr val="64748B"/>
+                </a:solidFill>
+                <a:latin typeface="Microsoft YaHei"/>
+              </a:defRPr>
+            </a:pPr>
+            <a:r>
+              <a:rPr sz="750" b="0">
+                <a:solidFill>
+                  <a:srgbClr val="64748B"/>
+                </a:solidFill>
+                <a:latin typeface="Microsoft YaHei"/>
+              </a:rPr>
+              <a:t>Appendix: reviewer and instructor Q&amp;A</a:t>
+            </a:r>
+          </a:p>
+        </p:txBody>
+      </p:sp>
+      <p:sp>
+        <p:nvSpPr>
+          <p:cNvPr id="10" name="TextBox 9"/>
+          <p:cNvSpPr txBox="1"/>
+          <p:nvPr/>
+        </p:nvSpPr>
+        <p:spPr>
+          <a:xfrm>
+            <a:off x="10149840" y="6473952"/>
+            <a:ext cx="1417320" cy="164592"/>
+          </a:xfrm>
+          <a:prstGeom prst="rect">
+            <a:avLst/>
+          </a:prstGeom>
+          <a:noFill/>
+        </p:spPr>
+        <p:txBody>
+          <a:bodyPr wrap="square" lIns="27432" rIns="27432" tIns="9144" bIns="9144" anchor="ctr">
+            <a:spAutoFit/>
+          </a:bodyPr>
+          <a:lstStyle/>
+          <a:p>
+            <a:pPr algn="r">
+              <a:defRPr sz="750" b="1">
+                <a:solidFill>
+                  <a:srgbClr val="64748B"/>
+                </a:solidFill>
+                <a:latin typeface="Microsoft YaHei"/>
+              </a:defRPr>
+            </a:pPr>
+            <a:r>
+              <a:rPr sz="750" b="1">
+                <a:solidFill>
+                  <a:srgbClr val="64748B"/>
+                </a:solidFill>
+                <a:latin typeface="Microsoft YaHei"/>
+              </a:rPr>
+              <a:t>B5</a:t>
+            </a:r>
+          </a:p>
+        </p:txBody>
+      </p:sp>
+      <p:sp>
+        <p:nvSpPr>
+          <p:cNvPr id="11" name="Rounded Rectangle 10"/>
+          <p:cNvSpPr/>
+          <p:nvPr/>
+        </p:nvSpPr>
+        <p:spPr>
+          <a:xfrm>
+            <a:off x="658368" y="1115568"/>
+            <a:ext cx="10287000" cy="749808"/>
+          </a:xfrm>
+          <a:prstGeom prst="roundRect">
+            <a:avLst/>
+          </a:prstGeom>
+          <a:solidFill>
+            <a:srgbClr val="F1F5F9"/>
+          </a:solidFill>
+          <a:ln w="9525">
+            <a:solidFill>
+              <a:srgbClr val="CBD5E1"/>
+            </a:solidFill>
+          </a:ln>
+        </p:spPr>
+        <p:style>
+          <a:lnRef idx="1">
+            <a:schemeClr val="accent1"/>
+          </a:lnRef>
+          <a:fillRef idx="3">
+            <a:schemeClr val="accent1"/>
+          </a:fillRef>
+          <a:effectRef idx="2">
+            <a:schemeClr val="accent1"/>
+          </a:effectRef>
+          <a:fontRef idx="minor">
+            <a:schemeClr val="lt1"/>
+          </a:fontRef>
+        </p:style>
+        <p:txBody>
+          <a:bodyPr rtlCol="0" anchor="ctr"/>
+          <a:lstStyle/>
+          <a:p>
+            <a:pPr algn="ctr"/>
+          </a:p>
+        </p:txBody>
+      </p:sp>
+      <p:sp>
+        <p:nvSpPr>
+          <p:cNvPr id="12" name="TextBox 11"/>
+          <p:cNvSpPr txBox="1"/>
+          <p:nvPr/>
+        </p:nvSpPr>
+        <p:spPr>
+          <a:xfrm>
+            <a:off x="868680" y="1298448"/>
+            <a:ext cx="1463040" cy="182880"/>
+          </a:xfrm>
+          <a:prstGeom prst="rect">
+            <a:avLst/>
+          </a:prstGeom>
+          <a:noFill/>
+        </p:spPr>
+        <p:txBody>
+          <a:bodyPr wrap="square" lIns="27432" rIns="27432" tIns="9144" bIns="9144" anchor="ctr">
+            <a:spAutoFit/>
+          </a:bodyPr>
+          <a:lstStyle/>
+          <a:p>
+            <a:pPr algn="l">
+              <a:defRPr sz="1000" b="1">
+                <a:solidFill>
+                  <a:srgbClr val="EA580C"/>
+                </a:solidFill>
+                <a:latin typeface="Microsoft YaHei"/>
+              </a:defRPr>
+            </a:pPr>
+            <a:r>
+              <a:rPr sz="1000" b="1">
+                <a:solidFill>
+                  <a:srgbClr val="EA580C"/>
+                </a:solidFill>
+                <a:latin typeface="Microsoft YaHei"/>
+              </a:rPr>
+              <a:t>Short answer</a:t>
+            </a:r>
+          </a:p>
+        </p:txBody>
+      </p:sp>
+      <p:sp>
+        <p:nvSpPr>
+          <p:cNvPr id="13" name="TextBox 12"/>
+          <p:cNvSpPr txBox="1"/>
+          <p:nvPr/>
+        </p:nvSpPr>
+        <p:spPr>
+          <a:xfrm>
+            <a:off x="2240280" y="1216152"/>
+            <a:ext cx="8366760" cy="329184"/>
+          </a:xfrm>
+          <a:prstGeom prst="rect">
+            <a:avLst/>
+          </a:prstGeom>
+          <a:noFill/>
+        </p:spPr>
+        <p:txBody>
+          <a:bodyPr wrap="square" lIns="27432" rIns="27432" tIns="9144" bIns="9144" anchor="ctr">
+            <a:spAutoFit/>
+          </a:bodyPr>
+          <a:lstStyle/>
+          <a:p>
+            <a:pPr algn="l">
+              <a:defRPr sz="1300" b="1">
+                <a:solidFill>
+                  <a:srgbClr val="0F172A"/>
+                </a:solidFill>
+                <a:latin typeface="Microsoft YaHei"/>
+              </a:defRPr>
+            </a:pPr>
+            <a:r>
+              <a:rPr sz="1300" b="1">
+                <a:solidFill>
+                  <a:srgbClr val="0F172A"/>
+                </a:solidFill>
+                <a:latin typeface="Microsoft YaHei"/>
+              </a:rPr>
+              <a:t>没有。trip generation 是主贡献；mode/purpose 是 behavior-system extension。</a:t>
+            </a:r>
+          </a:p>
+        </p:txBody>
+      </p:sp>
+      <p:sp>
+        <p:nvSpPr>
+          <p:cNvPr id="14" name="Rectangle 13"/>
+          <p:cNvSpPr/>
+          <p:nvPr/>
+        </p:nvSpPr>
+        <p:spPr>
+          <a:xfrm>
+            <a:off x="713232" y="2176272"/>
+            <a:ext cx="4023360" cy="420624"/>
+          </a:xfrm>
+          <a:prstGeom prst="rect">
+            <a:avLst/>
+          </a:prstGeom>
+          <a:solidFill>
+            <a:srgbClr val="00796B"/>
+          </a:solidFill>
+          <a:ln>
+            <a:noFill/>
+          </a:ln>
+        </p:spPr>
+        <p:style>
+          <a:lnRef idx="1">
+            <a:schemeClr val="accent1"/>
+          </a:lnRef>
+          <a:fillRef idx="3">
+            <a:schemeClr val="accent1"/>
+          </a:fillRef>
+          <a:effectRef idx="2">
+            <a:schemeClr val="accent1"/>
+          </a:effectRef>
+          <a:fontRef idx="minor">
+            <a:schemeClr val="lt1"/>
+          </a:fontRef>
+        </p:style>
+        <p:txBody>
+          <a:bodyPr rtlCol="0" anchor="ctr"/>
+          <a:lstStyle/>
+          <a:p>
+            <a:pPr algn="ctr"/>
+          </a:p>
+        </p:txBody>
+      </p:sp>
+      <p:sp>
+        <p:nvSpPr>
+          <p:cNvPr id="15" name="TextBox 14"/>
+          <p:cNvSpPr txBox="1"/>
+          <p:nvPr/>
+        </p:nvSpPr>
+        <p:spPr>
+          <a:xfrm>
+            <a:off x="749808" y="2249424"/>
+            <a:ext cx="3950208" cy="292608"/>
+          </a:xfrm>
+          <a:prstGeom prst="rect">
+            <a:avLst/>
+          </a:prstGeom>
+          <a:noFill/>
+        </p:spPr>
+        <p:txBody>
+          <a:bodyPr wrap="square" lIns="27432" rIns="27432" tIns="9144" bIns="9144" anchor="ctr">
+            <a:spAutoFit/>
+          </a:bodyPr>
+          <a:lstStyle/>
+          <a:p>
+            <a:pPr algn="ctr">
+              <a:defRPr sz="1200" b="1">
+                <a:solidFill>
+                  <a:srgbClr val="FFFFFF"/>
+                </a:solidFill>
+                <a:latin typeface="Microsoft YaHei"/>
+              </a:defRPr>
+            </a:pPr>
+            <a:r>
+              <a:rPr sz="1200" b="1">
+                <a:solidFill>
+                  <a:srgbClr val="FFFFFF"/>
+                </a:solidFill>
+                <a:latin typeface="Microsoft YaHei"/>
+              </a:rPr>
+              <a:t>Evidence</a:t>
+            </a:r>
+          </a:p>
+        </p:txBody>
+      </p:sp>
+      <p:sp>
+        <p:nvSpPr>
+          <p:cNvPr id="16" name="Rectangle 15"/>
+          <p:cNvSpPr/>
+          <p:nvPr/>
+        </p:nvSpPr>
+        <p:spPr>
+          <a:xfrm>
+            <a:off x="4736592" y="2176272"/>
+            <a:ext cx="6035040" cy="420624"/>
+          </a:xfrm>
+          <a:prstGeom prst="rect">
+            <a:avLst/>
+          </a:prstGeom>
+          <a:solidFill>
+            <a:srgbClr val="00796B"/>
+          </a:solidFill>
+          <a:ln>
+            <a:noFill/>
+          </a:ln>
+        </p:spPr>
+        <p:style>
+          <a:lnRef idx="1">
+            <a:schemeClr val="accent1"/>
+          </a:lnRef>
+          <a:fillRef idx="3">
+            <a:schemeClr val="accent1"/>
+          </a:fillRef>
+          <a:effectRef idx="2">
+            <a:schemeClr val="accent1"/>
+          </a:effectRef>
+          <a:fontRef idx="minor">
+            <a:schemeClr val="lt1"/>
+          </a:fontRef>
+        </p:style>
+        <p:txBody>
+          <a:bodyPr rtlCol="0" anchor="ctr"/>
+          <a:lstStyle/>
+          <a:p>
+            <a:pPr algn="ctr"/>
+          </a:p>
+        </p:txBody>
+      </p:sp>
+      <p:sp>
+        <p:nvSpPr>
+          <p:cNvPr id="17" name="TextBox 16"/>
+          <p:cNvSpPr txBox="1"/>
+          <p:nvPr/>
+        </p:nvSpPr>
+        <p:spPr>
+          <a:xfrm>
+            <a:off x="4773168" y="2249424"/>
+            <a:ext cx="5961888" cy="292608"/>
+          </a:xfrm>
+          <a:prstGeom prst="rect">
+            <a:avLst/>
+          </a:prstGeom>
+          <a:noFill/>
+        </p:spPr>
+        <p:txBody>
+          <a:bodyPr wrap="square" lIns="27432" rIns="27432" tIns="9144" bIns="9144" anchor="ctr">
+            <a:spAutoFit/>
+          </a:bodyPr>
+          <a:lstStyle/>
+          <a:p>
+            <a:pPr algn="ctr">
+              <a:defRPr sz="1200" b="1">
+                <a:solidFill>
+                  <a:srgbClr val="FFFFFF"/>
+                </a:solidFill>
+                <a:latin typeface="Microsoft YaHei"/>
+              </a:defRPr>
+            </a:pPr>
+            <a:r>
+              <a:rPr sz="1200" b="1">
+                <a:solidFill>
+                  <a:srgbClr val="FFFFFF"/>
+                </a:solidFill>
+                <a:latin typeface="Microsoft YaHei"/>
+              </a:rPr>
+              <a:t>Value / implication</a:t>
+            </a:r>
+          </a:p>
+        </p:txBody>
+      </p:sp>
+      <p:sp>
+        <p:nvSpPr>
+          <p:cNvPr id="18" name="Rectangle 17"/>
+          <p:cNvSpPr/>
+          <p:nvPr/>
+        </p:nvSpPr>
+        <p:spPr>
+          <a:xfrm>
+            <a:off x="713232" y="2596896"/>
+            <a:ext cx="4023360" cy="420624"/>
+          </a:xfrm>
+          <a:prstGeom prst="rect">
+            <a:avLst/>
+          </a:prstGeom>
+          <a:solidFill>
+            <a:srgbClr val="F8FAFC"/>
+          </a:solidFill>
+          <a:ln w="9525">
+            <a:solidFill>
+              <a:srgbClr val="CBD5E1"/>
+            </a:solidFill>
+          </a:ln>
+        </p:spPr>
+        <p:style>
+          <a:lnRef idx="1">
+            <a:schemeClr val="accent1"/>
+          </a:lnRef>
+          <a:fillRef idx="3">
+            <a:schemeClr val="accent1"/>
+          </a:fillRef>
+          <a:effectRef idx="2">
+            <a:schemeClr val="accent1"/>
+          </a:effectRef>
+          <a:fontRef idx="minor">
+            <a:schemeClr val="lt1"/>
+          </a:fontRef>
+        </p:style>
+        <p:txBody>
+          <a:bodyPr rtlCol="0" anchor="ctr"/>
+          <a:lstStyle/>
+          <a:p>
+            <a:pPr algn="ctr"/>
+          </a:p>
+        </p:txBody>
+      </p:sp>
+      <p:sp>
+        <p:nvSpPr>
+          <p:cNvPr id="19" name="TextBox 18"/>
+          <p:cNvSpPr txBox="1"/>
+          <p:nvPr/>
+        </p:nvSpPr>
+        <p:spPr>
+          <a:xfrm>
+            <a:off x="768096" y="2660903"/>
+            <a:ext cx="3913632" cy="292608"/>
+          </a:xfrm>
+          <a:prstGeom prst="rect">
+            <a:avLst/>
+          </a:prstGeom>
+          <a:noFill/>
+        </p:spPr>
+        <p:txBody>
+          <a:bodyPr wrap="square" lIns="27432" rIns="27432" tIns="9144" bIns="9144" anchor="t">
+            <a:spAutoFit/>
+          </a:bodyPr>
+          <a:lstStyle/>
+          <a:p>
+            <a:pPr algn="l">
+              <a:defRPr sz="1200" b="1">
+                <a:solidFill>
+                  <a:srgbClr val="0F172A"/>
+                </a:solidFill>
+                <a:latin typeface="Microsoft YaHei"/>
+              </a:defRPr>
+            </a:pPr>
+            <a:r>
+              <a:rPr sz="1200" b="1">
+                <a:solidFill>
+                  <a:srgbClr val="0F172A"/>
+                </a:solidFill>
+                <a:latin typeface="Microsoft YaHei"/>
+              </a:rPr>
+              <a:t>Transit-share MAE</a:t>
+            </a:r>
+          </a:p>
+        </p:txBody>
+      </p:sp>
+      <p:sp>
+        <p:nvSpPr>
+          <p:cNvPr id="20" name="Rectangle 19"/>
+          <p:cNvSpPr/>
+          <p:nvPr/>
+        </p:nvSpPr>
+        <p:spPr>
+          <a:xfrm>
+            <a:off x="4736592" y="2596896"/>
+            <a:ext cx="6035040" cy="420624"/>
+          </a:xfrm>
+          <a:prstGeom prst="rect">
+            <a:avLst/>
+          </a:prstGeom>
+          <a:solidFill>
+            <a:srgbClr val="F8FAFC"/>
+          </a:solidFill>
+          <a:ln w="9525">
+            <a:solidFill>
+              <a:srgbClr val="CBD5E1"/>
+            </a:solidFill>
+          </a:ln>
+        </p:spPr>
+        <p:style>
+          <a:lnRef idx="1">
+            <a:schemeClr val="accent1"/>
+          </a:lnRef>
+          <a:fillRef idx="3">
+            <a:schemeClr val="accent1"/>
+          </a:fillRef>
+          <a:effectRef idx="2">
+            <a:schemeClr val="accent1"/>
+          </a:effectRef>
+          <a:fontRef idx="minor">
+            <a:schemeClr val="lt1"/>
+          </a:fontRef>
+        </p:style>
+        <p:txBody>
+          <a:bodyPr rtlCol="0" anchor="ctr"/>
+          <a:lstStyle/>
+          <a:p>
+            <a:pPr algn="ctr"/>
+          </a:p>
+        </p:txBody>
+      </p:sp>
+      <p:sp>
+        <p:nvSpPr>
+          <p:cNvPr id="21" name="TextBox 20"/>
+          <p:cNvSpPr txBox="1"/>
+          <p:nvPr/>
+        </p:nvSpPr>
+        <p:spPr>
+          <a:xfrm>
+            <a:off x="4791456" y="2660903"/>
+            <a:ext cx="5925312" cy="292608"/>
+          </a:xfrm>
+          <a:prstGeom prst="rect">
+            <a:avLst/>
+          </a:prstGeom>
+          <a:noFill/>
+        </p:spPr>
+        <p:txBody>
+          <a:bodyPr wrap="square" lIns="27432" rIns="27432" tIns="9144" bIns="9144" anchor="t">
+            <a:spAutoFit/>
+          </a:bodyPr>
+          <a:lstStyle/>
+          <a:p>
+            <a:pPr algn="l">
+              <a:defRPr sz="1200" b="0">
+                <a:solidFill>
+                  <a:srgbClr val="0F172A"/>
+                </a:solidFill>
+                <a:latin typeface="Microsoft YaHei"/>
+              </a:defRPr>
+            </a:pPr>
+            <a:r>
+              <a:rPr sz="1200" b="0">
+                <a:solidFill>
+                  <a:srgbClr val="0F172A"/>
+                </a:solidFill>
+                <a:latin typeface="Microsoft YaHei"/>
+              </a:rPr>
+              <a:t>0.0325 -&gt; 0.0269</a:t>
+            </a:r>
+          </a:p>
+        </p:txBody>
+      </p:sp>
+      <p:sp>
+        <p:nvSpPr>
+          <p:cNvPr id="22" name="Rectangle 21"/>
+          <p:cNvSpPr/>
+          <p:nvPr/>
+        </p:nvSpPr>
+        <p:spPr>
+          <a:xfrm>
+            <a:off x="713232" y="3017520"/>
+            <a:ext cx="4023360" cy="420624"/>
+          </a:xfrm>
+          <a:prstGeom prst="rect">
+            <a:avLst/>
+          </a:prstGeom>
+          <a:solidFill>
+            <a:srgbClr val="F1F5F9"/>
+          </a:solidFill>
+          <a:ln w="9525">
+            <a:solidFill>
+              <a:srgbClr val="CBD5E1"/>
+            </a:solidFill>
+          </a:ln>
+        </p:spPr>
+        <p:style>
+          <a:lnRef idx="1">
+            <a:schemeClr val="accent1"/>
+          </a:lnRef>
+          <a:fillRef idx="3">
+            <a:schemeClr val="accent1"/>
+          </a:fillRef>
+          <a:effectRef idx="2">
+            <a:schemeClr val="accent1"/>
+          </a:effectRef>
+          <a:fontRef idx="minor">
+            <a:schemeClr val="lt1"/>
+          </a:fontRef>
+        </p:style>
+        <p:txBody>
+          <a:bodyPr rtlCol="0" anchor="ctr"/>
+          <a:lstStyle/>
+          <a:p>
+            <a:pPr algn="ctr"/>
+          </a:p>
+        </p:txBody>
+      </p:sp>
+      <p:sp>
+        <p:nvSpPr>
+          <p:cNvPr id="23" name="TextBox 22"/>
+          <p:cNvSpPr txBox="1"/>
+          <p:nvPr/>
+        </p:nvSpPr>
+        <p:spPr>
+          <a:xfrm>
+            <a:off x="768096" y="3081527"/>
+            <a:ext cx="3913632" cy="292608"/>
+          </a:xfrm>
+          <a:prstGeom prst="rect">
+            <a:avLst/>
+          </a:prstGeom>
+          <a:noFill/>
+        </p:spPr>
+        <p:txBody>
+          <a:bodyPr wrap="square" lIns="27432" rIns="27432" tIns="9144" bIns="9144" anchor="t">
+            <a:spAutoFit/>
+          </a:bodyPr>
+          <a:lstStyle/>
+          <a:p>
+            <a:pPr algn="l">
+              <a:defRPr sz="1200" b="1">
+                <a:solidFill>
+                  <a:srgbClr val="0F172A"/>
+                </a:solidFill>
+                <a:latin typeface="Microsoft YaHei"/>
+              </a:defRPr>
+            </a:pPr>
+            <a:r>
+              <a:rPr sz="1200" b="1">
+                <a:solidFill>
+                  <a:srgbClr val="0F172A"/>
+                </a:solidFill>
+                <a:latin typeface="Microsoft YaHei"/>
+              </a:rPr>
+              <a:t>Mode-trip volume MAE</a:t>
+            </a:r>
+          </a:p>
+        </p:txBody>
+      </p:sp>
+      <p:sp>
+        <p:nvSpPr>
+          <p:cNvPr id="24" name="Rectangle 23"/>
+          <p:cNvSpPr/>
+          <p:nvPr/>
+        </p:nvSpPr>
+        <p:spPr>
+          <a:xfrm>
+            <a:off x="4736592" y="3017520"/>
+            <a:ext cx="6035040" cy="420624"/>
+          </a:xfrm>
+          <a:prstGeom prst="rect">
+            <a:avLst/>
+          </a:prstGeom>
+          <a:solidFill>
+            <a:srgbClr val="F1F5F9"/>
+          </a:solidFill>
+          <a:ln w="9525">
+            <a:solidFill>
+              <a:srgbClr val="CBD5E1"/>
+            </a:solidFill>
+          </a:ln>
+        </p:spPr>
+        <p:style>
+          <a:lnRef idx="1">
+            <a:schemeClr val="accent1"/>
+          </a:lnRef>
+          <a:fillRef idx="3">
+            <a:schemeClr val="accent1"/>
+          </a:fillRef>
+          <a:effectRef idx="2">
+            <a:schemeClr val="accent1"/>
+          </a:effectRef>
+          <a:fontRef idx="minor">
+            <a:schemeClr val="lt1"/>
+          </a:fontRef>
+        </p:style>
+        <p:txBody>
+          <a:bodyPr rtlCol="0" anchor="ctr"/>
+          <a:lstStyle/>
+          <a:p>
+            <a:pPr algn="ctr"/>
+          </a:p>
+        </p:txBody>
+      </p:sp>
+      <p:sp>
+        <p:nvSpPr>
+          <p:cNvPr id="25" name="TextBox 24"/>
+          <p:cNvSpPr txBox="1"/>
+          <p:nvPr/>
+        </p:nvSpPr>
+        <p:spPr>
+          <a:xfrm>
+            <a:off x="4791456" y="3081527"/>
+            <a:ext cx="5925312" cy="292608"/>
+          </a:xfrm>
+          <a:prstGeom prst="rect">
+            <a:avLst/>
+          </a:prstGeom>
+          <a:noFill/>
+        </p:spPr>
+        <p:txBody>
+          <a:bodyPr wrap="square" lIns="27432" rIns="27432" tIns="9144" bIns="9144" anchor="t">
+            <a:spAutoFit/>
+          </a:bodyPr>
+          <a:lstStyle/>
+          <a:p>
+            <a:pPr algn="l">
+              <a:defRPr sz="1200" b="0">
+                <a:solidFill>
+                  <a:srgbClr val="0F172A"/>
+                </a:solidFill>
+                <a:latin typeface="Microsoft YaHei"/>
+              </a:defRPr>
+            </a:pPr>
+            <a:r>
+              <a:rPr sz="1200" b="0">
+                <a:solidFill>
+                  <a:srgbClr val="0F172A"/>
+                </a:solidFill>
+                <a:latin typeface="Microsoft YaHei"/>
+              </a:rPr>
+              <a:t>4.8467 -&gt; 3.2802</a:t>
+            </a:r>
+          </a:p>
+        </p:txBody>
+      </p:sp>
+      <p:sp>
+        <p:nvSpPr>
+          <p:cNvPr id="26" name="Rectangle 25"/>
+          <p:cNvSpPr/>
+          <p:nvPr/>
+        </p:nvSpPr>
+        <p:spPr>
+          <a:xfrm>
+            <a:off x="713232" y="3438144"/>
+            <a:ext cx="4023360" cy="420624"/>
+          </a:xfrm>
+          <a:prstGeom prst="rect">
+            <a:avLst/>
+          </a:prstGeom>
+          <a:solidFill>
+            <a:srgbClr val="F8FAFC"/>
+          </a:solidFill>
+          <a:ln w="9525">
+            <a:solidFill>
+              <a:srgbClr val="CBD5E1"/>
+            </a:solidFill>
+          </a:ln>
+        </p:spPr>
+        <p:style>
+          <a:lnRef idx="1">
+            <a:schemeClr val="accent1"/>
+          </a:lnRef>
+          <a:fillRef idx="3">
+            <a:schemeClr val="accent1"/>
+          </a:fillRef>
+          <a:effectRef idx="2">
+            <a:schemeClr val="accent1"/>
+          </a:effectRef>
+          <a:fontRef idx="minor">
+            <a:schemeClr val="lt1"/>
+          </a:fontRef>
+        </p:style>
+        <p:txBody>
+          <a:bodyPr rtlCol="0" anchor="ctr"/>
+          <a:lstStyle/>
+          <a:p>
+            <a:pPr algn="ctr"/>
+          </a:p>
+        </p:txBody>
+      </p:sp>
+      <p:sp>
+        <p:nvSpPr>
+          <p:cNvPr id="27" name="TextBox 26"/>
+          <p:cNvSpPr txBox="1"/>
+          <p:nvPr/>
+        </p:nvSpPr>
+        <p:spPr>
+          <a:xfrm>
+            <a:off x="768096" y="3502151"/>
+            <a:ext cx="3913632" cy="292608"/>
+          </a:xfrm>
+          <a:prstGeom prst="rect">
+            <a:avLst/>
+          </a:prstGeom>
+          <a:noFill/>
+        </p:spPr>
+        <p:txBody>
+          <a:bodyPr wrap="square" lIns="27432" rIns="27432" tIns="9144" bIns="9144" anchor="t">
+            <a:spAutoFit/>
+          </a:bodyPr>
+          <a:lstStyle/>
+          <a:p>
+            <a:pPr algn="l">
+              <a:defRPr sz="1200" b="1">
+                <a:solidFill>
+                  <a:srgbClr val="0F172A"/>
+                </a:solidFill>
+                <a:latin typeface="Microsoft YaHei"/>
+              </a:defRPr>
+            </a:pPr>
+            <a:r>
+              <a:rPr sz="1200" b="1">
+                <a:solidFill>
+                  <a:srgbClr val="0F172A"/>
+                </a:solidFill>
+                <a:latin typeface="Microsoft YaHei"/>
+              </a:rPr>
+              <a:t>Purpose composition</a:t>
+            </a:r>
+          </a:p>
+        </p:txBody>
+      </p:sp>
+      <p:sp>
+        <p:nvSpPr>
+          <p:cNvPr id="28" name="Rectangle 27"/>
+          <p:cNvSpPr/>
+          <p:nvPr/>
+        </p:nvSpPr>
+        <p:spPr>
+          <a:xfrm>
+            <a:off x="4736592" y="3438144"/>
+            <a:ext cx="6035040" cy="420624"/>
+          </a:xfrm>
+          <a:prstGeom prst="rect">
+            <a:avLst/>
+          </a:prstGeom>
+          <a:solidFill>
+            <a:srgbClr val="F8FAFC"/>
+          </a:solidFill>
+          <a:ln w="9525">
+            <a:solidFill>
+              <a:srgbClr val="CBD5E1"/>
+            </a:solidFill>
+          </a:ln>
+        </p:spPr>
+        <p:style>
+          <a:lnRef idx="1">
+            <a:schemeClr val="accent1"/>
+          </a:lnRef>
+          <a:fillRef idx="3">
+            <a:schemeClr val="accent1"/>
+          </a:fillRef>
+          <a:effectRef idx="2">
+            <a:schemeClr val="accent1"/>
+          </a:effectRef>
+          <a:fontRef idx="minor">
+            <a:schemeClr val="lt1"/>
+          </a:fontRef>
+        </p:style>
+        <p:txBody>
+          <a:bodyPr rtlCol="0" anchor="ctr"/>
+          <a:lstStyle/>
+          <a:p>
+            <a:pPr algn="ctr"/>
+          </a:p>
+        </p:txBody>
+      </p:sp>
+      <p:sp>
+        <p:nvSpPr>
+          <p:cNvPr id="29" name="TextBox 28"/>
+          <p:cNvSpPr txBox="1"/>
+          <p:nvPr/>
+        </p:nvSpPr>
+        <p:spPr>
+          <a:xfrm>
+            <a:off x="4791456" y="3502151"/>
+            <a:ext cx="5925312" cy="292608"/>
+          </a:xfrm>
+          <a:prstGeom prst="rect">
+            <a:avLst/>
+          </a:prstGeom>
+          <a:noFill/>
+        </p:spPr>
+        <p:txBody>
+          <a:bodyPr wrap="square" lIns="27432" rIns="27432" tIns="9144" bIns="9144" anchor="t">
+            <a:spAutoFit/>
+          </a:bodyPr>
+          <a:lstStyle/>
+          <a:p>
+            <a:pPr algn="l">
+              <a:defRPr sz="1200" b="0">
+                <a:solidFill>
+                  <a:srgbClr val="0F172A"/>
+                </a:solidFill>
+                <a:latin typeface="Microsoft YaHei"/>
+              </a:defRPr>
+            </a:pPr>
+            <a:r>
+              <a:rPr sz="1200" b="0">
+                <a:solidFill>
+                  <a:srgbClr val="0F172A"/>
+                </a:solidFill>
+                <a:latin typeface="Microsoft YaHei"/>
+              </a:rPr>
+              <a:t>Exploratory; LLM prior not overall best</a:t>
+            </a:r>
+          </a:p>
+        </p:txBody>
+      </p:sp>
+      <p:sp>
+        <p:nvSpPr>
+          <p:cNvPr id="30" name="Rectangle 29"/>
+          <p:cNvSpPr/>
+          <p:nvPr/>
+        </p:nvSpPr>
+        <p:spPr>
+          <a:xfrm>
+            <a:off x="713232" y="3858768"/>
+            <a:ext cx="4023360" cy="420624"/>
+          </a:xfrm>
+          <a:prstGeom prst="rect">
+            <a:avLst/>
+          </a:prstGeom>
+          <a:solidFill>
+            <a:srgbClr val="F1F5F9"/>
+          </a:solidFill>
+          <a:ln w="9525">
+            <a:solidFill>
+              <a:srgbClr val="CBD5E1"/>
+            </a:solidFill>
+          </a:ln>
+        </p:spPr>
+        <p:style>
+          <a:lnRef idx="1">
+            <a:schemeClr val="accent1"/>
+          </a:lnRef>
+          <a:fillRef idx="3">
+            <a:schemeClr val="accent1"/>
+          </a:fillRef>
+          <a:effectRef idx="2">
+            <a:schemeClr val="accent1"/>
+          </a:effectRef>
+          <a:fontRef idx="minor">
+            <a:schemeClr val="lt1"/>
+          </a:fontRef>
+        </p:style>
+        <p:txBody>
+          <a:bodyPr rtlCol="0" anchor="ctr"/>
+          <a:lstStyle/>
+          <a:p>
+            <a:pPr algn="ctr"/>
+          </a:p>
+        </p:txBody>
+      </p:sp>
+      <p:sp>
+        <p:nvSpPr>
+          <p:cNvPr id="31" name="TextBox 30"/>
+          <p:cNvSpPr txBox="1"/>
+          <p:nvPr/>
+        </p:nvSpPr>
+        <p:spPr>
+          <a:xfrm>
+            <a:off x="768096" y="3922776"/>
+            <a:ext cx="3913632" cy="292608"/>
+          </a:xfrm>
+          <a:prstGeom prst="rect">
+            <a:avLst/>
+          </a:prstGeom>
+          <a:noFill/>
+        </p:spPr>
+        <p:txBody>
+          <a:bodyPr wrap="square" lIns="27432" rIns="27432" tIns="9144" bIns="9144" anchor="t">
+            <a:spAutoFit/>
+          </a:bodyPr>
+          <a:lstStyle/>
+          <a:p>
+            <a:pPr algn="l">
+              <a:defRPr sz="1200" b="1">
+                <a:solidFill>
+                  <a:srgbClr val="0F172A"/>
+                </a:solidFill>
+                <a:latin typeface="Microsoft YaHei"/>
+              </a:defRPr>
+            </a:pPr>
+            <a:r>
+              <a:rPr sz="1200" b="1">
+                <a:solidFill>
+                  <a:srgbClr val="0F172A"/>
+                </a:solidFill>
+                <a:latin typeface="Microsoft YaHei"/>
+              </a:rPr>
+              <a:t>Safe claim</a:t>
+            </a:r>
+          </a:p>
+        </p:txBody>
+      </p:sp>
+      <p:sp>
+        <p:nvSpPr>
+          <p:cNvPr id="32" name="Rectangle 31"/>
+          <p:cNvSpPr/>
+          <p:nvPr/>
+        </p:nvSpPr>
+        <p:spPr>
+          <a:xfrm>
+            <a:off x="4736592" y="3858768"/>
+            <a:ext cx="6035040" cy="420624"/>
+          </a:xfrm>
+          <a:prstGeom prst="rect">
+            <a:avLst/>
+          </a:prstGeom>
+          <a:solidFill>
+            <a:srgbClr val="F1F5F9"/>
+          </a:solidFill>
+          <a:ln w="9525">
+            <a:solidFill>
+              <a:srgbClr val="CBD5E1"/>
+            </a:solidFill>
+          </a:ln>
+        </p:spPr>
+        <p:style>
+          <a:lnRef idx="1">
+            <a:schemeClr val="accent1"/>
+          </a:lnRef>
+          <a:fillRef idx="3">
+            <a:schemeClr val="accent1"/>
+          </a:fillRef>
+          <a:effectRef idx="2">
+            <a:schemeClr val="accent1"/>
+          </a:effectRef>
+          <a:fontRef idx="minor">
+            <a:schemeClr val="lt1"/>
+          </a:fontRef>
+        </p:style>
+        <p:txBody>
+          <a:bodyPr rtlCol="0" anchor="ctr"/>
+          <a:lstStyle/>
+          <a:p>
+            <a:pPr algn="ctr"/>
+          </a:p>
+        </p:txBody>
+      </p:sp>
+      <p:sp>
+        <p:nvSpPr>
+          <p:cNvPr id="33" name="TextBox 32"/>
+          <p:cNvSpPr txBox="1"/>
+          <p:nvPr/>
+        </p:nvSpPr>
+        <p:spPr>
+          <a:xfrm>
+            <a:off x="4791456" y="3922776"/>
+            <a:ext cx="5925312" cy="292608"/>
+          </a:xfrm>
+          <a:prstGeom prst="rect">
+            <a:avLst/>
+          </a:prstGeom>
+          <a:noFill/>
+        </p:spPr>
+        <p:txBody>
+          <a:bodyPr wrap="square" lIns="27432" rIns="27432" tIns="9144" bIns="9144" anchor="t">
+            <a:spAutoFit/>
+          </a:bodyPr>
+          <a:lstStyle/>
+          <a:p>
+            <a:pPr algn="l">
+              <a:defRPr sz="1200" b="0">
+                <a:solidFill>
+                  <a:srgbClr val="0F172A"/>
+                </a:solidFill>
+                <a:latin typeface="Microsoft YaHei"/>
+              </a:defRPr>
+            </a:pPr>
+            <a:r>
+              <a:rPr sz="1200" b="0">
+                <a:solidFill>
+                  <a:srgbClr val="0F172A"/>
+                </a:solidFill>
+                <a:latin typeface="Microsoft YaHei"/>
+              </a:rPr>
+              <a:t>Planning relevance, not solved full mode-choice model</a:t>
+            </a:r>
+          </a:p>
+        </p:txBody>
+      </p:sp>
+      <p:sp>
+        <p:nvSpPr>
+          <p:cNvPr id="34" name="Rounded Rectangle 33"/>
+          <p:cNvSpPr/>
+          <p:nvPr/>
+        </p:nvSpPr>
+        <p:spPr>
+          <a:xfrm>
+            <a:off x="749808" y="5074920"/>
+            <a:ext cx="10012680" cy="1005840"/>
+          </a:xfrm>
+          <a:prstGeom prst="roundRect">
+            <a:avLst/>
+          </a:prstGeom>
+          <a:solidFill>
+            <a:srgbClr val="F1F5F9"/>
+          </a:solidFill>
+          <a:ln w="9525">
+            <a:solidFill>
+              <a:srgbClr val="CBD5E1"/>
+            </a:solidFill>
+          </a:ln>
+        </p:spPr>
+        <p:style>
+          <a:lnRef idx="1">
+            <a:schemeClr val="accent1"/>
+          </a:lnRef>
+          <a:fillRef idx="3">
+            <a:schemeClr val="accent1"/>
+          </a:fillRef>
+          <a:effectRef idx="2">
+            <a:schemeClr val="accent1"/>
+          </a:effectRef>
+          <a:fontRef idx="minor">
+            <a:schemeClr val="lt1"/>
+          </a:fontRef>
+        </p:style>
+        <p:txBody>
+          <a:bodyPr rtlCol="0" anchor="ctr"/>
+          <a:lstStyle/>
+          <a:p>
+            <a:pPr algn="ctr"/>
+          </a:p>
+        </p:txBody>
+      </p:sp>
+      <p:sp>
+        <p:nvSpPr>
+          <p:cNvPr id="35" name="Rectangle 34"/>
+          <p:cNvSpPr/>
+          <p:nvPr/>
+        </p:nvSpPr>
+        <p:spPr>
+          <a:xfrm>
+            <a:off x="749808" y="5074920"/>
+            <a:ext cx="50292" cy="1005840"/>
+          </a:xfrm>
+          <a:prstGeom prst="rect">
+            <a:avLst/>
+          </a:prstGeom>
+          <a:solidFill>
+            <a:srgbClr val="2563EB"/>
+          </a:solidFill>
+          <a:ln>
+            <a:noFill/>
+          </a:ln>
+        </p:spPr>
+        <p:style>
+          <a:lnRef idx="1">
+            <a:schemeClr val="accent1"/>
+          </a:lnRef>
+          <a:fillRef idx="3">
+            <a:schemeClr val="accent1"/>
+          </a:fillRef>
+          <a:effectRef idx="2">
+            <a:schemeClr val="accent1"/>
+          </a:effectRef>
+          <a:fontRef idx="minor">
+            <a:schemeClr val="lt1"/>
+          </a:fontRef>
+        </p:style>
+        <p:txBody>
+          <a:bodyPr rtlCol="0" anchor="ctr"/>
+          <a:lstStyle/>
+          <a:p>
+            <a:pPr algn="ctr"/>
+          </a:p>
+        </p:txBody>
+      </p:sp>
+      <p:sp>
+        <p:nvSpPr>
+          <p:cNvPr id="36" name="TextBox 35"/>
+          <p:cNvSpPr txBox="1"/>
+          <p:nvPr/>
+        </p:nvSpPr>
+        <p:spPr>
+          <a:xfrm>
+            <a:off x="914400" y="5166359"/>
+            <a:ext cx="9720072" cy="362102"/>
+          </a:xfrm>
+          <a:prstGeom prst="rect">
+            <a:avLst/>
+          </a:prstGeom>
+          <a:noFill/>
+        </p:spPr>
+        <p:txBody>
+          <a:bodyPr wrap="square" lIns="27432" rIns="27432" tIns="9144" bIns="9144" anchor="t">
+            <a:spAutoFit/>
+          </a:bodyPr>
+          <a:lstStyle/>
+          <a:p>
+            <a:pPr algn="l">
+              <a:defRPr sz="1200" b="1">
+                <a:solidFill>
+                  <a:srgbClr val="0F172A"/>
+                </a:solidFill>
+                <a:latin typeface="Microsoft YaHei"/>
+              </a:defRPr>
+            </a:pPr>
+            <a:r>
+              <a:rPr sz="1200" b="1">
+                <a:solidFill>
+                  <a:srgbClr val="0F172A"/>
+                </a:solidFill>
+                <a:latin typeface="Microsoft YaHei"/>
+              </a:rPr>
+              <a:t>答法：综合目标是预测 household behavior system，但最强结果仍是 post-pandemic trip generation。方式和目的模块说明可扩展到规划相关输出，也明确了未来工作边界。</a:t>
+            </a:r>
+          </a:p>
+        </p:txBody>
+      </p:sp>
+      <p:sp>
+        <p:nvSpPr>
+          <p:cNvPr id="37" name="TextBox 36"/>
+          <p:cNvSpPr txBox="1"/>
+          <p:nvPr/>
+        </p:nvSpPr>
+        <p:spPr>
+          <a:xfrm>
+            <a:off x="914400" y="5592470"/>
+            <a:ext cx="9720072" cy="415137"/>
+          </a:xfrm>
+          <a:prstGeom prst="rect">
+            <a:avLst/>
+          </a:prstGeom>
+          <a:noFill/>
+        </p:spPr>
+        <p:txBody>
+          <a:bodyPr wrap="square" lIns="27432" rIns="27432" tIns="9144" bIns="9144" anchor="t">
+            <a:spAutoFit/>
+          </a:bodyPr>
+          <a:lstStyle/>
+          <a:p>
+            <a:pPr algn="l">
+              <a:defRPr sz="1200" b="0">
+                <a:solidFill>
+                  <a:srgbClr val="64748B"/>
+                </a:solidFill>
+                <a:latin typeface="Microsoft YaHei"/>
+              </a:defRPr>
+            </a:pPr>
+          </a:p>
+        </p:txBody>
+      </p:sp>
+    </p:spTree>
+  </p:cSld>
+  <p:clrMapOvr>
+    <a:masterClrMapping/>
+  </p:clrMapOvr>
+</p:sld>
+</file>
+
+<file path=ppt/slides/slide29.xml><?xml version="1.0" encoding="utf-8"?>
+<p:sld xmlns:a="http://schemas.openxmlformats.org/drawingml/2006/main" xmlns:p="http://schemas.openxmlformats.org/presentationml/2006/main" xmlns:r="http://schemas.openxmlformats.org/officeDocument/2006/relationships">
+  <p:cSld>
+    <p:bg>
+      <p:bgPr>
+        <a:solidFill>
+          <a:srgbClr val="FFFFFF"/>
+        </a:solidFill>
+        <a:effectLst/>
+      </p:bgPr>
+    </p:bg>
+    <p:spTree>
+      <p:nvGrpSpPr>
+        <p:cNvPr id="1" name=""/>
+        <p:cNvGrpSpPr/>
+        <p:nvPr/>
+      </p:nvGrpSpPr>
+      <p:grpSpPr/>
+      <p:sp>
+        <p:nvSpPr>
+          <p:cNvPr id="2" name="TextBox 1"/>
+          <p:cNvSpPr txBox="1"/>
+          <p:nvPr/>
+        </p:nvSpPr>
+        <p:spPr>
+          <a:xfrm>
+            <a:off x="384048" y="109728"/>
+            <a:ext cx="4480560" cy="164592"/>
+          </a:xfrm>
+          <a:prstGeom prst="rect">
+            <a:avLst/>
+          </a:prstGeom>
+          <a:noFill/>
+        </p:spPr>
+        <p:txBody>
+          <a:bodyPr wrap="square" lIns="27432" rIns="27432" tIns="9144" bIns="9144" anchor="ctr">
+            <a:spAutoFit/>
+          </a:bodyPr>
+          <a:lstStyle/>
+          <a:p>
+            <a:pPr algn="l">
+              <a:defRPr sz="750" b="1">
+                <a:solidFill>
+                  <a:srgbClr val="64748B"/>
+                </a:solidFill>
+                <a:latin typeface="Microsoft YaHei"/>
+              </a:defRPr>
+            </a:pPr>
+            <a:r>
+              <a:rPr sz="750" b="1">
+                <a:solidFill>
+                  <a:srgbClr val="64748B"/>
+                </a:solidFill>
+                <a:latin typeface="Microsoft YaHei"/>
+              </a:rPr>
+              <a:t>Mobility Inequality and Sustainable Development</a:t>
+            </a:r>
+          </a:p>
+        </p:txBody>
+      </p:sp>
+      <p:sp>
+        <p:nvSpPr>
+          <p:cNvPr id="3" name="TextBox 2"/>
+          <p:cNvSpPr txBox="1"/>
+          <p:nvPr/>
+        </p:nvSpPr>
+        <p:spPr>
+          <a:xfrm>
+            <a:off x="384048" y="347472"/>
+            <a:ext cx="777240" cy="292608"/>
+          </a:xfrm>
+          <a:prstGeom prst="rect">
+            <a:avLst/>
+          </a:prstGeom>
+          <a:noFill/>
+        </p:spPr>
+        <p:txBody>
+          <a:bodyPr wrap="square" lIns="27432" rIns="27432" tIns="9144" bIns="9144" anchor="ctr">
+            <a:spAutoFit/>
+          </a:bodyPr>
+          <a:lstStyle/>
+          <a:p>
+            <a:pPr algn="l">
+              <a:defRPr sz="1300" b="1">
+                <a:solidFill>
+                  <a:srgbClr val="EA580C"/>
+                </a:solidFill>
+                <a:latin typeface="Microsoft YaHei"/>
+              </a:defRPr>
+            </a:pPr>
+            <a:r>
+              <a:rPr sz="1300" b="1">
+                <a:solidFill>
+                  <a:srgbClr val="EA580C"/>
+                </a:solidFill>
+                <a:latin typeface="Microsoft YaHei"/>
+              </a:rPr>
+              <a:t>BACKUP</a:t>
+            </a:r>
+          </a:p>
+        </p:txBody>
+      </p:sp>
+      <p:sp>
+        <p:nvSpPr>
+          <p:cNvPr id="4" name="TextBox 3"/>
+          <p:cNvSpPr txBox="1"/>
+          <p:nvPr/>
+        </p:nvSpPr>
+        <p:spPr>
+          <a:xfrm>
+            <a:off x="1234440" y="246888"/>
+            <a:ext cx="8412480" cy="329184"/>
+          </a:xfrm>
+          <a:prstGeom prst="rect">
+            <a:avLst/>
+          </a:prstGeom>
+          <a:noFill/>
+        </p:spPr>
+        <p:txBody>
+          <a:bodyPr wrap="square" lIns="27432" rIns="27432" tIns="9144" bIns="9144" anchor="ctr">
+            <a:spAutoFit/>
+          </a:bodyPr>
+          <a:lstStyle/>
+          <a:p>
+            <a:pPr algn="l">
+              <a:defRPr sz="1700" b="1">
+                <a:solidFill>
+                  <a:srgbClr val="0F172A"/>
+                </a:solidFill>
+                <a:latin typeface="Microsoft YaHei"/>
+              </a:defRPr>
+            </a:pPr>
+            <a:r>
+              <a:rPr sz="1700" b="1">
+                <a:solidFill>
+                  <a:srgbClr val="0F172A"/>
+                </a:solidFill>
+                <a:latin typeface="Microsoft YaHei"/>
+              </a:rPr>
+              <a:t>这些指标怎么用一句话解释？</a:t>
+            </a:r>
+          </a:p>
+        </p:txBody>
+      </p:sp>
+      <p:sp>
+        <p:nvSpPr>
+          <p:cNvPr id="5" name="TextBox 4"/>
+          <p:cNvSpPr txBox="1"/>
+          <p:nvPr/>
+        </p:nvSpPr>
+        <p:spPr>
+          <a:xfrm>
+            <a:off x="1252728" y="585216"/>
+            <a:ext cx="8869680" cy="228600"/>
+          </a:xfrm>
+          <a:prstGeom prst="rect">
+            <a:avLst/>
+          </a:prstGeom>
+          <a:noFill/>
+        </p:spPr>
+        <p:txBody>
+          <a:bodyPr wrap="square" lIns="27432" rIns="27432" tIns="9144" bIns="9144" anchor="ctr">
+            <a:spAutoFit/>
+          </a:bodyPr>
+          <a:lstStyle/>
+          <a:p>
+            <a:pPr algn="l">
+              <a:defRPr sz="850" b="0">
+                <a:solidFill>
+                  <a:srgbClr val="64748B"/>
+                </a:solidFill>
+                <a:latin typeface="Microsoft YaHei"/>
+              </a:defRPr>
+            </a:pPr>
+            <a:r>
+              <a:rPr sz="850" b="0">
+                <a:solidFill>
+                  <a:srgbClr val="64748B"/>
+                </a:solidFill>
+                <a:latin typeface="Microsoft YaHei"/>
+              </a:rPr>
+              <a:t>How should the metrics be interpreted?</a:t>
+            </a:r>
+          </a:p>
+        </p:txBody>
+      </p:sp>
+      <p:pic>
+        <p:nvPicPr>
+          <p:cNvPr id="6" name="Picture 5" descr="image.png"/>
+          <p:cNvPicPr>
+            <a:picLocks noChangeAspect="1"/>
+          </p:cNvPicPr>
+          <p:nvPr/>
+        </p:nvPicPr>
+        <p:blipFill>
+          <a:blip r:embed="rId2"/>
+          <a:stretch>
+            <a:fillRect/>
+          </a:stretch>
+        </p:blipFill>
+        <p:spPr>
+          <a:xfrm>
+            <a:off x="11018520" y="201168"/>
+            <a:ext cx="713232" cy="502730"/>
+          </a:xfrm>
+          <a:prstGeom prst="rect">
+            <a:avLst/>
+          </a:prstGeom>
+        </p:spPr>
+      </p:pic>
+      <p:sp>
+        <p:nvSpPr>
+          <p:cNvPr id="7" name="Rectangle 6"/>
+          <p:cNvSpPr/>
+          <p:nvPr/>
+        </p:nvSpPr>
+        <p:spPr>
+          <a:xfrm>
+            <a:off x="384048" y="877824"/>
+            <a:ext cx="11201400" cy="10972"/>
+          </a:xfrm>
+          <a:prstGeom prst="rect">
+            <a:avLst/>
+          </a:prstGeom>
+          <a:solidFill>
+            <a:srgbClr val="CBD5E1"/>
+          </a:solidFill>
+          <a:ln>
+            <a:noFill/>
+          </a:ln>
+        </p:spPr>
+        <p:style>
+          <a:lnRef idx="1">
+            <a:schemeClr val="accent1"/>
+          </a:lnRef>
+          <a:fillRef idx="3">
+            <a:schemeClr val="accent1"/>
+          </a:fillRef>
+          <a:effectRef idx="2">
+            <a:schemeClr val="accent1"/>
+          </a:effectRef>
+          <a:fontRef idx="minor">
+            <a:schemeClr val="lt1"/>
+          </a:fontRef>
+        </p:style>
+        <p:txBody>
+          <a:bodyPr rtlCol="0" anchor="ctr"/>
+          <a:lstStyle/>
+          <a:p>
+            <a:pPr algn="ctr"/>
+          </a:p>
+        </p:txBody>
+      </p:sp>
+      <p:sp>
+        <p:nvSpPr>
+          <p:cNvPr id="8" name="Rectangle 7"/>
+          <p:cNvSpPr/>
+          <p:nvPr/>
+        </p:nvSpPr>
+        <p:spPr>
+          <a:xfrm>
+            <a:off x="384048" y="6428232"/>
+            <a:ext cx="11201400" cy="10972"/>
+          </a:xfrm>
+          <a:prstGeom prst="rect">
+            <a:avLst/>
+          </a:prstGeom>
+          <a:solidFill>
+            <a:srgbClr val="CBD5E1"/>
+          </a:solidFill>
+          <a:ln>
+            <a:noFill/>
+          </a:ln>
+        </p:spPr>
+        <p:style>
+          <a:lnRef idx="1">
+            <a:schemeClr val="accent1"/>
+          </a:lnRef>
+          <a:fillRef idx="3">
+            <a:schemeClr val="accent1"/>
+          </a:fillRef>
+          <a:effectRef idx="2">
+            <a:schemeClr val="accent1"/>
+          </a:effectRef>
+          <a:fontRef idx="minor">
+            <a:schemeClr val="lt1"/>
+          </a:fontRef>
+        </p:style>
+        <p:txBody>
+          <a:bodyPr rtlCol="0" anchor="ctr"/>
+          <a:lstStyle/>
+          <a:p>
+            <a:pPr algn="ctr"/>
+          </a:p>
+        </p:txBody>
+      </p:sp>
+      <p:sp>
+        <p:nvSpPr>
+          <p:cNvPr id="9" name="TextBox 8"/>
+          <p:cNvSpPr txBox="1"/>
+          <p:nvPr/>
+        </p:nvSpPr>
+        <p:spPr>
+          <a:xfrm>
+            <a:off x="384048" y="6473952"/>
+            <a:ext cx="5212080" cy="164592"/>
+          </a:xfrm>
+          <a:prstGeom prst="rect">
+            <a:avLst/>
+          </a:prstGeom>
+          <a:noFill/>
+        </p:spPr>
+        <p:txBody>
+          <a:bodyPr wrap="square" lIns="27432" rIns="27432" tIns="9144" bIns="9144" anchor="ctr">
+            <a:spAutoFit/>
+          </a:bodyPr>
+          <a:lstStyle/>
+          <a:p>
+            <a:pPr algn="l">
+              <a:defRPr sz="750" b="0">
+                <a:solidFill>
+                  <a:srgbClr val="64748B"/>
+                </a:solidFill>
+                <a:latin typeface="Microsoft YaHei"/>
+              </a:defRPr>
+            </a:pPr>
+            <a:r>
+              <a:rPr sz="750" b="0">
+                <a:solidFill>
+                  <a:srgbClr val="64748B"/>
+                </a:solidFill>
+                <a:latin typeface="Microsoft YaHei"/>
+              </a:rPr>
+              <a:t>Appendix: reviewer and instructor Q&amp;A</a:t>
+            </a:r>
+          </a:p>
+        </p:txBody>
+      </p:sp>
+      <p:sp>
+        <p:nvSpPr>
+          <p:cNvPr id="10" name="TextBox 9"/>
+          <p:cNvSpPr txBox="1"/>
+          <p:nvPr/>
+        </p:nvSpPr>
+        <p:spPr>
+          <a:xfrm>
+            <a:off x="10149840" y="6473952"/>
+            <a:ext cx="1417320" cy="164592"/>
+          </a:xfrm>
+          <a:prstGeom prst="rect">
+            <a:avLst/>
+          </a:prstGeom>
+          <a:noFill/>
+        </p:spPr>
+        <p:txBody>
+          <a:bodyPr wrap="square" lIns="27432" rIns="27432" tIns="9144" bIns="9144" anchor="ctr">
+            <a:spAutoFit/>
+          </a:bodyPr>
+          <a:lstStyle/>
+          <a:p>
+            <a:pPr algn="r">
+              <a:defRPr sz="750" b="1">
+                <a:solidFill>
+                  <a:srgbClr val="64748B"/>
+                </a:solidFill>
+                <a:latin typeface="Microsoft YaHei"/>
+              </a:defRPr>
+            </a:pPr>
+            <a:r>
+              <a:rPr sz="750" b="1">
+                <a:solidFill>
+                  <a:srgbClr val="64748B"/>
+                </a:solidFill>
+                <a:latin typeface="Microsoft YaHei"/>
+              </a:rPr>
+              <a:t>B6</a:t>
+            </a:r>
+          </a:p>
+        </p:txBody>
+      </p:sp>
+      <p:sp>
+        <p:nvSpPr>
+          <p:cNvPr id="11" name="Rounded Rectangle 10"/>
+          <p:cNvSpPr/>
+          <p:nvPr/>
+        </p:nvSpPr>
+        <p:spPr>
+          <a:xfrm>
+            <a:off x="658368" y="1115568"/>
+            <a:ext cx="10287000" cy="749808"/>
+          </a:xfrm>
+          <a:prstGeom prst="roundRect">
+            <a:avLst/>
+          </a:prstGeom>
+          <a:solidFill>
+            <a:srgbClr val="F1F5F9"/>
+          </a:solidFill>
+          <a:ln w="9525">
+            <a:solidFill>
+              <a:srgbClr val="CBD5E1"/>
+            </a:solidFill>
+          </a:ln>
+        </p:spPr>
+        <p:style>
+          <a:lnRef idx="1">
+            <a:schemeClr val="accent1"/>
+          </a:lnRef>
+          <a:fillRef idx="3">
+            <a:schemeClr val="accent1"/>
+          </a:fillRef>
+          <a:effectRef idx="2">
+            <a:schemeClr val="accent1"/>
+          </a:effectRef>
+          <a:fontRef idx="minor">
+            <a:schemeClr val="lt1"/>
+          </a:fontRef>
+        </p:style>
+        <p:txBody>
+          <a:bodyPr rtlCol="0" anchor="ctr"/>
+          <a:lstStyle/>
+          <a:p>
+            <a:pPr algn="ctr"/>
+          </a:p>
+        </p:txBody>
+      </p:sp>
+      <p:sp>
+        <p:nvSpPr>
+          <p:cNvPr id="12" name="TextBox 11"/>
+          <p:cNvSpPr txBox="1"/>
+          <p:nvPr/>
+        </p:nvSpPr>
+        <p:spPr>
+          <a:xfrm>
+            <a:off x="868680" y="1298448"/>
+            <a:ext cx="1463040" cy="182880"/>
+          </a:xfrm>
+          <a:prstGeom prst="rect">
+            <a:avLst/>
+          </a:prstGeom>
+          <a:noFill/>
+        </p:spPr>
+        <p:txBody>
+          <a:bodyPr wrap="square" lIns="27432" rIns="27432" tIns="9144" bIns="9144" anchor="ctr">
+            <a:spAutoFit/>
+          </a:bodyPr>
+          <a:lstStyle/>
+          <a:p>
+            <a:pPr algn="l">
+              <a:defRPr sz="1000" b="1">
+                <a:solidFill>
+                  <a:srgbClr val="EA580C"/>
+                </a:solidFill>
+                <a:latin typeface="Microsoft YaHei"/>
+              </a:defRPr>
+            </a:pPr>
+            <a:r>
+              <a:rPr sz="1000" b="1">
+                <a:solidFill>
+                  <a:srgbClr val="EA580C"/>
+                </a:solidFill>
+                <a:latin typeface="Microsoft YaHei"/>
+              </a:rPr>
+              <a:t>Short answer</a:t>
+            </a:r>
+          </a:p>
+        </p:txBody>
+      </p:sp>
+      <p:sp>
+        <p:nvSpPr>
+          <p:cNvPr id="13" name="TextBox 12"/>
+          <p:cNvSpPr txBox="1"/>
+          <p:nvPr/>
+        </p:nvSpPr>
+        <p:spPr>
+          <a:xfrm>
+            <a:off x="2240280" y="1216152"/>
+            <a:ext cx="8366760" cy="329184"/>
+          </a:xfrm>
+          <a:prstGeom prst="rect">
+            <a:avLst/>
+          </a:prstGeom>
+          <a:noFill/>
+        </p:spPr>
+        <p:txBody>
+          <a:bodyPr wrap="square" lIns="27432" rIns="27432" tIns="9144" bIns="9144" anchor="ctr">
+            <a:spAutoFit/>
+          </a:bodyPr>
+          <a:lstStyle/>
+          <a:p>
+            <a:pPr algn="l">
+              <a:defRPr sz="1300" b="1">
+                <a:solidFill>
+                  <a:srgbClr val="0F172A"/>
+                </a:solidFill>
+                <a:latin typeface="Microsoft YaHei"/>
+              </a:defRPr>
+            </a:pPr>
+            <a:r>
+              <a:rPr sz="1300" b="1">
+                <a:solidFill>
+                  <a:srgbClr val="0F172A"/>
+                </a:solidFill>
+                <a:latin typeface="Microsoft YaHei"/>
+              </a:rPr>
+              <a:t>wMAE 是加权平均误差，wBias 是系统性高估/低估，越接近 0 越好。</a:t>
+            </a:r>
+          </a:p>
+        </p:txBody>
+      </p:sp>
+      <p:sp>
+        <p:nvSpPr>
+          <p:cNvPr id="14" name="Rectangle 13"/>
+          <p:cNvSpPr/>
+          <p:nvPr/>
+        </p:nvSpPr>
+        <p:spPr>
+          <a:xfrm>
+            <a:off x="713232" y="2176272"/>
+            <a:ext cx="4023360" cy="420624"/>
+          </a:xfrm>
+          <a:prstGeom prst="rect">
+            <a:avLst/>
+          </a:prstGeom>
+          <a:solidFill>
+            <a:srgbClr val="00796B"/>
+          </a:solidFill>
+          <a:ln>
+            <a:noFill/>
+          </a:ln>
+        </p:spPr>
+        <p:style>
+          <a:lnRef idx="1">
+            <a:schemeClr val="accent1"/>
+          </a:lnRef>
+          <a:fillRef idx="3">
+            <a:schemeClr val="accent1"/>
+          </a:fillRef>
+          <a:effectRef idx="2">
+            <a:schemeClr val="accent1"/>
+          </a:effectRef>
+          <a:fontRef idx="minor">
+            <a:schemeClr val="lt1"/>
+          </a:fontRef>
+        </p:style>
+        <p:txBody>
+          <a:bodyPr rtlCol="0" anchor="ctr"/>
+          <a:lstStyle/>
+          <a:p>
+            <a:pPr algn="ctr"/>
+          </a:p>
+        </p:txBody>
+      </p:sp>
+      <p:sp>
+        <p:nvSpPr>
+          <p:cNvPr id="15" name="TextBox 14"/>
+          <p:cNvSpPr txBox="1"/>
+          <p:nvPr/>
+        </p:nvSpPr>
+        <p:spPr>
+          <a:xfrm>
+            <a:off x="749808" y="2249424"/>
+            <a:ext cx="3950208" cy="292608"/>
+          </a:xfrm>
+          <a:prstGeom prst="rect">
+            <a:avLst/>
+          </a:prstGeom>
+          <a:noFill/>
+        </p:spPr>
+        <p:txBody>
+          <a:bodyPr wrap="square" lIns="27432" rIns="27432" tIns="9144" bIns="9144" anchor="ctr">
+            <a:spAutoFit/>
+          </a:bodyPr>
+          <a:lstStyle/>
+          <a:p>
+            <a:pPr algn="ctr">
+              <a:defRPr sz="1200" b="1">
+                <a:solidFill>
+                  <a:srgbClr val="FFFFFF"/>
+                </a:solidFill>
+                <a:latin typeface="Microsoft YaHei"/>
+              </a:defRPr>
+            </a:pPr>
+            <a:r>
+              <a:rPr sz="1200" b="1">
+                <a:solidFill>
+                  <a:srgbClr val="FFFFFF"/>
+                </a:solidFill>
+                <a:latin typeface="Microsoft YaHei"/>
+              </a:rPr>
+              <a:t>Evidence</a:t>
+            </a:r>
+          </a:p>
+        </p:txBody>
+      </p:sp>
+      <p:sp>
+        <p:nvSpPr>
+          <p:cNvPr id="16" name="Rectangle 15"/>
+          <p:cNvSpPr/>
+          <p:nvPr/>
+        </p:nvSpPr>
+        <p:spPr>
+          <a:xfrm>
+            <a:off x="4736592" y="2176272"/>
+            <a:ext cx="6035040" cy="420624"/>
+          </a:xfrm>
+          <a:prstGeom prst="rect">
+            <a:avLst/>
+          </a:prstGeom>
+          <a:solidFill>
+            <a:srgbClr val="00796B"/>
+          </a:solidFill>
+          <a:ln>
+            <a:noFill/>
+          </a:ln>
+        </p:spPr>
+        <p:style>
+          <a:lnRef idx="1">
+            <a:schemeClr val="accent1"/>
+          </a:lnRef>
+          <a:fillRef idx="3">
+            <a:schemeClr val="accent1"/>
+          </a:fillRef>
+          <a:effectRef idx="2">
+            <a:schemeClr val="accent1"/>
+          </a:effectRef>
+          <a:fontRef idx="minor">
+            <a:schemeClr val="lt1"/>
+          </a:fontRef>
+        </p:style>
+        <p:txBody>
+          <a:bodyPr rtlCol="0" anchor="ctr"/>
+          <a:lstStyle/>
+          <a:p>
+            <a:pPr algn="ctr"/>
+          </a:p>
+        </p:txBody>
+      </p:sp>
+      <p:sp>
+        <p:nvSpPr>
+          <p:cNvPr id="17" name="TextBox 16"/>
+          <p:cNvSpPr txBox="1"/>
+          <p:nvPr/>
+        </p:nvSpPr>
+        <p:spPr>
+          <a:xfrm>
+            <a:off x="4773168" y="2249424"/>
+            <a:ext cx="5961888" cy="292608"/>
+          </a:xfrm>
+          <a:prstGeom prst="rect">
+            <a:avLst/>
+          </a:prstGeom>
+          <a:noFill/>
+        </p:spPr>
+        <p:txBody>
+          <a:bodyPr wrap="square" lIns="27432" rIns="27432" tIns="9144" bIns="9144" anchor="ctr">
+            <a:spAutoFit/>
+          </a:bodyPr>
+          <a:lstStyle/>
+          <a:p>
+            <a:pPr algn="ctr">
+              <a:defRPr sz="1200" b="1">
+                <a:solidFill>
+                  <a:srgbClr val="FFFFFF"/>
+                </a:solidFill>
+                <a:latin typeface="Microsoft YaHei"/>
+              </a:defRPr>
+            </a:pPr>
+            <a:r>
+              <a:rPr sz="1200" b="1">
+                <a:solidFill>
+                  <a:srgbClr val="FFFFFF"/>
+                </a:solidFill>
+                <a:latin typeface="Microsoft YaHei"/>
+              </a:rPr>
+              <a:t>Value / implication</a:t>
+            </a:r>
+          </a:p>
+        </p:txBody>
+      </p:sp>
+      <p:sp>
+        <p:nvSpPr>
+          <p:cNvPr id="18" name="Rectangle 17"/>
+          <p:cNvSpPr/>
+          <p:nvPr/>
+        </p:nvSpPr>
+        <p:spPr>
+          <a:xfrm>
+            <a:off x="713232" y="2596896"/>
+            <a:ext cx="4023360" cy="420624"/>
+          </a:xfrm>
+          <a:prstGeom prst="rect">
+            <a:avLst/>
+          </a:prstGeom>
+          <a:solidFill>
+            <a:srgbClr val="F8FAFC"/>
+          </a:solidFill>
+          <a:ln w="9525">
+            <a:solidFill>
+              <a:srgbClr val="CBD5E1"/>
+            </a:solidFill>
+          </a:ln>
+        </p:spPr>
+        <p:style>
+          <a:lnRef idx="1">
+            <a:schemeClr val="accent1"/>
+          </a:lnRef>
+          <a:fillRef idx="3">
+            <a:schemeClr val="accent1"/>
+          </a:fillRef>
+          <a:effectRef idx="2">
+            <a:schemeClr val="accent1"/>
+          </a:effectRef>
+          <a:fontRef idx="minor">
+            <a:schemeClr val="lt1"/>
+          </a:fontRef>
+        </p:style>
+        <p:txBody>
+          <a:bodyPr rtlCol="0" anchor="ctr"/>
+          <a:lstStyle/>
+          <a:p>
+            <a:pPr algn="ctr"/>
+          </a:p>
+        </p:txBody>
+      </p:sp>
+      <p:sp>
+        <p:nvSpPr>
+          <p:cNvPr id="19" name="TextBox 18"/>
+          <p:cNvSpPr txBox="1"/>
+          <p:nvPr/>
+        </p:nvSpPr>
+        <p:spPr>
+          <a:xfrm>
+            <a:off x="768096" y="2660903"/>
+            <a:ext cx="3913632" cy="292608"/>
+          </a:xfrm>
+          <a:prstGeom prst="rect">
+            <a:avLst/>
+          </a:prstGeom>
+          <a:noFill/>
+        </p:spPr>
+        <p:txBody>
+          <a:bodyPr wrap="square" lIns="27432" rIns="27432" tIns="9144" bIns="9144" anchor="t">
+            <a:spAutoFit/>
+          </a:bodyPr>
+          <a:lstStyle/>
+          <a:p>
+            <a:pPr algn="l">
+              <a:defRPr sz="1200" b="1">
+                <a:solidFill>
+                  <a:srgbClr val="0F172A"/>
+                </a:solidFill>
+                <a:latin typeface="Microsoft YaHei"/>
+              </a:defRPr>
+            </a:pPr>
+            <a:r>
+              <a:rPr sz="1200" b="1">
+                <a:solidFill>
+                  <a:srgbClr val="0F172A"/>
+                </a:solidFill>
+                <a:latin typeface="Microsoft YaHei"/>
+              </a:rPr>
+              <a:t>Historical XGBoost</a:t>
+            </a:r>
+          </a:p>
+        </p:txBody>
+      </p:sp>
+      <p:sp>
+        <p:nvSpPr>
+          <p:cNvPr id="20" name="Rectangle 19"/>
+          <p:cNvSpPr/>
+          <p:nvPr/>
+        </p:nvSpPr>
+        <p:spPr>
+          <a:xfrm>
+            <a:off x="4736592" y="2596896"/>
+            <a:ext cx="6035040" cy="420624"/>
+          </a:xfrm>
+          <a:prstGeom prst="rect">
+            <a:avLst/>
+          </a:prstGeom>
+          <a:solidFill>
+            <a:srgbClr val="F8FAFC"/>
+          </a:solidFill>
+          <a:ln w="9525">
+            <a:solidFill>
+              <a:srgbClr val="CBD5E1"/>
+            </a:solidFill>
+          </a:ln>
+        </p:spPr>
+        <p:style>
+          <a:lnRef idx="1">
+            <a:schemeClr val="accent1"/>
+          </a:lnRef>
+          <a:fillRef idx="3">
+            <a:schemeClr val="accent1"/>
+          </a:fillRef>
+          <a:effectRef idx="2">
+            <a:schemeClr val="accent1"/>
+          </a:effectRef>
+          <a:fontRef idx="minor">
+            <a:schemeClr val="lt1"/>
+          </a:fontRef>
+        </p:style>
+        <p:txBody>
+          <a:bodyPr rtlCol="0" anchor="ctr"/>
+          <a:lstStyle/>
+          <a:p>
+            <a:pPr algn="ctr"/>
+          </a:p>
+        </p:txBody>
+      </p:sp>
+      <p:sp>
+        <p:nvSpPr>
+          <p:cNvPr id="21" name="TextBox 20"/>
+          <p:cNvSpPr txBox="1"/>
+          <p:nvPr/>
+        </p:nvSpPr>
+        <p:spPr>
+          <a:xfrm>
+            <a:off x="4791456" y="2660903"/>
+            <a:ext cx="5925312" cy="292608"/>
+          </a:xfrm>
+          <a:prstGeom prst="rect">
+            <a:avLst/>
+          </a:prstGeom>
+          <a:noFill/>
+        </p:spPr>
+        <p:txBody>
+          <a:bodyPr wrap="square" lIns="27432" rIns="27432" tIns="9144" bIns="9144" anchor="t">
+            <a:spAutoFit/>
+          </a:bodyPr>
+          <a:lstStyle/>
+          <a:p>
+            <a:pPr algn="l">
+              <a:defRPr sz="1200" b="0">
+                <a:solidFill>
+                  <a:srgbClr val="0F172A"/>
+                </a:solidFill>
+                <a:latin typeface="Microsoft YaHei"/>
+              </a:defRPr>
+            </a:pPr>
+            <a:r>
+              <a:rPr sz="1200" b="0">
+                <a:solidFill>
+                  <a:srgbClr val="0F172A"/>
+                </a:solidFill>
+                <a:latin typeface="Microsoft YaHei"/>
+              </a:rPr>
+              <a:t>wMAE 4.3377; wBias +3.6052</a:t>
+            </a:r>
+          </a:p>
+        </p:txBody>
+      </p:sp>
+      <p:sp>
+        <p:nvSpPr>
+          <p:cNvPr id="22" name="Rectangle 21"/>
+          <p:cNvSpPr/>
+          <p:nvPr/>
+        </p:nvSpPr>
+        <p:spPr>
+          <a:xfrm>
+            <a:off x="713232" y="3017520"/>
+            <a:ext cx="4023360" cy="420624"/>
+          </a:xfrm>
+          <a:prstGeom prst="rect">
+            <a:avLst/>
+          </a:prstGeom>
+          <a:solidFill>
+            <a:srgbClr val="F1F5F9"/>
+          </a:solidFill>
+          <a:ln w="9525">
+            <a:solidFill>
+              <a:srgbClr val="CBD5E1"/>
+            </a:solidFill>
+          </a:ln>
+        </p:spPr>
+        <p:style>
+          <a:lnRef idx="1">
+            <a:schemeClr val="accent1"/>
+          </a:lnRef>
+          <a:fillRef idx="3">
+            <a:schemeClr val="accent1"/>
+          </a:fillRef>
+          <a:effectRef idx="2">
+            <a:schemeClr val="accent1"/>
+          </a:effectRef>
+          <a:fontRef idx="minor">
+            <a:schemeClr val="lt1"/>
+          </a:fontRef>
+        </p:style>
+        <p:txBody>
+          <a:bodyPr rtlCol="0" anchor="ctr"/>
+          <a:lstStyle/>
+          <a:p>
+            <a:pPr algn="ctr"/>
+          </a:p>
+        </p:txBody>
+      </p:sp>
+      <p:sp>
+        <p:nvSpPr>
+          <p:cNvPr id="23" name="TextBox 22"/>
+          <p:cNvSpPr txBox="1"/>
+          <p:nvPr/>
+        </p:nvSpPr>
+        <p:spPr>
+          <a:xfrm>
+            <a:off x="768096" y="3081527"/>
+            <a:ext cx="3913632" cy="292608"/>
+          </a:xfrm>
+          <a:prstGeom prst="rect">
+            <a:avLst/>
+          </a:prstGeom>
+          <a:noFill/>
+        </p:spPr>
+        <p:txBody>
+          <a:bodyPr wrap="square" lIns="27432" rIns="27432" tIns="9144" bIns="9144" anchor="t">
+            <a:spAutoFit/>
+          </a:bodyPr>
+          <a:lstStyle/>
+          <a:p>
+            <a:pPr algn="l">
+              <a:defRPr sz="1200" b="1">
+                <a:solidFill>
+                  <a:srgbClr val="0F172A"/>
+                </a:solidFill>
+                <a:latin typeface="Microsoft YaHei"/>
+              </a:defRPr>
+            </a:pPr>
+            <a:r>
+              <a:rPr sz="1200" b="1">
+                <a:solidFill>
+                  <a:srgbClr val="0F172A"/>
+                </a:solidFill>
+                <a:latin typeface="Microsoft YaHei"/>
+              </a:rPr>
+              <a:t>Primary gated</a:t>
+            </a:r>
+          </a:p>
+        </p:txBody>
+      </p:sp>
+      <p:sp>
+        <p:nvSpPr>
+          <p:cNvPr id="24" name="Rectangle 23"/>
+          <p:cNvSpPr/>
+          <p:nvPr/>
+        </p:nvSpPr>
+        <p:spPr>
+          <a:xfrm>
+            <a:off x="4736592" y="3017520"/>
+            <a:ext cx="6035040" cy="420624"/>
+          </a:xfrm>
+          <a:prstGeom prst="rect">
+            <a:avLst/>
+          </a:prstGeom>
+          <a:solidFill>
+            <a:srgbClr val="F1F5F9"/>
+          </a:solidFill>
+          <a:ln w="9525">
+            <a:solidFill>
+              <a:srgbClr val="CBD5E1"/>
+            </a:solidFill>
+          </a:ln>
+        </p:spPr>
+        <p:style>
+          <a:lnRef idx="1">
+            <a:schemeClr val="accent1"/>
+          </a:lnRef>
+          <a:fillRef idx="3">
+            <a:schemeClr val="accent1"/>
+          </a:fillRef>
+          <a:effectRef idx="2">
+            <a:schemeClr val="accent1"/>
+          </a:effectRef>
+          <a:fontRef idx="minor">
+            <a:schemeClr val="lt1"/>
+          </a:fontRef>
+        </p:style>
+        <p:txBody>
+          <a:bodyPr rtlCol="0" anchor="ctr"/>
+          <a:lstStyle/>
+          <a:p>
+            <a:pPr algn="ctr"/>
+          </a:p>
+        </p:txBody>
+      </p:sp>
+      <p:sp>
+        <p:nvSpPr>
+          <p:cNvPr id="25" name="TextBox 24"/>
+          <p:cNvSpPr txBox="1"/>
+          <p:nvPr/>
+        </p:nvSpPr>
+        <p:spPr>
+          <a:xfrm>
+            <a:off x="4791456" y="3081527"/>
+            <a:ext cx="5925312" cy="292608"/>
+          </a:xfrm>
+          <a:prstGeom prst="rect">
+            <a:avLst/>
+          </a:prstGeom>
+          <a:noFill/>
+        </p:spPr>
+        <p:txBody>
+          <a:bodyPr wrap="square" lIns="27432" rIns="27432" tIns="9144" bIns="9144" anchor="t">
+            <a:spAutoFit/>
+          </a:bodyPr>
+          <a:lstStyle/>
+          <a:p>
+            <a:pPr algn="l">
+              <a:defRPr sz="1200" b="0">
+                <a:solidFill>
+                  <a:srgbClr val="0F172A"/>
+                </a:solidFill>
+                <a:latin typeface="Microsoft YaHei"/>
+              </a:defRPr>
+            </a:pPr>
+            <a:r>
+              <a:rPr sz="1200" b="0">
+                <a:solidFill>
+                  <a:srgbClr val="0F172A"/>
+                </a:solidFill>
+                <a:latin typeface="Microsoft YaHei"/>
+              </a:rPr>
+              <a:t>wMAE 2.5023; wBias -0.0230</a:t>
+            </a:r>
+          </a:p>
+        </p:txBody>
+      </p:sp>
+      <p:sp>
+        <p:nvSpPr>
+          <p:cNvPr id="26" name="Rectangle 25"/>
+          <p:cNvSpPr/>
+          <p:nvPr/>
+        </p:nvSpPr>
+        <p:spPr>
+          <a:xfrm>
+            <a:off x="713232" y="3438144"/>
+            <a:ext cx="4023360" cy="420624"/>
+          </a:xfrm>
+          <a:prstGeom prst="rect">
+            <a:avLst/>
+          </a:prstGeom>
+          <a:solidFill>
+            <a:srgbClr val="F8FAFC"/>
+          </a:solidFill>
+          <a:ln w="9525">
+            <a:solidFill>
+              <a:srgbClr val="CBD5E1"/>
+            </a:solidFill>
+          </a:ln>
+        </p:spPr>
+        <p:style>
+          <a:lnRef idx="1">
+            <a:schemeClr val="accent1"/>
+          </a:lnRef>
+          <a:fillRef idx="3">
+            <a:schemeClr val="accent1"/>
+          </a:fillRef>
+          <a:effectRef idx="2">
+            <a:schemeClr val="accent1"/>
+          </a:effectRef>
+          <a:fontRef idx="minor">
+            <a:schemeClr val="lt1"/>
+          </a:fontRef>
+        </p:style>
+        <p:txBody>
+          <a:bodyPr rtlCol="0" anchor="ctr"/>
+          <a:lstStyle/>
+          <a:p>
+            <a:pPr algn="ctr"/>
+          </a:p>
+        </p:txBody>
+      </p:sp>
+      <p:sp>
+        <p:nvSpPr>
+          <p:cNvPr id="27" name="TextBox 26"/>
+          <p:cNvSpPr txBox="1"/>
+          <p:nvPr/>
+        </p:nvSpPr>
+        <p:spPr>
+          <a:xfrm>
+            <a:off x="768096" y="3502151"/>
+            <a:ext cx="3913632" cy="292608"/>
+          </a:xfrm>
+          <a:prstGeom prst="rect">
+            <a:avLst/>
+          </a:prstGeom>
+          <a:noFill/>
+        </p:spPr>
+        <p:txBody>
+          <a:bodyPr wrap="square" lIns="27432" rIns="27432" tIns="9144" bIns="9144" anchor="t">
+            <a:spAutoFit/>
+          </a:bodyPr>
+          <a:lstStyle/>
+          <a:p>
+            <a:pPr algn="l">
+              <a:defRPr sz="1200" b="1">
+                <a:solidFill>
+                  <a:srgbClr val="0F172A"/>
+                </a:solidFill>
+                <a:latin typeface="Microsoft YaHei"/>
+              </a:defRPr>
+            </a:pPr>
+            <a:r>
+              <a:rPr sz="1200" b="1">
+                <a:solidFill>
+                  <a:srgbClr val="0F172A"/>
+                </a:solidFill>
+                <a:latin typeface="Microsoft YaHei"/>
+              </a:rPr>
+              <a:t>Within 2 trips</a:t>
+            </a:r>
+          </a:p>
+        </p:txBody>
+      </p:sp>
+      <p:sp>
+        <p:nvSpPr>
+          <p:cNvPr id="28" name="Rectangle 27"/>
+          <p:cNvSpPr/>
+          <p:nvPr/>
+        </p:nvSpPr>
+        <p:spPr>
+          <a:xfrm>
+            <a:off x="4736592" y="3438144"/>
+            <a:ext cx="6035040" cy="420624"/>
+          </a:xfrm>
+          <a:prstGeom prst="rect">
+            <a:avLst/>
+          </a:prstGeom>
+          <a:solidFill>
+            <a:srgbClr val="F8FAFC"/>
+          </a:solidFill>
+          <a:ln w="9525">
+            <a:solidFill>
+              <a:srgbClr val="CBD5E1"/>
+            </a:solidFill>
+          </a:ln>
+        </p:spPr>
+        <p:style>
+          <a:lnRef idx="1">
+            <a:schemeClr val="accent1"/>
+          </a:lnRef>
+          <a:fillRef idx="3">
+            <a:schemeClr val="accent1"/>
+          </a:fillRef>
+          <a:effectRef idx="2">
+            <a:schemeClr val="accent1"/>
+          </a:effectRef>
+          <a:fontRef idx="minor">
+            <a:schemeClr val="lt1"/>
+          </a:fontRef>
+        </p:style>
+        <p:txBody>
+          <a:bodyPr rtlCol="0" anchor="ctr"/>
+          <a:lstStyle/>
+          <a:p>
+            <a:pPr algn="ctr"/>
+          </a:p>
+        </p:txBody>
+      </p:sp>
+      <p:sp>
+        <p:nvSpPr>
+          <p:cNvPr id="29" name="TextBox 28"/>
+          <p:cNvSpPr txBox="1"/>
+          <p:nvPr/>
+        </p:nvSpPr>
+        <p:spPr>
+          <a:xfrm>
+            <a:off x="4791456" y="3502151"/>
+            <a:ext cx="5925312" cy="292608"/>
+          </a:xfrm>
+          <a:prstGeom prst="rect">
+            <a:avLst/>
+          </a:prstGeom>
+          <a:noFill/>
+        </p:spPr>
+        <p:txBody>
+          <a:bodyPr wrap="square" lIns="27432" rIns="27432" tIns="9144" bIns="9144" anchor="t">
+            <a:spAutoFit/>
+          </a:bodyPr>
+          <a:lstStyle/>
+          <a:p>
+            <a:pPr algn="l">
+              <a:defRPr sz="1200" b="0">
+                <a:solidFill>
+                  <a:srgbClr val="0F172A"/>
+                </a:solidFill>
+                <a:latin typeface="Microsoft YaHei"/>
+              </a:defRPr>
+            </a:pPr>
+            <a:r>
+              <a:rPr sz="1200" b="0">
+                <a:solidFill>
+                  <a:srgbClr val="0F172A"/>
+                </a:solidFill>
+                <a:latin typeface="Microsoft YaHei"/>
+              </a:rPr>
+              <a:t>54.5% households</a:t>
+            </a:r>
+          </a:p>
+        </p:txBody>
+      </p:sp>
+      <p:sp>
+        <p:nvSpPr>
+          <p:cNvPr id="30" name="Rectangle 29"/>
+          <p:cNvSpPr/>
+          <p:nvPr/>
+        </p:nvSpPr>
+        <p:spPr>
+          <a:xfrm>
+            <a:off x="713232" y="3858768"/>
+            <a:ext cx="4023360" cy="420624"/>
+          </a:xfrm>
+          <a:prstGeom prst="rect">
+            <a:avLst/>
+          </a:prstGeom>
+          <a:solidFill>
+            <a:srgbClr val="F1F5F9"/>
+          </a:solidFill>
+          <a:ln w="9525">
+            <a:solidFill>
+              <a:srgbClr val="CBD5E1"/>
+            </a:solidFill>
+          </a:ln>
+        </p:spPr>
+        <p:style>
+          <a:lnRef idx="1">
+            <a:schemeClr val="accent1"/>
+          </a:lnRef>
+          <a:fillRef idx="3">
+            <a:schemeClr val="accent1"/>
+          </a:fillRef>
+          <a:effectRef idx="2">
+            <a:schemeClr val="accent1"/>
+          </a:effectRef>
+          <a:fontRef idx="minor">
+            <a:schemeClr val="lt1"/>
+          </a:fontRef>
+        </p:style>
+        <p:txBody>
+          <a:bodyPr rtlCol="0" anchor="ctr"/>
+          <a:lstStyle/>
+          <a:p>
+            <a:pPr algn="ctr"/>
+          </a:p>
+        </p:txBody>
+      </p:sp>
+      <p:sp>
+        <p:nvSpPr>
+          <p:cNvPr id="31" name="TextBox 30"/>
+          <p:cNvSpPr txBox="1"/>
+          <p:nvPr/>
+        </p:nvSpPr>
+        <p:spPr>
+          <a:xfrm>
+            <a:off x="768096" y="3922776"/>
+            <a:ext cx="3913632" cy="292608"/>
+          </a:xfrm>
+          <a:prstGeom prst="rect">
+            <a:avLst/>
+          </a:prstGeom>
+          <a:noFill/>
+        </p:spPr>
+        <p:txBody>
+          <a:bodyPr wrap="square" lIns="27432" rIns="27432" tIns="9144" bIns="9144" anchor="t">
+            <a:spAutoFit/>
+          </a:bodyPr>
+          <a:lstStyle/>
+          <a:p>
+            <a:pPr algn="l">
+              <a:defRPr sz="1200" b="1">
+                <a:solidFill>
+                  <a:srgbClr val="0F172A"/>
+                </a:solidFill>
+                <a:latin typeface="Microsoft YaHei"/>
+              </a:defRPr>
+            </a:pPr>
+            <a:r>
+              <a:rPr sz="1200" b="1">
+                <a:solidFill>
+                  <a:srgbClr val="0F172A"/>
+                </a:solidFill>
+                <a:latin typeface="Microsoft YaHei"/>
+              </a:rPr>
+              <a:t>Within 3 trips</a:t>
+            </a:r>
+          </a:p>
+        </p:txBody>
+      </p:sp>
+      <p:sp>
+        <p:nvSpPr>
+          <p:cNvPr id="32" name="Rectangle 31"/>
+          <p:cNvSpPr/>
+          <p:nvPr/>
+        </p:nvSpPr>
+        <p:spPr>
+          <a:xfrm>
+            <a:off x="4736592" y="3858768"/>
+            <a:ext cx="6035040" cy="420624"/>
+          </a:xfrm>
+          <a:prstGeom prst="rect">
+            <a:avLst/>
+          </a:prstGeom>
+          <a:solidFill>
+            <a:srgbClr val="F1F5F9"/>
+          </a:solidFill>
+          <a:ln w="9525">
+            <a:solidFill>
+              <a:srgbClr val="CBD5E1"/>
+            </a:solidFill>
+          </a:ln>
+        </p:spPr>
+        <p:style>
+          <a:lnRef idx="1">
+            <a:schemeClr val="accent1"/>
+          </a:lnRef>
+          <a:fillRef idx="3">
+            <a:schemeClr val="accent1"/>
+          </a:fillRef>
+          <a:effectRef idx="2">
+            <a:schemeClr val="accent1"/>
+          </a:effectRef>
+          <a:fontRef idx="minor">
+            <a:schemeClr val="lt1"/>
+          </a:fontRef>
+        </p:style>
+        <p:txBody>
+          <a:bodyPr rtlCol="0" anchor="ctr"/>
+          <a:lstStyle/>
+          <a:p>
+            <a:pPr algn="ctr"/>
+          </a:p>
+        </p:txBody>
+      </p:sp>
+      <p:sp>
+        <p:nvSpPr>
+          <p:cNvPr id="33" name="TextBox 32"/>
+          <p:cNvSpPr txBox="1"/>
+          <p:nvPr/>
+        </p:nvSpPr>
+        <p:spPr>
+          <a:xfrm>
+            <a:off x="4791456" y="3922776"/>
+            <a:ext cx="5925312" cy="292608"/>
+          </a:xfrm>
+          <a:prstGeom prst="rect">
+            <a:avLst/>
+          </a:prstGeom>
+          <a:noFill/>
+        </p:spPr>
+        <p:txBody>
+          <a:bodyPr wrap="square" lIns="27432" rIns="27432" tIns="9144" bIns="9144" anchor="t">
+            <a:spAutoFit/>
+          </a:bodyPr>
+          <a:lstStyle/>
+          <a:p>
+            <a:pPr algn="l">
+              <a:defRPr sz="1200" b="0">
+                <a:solidFill>
+                  <a:srgbClr val="0F172A"/>
+                </a:solidFill>
+                <a:latin typeface="Microsoft YaHei"/>
+              </a:defRPr>
+            </a:pPr>
+            <a:r>
+              <a:rPr sz="1200" b="0">
+                <a:solidFill>
+                  <a:srgbClr val="0F172A"/>
+                </a:solidFill>
+                <a:latin typeface="Microsoft YaHei"/>
+              </a:rPr>
+              <a:t>71.2% households</a:t>
+            </a:r>
+          </a:p>
+        </p:txBody>
+      </p:sp>
+      <p:sp>
+        <p:nvSpPr>
+          <p:cNvPr id="34" name="Rounded Rectangle 33"/>
+          <p:cNvSpPr/>
+          <p:nvPr/>
+        </p:nvSpPr>
+        <p:spPr>
+          <a:xfrm>
+            <a:off x="749808" y="5074920"/>
+            <a:ext cx="10012680" cy="1005840"/>
+          </a:xfrm>
+          <a:prstGeom prst="roundRect">
+            <a:avLst/>
+          </a:prstGeom>
+          <a:solidFill>
+            <a:srgbClr val="F1F5F9"/>
+          </a:solidFill>
+          <a:ln w="9525">
+            <a:solidFill>
+              <a:srgbClr val="CBD5E1"/>
+            </a:solidFill>
+          </a:ln>
+        </p:spPr>
+        <p:style>
+          <a:lnRef idx="1">
+            <a:schemeClr val="accent1"/>
+          </a:lnRef>
+          <a:fillRef idx="3">
+            <a:schemeClr val="accent1"/>
+          </a:fillRef>
+          <a:effectRef idx="2">
+            <a:schemeClr val="accent1"/>
+          </a:effectRef>
+          <a:fontRef idx="minor">
+            <a:schemeClr val="lt1"/>
+          </a:fontRef>
+        </p:style>
+        <p:txBody>
+          <a:bodyPr rtlCol="0" anchor="ctr"/>
+          <a:lstStyle/>
+          <a:p>
+            <a:pPr algn="ctr"/>
+          </a:p>
+        </p:txBody>
+      </p:sp>
+      <p:sp>
+        <p:nvSpPr>
+          <p:cNvPr id="35" name="Rectangle 34"/>
+          <p:cNvSpPr/>
+          <p:nvPr/>
+        </p:nvSpPr>
+        <p:spPr>
+          <a:xfrm>
+            <a:off x="749808" y="5074920"/>
+            <a:ext cx="50292" cy="1005840"/>
+          </a:xfrm>
+          <a:prstGeom prst="rect">
+            <a:avLst/>
+          </a:prstGeom>
+          <a:solidFill>
+            <a:srgbClr val="2563EB"/>
+          </a:solidFill>
+          <a:ln>
+            <a:noFill/>
+          </a:ln>
+        </p:spPr>
+        <p:style>
+          <a:lnRef idx="1">
+            <a:schemeClr val="accent1"/>
+          </a:lnRef>
+          <a:fillRef idx="3">
+            <a:schemeClr val="accent1"/>
+          </a:fillRef>
+          <a:effectRef idx="2">
+            <a:schemeClr val="accent1"/>
+          </a:effectRef>
+          <a:fontRef idx="minor">
+            <a:schemeClr val="lt1"/>
+          </a:fontRef>
+        </p:style>
+        <p:txBody>
+          <a:bodyPr rtlCol="0" anchor="ctr"/>
+          <a:lstStyle/>
+          <a:p>
+            <a:pPr algn="ctr"/>
+          </a:p>
+        </p:txBody>
+      </p:sp>
+      <p:sp>
+        <p:nvSpPr>
+          <p:cNvPr id="36" name="TextBox 35"/>
+          <p:cNvSpPr txBox="1"/>
+          <p:nvPr/>
+        </p:nvSpPr>
+        <p:spPr>
+          <a:xfrm>
+            <a:off x="914400" y="5166359"/>
+            <a:ext cx="9720072" cy="362102"/>
+          </a:xfrm>
+          <a:prstGeom prst="rect">
+            <a:avLst/>
+          </a:prstGeom>
+          <a:noFill/>
+        </p:spPr>
+        <p:txBody>
+          <a:bodyPr wrap="square" lIns="27432" rIns="27432" tIns="9144" bIns="9144" anchor="t">
+            <a:spAutoFit/>
+          </a:bodyPr>
+          <a:lstStyle/>
+          <a:p>
+            <a:pPr algn="l">
+              <a:defRPr sz="1200" b="1">
+                <a:solidFill>
+                  <a:srgbClr val="0F172A"/>
+                </a:solidFill>
+                <a:latin typeface="Microsoft YaHei"/>
+              </a:defRPr>
+            </a:pPr>
+            <a:r>
+              <a:rPr sz="1200" b="1">
+                <a:solidFill>
+                  <a:srgbClr val="0F172A"/>
+                </a:solidFill>
+                <a:latin typeface="Microsoft YaHei"/>
+              </a:rPr>
+              <a:t>答法：MAE 看单个家庭预测误差，bias 看总需求是否系统性偏高或偏低。我们的核心收益不是只降低误差，而是几乎消除了 2022 的系统性高估。</a:t>
+            </a:r>
+          </a:p>
+        </p:txBody>
+      </p:sp>
+      <p:sp>
+        <p:nvSpPr>
+          <p:cNvPr id="37" name="TextBox 36"/>
+          <p:cNvSpPr txBox="1"/>
+          <p:nvPr/>
+        </p:nvSpPr>
+        <p:spPr>
+          <a:xfrm>
+            <a:off x="914400" y="5592470"/>
+            <a:ext cx="9720072" cy="415137"/>
+          </a:xfrm>
+          <a:prstGeom prst="rect">
+            <a:avLst/>
+          </a:prstGeom>
+          <a:noFill/>
+        </p:spPr>
+        <p:txBody>
+          <a:bodyPr wrap="square" lIns="27432" rIns="27432" tIns="9144" bIns="9144" anchor="t">
+            <a:spAutoFit/>
+          </a:bodyPr>
+          <a:lstStyle/>
+          <a:p>
+            <a:pPr algn="l">
+              <a:defRPr sz="1200" b="0">
+                <a:solidFill>
+                  <a:srgbClr val="64748B"/>
+                </a:solidFill>
+                <a:latin typeface="Microsoft YaHei"/>
+              </a:defRPr>
+            </a:pPr>
           </a:p>
         </p:txBody>
       </p:sp>

--- a/outputs/final_project/NHTS_Travel_Behavior_Template_Presentation.pptx
+++ b/outputs/final_project/NHTS_Travel_Behavior_Template_Presentation.pptx
@@ -37,6 +37,7 @@
     <p:sldId id="282" r:id="rId33"/>
     <p:sldId id="283" r:id="rId34"/>
     <p:sldId id="284" r:id="rId35"/>
+    <p:sldId id="285" r:id="rId36"/>
   </p:sldIdLst>
   <p:sldSz cx="12192000" cy="6858000"/>
   <p:notesSz cx="6858000" cy="9144000"/>
@@ -44508,6 +44509,1552 @@
               </a:rPr>
               <a:t>Core question: can event priors correct the post-pandemic overprediction without using 2022 target labels for calibration?</a:t>
             </a:r>
+          </a:p>
+        </p:txBody>
+      </p:sp>
+    </p:spTree>
+  </p:cSld>
+  <p:clrMapOvr>
+    <a:masterClrMapping/>
+  </p:clrMapOvr>
+</p:sld>
+</file>
+
+<file path=ppt/slides/slide30.xml><?xml version="1.0" encoding="utf-8"?>
+<p:sld xmlns:a="http://schemas.openxmlformats.org/drawingml/2006/main" xmlns:p="http://schemas.openxmlformats.org/presentationml/2006/main" xmlns:r="http://schemas.openxmlformats.org/officeDocument/2006/relationships">
+  <p:cSld>
+    <p:bg>
+      <p:bgPr>
+        <a:solidFill>
+          <a:srgbClr val="FFFFFF"/>
+        </a:solidFill>
+        <a:effectLst/>
+      </p:bgPr>
+    </p:bg>
+    <p:spTree>
+      <p:nvGrpSpPr>
+        <p:cNvPr id="1" name=""/>
+        <p:cNvGrpSpPr/>
+        <p:nvPr/>
+      </p:nvGrpSpPr>
+      <p:grpSpPr/>
+      <p:sp>
+        <p:nvSpPr>
+          <p:cNvPr id="2" name="TextBox 1"/>
+          <p:cNvSpPr txBox="1"/>
+          <p:nvPr/>
+        </p:nvSpPr>
+        <p:spPr>
+          <a:xfrm>
+            <a:off x="384048" y="109728"/>
+            <a:ext cx="4480560" cy="164592"/>
+          </a:xfrm>
+          <a:prstGeom prst="rect">
+            <a:avLst/>
+          </a:prstGeom>
+          <a:noFill/>
+        </p:spPr>
+        <p:txBody>
+          <a:bodyPr wrap="square" lIns="27432" rIns="27432" tIns="9144" bIns="9144" anchor="ctr">
+            <a:spAutoFit/>
+          </a:bodyPr>
+          <a:lstStyle/>
+          <a:p>
+            <a:pPr algn="l">
+              <a:defRPr sz="750" b="1">
+                <a:solidFill>
+                  <a:srgbClr val="64748B"/>
+                </a:solidFill>
+                <a:latin typeface="Microsoft YaHei"/>
+              </a:defRPr>
+            </a:pPr>
+            <a:r>
+              <a:rPr sz="750" b="1">
+                <a:solidFill>
+                  <a:srgbClr val="64748B"/>
+                </a:solidFill>
+                <a:latin typeface="Microsoft YaHei"/>
+              </a:rPr>
+              <a:t>Mobility Inequality and Sustainable Development</a:t>
+            </a:r>
+          </a:p>
+        </p:txBody>
+      </p:sp>
+      <p:sp>
+        <p:nvSpPr>
+          <p:cNvPr id="3" name="TextBox 2"/>
+          <p:cNvSpPr txBox="1"/>
+          <p:nvPr/>
+        </p:nvSpPr>
+        <p:spPr>
+          <a:xfrm>
+            <a:off x="384048" y="347472"/>
+            <a:ext cx="777240" cy="292608"/>
+          </a:xfrm>
+          <a:prstGeom prst="rect">
+            <a:avLst/>
+          </a:prstGeom>
+          <a:noFill/>
+        </p:spPr>
+        <p:txBody>
+          <a:bodyPr wrap="square" lIns="27432" rIns="27432" tIns="9144" bIns="9144" anchor="ctr">
+            <a:spAutoFit/>
+          </a:bodyPr>
+          <a:lstStyle/>
+          <a:p>
+            <a:pPr algn="l">
+              <a:defRPr sz="1300" b="1">
+                <a:solidFill>
+                  <a:srgbClr val="EA580C"/>
+                </a:solidFill>
+                <a:latin typeface="Microsoft YaHei"/>
+              </a:defRPr>
+            </a:pPr>
+            <a:r>
+              <a:rPr sz="1300" b="1">
+                <a:solidFill>
+                  <a:srgbClr val="EA580C"/>
+                </a:solidFill>
+                <a:latin typeface="Microsoft YaHei"/>
+              </a:rPr>
+              <a:t>BACKUP</a:t>
+            </a:r>
+          </a:p>
+        </p:txBody>
+      </p:sp>
+      <p:sp>
+        <p:nvSpPr>
+          <p:cNvPr id="4" name="TextBox 3"/>
+          <p:cNvSpPr txBox="1"/>
+          <p:nvPr/>
+        </p:nvSpPr>
+        <p:spPr>
+          <a:xfrm>
+            <a:off x="1234440" y="246888"/>
+            <a:ext cx="8412480" cy="329184"/>
+          </a:xfrm>
+          <a:prstGeom prst="rect">
+            <a:avLst/>
+          </a:prstGeom>
+          <a:noFill/>
+        </p:spPr>
+        <p:txBody>
+          <a:bodyPr wrap="square" lIns="27432" rIns="27432" tIns="9144" bIns="9144" anchor="ctr">
+            <a:spAutoFit/>
+          </a:bodyPr>
+          <a:lstStyle/>
+          <a:p>
+            <a:pPr algn="l">
+              <a:defRPr sz="1700" b="1">
+                <a:solidFill>
+                  <a:srgbClr val="0F172A"/>
+                </a:solidFill>
+                <a:latin typeface="Microsoft YaHei"/>
+              </a:defRPr>
+            </a:pPr>
+            <a:r>
+              <a:rPr sz="1700" b="1">
+                <a:solidFill>
+                  <a:srgbClr val="0F172A"/>
+                </a:solidFill>
+                <a:latin typeface="Microsoft YaHei"/>
+              </a:rPr>
+              <a:t>有没有 NHTS 之外的外部验证？</a:t>
+            </a:r>
+          </a:p>
+        </p:txBody>
+      </p:sp>
+      <p:sp>
+        <p:nvSpPr>
+          <p:cNvPr id="5" name="TextBox 4"/>
+          <p:cNvSpPr txBox="1"/>
+          <p:nvPr/>
+        </p:nvSpPr>
+        <p:spPr>
+          <a:xfrm>
+            <a:off x="1252728" y="585216"/>
+            <a:ext cx="8869680" cy="228600"/>
+          </a:xfrm>
+          <a:prstGeom prst="rect">
+            <a:avLst/>
+          </a:prstGeom>
+          <a:noFill/>
+        </p:spPr>
+        <p:txBody>
+          <a:bodyPr wrap="square" lIns="27432" rIns="27432" tIns="9144" bIns="9144" anchor="ctr">
+            <a:spAutoFit/>
+          </a:bodyPr>
+          <a:lstStyle/>
+          <a:p>
+            <a:pPr algn="l">
+              <a:defRPr sz="850" b="0">
+                <a:solidFill>
+                  <a:srgbClr val="64748B"/>
+                </a:solidFill>
+                <a:latin typeface="Microsoft YaHei"/>
+              </a:defRPr>
+            </a:pPr>
+            <a:r>
+              <a:rPr sz="850" b="0">
+                <a:solidFill>
+                  <a:srgbClr val="64748B"/>
+                </a:solidFill>
+                <a:latin typeface="Microsoft YaHei"/>
+              </a:rPr>
+              <a:t>Do we have validation beyond NHTS?</a:t>
+            </a:r>
+          </a:p>
+        </p:txBody>
+      </p:sp>
+      <p:pic>
+        <p:nvPicPr>
+          <p:cNvPr id="6" name="Picture 5" descr="image.png"/>
+          <p:cNvPicPr>
+            <a:picLocks noChangeAspect="1"/>
+          </p:cNvPicPr>
+          <p:nvPr/>
+        </p:nvPicPr>
+        <p:blipFill>
+          <a:blip r:embed="rId2"/>
+          <a:stretch>
+            <a:fillRect/>
+          </a:stretch>
+        </p:blipFill>
+        <p:spPr>
+          <a:xfrm>
+            <a:off x="11018520" y="201168"/>
+            <a:ext cx="713232" cy="502730"/>
+          </a:xfrm>
+          <a:prstGeom prst="rect">
+            <a:avLst/>
+          </a:prstGeom>
+        </p:spPr>
+      </p:pic>
+      <p:sp>
+        <p:nvSpPr>
+          <p:cNvPr id="7" name="Rectangle 6"/>
+          <p:cNvSpPr/>
+          <p:nvPr/>
+        </p:nvSpPr>
+        <p:spPr>
+          <a:xfrm>
+            <a:off x="384048" y="877824"/>
+            <a:ext cx="11201400" cy="10972"/>
+          </a:xfrm>
+          <a:prstGeom prst="rect">
+            <a:avLst/>
+          </a:prstGeom>
+          <a:solidFill>
+            <a:srgbClr val="CBD5E1"/>
+          </a:solidFill>
+          <a:ln>
+            <a:noFill/>
+          </a:ln>
+        </p:spPr>
+        <p:style>
+          <a:lnRef idx="1">
+            <a:schemeClr val="accent1"/>
+          </a:lnRef>
+          <a:fillRef idx="3">
+            <a:schemeClr val="accent1"/>
+          </a:fillRef>
+          <a:effectRef idx="2">
+            <a:schemeClr val="accent1"/>
+          </a:effectRef>
+          <a:fontRef idx="minor">
+            <a:schemeClr val="lt1"/>
+          </a:fontRef>
+        </p:style>
+        <p:txBody>
+          <a:bodyPr rtlCol="0" anchor="ctr"/>
+          <a:lstStyle/>
+          <a:p>
+            <a:pPr algn="ctr"/>
+          </a:p>
+        </p:txBody>
+      </p:sp>
+      <p:sp>
+        <p:nvSpPr>
+          <p:cNvPr id="8" name="Rectangle 7"/>
+          <p:cNvSpPr/>
+          <p:nvPr/>
+        </p:nvSpPr>
+        <p:spPr>
+          <a:xfrm>
+            <a:off x="384048" y="6428232"/>
+            <a:ext cx="11201400" cy="10972"/>
+          </a:xfrm>
+          <a:prstGeom prst="rect">
+            <a:avLst/>
+          </a:prstGeom>
+          <a:solidFill>
+            <a:srgbClr val="CBD5E1"/>
+          </a:solidFill>
+          <a:ln>
+            <a:noFill/>
+          </a:ln>
+        </p:spPr>
+        <p:style>
+          <a:lnRef idx="1">
+            <a:schemeClr val="accent1"/>
+          </a:lnRef>
+          <a:fillRef idx="3">
+            <a:schemeClr val="accent1"/>
+          </a:fillRef>
+          <a:effectRef idx="2">
+            <a:schemeClr val="accent1"/>
+          </a:effectRef>
+          <a:fontRef idx="minor">
+            <a:schemeClr val="lt1"/>
+          </a:fontRef>
+        </p:style>
+        <p:txBody>
+          <a:bodyPr rtlCol="0" anchor="ctr"/>
+          <a:lstStyle/>
+          <a:p>
+            <a:pPr algn="ctr"/>
+          </a:p>
+        </p:txBody>
+      </p:sp>
+      <p:sp>
+        <p:nvSpPr>
+          <p:cNvPr id="9" name="TextBox 8"/>
+          <p:cNvSpPr txBox="1"/>
+          <p:nvPr/>
+        </p:nvSpPr>
+        <p:spPr>
+          <a:xfrm>
+            <a:off x="384048" y="6473952"/>
+            <a:ext cx="5212080" cy="164592"/>
+          </a:xfrm>
+          <a:prstGeom prst="rect">
+            <a:avLst/>
+          </a:prstGeom>
+          <a:noFill/>
+        </p:spPr>
+        <p:txBody>
+          <a:bodyPr wrap="square" lIns="27432" rIns="27432" tIns="9144" bIns="9144" anchor="ctr">
+            <a:spAutoFit/>
+          </a:bodyPr>
+          <a:lstStyle/>
+          <a:p>
+            <a:pPr algn="l">
+              <a:defRPr sz="750" b="0">
+                <a:solidFill>
+                  <a:srgbClr val="64748B"/>
+                </a:solidFill>
+                <a:latin typeface="Microsoft YaHei"/>
+              </a:defRPr>
+            </a:pPr>
+            <a:r>
+              <a:rPr sz="750" b="0">
+                <a:solidFill>
+                  <a:srgbClr val="64748B"/>
+                </a:solidFill>
+                <a:latin typeface="Microsoft YaHei"/>
+              </a:rPr>
+              <a:t>Appendix: reviewer and instructor Q&amp;A</a:t>
+            </a:r>
+          </a:p>
+        </p:txBody>
+      </p:sp>
+      <p:sp>
+        <p:nvSpPr>
+          <p:cNvPr id="10" name="TextBox 9"/>
+          <p:cNvSpPr txBox="1"/>
+          <p:nvPr/>
+        </p:nvSpPr>
+        <p:spPr>
+          <a:xfrm>
+            <a:off x="10149840" y="6473952"/>
+            <a:ext cx="1417320" cy="164592"/>
+          </a:xfrm>
+          <a:prstGeom prst="rect">
+            <a:avLst/>
+          </a:prstGeom>
+          <a:noFill/>
+        </p:spPr>
+        <p:txBody>
+          <a:bodyPr wrap="square" lIns="27432" rIns="27432" tIns="9144" bIns="9144" anchor="ctr">
+            <a:spAutoFit/>
+          </a:bodyPr>
+          <a:lstStyle/>
+          <a:p>
+            <a:pPr algn="r">
+              <a:defRPr sz="750" b="1">
+                <a:solidFill>
+                  <a:srgbClr val="64748B"/>
+                </a:solidFill>
+                <a:latin typeface="Microsoft YaHei"/>
+              </a:defRPr>
+            </a:pPr>
+            <a:r>
+              <a:rPr sz="750" b="1">
+                <a:solidFill>
+                  <a:srgbClr val="64748B"/>
+                </a:solidFill>
+                <a:latin typeface="Microsoft YaHei"/>
+              </a:rPr>
+              <a:t>B7</a:t>
+            </a:r>
+          </a:p>
+        </p:txBody>
+      </p:sp>
+      <p:sp>
+        <p:nvSpPr>
+          <p:cNvPr id="11" name="Rounded Rectangle 10"/>
+          <p:cNvSpPr/>
+          <p:nvPr/>
+        </p:nvSpPr>
+        <p:spPr>
+          <a:xfrm>
+            <a:off x="658368" y="1115568"/>
+            <a:ext cx="10287000" cy="749808"/>
+          </a:xfrm>
+          <a:prstGeom prst="roundRect">
+            <a:avLst/>
+          </a:prstGeom>
+          <a:solidFill>
+            <a:srgbClr val="F1F5F9"/>
+          </a:solidFill>
+          <a:ln w="9525">
+            <a:solidFill>
+              <a:srgbClr val="CBD5E1"/>
+            </a:solidFill>
+          </a:ln>
+        </p:spPr>
+        <p:style>
+          <a:lnRef idx="1">
+            <a:schemeClr val="accent1"/>
+          </a:lnRef>
+          <a:fillRef idx="3">
+            <a:schemeClr val="accent1"/>
+          </a:fillRef>
+          <a:effectRef idx="2">
+            <a:schemeClr val="accent1"/>
+          </a:effectRef>
+          <a:fontRef idx="minor">
+            <a:schemeClr val="lt1"/>
+          </a:fontRef>
+        </p:style>
+        <p:txBody>
+          <a:bodyPr rtlCol="0" anchor="ctr"/>
+          <a:lstStyle/>
+          <a:p>
+            <a:pPr algn="ctr"/>
+          </a:p>
+        </p:txBody>
+      </p:sp>
+      <p:sp>
+        <p:nvSpPr>
+          <p:cNvPr id="12" name="TextBox 11"/>
+          <p:cNvSpPr txBox="1"/>
+          <p:nvPr/>
+        </p:nvSpPr>
+        <p:spPr>
+          <a:xfrm>
+            <a:off x="868680" y="1298448"/>
+            <a:ext cx="1463040" cy="182880"/>
+          </a:xfrm>
+          <a:prstGeom prst="rect">
+            <a:avLst/>
+          </a:prstGeom>
+          <a:noFill/>
+        </p:spPr>
+        <p:txBody>
+          <a:bodyPr wrap="square" lIns="27432" rIns="27432" tIns="9144" bIns="9144" anchor="ctr">
+            <a:spAutoFit/>
+          </a:bodyPr>
+          <a:lstStyle/>
+          <a:p>
+            <a:pPr algn="l">
+              <a:defRPr sz="1000" b="1">
+                <a:solidFill>
+                  <a:srgbClr val="EA580C"/>
+                </a:solidFill>
+                <a:latin typeface="Microsoft YaHei"/>
+              </a:defRPr>
+            </a:pPr>
+            <a:r>
+              <a:rPr sz="1000" b="1">
+                <a:solidFill>
+                  <a:srgbClr val="EA580C"/>
+                </a:solidFill>
+                <a:latin typeface="Microsoft YaHei"/>
+              </a:rPr>
+              <a:t>Short answer</a:t>
+            </a:r>
+          </a:p>
+        </p:txBody>
+      </p:sp>
+      <p:sp>
+        <p:nvSpPr>
+          <p:cNvPr id="13" name="TextBox 12"/>
+          <p:cNvSpPr txBox="1"/>
+          <p:nvPr/>
+        </p:nvSpPr>
+        <p:spPr>
+          <a:xfrm>
+            <a:off x="2240280" y="1216152"/>
+            <a:ext cx="8366760" cy="329184"/>
+          </a:xfrm>
+          <a:prstGeom prst="rect">
+            <a:avLst/>
+          </a:prstGeom>
+          <a:noFill/>
+        </p:spPr>
+        <p:txBody>
+          <a:bodyPr wrap="square" lIns="27432" rIns="27432" tIns="9144" bIns="9144" anchor="ctr">
+            <a:spAutoFit/>
+          </a:bodyPr>
+          <a:lstStyle/>
+          <a:p>
+            <a:pPr algn="l">
+              <a:defRPr sz="1300" b="1">
+                <a:solidFill>
+                  <a:srgbClr val="0F172A"/>
+                </a:solidFill>
+                <a:latin typeface="Microsoft YaHei"/>
+              </a:defRPr>
+            </a:pPr>
+            <a:r>
+              <a:rPr sz="1300" b="1">
+                <a:solidFill>
+                  <a:srgbClr val="0F172A"/>
+                </a:solidFill>
+                <a:latin typeface="Microsoft YaHei"/>
+              </a:rPr>
+              <a:t>有机制级外部验证；但没有 household-level external MAE，不能夸大。</a:t>
+            </a:r>
+          </a:p>
+        </p:txBody>
+      </p:sp>
+      <p:sp>
+        <p:nvSpPr>
+          <p:cNvPr id="14" name="Rectangle 13"/>
+          <p:cNvSpPr/>
+          <p:nvPr/>
+        </p:nvSpPr>
+        <p:spPr>
+          <a:xfrm>
+            <a:off x="713232" y="2176272"/>
+            <a:ext cx="4023360" cy="420624"/>
+          </a:xfrm>
+          <a:prstGeom prst="rect">
+            <a:avLst/>
+          </a:prstGeom>
+          <a:solidFill>
+            <a:srgbClr val="00796B"/>
+          </a:solidFill>
+          <a:ln>
+            <a:noFill/>
+          </a:ln>
+        </p:spPr>
+        <p:style>
+          <a:lnRef idx="1">
+            <a:schemeClr val="accent1"/>
+          </a:lnRef>
+          <a:fillRef idx="3">
+            <a:schemeClr val="accent1"/>
+          </a:fillRef>
+          <a:effectRef idx="2">
+            <a:schemeClr val="accent1"/>
+          </a:effectRef>
+          <a:fontRef idx="minor">
+            <a:schemeClr val="lt1"/>
+          </a:fontRef>
+        </p:style>
+        <p:txBody>
+          <a:bodyPr rtlCol="0" anchor="ctr"/>
+          <a:lstStyle/>
+          <a:p>
+            <a:pPr algn="ctr"/>
+          </a:p>
+        </p:txBody>
+      </p:sp>
+      <p:sp>
+        <p:nvSpPr>
+          <p:cNvPr id="15" name="TextBox 14"/>
+          <p:cNvSpPr txBox="1"/>
+          <p:nvPr/>
+        </p:nvSpPr>
+        <p:spPr>
+          <a:xfrm>
+            <a:off x="749808" y="2249424"/>
+            <a:ext cx="3950208" cy="292608"/>
+          </a:xfrm>
+          <a:prstGeom prst="rect">
+            <a:avLst/>
+          </a:prstGeom>
+          <a:noFill/>
+        </p:spPr>
+        <p:txBody>
+          <a:bodyPr wrap="square" lIns="27432" rIns="27432" tIns="9144" bIns="9144" anchor="ctr">
+            <a:spAutoFit/>
+          </a:bodyPr>
+          <a:lstStyle/>
+          <a:p>
+            <a:pPr algn="ctr">
+              <a:defRPr sz="1200" b="1">
+                <a:solidFill>
+                  <a:srgbClr val="FFFFFF"/>
+                </a:solidFill>
+                <a:latin typeface="Microsoft YaHei"/>
+              </a:defRPr>
+            </a:pPr>
+            <a:r>
+              <a:rPr sz="1200" b="1">
+                <a:solidFill>
+                  <a:srgbClr val="FFFFFF"/>
+                </a:solidFill>
+                <a:latin typeface="Microsoft YaHei"/>
+              </a:rPr>
+              <a:t>Evidence</a:t>
+            </a:r>
+          </a:p>
+        </p:txBody>
+      </p:sp>
+      <p:sp>
+        <p:nvSpPr>
+          <p:cNvPr id="16" name="Rectangle 15"/>
+          <p:cNvSpPr/>
+          <p:nvPr/>
+        </p:nvSpPr>
+        <p:spPr>
+          <a:xfrm>
+            <a:off x="4736592" y="2176272"/>
+            <a:ext cx="6035040" cy="420624"/>
+          </a:xfrm>
+          <a:prstGeom prst="rect">
+            <a:avLst/>
+          </a:prstGeom>
+          <a:solidFill>
+            <a:srgbClr val="00796B"/>
+          </a:solidFill>
+          <a:ln>
+            <a:noFill/>
+          </a:ln>
+        </p:spPr>
+        <p:style>
+          <a:lnRef idx="1">
+            <a:schemeClr val="accent1"/>
+          </a:lnRef>
+          <a:fillRef idx="3">
+            <a:schemeClr val="accent1"/>
+          </a:fillRef>
+          <a:effectRef idx="2">
+            <a:schemeClr val="accent1"/>
+          </a:effectRef>
+          <a:fontRef idx="minor">
+            <a:schemeClr val="lt1"/>
+          </a:fontRef>
+        </p:style>
+        <p:txBody>
+          <a:bodyPr rtlCol="0" anchor="ctr"/>
+          <a:lstStyle/>
+          <a:p>
+            <a:pPr algn="ctr"/>
+          </a:p>
+        </p:txBody>
+      </p:sp>
+      <p:sp>
+        <p:nvSpPr>
+          <p:cNvPr id="17" name="TextBox 16"/>
+          <p:cNvSpPr txBox="1"/>
+          <p:nvPr/>
+        </p:nvSpPr>
+        <p:spPr>
+          <a:xfrm>
+            <a:off x="4773168" y="2249424"/>
+            <a:ext cx="5961888" cy="292608"/>
+          </a:xfrm>
+          <a:prstGeom prst="rect">
+            <a:avLst/>
+          </a:prstGeom>
+          <a:noFill/>
+        </p:spPr>
+        <p:txBody>
+          <a:bodyPr wrap="square" lIns="27432" rIns="27432" tIns="9144" bIns="9144" anchor="ctr">
+            <a:spAutoFit/>
+          </a:bodyPr>
+          <a:lstStyle/>
+          <a:p>
+            <a:pPr algn="ctr">
+              <a:defRPr sz="1200" b="1">
+                <a:solidFill>
+                  <a:srgbClr val="FFFFFF"/>
+                </a:solidFill>
+                <a:latin typeface="Microsoft YaHei"/>
+              </a:defRPr>
+            </a:pPr>
+            <a:r>
+              <a:rPr sz="1200" b="1">
+                <a:solidFill>
+                  <a:srgbClr val="FFFFFF"/>
+                </a:solidFill>
+                <a:latin typeface="Microsoft YaHei"/>
+              </a:rPr>
+              <a:t>Value / implication</a:t>
+            </a:r>
+          </a:p>
+        </p:txBody>
+      </p:sp>
+      <p:sp>
+        <p:nvSpPr>
+          <p:cNvPr id="18" name="Rectangle 17"/>
+          <p:cNvSpPr/>
+          <p:nvPr/>
+        </p:nvSpPr>
+        <p:spPr>
+          <a:xfrm>
+            <a:off x="713232" y="2596896"/>
+            <a:ext cx="4023360" cy="420624"/>
+          </a:xfrm>
+          <a:prstGeom prst="rect">
+            <a:avLst/>
+          </a:prstGeom>
+          <a:solidFill>
+            <a:srgbClr val="F8FAFC"/>
+          </a:solidFill>
+          <a:ln w="9525">
+            <a:solidFill>
+              <a:srgbClr val="CBD5E1"/>
+            </a:solidFill>
+          </a:ln>
+        </p:spPr>
+        <p:style>
+          <a:lnRef idx="1">
+            <a:schemeClr val="accent1"/>
+          </a:lnRef>
+          <a:fillRef idx="3">
+            <a:schemeClr val="accent1"/>
+          </a:fillRef>
+          <a:effectRef idx="2">
+            <a:schemeClr val="accent1"/>
+          </a:effectRef>
+          <a:fontRef idx="minor">
+            <a:schemeClr val="lt1"/>
+          </a:fontRef>
+        </p:style>
+        <p:txBody>
+          <a:bodyPr rtlCol="0" anchor="ctr"/>
+          <a:lstStyle/>
+          <a:p>
+            <a:pPr algn="ctr"/>
+          </a:p>
+        </p:txBody>
+      </p:sp>
+      <p:sp>
+        <p:nvSpPr>
+          <p:cNvPr id="19" name="TextBox 18"/>
+          <p:cNvSpPr txBox="1"/>
+          <p:nvPr/>
+        </p:nvSpPr>
+        <p:spPr>
+          <a:xfrm>
+            <a:off x="768096" y="2660903"/>
+            <a:ext cx="3913632" cy="292608"/>
+          </a:xfrm>
+          <a:prstGeom prst="rect">
+            <a:avLst/>
+          </a:prstGeom>
+          <a:noFill/>
+        </p:spPr>
+        <p:txBody>
+          <a:bodyPr wrap="square" lIns="27432" rIns="27432" tIns="9144" bIns="9144" anchor="t">
+            <a:spAutoFit/>
+          </a:bodyPr>
+          <a:lstStyle/>
+          <a:p>
+            <a:pPr algn="l">
+              <a:defRPr sz="1200" b="1">
+                <a:solidFill>
+                  <a:srgbClr val="0F172A"/>
+                </a:solidFill>
+                <a:latin typeface="Microsoft YaHei"/>
+              </a:defRPr>
+            </a:pPr>
+            <a:r>
+              <a:rPr sz="1200" b="1">
+                <a:solidFill>
+                  <a:srgbClr val="0F172A"/>
+                </a:solidFill>
+                <a:latin typeface="Microsoft YaHei"/>
+              </a:rPr>
+              <a:t>ACS work from home</a:t>
+            </a:r>
+          </a:p>
+        </p:txBody>
+      </p:sp>
+      <p:sp>
+        <p:nvSpPr>
+          <p:cNvPr id="20" name="Rectangle 19"/>
+          <p:cNvSpPr/>
+          <p:nvPr/>
+        </p:nvSpPr>
+        <p:spPr>
+          <a:xfrm>
+            <a:off x="4736592" y="2596896"/>
+            <a:ext cx="6035040" cy="420624"/>
+          </a:xfrm>
+          <a:prstGeom prst="rect">
+            <a:avLst/>
+          </a:prstGeom>
+          <a:solidFill>
+            <a:srgbClr val="F8FAFC"/>
+          </a:solidFill>
+          <a:ln w="9525">
+            <a:solidFill>
+              <a:srgbClr val="CBD5E1"/>
+            </a:solidFill>
+          </a:ln>
+        </p:spPr>
+        <p:style>
+          <a:lnRef idx="1">
+            <a:schemeClr val="accent1"/>
+          </a:lnRef>
+          <a:fillRef idx="3">
+            <a:schemeClr val="accent1"/>
+          </a:fillRef>
+          <a:effectRef idx="2">
+            <a:schemeClr val="accent1"/>
+          </a:effectRef>
+          <a:fontRef idx="minor">
+            <a:schemeClr val="lt1"/>
+          </a:fontRef>
+        </p:style>
+        <p:txBody>
+          <a:bodyPr rtlCol="0" anchor="ctr"/>
+          <a:lstStyle/>
+          <a:p>
+            <a:pPr algn="ctr"/>
+          </a:p>
+        </p:txBody>
+      </p:sp>
+      <p:sp>
+        <p:nvSpPr>
+          <p:cNvPr id="21" name="TextBox 20"/>
+          <p:cNvSpPr txBox="1"/>
+          <p:nvPr/>
+        </p:nvSpPr>
+        <p:spPr>
+          <a:xfrm>
+            <a:off x="4791456" y="2660903"/>
+            <a:ext cx="5925312" cy="292608"/>
+          </a:xfrm>
+          <a:prstGeom prst="rect">
+            <a:avLst/>
+          </a:prstGeom>
+          <a:noFill/>
+        </p:spPr>
+        <p:txBody>
+          <a:bodyPr wrap="square" lIns="27432" rIns="27432" tIns="9144" bIns="9144" anchor="t">
+            <a:spAutoFit/>
+          </a:bodyPr>
+          <a:lstStyle/>
+          <a:p>
+            <a:pPr algn="l">
+              <a:defRPr sz="1200" b="0">
+                <a:solidFill>
+                  <a:srgbClr val="0F172A"/>
+                </a:solidFill>
+                <a:latin typeface="Microsoft YaHei"/>
+              </a:defRPr>
+            </a:pPr>
+            <a:r>
+              <a:rPr sz="1200" b="0">
+                <a:solidFill>
+                  <a:srgbClr val="0F172A"/>
+                </a:solidFill>
+                <a:latin typeface="Microsoft YaHei"/>
+              </a:rPr>
+              <a:t>2019 5.7% -&gt; 2022 15.2%; supports remote-work prior</a:t>
+            </a:r>
+          </a:p>
+        </p:txBody>
+      </p:sp>
+      <p:sp>
+        <p:nvSpPr>
+          <p:cNvPr id="22" name="Rectangle 21"/>
+          <p:cNvSpPr/>
+          <p:nvPr/>
+        </p:nvSpPr>
+        <p:spPr>
+          <a:xfrm>
+            <a:off x="713232" y="3017520"/>
+            <a:ext cx="4023360" cy="420624"/>
+          </a:xfrm>
+          <a:prstGeom prst="rect">
+            <a:avLst/>
+          </a:prstGeom>
+          <a:solidFill>
+            <a:srgbClr val="F1F5F9"/>
+          </a:solidFill>
+          <a:ln w="9525">
+            <a:solidFill>
+              <a:srgbClr val="CBD5E1"/>
+            </a:solidFill>
+          </a:ln>
+        </p:spPr>
+        <p:style>
+          <a:lnRef idx="1">
+            <a:schemeClr val="accent1"/>
+          </a:lnRef>
+          <a:fillRef idx="3">
+            <a:schemeClr val="accent1"/>
+          </a:fillRef>
+          <a:effectRef idx="2">
+            <a:schemeClr val="accent1"/>
+          </a:effectRef>
+          <a:fontRef idx="minor">
+            <a:schemeClr val="lt1"/>
+          </a:fontRef>
+        </p:style>
+        <p:txBody>
+          <a:bodyPr rtlCol="0" anchor="ctr"/>
+          <a:lstStyle/>
+          <a:p>
+            <a:pPr algn="ctr"/>
+          </a:p>
+        </p:txBody>
+      </p:sp>
+      <p:sp>
+        <p:nvSpPr>
+          <p:cNvPr id="23" name="TextBox 22"/>
+          <p:cNvSpPr txBox="1"/>
+          <p:nvPr/>
+        </p:nvSpPr>
+        <p:spPr>
+          <a:xfrm>
+            <a:off x="768096" y="3081527"/>
+            <a:ext cx="3913632" cy="292608"/>
+          </a:xfrm>
+          <a:prstGeom prst="rect">
+            <a:avLst/>
+          </a:prstGeom>
+          <a:noFill/>
+        </p:spPr>
+        <p:txBody>
+          <a:bodyPr wrap="square" lIns="27432" rIns="27432" tIns="9144" bIns="9144" anchor="t">
+            <a:spAutoFit/>
+          </a:bodyPr>
+          <a:lstStyle/>
+          <a:p>
+            <a:pPr algn="l">
+              <a:defRPr sz="1200" b="1">
+                <a:solidFill>
+                  <a:srgbClr val="0F172A"/>
+                </a:solidFill>
+                <a:latin typeface="Microsoft YaHei"/>
+              </a:defRPr>
+            </a:pPr>
+            <a:r>
+              <a:rPr sz="1200" b="1">
+                <a:solidFill>
+                  <a:srgbClr val="0F172A"/>
+                </a:solidFill>
+                <a:latin typeface="Microsoft YaHei"/>
+              </a:rPr>
+              <a:t>ACS public transit</a:t>
+            </a:r>
+          </a:p>
+        </p:txBody>
+      </p:sp>
+      <p:sp>
+        <p:nvSpPr>
+          <p:cNvPr id="24" name="Rectangle 23"/>
+          <p:cNvSpPr/>
+          <p:nvPr/>
+        </p:nvSpPr>
+        <p:spPr>
+          <a:xfrm>
+            <a:off x="4736592" y="3017520"/>
+            <a:ext cx="6035040" cy="420624"/>
+          </a:xfrm>
+          <a:prstGeom prst="rect">
+            <a:avLst/>
+          </a:prstGeom>
+          <a:solidFill>
+            <a:srgbClr val="F1F5F9"/>
+          </a:solidFill>
+          <a:ln w="9525">
+            <a:solidFill>
+              <a:srgbClr val="CBD5E1"/>
+            </a:solidFill>
+          </a:ln>
+        </p:spPr>
+        <p:style>
+          <a:lnRef idx="1">
+            <a:schemeClr val="accent1"/>
+          </a:lnRef>
+          <a:fillRef idx="3">
+            <a:schemeClr val="accent1"/>
+          </a:fillRef>
+          <a:effectRef idx="2">
+            <a:schemeClr val="accent1"/>
+          </a:effectRef>
+          <a:fontRef idx="minor">
+            <a:schemeClr val="lt1"/>
+          </a:fontRef>
+        </p:style>
+        <p:txBody>
+          <a:bodyPr rtlCol="0" anchor="ctr"/>
+          <a:lstStyle/>
+          <a:p>
+            <a:pPr algn="ctr"/>
+          </a:p>
+        </p:txBody>
+      </p:sp>
+      <p:sp>
+        <p:nvSpPr>
+          <p:cNvPr id="25" name="TextBox 24"/>
+          <p:cNvSpPr txBox="1"/>
+          <p:nvPr/>
+        </p:nvSpPr>
+        <p:spPr>
+          <a:xfrm>
+            <a:off x="4791456" y="3081527"/>
+            <a:ext cx="5925312" cy="292608"/>
+          </a:xfrm>
+          <a:prstGeom prst="rect">
+            <a:avLst/>
+          </a:prstGeom>
+          <a:noFill/>
+        </p:spPr>
+        <p:txBody>
+          <a:bodyPr wrap="square" lIns="27432" rIns="27432" tIns="9144" bIns="9144" anchor="t">
+            <a:spAutoFit/>
+          </a:bodyPr>
+          <a:lstStyle/>
+          <a:p>
+            <a:pPr algn="l">
+              <a:defRPr sz="1200" b="0">
+                <a:solidFill>
+                  <a:srgbClr val="0F172A"/>
+                </a:solidFill>
+                <a:latin typeface="Microsoft YaHei"/>
+              </a:defRPr>
+            </a:pPr>
+            <a:r>
+              <a:rPr sz="1200" b="0">
+                <a:solidFill>
+                  <a:srgbClr val="0F172A"/>
+                </a:solidFill>
+                <a:latin typeface="Microsoft YaHei"/>
+              </a:rPr>
+              <a:t>2019 5.0% -&gt; 2022 3.1%; supports transit-avoidance prior</a:t>
+            </a:r>
+          </a:p>
+        </p:txBody>
+      </p:sp>
+      <p:sp>
+        <p:nvSpPr>
+          <p:cNvPr id="26" name="Rectangle 25"/>
+          <p:cNvSpPr/>
+          <p:nvPr/>
+        </p:nvSpPr>
+        <p:spPr>
+          <a:xfrm>
+            <a:off x="713232" y="3438144"/>
+            <a:ext cx="4023360" cy="420624"/>
+          </a:xfrm>
+          <a:prstGeom prst="rect">
+            <a:avLst/>
+          </a:prstGeom>
+          <a:solidFill>
+            <a:srgbClr val="F8FAFC"/>
+          </a:solidFill>
+          <a:ln w="9525">
+            <a:solidFill>
+              <a:srgbClr val="CBD5E1"/>
+            </a:solidFill>
+          </a:ln>
+        </p:spPr>
+        <p:style>
+          <a:lnRef idx="1">
+            <a:schemeClr val="accent1"/>
+          </a:lnRef>
+          <a:fillRef idx="3">
+            <a:schemeClr val="accent1"/>
+          </a:fillRef>
+          <a:effectRef idx="2">
+            <a:schemeClr val="accent1"/>
+          </a:effectRef>
+          <a:fontRef idx="minor">
+            <a:schemeClr val="lt1"/>
+          </a:fontRef>
+        </p:style>
+        <p:txBody>
+          <a:bodyPr rtlCol="0" anchor="ctr"/>
+          <a:lstStyle/>
+          <a:p>
+            <a:pPr algn="ctr"/>
+          </a:p>
+        </p:txBody>
+      </p:sp>
+      <p:sp>
+        <p:nvSpPr>
+          <p:cNvPr id="27" name="TextBox 26"/>
+          <p:cNvSpPr txBox="1"/>
+          <p:nvPr/>
+        </p:nvSpPr>
+        <p:spPr>
+          <a:xfrm>
+            <a:off x="768096" y="3502151"/>
+            <a:ext cx="3913632" cy="292608"/>
+          </a:xfrm>
+          <a:prstGeom prst="rect">
+            <a:avLst/>
+          </a:prstGeom>
+          <a:noFill/>
+        </p:spPr>
+        <p:txBody>
+          <a:bodyPr wrap="square" lIns="27432" rIns="27432" tIns="9144" bIns="9144" anchor="t">
+            <a:spAutoFit/>
+          </a:bodyPr>
+          <a:lstStyle/>
+          <a:p>
+            <a:pPr algn="l">
+              <a:defRPr sz="1200" b="1">
+                <a:solidFill>
+                  <a:srgbClr val="0F172A"/>
+                </a:solidFill>
+                <a:latin typeface="Microsoft YaHei"/>
+              </a:defRPr>
+            </a:pPr>
+            <a:r>
+              <a:rPr sz="1200" b="1">
+                <a:solidFill>
+                  <a:srgbClr val="0F172A"/>
+                </a:solidFill>
+                <a:latin typeface="Microsoft YaHei"/>
+              </a:rPr>
+              <a:t>BTS daily mobility</a:t>
+            </a:r>
+          </a:p>
+        </p:txBody>
+      </p:sp>
+      <p:sp>
+        <p:nvSpPr>
+          <p:cNvPr id="28" name="Rectangle 27"/>
+          <p:cNvSpPr/>
+          <p:nvPr/>
+        </p:nvSpPr>
+        <p:spPr>
+          <a:xfrm>
+            <a:off x="4736592" y="3438144"/>
+            <a:ext cx="6035040" cy="420624"/>
+          </a:xfrm>
+          <a:prstGeom prst="rect">
+            <a:avLst/>
+          </a:prstGeom>
+          <a:solidFill>
+            <a:srgbClr val="F8FAFC"/>
+          </a:solidFill>
+          <a:ln w="9525">
+            <a:solidFill>
+              <a:srgbClr val="CBD5E1"/>
+            </a:solidFill>
+          </a:ln>
+        </p:spPr>
+        <p:style>
+          <a:lnRef idx="1">
+            <a:schemeClr val="accent1"/>
+          </a:lnRef>
+          <a:fillRef idx="3">
+            <a:schemeClr val="accent1"/>
+          </a:fillRef>
+          <a:effectRef idx="2">
+            <a:schemeClr val="accent1"/>
+          </a:effectRef>
+          <a:fontRef idx="minor">
+            <a:schemeClr val="lt1"/>
+          </a:fontRef>
+        </p:style>
+        <p:txBody>
+          <a:bodyPr rtlCol="0" anchor="ctr"/>
+          <a:lstStyle/>
+          <a:p>
+            <a:pPr algn="ctr"/>
+          </a:p>
+        </p:txBody>
+      </p:sp>
+      <p:sp>
+        <p:nvSpPr>
+          <p:cNvPr id="29" name="TextBox 28"/>
+          <p:cNvSpPr txBox="1"/>
+          <p:nvPr/>
+        </p:nvSpPr>
+        <p:spPr>
+          <a:xfrm>
+            <a:off x="4791456" y="3502151"/>
+            <a:ext cx="5925312" cy="292608"/>
+          </a:xfrm>
+          <a:prstGeom prst="rect">
+            <a:avLst/>
+          </a:prstGeom>
+          <a:noFill/>
+        </p:spPr>
+        <p:txBody>
+          <a:bodyPr wrap="square" lIns="27432" rIns="27432" tIns="9144" bIns="9144" anchor="t">
+            <a:spAutoFit/>
+          </a:bodyPr>
+          <a:lstStyle/>
+          <a:p>
+            <a:pPr algn="l">
+              <a:defRPr sz="1200" b="0">
+                <a:solidFill>
+                  <a:srgbClr val="0F172A"/>
+                </a:solidFill>
+                <a:latin typeface="Microsoft YaHei"/>
+              </a:defRPr>
+            </a:pPr>
+            <a:r>
+              <a:rPr sz="1200" b="0">
+                <a:solidFill>
+                  <a:srgbClr val="0F172A"/>
+                </a:solidFill>
+                <a:latin typeface="Microsoft YaHei"/>
+              </a:rPr>
+              <a:t>Device trips/person is not a direct CNTTDHH label</a:t>
+            </a:r>
+          </a:p>
+        </p:txBody>
+      </p:sp>
+      <p:sp>
+        <p:nvSpPr>
+          <p:cNvPr id="30" name="Rectangle 29"/>
+          <p:cNvSpPr/>
+          <p:nvPr/>
+        </p:nvSpPr>
+        <p:spPr>
+          <a:xfrm>
+            <a:off x="713232" y="3858768"/>
+            <a:ext cx="4023360" cy="420624"/>
+          </a:xfrm>
+          <a:prstGeom prst="rect">
+            <a:avLst/>
+          </a:prstGeom>
+          <a:solidFill>
+            <a:srgbClr val="F1F5F9"/>
+          </a:solidFill>
+          <a:ln w="9525">
+            <a:solidFill>
+              <a:srgbClr val="CBD5E1"/>
+            </a:solidFill>
+          </a:ln>
+        </p:spPr>
+        <p:style>
+          <a:lnRef idx="1">
+            <a:schemeClr val="accent1"/>
+          </a:lnRef>
+          <a:fillRef idx="3">
+            <a:schemeClr val="accent1"/>
+          </a:fillRef>
+          <a:effectRef idx="2">
+            <a:schemeClr val="accent1"/>
+          </a:effectRef>
+          <a:fontRef idx="minor">
+            <a:schemeClr val="lt1"/>
+          </a:fontRef>
+        </p:style>
+        <p:txBody>
+          <a:bodyPr rtlCol="0" anchor="ctr"/>
+          <a:lstStyle/>
+          <a:p>
+            <a:pPr algn="ctr"/>
+          </a:p>
+        </p:txBody>
+      </p:sp>
+      <p:sp>
+        <p:nvSpPr>
+          <p:cNvPr id="31" name="TextBox 30"/>
+          <p:cNvSpPr txBox="1"/>
+          <p:nvPr/>
+        </p:nvSpPr>
+        <p:spPr>
+          <a:xfrm>
+            <a:off x="768096" y="3922776"/>
+            <a:ext cx="3913632" cy="292608"/>
+          </a:xfrm>
+          <a:prstGeom prst="rect">
+            <a:avLst/>
+          </a:prstGeom>
+          <a:noFill/>
+        </p:spPr>
+        <p:txBody>
+          <a:bodyPr wrap="square" lIns="27432" rIns="27432" tIns="9144" bIns="9144" anchor="t">
+            <a:spAutoFit/>
+          </a:bodyPr>
+          <a:lstStyle/>
+          <a:p>
+            <a:pPr algn="l">
+              <a:defRPr sz="1200" b="1">
+                <a:solidFill>
+                  <a:srgbClr val="0F172A"/>
+                </a:solidFill>
+                <a:latin typeface="Microsoft YaHei"/>
+              </a:defRPr>
+            </a:pPr>
+            <a:r>
+              <a:rPr sz="1200" b="1">
+                <a:solidFill>
+                  <a:srgbClr val="0F172A"/>
+                </a:solidFill>
+                <a:latin typeface="Microsoft YaHei"/>
+              </a:rPr>
+              <a:t>Safe claim</a:t>
+            </a:r>
+          </a:p>
+        </p:txBody>
+      </p:sp>
+      <p:sp>
+        <p:nvSpPr>
+          <p:cNvPr id="32" name="Rectangle 31"/>
+          <p:cNvSpPr/>
+          <p:nvPr/>
+        </p:nvSpPr>
+        <p:spPr>
+          <a:xfrm>
+            <a:off x="4736592" y="3858768"/>
+            <a:ext cx="6035040" cy="420624"/>
+          </a:xfrm>
+          <a:prstGeom prst="rect">
+            <a:avLst/>
+          </a:prstGeom>
+          <a:solidFill>
+            <a:srgbClr val="F1F5F9"/>
+          </a:solidFill>
+          <a:ln w="9525">
+            <a:solidFill>
+              <a:srgbClr val="CBD5E1"/>
+            </a:solidFill>
+          </a:ln>
+        </p:spPr>
+        <p:style>
+          <a:lnRef idx="1">
+            <a:schemeClr val="accent1"/>
+          </a:lnRef>
+          <a:fillRef idx="3">
+            <a:schemeClr val="accent1"/>
+          </a:fillRef>
+          <a:effectRef idx="2">
+            <a:schemeClr val="accent1"/>
+          </a:effectRef>
+          <a:fontRef idx="minor">
+            <a:schemeClr val="lt1"/>
+          </a:fontRef>
+        </p:style>
+        <p:txBody>
+          <a:bodyPr rtlCol="0" anchor="ctr"/>
+          <a:lstStyle/>
+          <a:p>
+            <a:pPr algn="ctr"/>
+          </a:p>
+        </p:txBody>
+      </p:sp>
+      <p:sp>
+        <p:nvSpPr>
+          <p:cNvPr id="33" name="TextBox 32"/>
+          <p:cNvSpPr txBox="1"/>
+          <p:nvPr/>
+        </p:nvSpPr>
+        <p:spPr>
+          <a:xfrm>
+            <a:off x="4791456" y="3922776"/>
+            <a:ext cx="5925312" cy="292608"/>
+          </a:xfrm>
+          <a:prstGeom prst="rect">
+            <a:avLst/>
+          </a:prstGeom>
+          <a:noFill/>
+        </p:spPr>
+        <p:txBody>
+          <a:bodyPr wrap="square" lIns="27432" rIns="27432" tIns="9144" bIns="9144" anchor="t">
+            <a:spAutoFit/>
+          </a:bodyPr>
+          <a:lstStyle/>
+          <a:p>
+            <a:pPr algn="l">
+              <a:defRPr sz="1200" b="0">
+                <a:solidFill>
+                  <a:srgbClr val="0F172A"/>
+                </a:solidFill>
+                <a:latin typeface="Microsoft YaHei"/>
+              </a:defRPr>
+            </a:pPr>
+            <a:r>
+              <a:rPr sz="1200" b="0">
+                <a:solidFill>
+                  <a:srgbClr val="0F172A"/>
+                </a:solidFill>
+                <a:latin typeface="Microsoft YaHei"/>
+              </a:rPr>
+              <a:t>External mechanism support + compatibility guardrail</a:t>
+            </a:r>
+          </a:p>
+        </p:txBody>
+      </p:sp>
+      <p:sp>
+        <p:nvSpPr>
+          <p:cNvPr id="34" name="Rounded Rectangle 33"/>
+          <p:cNvSpPr/>
+          <p:nvPr/>
+        </p:nvSpPr>
+        <p:spPr>
+          <a:xfrm>
+            <a:off x="749808" y="5074920"/>
+            <a:ext cx="10012680" cy="1005840"/>
+          </a:xfrm>
+          <a:prstGeom prst="roundRect">
+            <a:avLst/>
+          </a:prstGeom>
+          <a:solidFill>
+            <a:srgbClr val="F1F5F9"/>
+          </a:solidFill>
+          <a:ln w="9525">
+            <a:solidFill>
+              <a:srgbClr val="CBD5E1"/>
+            </a:solidFill>
+          </a:ln>
+        </p:spPr>
+        <p:style>
+          <a:lnRef idx="1">
+            <a:schemeClr val="accent1"/>
+          </a:lnRef>
+          <a:fillRef idx="3">
+            <a:schemeClr val="accent1"/>
+          </a:fillRef>
+          <a:effectRef idx="2">
+            <a:schemeClr val="accent1"/>
+          </a:effectRef>
+          <a:fontRef idx="minor">
+            <a:schemeClr val="lt1"/>
+          </a:fontRef>
+        </p:style>
+        <p:txBody>
+          <a:bodyPr rtlCol="0" anchor="ctr"/>
+          <a:lstStyle/>
+          <a:p>
+            <a:pPr algn="ctr"/>
+          </a:p>
+        </p:txBody>
+      </p:sp>
+      <p:sp>
+        <p:nvSpPr>
+          <p:cNvPr id="35" name="Rectangle 34"/>
+          <p:cNvSpPr/>
+          <p:nvPr/>
+        </p:nvSpPr>
+        <p:spPr>
+          <a:xfrm>
+            <a:off x="749808" y="5074920"/>
+            <a:ext cx="50292" cy="1005840"/>
+          </a:xfrm>
+          <a:prstGeom prst="rect">
+            <a:avLst/>
+          </a:prstGeom>
+          <a:solidFill>
+            <a:srgbClr val="2563EB"/>
+          </a:solidFill>
+          <a:ln>
+            <a:noFill/>
+          </a:ln>
+        </p:spPr>
+        <p:style>
+          <a:lnRef idx="1">
+            <a:schemeClr val="accent1"/>
+          </a:lnRef>
+          <a:fillRef idx="3">
+            <a:schemeClr val="accent1"/>
+          </a:fillRef>
+          <a:effectRef idx="2">
+            <a:schemeClr val="accent1"/>
+          </a:effectRef>
+          <a:fontRef idx="minor">
+            <a:schemeClr val="lt1"/>
+          </a:fontRef>
+        </p:style>
+        <p:txBody>
+          <a:bodyPr rtlCol="0" anchor="ctr"/>
+          <a:lstStyle/>
+          <a:p>
+            <a:pPr algn="ctr"/>
+          </a:p>
+        </p:txBody>
+      </p:sp>
+      <p:sp>
+        <p:nvSpPr>
+          <p:cNvPr id="36" name="TextBox 35"/>
+          <p:cNvSpPr txBox="1"/>
+          <p:nvPr/>
+        </p:nvSpPr>
+        <p:spPr>
+          <a:xfrm>
+            <a:off x="914400" y="5166359"/>
+            <a:ext cx="9720072" cy="362102"/>
+          </a:xfrm>
+          <a:prstGeom prst="rect">
+            <a:avLst/>
+          </a:prstGeom>
+          <a:noFill/>
+        </p:spPr>
+        <p:txBody>
+          <a:bodyPr wrap="square" lIns="27432" rIns="27432" tIns="9144" bIns="9144" anchor="t">
+            <a:spAutoFit/>
+          </a:bodyPr>
+          <a:lstStyle/>
+          <a:p>
+            <a:pPr algn="l">
+              <a:defRPr sz="1200" b="1">
+                <a:solidFill>
+                  <a:srgbClr val="0F172A"/>
+                </a:solidFill>
+                <a:latin typeface="Microsoft YaHei"/>
+              </a:defRPr>
+            </a:pPr>
+            <a:r>
+              <a:rPr sz="1200" b="1">
+                <a:solidFill>
+                  <a:srgbClr val="0F172A"/>
+                </a:solidFill>
+                <a:latin typeface="Microsoft YaHei"/>
+              </a:rPr>
+              <a:t>答法：我们用 ACS 证明疫情后通勤机制确实发生了远程办公和公共交通下降；同时用 BTS 做 guardrail，说明 device mobility trips 不能直接当作 NHTS household trip-count 的外部标签。论文版还需要兼容的 household travel survey microdata。</a:t>
+            </a:r>
+          </a:p>
+        </p:txBody>
+      </p:sp>
+      <p:sp>
+        <p:nvSpPr>
+          <p:cNvPr id="37" name="TextBox 36"/>
+          <p:cNvSpPr txBox="1"/>
+          <p:nvPr/>
+        </p:nvSpPr>
+        <p:spPr>
+          <a:xfrm>
+            <a:off x="914400" y="5592470"/>
+            <a:ext cx="9720072" cy="415137"/>
+          </a:xfrm>
+          <a:prstGeom prst="rect">
+            <a:avLst/>
+          </a:prstGeom>
+          <a:noFill/>
+        </p:spPr>
+        <p:txBody>
+          <a:bodyPr wrap="square" lIns="27432" rIns="27432" tIns="9144" bIns="9144" anchor="t">
+            <a:spAutoFit/>
+          </a:bodyPr>
+          <a:lstStyle/>
+          <a:p>
+            <a:pPr algn="l">
+              <a:defRPr sz="1200" b="0">
+                <a:solidFill>
+                  <a:srgbClr val="64748B"/>
+                </a:solidFill>
+                <a:latin typeface="Microsoft YaHei"/>
+              </a:defRPr>
+            </a:pPr>
           </a:p>
         </p:txBody>
       </p:sp>

--- a/outputs/final_project/NHTS_Travel_Behavior_Template_Presentation.pptx
+++ b/outputs/final_project/NHTS_Travel_Behavior_Template_Presentation.pptx
@@ -45024,7 +45024,7 @@
                 </a:solidFill>
                 <a:latin typeface="Microsoft YaHei"/>
               </a:rPr>
-              <a:t>有机制级外部验证；但没有 household-level external MAE，不能夸大。</a:t>
+              <a:t>有机制级验证和 PSRC household microdata；但不是 NHTS 2022 的直接复刻。</a:t>
             </a:r>
           </a:p>
         </p:txBody>
@@ -45629,7 +45629,7 @@
                 </a:solidFill>
                 <a:latin typeface="Microsoft YaHei"/>
               </a:rPr>
-              <a:t>BTS daily mobility</a:t>
+              <a:t>PSRC microdata</a:t>
             </a:r>
           </a:p>
         </p:txBody>
@@ -45716,7 +45716,7 @@
                 </a:solidFill>
                 <a:latin typeface="Microsoft YaHei"/>
               </a:rPr>
-              <a:t>Device trips/person is not a direct CNTTDHH label</a:t>
+              <a:t>2021-&gt;2023 wMAE 3.6908-&gt;3.6855; wBias -1.1480-&gt;-0.2646</a:t>
             </a:r>
           </a:p>
         </p:txBody>
@@ -45890,7 +45890,7 @@
                 </a:solidFill>
                 <a:latin typeface="Microsoft YaHei"/>
               </a:rPr>
-              <a:t>External mechanism support + compatibility guardrail</a:t>
+              <a:t>External mechanism + recovery-transfer support</a:t>
             </a:r>
           </a:p>
         </p:txBody>
@@ -46020,7 +46020,7 @@
                 </a:solidFill>
                 <a:latin typeface="Microsoft YaHei"/>
               </a:rPr>
-              <a:t>答法：我们用 ACS 证明疫情后通勤机制确实发生了远程办公和公共交通下降；同时用 BTS 做 guardrail，说明 device mobility trips 不能直接当作 NHTS household trip-count 的外部标签。论文版还需要兼容的 household travel survey microdata。</a:t>
+              <a:t>答法：我们用 ACS 证明疫情后通勤机制确实发生了远程办公和公共交通下降；用 PSRC 独立 household microdata 做 recovery-transfer 验证；同时用 BTS 做 guardrail，说明 device mobility trips 不能直接当作 NHTS household trip-count 的外部标签。</a:t>
             </a:r>
           </a:p>
         </p:txBody>

--- a/outputs/final_project/NHTS_Travel_Behavior_Template_Presentation.pptx
+++ b/outputs/final_project/NHTS_Travel_Behavior_Template_Presentation.pptx
@@ -45716,7 +45716,7 @@
                 </a:solidFill>
                 <a:latin typeface="Microsoft YaHei"/>
               </a:rPr>
-              <a:t>2021-&gt;2023 wMAE 3.6908-&gt;3.6855; wBias -1.1480-&gt;-0.2646</a:t>
+              <a:t>2017+2019-&gt;2023 wMAE 3.4271-&gt;3.2498; wBias +1.0532-&gt;+0.2605</a:t>
             </a:r>
           </a:p>
         </p:txBody>

--- a/outputs/final_project/NHTS_Travel_Behavior_Template_Presentation.pptx
+++ b/outputs/final_project/NHTS_Travel_Behavior_Template_Presentation.pptx
@@ -38,6 +38,7 @@
     <p:sldId id="283" r:id="rId34"/>
     <p:sldId id="284" r:id="rId35"/>
     <p:sldId id="285" r:id="rId36"/>
+    <p:sldId id="286" r:id="rId6"/>
   </p:sldIdLst>
   <p:sldSz cx="12192000" cy="6858000"/>
   <p:notesSz cx="6858000" cy="9144000"/>
@@ -26801,7 +26802,7 @@
                 </a:solidFill>
                 <a:latin typeface="Microsoft YaHei"/>
               </a:rPr>
-              <a:t>LLM 扩展与泛化 / LLM Scaling</a:t>
+              <a:t>LLM 蒸馏与扩展 / Distillation &amp; Scaling</a:t>
             </a:r>
           </a:p>
         </p:txBody>
@@ -26843,7 +26844,7 @@
                 </a:solidFill>
                 <a:latin typeface="Microsoft YaHei"/>
               </a:rPr>
-              <a:t>Batch prompting + event-generalizable priors</a:t>
+              <a:t>把大模型泛化能力转成可审计、低调用量的事件适配器</a:t>
             </a:r>
           </a:p>
         </p:txBody>
@@ -27050,825 +27051,8 @@
         </p:nvSpPr>
         <p:spPr>
           <a:xfrm>
-            <a:off x="658368" y="1417320"/>
-            <a:ext cx="1600200" cy="685800"/>
-          </a:xfrm>
-          <a:prstGeom prst="roundRect">
-            <a:avLst/>
-          </a:prstGeom>
-          <a:solidFill>
-            <a:srgbClr val="FFFFFF"/>
-          </a:solidFill>
-          <a:ln w="9525">
-            <a:solidFill>
-              <a:srgbClr val="00796B"/>
-            </a:solidFill>
-          </a:ln>
-        </p:spPr>
-        <p:style>
-          <a:lnRef idx="1">
-            <a:schemeClr val="accent1"/>
-          </a:lnRef>
-          <a:fillRef idx="3">
-            <a:schemeClr val="accent1"/>
-          </a:fillRef>
-          <a:effectRef idx="2">
-            <a:schemeClr val="accent1"/>
-          </a:effectRef>
-          <a:fontRef idx="minor">
-            <a:schemeClr val="lt1"/>
-          </a:fontRef>
-        </p:style>
-        <p:txBody>
-          <a:bodyPr rtlCol="0" anchor="ctr"/>
-          <a:lstStyle/>
-          <a:p>
-            <a:pPr algn="ctr"/>
-          </a:p>
-        </p:txBody>
-      </p:sp>
-      <p:sp>
-        <p:nvSpPr>
-          <p:cNvPr id="12" name="TextBox 11"/>
-          <p:cNvSpPr txBox="1"/>
-          <p:nvPr/>
-        </p:nvSpPr>
-        <p:spPr>
-          <a:xfrm>
-            <a:off x="731519" y="1481328"/>
-            <a:ext cx="1453896" cy="182880"/>
-          </a:xfrm>
-          <a:prstGeom prst="rect">
-            <a:avLst/>
-          </a:prstGeom>
-          <a:noFill/>
-        </p:spPr>
-        <p:txBody>
-          <a:bodyPr wrap="square" lIns="27432" rIns="27432" tIns="9144" bIns="9144" anchor="ctr">
-            <a:spAutoFit/>
-          </a:bodyPr>
-          <a:lstStyle/>
-          <a:p>
-            <a:pPr algn="ctr">
-              <a:defRPr sz="919" b="1">
-                <a:solidFill>
-                  <a:srgbClr val="00796B"/>
-                </a:solidFill>
-                <a:latin typeface="Microsoft YaHei"/>
-              </a:defRPr>
-            </a:pPr>
-            <a:r>
-              <a:rPr sz="919" b="1">
-                <a:solidFill>
-                  <a:srgbClr val="00796B"/>
-                </a:solidFill>
-                <a:latin typeface="Microsoft YaHei"/>
-              </a:rPr>
-              <a:t>7,893 households</a:t>
-            </a:r>
-          </a:p>
-        </p:txBody>
-      </p:sp>
-      <p:sp>
-        <p:nvSpPr>
-          <p:cNvPr id="13" name="TextBox 12"/>
-          <p:cNvSpPr txBox="1"/>
-          <p:nvPr/>
-        </p:nvSpPr>
-        <p:spPr>
-          <a:xfrm>
-            <a:off x="749808" y="1700784"/>
-            <a:ext cx="1417320" cy="347472"/>
-          </a:xfrm>
-          <a:prstGeom prst="rect">
-            <a:avLst/>
-          </a:prstGeom>
-          <a:noFill/>
-        </p:spPr>
-        <p:txBody>
-          <a:bodyPr wrap="square" lIns="27432" rIns="27432" tIns="9144" bIns="9144" anchor="ctr">
-            <a:spAutoFit/>
-          </a:bodyPr>
-          <a:lstStyle/>
-          <a:p>
-            <a:pPr algn="ctr">
-              <a:defRPr sz="780" b="0">
-                <a:solidFill>
-                  <a:srgbClr val="64748B"/>
-                </a:solidFill>
-                <a:latin typeface="Microsoft YaHei"/>
-              </a:defRPr>
-            </a:pPr>
-            <a:r>
-              <a:rPr sz="780" b="0">
-                <a:solidFill>
-                  <a:srgbClr val="64748B"/>
-                </a:solidFill>
-                <a:latin typeface="Microsoft YaHei"/>
-              </a:rPr>
-              <a:t>2022 rows</a:t>
-            </a:r>
-          </a:p>
-        </p:txBody>
-      </p:sp>
-      <p:sp>
-        <p:nvSpPr>
-          <p:cNvPr id="14" name="Right Arrow 13"/>
-          <p:cNvSpPr/>
-          <p:nvPr/>
-        </p:nvSpPr>
-        <p:spPr>
-          <a:xfrm>
-            <a:off x="2322576" y="1664208"/>
-            <a:ext cx="292608" cy="128016"/>
-          </a:xfrm>
-          <a:prstGeom prst="rightArrow">
-            <a:avLst/>
-          </a:prstGeom>
-          <a:solidFill>
-            <a:srgbClr val="64748B"/>
-          </a:solidFill>
-          <a:ln>
-            <a:noFill/>
-          </a:ln>
-        </p:spPr>
-        <p:style>
-          <a:lnRef idx="1">
-            <a:schemeClr val="accent1"/>
-          </a:lnRef>
-          <a:fillRef idx="3">
-            <a:schemeClr val="accent1"/>
-          </a:fillRef>
-          <a:effectRef idx="2">
-            <a:schemeClr val="accent1"/>
-          </a:effectRef>
-          <a:fontRef idx="minor">
-            <a:schemeClr val="lt1"/>
-          </a:fontRef>
-        </p:style>
-        <p:txBody>
-          <a:bodyPr rtlCol="0" anchor="ctr"/>
-          <a:lstStyle/>
-          <a:p>
-            <a:pPr algn="ctr"/>
-          </a:p>
-        </p:txBody>
-      </p:sp>
-      <p:sp>
-        <p:nvSpPr>
-          <p:cNvPr id="15" name="Rounded Rectangle 14"/>
-          <p:cNvSpPr/>
-          <p:nvPr/>
-        </p:nvSpPr>
-        <p:spPr>
-          <a:xfrm>
-            <a:off x="2761487" y="1417320"/>
-            <a:ext cx="1600200" cy="685800"/>
-          </a:xfrm>
-          <a:prstGeom prst="roundRect">
-            <a:avLst/>
-          </a:prstGeom>
-          <a:solidFill>
-            <a:srgbClr val="FFFFFF"/>
-          </a:solidFill>
-          <a:ln w="9525">
-            <a:solidFill>
-              <a:srgbClr val="00796B"/>
-            </a:solidFill>
-          </a:ln>
-        </p:spPr>
-        <p:style>
-          <a:lnRef idx="1">
-            <a:schemeClr val="accent1"/>
-          </a:lnRef>
-          <a:fillRef idx="3">
-            <a:schemeClr val="accent1"/>
-          </a:fillRef>
-          <a:effectRef idx="2">
-            <a:schemeClr val="accent1"/>
-          </a:effectRef>
-          <a:fontRef idx="minor">
-            <a:schemeClr val="lt1"/>
-          </a:fontRef>
-        </p:style>
-        <p:txBody>
-          <a:bodyPr rtlCol="0" anchor="ctr"/>
-          <a:lstStyle/>
-          <a:p>
-            <a:pPr algn="ctr"/>
-          </a:p>
-        </p:txBody>
-      </p:sp>
-      <p:sp>
-        <p:nvSpPr>
-          <p:cNvPr id="16" name="TextBox 15"/>
-          <p:cNvSpPr txBox="1"/>
-          <p:nvPr/>
-        </p:nvSpPr>
-        <p:spPr>
-          <a:xfrm>
-            <a:off x="2834639" y="1481328"/>
-            <a:ext cx="1453896" cy="182880"/>
-          </a:xfrm>
-          <a:prstGeom prst="rect">
-            <a:avLst/>
-          </a:prstGeom>
-          <a:noFill/>
-        </p:spPr>
-        <p:txBody>
-          <a:bodyPr wrap="square" lIns="27432" rIns="27432" tIns="9144" bIns="9144" anchor="ctr">
-            <a:spAutoFit/>
-          </a:bodyPr>
-          <a:lstStyle/>
-          <a:p>
-            <a:pPr algn="ctr">
-              <a:defRPr sz="919" b="1">
-                <a:solidFill>
-                  <a:srgbClr val="00796B"/>
-                </a:solidFill>
-                <a:latin typeface="Microsoft YaHei"/>
-              </a:defRPr>
-            </a:pPr>
-            <a:r>
-              <a:rPr sz="919" b="1">
-                <a:solidFill>
-                  <a:srgbClr val="00796B"/>
-                </a:solidFill>
-                <a:latin typeface="Microsoft YaHei"/>
-              </a:rPr>
-              <a:t>1,327 cohorts</a:t>
-            </a:r>
-          </a:p>
-        </p:txBody>
-      </p:sp>
-      <p:sp>
-        <p:nvSpPr>
-          <p:cNvPr id="17" name="TextBox 16"/>
-          <p:cNvSpPr txBox="1"/>
-          <p:nvPr/>
-        </p:nvSpPr>
-        <p:spPr>
-          <a:xfrm>
-            <a:off x="2852927" y="1700784"/>
-            <a:ext cx="1417320" cy="347472"/>
-          </a:xfrm>
-          <a:prstGeom prst="rect">
-            <a:avLst/>
-          </a:prstGeom>
-          <a:noFill/>
-        </p:spPr>
-        <p:txBody>
-          <a:bodyPr wrap="square" lIns="27432" rIns="27432" tIns="9144" bIns="9144" anchor="ctr">
-            <a:spAutoFit/>
-          </a:bodyPr>
-          <a:lstStyle/>
-          <a:p>
-            <a:pPr algn="ctr">
-              <a:defRPr sz="780" b="0">
-                <a:solidFill>
-                  <a:srgbClr val="64748B"/>
-                </a:solidFill>
-                <a:latin typeface="Microsoft YaHei"/>
-              </a:defRPr>
-            </a:pPr>
-            <a:r>
-              <a:rPr sz="780" b="0">
-                <a:solidFill>
-                  <a:srgbClr val="64748B"/>
-                </a:solidFill>
-                <a:latin typeface="Microsoft YaHei"/>
-              </a:rPr>
-              <a:t>aggregated profiles</a:t>
-            </a:r>
-          </a:p>
-        </p:txBody>
-      </p:sp>
-      <p:sp>
-        <p:nvSpPr>
-          <p:cNvPr id="18" name="Right Arrow 17"/>
-          <p:cNvSpPr/>
-          <p:nvPr/>
-        </p:nvSpPr>
-        <p:spPr>
-          <a:xfrm>
-            <a:off x="4425696" y="1664208"/>
-            <a:ext cx="292608" cy="128016"/>
-          </a:xfrm>
-          <a:prstGeom prst="rightArrow">
-            <a:avLst/>
-          </a:prstGeom>
-          <a:solidFill>
-            <a:srgbClr val="64748B"/>
-          </a:solidFill>
-          <a:ln>
-            <a:noFill/>
-          </a:ln>
-        </p:spPr>
-        <p:style>
-          <a:lnRef idx="1">
-            <a:schemeClr val="accent1"/>
-          </a:lnRef>
-          <a:fillRef idx="3">
-            <a:schemeClr val="accent1"/>
-          </a:fillRef>
-          <a:effectRef idx="2">
-            <a:schemeClr val="accent1"/>
-          </a:effectRef>
-          <a:fontRef idx="minor">
-            <a:schemeClr val="lt1"/>
-          </a:fontRef>
-        </p:style>
-        <p:txBody>
-          <a:bodyPr rtlCol="0" anchor="ctr"/>
-          <a:lstStyle/>
-          <a:p>
-            <a:pPr algn="ctr"/>
-          </a:p>
-        </p:txBody>
-      </p:sp>
-      <p:sp>
-        <p:nvSpPr>
-          <p:cNvPr id="19" name="Rounded Rectangle 18"/>
-          <p:cNvSpPr/>
-          <p:nvPr/>
-        </p:nvSpPr>
-        <p:spPr>
-          <a:xfrm>
-            <a:off x="4864607" y="1417320"/>
-            <a:ext cx="1600200" cy="685800"/>
-          </a:xfrm>
-          <a:prstGeom prst="roundRect">
-            <a:avLst/>
-          </a:prstGeom>
-          <a:solidFill>
-            <a:srgbClr val="FFFFFF"/>
-          </a:solidFill>
-          <a:ln w="9525">
-            <a:solidFill>
-              <a:srgbClr val="EA580C"/>
-            </a:solidFill>
-          </a:ln>
-        </p:spPr>
-        <p:style>
-          <a:lnRef idx="1">
-            <a:schemeClr val="accent1"/>
-          </a:lnRef>
-          <a:fillRef idx="3">
-            <a:schemeClr val="accent1"/>
-          </a:fillRef>
-          <a:effectRef idx="2">
-            <a:schemeClr val="accent1"/>
-          </a:effectRef>
-          <a:fontRef idx="minor">
-            <a:schemeClr val="lt1"/>
-          </a:fontRef>
-        </p:style>
-        <p:txBody>
-          <a:bodyPr rtlCol="0" anchor="ctr"/>
-          <a:lstStyle/>
-          <a:p>
-            <a:pPr algn="ctr"/>
-          </a:p>
-        </p:txBody>
-      </p:sp>
-      <p:sp>
-        <p:nvSpPr>
-          <p:cNvPr id="20" name="TextBox 19"/>
-          <p:cNvSpPr txBox="1"/>
-          <p:nvPr/>
-        </p:nvSpPr>
-        <p:spPr>
-          <a:xfrm>
-            <a:off x="4937759" y="1481328"/>
-            <a:ext cx="1453896" cy="182880"/>
-          </a:xfrm>
-          <a:prstGeom prst="rect">
-            <a:avLst/>
-          </a:prstGeom>
-          <a:noFill/>
-        </p:spPr>
-        <p:txBody>
-          <a:bodyPr wrap="square" lIns="27432" rIns="27432" tIns="9144" bIns="9144" anchor="ctr">
-            <a:spAutoFit/>
-          </a:bodyPr>
-          <a:lstStyle/>
-          <a:p>
-            <a:pPr algn="ctr">
-              <a:defRPr sz="919" b="1">
-                <a:solidFill>
-                  <a:srgbClr val="EA580C"/>
-                </a:solidFill>
-                <a:latin typeface="Microsoft YaHei"/>
-              </a:defRPr>
-            </a:pPr>
-            <a:r>
-              <a:rPr sz="919" b="1">
-                <a:solidFill>
-                  <a:srgbClr val="EA580C"/>
-                </a:solidFill>
-                <a:latin typeface="Microsoft YaHei"/>
-              </a:rPr>
-              <a:t>89 batch prompts</a:t>
-            </a:r>
-          </a:p>
-        </p:txBody>
-      </p:sp>
-      <p:sp>
-        <p:nvSpPr>
-          <p:cNvPr id="21" name="TextBox 20"/>
-          <p:cNvSpPr txBox="1"/>
-          <p:nvPr/>
-        </p:nvSpPr>
-        <p:spPr>
-          <a:xfrm>
-            <a:off x="4956047" y="1700784"/>
-            <a:ext cx="1417320" cy="347472"/>
-          </a:xfrm>
-          <a:prstGeom prst="rect">
-            <a:avLst/>
-          </a:prstGeom>
-          <a:noFill/>
-        </p:spPr>
-        <p:txBody>
-          <a:bodyPr wrap="square" lIns="27432" rIns="27432" tIns="9144" bIns="9144" anchor="ctr">
-            <a:spAutoFit/>
-          </a:bodyPr>
-          <a:lstStyle/>
-          <a:p>
-            <a:pPr algn="ctr">
-              <a:defRPr sz="780" b="0">
-                <a:solidFill>
-                  <a:srgbClr val="64748B"/>
-                </a:solidFill>
-                <a:latin typeface="Microsoft YaHei"/>
-              </a:defRPr>
-            </a:pPr>
-            <a:r>
-              <a:rPr sz="780" b="0">
-                <a:solidFill>
-                  <a:srgbClr val="64748B"/>
-                </a:solidFill>
-                <a:latin typeface="Microsoft YaHei"/>
-              </a:rPr>
-              <a:t>batch size 15</a:t>
-            </a:r>
-          </a:p>
-        </p:txBody>
-      </p:sp>
-      <p:sp>
-        <p:nvSpPr>
-          <p:cNvPr id="22" name="Right Arrow 21"/>
-          <p:cNvSpPr/>
-          <p:nvPr/>
-        </p:nvSpPr>
-        <p:spPr>
-          <a:xfrm>
-            <a:off x="6528816" y="1664208"/>
-            <a:ext cx="292608" cy="128016"/>
-          </a:xfrm>
-          <a:prstGeom prst="rightArrow">
-            <a:avLst/>
-          </a:prstGeom>
-          <a:solidFill>
-            <a:srgbClr val="64748B"/>
-          </a:solidFill>
-          <a:ln>
-            <a:noFill/>
-          </a:ln>
-        </p:spPr>
-        <p:style>
-          <a:lnRef idx="1">
-            <a:schemeClr val="accent1"/>
-          </a:lnRef>
-          <a:fillRef idx="3">
-            <a:schemeClr val="accent1"/>
-          </a:fillRef>
-          <a:effectRef idx="2">
-            <a:schemeClr val="accent1"/>
-          </a:effectRef>
-          <a:fontRef idx="minor">
-            <a:schemeClr val="lt1"/>
-          </a:fontRef>
-        </p:style>
-        <p:txBody>
-          <a:bodyPr rtlCol="0" anchor="ctr"/>
-          <a:lstStyle/>
-          <a:p>
-            <a:pPr algn="ctr"/>
-          </a:p>
-        </p:txBody>
-      </p:sp>
-      <p:sp>
-        <p:nvSpPr>
-          <p:cNvPr id="23" name="Rounded Rectangle 22"/>
-          <p:cNvSpPr/>
-          <p:nvPr/>
-        </p:nvSpPr>
-        <p:spPr>
-          <a:xfrm>
-            <a:off x="6967727" y="1417320"/>
-            <a:ext cx="1600200" cy="685800"/>
-          </a:xfrm>
-          <a:prstGeom prst="roundRect">
-            <a:avLst/>
-          </a:prstGeom>
-          <a:solidFill>
-            <a:srgbClr val="FFFFFF"/>
-          </a:solidFill>
-          <a:ln w="9525">
-            <a:solidFill>
-              <a:srgbClr val="EA580C"/>
-            </a:solidFill>
-          </a:ln>
-        </p:spPr>
-        <p:style>
-          <a:lnRef idx="1">
-            <a:schemeClr val="accent1"/>
-          </a:lnRef>
-          <a:fillRef idx="3">
-            <a:schemeClr val="accent1"/>
-          </a:fillRef>
-          <a:effectRef idx="2">
-            <a:schemeClr val="accent1"/>
-          </a:effectRef>
-          <a:fontRef idx="minor">
-            <a:schemeClr val="lt1"/>
-          </a:fontRef>
-        </p:style>
-        <p:txBody>
-          <a:bodyPr rtlCol="0" anchor="ctr"/>
-          <a:lstStyle/>
-          <a:p>
-            <a:pPr algn="ctr"/>
-          </a:p>
-        </p:txBody>
-      </p:sp>
-      <p:sp>
-        <p:nvSpPr>
-          <p:cNvPr id="24" name="TextBox 23"/>
-          <p:cNvSpPr txBox="1"/>
-          <p:nvPr/>
-        </p:nvSpPr>
-        <p:spPr>
-          <a:xfrm>
-            <a:off x="7040879" y="1481328"/>
-            <a:ext cx="1453896" cy="182880"/>
-          </a:xfrm>
-          <a:prstGeom prst="rect">
-            <a:avLst/>
-          </a:prstGeom>
-          <a:noFill/>
-        </p:spPr>
-        <p:txBody>
-          <a:bodyPr wrap="square" lIns="27432" rIns="27432" tIns="9144" bIns="9144" anchor="ctr">
-            <a:spAutoFit/>
-          </a:bodyPr>
-          <a:lstStyle/>
-          <a:p>
-            <a:pPr algn="ctr">
-              <a:defRPr sz="919" b="1">
-                <a:solidFill>
-                  <a:srgbClr val="EA580C"/>
-                </a:solidFill>
-                <a:latin typeface="Microsoft YaHei"/>
-              </a:defRPr>
-            </a:pPr>
-            <a:r>
-              <a:rPr sz="919" b="1">
-                <a:solidFill>
-                  <a:srgbClr val="EA580C"/>
-                </a:solidFill>
-                <a:latin typeface="Microsoft YaHei"/>
-              </a:rPr>
-              <a:t>validated JSON</a:t>
-            </a:r>
-          </a:p>
-        </p:txBody>
-      </p:sp>
-      <p:sp>
-        <p:nvSpPr>
-          <p:cNvPr id="25" name="TextBox 24"/>
-          <p:cNvSpPr txBox="1"/>
-          <p:nvPr/>
-        </p:nvSpPr>
-        <p:spPr>
-          <a:xfrm>
-            <a:off x="7059167" y="1700784"/>
-            <a:ext cx="1417320" cy="347472"/>
-          </a:xfrm>
-          <a:prstGeom prst="rect">
-            <a:avLst/>
-          </a:prstGeom>
-          <a:noFill/>
-        </p:spPr>
-        <p:txBody>
-          <a:bodyPr wrap="square" lIns="27432" rIns="27432" tIns="9144" bIns="9144" anchor="ctr">
-            <a:spAutoFit/>
-          </a:bodyPr>
-          <a:lstStyle/>
-          <a:p>
-            <a:pPr algn="ctr">
-              <a:defRPr sz="780" b="0">
-                <a:solidFill>
-                  <a:srgbClr val="64748B"/>
-                </a:solidFill>
-                <a:latin typeface="Microsoft YaHei"/>
-              </a:defRPr>
-            </a:pPr>
-            <a:r>
-              <a:rPr sz="780" b="0">
-                <a:solidFill>
-                  <a:srgbClr val="64748B"/>
-                </a:solidFill>
-                <a:latin typeface="Microsoft YaHei"/>
-              </a:rPr>
-              <a:t>event priors</a:t>
-            </a:r>
-          </a:p>
-        </p:txBody>
-      </p:sp>
-      <p:sp>
-        <p:nvSpPr>
-          <p:cNvPr id="26" name="Right Arrow 25"/>
-          <p:cNvSpPr/>
-          <p:nvPr/>
-        </p:nvSpPr>
-        <p:spPr>
-          <a:xfrm>
-            <a:off x="8631936" y="1664208"/>
-            <a:ext cx="292608" cy="128016"/>
-          </a:xfrm>
-          <a:prstGeom prst="rightArrow">
-            <a:avLst/>
-          </a:prstGeom>
-          <a:solidFill>
-            <a:srgbClr val="64748B"/>
-          </a:solidFill>
-          <a:ln>
-            <a:noFill/>
-          </a:ln>
-        </p:spPr>
-        <p:style>
-          <a:lnRef idx="1">
-            <a:schemeClr val="accent1"/>
-          </a:lnRef>
-          <a:fillRef idx="3">
-            <a:schemeClr val="accent1"/>
-          </a:fillRef>
-          <a:effectRef idx="2">
-            <a:schemeClr val="accent1"/>
-          </a:effectRef>
-          <a:fontRef idx="minor">
-            <a:schemeClr val="lt1"/>
-          </a:fontRef>
-        </p:style>
-        <p:txBody>
-          <a:bodyPr rtlCol="0" anchor="ctr"/>
-          <a:lstStyle/>
-          <a:p>
-            <a:pPr algn="ctr"/>
-          </a:p>
-        </p:txBody>
-      </p:sp>
-      <p:sp>
-        <p:nvSpPr>
-          <p:cNvPr id="27" name="Rounded Rectangle 26"/>
-          <p:cNvSpPr/>
-          <p:nvPr/>
-        </p:nvSpPr>
-        <p:spPr>
-          <a:xfrm>
-            <a:off x="9070848" y="1417320"/>
-            <a:ext cx="1600200" cy="685800"/>
-          </a:xfrm>
-          <a:prstGeom prst="roundRect">
-            <a:avLst/>
-          </a:prstGeom>
-          <a:solidFill>
-            <a:srgbClr val="FFFFFF"/>
-          </a:solidFill>
-          <a:ln w="9525">
-            <a:solidFill>
-              <a:srgbClr val="EA580C"/>
-            </a:solidFill>
-          </a:ln>
-        </p:spPr>
-        <p:style>
-          <a:lnRef idx="1">
-            <a:schemeClr val="accent1"/>
-          </a:lnRef>
-          <a:fillRef idx="3">
-            <a:schemeClr val="accent1"/>
-          </a:fillRef>
-          <a:effectRef idx="2">
-            <a:schemeClr val="accent1"/>
-          </a:effectRef>
-          <a:fontRef idx="minor">
-            <a:schemeClr val="lt1"/>
-          </a:fontRef>
-        </p:style>
-        <p:txBody>
-          <a:bodyPr rtlCol="0" anchor="ctr"/>
-          <a:lstStyle/>
-          <a:p>
-            <a:pPr algn="ctr"/>
-          </a:p>
-        </p:txBody>
-      </p:sp>
-      <p:sp>
-        <p:nvSpPr>
-          <p:cNvPr id="28" name="TextBox 27"/>
-          <p:cNvSpPr txBox="1"/>
-          <p:nvPr/>
-        </p:nvSpPr>
-        <p:spPr>
-          <a:xfrm>
-            <a:off x="9144000" y="1481328"/>
-            <a:ext cx="1453896" cy="182880"/>
-          </a:xfrm>
-          <a:prstGeom prst="rect">
-            <a:avLst/>
-          </a:prstGeom>
-          <a:noFill/>
-        </p:spPr>
-        <p:txBody>
-          <a:bodyPr wrap="square" lIns="27432" rIns="27432" tIns="9144" bIns="9144" anchor="ctr">
-            <a:spAutoFit/>
-          </a:bodyPr>
-          <a:lstStyle/>
-          <a:p>
-            <a:pPr algn="ctr">
-              <a:defRPr sz="919" b="1">
-                <a:solidFill>
-                  <a:srgbClr val="EA580C"/>
-                </a:solidFill>
-                <a:latin typeface="Microsoft YaHei"/>
-              </a:defRPr>
-            </a:pPr>
-            <a:r>
-              <a:rPr sz="919" b="1">
-                <a:solidFill>
-                  <a:srgbClr val="EA580C"/>
-                </a:solidFill>
-                <a:latin typeface="Microsoft YaHei"/>
-              </a:rPr>
-              <a:t>multi-output adapter</a:t>
-            </a:r>
-          </a:p>
-        </p:txBody>
-      </p:sp>
-      <p:sp>
-        <p:nvSpPr>
-          <p:cNvPr id="29" name="TextBox 28"/>
-          <p:cNvSpPr txBox="1"/>
-          <p:nvPr/>
-        </p:nvSpPr>
-        <p:spPr>
-          <a:xfrm>
-            <a:off x="9162288" y="1700784"/>
-            <a:ext cx="1417320" cy="347472"/>
-          </a:xfrm>
-          <a:prstGeom prst="rect">
-            <a:avLst/>
-          </a:prstGeom>
-          <a:noFill/>
-        </p:spPr>
-        <p:txBody>
-          <a:bodyPr wrap="square" lIns="27432" rIns="27432" tIns="9144" bIns="9144" anchor="ctr">
-            <a:spAutoFit/>
-          </a:bodyPr>
-          <a:lstStyle/>
-          <a:p>
-            <a:pPr algn="ctr">
-              <a:defRPr sz="780" b="0">
-                <a:solidFill>
-                  <a:srgbClr val="64748B"/>
-                </a:solidFill>
-                <a:latin typeface="Microsoft YaHei"/>
-              </a:defRPr>
-            </a:pPr>
-            <a:r>
-              <a:rPr sz="780" b="0">
-                <a:solidFill>
-                  <a:srgbClr val="64748B"/>
-                </a:solidFill>
-                <a:latin typeface="Microsoft YaHei"/>
-              </a:rPr>
-              <a:t>trips / modes / purposes</a:t>
-            </a:r>
-          </a:p>
-        </p:txBody>
-      </p:sp>
-      <p:sp>
-        <p:nvSpPr>
-          <p:cNvPr id="30" name="Rounded Rectangle 29"/>
-          <p:cNvSpPr/>
-          <p:nvPr/>
-        </p:nvSpPr>
-        <p:spPr>
-          <a:xfrm>
-            <a:off x="914400" y="2816352"/>
-            <a:ext cx="2194560" cy="786384"/>
+            <a:off x="658368" y="1152144"/>
+            <a:ext cx="2331720" cy="987552"/>
           </a:xfrm>
           <a:prstGeom prst="roundRect">
             <a:avLst/>
@@ -27906,20 +27090,20 @@
       </p:sp>
       <p:sp>
         <p:nvSpPr>
-          <p:cNvPr id="31" name="Rectangle 30"/>
+          <p:cNvPr id="12" name="Rectangle 11"/>
           <p:cNvSpPr/>
           <p:nvPr/>
         </p:nvSpPr>
         <p:spPr>
           <a:xfrm>
-            <a:off x="914400" y="2816352"/>
-            <a:ext cx="50292" cy="786384"/>
+            <a:off x="658368" y="1152144"/>
+            <a:ext cx="2331720" cy="50292"/>
           </a:xfrm>
           <a:prstGeom prst="rect">
             <a:avLst/>
           </a:prstGeom>
           <a:solidFill>
-            <a:srgbClr val="2563EB"/>
+            <a:srgbClr val="BE123C"/>
           </a:solidFill>
           <a:ln>
             <a:noFill/>
@@ -27949,14 +27133,14 @@
       </p:sp>
       <p:sp>
         <p:nvSpPr>
-          <p:cNvPr id="32" name="TextBox 31"/>
-          <p:cNvSpPr txBox="1"/>
-          <p:nvPr/>
-        </p:nvSpPr>
-        <p:spPr>
-          <a:xfrm>
-            <a:off x="1042416" y="2889504"/>
-            <a:ext cx="1975104" cy="164592"/>
+          <p:cNvPr id="13" name="TextBox 12"/>
+          <p:cNvSpPr txBox="1"/>
+          <p:nvPr/>
+        </p:nvSpPr>
+        <p:spPr>
+          <a:xfrm>
+            <a:off x="786384" y="1335024"/>
+            <a:ext cx="2075688" cy="219456"/>
           </a:xfrm>
           <a:prstGeom prst="rect">
             <a:avLst/>
@@ -27969,8 +27153,50 @@
           </a:bodyPr>
           <a:lstStyle/>
           <a:p>
-            <a:pPr algn="l">
-              <a:defRPr sz="780" b="1">
+            <a:pPr algn="ctr">
+              <a:defRPr sz="1200" b="1">
+                <a:solidFill>
+                  <a:srgbClr val="BE123C"/>
+                </a:solidFill>
+                <a:latin typeface="Microsoft YaHei"/>
+              </a:defRPr>
+            </a:pPr>
+            <a:r>
+              <a:rPr sz="1200" b="1">
+                <a:solidFill>
+                  <a:srgbClr val="BE123C"/>
+                </a:solidFill>
+                <a:latin typeface="Microsoft YaHei"/>
+              </a:rPr>
+              <a:t>Direct LLM</a:t>
+            </a:r>
+          </a:p>
+        </p:txBody>
+      </p:sp>
+      <p:sp>
+        <p:nvSpPr>
+          <p:cNvPr id="14" name="TextBox 13"/>
+          <p:cNvSpPr txBox="1"/>
+          <p:nvPr/>
+        </p:nvSpPr>
+        <p:spPr>
+          <a:xfrm>
+            <a:off x="804672" y="1627632"/>
+            <a:ext cx="2039112" cy="329184"/>
+          </a:xfrm>
+          <a:prstGeom prst="rect">
+            <a:avLst/>
+          </a:prstGeom>
+          <a:noFill/>
+        </p:spPr>
+        <p:txBody>
+          <a:bodyPr wrap="square" lIns="27432" rIns="27432" tIns="9144" bIns="9144" anchor="ctr">
+            <a:spAutoFit/>
+          </a:bodyPr>
+          <a:lstStyle/>
+          <a:p>
+            <a:pPr algn="ctr">
+              <a:defRPr sz="1200" b="0">
                 <a:solidFill>
                   <a:srgbClr val="64748B"/>
                 </a:solidFill>
@@ -27978,111 +27204,70 @@
               </a:defRPr>
             </a:pPr>
             <a:r>
-              <a:rPr sz="780" b="1">
+              <a:rPr sz="1200" b="0">
                 <a:solidFill>
                   <a:srgbClr val="64748B"/>
                 </a:solidFill>
                 <a:latin typeface="Microsoft YaHei"/>
               </a:rPr>
-              <a:t>Request reduction</a:t>
-            </a:r>
-          </a:p>
-        </p:txBody>
-      </p:sp>
-      <p:sp>
-        <p:nvSpPr>
-          <p:cNvPr id="33" name="TextBox 32"/>
-          <p:cNvSpPr txBox="1"/>
-          <p:nvPr/>
-        </p:nvSpPr>
-        <p:spPr>
-          <a:xfrm>
-            <a:off x="1042416" y="3063240"/>
-            <a:ext cx="1975104" cy="292608"/>
-          </a:xfrm>
-          <a:prstGeom prst="rect">
-            <a:avLst/>
-          </a:prstGeom>
-          <a:noFill/>
-        </p:spPr>
-        <p:txBody>
-          <a:bodyPr wrap="square" lIns="27432" rIns="27432" tIns="9144" bIns="9144" anchor="ctr">
-            <a:spAutoFit/>
-          </a:bodyPr>
-          <a:lstStyle/>
-          <a:p>
-            <a:pPr algn="l">
-              <a:defRPr sz="1600" b="1">
-                <a:solidFill>
-                  <a:srgbClr val="2563EB"/>
-                </a:solidFill>
-                <a:latin typeface="Microsoft YaHei"/>
-              </a:defRPr>
-            </a:pPr>
-            <a:r>
-              <a:rPr sz="1600" b="1">
-                <a:solidFill>
-                  <a:srgbClr val="2563EB"/>
-                </a:solidFill>
-                <a:latin typeface="Microsoft YaHei"/>
-              </a:rPr>
-              <a:t>93.3%</a:t>
-            </a:r>
-          </a:p>
-        </p:txBody>
-      </p:sp>
-      <p:sp>
-        <p:nvSpPr>
-          <p:cNvPr id="34" name="TextBox 33"/>
-          <p:cNvSpPr txBox="1"/>
-          <p:nvPr/>
-        </p:nvSpPr>
-        <p:spPr>
-          <a:xfrm>
-            <a:off x="1042416" y="3374136"/>
-            <a:ext cx="1975104" cy="182880"/>
-          </a:xfrm>
-          <a:prstGeom prst="rect">
-            <a:avLst/>
-          </a:prstGeom>
-          <a:noFill/>
-        </p:spPr>
-        <p:txBody>
-          <a:bodyPr wrap="square" lIns="27432" rIns="27432" tIns="9144" bIns="9144" anchor="ctr">
-            <a:spAutoFit/>
-          </a:bodyPr>
-          <a:lstStyle/>
-          <a:p>
-            <a:pPr algn="l">
-              <a:defRPr sz="750" b="0">
-                <a:solidFill>
-                  <a:srgbClr val="64748B"/>
-                </a:solidFill>
-                <a:latin typeface="Microsoft YaHei"/>
-              </a:defRPr>
-            </a:pPr>
-            <a:r>
-              <a:rPr sz="750" b="0">
-                <a:solidFill>
-                  <a:srgbClr val="64748B"/>
-                </a:solidFill>
-                <a:latin typeface="Microsoft YaHei"/>
-              </a:rPr>
-              <a:t>1327 -&gt; 89 prompts</a:t>
-            </a:r>
-          </a:p>
-        </p:txBody>
-      </p:sp>
-      <p:sp>
-        <p:nvSpPr>
-          <p:cNvPr id="35" name="Rounded Rectangle 34"/>
+              <a:t>逐户预测成本高，且数值校准弱</a:t>
+            </a:r>
+          </a:p>
+        </p:txBody>
+      </p:sp>
+      <p:sp>
+        <p:nvSpPr>
+          <p:cNvPr id="15" name="Right Arrow 14"/>
           <p:cNvSpPr/>
           <p:nvPr/>
         </p:nvSpPr>
         <p:spPr>
           <a:xfrm>
-            <a:off x="3520440" y="2816352"/>
-            <a:ext cx="2194560" cy="786384"/>
+            <a:off x="3054096" y="1572768"/>
+            <a:ext cx="256032" cy="128016"/>
+          </a:xfrm>
+          <a:prstGeom prst="rightArrow">
+            <a:avLst/>
+          </a:prstGeom>
+          <a:solidFill>
+            <a:srgbClr val="64748B"/>
+          </a:solidFill>
+          <a:ln>
+            <a:noFill/>
+          </a:ln>
+        </p:spPr>
+        <p:style>
+          <a:lnRef idx="1">
+            <a:schemeClr val="accent1"/>
+          </a:lnRef>
+          <a:fillRef idx="3">
+            <a:schemeClr val="accent1"/>
+          </a:fillRef>
+          <a:effectRef idx="2">
+            <a:schemeClr val="accent1"/>
+          </a:effectRef>
+          <a:fontRef idx="minor">
+            <a:schemeClr val="lt1"/>
+          </a:fontRef>
+        </p:style>
+        <p:txBody>
+          <a:bodyPr rtlCol="0" anchor="ctr"/>
+          <a:lstStyle/>
+          <a:p>
+            <a:pPr algn="ctr"/>
+          </a:p>
+        </p:txBody>
+      </p:sp>
+      <p:sp>
+        <p:nvSpPr>
+          <p:cNvPr id="16" name="Rounded Rectangle 15"/>
+          <p:cNvSpPr/>
+          <p:nvPr/>
+        </p:nvSpPr>
+        <p:spPr>
+          <a:xfrm>
+            <a:off x="3447287" y="1152144"/>
+            <a:ext cx="2331720" cy="987552"/>
           </a:xfrm>
           <a:prstGeom prst="roundRect">
             <a:avLst/>
@@ -28120,20 +27305,20 @@
       </p:sp>
       <p:sp>
         <p:nvSpPr>
-          <p:cNvPr id="36" name="Rectangle 35"/>
+          <p:cNvPr id="17" name="Rectangle 16"/>
           <p:cNvSpPr/>
           <p:nvPr/>
         </p:nvSpPr>
         <p:spPr>
           <a:xfrm>
-            <a:off x="3520440" y="2816352"/>
-            <a:ext cx="50292" cy="786384"/>
+            <a:off x="3447287" y="1152144"/>
+            <a:ext cx="2331720" cy="50292"/>
           </a:xfrm>
           <a:prstGeom prst="rect">
             <a:avLst/>
           </a:prstGeom>
           <a:solidFill>
-            <a:srgbClr val="198754"/>
+            <a:srgbClr val="00796B"/>
           </a:solidFill>
           <a:ln>
             <a:noFill/>
@@ -28163,14 +27348,14 @@
       </p:sp>
       <p:sp>
         <p:nvSpPr>
-          <p:cNvPr id="37" name="TextBox 36"/>
-          <p:cNvSpPr txBox="1"/>
-          <p:nvPr/>
-        </p:nvSpPr>
-        <p:spPr>
-          <a:xfrm>
-            <a:off x="3648456" y="2889504"/>
-            <a:ext cx="1975104" cy="164592"/>
+          <p:cNvPr id="18" name="TextBox 17"/>
+          <p:cNvSpPr txBox="1"/>
+          <p:nvPr/>
+        </p:nvSpPr>
+        <p:spPr>
+          <a:xfrm>
+            <a:off x="3575303" y="1335024"/>
+            <a:ext cx="2075688" cy="219456"/>
           </a:xfrm>
           <a:prstGeom prst="rect">
             <a:avLst/>
@@ -28183,8 +27368,50 @@
           </a:bodyPr>
           <a:lstStyle/>
           <a:p>
-            <a:pPr algn="l">
-              <a:defRPr sz="780" b="1">
+            <a:pPr algn="ctr">
+              <a:defRPr sz="1200" b="1">
+                <a:solidFill>
+                  <a:srgbClr val="00796B"/>
+                </a:solidFill>
+                <a:latin typeface="Microsoft YaHei"/>
+              </a:defRPr>
+            </a:pPr>
+            <a:r>
+              <a:rPr sz="1200" b="1">
+                <a:solidFill>
+                  <a:srgbClr val="00796B"/>
+                </a:solidFill>
+                <a:latin typeface="Microsoft YaHei"/>
+              </a:rPr>
+              <a:t>Cohort batching</a:t>
+            </a:r>
+          </a:p>
+        </p:txBody>
+      </p:sp>
+      <p:sp>
+        <p:nvSpPr>
+          <p:cNvPr id="19" name="TextBox 18"/>
+          <p:cNvSpPr txBox="1"/>
+          <p:nvPr/>
+        </p:nvSpPr>
+        <p:spPr>
+          <a:xfrm>
+            <a:off x="3593591" y="1627632"/>
+            <a:ext cx="2039112" cy="329184"/>
+          </a:xfrm>
+          <a:prstGeom prst="rect">
+            <a:avLst/>
+          </a:prstGeom>
+          <a:noFill/>
+        </p:spPr>
+        <p:txBody>
+          <a:bodyPr wrap="square" lIns="27432" rIns="27432" tIns="9144" bIns="9144" anchor="ctr">
+            <a:spAutoFit/>
+          </a:bodyPr>
+          <a:lstStyle/>
+          <a:p>
+            <a:pPr algn="ctr">
+              <a:defRPr sz="1200" b="0">
                 <a:solidFill>
                   <a:srgbClr val="64748B"/>
                 </a:solidFill>
@@ -28192,111 +27419,70 @@
               </a:defRPr>
             </a:pPr>
             <a:r>
-              <a:rPr sz="780" b="1">
+              <a:rPr sz="1200" b="0">
                 <a:solidFill>
                   <a:srgbClr val="64748B"/>
                 </a:solidFill>
                 <a:latin typeface="Microsoft YaHei"/>
               </a:rPr>
-              <a:t>LLM strength</a:t>
-            </a:r>
-          </a:p>
-        </p:txBody>
-      </p:sp>
-      <p:sp>
-        <p:nvSpPr>
-          <p:cNvPr id="38" name="TextBox 37"/>
-          <p:cNvSpPr txBox="1"/>
-          <p:nvPr/>
-        </p:nvSpPr>
-        <p:spPr>
-          <a:xfrm>
-            <a:off x="3648456" y="3063240"/>
-            <a:ext cx="1975104" cy="292608"/>
-          </a:xfrm>
-          <a:prstGeom prst="rect">
-            <a:avLst/>
-          </a:prstGeom>
-          <a:noFill/>
-        </p:spPr>
-        <p:txBody>
-          <a:bodyPr wrap="square" lIns="27432" rIns="27432" tIns="9144" bIns="9144" anchor="ctr">
-            <a:spAutoFit/>
-          </a:bodyPr>
-          <a:lstStyle/>
-          <a:p>
-            <a:pPr algn="l">
-              <a:defRPr sz="1600" b="1">
-                <a:solidFill>
-                  <a:srgbClr val="198754"/>
-                </a:solidFill>
-                <a:latin typeface="Microsoft YaHei"/>
-              </a:defRPr>
-            </a:pPr>
-            <a:r>
-              <a:rPr sz="1600" b="1">
-                <a:solidFill>
-                  <a:srgbClr val="198754"/>
-                </a:solidFill>
-                <a:latin typeface="Microsoft YaHei"/>
-              </a:rPr>
-              <a:t>generalize</a:t>
-            </a:r>
-          </a:p>
-        </p:txBody>
-      </p:sp>
-      <p:sp>
-        <p:nvSpPr>
-          <p:cNvPr id="39" name="TextBox 38"/>
-          <p:cNvSpPr txBox="1"/>
-          <p:nvPr/>
-        </p:nvSpPr>
-        <p:spPr>
-          <a:xfrm>
-            <a:off x="3648456" y="3374136"/>
-            <a:ext cx="1975104" cy="182880"/>
-          </a:xfrm>
-          <a:prstGeom prst="rect">
-            <a:avLst/>
-          </a:prstGeom>
-          <a:noFill/>
-        </p:spPr>
-        <p:txBody>
-          <a:bodyPr wrap="square" lIns="27432" rIns="27432" tIns="9144" bIns="9144" anchor="ctr">
-            <a:spAutoFit/>
-          </a:bodyPr>
-          <a:lstStyle/>
-          <a:p>
-            <a:pPr algn="l">
-              <a:defRPr sz="750" b="0">
-                <a:solidFill>
-                  <a:srgbClr val="64748B"/>
-                </a:solidFill>
-                <a:latin typeface="Microsoft YaHei"/>
-              </a:defRPr>
-            </a:pPr>
-            <a:r>
-              <a:rPr sz="750" b="0">
-                <a:solidFill>
-                  <a:srgbClr val="64748B"/>
-                </a:solidFill>
-                <a:latin typeface="Microsoft YaHei"/>
-              </a:rPr>
-              <a:t>event mechanisms</a:t>
-            </a:r>
-          </a:p>
-        </p:txBody>
-      </p:sp>
-      <p:sp>
-        <p:nvSpPr>
-          <p:cNvPr id="40" name="Rounded Rectangle 39"/>
+              <a:t>1,327 cohorts -&gt; 89 prompts</a:t>
+            </a:r>
+          </a:p>
+        </p:txBody>
+      </p:sp>
+      <p:sp>
+        <p:nvSpPr>
+          <p:cNvPr id="20" name="Right Arrow 19"/>
           <p:cNvSpPr/>
           <p:nvPr/>
         </p:nvSpPr>
         <p:spPr>
           <a:xfrm>
-            <a:off x="6126480" y="2816352"/>
-            <a:ext cx="2194560" cy="786384"/>
+            <a:off x="5843016" y="1572768"/>
+            <a:ext cx="256032" cy="128016"/>
+          </a:xfrm>
+          <a:prstGeom prst="rightArrow">
+            <a:avLst/>
+          </a:prstGeom>
+          <a:solidFill>
+            <a:srgbClr val="64748B"/>
+          </a:solidFill>
+          <a:ln>
+            <a:noFill/>
+          </a:ln>
+        </p:spPr>
+        <p:style>
+          <a:lnRef idx="1">
+            <a:schemeClr val="accent1"/>
+          </a:lnRef>
+          <a:fillRef idx="3">
+            <a:schemeClr val="accent1"/>
+          </a:fillRef>
+          <a:effectRef idx="2">
+            <a:schemeClr val="accent1"/>
+          </a:effectRef>
+          <a:fontRef idx="minor">
+            <a:schemeClr val="lt1"/>
+          </a:fontRef>
+        </p:style>
+        <p:txBody>
+          <a:bodyPr rtlCol="0" anchor="ctr"/>
+          <a:lstStyle/>
+          <a:p>
+            <a:pPr algn="ctr"/>
+          </a:p>
+        </p:txBody>
+      </p:sp>
+      <p:sp>
+        <p:nvSpPr>
+          <p:cNvPr id="21" name="Rounded Rectangle 20"/>
+          <p:cNvSpPr/>
+          <p:nvPr/>
+        </p:nvSpPr>
+        <p:spPr>
+          <a:xfrm>
+            <a:off x="6236207" y="1152144"/>
+            <a:ext cx="2331720" cy="987552"/>
           </a:xfrm>
           <a:prstGeom prst="roundRect">
             <a:avLst/>
@@ -28334,20 +27520,20 @@
       </p:sp>
       <p:sp>
         <p:nvSpPr>
-          <p:cNvPr id="41" name="Rectangle 40"/>
+          <p:cNvPr id="22" name="Rectangle 21"/>
           <p:cNvSpPr/>
           <p:nvPr/>
         </p:nvSpPr>
         <p:spPr>
           <a:xfrm>
-            <a:off x="6126480" y="2816352"/>
-            <a:ext cx="50292" cy="786384"/>
+            <a:off x="6236207" y="1152144"/>
+            <a:ext cx="2331720" cy="50292"/>
           </a:xfrm>
           <a:prstGeom prst="rect">
             <a:avLst/>
           </a:prstGeom>
           <a:solidFill>
-            <a:srgbClr val="5B21B6"/>
+            <a:srgbClr val="EA580C"/>
           </a:solidFill>
           <a:ln>
             <a:noFill/>
@@ -28377,14 +27563,14 @@
       </p:sp>
       <p:sp>
         <p:nvSpPr>
-          <p:cNvPr id="42" name="TextBox 41"/>
-          <p:cNvSpPr txBox="1"/>
-          <p:nvPr/>
-        </p:nvSpPr>
-        <p:spPr>
-          <a:xfrm>
-            <a:off x="6254496" y="2889504"/>
-            <a:ext cx="1975104" cy="164592"/>
+          <p:cNvPr id="23" name="TextBox 22"/>
+          <p:cNvSpPr txBox="1"/>
+          <p:nvPr/>
+        </p:nvSpPr>
+        <p:spPr>
+          <a:xfrm>
+            <a:off x="6364223" y="1335024"/>
+            <a:ext cx="2075688" cy="219456"/>
           </a:xfrm>
           <a:prstGeom prst="rect">
             <a:avLst/>
@@ -28397,8 +27583,50 @@
           </a:bodyPr>
           <a:lstStyle/>
           <a:p>
-            <a:pPr algn="l">
-              <a:defRPr sz="780" b="1">
+            <a:pPr algn="ctr">
+              <a:defRPr sz="1200" b="1">
+                <a:solidFill>
+                  <a:srgbClr val="EA580C"/>
+                </a:solidFill>
+                <a:latin typeface="Microsoft YaHei"/>
+              </a:defRPr>
+            </a:pPr>
+            <a:r>
+              <a:rPr sz="1200" b="1">
+                <a:solidFill>
+                  <a:srgbClr val="EA580C"/>
+                </a:solidFill>
+                <a:latin typeface="Microsoft YaHei"/>
+              </a:rPr>
+              <a:t>Event-prior distillation</a:t>
+            </a:r>
+          </a:p>
+        </p:txBody>
+      </p:sp>
+      <p:sp>
+        <p:nvSpPr>
+          <p:cNvPr id="24" name="TextBox 23"/>
+          <p:cNvSpPr txBox="1"/>
+          <p:nvPr/>
+        </p:nvSpPr>
+        <p:spPr>
+          <a:xfrm>
+            <a:off x="6382512" y="1627632"/>
+            <a:ext cx="2039112" cy="329184"/>
+          </a:xfrm>
+          <a:prstGeom prst="rect">
+            <a:avLst/>
+          </a:prstGeom>
+          <a:noFill/>
+        </p:spPr>
+        <p:txBody>
+          <a:bodyPr wrap="square" lIns="27432" rIns="27432" tIns="9144" bIns="9144" anchor="ctr">
+            <a:spAutoFit/>
+          </a:bodyPr>
+          <a:lstStyle/>
+          <a:p>
+            <a:pPr algn="ctr">
+              <a:defRPr sz="1200" b="0">
                 <a:solidFill>
                   <a:srgbClr val="64748B"/>
                 </a:solidFill>
@@ -28406,117 +27634,33 @@
               </a:defRPr>
             </a:pPr>
             <a:r>
-              <a:rPr sz="780" b="1">
+              <a:rPr sz="1200" b="0">
                 <a:solidFill>
                   <a:srgbClr val="64748B"/>
                 </a:solidFill>
                 <a:latin typeface="Microsoft YaHei"/>
               </a:rPr>
-              <a:t>Context</a:t>
-            </a:r>
-          </a:p>
-        </p:txBody>
-      </p:sp>
-      <p:sp>
-        <p:nvSpPr>
-          <p:cNvPr id="43" name="TextBox 42"/>
-          <p:cNvSpPr txBox="1"/>
-          <p:nvPr/>
-        </p:nvSpPr>
-        <p:spPr>
-          <a:xfrm>
-            <a:off x="6254496" y="3063240"/>
-            <a:ext cx="1975104" cy="292608"/>
-          </a:xfrm>
-          <a:prstGeom prst="rect">
-            <a:avLst/>
-          </a:prstGeom>
-          <a:noFill/>
-        </p:spPr>
-        <p:txBody>
-          <a:bodyPr wrap="square" lIns="27432" rIns="27432" tIns="9144" bIns="9144" anchor="ctr">
-            <a:spAutoFit/>
-          </a:bodyPr>
-          <a:lstStyle/>
-          <a:p>
-            <a:pPr algn="l">
-              <a:defRPr sz="1600" b="1">
-                <a:solidFill>
-                  <a:srgbClr val="5B21B6"/>
-                </a:solidFill>
-                <a:latin typeface="Microsoft YaHei"/>
-              </a:defRPr>
-            </a:pPr>
-            <a:r>
-              <a:rPr sz="1600" b="1">
-                <a:solidFill>
-                  <a:srgbClr val="5B21B6"/>
-                </a:solidFill>
-                <a:latin typeface="Microsoft YaHei"/>
-              </a:rPr>
-              <a:t>frozen</a:t>
-            </a:r>
-          </a:p>
-        </p:txBody>
-      </p:sp>
-      <p:sp>
-        <p:nvSpPr>
-          <p:cNvPr id="44" name="TextBox 43"/>
-          <p:cNvSpPr txBox="1"/>
-          <p:nvPr/>
-        </p:nvSpPr>
-        <p:spPr>
-          <a:xfrm>
-            <a:off x="6254496" y="3374136"/>
-            <a:ext cx="1975104" cy="182880"/>
-          </a:xfrm>
-          <a:prstGeom prst="rect">
-            <a:avLst/>
-          </a:prstGeom>
-          <a:noFill/>
-        </p:spPr>
-        <p:txBody>
-          <a:bodyPr wrap="square" lIns="27432" rIns="27432" tIns="9144" bIns="9144" anchor="ctr">
-            <a:spAutoFit/>
-          </a:bodyPr>
-          <a:lstStyle/>
-          <a:p>
-            <a:pPr algn="l">
-              <a:defRPr sz="750" b="0">
-                <a:solidFill>
-                  <a:srgbClr val="64748B"/>
-                </a:solidFill>
-                <a:latin typeface="Microsoft YaHei"/>
-              </a:defRPr>
-            </a:pPr>
-            <a:r>
-              <a:rPr sz="750" b="0">
-                <a:solidFill>
-                  <a:srgbClr val="64748B"/>
-                </a:solidFill>
-                <a:latin typeface="Microsoft YaHei"/>
-              </a:rPr>
-              <a:t>prospective event file</a:t>
-            </a:r>
-          </a:p>
-        </p:txBody>
-      </p:sp>
-      <p:sp>
-        <p:nvSpPr>
-          <p:cNvPr id="45" name="Rectangle 44"/>
+              <a:t>validated JSON -&gt; s_event</a:t>
+            </a:r>
+          </a:p>
+        </p:txBody>
+      </p:sp>
+      <p:sp>
+        <p:nvSpPr>
+          <p:cNvPr id="25" name="Right Arrow 24"/>
           <p:cNvSpPr/>
           <p:nvPr/>
         </p:nvSpPr>
         <p:spPr>
           <a:xfrm>
-            <a:off x="914400" y="3977639"/>
-            <a:ext cx="2926080" cy="457200"/>
-          </a:xfrm>
-          <a:prstGeom prst="rect">
+            <a:off x="8631936" y="1572768"/>
+            <a:ext cx="256032" cy="128016"/>
+          </a:xfrm>
+          <a:prstGeom prst="rightArrow">
             <a:avLst/>
           </a:prstGeom>
           <a:solidFill>
-            <a:srgbClr val="183650"/>
+            <a:srgbClr val="64748B"/>
           </a:solidFill>
           <a:ln>
             <a:noFill/>
@@ -28546,143 +27690,16 @@
       </p:sp>
       <p:sp>
         <p:nvSpPr>
-          <p:cNvPr id="46" name="TextBox 45"/>
-          <p:cNvSpPr txBox="1"/>
-          <p:nvPr/>
-        </p:nvSpPr>
-        <p:spPr>
-          <a:xfrm>
-            <a:off x="950976" y="4050791"/>
-            <a:ext cx="2852928" cy="329184"/>
-          </a:xfrm>
-          <a:prstGeom prst="rect">
-            <a:avLst/>
-          </a:prstGeom>
-          <a:noFill/>
-        </p:spPr>
-        <p:txBody>
-          <a:bodyPr wrap="square" lIns="27432" rIns="27432" tIns="9144" bIns="9144" anchor="ctr">
-            <a:spAutoFit/>
-          </a:bodyPr>
-          <a:lstStyle/>
-          <a:p>
-            <a:pPr algn="ctr">
-              <a:defRPr sz="1200" b="1">
-                <a:solidFill>
-                  <a:srgbClr val="FFFFFF"/>
-                </a:solidFill>
-                <a:latin typeface="Microsoft YaHei"/>
-              </a:defRPr>
-            </a:pPr>
-            <a:r>
-              <a:rPr sz="1200" b="1">
-                <a:solidFill>
-                  <a:srgbClr val="FFFFFF"/>
-                </a:solidFill>
-                <a:latin typeface="Microsoft YaHei"/>
-              </a:rPr>
-              <a:t>风险</a:t>
-            </a:r>
-          </a:p>
-        </p:txBody>
-      </p:sp>
-      <p:sp>
-        <p:nvSpPr>
-          <p:cNvPr id="47" name="Rectangle 46"/>
+          <p:cNvPr id="26" name="Rounded Rectangle 25"/>
           <p:cNvSpPr/>
           <p:nvPr/>
         </p:nvSpPr>
         <p:spPr>
           <a:xfrm>
-            <a:off x="3840480" y="3977639"/>
-            <a:ext cx="6035040" cy="457200"/>
-          </a:xfrm>
-          <a:prstGeom prst="rect">
-            <a:avLst/>
-          </a:prstGeom>
-          <a:solidFill>
-            <a:srgbClr val="183650"/>
-          </a:solidFill>
-          <a:ln>
-            <a:noFill/>
-          </a:ln>
-        </p:spPr>
-        <p:style>
-          <a:lnRef idx="1">
-            <a:schemeClr val="accent1"/>
-          </a:lnRef>
-          <a:fillRef idx="3">
-            <a:schemeClr val="accent1"/>
-          </a:fillRef>
-          <a:effectRef idx="2">
-            <a:schemeClr val="accent1"/>
-          </a:effectRef>
-          <a:fontRef idx="minor">
-            <a:schemeClr val="lt1"/>
-          </a:fontRef>
-        </p:style>
-        <p:txBody>
-          <a:bodyPr rtlCol="0" anchor="ctr"/>
-          <a:lstStyle/>
-          <a:p>
-            <a:pPr algn="ctr"/>
-          </a:p>
-        </p:txBody>
-      </p:sp>
-      <p:sp>
-        <p:nvSpPr>
-          <p:cNvPr id="48" name="TextBox 47"/>
-          <p:cNvSpPr txBox="1"/>
-          <p:nvPr/>
-        </p:nvSpPr>
-        <p:spPr>
-          <a:xfrm>
-            <a:off x="3877056" y="4050791"/>
-            <a:ext cx="5961888" cy="329184"/>
-          </a:xfrm>
-          <a:prstGeom prst="rect">
-            <a:avLst/>
-          </a:prstGeom>
-          <a:noFill/>
-        </p:spPr>
-        <p:txBody>
-          <a:bodyPr wrap="square" lIns="27432" rIns="27432" tIns="9144" bIns="9144" anchor="ctr">
-            <a:spAutoFit/>
-          </a:bodyPr>
-          <a:lstStyle/>
-          <a:p>
-            <a:pPr algn="ctr">
-              <a:defRPr sz="1200" b="1">
-                <a:solidFill>
-                  <a:srgbClr val="FFFFFF"/>
-                </a:solidFill>
-                <a:latin typeface="Microsoft YaHei"/>
-              </a:defRPr>
-            </a:pPr>
-            <a:r>
-              <a:rPr sz="1200" b="1">
-                <a:solidFill>
-                  <a:srgbClr val="FFFFFF"/>
-                </a:solidFill>
-                <a:latin typeface="Microsoft YaHei"/>
-              </a:rPr>
-              <a:t>控制方式</a:t>
-            </a:r>
-          </a:p>
-        </p:txBody>
-      </p:sp>
-      <p:sp>
-        <p:nvSpPr>
-          <p:cNvPr id="49" name="Rectangle 48"/>
-          <p:cNvSpPr/>
-          <p:nvPr/>
-        </p:nvSpPr>
-        <p:spPr>
-          <a:xfrm>
-            <a:off x="914400" y="4434840"/>
-            <a:ext cx="2926080" cy="457200"/>
-          </a:xfrm>
-          <a:prstGeom prst="rect">
+            <a:off x="9025128" y="1152144"/>
+            <a:ext cx="2331720" cy="987552"/>
+          </a:xfrm>
+          <a:prstGeom prst="roundRect">
             <a:avLst/>
           </a:prstGeom>
           <a:solidFill>
@@ -28718,30 +27735,73 @@
       </p:sp>
       <p:sp>
         <p:nvSpPr>
-          <p:cNvPr id="50" name="TextBox 49"/>
-          <p:cNvSpPr txBox="1"/>
-          <p:nvPr/>
-        </p:nvSpPr>
-        <p:spPr>
-          <a:xfrm>
-            <a:off x="969264" y="4498848"/>
-            <a:ext cx="2816352" cy="329184"/>
-          </a:xfrm>
-          <a:prstGeom prst="rect">
-            <a:avLst/>
-          </a:prstGeom>
-          <a:noFill/>
-        </p:spPr>
-        <p:txBody>
-          <a:bodyPr wrap="square" lIns="27432" rIns="27432" tIns="9144" bIns="9144" anchor="t">
-            <a:spAutoFit/>
-          </a:bodyPr>
-          <a:lstStyle/>
-          <a:p>
-            <a:pPr algn="l">
+          <p:cNvPr id="27" name="Rectangle 26"/>
+          <p:cNvSpPr/>
+          <p:nvPr/>
+        </p:nvSpPr>
+        <p:spPr>
+          <a:xfrm>
+            <a:off x="9025128" y="1152144"/>
+            <a:ext cx="2331720" cy="50292"/>
+          </a:xfrm>
+          <a:prstGeom prst="rect">
+            <a:avLst/>
+          </a:prstGeom>
+          <a:solidFill>
+            <a:srgbClr val="198754"/>
+          </a:solidFill>
+          <a:ln>
+            <a:noFill/>
+          </a:ln>
+        </p:spPr>
+        <p:style>
+          <a:lnRef idx="1">
+            <a:schemeClr val="accent1"/>
+          </a:lnRef>
+          <a:fillRef idx="3">
+            <a:schemeClr val="accent1"/>
+          </a:fillRef>
+          <a:effectRef idx="2">
+            <a:schemeClr val="accent1"/>
+          </a:effectRef>
+          <a:fontRef idx="minor">
+            <a:schemeClr val="lt1"/>
+          </a:fontRef>
+        </p:style>
+        <p:txBody>
+          <a:bodyPr rtlCol="0" anchor="ctr"/>
+          <a:lstStyle/>
+          <a:p>
+            <a:pPr algn="ctr"/>
+          </a:p>
+        </p:txBody>
+      </p:sp>
+      <p:sp>
+        <p:nvSpPr>
+          <p:cNvPr id="28" name="TextBox 27"/>
+          <p:cNvSpPr txBox="1"/>
+          <p:nvPr/>
+        </p:nvSpPr>
+        <p:spPr>
+          <a:xfrm>
+            <a:off x="9153144" y="1335024"/>
+            <a:ext cx="2075688" cy="219456"/>
+          </a:xfrm>
+          <a:prstGeom prst="rect">
+            <a:avLst/>
+          </a:prstGeom>
+          <a:noFill/>
+        </p:spPr>
+        <p:txBody>
+          <a:bodyPr wrap="square" lIns="27432" rIns="27432" tIns="9144" bIns="9144" anchor="ctr">
+            <a:spAutoFit/>
+          </a:bodyPr>
+          <a:lstStyle/>
+          <a:p>
+            <a:pPr algn="ctr">
               <a:defRPr sz="1200" b="1">
                 <a:solidFill>
-                  <a:srgbClr val="0F172A"/>
+                  <a:srgbClr val="198754"/>
                 </a:solidFill>
                 <a:latin typeface="Microsoft YaHei"/>
               </a:defRPr>
@@ -28749,27 +27809,69 @@
             <a:r>
               <a:rPr sz="1200" b="1">
                 <a:solidFill>
-                  <a:srgbClr val="0F172A"/>
-                </a:solidFill>
-                <a:latin typeface="Microsoft YaHei"/>
-              </a:rPr>
-              <a:t>hallucination</a:t>
-            </a:r>
-          </a:p>
-        </p:txBody>
-      </p:sp>
-      <p:sp>
-        <p:nvSpPr>
-          <p:cNvPr id="51" name="Rectangle 50"/>
+                  <a:srgbClr val="198754"/>
+                </a:solidFill>
+                <a:latin typeface="Microsoft YaHei"/>
+              </a:rPr>
+              <a:t>Fixed adapter</a:t>
+            </a:r>
+          </a:p>
+        </p:txBody>
+      </p:sp>
+      <p:sp>
+        <p:nvSpPr>
+          <p:cNvPr id="29" name="TextBox 28"/>
+          <p:cNvSpPr txBox="1"/>
+          <p:nvPr/>
+        </p:nvSpPr>
+        <p:spPr>
+          <a:xfrm>
+            <a:off x="9171432" y="1627632"/>
+            <a:ext cx="2039112" cy="329184"/>
+          </a:xfrm>
+          <a:prstGeom prst="rect">
+            <a:avLst/>
+          </a:prstGeom>
+          <a:noFill/>
+        </p:spPr>
+        <p:txBody>
+          <a:bodyPr wrap="square" lIns="27432" rIns="27432" tIns="9144" bIns="9144" anchor="ctr">
+            <a:spAutoFit/>
+          </a:bodyPr>
+          <a:lstStyle/>
+          <a:p>
+            <a:pPr algn="ctr">
+              <a:defRPr sz="1200" b="0">
+                <a:solidFill>
+                  <a:srgbClr val="64748B"/>
+                </a:solidFill>
+                <a:latin typeface="Microsoft YaHei"/>
+              </a:defRPr>
+            </a:pPr>
+            <a:r>
+              <a:rPr sz="1200" b="0">
+                <a:solidFill>
+                  <a:srgbClr val="64748B"/>
+                </a:solidFill>
+                <a:latin typeface="Microsoft YaHei"/>
+              </a:rPr>
+              <a:t>no-label rule; no per-household LLM</a:t>
+            </a:r>
+          </a:p>
+        </p:txBody>
+      </p:sp>
+      <p:sp>
+        <p:nvSpPr>
+          <p:cNvPr id="30" name="Rounded Rectangle 29"/>
           <p:cNvSpPr/>
           <p:nvPr/>
         </p:nvSpPr>
         <p:spPr>
           <a:xfrm>
-            <a:off x="3840480" y="4434840"/>
-            <a:ext cx="6035040" cy="457200"/>
-          </a:xfrm>
-          <a:prstGeom prst="rect">
+            <a:off x="868680" y="2697480"/>
+            <a:ext cx="2148840" cy="768096"/>
+          </a:xfrm>
+          <a:prstGeom prst="roundRect">
             <a:avLst/>
           </a:prstGeom>
           <a:solidFill>
@@ -28805,14 +27907,1212 @@
       </p:sp>
       <p:sp>
         <p:nvSpPr>
-          <p:cNvPr id="52" name="TextBox 51"/>
-          <p:cNvSpPr txBox="1"/>
-          <p:nvPr/>
-        </p:nvSpPr>
-        <p:spPr>
-          <a:xfrm>
-            <a:off x="3895344" y="4498848"/>
-            <a:ext cx="5925312" cy="329184"/>
+          <p:cNvPr id="31" name="Rectangle 30"/>
+          <p:cNvSpPr/>
+          <p:nvPr/>
+        </p:nvSpPr>
+        <p:spPr>
+          <a:xfrm>
+            <a:off x="868680" y="2697480"/>
+            <a:ext cx="50292" cy="768096"/>
+          </a:xfrm>
+          <a:prstGeom prst="rect">
+            <a:avLst/>
+          </a:prstGeom>
+          <a:solidFill>
+            <a:srgbClr val="2563EB"/>
+          </a:solidFill>
+          <a:ln>
+            <a:noFill/>
+          </a:ln>
+        </p:spPr>
+        <p:style>
+          <a:lnRef idx="1">
+            <a:schemeClr val="accent1"/>
+          </a:lnRef>
+          <a:fillRef idx="3">
+            <a:schemeClr val="accent1"/>
+          </a:fillRef>
+          <a:effectRef idx="2">
+            <a:schemeClr val="accent1"/>
+          </a:effectRef>
+          <a:fontRef idx="minor">
+            <a:schemeClr val="lt1"/>
+          </a:fontRef>
+        </p:style>
+        <p:txBody>
+          <a:bodyPr rtlCol="0" anchor="ctr"/>
+          <a:lstStyle/>
+          <a:p>
+            <a:pPr algn="ctr"/>
+          </a:p>
+        </p:txBody>
+      </p:sp>
+      <p:sp>
+        <p:nvSpPr>
+          <p:cNvPr id="32" name="TextBox 31"/>
+          <p:cNvSpPr txBox="1"/>
+          <p:nvPr/>
+        </p:nvSpPr>
+        <p:spPr>
+          <a:xfrm>
+            <a:off x="996695" y="2770632"/>
+            <a:ext cx="1929384" cy="164592"/>
+          </a:xfrm>
+          <a:prstGeom prst="rect">
+            <a:avLst/>
+          </a:prstGeom>
+          <a:noFill/>
+        </p:spPr>
+        <p:txBody>
+          <a:bodyPr wrap="square" lIns="27432" rIns="27432" tIns="9144" bIns="9144" anchor="ctr">
+            <a:spAutoFit/>
+          </a:bodyPr>
+          <a:lstStyle/>
+          <a:p>
+            <a:pPr algn="l">
+              <a:defRPr sz="780" b="1">
+                <a:solidFill>
+                  <a:srgbClr val="64748B"/>
+                </a:solidFill>
+                <a:latin typeface="Microsoft YaHei"/>
+              </a:defRPr>
+            </a:pPr>
+            <a:r>
+              <a:rPr sz="780" b="1">
+                <a:solidFill>
+                  <a:srgbClr val="64748B"/>
+                </a:solidFill>
+                <a:latin typeface="Microsoft YaHei"/>
+              </a:rPr>
+              <a:t>Household requests</a:t>
+            </a:r>
+          </a:p>
+        </p:txBody>
+      </p:sp>
+      <p:sp>
+        <p:nvSpPr>
+          <p:cNvPr id="33" name="TextBox 32"/>
+          <p:cNvSpPr txBox="1"/>
+          <p:nvPr/>
+        </p:nvSpPr>
+        <p:spPr>
+          <a:xfrm>
+            <a:off x="996695" y="2944368"/>
+            <a:ext cx="1929384" cy="292608"/>
+          </a:xfrm>
+          <a:prstGeom prst="rect">
+            <a:avLst/>
+          </a:prstGeom>
+          <a:noFill/>
+        </p:spPr>
+        <p:txBody>
+          <a:bodyPr wrap="square" lIns="27432" rIns="27432" tIns="9144" bIns="9144" anchor="ctr">
+            <a:spAutoFit/>
+          </a:bodyPr>
+          <a:lstStyle/>
+          <a:p>
+            <a:pPr algn="l">
+              <a:defRPr sz="1600" b="1">
+                <a:solidFill>
+                  <a:srgbClr val="2563EB"/>
+                </a:solidFill>
+                <a:latin typeface="Microsoft YaHei"/>
+              </a:defRPr>
+            </a:pPr>
+            <a:r>
+              <a:rPr sz="1600" b="1">
+                <a:solidFill>
+                  <a:srgbClr val="2563EB"/>
+                </a:solidFill>
+                <a:latin typeface="Microsoft YaHei"/>
+              </a:rPr>
+              <a:t>-98.9%</a:t>
+            </a:r>
+          </a:p>
+        </p:txBody>
+      </p:sp>
+      <p:sp>
+        <p:nvSpPr>
+          <p:cNvPr id="34" name="TextBox 33"/>
+          <p:cNvSpPr txBox="1"/>
+          <p:nvPr/>
+        </p:nvSpPr>
+        <p:spPr>
+          <a:xfrm>
+            <a:off x="996695" y="3255264"/>
+            <a:ext cx="1929384" cy="182880"/>
+          </a:xfrm>
+          <a:prstGeom prst="rect">
+            <a:avLst/>
+          </a:prstGeom>
+          <a:noFill/>
+        </p:spPr>
+        <p:txBody>
+          <a:bodyPr wrap="square" lIns="27432" rIns="27432" tIns="9144" bIns="9144" anchor="ctr">
+            <a:spAutoFit/>
+          </a:bodyPr>
+          <a:lstStyle/>
+          <a:p>
+            <a:pPr algn="l">
+              <a:defRPr sz="750" b="0">
+                <a:solidFill>
+                  <a:srgbClr val="64748B"/>
+                </a:solidFill>
+                <a:latin typeface="Microsoft YaHei"/>
+              </a:defRPr>
+            </a:pPr>
+            <a:r>
+              <a:rPr sz="750" b="0">
+                <a:solidFill>
+                  <a:srgbClr val="64748B"/>
+                </a:solidFill>
+                <a:latin typeface="Microsoft YaHei"/>
+              </a:rPr>
+              <a:t>7893 -&gt; 89 prompts</a:t>
+            </a:r>
+          </a:p>
+        </p:txBody>
+      </p:sp>
+      <p:sp>
+        <p:nvSpPr>
+          <p:cNvPr id="35" name="Rounded Rectangle 34"/>
+          <p:cNvSpPr/>
+          <p:nvPr/>
+        </p:nvSpPr>
+        <p:spPr>
+          <a:xfrm>
+            <a:off x="3337560" y="2697480"/>
+            <a:ext cx="2148840" cy="768096"/>
+          </a:xfrm>
+          <a:prstGeom prst="roundRect">
+            <a:avLst/>
+          </a:prstGeom>
+          <a:solidFill>
+            <a:srgbClr val="F8FAFC"/>
+          </a:solidFill>
+          <a:ln w="9525">
+            <a:solidFill>
+              <a:srgbClr val="CBD5E1"/>
+            </a:solidFill>
+          </a:ln>
+        </p:spPr>
+        <p:style>
+          <a:lnRef idx="1">
+            <a:schemeClr val="accent1"/>
+          </a:lnRef>
+          <a:fillRef idx="3">
+            <a:schemeClr val="accent1"/>
+          </a:fillRef>
+          <a:effectRef idx="2">
+            <a:schemeClr val="accent1"/>
+          </a:effectRef>
+          <a:fontRef idx="minor">
+            <a:schemeClr val="lt1"/>
+          </a:fontRef>
+        </p:style>
+        <p:txBody>
+          <a:bodyPr rtlCol="0" anchor="ctr"/>
+          <a:lstStyle/>
+          <a:p>
+            <a:pPr algn="ctr"/>
+          </a:p>
+        </p:txBody>
+      </p:sp>
+      <p:sp>
+        <p:nvSpPr>
+          <p:cNvPr id="36" name="Rectangle 35"/>
+          <p:cNvSpPr/>
+          <p:nvPr/>
+        </p:nvSpPr>
+        <p:spPr>
+          <a:xfrm>
+            <a:off x="3337560" y="2697480"/>
+            <a:ext cx="50292" cy="768096"/>
+          </a:xfrm>
+          <a:prstGeom prst="rect">
+            <a:avLst/>
+          </a:prstGeom>
+          <a:solidFill>
+            <a:srgbClr val="00796B"/>
+          </a:solidFill>
+          <a:ln>
+            <a:noFill/>
+          </a:ln>
+        </p:spPr>
+        <p:style>
+          <a:lnRef idx="1">
+            <a:schemeClr val="accent1"/>
+          </a:lnRef>
+          <a:fillRef idx="3">
+            <a:schemeClr val="accent1"/>
+          </a:fillRef>
+          <a:effectRef idx="2">
+            <a:schemeClr val="accent1"/>
+          </a:effectRef>
+          <a:fontRef idx="minor">
+            <a:schemeClr val="lt1"/>
+          </a:fontRef>
+        </p:style>
+        <p:txBody>
+          <a:bodyPr rtlCol="0" anchor="ctr"/>
+          <a:lstStyle/>
+          <a:p>
+            <a:pPr algn="ctr"/>
+          </a:p>
+        </p:txBody>
+      </p:sp>
+      <p:sp>
+        <p:nvSpPr>
+          <p:cNvPr id="37" name="TextBox 36"/>
+          <p:cNvSpPr txBox="1"/>
+          <p:nvPr/>
+        </p:nvSpPr>
+        <p:spPr>
+          <a:xfrm>
+            <a:off x="3465576" y="2770632"/>
+            <a:ext cx="1929384" cy="164592"/>
+          </a:xfrm>
+          <a:prstGeom prst="rect">
+            <a:avLst/>
+          </a:prstGeom>
+          <a:noFill/>
+        </p:spPr>
+        <p:txBody>
+          <a:bodyPr wrap="square" lIns="27432" rIns="27432" tIns="9144" bIns="9144" anchor="ctr">
+            <a:spAutoFit/>
+          </a:bodyPr>
+          <a:lstStyle/>
+          <a:p>
+            <a:pPr algn="l">
+              <a:defRPr sz="780" b="1">
+                <a:solidFill>
+                  <a:srgbClr val="64748B"/>
+                </a:solidFill>
+                <a:latin typeface="Microsoft YaHei"/>
+              </a:defRPr>
+            </a:pPr>
+            <a:r>
+              <a:rPr sz="780" b="1">
+                <a:solidFill>
+                  <a:srgbClr val="64748B"/>
+                </a:solidFill>
+                <a:latin typeface="Microsoft YaHei"/>
+              </a:rPr>
+              <a:t>Batch size</a:t>
+            </a:r>
+          </a:p>
+        </p:txBody>
+      </p:sp>
+      <p:sp>
+        <p:nvSpPr>
+          <p:cNvPr id="38" name="TextBox 37"/>
+          <p:cNvSpPr txBox="1"/>
+          <p:nvPr/>
+        </p:nvSpPr>
+        <p:spPr>
+          <a:xfrm>
+            <a:off x="3465576" y="2944368"/>
+            <a:ext cx="1929384" cy="292608"/>
+          </a:xfrm>
+          <a:prstGeom prst="rect">
+            <a:avLst/>
+          </a:prstGeom>
+          <a:noFill/>
+        </p:spPr>
+        <p:txBody>
+          <a:bodyPr wrap="square" lIns="27432" rIns="27432" tIns="9144" bIns="9144" anchor="ctr">
+            <a:spAutoFit/>
+          </a:bodyPr>
+          <a:lstStyle/>
+          <a:p>
+            <a:pPr algn="l">
+              <a:defRPr sz="1600" b="1">
+                <a:solidFill>
+                  <a:srgbClr val="00796B"/>
+                </a:solidFill>
+                <a:latin typeface="Microsoft YaHei"/>
+              </a:defRPr>
+            </a:pPr>
+            <a:r>
+              <a:rPr sz="1600" b="1">
+                <a:solidFill>
+                  <a:srgbClr val="00796B"/>
+                </a:solidFill>
+                <a:latin typeface="Microsoft YaHei"/>
+              </a:rPr>
+              <a:t>15</a:t>
+            </a:r>
+          </a:p>
+        </p:txBody>
+      </p:sp>
+      <p:sp>
+        <p:nvSpPr>
+          <p:cNvPr id="39" name="TextBox 38"/>
+          <p:cNvSpPr txBox="1"/>
+          <p:nvPr/>
+        </p:nvSpPr>
+        <p:spPr>
+          <a:xfrm>
+            <a:off x="3465576" y="3255264"/>
+            <a:ext cx="1929384" cy="182880"/>
+          </a:xfrm>
+          <a:prstGeom prst="rect">
+            <a:avLst/>
+          </a:prstGeom>
+          <a:noFill/>
+        </p:spPr>
+        <p:txBody>
+          <a:bodyPr wrap="square" lIns="27432" rIns="27432" tIns="9144" bIns="9144" anchor="ctr">
+            <a:spAutoFit/>
+          </a:bodyPr>
+          <a:lstStyle/>
+          <a:p>
+            <a:pPr algn="l">
+              <a:defRPr sz="750" b="0">
+                <a:solidFill>
+                  <a:srgbClr val="64748B"/>
+                </a:solidFill>
+                <a:latin typeface="Microsoft YaHei"/>
+              </a:defRPr>
+            </a:pPr>
+            <a:r>
+              <a:rPr sz="750" b="0">
+                <a:solidFill>
+                  <a:srgbClr val="64748B"/>
+                </a:solidFill>
+                <a:latin typeface="Microsoft YaHei"/>
+              </a:rPr>
+              <a:t>stable JSON parsing</a:t>
+            </a:r>
+          </a:p>
+        </p:txBody>
+      </p:sp>
+      <p:sp>
+        <p:nvSpPr>
+          <p:cNvPr id="40" name="Rounded Rectangle 39"/>
+          <p:cNvSpPr/>
+          <p:nvPr/>
+        </p:nvSpPr>
+        <p:spPr>
+          <a:xfrm>
+            <a:off x="5806440" y="2697480"/>
+            <a:ext cx="2148840" cy="768096"/>
+          </a:xfrm>
+          <a:prstGeom prst="roundRect">
+            <a:avLst/>
+          </a:prstGeom>
+          <a:solidFill>
+            <a:srgbClr val="F8FAFC"/>
+          </a:solidFill>
+          <a:ln w="9525">
+            <a:solidFill>
+              <a:srgbClr val="CBD5E1"/>
+            </a:solidFill>
+          </a:ln>
+        </p:spPr>
+        <p:style>
+          <a:lnRef idx="1">
+            <a:schemeClr val="accent1"/>
+          </a:lnRef>
+          <a:fillRef idx="3">
+            <a:schemeClr val="accent1"/>
+          </a:fillRef>
+          <a:effectRef idx="2">
+            <a:schemeClr val="accent1"/>
+          </a:effectRef>
+          <a:fontRef idx="minor">
+            <a:schemeClr val="lt1"/>
+          </a:fontRef>
+        </p:style>
+        <p:txBody>
+          <a:bodyPr rtlCol="0" anchor="ctr"/>
+          <a:lstStyle/>
+          <a:p>
+            <a:pPr algn="ctr"/>
+          </a:p>
+        </p:txBody>
+      </p:sp>
+      <p:sp>
+        <p:nvSpPr>
+          <p:cNvPr id="41" name="Rectangle 40"/>
+          <p:cNvSpPr/>
+          <p:nvPr/>
+        </p:nvSpPr>
+        <p:spPr>
+          <a:xfrm>
+            <a:off x="5806440" y="2697480"/>
+            <a:ext cx="50292" cy="768096"/>
+          </a:xfrm>
+          <a:prstGeom prst="rect">
+            <a:avLst/>
+          </a:prstGeom>
+          <a:solidFill>
+            <a:srgbClr val="198754"/>
+          </a:solidFill>
+          <a:ln>
+            <a:noFill/>
+          </a:ln>
+        </p:spPr>
+        <p:style>
+          <a:lnRef idx="1">
+            <a:schemeClr val="accent1"/>
+          </a:lnRef>
+          <a:fillRef idx="3">
+            <a:schemeClr val="accent1"/>
+          </a:fillRef>
+          <a:effectRef idx="2">
+            <a:schemeClr val="accent1"/>
+          </a:effectRef>
+          <a:fontRef idx="minor">
+            <a:schemeClr val="lt1"/>
+          </a:fontRef>
+        </p:style>
+        <p:txBody>
+          <a:bodyPr rtlCol="0" anchor="ctr"/>
+          <a:lstStyle/>
+          <a:p>
+            <a:pPr algn="ctr"/>
+          </a:p>
+        </p:txBody>
+      </p:sp>
+      <p:sp>
+        <p:nvSpPr>
+          <p:cNvPr id="42" name="TextBox 41"/>
+          <p:cNvSpPr txBox="1"/>
+          <p:nvPr/>
+        </p:nvSpPr>
+        <p:spPr>
+          <a:xfrm>
+            <a:off x="5934455" y="2770632"/>
+            <a:ext cx="1929384" cy="164592"/>
+          </a:xfrm>
+          <a:prstGeom prst="rect">
+            <a:avLst/>
+          </a:prstGeom>
+          <a:noFill/>
+        </p:spPr>
+        <p:txBody>
+          <a:bodyPr wrap="square" lIns="27432" rIns="27432" tIns="9144" bIns="9144" anchor="ctr">
+            <a:spAutoFit/>
+          </a:bodyPr>
+          <a:lstStyle/>
+          <a:p>
+            <a:pPr algn="l">
+              <a:defRPr sz="780" b="1">
+                <a:solidFill>
+                  <a:srgbClr val="64748B"/>
+                </a:solidFill>
+                <a:latin typeface="Microsoft YaHei"/>
+              </a:defRPr>
+            </a:pPr>
+            <a:r>
+              <a:rPr sz="780" b="1">
+                <a:solidFill>
+                  <a:srgbClr val="64748B"/>
+                </a:solidFill>
+                <a:latin typeface="Microsoft YaHei"/>
+              </a:rPr>
+              <a:t>Main inference</a:t>
+            </a:r>
+          </a:p>
+        </p:txBody>
+      </p:sp>
+      <p:sp>
+        <p:nvSpPr>
+          <p:cNvPr id="43" name="TextBox 42"/>
+          <p:cNvSpPr txBox="1"/>
+          <p:nvPr/>
+        </p:nvSpPr>
+        <p:spPr>
+          <a:xfrm>
+            <a:off x="5934455" y="2944368"/>
+            <a:ext cx="1929384" cy="292608"/>
+          </a:xfrm>
+          <a:prstGeom prst="rect">
+            <a:avLst/>
+          </a:prstGeom>
+          <a:noFill/>
+        </p:spPr>
+        <p:txBody>
+          <a:bodyPr wrap="square" lIns="27432" rIns="27432" tIns="9144" bIns="9144" anchor="ctr">
+            <a:spAutoFit/>
+          </a:bodyPr>
+          <a:lstStyle/>
+          <a:p>
+            <a:pPr algn="l">
+              <a:defRPr sz="1600" b="1">
+                <a:solidFill>
+                  <a:srgbClr val="198754"/>
+                </a:solidFill>
+                <a:latin typeface="Microsoft YaHei"/>
+              </a:defRPr>
+            </a:pPr>
+            <a:r>
+              <a:rPr sz="1600" b="1">
+                <a:solidFill>
+                  <a:srgbClr val="198754"/>
+                </a:solidFill>
+                <a:latin typeface="Microsoft YaHei"/>
+              </a:rPr>
+              <a:t>0 LLM</a:t>
+            </a:r>
+          </a:p>
+        </p:txBody>
+      </p:sp>
+      <p:sp>
+        <p:nvSpPr>
+          <p:cNvPr id="44" name="TextBox 43"/>
+          <p:cNvSpPr txBox="1"/>
+          <p:nvPr/>
+        </p:nvSpPr>
+        <p:spPr>
+          <a:xfrm>
+            <a:off x="5934455" y="3255264"/>
+            <a:ext cx="1929384" cy="182880"/>
+          </a:xfrm>
+          <a:prstGeom prst="rect">
+            <a:avLst/>
+          </a:prstGeom>
+          <a:noFill/>
+        </p:spPr>
+        <p:txBody>
+          <a:bodyPr wrap="square" lIns="27432" rIns="27432" tIns="9144" bIns="9144" anchor="ctr">
+            <a:spAutoFit/>
+          </a:bodyPr>
+          <a:lstStyle/>
+          <a:p>
+            <a:pPr algn="l">
+              <a:defRPr sz="750" b="0">
+                <a:solidFill>
+                  <a:srgbClr val="64748B"/>
+                </a:solidFill>
+                <a:latin typeface="Microsoft YaHei"/>
+              </a:defRPr>
+            </a:pPr>
+            <a:r>
+              <a:rPr sz="750" b="0">
+                <a:solidFill>
+                  <a:srgbClr val="64748B"/>
+                </a:solidFill>
+                <a:latin typeface="Microsoft YaHei"/>
+              </a:rPr>
+              <a:t>adapter is deterministic</a:t>
+            </a:r>
+          </a:p>
+        </p:txBody>
+      </p:sp>
+      <p:sp>
+        <p:nvSpPr>
+          <p:cNvPr id="45" name="Rounded Rectangle 44"/>
+          <p:cNvSpPr/>
+          <p:nvPr/>
+        </p:nvSpPr>
+        <p:spPr>
+          <a:xfrm>
+            <a:off x="8275320" y="2697480"/>
+            <a:ext cx="2148840" cy="768096"/>
+          </a:xfrm>
+          <a:prstGeom prst="roundRect">
+            <a:avLst/>
+          </a:prstGeom>
+          <a:solidFill>
+            <a:srgbClr val="F8FAFC"/>
+          </a:solidFill>
+          <a:ln w="9525">
+            <a:solidFill>
+              <a:srgbClr val="CBD5E1"/>
+            </a:solidFill>
+          </a:ln>
+        </p:spPr>
+        <p:style>
+          <a:lnRef idx="1">
+            <a:schemeClr val="accent1"/>
+          </a:lnRef>
+          <a:fillRef idx="3">
+            <a:schemeClr val="accent1"/>
+          </a:fillRef>
+          <a:effectRef idx="2">
+            <a:schemeClr val="accent1"/>
+          </a:effectRef>
+          <a:fontRef idx="minor">
+            <a:schemeClr val="lt1"/>
+          </a:fontRef>
+        </p:style>
+        <p:txBody>
+          <a:bodyPr rtlCol="0" anchor="ctr"/>
+          <a:lstStyle/>
+          <a:p>
+            <a:pPr algn="ctr"/>
+          </a:p>
+        </p:txBody>
+      </p:sp>
+      <p:sp>
+        <p:nvSpPr>
+          <p:cNvPr id="46" name="Rectangle 45"/>
+          <p:cNvSpPr/>
+          <p:nvPr/>
+        </p:nvSpPr>
+        <p:spPr>
+          <a:xfrm>
+            <a:off x="8275320" y="2697480"/>
+            <a:ext cx="50292" cy="768096"/>
+          </a:xfrm>
+          <a:prstGeom prst="rect">
+            <a:avLst/>
+          </a:prstGeom>
+          <a:solidFill>
+            <a:srgbClr val="5B21B6"/>
+          </a:solidFill>
+          <a:ln>
+            <a:noFill/>
+          </a:ln>
+        </p:spPr>
+        <p:style>
+          <a:lnRef idx="1">
+            <a:schemeClr val="accent1"/>
+          </a:lnRef>
+          <a:fillRef idx="3">
+            <a:schemeClr val="accent1"/>
+          </a:fillRef>
+          <a:effectRef idx="2">
+            <a:schemeClr val="accent1"/>
+          </a:effectRef>
+          <a:fontRef idx="minor">
+            <a:schemeClr val="lt1"/>
+          </a:fontRef>
+        </p:style>
+        <p:txBody>
+          <a:bodyPr rtlCol="0" anchor="ctr"/>
+          <a:lstStyle/>
+          <a:p>
+            <a:pPr algn="ctr"/>
+          </a:p>
+        </p:txBody>
+      </p:sp>
+      <p:sp>
+        <p:nvSpPr>
+          <p:cNvPr id="47" name="TextBox 46"/>
+          <p:cNvSpPr txBox="1"/>
+          <p:nvPr/>
+        </p:nvSpPr>
+        <p:spPr>
+          <a:xfrm>
+            <a:off x="8403336" y="2770632"/>
+            <a:ext cx="1929384" cy="164592"/>
+          </a:xfrm>
+          <a:prstGeom prst="rect">
+            <a:avLst/>
+          </a:prstGeom>
+          <a:noFill/>
+        </p:spPr>
+        <p:txBody>
+          <a:bodyPr wrap="square" lIns="27432" rIns="27432" tIns="9144" bIns="9144" anchor="ctr">
+            <a:spAutoFit/>
+          </a:bodyPr>
+          <a:lstStyle/>
+          <a:p>
+            <a:pPr algn="l">
+              <a:defRPr sz="780" b="1">
+                <a:solidFill>
+                  <a:srgbClr val="64748B"/>
+                </a:solidFill>
+                <a:latin typeface="Microsoft YaHei"/>
+              </a:defRPr>
+            </a:pPr>
+            <a:r>
+              <a:rPr sz="780" b="1">
+                <a:solidFill>
+                  <a:srgbClr val="64748B"/>
+                </a:solidFill>
+                <a:latin typeface="Microsoft YaHei"/>
+              </a:rPr>
+              <a:t>Optional fallback</a:t>
+            </a:r>
+          </a:p>
+        </p:txBody>
+      </p:sp>
+      <p:sp>
+        <p:nvSpPr>
+          <p:cNvPr id="48" name="TextBox 47"/>
+          <p:cNvSpPr txBox="1"/>
+          <p:nvPr/>
+        </p:nvSpPr>
+        <p:spPr>
+          <a:xfrm>
+            <a:off x="8403336" y="2944368"/>
+            <a:ext cx="1929384" cy="292608"/>
+          </a:xfrm>
+          <a:prstGeom prst="rect">
+            <a:avLst/>
+          </a:prstGeom>
+          <a:noFill/>
+        </p:spPr>
+        <p:txBody>
+          <a:bodyPr wrap="square" lIns="27432" rIns="27432" tIns="9144" bIns="9144" anchor="ctr">
+            <a:spAutoFit/>
+          </a:bodyPr>
+          <a:lstStyle/>
+          <a:p>
+            <a:pPr algn="l">
+              <a:defRPr sz="1600" b="1">
+                <a:solidFill>
+                  <a:srgbClr val="5B21B6"/>
+                </a:solidFill>
+                <a:latin typeface="Microsoft YaHei"/>
+              </a:defRPr>
+            </a:pPr>
+            <a:r>
+              <a:rPr sz="1600" b="1">
+                <a:solidFill>
+                  <a:srgbClr val="5B21B6"/>
+                </a:solidFill>
+                <a:latin typeface="Microsoft YaHei"/>
+              </a:rPr>
+              <a:t>low-conf</a:t>
+            </a:r>
+          </a:p>
+        </p:txBody>
+      </p:sp>
+      <p:sp>
+        <p:nvSpPr>
+          <p:cNvPr id="49" name="TextBox 48"/>
+          <p:cNvSpPr txBox="1"/>
+          <p:nvPr/>
+        </p:nvSpPr>
+        <p:spPr>
+          <a:xfrm>
+            <a:off x="8403336" y="3255264"/>
+            <a:ext cx="1929384" cy="182880"/>
+          </a:xfrm>
+          <a:prstGeom prst="rect">
+            <a:avLst/>
+          </a:prstGeom>
+          <a:noFill/>
+        </p:spPr>
+        <p:txBody>
+          <a:bodyPr wrap="square" lIns="27432" rIns="27432" tIns="9144" bIns="9144" anchor="ctr">
+            <a:spAutoFit/>
+          </a:bodyPr>
+          <a:lstStyle/>
+          <a:p>
+            <a:pPr algn="l">
+              <a:defRPr sz="750" b="0">
+                <a:solidFill>
+                  <a:srgbClr val="64748B"/>
+                </a:solidFill>
+                <a:latin typeface="Microsoft YaHei"/>
+              </a:defRPr>
+            </a:pPr>
+            <a:r>
+              <a:rPr sz="750" b="0">
+                <a:solidFill>
+                  <a:srgbClr val="64748B"/>
+                </a:solidFill>
+                <a:latin typeface="Microsoft YaHei"/>
+              </a:rPr>
+              <a:t>deployment extension</a:t>
+            </a:r>
+          </a:p>
+        </p:txBody>
+      </p:sp>
+      <p:sp>
+        <p:nvSpPr>
+          <p:cNvPr id="50" name="Rectangle 49"/>
+          <p:cNvSpPr/>
+          <p:nvPr/>
+        </p:nvSpPr>
+        <p:spPr>
+          <a:xfrm>
+            <a:off x="749808" y="3813048"/>
+            <a:ext cx="2148840" cy="384048"/>
+          </a:xfrm>
+          <a:prstGeom prst="rect">
+            <a:avLst/>
+          </a:prstGeom>
+          <a:solidFill>
+            <a:srgbClr val="183650"/>
+          </a:solidFill>
+          <a:ln>
+            <a:noFill/>
+          </a:ln>
+        </p:spPr>
+        <p:style>
+          <a:lnRef idx="1">
+            <a:schemeClr val="accent1"/>
+          </a:lnRef>
+          <a:fillRef idx="3">
+            <a:schemeClr val="accent1"/>
+          </a:fillRef>
+          <a:effectRef idx="2">
+            <a:schemeClr val="accent1"/>
+          </a:effectRef>
+          <a:fontRef idx="minor">
+            <a:schemeClr val="lt1"/>
+          </a:fontRef>
+        </p:style>
+        <p:txBody>
+          <a:bodyPr rtlCol="0" anchor="ctr"/>
+          <a:lstStyle/>
+          <a:p>
+            <a:pPr algn="ctr"/>
+          </a:p>
+        </p:txBody>
+      </p:sp>
+      <p:sp>
+        <p:nvSpPr>
+          <p:cNvPr id="51" name="TextBox 50"/>
+          <p:cNvSpPr txBox="1"/>
+          <p:nvPr/>
+        </p:nvSpPr>
+        <p:spPr>
+          <a:xfrm>
+            <a:off x="786384" y="3886200"/>
+            <a:ext cx="2075688" cy="256031"/>
+          </a:xfrm>
+          <a:prstGeom prst="rect">
+            <a:avLst/>
+          </a:prstGeom>
+          <a:noFill/>
+        </p:spPr>
+        <p:txBody>
+          <a:bodyPr wrap="square" lIns="27432" rIns="27432" tIns="9144" bIns="9144" anchor="ctr">
+            <a:spAutoFit/>
+          </a:bodyPr>
+          <a:lstStyle/>
+          <a:p>
+            <a:pPr algn="ctr">
+              <a:defRPr sz="1200" b="1">
+                <a:solidFill>
+                  <a:srgbClr val="FFFFFF"/>
+                </a:solidFill>
+                <a:latin typeface="Microsoft YaHei"/>
+              </a:defRPr>
+            </a:pPr>
+            <a:r>
+              <a:rPr sz="1200" b="1">
+                <a:solidFill>
+                  <a:srgbClr val="FFFFFF"/>
+                </a:solidFill>
+                <a:latin typeface="Microsoft YaHei"/>
+              </a:rPr>
+              <a:t>部署层</a:t>
+            </a:r>
+          </a:p>
+        </p:txBody>
+      </p:sp>
+      <p:sp>
+        <p:nvSpPr>
+          <p:cNvPr id="52" name="Rectangle 51"/>
+          <p:cNvSpPr/>
+          <p:nvPr/>
+        </p:nvSpPr>
+        <p:spPr>
+          <a:xfrm>
+            <a:off x="2898648" y="3813048"/>
+            <a:ext cx="3794760" cy="384048"/>
+          </a:xfrm>
+          <a:prstGeom prst="rect">
+            <a:avLst/>
+          </a:prstGeom>
+          <a:solidFill>
+            <a:srgbClr val="183650"/>
+          </a:solidFill>
+          <a:ln>
+            <a:noFill/>
+          </a:ln>
+        </p:spPr>
+        <p:style>
+          <a:lnRef idx="1">
+            <a:schemeClr val="accent1"/>
+          </a:lnRef>
+          <a:fillRef idx="3">
+            <a:schemeClr val="accent1"/>
+          </a:fillRef>
+          <a:effectRef idx="2">
+            <a:schemeClr val="accent1"/>
+          </a:effectRef>
+          <a:fontRef idx="minor">
+            <a:schemeClr val="lt1"/>
+          </a:fontRef>
+        </p:style>
+        <p:txBody>
+          <a:bodyPr rtlCol="0" anchor="ctr"/>
+          <a:lstStyle/>
+          <a:p>
+            <a:pPr algn="ctr"/>
+          </a:p>
+        </p:txBody>
+      </p:sp>
+      <p:sp>
+        <p:nvSpPr>
+          <p:cNvPr id="53" name="TextBox 52"/>
+          <p:cNvSpPr txBox="1"/>
+          <p:nvPr/>
+        </p:nvSpPr>
+        <p:spPr>
+          <a:xfrm>
+            <a:off x="2935224" y="3886200"/>
+            <a:ext cx="3721608" cy="256031"/>
+          </a:xfrm>
+          <a:prstGeom prst="rect">
+            <a:avLst/>
+          </a:prstGeom>
+          <a:noFill/>
+        </p:spPr>
+        <p:txBody>
+          <a:bodyPr wrap="square" lIns="27432" rIns="27432" tIns="9144" bIns="9144" anchor="ctr">
+            <a:spAutoFit/>
+          </a:bodyPr>
+          <a:lstStyle/>
+          <a:p>
+            <a:pPr algn="ctr">
+              <a:defRPr sz="1200" b="1">
+                <a:solidFill>
+                  <a:srgbClr val="FFFFFF"/>
+                </a:solidFill>
+                <a:latin typeface="Microsoft YaHei"/>
+              </a:defRPr>
+            </a:pPr>
+            <a:r>
+              <a:rPr sz="1200" b="1">
+                <a:solidFill>
+                  <a:srgbClr val="FFFFFF"/>
+                </a:solidFill>
+                <a:latin typeface="Microsoft YaHei"/>
+              </a:rPr>
+              <a:t>在本研究中的角色</a:t>
+            </a:r>
+          </a:p>
+        </p:txBody>
+      </p:sp>
+      <p:sp>
+        <p:nvSpPr>
+          <p:cNvPr id="54" name="Rectangle 53"/>
+          <p:cNvSpPr/>
+          <p:nvPr/>
+        </p:nvSpPr>
+        <p:spPr>
+          <a:xfrm>
+            <a:off x="6693408" y="3813048"/>
+            <a:ext cx="4114800" cy="384048"/>
+          </a:xfrm>
+          <a:prstGeom prst="rect">
+            <a:avLst/>
+          </a:prstGeom>
+          <a:solidFill>
+            <a:srgbClr val="183650"/>
+          </a:solidFill>
+          <a:ln>
+            <a:noFill/>
+          </a:ln>
+        </p:spPr>
+        <p:style>
+          <a:lnRef idx="1">
+            <a:schemeClr val="accent1"/>
+          </a:lnRef>
+          <a:fillRef idx="3">
+            <a:schemeClr val="accent1"/>
+          </a:fillRef>
+          <a:effectRef idx="2">
+            <a:schemeClr val="accent1"/>
+          </a:effectRef>
+          <a:fontRef idx="minor">
+            <a:schemeClr val="lt1"/>
+          </a:fontRef>
+        </p:style>
+        <p:txBody>
+          <a:bodyPr rtlCol="0" anchor="ctr"/>
+          <a:lstStyle/>
+          <a:p>
+            <a:pPr algn="ctr"/>
+          </a:p>
+        </p:txBody>
+      </p:sp>
+      <p:sp>
+        <p:nvSpPr>
+          <p:cNvPr id="55" name="TextBox 54"/>
+          <p:cNvSpPr txBox="1"/>
+          <p:nvPr/>
+        </p:nvSpPr>
+        <p:spPr>
+          <a:xfrm>
+            <a:off x="6729984" y="3886200"/>
+            <a:ext cx="4041648" cy="256031"/>
+          </a:xfrm>
+          <a:prstGeom prst="rect">
+            <a:avLst/>
+          </a:prstGeom>
+          <a:noFill/>
+        </p:spPr>
+        <p:txBody>
+          <a:bodyPr wrap="square" lIns="27432" rIns="27432" tIns="9144" bIns="9144" anchor="ctr">
+            <a:spAutoFit/>
+          </a:bodyPr>
+          <a:lstStyle/>
+          <a:p>
+            <a:pPr algn="ctr">
+              <a:defRPr sz="1200" b="1">
+                <a:solidFill>
+                  <a:srgbClr val="FFFFFF"/>
+                </a:solidFill>
+                <a:latin typeface="Microsoft YaHei"/>
+              </a:defRPr>
+            </a:pPr>
+            <a:r>
+              <a:rPr sz="1200" b="1">
+                <a:solidFill>
+                  <a:srgbClr val="FFFFFF"/>
+                </a:solidFill>
+                <a:latin typeface="Microsoft YaHei"/>
+              </a:rPr>
+              <a:t>为什么这样设计</a:t>
+            </a:r>
+          </a:p>
+        </p:txBody>
+      </p:sp>
+      <p:sp>
+        <p:nvSpPr>
+          <p:cNvPr id="56" name="Rectangle 55"/>
+          <p:cNvSpPr/>
+          <p:nvPr/>
+        </p:nvSpPr>
+        <p:spPr>
+          <a:xfrm>
+            <a:off x="749808" y="4197096"/>
+            <a:ext cx="2148840" cy="384048"/>
+          </a:xfrm>
+          <a:prstGeom prst="rect">
+            <a:avLst/>
+          </a:prstGeom>
+          <a:solidFill>
+            <a:srgbClr val="F8FAFC"/>
+          </a:solidFill>
+          <a:ln w="9525">
+            <a:solidFill>
+              <a:srgbClr val="CBD5E1"/>
+            </a:solidFill>
+          </a:ln>
+        </p:spPr>
+        <p:style>
+          <a:lnRef idx="1">
+            <a:schemeClr val="accent1"/>
+          </a:lnRef>
+          <a:fillRef idx="3">
+            <a:schemeClr val="accent1"/>
+          </a:fillRef>
+          <a:effectRef idx="2">
+            <a:schemeClr val="accent1"/>
+          </a:effectRef>
+          <a:fontRef idx="minor">
+            <a:schemeClr val="lt1"/>
+          </a:fontRef>
+        </p:style>
+        <p:txBody>
+          <a:bodyPr rtlCol="0" anchor="ctr"/>
+          <a:lstStyle/>
+          <a:p>
+            <a:pPr algn="ctr"/>
+          </a:p>
+        </p:txBody>
+      </p:sp>
+      <p:sp>
+        <p:nvSpPr>
+          <p:cNvPr id="57" name="TextBox 56"/>
+          <p:cNvSpPr txBox="1"/>
+          <p:nvPr/>
+        </p:nvSpPr>
+        <p:spPr>
+          <a:xfrm>
+            <a:off x="804671" y="4261104"/>
+            <a:ext cx="2039112" cy="256031"/>
+          </a:xfrm>
+          <a:prstGeom prst="rect">
+            <a:avLst/>
+          </a:prstGeom>
+          <a:noFill/>
+        </p:spPr>
+        <p:txBody>
+          <a:bodyPr wrap="square" lIns="27432" rIns="27432" tIns="9144" bIns="9144" anchor="t">
+            <a:spAutoFit/>
+          </a:bodyPr>
+          <a:lstStyle/>
+          <a:p>
+            <a:pPr algn="l">
+              <a:defRPr sz="1200" b="1">
+                <a:solidFill>
+                  <a:srgbClr val="0F172A"/>
+                </a:solidFill>
+                <a:latin typeface="Microsoft YaHei"/>
+              </a:defRPr>
+            </a:pPr>
+            <a:r>
+              <a:rPr sz="1200" b="1">
+                <a:solidFill>
+                  <a:srgbClr val="0F172A"/>
+                </a:solidFill>
+                <a:latin typeface="Microsoft YaHei"/>
+              </a:rPr>
+              <a:t>Batch prior</a:t>
+            </a:r>
+          </a:p>
+        </p:txBody>
+      </p:sp>
+      <p:sp>
+        <p:nvSpPr>
+          <p:cNvPr id="58" name="Rectangle 57"/>
+          <p:cNvSpPr/>
+          <p:nvPr/>
+        </p:nvSpPr>
+        <p:spPr>
+          <a:xfrm>
+            <a:off x="2898648" y="4197096"/>
+            <a:ext cx="3794760" cy="384048"/>
+          </a:xfrm>
+          <a:prstGeom prst="rect">
+            <a:avLst/>
+          </a:prstGeom>
+          <a:solidFill>
+            <a:srgbClr val="F8FAFC"/>
+          </a:solidFill>
+          <a:ln w="9525">
+            <a:solidFill>
+              <a:srgbClr val="CBD5E1"/>
+            </a:solidFill>
+          </a:ln>
+        </p:spPr>
+        <p:style>
+          <a:lnRef idx="1">
+            <a:schemeClr val="accent1"/>
+          </a:lnRef>
+          <a:fillRef idx="3">
+            <a:schemeClr val="accent1"/>
+          </a:fillRef>
+          <a:effectRef idx="2">
+            <a:schemeClr val="accent1"/>
+          </a:effectRef>
+          <a:fontRef idx="minor">
+            <a:schemeClr val="lt1"/>
+          </a:fontRef>
+        </p:style>
+        <p:txBody>
+          <a:bodyPr rtlCol="0" anchor="ctr"/>
+          <a:lstStyle/>
+          <a:p>
+            <a:pPr algn="ctr"/>
+          </a:p>
+        </p:txBody>
+      </p:sp>
+      <p:sp>
+        <p:nvSpPr>
+          <p:cNvPr id="59" name="TextBox 58"/>
+          <p:cNvSpPr txBox="1"/>
+          <p:nvPr/>
+        </p:nvSpPr>
+        <p:spPr>
+          <a:xfrm>
+            <a:off x="2953512" y="4261104"/>
+            <a:ext cx="3685032" cy="256031"/>
           </a:xfrm>
           <a:prstGeom prst="rect">
             <a:avLst/>
@@ -28840,21 +29140,108 @@
                 </a:solidFill>
                 <a:latin typeface="Microsoft YaHei"/>
               </a:rPr>
-              <a:t>schema + numeric range validation</a:t>
-            </a:r>
-          </a:p>
-        </p:txBody>
-      </p:sp>
-      <p:sp>
-        <p:nvSpPr>
-          <p:cNvPr id="53" name="Rectangle 52"/>
+              <a:t>离线生成 cohort 级疫情先验</a:t>
+            </a:r>
+          </a:p>
+        </p:txBody>
+      </p:sp>
+      <p:sp>
+        <p:nvSpPr>
+          <p:cNvPr id="60" name="Rectangle 59"/>
           <p:cNvSpPr/>
           <p:nvPr/>
         </p:nvSpPr>
         <p:spPr>
           <a:xfrm>
-            <a:off x="914400" y="4892040"/>
-            <a:ext cx="2926080" cy="457200"/>
+            <a:off x="6693408" y="4197096"/>
+            <a:ext cx="4114800" cy="384048"/>
+          </a:xfrm>
+          <a:prstGeom prst="rect">
+            <a:avLst/>
+          </a:prstGeom>
+          <a:solidFill>
+            <a:srgbClr val="F8FAFC"/>
+          </a:solidFill>
+          <a:ln w="9525">
+            <a:solidFill>
+              <a:srgbClr val="CBD5E1"/>
+            </a:solidFill>
+          </a:ln>
+        </p:spPr>
+        <p:style>
+          <a:lnRef idx="1">
+            <a:schemeClr val="accent1"/>
+          </a:lnRef>
+          <a:fillRef idx="3">
+            <a:schemeClr val="accent1"/>
+          </a:fillRef>
+          <a:effectRef idx="2">
+            <a:schemeClr val="accent1"/>
+          </a:effectRef>
+          <a:fontRef idx="minor">
+            <a:schemeClr val="lt1"/>
+          </a:fontRef>
+        </p:style>
+        <p:txBody>
+          <a:bodyPr rtlCol="0" anchor="ctr"/>
+          <a:lstStyle/>
+          <a:p>
+            <a:pPr algn="ctr"/>
+          </a:p>
+        </p:txBody>
+      </p:sp>
+      <p:sp>
+        <p:nvSpPr>
+          <p:cNvPr id="61" name="TextBox 60"/>
+          <p:cNvSpPr txBox="1"/>
+          <p:nvPr/>
+        </p:nvSpPr>
+        <p:spPr>
+          <a:xfrm>
+            <a:off x="6748272" y="4261104"/>
+            <a:ext cx="4005072" cy="256031"/>
+          </a:xfrm>
+          <a:prstGeom prst="rect">
+            <a:avLst/>
+          </a:prstGeom>
+          <a:noFill/>
+        </p:spPr>
+        <p:txBody>
+          <a:bodyPr wrap="square" lIns="27432" rIns="27432" tIns="9144" bIns="9144" anchor="t">
+            <a:spAutoFit/>
+          </a:bodyPr>
+          <a:lstStyle/>
+          <a:p>
+            <a:pPr algn="l">
+              <a:defRPr sz="1200" b="0">
+                <a:solidFill>
+                  <a:srgbClr val="0F172A"/>
+                </a:solidFill>
+                <a:latin typeface="Microsoft YaHei"/>
+              </a:defRPr>
+            </a:pPr>
+            <a:r>
+              <a:rPr sz="1200" b="0">
+                <a:solidFill>
+                  <a:srgbClr val="0F172A"/>
+                </a:solidFill>
+                <a:latin typeface="Microsoft YaHei"/>
+              </a:rPr>
+              <a:t>保留 LLM 泛化能力，避免逐户调用</a:t>
+            </a:r>
+          </a:p>
+        </p:txBody>
+      </p:sp>
+      <p:sp>
+        <p:nvSpPr>
+          <p:cNvPr id="62" name="Rectangle 61"/>
+          <p:cNvSpPr/>
+          <p:nvPr/>
+        </p:nvSpPr>
+        <p:spPr>
+          <a:xfrm>
+            <a:off x="749808" y="4581144"/>
+            <a:ext cx="2148840" cy="384048"/>
           </a:xfrm>
           <a:prstGeom prst="rect">
             <a:avLst/>
@@ -28892,14 +29279,14 @@
       </p:sp>
       <p:sp>
         <p:nvSpPr>
-          <p:cNvPr id="54" name="TextBox 53"/>
-          <p:cNvSpPr txBox="1"/>
-          <p:nvPr/>
-        </p:nvSpPr>
-        <p:spPr>
-          <a:xfrm>
-            <a:off x="969264" y="4956048"/>
-            <a:ext cx="2816352" cy="329184"/>
+          <p:cNvPr id="63" name="TextBox 62"/>
+          <p:cNvSpPr txBox="1"/>
+          <p:nvPr/>
+        </p:nvSpPr>
+        <p:spPr>
+          <a:xfrm>
+            <a:off x="804671" y="4645152"/>
+            <a:ext cx="2039112" cy="256031"/>
           </a:xfrm>
           <a:prstGeom prst="rect">
             <a:avLst/>
@@ -28927,21 +29314,21 @@
                 </a:solidFill>
                 <a:latin typeface="Microsoft YaHei"/>
               </a:rPr>
-              <a:t>target leakage</a:t>
-            </a:r>
-          </a:p>
-        </p:txBody>
-      </p:sp>
-      <p:sp>
-        <p:nvSpPr>
-          <p:cNvPr id="55" name="Rectangle 54"/>
+              <a:t>Schema validation</a:t>
+            </a:r>
+          </a:p>
+        </p:txBody>
+      </p:sp>
+      <p:sp>
+        <p:nvSpPr>
+          <p:cNvPr id="64" name="Rectangle 63"/>
           <p:cNvSpPr/>
           <p:nvPr/>
         </p:nvSpPr>
         <p:spPr>
           <a:xfrm>
-            <a:off x="3840480" y="4892040"/>
-            <a:ext cx="6035040" cy="457200"/>
+            <a:off x="2898648" y="4581144"/>
+            <a:ext cx="3794760" cy="384048"/>
           </a:xfrm>
           <a:prstGeom prst="rect">
             <a:avLst/>
@@ -28979,14 +29366,14 @@
       </p:sp>
       <p:sp>
         <p:nvSpPr>
-          <p:cNvPr id="56" name="TextBox 55"/>
-          <p:cNvSpPr txBox="1"/>
-          <p:nvPr/>
-        </p:nvSpPr>
-        <p:spPr>
-          <a:xfrm>
-            <a:off x="3895344" y="4956048"/>
-            <a:ext cx="5925312" cy="329184"/>
+          <p:cNvPr id="65" name="TextBox 64"/>
+          <p:cNvSpPr txBox="1"/>
+          <p:nvPr/>
+        </p:nvSpPr>
+        <p:spPr>
+          <a:xfrm>
+            <a:off x="2953512" y="4645152"/>
+            <a:ext cx="3685032" cy="256031"/>
           </a:xfrm>
           <a:prstGeom prst="rect">
             <a:avLst/>
@@ -29014,21 +29401,108 @@
                 </a:solidFill>
                 <a:latin typeface="Microsoft YaHei"/>
               </a:rPr>
-              <a:t>exclude labels, weights, IDs</a:t>
-            </a:r>
-          </a:p>
-        </p:txBody>
-      </p:sp>
-      <p:sp>
-        <p:nvSpPr>
-          <p:cNvPr id="57" name="Rectangle 56"/>
+              <a:t>检查数值范围、字段完整性</a:t>
+            </a:r>
+          </a:p>
+        </p:txBody>
+      </p:sp>
+      <p:sp>
+        <p:nvSpPr>
+          <p:cNvPr id="66" name="Rectangle 65"/>
           <p:cNvSpPr/>
           <p:nvPr/>
         </p:nvSpPr>
         <p:spPr>
           <a:xfrm>
-            <a:off x="914400" y="5349240"/>
-            <a:ext cx="2926080" cy="457200"/>
+            <a:off x="6693408" y="4581144"/>
+            <a:ext cx="4114800" cy="384048"/>
+          </a:xfrm>
+          <a:prstGeom prst="rect">
+            <a:avLst/>
+          </a:prstGeom>
+          <a:solidFill>
+            <a:srgbClr val="F1F5F9"/>
+          </a:solidFill>
+          <a:ln w="9525">
+            <a:solidFill>
+              <a:srgbClr val="CBD5E1"/>
+            </a:solidFill>
+          </a:ln>
+        </p:spPr>
+        <p:style>
+          <a:lnRef idx="1">
+            <a:schemeClr val="accent1"/>
+          </a:lnRef>
+          <a:fillRef idx="3">
+            <a:schemeClr val="accent1"/>
+          </a:fillRef>
+          <a:effectRef idx="2">
+            <a:schemeClr val="accent1"/>
+          </a:effectRef>
+          <a:fontRef idx="minor">
+            <a:schemeClr val="lt1"/>
+          </a:fontRef>
+        </p:style>
+        <p:txBody>
+          <a:bodyPr rtlCol="0" anchor="ctr"/>
+          <a:lstStyle/>
+          <a:p>
+            <a:pPr algn="ctr"/>
+          </a:p>
+        </p:txBody>
+      </p:sp>
+      <p:sp>
+        <p:nvSpPr>
+          <p:cNvPr id="67" name="TextBox 66"/>
+          <p:cNvSpPr txBox="1"/>
+          <p:nvPr/>
+        </p:nvSpPr>
+        <p:spPr>
+          <a:xfrm>
+            <a:off x="6748272" y="4645152"/>
+            <a:ext cx="4005072" cy="256031"/>
+          </a:xfrm>
+          <a:prstGeom prst="rect">
+            <a:avLst/>
+          </a:prstGeom>
+          <a:noFill/>
+        </p:spPr>
+        <p:txBody>
+          <a:bodyPr wrap="square" lIns="27432" rIns="27432" tIns="9144" bIns="9144" anchor="t">
+            <a:spAutoFit/>
+          </a:bodyPr>
+          <a:lstStyle/>
+          <a:p>
+            <a:pPr algn="l">
+              <a:defRPr sz="1200" b="0">
+                <a:solidFill>
+                  <a:srgbClr val="0F172A"/>
+                </a:solidFill>
+                <a:latin typeface="Microsoft YaHei"/>
+              </a:defRPr>
+            </a:pPr>
+            <a:r>
+              <a:rPr sz="1200" b="0">
+                <a:solidFill>
+                  <a:srgbClr val="0F172A"/>
+                </a:solidFill>
+                <a:latin typeface="Microsoft YaHei"/>
+              </a:rPr>
+              <a:t>降低 hallucination 和格式错误</a:t>
+            </a:r>
+          </a:p>
+        </p:txBody>
+      </p:sp>
+      <p:sp>
+        <p:nvSpPr>
+          <p:cNvPr id="68" name="Rectangle 67"/>
+          <p:cNvSpPr/>
+          <p:nvPr/>
+        </p:nvSpPr>
+        <p:spPr>
+          <a:xfrm>
+            <a:off x="749808" y="4965192"/>
+            <a:ext cx="2148840" cy="384048"/>
           </a:xfrm>
           <a:prstGeom prst="rect">
             <a:avLst/>
@@ -29066,14 +29540,14 @@
       </p:sp>
       <p:sp>
         <p:nvSpPr>
-          <p:cNvPr id="58" name="TextBox 57"/>
-          <p:cNvSpPr txBox="1"/>
-          <p:nvPr/>
-        </p:nvSpPr>
-        <p:spPr>
-          <a:xfrm>
-            <a:off x="969264" y="5413248"/>
-            <a:ext cx="2816352" cy="329184"/>
+          <p:cNvPr id="69" name="TextBox 68"/>
+          <p:cNvSpPr txBox="1"/>
+          <p:nvPr/>
+        </p:nvSpPr>
+        <p:spPr>
+          <a:xfrm>
+            <a:off x="804671" y="5029200"/>
+            <a:ext cx="2039112" cy="256031"/>
           </a:xfrm>
           <a:prstGeom prst="rect">
             <a:avLst/>
@@ -29101,21 +29575,21 @@
                 </a:solidFill>
                 <a:latin typeface="Microsoft YaHei"/>
               </a:rPr>
-              <a:t>request cost</a:t>
-            </a:r>
-          </a:p>
-        </p:txBody>
-      </p:sp>
-      <p:sp>
-        <p:nvSpPr>
-          <p:cNvPr id="59" name="Rectangle 58"/>
+              <a:t>Confidence gate</a:t>
+            </a:r>
+          </a:p>
+        </p:txBody>
+      </p:sp>
+      <p:sp>
+        <p:nvSpPr>
+          <p:cNvPr id="70" name="Rectangle 69"/>
           <p:cNvSpPr/>
           <p:nvPr/>
         </p:nvSpPr>
         <p:spPr>
           <a:xfrm>
-            <a:off x="3840480" y="5349240"/>
-            <a:ext cx="6035040" cy="457200"/>
+            <a:off x="2898648" y="4965192"/>
+            <a:ext cx="3794760" cy="384048"/>
           </a:xfrm>
           <a:prstGeom prst="rect">
             <a:avLst/>
@@ -29153,14 +29627,14 @@
       </p:sp>
       <p:sp>
         <p:nvSpPr>
-          <p:cNvPr id="60" name="TextBox 59"/>
-          <p:cNvSpPr txBox="1"/>
-          <p:nvPr/>
-        </p:nvSpPr>
-        <p:spPr>
-          <a:xfrm>
-            <a:off x="3895344" y="5413248"/>
-            <a:ext cx="5925312" cy="329184"/>
+          <p:cNvPr id="71" name="TextBox 70"/>
+          <p:cNvSpPr txBox="1"/>
+          <p:nvPr/>
+        </p:nvSpPr>
+        <p:spPr>
+          <a:xfrm>
+            <a:off x="2953512" y="5029200"/>
+            <a:ext cx="3685032" cy="256031"/>
           </a:xfrm>
           <a:prstGeom prst="rect">
             <a:avLst/>
@@ -29188,21 +29662,108 @@
                 </a:solidFill>
                 <a:latin typeface="Microsoft YaHei"/>
               </a:rPr>
-              <a:t>batch cohort prompting</a:t>
-            </a:r>
-          </a:p>
-        </p:txBody>
-      </p:sp>
-      <p:sp>
-        <p:nvSpPr>
-          <p:cNvPr id="61" name="Rectangle 60"/>
+              <a:t>低置信 cohort 退回 global pressure</a:t>
+            </a:r>
+          </a:p>
+        </p:txBody>
+      </p:sp>
+      <p:sp>
+        <p:nvSpPr>
+          <p:cNvPr id="72" name="Rectangle 71"/>
           <p:cNvSpPr/>
           <p:nvPr/>
         </p:nvSpPr>
         <p:spPr>
           <a:xfrm>
-            <a:off x="914400" y="5806440"/>
-            <a:ext cx="2926080" cy="457200"/>
+            <a:off x="6693408" y="4965192"/>
+            <a:ext cx="4114800" cy="384048"/>
+          </a:xfrm>
+          <a:prstGeom prst="rect">
+            <a:avLst/>
+          </a:prstGeom>
+          <a:solidFill>
+            <a:srgbClr val="F8FAFC"/>
+          </a:solidFill>
+          <a:ln w="9525">
+            <a:solidFill>
+              <a:srgbClr val="CBD5E1"/>
+            </a:solidFill>
+          </a:ln>
+        </p:spPr>
+        <p:style>
+          <a:lnRef idx="1">
+            <a:schemeClr val="accent1"/>
+          </a:lnRef>
+          <a:fillRef idx="3">
+            <a:schemeClr val="accent1"/>
+          </a:fillRef>
+          <a:effectRef idx="2">
+            <a:schemeClr val="accent1"/>
+          </a:effectRef>
+          <a:fontRef idx="minor">
+            <a:schemeClr val="lt1"/>
+          </a:fontRef>
+        </p:style>
+        <p:txBody>
+          <a:bodyPr rtlCol="0" anchor="ctr"/>
+          <a:lstStyle/>
+          <a:p>
+            <a:pPr algn="ctr"/>
+          </a:p>
+        </p:txBody>
+      </p:sp>
+      <p:sp>
+        <p:nvSpPr>
+          <p:cNvPr id="73" name="TextBox 72"/>
+          <p:cNvSpPr txBox="1"/>
+          <p:nvPr/>
+        </p:nvSpPr>
+        <p:spPr>
+          <a:xfrm>
+            <a:off x="6748272" y="5029200"/>
+            <a:ext cx="4005072" cy="256031"/>
+          </a:xfrm>
+          <a:prstGeom prst="rect">
+            <a:avLst/>
+          </a:prstGeom>
+          <a:noFill/>
+        </p:spPr>
+        <p:txBody>
+          <a:bodyPr wrap="square" lIns="27432" rIns="27432" tIns="9144" bIns="9144" anchor="t">
+            <a:spAutoFit/>
+          </a:bodyPr>
+          <a:lstStyle/>
+          <a:p>
+            <a:pPr algn="l">
+              <a:defRPr sz="1200" b="0">
+                <a:solidFill>
+                  <a:srgbClr val="0F172A"/>
+                </a:solidFill>
+                <a:latin typeface="Microsoft YaHei"/>
+              </a:defRPr>
+            </a:pPr>
+            <a:r>
+              <a:rPr sz="1200" b="0">
+                <a:solidFill>
+                  <a:srgbClr val="0F172A"/>
+                </a:solidFill>
+                <a:latin typeface="Microsoft YaHei"/>
+              </a:rPr>
+              <a:t>主实验保持 no-label、可复现</a:t>
+            </a:r>
+          </a:p>
+        </p:txBody>
+      </p:sp>
+      <p:sp>
+        <p:nvSpPr>
+          <p:cNvPr id="74" name="Rectangle 73"/>
+          <p:cNvSpPr/>
+          <p:nvPr/>
+        </p:nvSpPr>
+        <p:spPr>
+          <a:xfrm>
+            <a:off x="749808" y="5349240"/>
+            <a:ext cx="2148840" cy="384048"/>
           </a:xfrm>
           <a:prstGeom prst="rect">
             <a:avLst/>
@@ -29240,14 +29801,14 @@
       </p:sp>
       <p:sp>
         <p:nvSpPr>
-          <p:cNvPr id="62" name="TextBox 61"/>
-          <p:cNvSpPr txBox="1"/>
-          <p:nvPr/>
-        </p:nvSpPr>
-        <p:spPr>
-          <a:xfrm>
-            <a:off x="969264" y="5870448"/>
-            <a:ext cx="2816352" cy="329184"/>
+          <p:cNvPr id="75" name="TextBox 74"/>
+          <p:cNvSpPr txBox="1"/>
+          <p:nvPr/>
+        </p:nvSpPr>
+        <p:spPr>
+          <a:xfrm>
+            <a:off x="804671" y="5413248"/>
+            <a:ext cx="2039112" cy="256031"/>
           </a:xfrm>
           <a:prstGeom prst="rect">
             <a:avLst/>
@@ -29275,21 +29836,21 @@
                 </a:solidFill>
                 <a:latin typeface="Microsoft YaHei"/>
               </a:rPr>
-              <a:t>tuning leakage</a:t>
-            </a:r>
-          </a:p>
-        </p:txBody>
-      </p:sp>
-      <p:sp>
-        <p:nvSpPr>
-          <p:cNvPr id="63" name="Rectangle 62"/>
+              <a:t>LLM fallback</a:t>
+            </a:r>
+          </a:p>
+        </p:txBody>
+      </p:sp>
+      <p:sp>
+        <p:nvSpPr>
+          <p:cNvPr id="76" name="Rectangle 75"/>
           <p:cNvSpPr/>
           <p:nvPr/>
         </p:nvSpPr>
         <p:spPr>
           <a:xfrm>
-            <a:off x="3840480" y="5806440"/>
-            <a:ext cx="6035040" cy="457200"/>
+            <a:off x="2898648" y="5349240"/>
+            <a:ext cx="3794760" cy="384048"/>
           </a:xfrm>
           <a:prstGeom prst="rect">
             <a:avLst/>
@@ -29327,14 +29888,14 @@
       </p:sp>
       <p:sp>
         <p:nvSpPr>
-          <p:cNvPr id="64" name="TextBox 63"/>
-          <p:cNvSpPr txBox="1"/>
-          <p:nvPr/>
-        </p:nvSpPr>
-        <p:spPr>
-          <a:xfrm>
-            <a:off x="3895344" y="5870448"/>
-            <a:ext cx="5925312" cy="329184"/>
+          <p:cNvPr id="77" name="TextBox 76"/>
+          <p:cNvSpPr txBox="1"/>
+          <p:nvPr/>
+        </p:nvSpPr>
+        <p:spPr>
+          <a:xfrm>
+            <a:off x="2953512" y="5413248"/>
+            <a:ext cx="3685032" cy="256031"/>
           </a:xfrm>
           <a:prstGeom prst="rect">
             <a:avLst/>
@@ -29362,21 +29923,108 @@
                 </a:solidFill>
                 <a:latin typeface="Microsoft YaHei"/>
               </a:rPr>
-              <a:t>fixed no-label rule</a:t>
-            </a:r>
-          </a:p>
-        </p:txBody>
-      </p:sp>
-      <p:sp>
-        <p:nvSpPr>
-          <p:cNvPr id="65" name="TextBox 64"/>
-          <p:cNvSpPr txBox="1"/>
-          <p:nvPr/>
-        </p:nvSpPr>
-        <p:spPr>
-          <a:xfrm>
-            <a:off x="960120" y="5989320"/>
-            <a:ext cx="9326880" cy="256032"/>
+              <a:t>作为线上扩展，不进入主结果</a:t>
+            </a:r>
+          </a:p>
+        </p:txBody>
+      </p:sp>
+      <p:sp>
+        <p:nvSpPr>
+          <p:cNvPr id="78" name="Rectangle 77"/>
+          <p:cNvSpPr/>
+          <p:nvPr/>
+        </p:nvSpPr>
+        <p:spPr>
+          <a:xfrm>
+            <a:off x="6693408" y="5349240"/>
+            <a:ext cx="4114800" cy="384048"/>
+          </a:xfrm>
+          <a:prstGeom prst="rect">
+            <a:avLst/>
+          </a:prstGeom>
+          <a:solidFill>
+            <a:srgbClr val="F1F5F9"/>
+          </a:solidFill>
+          <a:ln w="9525">
+            <a:solidFill>
+              <a:srgbClr val="CBD5E1"/>
+            </a:solidFill>
+          </a:ln>
+        </p:spPr>
+        <p:style>
+          <a:lnRef idx="1">
+            <a:schemeClr val="accent1"/>
+          </a:lnRef>
+          <a:fillRef idx="3">
+            <a:schemeClr val="accent1"/>
+          </a:fillRef>
+          <a:effectRef idx="2">
+            <a:schemeClr val="accent1"/>
+          </a:effectRef>
+          <a:fontRef idx="minor">
+            <a:schemeClr val="lt1"/>
+          </a:fontRef>
+        </p:style>
+        <p:txBody>
+          <a:bodyPr rtlCol="0" anchor="ctr"/>
+          <a:lstStyle/>
+          <a:p>
+            <a:pPr algn="ctr"/>
+          </a:p>
+        </p:txBody>
+      </p:sp>
+      <p:sp>
+        <p:nvSpPr>
+          <p:cNvPr id="79" name="TextBox 78"/>
+          <p:cNvSpPr txBox="1"/>
+          <p:nvPr/>
+        </p:nvSpPr>
+        <p:spPr>
+          <a:xfrm>
+            <a:off x="6748272" y="5413248"/>
+            <a:ext cx="4005072" cy="256031"/>
+          </a:xfrm>
+          <a:prstGeom prst="rect">
+            <a:avLst/>
+          </a:prstGeom>
+          <a:noFill/>
+        </p:spPr>
+        <p:txBody>
+          <a:bodyPr wrap="square" lIns="27432" rIns="27432" tIns="9144" bIns="9144" anchor="t">
+            <a:spAutoFit/>
+          </a:bodyPr>
+          <a:lstStyle/>
+          <a:p>
+            <a:pPr algn="l">
+              <a:defRPr sz="1200" b="0">
+                <a:solidFill>
+                  <a:srgbClr val="0F172A"/>
+                </a:solidFill>
+                <a:latin typeface="Microsoft YaHei"/>
+              </a:defRPr>
+            </a:pPr>
+            <a:r>
+              <a:rPr sz="1200" b="0">
+                <a:solidFill>
+                  <a:srgbClr val="0F172A"/>
+                </a:solidFill>
+                <a:latin typeface="Microsoft YaHei"/>
+              </a:rPr>
+              <a:t>有预算时处理边界样本</a:t>
+            </a:r>
+          </a:p>
+        </p:txBody>
+      </p:sp>
+      <p:sp>
+        <p:nvSpPr>
+          <p:cNvPr id="80" name="TextBox 79"/>
+          <p:cNvSpPr txBox="1"/>
+          <p:nvPr/>
+        </p:nvSpPr>
+        <p:spPr>
+          <a:xfrm>
+            <a:off x="868680" y="5925312"/>
+            <a:ext cx="10058400" cy="310896"/>
           </a:xfrm>
           <a:prstGeom prst="rect">
             <a:avLst/>
@@ -29404,7 +30052,7 @@
                 </a:solidFill>
                 <a:latin typeface="Microsoft YaHei"/>
               </a:rPr>
-              <a:t>LLM 的核心价值不是逐户预测，而是把“疫情/冲击机制”泛化到未标注 cohort，并可迁移到其他事件场景。</a:t>
+              <a:t>汇报口径：LLM 不是每户都报答案，而是把 pandemic context 蒸馏成结构化 event priors；主方法在预测阶段是 deterministic adapter，低置信 LLM 回退属于可部署扩展。</a:t>
             </a:r>
           </a:p>
         </p:txBody>
@@ -46021,6 +46669,1552 @@
                 <a:latin typeface="Microsoft YaHei"/>
               </a:rPr>
               <a:t>答法：我们用 ACS 证明疫情后通勤机制确实发生了远程办公和公共交通下降；用 PSRC 独立 household microdata 做 recovery-transfer 验证；同时用 BTS 做 guardrail，说明 device mobility trips 不能直接当作 NHTS household trip-count 的外部标签。</a:t>
+            </a:r>
+          </a:p>
+        </p:txBody>
+      </p:sp>
+      <p:sp>
+        <p:nvSpPr>
+          <p:cNvPr id="37" name="TextBox 36"/>
+          <p:cNvSpPr txBox="1"/>
+          <p:nvPr/>
+        </p:nvSpPr>
+        <p:spPr>
+          <a:xfrm>
+            <a:off x="914400" y="5592470"/>
+            <a:ext cx="9720072" cy="415137"/>
+          </a:xfrm>
+          <a:prstGeom prst="rect">
+            <a:avLst/>
+          </a:prstGeom>
+          <a:noFill/>
+        </p:spPr>
+        <p:txBody>
+          <a:bodyPr wrap="square" lIns="27432" rIns="27432" tIns="9144" bIns="9144" anchor="t">
+            <a:spAutoFit/>
+          </a:bodyPr>
+          <a:lstStyle/>
+          <a:p>
+            <a:pPr algn="l">
+              <a:defRPr sz="1200" b="0">
+                <a:solidFill>
+                  <a:srgbClr val="64748B"/>
+                </a:solidFill>
+                <a:latin typeface="Microsoft YaHei"/>
+              </a:defRPr>
+            </a:pPr>
+          </a:p>
+        </p:txBody>
+      </p:sp>
+    </p:spTree>
+  </p:cSld>
+  <p:clrMapOvr>
+    <a:masterClrMapping/>
+  </p:clrMapOvr>
+</p:sld>
+</file>
+
+<file path=ppt/slides/slide31.xml><?xml version="1.0" encoding="utf-8"?>
+<p:sld xmlns:a="http://schemas.openxmlformats.org/drawingml/2006/main" xmlns:p="http://schemas.openxmlformats.org/presentationml/2006/main" xmlns:r="http://schemas.openxmlformats.org/officeDocument/2006/relationships">
+  <p:cSld>
+    <p:bg>
+      <p:bgPr>
+        <a:solidFill>
+          <a:srgbClr val="FFFFFF"/>
+        </a:solidFill>
+        <a:effectLst/>
+      </p:bgPr>
+    </p:bg>
+    <p:spTree>
+      <p:nvGrpSpPr>
+        <p:cNvPr id="1" name=""/>
+        <p:cNvGrpSpPr/>
+        <p:nvPr/>
+      </p:nvGrpSpPr>
+      <p:grpSpPr/>
+      <p:sp>
+        <p:nvSpPr>
+          <p:cNvPr id="2" name="TextBox 1"/>
+          <p:cNvSpPr txBox="1"/>
+          <p:nvPr/>
+        </p:nvSpPr>
+        <p:spPr>
+          <a:xfrm>
+            <a:off x="384048" y="109728"/>
+            <a:ext cx="4480560" cy="164592"/>
+          </a:xfrm>
+          <a:prstGeom prst="rect">
+            <a:avLst/>
+          </a:prstGeom>
+          <a:noFill/>
+        </p:spPr>
+        <p:txBody>
+          <a:bodyPr wrap="square" lIns="27432" rIns="27432" tIns="9144" bIns="9144" anchor="ctr">
+            <a:spAutoFit/>
+          </a:bodyPr>
+          <a:lstStyle/>
+          <a:p>
+            <a:pPr algn="l">
+              <a:defRPr sz="750" b="1">
+                <a:solidFill>
+                  <a:srgbClr val="64748B"/>
+                </a:solidFill>
+                <a:latin typeface="Microsoft YaHei"/>
+              </a:defRPr>
+            </a:pPr>
+            <a:r>
+              <a:rPr sz="750" b="1">
+                <a:solidFill>
+                  <a:srgbClr val="64748B"/>
+                </a:solidFill>
+                <a:latin typeface="Microsoft YaHei"/>
+              </a:rPr>
+              <a:t>Mobility Inequality and Sustainable Development</a:t>
+            </a:r>
+          </a:p>
+        </p:txBody>
+      </p:sp>
+      <p:sp>
+        <p:nvSpPr>
+          <p:cNvPr id="3" name="TextBox 2"/>
+          <p:cNvSpPr txBox="1"/>
+          <p:nvPr/>
+        </p:nvSpPr>
+        <p:spPr>
+          <a:xfrm>
+            <a:off x="384048" y="347472"/>
+            <a:ext cx="777240" cy="292608"/>
+          </a:xfrm>
+          <a:prstGeom prst="rect">
+            <a:avLst/>
+          </a:prstGeom>
+          <a:noFill/>
+        </p:spPr>
+        <p:txBody>
+          <a:bodyPr wrap="square" lIns="27432" rIns="27432" tIns="9144" bIns="9144" anchor="ctr">
+            <a:spAutoFit/>
+          </a:bodyPr>
+          <a:lstStyle/>
+          <a:p>
+            <a:pPr algn="l">
+              <a:defRPr sz="1300" b="1">
+                <a:solidFill>
+                  <a:srgbClr val="EA580C"/>
+                </a:solidFill>
+                <a:latin typeface="Microsoft YaHei"/>
+              </a:defRPr>
+            </a:pPr>
+            <a:r>
+              <a:rPr sz="1300" b="1">
+                <a:solidFill>
+                  <a:srgbClr val="EA580C"/>
+                </a:solidFill>
+                <a:latin typeface="Microsoft YaHei"/>
+              </a:rPr>
+              <a:t>BACKUP</a:t>
+            </a:r>
+          </a:p>
+        </p:txBody>
+      </p:sp>
+      <p:sp>
+        <p:nvSpPr>
+          <p:cNvPr id="4" name="TextBox 3"/>
+          <p:cNvSpPr txBox="1"/>
+          <p:nvPr/>
+        </p:nvSpPr>
+        <p:spPr>
+          <a:xfrm>
+            <a:off x="1234440" y="246888"/>
+            <a:ext cx="8412480" cy="329184"/>
+          </a:xfrm>
+          <a:prstGeom prst="rect">
+            <a:avLst/>
+          </a:prstGeom>
+          <a:noFill/>
+        </p:spPr>
+        <p:txBody>
+          <a:bodyPr wrap="square" lIns="27432" rIns="27432" tIns="9144" bIns="9144" anchor="ctr">
+            <a:spAutoFit/>
+          </a:bodyPr>
+          <a:lstStyle/>
+          <a:p>
+            <a:pPr algn="l">
+              <a:defRPr sz="1700" b="1">
+                <a:solidFill>
+                  <a:srgbClr val="0F172A"/>
+                </a:solidFill>
+                <a:latin typeface="Microsoft YaHei"/>
+              </a:defRPr>
+            </a:pPr>
+            <a:r>
+              <a:rPr sz="1700" b="1">
+                <a:solidFill>
+                  <a:srgbClr val="0F172A"/>
+                </a:solidFill>
+                <a:latin typeface="Microsoft YaHei"/>
+              </a:rPr>
+              <a:t>规则蒸馏和低置信 LLM 回退怎么并入本方法？</a:t>
+            </a:r>
+          </a:p>
+        </p:txBody>
+      </p:sp>
+      <p:sp>
+        <p:nvSpPr>
+          <p:cNvPr id="5" name="TextBox 4"/>
+          <p:cNvSpPr txBox="1"/>
+          <p:nvPr/>
+        </p:nvSpPr>
+        <p:spPr>
+          <a:xfrm>
+            <a:off x="1252728" y="585216"/>
+            <a:ext cx="8869680" cy="228600"/>
+          </a:xfrm>
+          <a:prstGeom prst="rect">
+            <a:avLst/>
+          </a:prstGeom>
+          <a:noFill/>
+        </p:spPr>
+        <p:txBody>
+          <a:bodyPr wrap="square" lIns="27432" rIns="27432" tIns="9144" bIns="9144" anchor="ctr">
+            <a:spAutoFit/>
+          </a:bodyPr>
+          <a:lstStyle/>
+          <a:p>
+            <a:pPr algn="l">
+              <a:defRPr sz="850" b="0">
+                <a:solidFill>
+                  <a:srgbClr val="64748B"/>
+                </a:solidFill>
+                <a:latin typeface="Microsoft YaHei"/>
+              </a:defRPr>
+            </a:pPr>
+            <a:r>
+              <a:rPr sz="850" b="0">
+                <a:solidFill>
+                  <a:srgbClr val="64748B"/>
+                </a:solidFill>
+                <a:latin typeface="Microsoft YaHei"/>
+              </a:rPr>
+              <a:t>How do rule distillation and low-confidence LLM fallback fit into the method?</a:t>
+            </a:r>
+          </a:p>
+        </p:txBody>
+      </p:sp>
+      <p:pic>
+        <p:nvPicPr>
+          <p:cNvPr id="6" name="Picture 5" descr="image.png"/>
+          <p:cNvPicPr>
+            <a:picLocks noChangeAspect="1"/>
+          </p:cNvPicPr>
+          <p:nvPr/>
+        </p:nvPicPr>
+        <p:blipFill>
+          <a:blip r:embed="rId2"/>
+          <a:stretch>
+            <a:fillRect/>
+          </a:stretch>
+        </p:blipFill>
+        <p:spPr>
+          <a:xfrm>
+            <a:off x="11018520" y="201168"/>
+            <a:ext cx="713232" cy="502730"/>
+          </a:xfrm>
+          <a:prstGeom prst="rect">
+            <a:avLst/>
+          </a:prstGeom>
+        </p:spPr>
+      </p:pic>
+      <p:sp>
+        <p:nvSpPr>
+          <p:cNvPr id="7" name="Rectangle 6"/>
+          <p:cNvSpPr/>
+          <p:nvPr/>
+        </p:nvSpPr>
+        <p:spPr>
+          <a:xfrm>
+            <a:off x="384048" y="877824"/>
+            <a:ext cx="11201400" cy="10972"/>
+          </a:xfrm>
+          <a:prstGeom prst="rect">
+            <a:avLst/>
+          </a:prstGeom>
+          <a:solidFill>
+            <a:srgbClr val="CBD5E1"/>
+          </a:solidFill>
+          <a:ln>
+            <a:noFill/>
+          </a:ln>
+        </p:spPr>
+        <p:style>
+          <a:lnRef idx="1">
+            <a:schemeClr val="accent1"/>
+          </a:lnRef>
+          <a:fillRef idx="3">
+            <a:schemeClr val="accent1"/>
+          </a:fillRef>
+          <a:effectRef idx="2">
+            <a:schemeClr val="accent1"/>
+          </a:effectRef>
+          <a:fontRef idx="minor">
+            <a:schemeClr val="lt1"/>
+          </a:fontRef>
+        </p:style>
+        <p:txBody>
+          <a:bodyPr rtlCol="0" anchor="ctr"/>
+          <a:lstStyle/>
+          <a:p>
+            <a:pPr algn="ctr"/>
+          </a:p>
+        </p:txBody>
+      </p:sp>
+      <p:sp>
+        <p:nvSpPr>
+          <p:cNvPr id="8" name="Rectangle 7"/>
+          <p:cNvSpPr/>
+          <p:nvPr/>
+        </p:nvSpPr>
+        <p:spPr>
+          <a:xfrm>
+            <a:off x="384048" y="6428232"/>
+            <a:ext cx="11201400" cy="10972"/>
+          </a:xfrm>
+          <a:prstGeom prst="rect">
+            <a:avLst/>
+          </a:prstGeom>
+          <a:solidFill>
+            <a:srgbClr val="CBD5E1"/>
+          </a:solidFill>
+          <a:ln>
+            <a:noFill/>
+          </a:ln>
+        </p:spPr>
+        <p:style>
+          <a:lnRef idx="1">
+            <a:schemeClr val="accent1"/>
+          </a:lnRef>
+          <a:fillRef idx="3">
+            <a:schemeClr val="accent1"/>
+          </a:fillRef>
+          <a:effectRef idx="2">
+            <a:schemeClr val="accent1"/>
+          </a:effectRef>
+          <a:fontRef idx="minor">
+            <a:schemeClr val="lt1"/>
+          </a:fontRef>
+        </p:style>
+        <p:txBody>
+          <a:bodyPr rtlCol="0" anchor="ctr"/>
+          <a:lstStyle/>
+          <a:p>
+            <a:pPr algn="ctr"/>
+          </a:p>
+        </p:txBody>
+      </p:sp>
+      <p:sp>
+        <p:nvSpPr>
+          <p:cNvPr id="9" name="TextBox 8"/>
+          <p:cNvSpPr txBox="1"/>
+          <p:nvPr/>
+        </p:nvSpPr>
+        <p:spPr>
+          <a:xfrm>
+            <a:off x="384048" y="6473952"/>
+            <a:ext cx="5212080" cy="164592"/>
+          </a:xfrm>
+          <a:prstGeom prst="rect">
+            <a:avLst/>
+          </a:prstGeom>
+          <a:noFill/>
+        </p:spPr>
+        <p:txBody>
+          <a:bodyPr wrap="square" lIns="27432" rIns="27432" tIns="9144" bIns="9144" anchor="ctr">
+            <a:spAutoFit/>
+          </a:bodyPr>
+          <a:lstStyle/>
+          <a:p>
+            <a:pPr algn="l">
+              <a:defRPr sz="750" b="0">
+                <a:solidFill>
+                  <a:srgbClr val="64748B"/>
+                </a:solidFill>
+                <a:latin typeface="Microsoft YaHei"/>
+              </a:defRPr>
+            </a:pPr>
+            <a:r>
+              <a:rPr sz="750" b="0">
+                <a:solidFill>
+                  <a:srgbClr val="64748B"/>
+                </a:solidFill>
+                <a:latin typeface="Microsoft YaHei"/>
+              </a:rPr>
+              <a:t>Appendix: reviewer and instructor Q&amp;A</a:t>
+            </a:r>
+          </a:p>
+        </p:txBody>
+      </p:sp>
+      <p:sp>
+        <p:nvSpPr>
+          <p:cNvPr id="10" name="TextBox 9"/>
+          <p:cNvSpPr txBox="1"/>
+          <p:nvPr/>
+        </p:nvSpPr>
+        <p:spPr>
+          <a:xfrm>
+            <a:off x="10149840" y="6473952"/>
+            <a:ext cx="1417320" cy="164592"/>
+          </a:xfrm>
+          <a:prstGeom prst="rect">
+            <a:avLst/>
+          </a:prstGeom>
+          <a:noFill/>
+        </p:spPr>
+        <p:txBody>
+          <a:bodyPr wrap="square" lIns="27432" rIns="27432" tIns="9144" bIns="9144" anchor="ctr">
+            <a:spAutoFit/>
+          </a:bodyPr>
+          <a:lstStyle/>
+          <a:p>
+            <a:pPr algn="r">
+              <a:defRPr sz="750" b="1">
+                <a:solidFill>
+                  <a:srgbClr val="64748B"/>
+                </a:solidFill>
+                <a:latin typeface="Microsoft YaHei"/>
+              </a:defRPr>
+            </a:pPr>
+            <a:r>
+              <a:rPr sz="750" b="1">
+                <a:solidFill>
+                  <a:srgbClr val="64748B"/>
+                </a:solidFill>
+                <a:latin typeface="Microsoft YaHei"/>
+              </a:rPr>
+              <a:t>B8</a:t>
+            </a:r>
+          </a:p>
+        </p:txBody>
+      </p:sp>
+      <p:sp>
+        <p:nvSpPr>
+          <p:cNvPr id="11" name="Rounded Rectangle 10"/>
+          <p:cNvSpPr/>
+          <p:nvPr/>
+        </p:nvSpPr>
+        <p:spPr>
+          <a:xfrm>
+            <a:off x="658368" y="1115568"/>
+            <a:ext cx="10287000" cy="749808"/>
+          </a:xfrm>
+          <a:prstGeom prst="roundRect">
+            <a:avLst/>
+          </a:prstGeom>
+          <a:solidFill>
+            <a:srgbClr val="F1F5F9"/>
+          </a:solidFill>
+          <a:ln w="9525">
+            <a:solidFill>
+              <a:srgbClr val="CBD5E1"/>
+            </a:solidFill>
+          </a:ln>
+        </p:spPr>
+        <p:style>
+          <a:lnRef idx="1">
+            <a:schemeClr val="accent1"/>
+          </a:lnRef>
+          <a:fillRef idx="3">
+            <a:schemeClr val="accent1"/>
+          </a:fillRef>
+          <a:effectRef idx="2">
+            <a:schemeClr val="accent1"/>
+          </a:effectRef>
+          <a:fontRef idx="minor">
+            <a:schemeClr val="lt1"/>
+          </a:fontRef>
+        </p:style>
+        <p:txBody>
+          <a:bodyPr rtlCol="0" anchor="ctr"/>
+          <a:lstStyle/>
+          <a:p>
+            <a:pPr algn="ctr"/>
+          </a:p>
+        </p:txBody>
+      </p:sp>
+      <p:sp>
+        <p:nvSpPr>
+          <p:cNvPr id="12" name="TextBox 11"/>
+          <p:cNvSpPr txBox="1"/>
+          <p:nvPr/>
+        </p:nvSpPr>
+        <p:spPr>
+          <a:xfrm>
+            <a:off x="868680" y="1298448"/>
+            <a:ext cx="1463040" cy="182880"/>
+          </a:xfrm>
+          <a:prstGeom prst="rect">
+            <a:avLst/>
+          </a:prstGeom>
+          <a:noFill/>
+        </p:spPr>
+        <p:txBody>
+          <a:bodyPr wrap="square" lIns="27432" rIns="27432" tIns="9144" bIns="9144" anchor="ctr">
+            <a:spAutoFit/>
+          </a:bodyPr>
+          <a:lstStyle/>
+          <a:p>
+            <a:pPr algn="l">
+              <a:defRPr sz="1000" b="1">
+                <a:solidFill>
+                  <a:srgbClr val="EA580C"/>
+                </a:solidFill>
+                <a:latin typeface="Microsoft YaHei"/>
+              </a:defRPr>
+            </a:pPr>
+            <a:r>
+              <a:rPr sz="1000" b="1">
+                <a:solidFill>
+                  <a:srgbClr val="EA580C"/>
+                </a:solidFill>
+                <a:latin typeface="Microsoft YaHei"/>
+              </a:rPr>
+              <a:t>Short answer</a:t>
+            </a:r>
+          </a:p>
+        </p:txBody>
+      </p:sp>
+      <p:sp>
+        <p:nvSpPr>
+          <p:cNvPr id="13" name="TextBox 12"/>
+          <p:cNvSpPr txBox="1"/>
+          <p:nvPr/>
+        </p:nvSpPr>
+        <p:spPr>
+          <a:xfrm>
+            <a:off x="2240280" y="1216152"/>
+            <a:ext cx="8366760" cy="329184"/>
+          </a:xfrm>
+          <a:prstGeom prst="rect">
+            <a:avLst/>
+          </a:prstGeom>
+          <a:noFill/>
+        </p:spPr>
+        <p:txBody>
+          <a:bodyPr wrap="square" lIns="27432" rIns="27432" tIns="9144" bIns="9144" anchor="ctr">
+            <a:spAutoFit/>
+          </a:bodyPr>
+          <a:lstStyle/>
+          <a:p>
+            <a:pPr algn="l">
+              <a:defRPr sz="1300" b="1">
+                <a:solidFill>
+                  <a:srgbClr val="0F172A"/>
+                </a:solidFill>
+                <a:latin typeface="Microsoft YaHei"/>
+              </a:defRPr>
+            </a:pPr>
+            <a:r>
+              <a:rPr sz="1300" b="1">
+                <a:solidFill>
+                  <a:srgbClr val="0F172A"/>
+                </a:solidFill>
+                <a:latin typeface="Microsoft YaHei"/>
+              </a:rPr>
+              <a:t>它们是同一条技术路线的部署层：LLM 先验被蒸馏成规则，低置信样本可选回退。</a:t>
+            </a:r>
+          </a:p>
+        </p:txBody>
+      </p:sp>
+      <p:sp>
+        <p:nvSpPr>
+          <p:cNvPr id="14" name="Rectangle 13"/>
+          <p:cNvSpPr/>
+          <p:nvPr/>
+        </p:nvSpPr>
+        <p:spPr>
+          <a:xfrm>
+            <a:off x="713232" y="2176272"/>
+            <a:ext cx="4023360" cy="420624"/>
+          </a:xfrm>
+          <a:prstGeom prst="rect">
+            <a:avLst/>
+          </a:prstGeom>
+          <a:solidFill>
+            <a:srgbClr val="00796B"/>
+          </a:solidFill>
+          <a:ln>
+            <a:noFill/>
+          </a:ln>
+        </p:spPr>
+        <p:style>
+          <a:lnRef idx="1">
+            <a:schemeClr val="accent1"/>
+          </a:lnRef>
+          <a:fillRef idx="3">
+            <a:schemeClr val="accent1"/>
+          </a:fillRef>
+          <a:effectRef idx="2">
+            <a:schemeClr val="accent1"/>
+          </a:effectRef>
+          <a:fontRef idx="minor">
+            <a:schemeClr val="lt1"/>
+          </a:fontRef>
+        </p:style>
+        <p:txBody>
+          <a:bodyPr rtlCol="0" anchor="ctr"/>
+          <a:lstStyle/>
+          <a:p>
+            <a:pPr algn="ctr"/>
+          </a:p>
+        </p:txBody>
+      </p:sp>
+      <p:sp>
+        <p:nvSpPr>
+          <p:cNvPr id="15" name="TextBox 14"/>
+          <p:cNvSpPr txBox="1"/>
+          <p:nvPr/>
+        </p:nvSpPr>
+        <p:spPr>
+          <a:xfrm>
+            <a:off x="749808" y="2249424"/>
+            <a:ext cx="3950208" cy="292608"/>
+          </a:xfrm>
+          <a:prstGeom prst="rect">
+            <a:avLst/>
+          </a:prstGeom>
+          <a:noFill/>
+        </p:spPr>
+        <p:txBody>
+          <a:bodyPr wrap="square" lIns="27432" rIns="27432" tIns="9144" bIns="9144" anchor="ctr">
+            <a:spAutoFit/>
+          </a:bodyPr>
+          <a:lstStyle/>
+          <a:p>
+            <a:pPr algn="ctr">
+              <a:defRPr sz="1200" b="1">
+                <a:solidFill>
+                  <a:srgbClr val="FFFFFF"/>
+                </a:solidFill>
+                <a:latin typeface="Microsoft YaHei"/>
+              </a:defRPr>
+            </a:pPr>
+            <a:r>
+              <a:rPr sz="1200" b="1">
+                <a:solidFill>
+                  <a:srgbClr val="FFFFFF"/>
+                </a:solidFill>
+                <a:latin typeface="Microsoft YaHei"/>
+              </a:rPr>
+              <a:t>Evidence</a:t>
+            </a:r>
+          </a:p>
+        </p:txBody>
+      </p:sp>
+      <p:sp>
+        <p:nvSpPr>
+          <p:cNvPr id="16" name="Rectangle 15"/>
+          <p:cNvSpPr/>
+          <p:nvPr/>
+        </p:nvSpPr>
+        <p:spPr>
+          <a:xfrm>
+            <a:off x="4736592" y="2176272"/>
+            <a:ext cx="6035040" cy="420624"/>
+          </a:xfrm>
+          <a:prstGeom prst="rect">
+            <a:avLst/>
+          </a:prstGeom>
+          <a:solidFill>
+            <a:srgbClr val="00796B"/>
+          </a:solidFill>
+          <a:ln>
+            <a:noFill/>
+          </a:ln>
+        </p:spPr>
+        <p:style>
+          <a:lnRef idx="1">
+            <a:schemeClr val="accent1"/>
+          </a:lnRef>
+          <a:fillRef idx="3">
+            <a:schemeClr val="accent1"/>
+          </a:fillRef>
+          <a:effectRef idx="2">
+            <a:schemeClr val="accent1"/>
+          </a:effectRef>
+          <a:fontRef idx="minor">
+            <a:schemeClr val="lt1"/>
+          </a:fontRef>
+        </p:style>
+        <p:txBody>
+          <a:bodyPr rtlCol="0" anchor="ctr"/>
+          <a:lstStyle/>
+          <a:p>
+            <a:pPr algn="ctr"/>
+          </a:p>
+        </p:txBody>
+      </p:sp>
+      <p:sp>
+        <p:nvSpPr>
+          <p:cNvPr id="17" name="TextBox 16"/>
+          <p:cNvSpPr txBox="1"/>
+          <p:nvPr/>
+        </p:nvSpPr>
+        <p:spPr>
+          <a:xfrm>
+            <a:off x="4773168" y="2249424"/>
+            <a:ext cx="5961888" cy="292608"/>
+          </a:xfrm>
+          <a:prstGeom prst="rect">
+            <a:avLst/>
+          </a:prstGeom>
+          <a:noFill/>
+        </p:spPr>
+        <p:txBody>
+          <a:bodyPr wrap="square" lIns="27432" rIns="27432" tIns="9144" bIns="9144" anchor="ctr">
+            <a:spAutoFit/>
+          </a:bodyPr>
+          <a:lstStyle/>
+          <a:p>
+            <a:pPr algn="ctr">
+              <a:defRPr sz="1200" b="1">
+                <a:solidFill>
+                  <a:srgbClr val="FFFFFF"/>
+                </a:solidFill>
+                <a:latin typeface="Microsoft YaHei"/>
+              </a:defRPr>
+            </a:pPr>
+            <a:r>
+              <a:rPr sz="1200" b="1">
+                <a:solidFill>
+                  <a:srgbClr val="FFFFFF"/>
+                </a:solidFill>
+                <a:latin typeface="Microsoft YaHei"/>
+              </a:rPr>
+              <a:t>Value / implication</a:t>
+            </a:r>
+          </a:p>
+        </p:txBody>
+      </p:sp>
+      <p:sp>
+        <p:nvSpPr>
+          <p:cNvPr id="18" name="Rectangle 17"/>
+          <p:cNvSpPr/>
+          <p:nvPr/>
+        </p:nvSpPr>
+        <p:spPr>
+          <a:xfrm>
+            <a:off x="713232" y="2596896"/>
+            <a:ext cx="4023360" cy="420624"/>
+          </a:xfrm>
+          <a:prstGeom prst="rect">
+            <a:avLst/>
+          </a:prstGeom>
+          <a:solidFill>
+            <a:srgbClr val="F8FAFC"/>
+          </a:solidFill>
+          <a:ln w="9525">
+            <a:solidFill>
+              <a:srgbClr val="CBD5E1"/>
+            </a:solidFill>
+          </a:ln>
+        </p:spPr>
+        <p:style>
+          <a:lnRef idx="1">
+            <a:schemeClr val="accent1"/>
+          </a:lnRef>
+          <a:fillRef idx="3">
+            <a:schemeClr val="accent1"/>
+          </a:fillRef>
+          <a:effectRef idx="2">
+            <a:schemeClr val="accent1"/>
+          </a:effectRef>
+          <a:fontRef idx="minor">
+            <a:schemeClr val="lt1"/>
+          </a:fontRef>
+        </p:style>
+        <p:txBody>
+          <a:bodyPr rtlCol="0" anchor="ctr"/>
+          <a:lstStyle/>
+          <a:p>
+            <a:pPr algn="ctr"/>
+          </a:p>
+        </p:txBody>
+      </p:sp>
+      <p:sp>
+        <p:nvSpPr>
+          <p:cNvPr id="19" name="TextBox 18"/>
+          <p:cNvSpPr txBox="1"/>
+          <p:nvPr/>
+        </p:nvSpPr>
+        <p:spPr>
+          <a:xfrm>
+            <a:off x="768096" y="2660903"/>
+            <a:ext cx="3913632" cy="292608"/>
+          </a:xfrm>
+          <a:prstGeom prst="rect">
+            <a:avLst/>
+          </a:prstGeom>
+          <a:noFill/>
+        </p:spPr>
+        <p:txBody>
+          <a:bodyPr wrap="square" lIns="27432" rIns="27432" tIns="9144" bIns="9144" anchor="t">
+            <a:spAutoFit/>
+          </a:bodyPr>
+          <a:lstStyle/>
+          <a:p>
+            <a:pPr algn="l">
+              <a:defRPr sz="1200" b="1">
+                <a:solidFill>
+                  <a:srgbClr val="0F172A"/>
+                </a:solidFill>
+                <a:latin typeface="Microsoft YaHei"/>
+              </a:defRPr>
+            </a:pPr>
+            <a:r>
+              <a:rPr sz="1200" b="1">
+                <a:solidFill>
+                  <a:srgbClr val="0F172A"/>
+                </a:solidFill>
+                <a:latin typeface="Microsoft YaHei"/>
+              </a:rPr>
+              <a:t>Distilled rule layer</a:t>
+            </a:r>
+          </a:p>
+        </p:txBody>
+      </p:sp>
+      <p:sp>
+        <p:nvSpPr>
+          <p:cNvPr id="20" name="Rectangle 19"/>
+          <p:cNvSpPr/>
+          <p:nvPr/>
+        </p:nvSpPr>
+        <p:spPr>
+          <a:xfrm>
+            <a:off x="4736592" y="2596896"/>
+            <a:ext cx="6035040" cy="420624"/>
+          </a:xfrm>
+          <a:prstGeom prst="rect">
+            <a:avLst/>
+          </a:prstGeom>
+          <a:solidFill>
+            <a:srgbClr val="F8FAFC"/>
+          </a:solidFill>
+          <a:ln w="9525">
+            <a:solidFill>
+              <a:srgbClr val="CBD5E1"/>
+            </a:solidFill>
+          </a:ln>
+        </p:spPr>
+        <p:style>
+          <a:lnRef idx="1">
+            <a:schemeClr val="accent1"/>
+          </a:lnRef>
+          <a:fillRef idx="3">
+            <a:schemeClr val="accent1"/>
+          </a:fillRef>
+          <a:effectRef idx="2">
+            <a:schemeClr val="accent1"/>
+          </a:effectRef>
+          <a:fontRef idx="minor">
+            <a:schemeClr val="lt1"/>
+          </a:fontRef>
+        </p:style>
+        <p:txBody>
+          <a:bodyPr rtlCol="0" anchor="ctr"/>
+          <a:lstStyle/>
+          <a:p>
+            <a:pPr algn="ctr"/>
+          </a:p>
+        </p:txBody>
+      </p:sp>
+      <p:sp>
+        <p:nvSpPr>
+          <p:cNvPr id="21" name="TextBox 20"/>
+          <p:cNvSpPr txBox="1"/>
+          <p:nvPr/>
+        </p:nvSpPr>
+        <p:spPr>
+          <a:xfrm>
+            <a:off x="4791456" y="2660903"/>
+            <a:ext cx="5925312" cy="292608"/>
+          </a:xfrm>
+          <a:prstGeom prst="rect">
+            <a:avLst/>
+          </a:prstGeom>
+          <a:noFill/>
+        </p:spPr>
+        <p:txBody>
+          <a:bodyPr wrap="square" lIns="27432" rIns="27432" tIns="9144" bIns="9144" anchor="t">
+            <a:spAutoFit/>
+          </a:bodyPr>
+          <a:lstStyle/>
+          <a:p>
+            <a:pPr algn="l">
+              <a:defRPr sz="1200" b="0">
+                <a:solidFill>
+                  <a:srgbClr val="0F172A"/>
+                </a:solidFill>
+                <a:latin typeface="Microsoft YaHei"/>
+              </a:defRPr>
+            </a:pPr>
+            <a:r>
+              <a:rPr sz="1200" b="0">
+                <a:solidFill>
+                  <a:srgbClr val="0F172A"/>
+                </a:solidFill>
+                <a:latin typeface="Microsoft YaHei"/>
+              </a:rPr>
+              <a:t>LLM priors -&gt; fixed event adapter, not per-household answers</a:t>
+            </a:r>
+          </a:p>
+        </p:txBody>
+      </p:sp>
+      <p:sp>
+        <p:nvSpPr>
+          <p:cNvPr id="22" name="Rectangle 21"/>
+          <p:cNvSpPr/>
+          <p:nvPr/>
+        </p:nvSpPr>
+        <p:spPr>
+          <a:xfrm>
+            <a:off x="713232" y="3017520"/>
+            <a:ext cx="4023360" cy="420624"/>
+          </a:xfrm>
+          <a:prstGeom prst="rect">
+            <a:avLst/>
+          </a:prstGeom>
+          <a:solidFill>
+            <a:srgbClr val="F1F5F9"/>
+          </a:solidFill>
+          <a:ln w="9525">
+            <a:solidFill>
+              <a:srgbClr val="CBD5E1"/>
+            </a:solidFill>
+          </a:ln>
+        </p:spPr>
+        <p:style>
+          <a:lnRef idx="1">
+            <a:schemeClr val="accent1"/>
+          </a:lnRef>
+          <a:fillRef idx="3">
+            <a:schemeClr val="accent1"/>
+          </a:fillRef>
+          <a:effectRef idx="2">
+            <a:schemeClr val="accent1"/>
+          </a:effectRef>
+          <a:fontRef idx="minor">
+            <a:schemeClr val="lt1"/>
+          </a:fontRef>
+        </p:style>
+        <p:txBody>
+          <a:bodyPr rtlCol="0" anchor="ctr"/>
+          <a:lstStyle/>
+          <a:p>
+            <a:pPr algn="ctr"/>
+          </a:p>
+        </p:txBody>
+      </p:sp>
+      <p:sp>
+        <p:nvSpPr>
+          <p:cNvPr id="23" name="TextBox 22"/>
+          <p:cNvSpPr txBox="1"/>
+          <p:nvPr/>
+        </p:nvSpPr>
+        <p:spPr>
+          <a:xfrm>
+            <a:off x="768096" y="3081527"/>
+            <a:ext cx="3913632" cy="292608"/>
+          </a:xfrm>
+          <a:prstGeom prst="rect">
+            <a:avLst/>
+          </a:prstGeom>
+          <a:noFill/>
+        </p:spPr>
+        <p:txBody>
+          <a:bodyPr wrap="square" lIns="27432" rIns="27432" tIns="9144" bIns="9144" anchor="t">
+            <a:spAutoFit/>
+          </a:bodyPr>
+          <a:lstStyle/>
+          <a:p>
+            <a:pPr algn="l">
+              <a:defRPr sz="1200" b="1">
+                <a:solidFill>
+                  <a:srgbClr val="0F172A"/>
+                </a:solidFill>
+                <a:latin typeface="Microsoft YaHei"/>
+              </a:defRPr>
+            </a:pPr>
+            <a:r>
+              <a:rPr sz="1200" b="1">
+                <a:solidFill>
+                  <a:srgbClr val="0F172A"/>
+                </a:solidFill>
+                <a:latin typeface="Microsoft YaHei"/>
+              </a:rPr>
+              <a:t>Batch prompting</a:t>
+            </a:r>
+          </a:p>
+        </p:txBody>
+      </p:sp>
+      <p:sp>
+        <p:nvSpPr>
+          <p:cNvPr id="24" name="Rectangle 23"/>
+          <p:cNvSpPr/>
+          <p:nvPr/>
+        </p:nvSpPr>
+        <p:spPr>
+          <a:xfrm>
+            <a:off x="4736592" y="3017520"/>
+            <a:ext cx="6035040" cy="420624"/>
+          </a:xfrm>
+          <a:prstGeom prst="rect">
+            <a:avLst/>
+          </a:prstGeom>
+          <a:solidFill>
+            <a:srgbClr val="F1F5F9"/>
+          </a:solidFill>
+          <a:ln w="9525">
+            <a:solidFill>
+              <a:srgbClr val="CBD5E1"/>
+            </a:solidFill>
+          </a:ln>
+        </p:spPr>
+        <p:style>
+          <a:lnRef idx="1">
+            <a:schemeClr val="accent1"/>
+          </a:lnRef>
+          <a:fillRef idx="3">
+            <a:schemeClr val="accent1"/>
+          </a:fillRef>
+          <a:effectRef idx="2">
+            <a:schemeClr val="accent1"/>
+          </a:effectRef>
+          <a:fontRef idx="minor">
+            <a:schemeClr val="lt1"/>
+          </a:fontRef>
+        </p:style>
+        <p:txBody>
+          <a:bodyPr rtlCol="0" anchor="ctr"/>
+          <a:lstStyle/>
+          <a:p>
+            <a:pPr algn="ctr"/>
+          </a:p>
+        </p:txBody>
+      </p:sp>
+      <p:sp>
+        <p:nvSpPr>
+          <p:cNvPr id="25" name="TextBox 24"/>
+          <p:cNvSpPr txBox="1"/>
+          <p:nvPr/>
+        </p:nvSpPr>
+        <p:spPr>
+          <a:xfrm>
+            <a:off x="4791456" y="3081527"/>
+            <a:ext cx="5925312" cy="292608"/>
+          </a:xfrm>
+          <a:prstGeom prst="rect">
+            <a:avLst/>
+          </a:prstGeom>
+          <a:noFill/>
+        </p:spPr>
+        <p:txBody>
+          <a:bodyPr wrap="square" lIns="27432" rIns="27432" tIns="9144" bIns="9144" anchor="t">
+            <a:spAutoFit/>
+          </a:bodyPr>
+          <a:lstStyle/>
+          <a:p>
+            <a:pPr algn="l">
+              <a:defRPr sz="1200" b="0">
+                <a:solidFill>
+                  <a:srgbClr val="0F172A"/>
+                </a:solidFill>
+                <a:latin typeface="Microsoft YaHei"/>
+              </a:defRPr>
+            </a:pPr>
+            <a:r>
+              <a:rPr sz="1200" b="0">
+                <a:solidFill>
+                  <a:srgbClr val="0F172A"/>
+                </a:solidFill>
+                <a:latin typeface="Microsoft YaHei"/>
+              </a:rPr>
+              <a:t>1,327 cohorts -&gt; 89 prompts with batch size 15</a:t>
+            </a:r>
+          </a:p>
+        </p:txBody>
+      </p:sp>
+      <p:sp>
+        <p:nvSpPr>
+          <p:cNvPr id="26" name="Rectangle 25"/>
+          <p:cNvSpPr/>
+          <p:nvPr/>
+        </p:nvSpPr>
+        <p:spPr>
+          <a:xfrm>
+            <a:off x="713232" y="3438144"/>
+            <a:ext cx="4023360" cy="420624"/>
+          </a:xfrm>
+          <a:prstGeom prst="rect">
+            <a:avLst/>
+          </a:prstGeom>
+          <a:solidFill>
+            <a:srgbClr val="F8FAFC"/>
+          </a:solidFill>
+          <a:ln w="9525">
+            <a:solidFill>
+              <a:srgbClr val="CBD5E1"/>
+            </a:solidFill>
+          </a:ln>
+        </p:spPr>
+        <p:style>
+          <a:lnRef idx="1">
+            <a:schemeClr val="accent1"/>
+          </a:lnRef>
+          <a:fillRef idx="3">
+            <a:schemeClr val="accent1"/>
+          </a:fillRef>
+          <a:effectRef idx="2">
+            <a:schemeClr val="accent1"/>
+          </a:effectRef>
+          <a:fontRef idx="minor">
+            <a:schemeClr val="lt1"/>
+          </a:fontRef>
+        </p:style>
+        <p:txBody>
+          <a:bodyPr rtlCol="0" anchor="ctr"/>
+          <a:lstStyle/>
+          <a:p>
+            <a:pPr algn="ctr"/>
+          </a:p>
+        </p:txBody>
+      </p:sp>
+      <p:sp>
+        <p:nvSpPr>
+          <p:cNvPr id="27" name="TextBox 26"/>
+          <p:cNvSpPr txBox="1"/>
+          <p:nvPr/>
+        </p:nvSpPr>
+        <p:spPr>
+          <a:xfrm>
+            <a:off x="768096" y="3502151"/>
+            <a:ext cx="3913632" cy="292608"/>
+          </a:xfrm>
+          <a:prstGeom prst="rect">
+            <a:avLst/>
+          </a:prstGeom>
+          <a:noFill/>
+        </p:spPr>
+        <p:txBody>
+          <a:bodyPr wrap="square" lIns="27432" rIns="27432" tIns="9144" bIns="9144" anchor="t">
+            <a:spAutoFit/>
+          </a:bodyPr>
+          <a:lstStyle/>
+          <a:p>
+            <a:pPr algn="l">
+              <a:defRPr sz="1200" b="1">
+                <a:solidFill>
+                  <a:srgbClr val="0F172A"/>
+                </a:solidFill>
+                <a:latin typeface="Microsoft YaHei"/>
+              </a:defRPr>
+            </a:pPr>
+            <a:r>
+              <a:rPr sz="1200" b="1">
+                <a:solidFill>
+                  <a:srgbClr val="0F172A"/>
+                </a:solidFill>
+                <a:latin typeface="Microsoft YaHei"/>
+              </a:rPr>
+              <a:t>Reported experiment</a:t>
+            </a:r>
+          </a:p>
+        </p:txBody>
+      </p:sp>
+      <p:sp>
+        <p:nvSpPr>
+          <p:cNvPr id="28" name="Rectangle 27"/>
+          <p:cNvSpPr/>
+          <p:nvPr/>
+        </p:nvSpPr>
+        <p:spPr>
+          <a:xfrm>
+            <a:off x="4736592" y="3438144"/>
+            <a:ext cx="6035040" cy="420624"/>
+          </a:xfrm>
+          <a:prstGeom prst="rect">
+            <a:avLst/>
+          </a:prstGeom>
+          <a:solidFill>
+            <a:srgbClr val="F8FAFC"/>
+          </a:solidFill>
+          <a:ln w="9525">
+            <a:solidFill>
+              <a:srgbClr val="CBD5E1"/>
+            </a:solidFill>
+          </a:ln>
+        </p:spPr>
+        <p:style>
+          <a:lnRef idx="1">
+            <a:schemeClr val="accent1"/>
+          </a:lnRef>
+          <a:fillRef idx="3">
+            <a:schemeClr val="accent1"/>
+          </a:fillRef>
+          <a:effectRef idx="2">
+            <a:schemeClr val="accent1"/>
+          </a:effectRef>
+          <a:fontRef idx="minor">
+            <a:schemeClr val="lt1"/>
+          </a:fontRef>
+        </p:style>
+        <p:txBody>
+          <a:bodyPr rtlCol="0" anchor="ctr"/>
+          <a:lstStyle/>
+          <a:p>
+            <a:pPr algn="ctr"/>
+          </a:p>
+        </p:txBody>
+      </p:sp>
+      <p:sp>
+        <p:nvSpPr>
+          <p:cNvPr id="29" name="TextBox 28"/>
+          <p:cNvSpPr txBox="1"/>
+          <p:nvPr/>
+        </p:nvSpPr>
+        <p:spPr>
+          <a:xfrm>
+            <a:off x="4791456" y="3502151"/>
+            <a:ext cx="5925312" cy="292608"/>
+          </a:xfrm>
+          <a:prstGeom prst="rect">
+            <a:avLst/>
+          </a:prstGeom>
+          <a:noFill/>
+        </p:spPr>
+        <p:txBody>
+          <a:bodyPr wrap="square" lIns="27432" rIns="27432" tIns="9144" bIns="9144" anchor="t">
+            <a:spAutoFit/>
+          </a:bodyPr>
+          <a:lstStyle/>
+          <a:p>
+            <a:pPr algn="l">
+              <a:defRPr sz="1200" b="0">
+                <a:solidFill>
+                  <a:srgbClr val="0F172A"/>
+                </a:solidFill>
+                <a:latin typeface="Microsoft YaHei"/>
+              </a:defRPr>
+            </a:pPr>
+            <a:r>
+              <a:rPr sz="1200" b="0">
+                <a:solidFill>
+                  <a:srgbClr val="0F172A"/>
+                </a:solidFill>
+                <a:latin typeface="Microsoft YaHei"/>
+              </a:rPr>
+              <a:t>No target-year labels; low-confidence uses global pressure fallback</a:t>
+            </a:r>
+          </a:p>
+        </p:txBody>
+      </p:sp>
+      <p:sp>
+        <p:nvSpPr>
+          <p:cNvPr id="30" name="Rectangle 29"/>
+          <p:cNvSpPr/>
+          <p:nvPr/>
+        </p:nvSpPr>
+        <p:spPr>
+          <a:xfrm>
+            <a:off x="713232" y="3858768"/>
+            <a:ext cx="4023360" cy="420624"/>
+          </a:xfrm>
+          <a:prstGeom prst="rect">
+            <a:avLst/>
+          </a:prstGeom>
+          <a:solidFill>
+            <a:srgbClr val="F1F5F9"/>
+          </a:solidFill>
+          <a:ln w="9525">
+            <a:solidFill>
+              <a:srgbClr val="CBD5E1"/>
+            </a:solidFill>
+          </a:ln>
+        </p:spPr>
+        <p:style>
+          <a:lnRef idx="1">
+            <a:schemeClr val="accent1"/>
+          </a:lnRef>
+          <a:fillRef idx="3">
+            <a:schemeClr val="accent1"/>
+          </a:fillRef>
+          <a:effectRef idx="2">
+            <a:schemeClr val="accent1"/>
+          </a:effectRef>
+          <a:fontRef idx="minor">
+            <a:schemeClr val="lt1"/>
+          </a:fontRef>
+        </p:style>
+        <p:txBody>
+          <a:bodyPr rtlCol="0" anchor="ctr"/>
+          <a:lstStyle/>
+          <a:p>
+            <a:pPr algn="ctr"/>
+          </a:p>
+        </p:txBody>
+      </p:sp>
+      <p:sp>
+        <p:nvSpPr>
+          <p:cNvPr id="31" name="TextBox 30"/>
+          <p:cNvSpPr txBox="1"/>
+          <p:nvPr/>
+        </p:nvSpPr>
+        <p:spPr>
+          <a:xfrm>
+            <a:off x="768096" y="3922776"/>
+            <a:ext cx="3913632" cy="292608"/>
+          </a:xfrm>
+          <a:prstGeom prst="rect">
+            <a:avLst/>
+          </a:prstGeom>
+          <a:noFill/>
+        </p:spPr>
+        <p:txBody>
+          <a:bodyPr wrap="square" lIns="27432" rIns="27432" tIns="9144" bIns="9144" anchor="t">
+            <a:spAutoFit/>
+          </a:bodyPr>
+          <a:lstStyle/>
+          <a:p>
+            <a:pPr algn="l">
+              <a:defRPr sz="1200" b="1">
+                <a:solidFill>
+                  <a:srgbClr val="0F172A"/>
+                </a:solidFill>
+                <a:latin typeface="Microsoft YaHei"/>
+              </a:defRPr>
+            </a:pPr>
+            <a:r>
+              <a:rPr sz="1200" b="1">
+                <a:solidFill>
+                  <a:srgbClr val="0F172A"/>
+                </a:solidFill>
+                <a:latin typeface="Microsoft YaHei"/>
+              </a:rPr>
+              <a:t>Deployable extension</a:t>
+            </a:r>
+          </a:p>
+        </p:txBody>
+      </p:sp>
+      <p:sp>
+        <p:nvSpPr>
+          <p:cNvPr id="32" name="Rectangle 31"/>
+          <p:cNvSpPr/>
+          <p:nvPr/>
+        </p:nvSpPr>
+        <p:spPr>
+          <a:xfrm>
+            <a:off x="4736592" y="3858768"/>
+            <a:ext cx="6035040" cy="420624"/>
+          </a:xfrm>
+          <a:prstGeom prst="rect">
+            <a:avLst/>
+          </a:prstGeom>
+          <a:solidFill>
+            <a:srgbClr val="F1F5F9"/>
+          </a:solidFill>
+          <a:ln w="9525">
+            <a:solidFill>
+              <a:srgbClr val="CBD5E1"/>
+            </a:solidFill>
+          </a:ln>
+        </p:spPr>
+        <p:style>
+          <a:lnRef idx="1">
+            <a:schemeClr val="accent1"/>
+          </a:lnRef>
+          <a:fillRef idx="3">
+            <a:schemeClr val="accent1"/>
+          </a:fillRef>
+          <a:effectRef idx="2">
+            <a:schemeClr val="accent1"/>
+          </a:effectRef>
+          <a:fontRef idx="minor">
+            <a:schemeClr val="lt1"/>
+          </a:fontRef>
+        </p:style>
+        <p:txBody>
+          <a:bodyPr rtlCol="0" anchor="ctr"/>
+          <a:lstStyle/>
+          <a:p>
+            <a:pPr algn="ctr"/>
+          </a:p>
+        </p:txBody>
+      </p:sp>
+      <p:sp>
+        <p:nvSpPr>
+          <p:cNvPr id="33" name="TextBox 32"/>
+          <p:cNvSpPr txBox="1"/>
+          <p:nvPr/>
+        </p:nvSpPr>
+        <p:spPr>
+          <a:xfrm>
+            <a:off x="4791456" y="3922776"/>
+            <a:ext cx="5925312" cy="292608"/>
+          </a:xfrm>
+          <a:prstGeom prst="rect">
+            <a:avLst/>
+          </a:prstGeom>
+          <a:noFill/>
+        </p:spPr>
+        <p:txBody>
+          <a:bodyPr wrap="square" lIns="27432" rIns="27432" tIns="9144" bIns="9144" anchor="t">
+            <a:spAutoFit/>
+          </a:bodyPr>
+          <a:lstStyle/>
+          <a:p>
+            <a:pPr algn="l">
+              <a:defRPr sz="1200" b="0">
+                <a:solidFill>
+                  <a:srgbClr val="0F172A"/>
+                </a:solidFill>
+                <a:latin typeface="Microsoft YaHei"/>
+              </a:defRPr>
+            </a:pPr>
+            <a:r>
+              <a:rPr sz="1200" b="0">
+                <a:solidFill>
+                  <a:srgbClr val="0F172A"/>
+                </a:solidFill>
+                <a:latin typeface="Microsoft YaHei"/>
+              </a:rPr>
+              <a:t>Online LLM fallback only for uncertain cohorts if cost allows</a:t>
+            </a:r>
+          </a:p>
+        </p:txBody>
+      </p:sp>
+      <p:sp>
+        <p:nvSpPr>
+          <p:cNvPr id="34" name="Rounded Rectangle 33"/>
+          <p:cNvSpPr/>
+          <p:nvPr/>
+        </p:nvSpPr>
+        <p:spPr>
+          <a:xfrm>
+            <a:off x="749808" y="5074920"/>
+            <a:ext cx="10012680" cy="1005840"/>
+          </a:xfrm>
+          <a:prstGeom prst="roundRect">
+            <a:avLst/>
+          </a:prstGeom>
+          <a:solidFill>
+            <a:srgbClr val="F1F5F9"/>
+          </a:solidFill>
+          <a:ln w="9525">
+            <a:solidFill>
+              <a:srgbClr val="CBD5E1"/>
+            </a:solidFill>
+          </a:ln>
+        </p:spPr>
+        <p:style>
+          <a:lnRef idx="1">
+            <a:schemeClr val="accent1"/>
+          </a:lnRef>
+          <a:fillRef idx="3">
+            <a:schemeClr val="accent1"/>
+          </a:fillRef>
+          <a:effectRef idx="2">
+            <a:schemeClr val="accent1"/>
+          </a:effectRef>
+          <a:fontRef idx="minor">
+            <a:schemeClr val="lt1"/>
+          </a:fontRef>
+        </p:style>
+        <p:txBody>
+          <a:bodyPr rtlCol="0" anchor="ctr"/>
+          <a:lstStyle/>
+          <a:p>
+            <a:pPr algn="ctr"/>
+          </a:p>
+        </p:txBody>
+      </p:sp>
+      <p:sp>
+        <p:nvSpPr>
+          <p:cNvPr id="35" name="Rectangle 34"/>
+          <p:cNvSpPr/>
+          <p:nvPr/>
+        </p:nvSpPr>
+        <p:spPr>
+          <a:xfrm>
+            <a:off x="749808" y="5074920"/>
+            <a:ext cx="50292" cy="1005840"/>
+          </a:xfrm>
+          <a:prstGeom prst="rect">
+            <a:avLst/>
+          </a:prstGeom>
+          <a:solidFill>
+            <a:srgbClr val="2563EB"/>
+          </a:solidFill>
+          <a:ln>
+            <a:noFill/>
+          </a:ln>
+        </p:spPr>
+        <p:style>
+          <a:lnRef idx="1">
+            <a:schemeClr val="accent1"/>
+          </a:lnRef>
+          <a:fillRef idx="3">
+            <a:schemeClr val="accent1"/>
+          </a:fillRef>
+          <a:effectRef idx="2">
+            <a:schemeClr val="accent1"/>
+          </a:effectRef>
+          <a:fontRef idx="minor">
+            <a:schemeClr val="lt1"/>
+          </a:fontRef>
+        </p:style>
+        <p:txBody>
+          <a:bodyPr rtlCol="0" anchor="ctr"/>
+          <a:lstStyle/>
+          <a:p>
+            <a:pPr algn="ctr"/>
+          </a:p>
+        </p:txBody>
+      </p:sp>
+      <p:sp>
+        <p:nvSpPr>
+          <p:cNvPr id="36" name="TextBox 35"/>
+          <p:cNvSpPr txBox="1"/>
+          <p:nvPr/>
+        </p:nvSpPr>
+        <p:spPr>
+          <a:xfrm>
+            <a:off x="914400" y="5166359"/>
+            <a:ext cx="9720072" cy="362102"/>
+          </a:xfrm>
+          <a:prstGeom prst="rect">
+            <a:avLst/>
+          </a:prstGeom>
+          <a:noFill/>
+        </p:spPr>
+        <p:txBody>
+          <a:bodyPr wrap="square" lIns="27432" rIns="27432" tIns="9144" bIns="9144" anchor="t">
+            <a:spAutoFit/>
+          </a:bodyPr>
+          <a:lstStyle/>
+          <a:p>
+            <a:pPr algn="l">
+              <a:defRPr sz="1200" b="1">
+                <a:solidFill>
+                  <a:srgbClr val="0F172A"/>
+                </a:solidFill>
+                <a:latin typeface="Microsoft YaHei"/>
+              </a:defRPr>
+            </a:pPr>
+            <a:r>
+              <a:rPr sz="1200" b="1">
+                <a:solidFill>
+                  <a:srgbClr val="0F172A"/>
+                </a:solidFill>
+                <a:latin typeface="Microsoft YaHei"/>
+              </a:rPr>
+              <a:t>答法：可以把“LLM 规则蒸馏 + 置信度回退”理解为我们方法的工程化外壳。论文主结果为了避免 target-year leakage，使用离线 batch 先验和固定 adapter；如果未来做线上系统，可以在低置信 cohort 上再调用 LLM，而不是改变本文主实验口径。</a:t>
             </a:r>
           </a:p>
         </p:txBody>
